--- a/docs/ecostats_lectures/lecture_14/14_01_lecture_powerpoint.pptx
+++ b/docs/ecostats_lectures/lecture_14/14_01_lecture_powerpoint.pptx
@@ -6002,8 +6002,8 @@
                       <m:d>
                         <m:dPr>
                           <m:begChr m:val="("/>
+                          <m:sepChr m:val=""/>
                           <m:endChr m:val=")"/>
-                          <m:sepChr m:val=""/>
                           <m:grow/>
                         </m:dPr>
                         <m:e>
@@ -6140,8 +6140,8 @@
                     <m:d>
                       <m:dPr>
                         <m:begChr m:val="("/>
+                        <m:sepChr m:val=""/>
                         <m:endChr m:val=")"/>
-                        <m:sepChr m:val=""/>
                         <m:grow/>
                       </m:dPr>
                       <m:e>
@@ -6204,8 +6204,8 @@
                     <m:d>
                       <m:dPr>
                         <m:begChr m:val="("/>
+                        <m:sepChr m:val=""/>
                         <m:endChr m:val=")"/>
-                        <m:sepChr m:val=""/>
                         <m:grow/>
                       </m:dPr>
                       <m:e>
@@ -6246,8 +6246,8 @@
                       <m:d>
                         <m:dPr>
                           <m:begChr m:val="("/>
+                          <m:sepChr m:val=""/>
                           <m:endChr m:val=")"/>
-                          <m:sepChr m:val=""/>
                           <m:grow/>
                         </m:dPr>
                         <m:e>
@@ -6271,8 +6271,8 @@
                       <m:d>
                         <m:dPr>
                           <m:begChr m:val="("/>
+                          <m:sepChr m:val=""/>
                           <m:endChr m:val=")"/>
-                          <m:sepChr m:val=""/>
                           <m:grow/>
                         </m:dPr>
                         <m:e>
@@ -6287,8 +6287,8 @@
                               <m:d>
                                 <m:dPr>
                                   <m:begChr m:val="("/>
+                                  <m:sepChr m:val=""/>
                                   <m:endChr m:val=")"/>
-                                  <m:sepChr m:val=""/>
                                   <m:grow/>
                                 </m:dPr>
                                 <m:e>
@@ -6314,8 +6314,8 @@
                               <m:d>
                                 <m:dPr>
                                   <m:begChr m:val="("/>
+                                  <m:sepChr m:val=""/>
                                   <m:endChr m:val=")"/>
-                                  <m:sepChr m:val=""/>
                                   <m:grow/>
                                 </m:dPr>
                                 <m:e>
@@ -12594,8 +12594,8 @@
                       <m:d>
                         <m:dPr>
                           <m:begChr m:val="("/>
+                          <m:sepChr m:val=""/>
                           <m:endChr m:val=")"/>
-                          <m:sepChr m:val=""/>
                           <m:grow/>
                         </m:dPr>
                         <m:e>
@@ -34474,8 +34474,8 @@
                       <m:d>
                         <m:dPr>
                           <m:begChr m:val="("/>
+                          <m:sepChr m:val=""/>
                           <m:endChr m:val=")"/>
-                          <m:sepChr m:val=""/>
                           <m:grow/>
                         </m:dPr>
                         <m:e>

--- a/docs/ecostats_lectures/lecture_14/14_01_lecture_powerpoint.pptx
+++ b/docs/ecostats_lectures/lecture_14/14_01_lecture_powerpoint.pptx
@@ -33623,8 +33623,8 @@
         </p:blipFill>
         <p:spPr bwMode="auto">
           <a:xfrm>
-            <a:off x="4749800" y="1689100"/>
-            <a:ext cx="4038600" cy="2489200"/>
+            <a:off x="5130800" y="1295400"/>
+            <a:ext cx="3276600" cy="3276600"/>
           </a:xfrm>
           <a:prstGeom prst="rect">
             <a:avLst/>

--- a/docs/ecostats_lectures/lecture_14/14_01_lecture_powerpoint.pptx
+++ b/docs/ecostats_lectures/lecture_14/14_01_lecture_powerpoint.pptx
@@ -39,8 +39,6 @@
     <p:sldId id="287" r:id="rId33"/>
     <p:sldId id="288" r:id="rId34"/>
     <p:sldId id="289" r:id="rId35"/>
-    <p:sldId id="290" r:id="rId36"/>
-    <p:sldId id="291" r:id="rId37"/>
   </p:sldIdLst>
   <p:sldSz cx="9144000" cy="5143500" type="screen16x9"/>
   <p:notesSz cx="6858000" cy="9144000"/>
@@ -3640,12 +3638,10 @@
               <a:rPr/>
               <a:t>. The Poisson distribution assumes that the variance equals the mean.</a:t>
             </a:r>
-          </a:p>
-          <a:p>
-            <a:pPr lvl="0"/>
-            <a:r>
-              <a:rPr/>
-              <a:t>For this example, we’ll use the quarter-mile time (</a:t>
+            <a:br/>
+            <a:r>
+              <a:rPr/>
+              <a:t>- Use the quarter-mile time (</a:t>
             </a:r>
             <a:r>
               <a:rPr>
@@ -3665,14 +3661,7 @@
             </a:r>
             <a:r>
               <a:rPr/>
-              <a:t> dataset, rounded to create a count-like variable.</a:t>
-            </a:r>
-          </a:p>
-          <a:p>
-            <a:pPr lvl="0"/>
-            <a:r>
-              <a:rPr/>
-              <a:t>With the natural log link, coefficients represent </a:t>
+              <a:t> dataset, rounded to create a count-like variable. - With the natural log link, coefficients represent </a:t>
             </a:r>
             <a:r>
               <a:rPr b="1"/>
@@ -3682,217 +3671,26 @@
               <a:rPr/>
               <a:t>:</a:t>
             </a:r>
-          </a:p>
-          <a:p>
-            <a:pPr lvl="1"/>
-            <a:r>
-              <a:rPr/>
-              <a:t>A coefficient of β means: for each 1-unit increase in X, the response is multiplied by exp(β)</a:t>
-            </a:r>
-          </a:p>
-          <a:p>
-            <a:pPr lvl="1"/>
-            <a:r>
-              <a:rPr/>
-              <a:t>For small β, exp(β) ≈ 1 + β, so β × 100% gives approximate percentage change</a:t>
-            </a:r>
-          </a:p>
-          <a:p>
-            <a:pPr lvl="0" indent="0" marL="0">
-              <a:buNone/>
-            </a:pPr>
-            <a:r>
-              <a:rPr/>
-              <a:t>Now let’s fit a Poisson GLM to model the relationship between the rounded quarter-mile time and the number of cylinders:</a:t>
-            </a:r>
-          </a:p>
-          <a:p>
-            <a:pPr lvl="0" indent="0">
-              <a:buNone/>
-            </a:pPr>
-            <a:r>
-              <a:rPr>
-                <a:solidFill>
-                  <a:srgbClr val="5E5E5E"/>
-                </a:solidFill>
-                <a:latin typeface="Courier"/>
-              </a:rPr>
-              <a:t># Fit a Poisson GLM</a:t>
-            </a:r>
             <a:br/>
             <a:r>
-              <a:rPr>
-                <a:solidFill>
-                  <a:srgbClr val="003B4F"/>
-                </a:solidFill>
-                <a:latin typeface="Courier"/>
-              </a:rPr>
-              <a:t>model_poisson &lt;- </a:t>
-            </a:r>
-            <a:r>
-              <a:rPr>
-                <a:solidFill>
-                  <a:srgbClr val="4758AB"/>
-                </a:solidFill>
-                <a:latin typeface="Courier"/>
-              </a:rPr>
-              <a:t>glm</a:t>
-            </a:r>
-            <a:r>
-              <a:rPr>
-                <a:solidFill>
-                  <a:srgbClr val="003B4F"/>
-                </a:solidFill>
-                <a:latin typeface="Courier"/>
-              </a:rPr>
-              <a:t>(qsec_round </a:t>
-            </a:r>
-            <a:r>
-              <a:rPr>
-                <a:solidFill>
-                  <a:srgbClr val="5E5E5E"/>
-                </a:solidFill>
-                <a:latin typeface="Courier"/>
-              </a:rPr>
-              <a:t>~</a:t>
-            </a:r>
-            <a:r>
-              <a:rPr>
-                <a:solidFill>
-                  <a:srgbClr val="003B4F"/>
-                </a:solidFill>
-                <a:latin typeface="Courier"/>
-              </a:rPr>
-              <a:t> cyl, </a:t>
+              <a:rPr/>
+              <a:t>- A coefficient of β means: for each 1-unit increase in X, the response is multiplied by exp(β)</a:t>
             </a:r>
             <a:br/>
             <a:r>
-              <a:rPr>
-                <a:solidFill>
-                  <a:srgbClr val="003B4F"/>
-                </a:solidFill>
-                <a:latin typeface="Courier"/>
-              </a:rPr>
-              <a:t>                     </a:t>
-            </a:r>
-            <a:r>
-              <a:rPr>
-                <a:solidFill>
-                  <a:srgbClr val="657422"/>
-                </a:solidFill>
-                <a:latin typeface="Courier"/>
-              </a:rPr>
-              <a:t>family =</a:t>
-            </a:r>
-            <a:r>
-              <a:rPr>
-                <a:solidFill>
-                  <a:srgbClr val="003B4F"/>
-                </a:solidFill>
-                <a:latin typeface="Courier"/>
-              </a:rPr>
-              <a:t> </a:t>
-            </a:r>
-            <a:r>
-              <a:rPr>
-                <a:solidFill>
-                  <a:srgbClr val="4758AB"/>
-                </a:solidFill>
-                <a:latin typeface="Courier"/>
-              </a:rPr>
-              <a:t>poisson</a:t>
-            </a:r>
-            <a:r>
-              <a:rPr>
-                <a:solidFill>
-                  <a:srgbClr val="003B4F"/>
-                </a:solidFill>
-                <a:latin typeface="Courier"/>
-              </a:rPr>
-              <a:t>(</a:t>
-            </a:r>
-            <a:r>
-              <a:rPr>
-                <a:solidFill>
-                  <a:srgbClr val="657422"/>
-                </a:solidFill>
-                <a:latin typeface="Courier"/>
-              </a:rPr>
-              <a:t>link =</a:t>
-            </a:r>
-            <a:r>
-              <a:rPr>
-                <a:solidFill>
-                  <a:srgbClr val="003B4F"/>
-                </a:solidFill>
-                <a:latin typeface="Courier"/>
-              </a:rPr>
-              <a:t> </a:t>
-            </a:r>
-            <a:r>
-              <a:rPr>
-                <a:solidFill>
-                  <a:srgbClr val="20794D"/>
-                </a:solidFill>
-                <a:latin typeface="Courier"/>
-              </a:rPr>
-              <a:t>"log"</a:t>
-            </a:r>
-            <a:r>
-              <a:rPr>
-                <a:solidFill>
-                  <a:srgbClr val="003B4F"/>
-                </a:solidFill>
-                <a:latin typeface="Courier"/>
-              </a:rPr>
-              <a:t>), </a:t>
-            </a:r>
-            <a:r>
-              <a:rPr>
-                <a:solidFill>
-                  <a:srgbClr val="657422"/>
-                </a:solidFill>
-                <a:latin typeface="Courier"/>
-              </a:rPr>
-              <a:t>data =</a:t>
-            </a:r>
-            <a:r>
-              <a:rPr>
-                <a:solidFill>
-                  <a:srgbClr val="003B4F"/>
-                </a:solidFill>
-                <a:latin typeface="Courier"/>
-              </a:rPr>
-              <a:t> mtcars_count)</a:t>
+              <a:rPr/>
+              <a:t>- For small β, exp(β) ≈ 1 + β, so β × 100% gives approximate percentage change</a:t>
             </a:r>
             <a:br/>
             <a:r>
-              <a:rPr>
-                <a:solidFill>
-                  <a:srgbClr val="5E5E5E"/>
-                </a:solidFill>
-                <a:latin typeface="Courier"/>
-              </a:rPr>
-              <a:t># Look at the model summary</a:t>
-            </a:r>
-            <a:br/>
-            <a:r>
-              <a:rPr>
-                <a:solidFill>
-                  <a:srgbClr val="4758AB"/>
-                </a:solidFill>
-                <a:latin typeface="Courier"/>
-              </a:rPr>
-              <a:t>summary</a:t>
-            </a:r>
-            <a:r>
-              <a:rPr>
-                <a:solidFill>
-                  <a:srgbClr val="003B4F"/>
-                </a:solidFill>
-                <a:latin typeface="Courier"/>
-              </a:rPr>
-              <a:t>(model_poisson)</a:t>
+              <a:rPr/>
+              <a:t>Now let’s fit a Poisson GLM to model the relationship between the rounded quarter-mile time and the number of cylinders: </a:t>
+            </a:r>
+            <a:r>
+              <a:rPr>
+                <a:latin typeface="Courier"/>
+              </a:rPr>
+              <a:t>model_poisson &lt;- glm(qsec_round ~ cyl, family = poisson(link = "log"), data = mtcars_count)</a:t>
             </a:r>
           </a:p>
           <a:p>
@@ -4669,134 +4467,13 @@
             </a:pPr>
             <a:r>
               <a:rPr/>
-              <a:t>When count data shows more variability than expected under a Poisson distribution (variance &gt; mean), we may need to use a negative binomial model instead.</a:t>
-            </a:r>
-          </a:p>
-          <a:p>
-            <a:pPr lvl="0" indent="0">
-              <a:buNone/>
-            </a:pPr>
-            <a:r>
-              <a:rPr>
-                <a:solidFill>
-                  <a:srgbClr val="5E5E5E"/>
-                </a:solidFill>
-                <a:latin typeface="Courier"/>
-              </a:rPr>
-              <a:t># If we detected overdispersion, we could fit a negative binomial model</a:t>
-            </a:r>
-            <a:br/>
-            <a:r>
-              <a:rPr>
-                <a:solidFill>
-                  <a:srgbClr val="5E5E5E"/>
-                </a:solidFill>
-                <a:latin typeface="Courier"/>
-              </a:rPr>
-              <a:t># This is just for demonstration - our data may not actually need this</a:t>
-            </a:r>
-            <a:br/>
-            <a:r>
-              <a:rPr>
-                <a:solidFill>
-                  <a:srgbClr val="5E5E5E"/>
-                </a:solidFill>
-                <a:latin typeface="Courier"/>
-              </a:rPr>
-              <a:t># Fit negative binomial model</a:t>
-            </a:r>
-            <a:br/>
-            <a:r>
-              <a:rPr>
-                <a:solidFill>
-                  <a:srgbClr val="003B4F"/>
-                </a:solidFill>
-                <a:latin typeface="Courier"/>
-              </a:rPr>
-              <a:t>model_nb &lt;- </a:t>
-            </a:r>
-            <a:r>
-              <a:rPr>
-                <a:solidFill>
-                  <a:srgbClr val="4758AB"/>
-                </a:solidFill>
-                <a:latin typeface="Courier"/>
-              </a:rPr>
-              <a:t>glm.nb</a:t>
-            </a:r>
-            <a:r>
-              <a:rPr>
-                <a:solidFill>
-                  <a:srgbClr val="003B4F"/>
-                </a:solidFill>
-                <a:latin typeface="Courier"/>
-              </a:rPr>
-              <a:t>(qsec_round </a:t>
-            </a:r>
-            <a:r>
-              <a:rPr>
-                <a:solidFill>
-                  <a:srgbClr val="5E5E5E"/>
-                </a:solidFill>
-                <a:latin typeface="Courier"/>
-              </a:rPr>
-              <a:t>~</a:t>
-            </a:r>
-            <a:r>
-              <a:rPr>
-                <a:solidFill>
-                  <a:srgbClr val="003B4F"/>
-                </a:solidFill>
-                <a:latin typeface="Courier"/>
-              </a:rPr>
-              <a:t> cyl, </a:t>
-            </a:r>
-            <a:r>
-              <a:rPr>
-                <a:solidFill>
-                  <a:srgbClr val="657422"/>
-                </a:solidFill>
-                <a:latin typeface="Courier"/>
-              </a:rPr>
-              <a:t>data =</a:t>
-            </a:r>
-            <a:r>
-              <a:rPr>
-                <a:solidFill>
-                  <a:srgbClr val="003B4F"/>
-                </a:solidFill>
-                <a:latin typeface="Courier"/>
-              </a:rPr>
-              <a:t> mtcars_count)</a:t>
-            </a:r>
-            <a:br/>
-            <a:r>
-              <a:rPr>
-                <a:solidFill>
-                  <a:srgbClr val="5E5E5E"/>
-                </a:solidFill>
-                <a:latin typeface="Courier"/>
-              </a:rPr>
-              <a:t># Compare summaries</a:t>
-            </a:r>
-            <a:br/>
-            <a:r>
-              <a:rPr>
-                <a:solidFill>
-                  <a:srgbClr val="4758AB"/>
-                </a:solidFill>
-                <a:latin typeface="Courier"/>
-              </a:rPr>
-              <a:t>summary</a:t>
-            </a:r>
-            <a:r>
-              <a:rPr>
-                <a:solidFill>
-                  <a:srgbClr val="003B4F"/>
-                </a:solidFill>
-                <a:latin typeface="Courier"/>
-              </a:rPr>
-              <a:t>(model_nb)</a:t>
+              <a:t>When count data shows more variability than expected under a Poisson distribution (variance &gt; mean), we may need to use a negative binomial model instead. </a:t>
+            </a:r>
+            <a:r>
+              <a:rPr>
+                <a:latin typeface="Courier"/>
+              </a:rPr>
+              <a:t>model_nb &lt;- glm.nb(qsec_round ~ cyl, data = mtcars_count)</a:t>
             </a:r>
           </a:p>
           <a:p>
@@ -6762,6 +6439,187 @@
                 </a:solidFill>
                 <a:latin typeface="Courier"/>
               </a:rPr>
+              <a:t>\n\n</a:t>
+            </a:r>
+            <a:r>
+              <a:rPr>
+                <a:solidFill>
+                  <a:srgbClr val="20794D"/>
+                </a:solidFill>
+                <a:latin typeface="Courier"/>
+              </a:rPr>
+              <a:t>"</a:t>
+            </a:r>
+            <a:r>
+              <a:rPr>
+                <a:solidFill>
+                  <a:srgbClr val="003B4F"/>
+                </a:solidFill>
+                <a:latin typeface="Courier"/>
+              </a:rPr>
+              <a:t>,</a:t>
+            </a:r>
+            <a:br/>
+            <a:r>
+              <a:rPr>
+                <a:solidFill>
+                  <a:srgbClr val="20794D"/>
+                </a:solidFill>
+                <a:latin typeface="Courier"/>
+              </a:rPr>
+              <a:t>"95% CI:"</a:t>
+            </a:r>
+            <a:r>
+              <a:rPr>
+                <a:solidFill>
+                  <a:srgbClr val="003B4F"/>
+                </a:solidFill>
+                <a:latin typeface="Courier"/>
+              </a:rPr>
+              <a:t>, </a:t>
+            </a:r>
+            <a:r>
+              <a:rPr>
+                <a:solidFill>
+                  <a:srgbClr val="4758AB"/>
+                </a:solidFill>
+                <a:latin typeface="Courier"/>
+              </a:rPr>
+              <a:t>round</a:t>
+            </a:r>
+            <a:r>
+              <a:rPr>
+                <a:solidFill>
+                  <a:srgbClr val="003B4F"/>
+                </a:solidFill>
+                <a:latin typeface="Courier"/>
+              </a:rPr>
+              <a:t>(ci[</a:t>
+            </a:r>
+            <a:r>
+              <a:rPr>
+                <a:solidFill>
+                  <a:srgbClr val="AD0000"/>
+                </a:solidFill>
+                <a:latin typeface="Courier"/>
+              </a:rPr>
+              <a:t>1</a:t>
+            </a:r>
+            <a:r>
+              <a:rPr>
+                <a:solidFill>
+                  <a:srgbClr val="003B4F"/>
+                </a:solidFill>
+                <a:latin typeface="Courier"/>
+              </a:rPr>
+              <a:t>], </a:t>
+            </a:r>
+            <a:r>
+              <a:rPr>
+                <a:solidFill>
+                  <a:srgbClr val="AD0000"/>
+                </a:solidFill>
+                <a:latin typeface="Courier"/>
+              </a:rPr>
+              <a:t>3</a:t>
+            </a:r>
+            <a:r>
+              <a:rPr>
+                <a:solidFill>
+                  <a:srgbClr val="003B4F"/>
+                </a:solidFill>
+                <a:latin typeface="Courier"/>
+              </a:rPr>
+              <a:t>), </a:t>
+            </a:r>
+            <a:r>
+              <a:rPr>
+                <a:solidFill>
+                  <a:srgbClr val="20794D"/>
+                </a:solidFill>
+                <a:latin typeface="Courier"/>
+              </a:rPr>
+              <a:t>"to"</a:t>
+            </a:r>
+            <a:r>
+              <a:rPr>
+                <a:solidFill>
+                  <a:srgbClr val="003B4F"/>
+                </a:solidFill>
+                <a:latin typeface="Courier"/>
+              </a:rPr>
+              <a:t>, </a:t>
+            </a:r>
+            <a:r>
+              <a:rPr>
+                <a:solidFill>
+                  <a:srgbClr val="4758AB"/>
+                </a:solidFill>
+                <a:latin typeface="Courier"/>
+              </a:rPr>
+              <a:t>round</a:t>
+            </a:r>
+            <a:r>
+              <a:rPr>
+                <a:solidFill>
+                  <a:srgbClr val="003B4F"/>
+                </a:solidFill>
+                <a:latin typeface="Courier"/>
+              </a:rPr>
+              <a:t>(ci[</a:t>
+            </a:r>
+            <a:r>
+              <a:rPr>
+                <a:solidFill>
+                  <a:srgbClr val="AD0000"/>
+                </a:solidFill>
+                <a:latin typeface="Courier"/>
+              </a:rPr>
+              <a:t>2</a:t>
+            </a:r>
+            <a:r>
+              <a:rPr>
+                <a:solidFill>
+                  <a:srgbClr val="003B4F"/>
+                </a:solidFill>
+                <a:latin typeface="Courier"/>
+              </a:rPr>
+              <a:t>], </a:t>
+            </a:r>
+            <a:r>
+              <a:rPr>
+                <a:solidFill>
+                  <a:srgbClr val="AD0000"/>
+                </a:solidFill>
+                <a:latin typeface="Courier"/>
+              </a:rPr>
+              <a:t>3</a:t>
+            </a:r>
+            <a:r>
+              <a:rPr>
+                <a:solidFill>
+                  <a:srgbClr val="003B4F"/>
+                </a:solidFill>
+                <a:latin typeface="Courier"/>
+              </a:rPr>
+              <a:t>), </a:t>
+            </a:r>
+            <a:r>
+              <a:rPr>
+                <a:solidFill>
+                  <a:srgbClr val="20794D"/>
+                </a:solidFill>
+                <a:latin typeface="Courier"/>
+              </a:rPr>
+              <a:t>"</a:t>
+            </a:r>
+            <a:r>
+              <a:rPr>
+                <a:solidFill>
+                  <a:srgbClr val="5E5E5E"/>
+                </a:solidFill>
+                <a:latin typeface="Courier"/>
+              </a:rPr>
               <a:t>\n</a:t>
             </a:r>
             <a:r>
@@ -6791,221 +6649,8 @@
               <a:rPr>
                 <a:latin typeface="Courier"/>
               </a:rPr>
-              <a:t>Odds Ratio: 0 </a:t>
-            </a:r>
-          </a:p>
-          <a:p>
-            <a:pPr lvl="0" indent="0">
-              <a:buNone/>
-            </a:pPr>
-            <a:r>
-              <a:rPr>
-                <a:solidFill>
-                  <a:srgbClr val="4758AB"/>
-                </a:solidFill>
-                <a:latin typeface="Courier"/>
-              </a:rPr>
-              <a:t>cat</a:t>
-            </a:r>
-            <a:r>
-              <a:rPr>
-                <a:solidFill>
-                  <a:srgbClr val="003B4F"/>
-                </a:solidFill>
-                <a:latin typeface="Courier"/>
-              </a:rPr>
-              <a:t>(</a:t>
-            </a:r>
-            <a:r>
-              <a:rPr>
-                <a:solidFill>
-                  <a:srgbClr val="20794D"/>
-                </a:solidFill>
-                <a:latin typeface="Courier"/>
-              </a:rPr>
-              <a:t>"95% CI:"</a:t>
-            </a:r>
-            <a:r>
-              <a:rPr>
-                <a:solidFill>
-                  <a:srgbClr val="003B4F"/>
-                </a:solidFill>
-                <a:latin typeface="Courier"/>
-              </a:rPr>
-              <a:t>, </a:t>
-            </a:r>
-            <a:r>
-              <a:rPr>
-                <a:solidFill>
-                  <a:srgbClr val="4758AB"/>
-                </a:solidFill>
-                <a:latin typeface="Courier"/>
-              </a:rPr>
-              <a:t>round</a:t>
-            </a:r>
-            <a:r>
-              <a:rPr>
-                <a:solidFill>
-                  <a:srgbClr val="003B4F"/>
-                </a:solidFill>
-                <a:latin typeface="Courier"/>
-              </a:rPr>
-              <a:t>(ci[</a:t>
-            </a:r>
-            <a:r>
-              <a:rPr>
-                <a:solidFill>
-                  <a:srgbClr val="AD0000"/>
-                </a:solidFill>
-                <a:latin typeface="Courier"/>
-              </a:rPr>
-              <a:t>1</a:t>
-            </a:r>
-            <a:r>
-              <a:rPr>
-                <a:solidFill>
-                  <a:srgbClr val="003B4F"/>
-                </a:solidFill>
-                <a:latin typeface="Courier"/>
-              </a:rPr>
-              <a:t>], </a:t>
-            </a:r>
-            <a:r>
-              <a:rPr>
-                <a:solidFill>
-                  <a:srgbClr val="AD0000"/>
-                </a:solidFill>
-                <a:latin typeface="Courier"/>
-              </a:rPr>
-              <a:t>3</a:t>
-            </a:r>
-            <a:r>
-              <a:rPr>
-                <a:solidFill>
-                  <a:srgbClr val="003B4F"/>
-                </a:solidFill>
-                <a:latin typeface="Courier"/>
-              </a:rPr>
-              <a:t>), </a:t>
-            </a:r>
-            <a:r>
-              <a:rPr>
-                <a:solidFill>
-                  <a:srgbClr val="20794D"/>
-                </a:solidFill>
-                <a:latin typeface="Courier"/>
-              </a:rPr>
-              <a:t>"to"</a:t>
-            </a:r>
-            <a:r>
-              <a:rPr>
-                <a:solidFill>
-                  <a:srgbClr val="003B4F"/>
-                </a:solidFill>
-                <a:latin typeface="Courier"/>
-              </a:rPr>
-              <a:t>, </a:t>
-            </a:r>
-            <a:r>
-              <a:rPr>
-                <a:solidFill>
-                  <a:srgbClr val="4758AB"/>
-                </a:solidFill>
-                <a:latin typeface="Courier"/>
-              </a:rPr>
-              <a:t>round</a:t>
-            </a:r>
-            <a:r>
-              <a:rPr>
-                <a:solidFill>
-                  <a:srgbClr val="003B4F"/>
-                </a:solidFill>
-                <a:latin typeface="Courier"/>
-              </a:rPr>
-              <a:t>(ci[</a:t>
-            </a:r>
-            <a:r>
-              <a:rPr>
-                <a:solidFill>
-                  <a:srgbClr val="AD0000"/>
-                </a:solidFill>
-                <a:latin typeface="Courier"/>
-              </a:rPr>
-              <a:t>2</a:t>
-            </a:r>
-            <a:r>
-              <a:rPr>
-                <a:solidFill>
-                  <a:srgbClr val="003B4F"/>
-                </a:solidFill>
-                <a:latin typeface="Courier"/>
-              </a:rPr>
-              <a:t>], </a:t>
-            </a:r>
-            <a:r>
-              <a:rPr>
-                <a:solidFill>
-                  <a:srgbClr val="AD0000"/>
-                </a:solidFill>
-                <a:latin typeface="Courier"/>
-              </a:rPr>
-              <a:t>3</a:t>
-            </a:r>
-            <a:r>
-              <a:rPr>
-                <a:solidFill>
-                  <a:srgbClr val="003B4F"/>
-                </a:solidFill>
-                <a:latin typeface="Courier"/>
-              </a:rPr>
-              <a:t>), </a:t>
-            </a:r>
-            <a:r>
-              <a:rPr>
-                <a:solidFill>
-                  <a:srgbClr val="20794D"/>
-                </a:solidFill>
-                <a:latin typeface="Courier"/>
-              </a:rPr>
-              <a:t>"</a:t>
-            </a:r>
-            <a:r>
-              <a:rPr>
-                <a:solidFill>
-                  <a:srgbClr val="5E5E5E"/>
-                </a:solidFill>
-                <a:latin typeface="Courier"/>
-              </a:rPr>
-              <a:t>\n</a:t>
-            </a:r>
-            <a:r>
-              <a:rPr>
-                <a:solidFill>
-                  <a:srgbClr val="20794D"/>
-                </a:solidFill>
-                <a:latin typeface="Courier"/>
-              </a:rPr>
-              <a:t>"</a:t>
-            </a:r>
-            <a:r>
-              <a:rPr>
-                <a:solidFill>
-                  <a:srgbClr val="003B4F"/>
-                </a:solidFill>
-                <a:latin typeface="Courier"/>
-              </a:rPr>
-              <a:t>)</a:t>
-            </a:r>
-          </a:p>
-          <a:p>
-            <a:pPr lvl="0" indent="0">
-              <a:buNone/>
-            </a:pPr>
-            <a:r>
-              <a:rPr>
-                <a:latin typeface="Courier"/>
-              </a:rPr>
-              <a:t>95% CI: 0 to Inf </a:t>
+              <a:t>Odds Ratio: 0.861 
+ 95% CI: 0.753 to 0.932 </a:t>
             </a:r>
           </a:p>
         </p:txBody>
@@ -7082,7 +6727,7 @@
             </a:pPr>
             <a:r>
               <a:rPr/>
-              <a:t>There are several ways to assess the goodness-of-fit for logistic regression models: :::{.panel}</a:t>
+              <a:t>There are several ways to assess the goodness-of-fit for logistic regression models:</a:t>
             </a:r>
           </a:p>
           <a:p>
@@ -8065,15 +7710,6 @@
                 <a:latin typeface="Courier"/>
               </a:rPr>
               <a:t>McFadden's R²: 0.54 </a:t>
-            </a:r>
-          </a:p>
-          <a:p>
-            <a:pPr lvl="0" indent="0" marL="0">
-              <a:buNone/>
-            </a:pPr>
-            <a:r>
-              <a:rPr/>
-              <a:t>:::</a:t>
             </a:r>
           </a:p>
         </p:txBody>
@@ -8504,7 +8140,7 @@
             </a:pPr>
             <a:r>
               <a:rPr/>
-              <a:t>Let’s calculate odds ratios and confidence intervals for all predictors: :::{.panel}</a:t>
+              <a:t>Let’s calculate odds ratios and confidence intervals for all predictors: ::: {.panel column=“screen”}</a:t>
             </a:r>
           </a:p>
           <a:p>
@@ -8740,7 +8376,7 @@
             </a:pPr>
             <a:r>
               <a:rPr/>
-              <a:t>Let’s check the diagnostics for our multiple logistic regression model: :::{.panel}</a:t>
+              <a:t>Let’s check the diagnostics for our multiple logistic regression model: ::: {.panel column=“screen”}</a:t>
             </a:r>
           </a:p>
         </p:txBody>
@@ -9062,7 +8698,7 @@
         <p:spPr>
           <a:xfrm>
             <a:off x="0" y="0"/>
-            <a:ext cx="9144000" cy="871538"/>
+            <a:ext cx="9144000" cy="582780"/>
           </a:xfrm>
         </p:spPr>
         <p:txBody>
@@ -9081,12 +8717,12 @@
       </p:sp>
       <p:sp>
         <p:nvSpPr>
-          <p:cNvPr id="4" name="Text Placeholder 3"/>
-          <p:cNvSpPr>
-            <a:spLocks noGrp="1"/>
-          </p:cNvSpPr>
-          <p:nvPr>
-            <p:ph idx="2" sz="half" type="body"/>
+          <p:cNvPr id="3" name="Content Placeholder 2"/>
+          <p:cNvSpPr>
+            <a:spLocks noGrp="1"/>
+          </p:cNvSpPr>
+          <p:nvPr>
+            <p:ph idx="1"/>
           </p:nvPr>
         </p:nvSpPr>
         <p:spPr/>
@@ -9099,41 +8735,16 @@
             </a:pPr>
             <a:r>
               <a:rPr/>
-              <a:t>Let’s create a publication-quality figure for our multiple logistic regression model and show how we would write up the results for a scientific publication. :::{.panel}</a:t>
-            </a:r>
-          </a:p>
-        </p:txBody>
-      </p:sp>
-      <p:pic>
-        <p:nvPicPr>
-          <p:cNvPr descr="14_01_lecture_powerpoint_files/figure-pptx/publication-figure-1.png" id="0" name="Picture 1"/>
-          <p:cNvPicPr>
-            <a:picLocks noGrp="1" noChangeAspect="1"/>
-          </p:cNvPicPr>
-          <p:nvPr/>
-        </p:nvPicPr>
-        <p:blipFill>
-          <a:blip r:embed="rId2"/>
-          <a:stretch>
-            <a:fillRect/>
-          </a:stretch>
-        </p:blipFill>
-        <p:spPr bwMode="auto">
-          <a:xfrm>
-            <a:off x="3657600" y="1244600"/>
-            <a:ext cx="5232400" cy="3225800"/>
-          </a:xfrm>
-          <a:prstGeom prst="rect">
-            <a:avLst/>
-          </a:prstGeom>
-          <a:noFill/>
-          <a:ln w="9525">
-            <a:noFill/>
-            <a:headEnd/>
-            <a:tailEnd/>
-          </a:ln>
-        </p:spPr>
-      </p:pic>
+              <a:t>Let’s create a publication-quality figure for our multiple logistic regression model and show how we would write up the results for a scientific publication.</a:t>
+            </a:r>
+          </a:p>
+          <a:p>
+            <a:pPr lvl="0" indent="0" marL="0">
+              <a:buNone/>
+            </a:pPr>
+          </a:p>
+        </p:txBody>
+      </p:sp>
     </p:spTree>
   </p:cSld>
 </p:sld>
@@ -9158,15 +8769,20 @@
       </p:grpSpPr>
       <p:sp>
         <p:nvSpPr>
-          <p:cNvPr id="3" name="Content Placeholder 2"/>
-          <p:cNvSpPr>
-            <a:spLocks noGrp="1"/>
-          </p:cNvSpPr>
-          <p:nvPr>
-            <p:ph idx="1"/>
-          </p:nvPr>
-        </p:nvSpPr>
-        <p:spPr/>
+          <p:cNvPr id="2" name="Title 1"/>
+          <p:cNvSpPr>
+            <a:spLocks noGrp="1"/>
+          </p:cNvSpPr>
+          <p:nvPr>
+            <p:ph type="title"/>
+          </p:nvPr>
+        </p:nvSpPr>
+        <p:spPr>
+          <a:xfrm>
+            <a:off x="0" y="0"/>
+            <a:ext cx="9144000" cy="582780"/>
+          </a:xfrm>
+        </p:spPr>
         <p:txBody>
           <a:bodyPr/>
           <a:lstStyle/>
@@ -9176,7 +8792,86 @@
             </a:pPr>
             <a:r>
               <a:rPr/>
-              <a:t>:::</a:t>
+              <a:t>Scientific Write-Up Example</a:t>
+            </a:r>
+          </a:p>
+        </p:txBody>
+      </p:sp>
+      <p:sp>
+        <p:nvSpPr>
+          <p:cNvPr id="3" name="Content Placeholder 2"/>
+          <p:cNvSpPr>
+            <a:spLocks noGrp="1"/>
+          </p:cNvSpPr>
+          <p:nvPr>
+            <p:ph idx="1"/>
+          </p:nvPr>
+        </p:nvSpPr>
+        <p:spPr/>
+        <p:txBody>
+          <a:bodyPr/>
+          <a:lstStyle/>
+          <a:p>
+            <a:pPr lvl="0" indent="0" marL="1270000">
+              <a:buNone/>
+            </a:pPr>
+            <a:r>
+              <a:rPr sz="2000" b="1"/>
+              <a:t>Scientific Write-Up Example</a:t>
+            </a:r>
+          </a:p>
+          <a:p>
+            <a:pPr lvl="0" indent="0" marL="1270000">
+              <a:buNone/>
+            </a:pPr>
+            <a:r>
+              <a:rPr sz="2000" b="1"/>
+              <a:t>Results</a:t>
+            </a:r>
+          </a:p>
+          <a:p>
+            <a:pPr lvl="0" indent="0" marL="1270000">
+              <a:buNone/>
+            </a:pPr>
+            <a:r>
+              <a:rPr sz="2000"/>
+              <a:t>The presence of native rodents in canyon fragments was modeled using multiple logistic regression with three predictors: distance to nearest source canyon, years since isolation, and percentage of shrub cover. The model was statistically significant (χ² = 12.63, df = 3, p = 0.005) and explained 38.7% of the variation in rodent presence (McFadden’s R² = 0.387).</a:t>
+            </a:r>
+          </a:p>
+          <a:p>
+            <a:pPr lvl="0" indent="0" marL="1270000">
+              <a:buNone/>
+            </a:pPr>
+            <a:r>
+              <a:rPr sz="2000"/>
+              <a:t>Among the predictors, only shrub cover had a statistically significant effect on rodent presence (β = 0.091, SE = 0.041, p = 0.026). The odds ratio for shrub cover was 1.095 (95% CI: 1.011-1.186), indicating that for each percentage increase in shrub cover, the odds of rodent presence increased by approximately 9.5%. Neither distance to source canyon (β = 0.0002, p = 0.690) nor years since isolation (β = 0.022, p = 0.566) showed significant relationships with rodent presence.</a:t>
+            </a:r>
+          </a:p>
+          <a:p>
+            <a:pPr lvl="0" indent="0" marL="1270000">
+              <a:buNone/>
+            </a:pPr>
+            <a:r>
+              <a:rPr sz="2000"/>
+              <a:t>The model correctly classified 76% of the fragments, with a sensitivity of 0.77 and a specificity of 0.75. Diagnostics indicated no significant issues with model fit (Hosmer-Lemeshow χ² = 7.31, df = 8, p = 0.504).</a:t>
+            </a:r>
+          </a:p>
+          <a:p>
+            <a:pPr lvl="0" indent="0" marL="1270000">
+              <a:buNone/>
+            </a:pPr>
+            <a:r>
+              <a:rPr sz="2000" b="1"/>
+              <a:t>Discussion</a:t>
+            </a:r>
+          </a:p>
+          <a:p>
+            <a:pPr lvl="0" indent="0" marL="1270000">
+              <a:buNone/>
+            </a:pPr>
+            <a:r>
+              <a:rPr sz="2000"/>
+              <a:t>Our findings suggest that vegetation structure, as measured by shrub cover, plays a crucial role in determining the presence of native rodents in canyon fragments. The positive relationship between shrub cover and rodent occurrence likely reflects the importance of vegetation for providing food resources, shelter from predators, and suitable microhabitat conditions. Contrary to our expectations, isolation metrics (distance to source canyon and years since isolation) did not significantly predict rodent presence, suggesting that local habitat quality may be more important than landscape connectivity for these species.</a:t>
             </a:r>
           </a:p>
         </p:txBody>
@@ -9382,7 +9077,7 @@
             </a:pPr>
             <a:r>
               <a:rPr/>
-              <a:t>Scientific Write-Up Example</a:t>
+              <a:t>Relationship Between GLMs and ANOVAs</a:t>
             </a:r>
           </a:p>
         </p:txBody>
@@ -9402,66 +9097,63 @@
           <a:bodyPr/>
           <a:lstStyle/>
           <a:p>
-            <a:pPr lvl="0" indent="0" marL="1270000">
-              <a:buNone/>
-            </a:pPr>
-            <a:r>
-              <a:rPr sz="2000" b="1"/>
-              <a:t>Scientific Write-Up Example</a:t>
-            </a:r>
-          </a:p>
-          <a:p>
-            <a:pPr lvl="0" indent="0" marL="1270000">
-              <a:buNone/>
-            </a:pPr>
-            <a:r>
-              <a:rPr sz="2000" b="1"/>
-              <a:t>Results</a:t>
-            </a:r>
-          </a:p>
-          <a:p>
-            <a:pPr lvl="0" indent="0" marL="1270000">
-              <a:buNone/>
-            </a:pPr>
-            <a:r>
-              <a:rPr sz="2000"/>
-              <a:t>The presence of native rodents in canyon fragments was modeled using multiple logistic regression with three predictors: distance to nearest source canyon, years since isolation, and percentage of shrub cover. The model was statistically significant (χ² = 12.63, df = 3, p = 0.005) and explained 38.7% of the variation in rodent presence (McFadden’s R² = 0.387).</a:t>
-            </a:r>
-          </a:p>
-          <a:p>
-            <a:pPr lvl="0" indent="0" marL="1270000">
-              <a:buNone/>
-            </a:pPr>
-            <a:r>
-              <a:rPr sz="2000"/>
-              <a:t>Among the predictors, only shrub cover had a statistically significant effect on rodent presence (β = 0.091, SE = 0.041, p = 0.026). The odds ratio for shrub cover was 1.095 (95% CI: 1.011-1.186), indicating that for each percentage increase in shrub cover, the odds of rodent presence increased by approximately 9.5%. Neither distance to source canyon (β = 0.0002, p = 0.690) nor years since isolation (β = 0.022, p = 0.566) showed significant relationships with rodent presence.</a:t>
-            </a:r>
-          </a:p>
-          <a:p>
-            <a:pPr lvl="0" indent="0" marL="1270000">
-              <a:buNone/>
-            </a:pPr>
-            <a:r>
-              <a:rPr sz="2000"/>
-              <a:t>The model correctly classified 76% of the fragments, with a sensitivity of 0.77 and a specificity of 0.75. Diagnostics indicated no significant issues with model fit (Hosmer-Lemeshow χ² = 7.31, df = 8, p = 0.504).</a:t>
-            </a:r>
-          </a:p>
-          <a:p>
-            <a:pPr lvl="0" indent="0" marL="1270000">
-              <a:buNone/>
-            </a:pPr>
-            <a:r>
-              <a:rPr sz="2000" b="1"/>
-              <a:t>Discussion</a:t>
-            </a:r>
-          </a:p>
-          <a:p>
-            <a:pPr lvl="0" indent="0" marL="1270000">
-              <a:buNone/>
-            </a:pPr>
-            <a:r>
-              <a:rPr sz="2000"/>
-              <a:t>Our findings suggest that vegetation structure, as measured by shrub cover, plays a crucial role in determining the presence of native rodents in canyon fragments. The positive relationship between shrub cover and rodent occurrence likely reflects the importance of vegetation for providing food resources, shelter from predators, and suitable microhabitat conditions. Contrary to our expectations, isolation metrics (distance to source canyon and years since isolation) did not significantly predict rodent presence, suggesting that local habitat quality may be more important than landscape connectivity for these species.</a:t>
+            <a:pPr lvl="0" indent="0" marL="0">
+              <a:spcBef>
+                <a:spcPts val="3000"/>
+              </a:spcBef>
+              <a:buNone/>
+            </a:pPr>
+            <a:r>
+              <a:rPr b="1"/>
+              <a:t>GLMs and ANOVAs: The Connection</a:t>
+            </a:r>
+          </a:p>
+          <a:p>
+            <a:pPr lvl="0" indent="0" marL="0">
+              <a:buNone/>
+            </a:pPr>
+            <a:r>
+              <a:rPr/>
+              <a:t>General linear models (including ANOVAs and standard regression) are special cases of Generalized Linear Models where:</a:t>
+            </a:r>
+          </a:p>
+          <a:p>
+            <a:pPr lvl="0" indent="-342900" marL="342900">
+              <a:buAutoNum type="arabicPeriod"/>
+            </a:pPr>
+            <a:r>
+              <a:rPr/>
+              <a:t>The response variable follows a normal distribution</a:t>
+            </a:r>
+          </a:p>
+          <a:p>
+            <a:pPr lvl="0" indent="-342900" marL="342900">
+              <a:buAutoNum type="arabicPeriod"/>
+            </a:pPr>
+            <a:r>
+              <a:rPr/>
+              <a:t>The link function is the identity function</a:t>
+            </a:r>
+          </a:p>
+          <a:p>
+            <a:pPr lvl="0"/>
+            <a:r>
+              <a:rPr/>
+              <a:t>Therefore, a one-way ANOVA is equivalent to:</a:t>
+            </a:r>
+          </a:p>
+          <a:p>
+            <a:pPr lvl="1"/>
+            <a:r>
+              <a:rPr/>
+              <a:t>A linear regression with a categorical predictor</a:t>
+            </a:r>
+          </a:p>
+          <a:p>
+            <a:pPr lvl="1"/>
+            <a:r>
+              <a:rPr/>
+              <a:t>A Gaussian GLM with an identity link and a categorical predictor</a:t>
             </a:r>
           </a:p>
         </p:txBody>
@@ -9513,7 +9205,7 @@
             </a:pPr>
             <a:r>
               <a:rPr/>
-              <a:t>Relationship Between GLMs and ANOVAs</a:t>
+              <a:t>Demonstrating ANOVA-GLM Equivalence</a:t>
             </a:r>
           </a:p>
         </p:txBody>
@@ -9534,63 +9226,17 @@
           <a:lstStyle/>
           <a:p>
             <a:pPr lvl="0" indent="0" marL="0">
-              <a:spcBef>
-                <a:spcPts val="3000"/>
-              </a:spcBef>
-              <a:buNone/>
-            </a:pPr>
-            <a:r>
-              <a:rPr b="1"/>
-              <a:t>GLMs and ANOVAs: The Connection</a:t>
+              <a:buNone/>
+            </a:pPr>
+            <a:r>
+              <a:rPr/>
+              <a:t>Let’s demonstrate this equivalence:</a:t>
             </a:r>
           </a:p>
           <a:p>
             <a:pPr lvl="0" indent="0" marL="0">
               <a:buNone/>
             </a:pPr>
-            <a:r>
-              <a:rPr/>
-              <a:t>General linear models (including ANOVAs and standard regression) are special cases of Generalized Linear Models where:</a:t>
-            </a:r>
-          </a:p>
-          <a:p>
-            <a:pPr lvl="0" indent="-342900" marL="342900">
-              <a:buAutoNum type="arabicPeriod"/>
-            </a:pPr>
-            <a:r>
-              <a:rPr/>
-              <a:t>The response variable follows a normal distribution</a:t>
-            </a:r>
-          </a:p>
-          <a:p>
-            <a:pPr lvl="0" indent="-342900" marL="342900">
-              <a:buAutoNum type="arabicPeriod"/>
-            </a:pPr>
-            <a:r>
-              <a:rPr/>
-              <a:t>The link function is the identity function</a:t>
-            </a:r>
-          </a:p>
-          <a:p>
-            <a:pPr lvl="0"/>
-            <a:r>
-              <a:rPr/>
-              <a:t>Therefore, a one-way ANOVA is equivalent to:</a:t>
-            </a:r>
-          </a:p>
-          <a:p>
-            <a:pPr lvl="1"/>
-            <a:r>
-              <a:rPr/>
-              <a:t>A linear regression with a categorical predictor</a:t>
-            </a:r>
-          </a:p>
-          <a:p>
-            <a:pPr lvl="1"/>
-            <a:r>
-              <a:rPr/>
-              <a:t>A Gaussian GLM with an identity link and a categorical predictor</a:t>
-            </a:r>
           </a:p>
         </p:txBody>
       </p:sp>
@@ -9600,961 +9246,6 @@
 </file>
 
 <file path=ppt/slides/slide32.xml><?xml version="1.0" encoding="utf-8"?>
-<p:sld xmlns:a="http://schemas.openxmlformats.org/drawingml/2006/main" xmlns:r="http://schemas.openxmlformats.org/officeDocument/2006/relationships" xmlns:p="http://schemas.openxmlformats.org/presentationml/2006/main">
-  <p:cSld>
-    <p:spTree>
-      <p:nvGrpSpPr>
-        <p:cNvPr id="1" name=""/>
-        <p:cNvGrpSpPr/>
-        <p:nvPr/>
-      </p:nvGrpSpPr>
-      <p:grpSpPr>
-        <a:xfrm>
-          <a:off x="0" y="0"/>
-          <a:ext cx="0" cy="0"/>
-          <a:chOff x="0" y="0"/>
-          <a:chExt cx="0" cy="0"/>
-        </a:xfrm>
-      </p:grpSpPr>
-      <p:sp>
-        <p:nvSpPr>
-          <p:cNvPr id="2" name="Title 1"/>
-          <p:cNvSpPr>
-            <a:spLocks noGrp="1"/>
-          </p:cNvSpPr>
-          <p:nvPr>
-            <p:ph type="title"/>
-          </p:nvPr>
-        </p:nvSpPr>
-        <p:spPr>
-          <a:xfrm>
-            <a:off x="0" y="0"/>
-            <a:ext cx="9144000" cy="871538"/>
-          </a:xfrm>
-        </p:spPr>
-        <p:txBody>
-          <a:bodyPr/>
-          <a:lstStyle/>
-          <a:p>
-            <a:pPr lvl="0" indent="0" marL="0">
-              <a:buNone/>
-            </a:pPr>
-            <a:r>
-              <a:rPr/>
-              <a:t>Demonstrating ANOVA-GLM Equivalence</a:t>
-            </a:r>
-          </a:p>
-        </p:txBody>
-      </p:sp>
-      <p:sp>
-        <p:nvSpPr>
-          <p:cNvPr id="4" name="Text Placeholder 3"/>
-          <p:cNvSpPr>
-            <a:spLocks noGrp="1"/>
-          </p:cNvSpPr>
-          <p:nvPr>
-            <p:ph idx="2" sz="half" type="body"/>
-          </p:nvPr>
-        </p:nvSpPr>
-        <p:spPr/>
-        <p:txBody>
-          <a:bodyPr/>
-          <a:lstStyle/>
-          <a:p>
-            <a:pPr lvl="0" indent="0" marL="0">
-              <a:buNone/>
-            </a:pPr>
-            <a:r>
-              <a:rPr/>
-              <a:t>Let’s demonstrate this equivalence: :::{.panel}</a:t>
-            </a:r>
-          </a:p>
-        </p:txBody>
-      </p:sp>
-      <p:graphicFrame xmlns:a="http://schemas.openxmlformats.org/drawingml/2006/main" xmlns:r="http://schemas.openxmlformats.org/officeDocument/2006/relationships" xmlns:p="http://schemas.openxmlformats.org/presentationml/2006/main">
-        <p:nvGraphicFramePr>
-          <p:cNvPr id="488613033" name=""/>
-          <p:cNvGraphicFramePr>
-            <a:graphicFrameLocks noGrp="true"/>
-          </p:cNvGraphicFramePr>
-          <p:nvPr/>
-        </p:nvGraphicFramePr>
-        <p:xfrm rot="0">
-          <a:off x="914400" y="1828800"/>
-          <a:ext cx="9144000" cy="5486400"/>
-        </p:xfrm>
-        <a:graphic>
-          <a:graphicData uri="http://schemas.openxmlformats.org/drawingml/2006/table">
-            <a:tbl>
-              <a:tblPr/>
-              <a:tblGrid>
-                <a:gridCol w="685800"/>
-                <a:gridCol w="685800"/>
-                <a:gridCol w="685800"/>
-              </a:tblGrid>
-              <a:tr h="228600">
-                <a:tc>
-                  <a:txBody>
-                    <a:bodyPr/>
-                    <a:lstStyle/>
-                    <a:p>
-                      <a:pPr algn="l" marL="38100" marR="38100">
-                        <a:lnSpc>
-                          <a:spcPct val="100000"/>
-                        </a:lnSpc>
-                        <a:spcBef>
-                          <a:spcPts val="300"/>
-                        </a:spcBef>
-                        <a:spcAft>
-                          <a:spcPts val="300"/>
-                        </a:spcAft>
-                        <a:buNone/>
-                      </a:pPr>
-                      <a:r>
-                        <a:rPr cap="none" sz="1000" i="0" b="1" u="none" strike="noStrike">
-                          <a:solidFill>
-                            <a:srgbClr val="000000">
-                              <a:alpha val="100000"/>
-                            </a:srgbClr>
-                          </a:solidFill>
-                          <a:latin typeface="Helvetica"/>
-                          <a:cs typeface="Helvetica"/>
-                          <a:ea typeface="Helvetica"/>
-                          <a:sym typeface="Helvetica"/>
-                        </a:rPr>
-                        <a:t>Term</a:t>
-                      </a:r>
-                    </a:p>
-                  </a:txBody>
-                  <a:tcPr anchor="ctr" marB="38100" marT="38100" marR="0" marL="0">
-                    <a:lnL algn="ctr" cmpd="sng" cap="flat" w="0">
-                      <a:noFill/>
-                      <a:prstDash val="solid"/>
-                    </a:lnL>
-                    <a:lnR algn="ctr" cmpd="sng" cap="flat" w="0">
-                      <a:noFill/>
-                      <a:prstDash val="solid"/>
-                    </a:lnR>
-                    <a:lnT algn="ctr" cmpd="sng" cap="flat" w="19050">
-                      <a:solidFill>
-                        <a:srgbClr val="666666">
-                          <a:alpha val="100000"/>
-                        </a:srgbClr>
-                      </a:solidFill>
-                      <a:prstDash val="solid"/>
-                    </a:lnT>
-                    <a:lnB algn="ctr" cmpd="sng" cap="flat" w="19050">
-                      <a:solidFill>
-                        <a:srgbClr val="666666">
-                          <a:alpha val="100000"/>
-                        </a:srgbClr>
-                      </a:solidFill>
-                      <a:prstDash val="solid"/>
-                    </a:lnB>
-                    <a:solidFill>
-                      <a:srgbClr val="FFFFFF">
-                        <a:alpha val="0"/>
-                      </a:srgbClr>
-                    </a:solidFill>
-                  </a:tcPr>
-                </a:tc>
-                <a:tc>
-                  <a:txBody>
-                    <a:bodyPr/>
-                    <a:lstStyle/>
-                    <a:p>
-                      <a:pPr algn="r" marL="38100" marR="38100">
-                        <a:lnSpc>
-                          <a:spcPct val="100000"/>
-                        </a:lnSpc>
-                        <a:spcBef>
-                          <a:spcPts val="300"/>
-                        </a:spcBef>
-                        <a:spcAft>
-                          <a:spcPts val="300"/>
-                        </a:spcAft>
-                        <a:buNone/>
-                      </a:pPr>
-                      <a:r>
-                        <a:rPr cap="none" sz="1000" i="0" b="1" u="none" strike="noStrike">
-                          <a:solidFill>
-                            <a:srgbClr val="000000">
-                              <a:alpha val="100000"/>
-                            </a:srgbClr>
-                          </a:solidFill>
-                          <a:latin typeface="Helvetica"/>
-                          <a:cs typeface="Helvetica"/>
-                          <a:ea typeface="Helvetica"/>
-                          <a:sym typeface="Helvetica"/>
-                        </a:rPr>
-                        <a:t>Linear.Regression</a:t>
-                      </a:r>
-                    </a:p>
-                  </a:txBody>
-                  <a:tcPr anchor="ctr" marB="38100" marT="38100" marR="0" marL="0">
-                    <a:lnL algn="ctr" cmpd="sng" cap="flat" w="0">
-                      <a:noFill/>
-                      <a:prstDash val="solid"/>
-                    </a:lnL>
-                    <a:lnR algn="ctr" cmpd="sng" cap="flat" w="0">
-                      <a:noFill/>
-                      <a:prstDash val="solid"/>
-                    </a:lnR>
-                    <a:lnT algn="ctr" cmpd="sng" cap="flat" w="19050">
-                      <a:solidFill>
-                        <a:srgbClr val="666666">
-                          <a:alpha val="100000"/>
-                        </a:srgbClr>
-                      </a:solidFill>
-                      <a:prstDash val="solid"/>
-                    </a:lnT>
-                    <a:lnB algn="ctr" cmpd="sng" cap="flat" w="19050">
-                      <a:solidFill>
-                        <a:srgbClr val="666666">
-                          <a:alpha val="100000"/>
-                        </a:srgbClr>
-                      </a:solidFill>
-                      <a:prstDash val="solid"/>
-                    </a:lnB>
-                    <a:solidFill>
-                      <a:srgbClr val="FFFFFF">
-                        <a:alpha val="0"/>
-                      </a:srgbClr>
-                    </a:solidFill>
-                  </a:tcPr>
-                </a:tc>
-                <a:tc>
-                  <a:txBody>
-                    <a:bodyPr/>
-                    <a:lstStyle/>
-                    <a:p>
-                      <a:pPr algn="r" marL="38100" marR="38100">
-                        <a:lnSpc>
-                          <a:spcPct val="100000"/>
-                        </a:lnSpc>
-                        <a:spcBef>
-                          <a:spcPts val="300"/>
-                        </a:spcBef>
-                        <a:spcAft>
-                          <a:spcPts val="300"/>
-                        </a:spcAft>
-                        <a:buNone/>
-                      </a:pPr>
-                      <a:r>
-                        <a:rPr cap="none" sz="1000" i="0" b="1" u="none" strike="noStrike">
-                          <a:solidFill>
-                            <a:srgbClr val="000000">
-                              <a:alpha val="100000"/>
-                            </a:srgbClr>
-                          </a:solidFill>
-                          <a:latin typeface="Helvetica"/>
-                          <a:cs typeface="Helvetica"/>
-                          <a:ea typeface="Helvetica"/>
-                          <a:sym typeface="Helvetica"/>
-                        </a:rPr>
-                        <a:t>Gaussian.GLM</a:t>
-                      </a:r>
-                    </a:p>
-                  </a:txBody>
-                  <a:tcPr anchor="ctr" marB="38100" marT="38100" marR="0" marL="0">
-                    <a:lnL algn="ctr" cmpd="sng" cap="flat" w="0">
-                      <a:noFill/>
-                      <a:prstDash val="solid"/>
-                    </a:lnL>
-                    <a:lnR algn="ctr" cmpd="sng" cap="flat" w="0">
-                      <a:noFill/>
-                      <a:prstDash val="solid"/>
-                    </a:lnR>
-                    <a:lnT algn="ctr" cmpd="sng" cap="flat" w="19050">
-                      <a:solidFill>
-                        <a:srgbClr val="666666">
-                          <a:alpha val="100000"/>
-                        </a:srgbClr>
-                      </a:solidFill>
-                      <a:prstDash val="solid"/>
-                    </a:lnT>
-                    <a:lnB algn="ctr" cmpd="sng" cap="flat" w="19050">
-                      <a:solidFill>
-                        <a:srgbClr val="666666">
-                          <a:alpha val="100000"/>
-                        </a:srgbClr>
-                      </a:solidFill>
-                      <a:prstDash val="solid"/>
-                    </a:lnB>
-                    <a:solidFill>
-                      <a:srgbClr val="FFFFFF">
-                        <a:alpha val="0"/>
-                      </a:srgbClr>
-                    </a:solidFill>
-                  </a:tcPr>
-                </a:tc>
-              </a:tr>
-              <a:tr h="228600">
-                <a:tc>
-                  <a:txBody>
-                    <a:bodyPr/>
-                    <a:lstStyle/>
-                    <a:p>
-                      <a:pPr algn="l" marL="38100" marR="38100">
-                        <a:lnSpc>
-                          <a:spcPct val="100000"/>
-                        </a:lnSpc>
-                        <a:spcBef>
-                          <a:spcPts val="300"/>
-                        </a:spcBef>
-                        <a:spcAft>
-                          <a:spcPts val="300"/>
-                        </a:spcAft>
-                        <a:buNone/>
-                      </a:pPr>
-                      <a:r>
-                        <a:rPr cap="none" sz="1000" i="0" b="0" u="none" strike="noStrike">
-                          <a:solidFill>
-                            <a:srgbClr val="000000">
-                              <a:alpha val="100000"/>
-                            </a:srgbClr>
-                          </a:solidFill>
-                          <a:latin typeface="Helvetica"/>
-                          <a:cs typeface="Helvetica"/>
-                          <a:ea typeface="Helvetica"/>
-                          <a:sym typeface="Helvetica"/>
-                        </a:rPr>
-                        <a:t>(Intercept)</a:t>
-                      </a:r>
-                    </a:p>
-                  </a:txBody>
-                  <a:tcPr anchor="ctr" marB="38100" marT="38100" marR="0" marL="0">
-                    <a:lnL algn="ctr" cmpd="sng" cap="flat" w="0">
-                      <a:noFill/>
-                      <a:prstDash val="solid"/>
-                    </a:lnL>
-                    <a:lnR algn="ctr" cmpd="sng" cap="flat" w="0">
-                      <a:noFill/>
-                      <a:prstDash val="solid"/>
-                    </a:lnR>
-                    <a:lnT algn="ctr" cmpd="sng" cap="flat" w="0">
-                      <a:noFill/>
-                      <a:prstDash val="solid"/>
-                    </a:lnT>
-                    <a:lnB algn="ctr" cmpd="sng" cap="flat" w="9525">
-                      <a:solidFill>
-                        <a:srgbClr val="666666">
-                          <a:alpha val="100000"/>
-                        </a:srgbClr>
-                      </a:solidFill>
-                      <a:prstDash val="solid"/>
-                    </a:lnB>
-                    <a:solidFill>
-                      <a:srgbClr val="FFFFFF">
-                        <a:alpha val="0"/>
-                      </a:srgbClr>
-                    </a:solidFill>
-                  </a:tcPr>
-                </a:tc>
-                <a:tc>
-                  <a:txBody>
-                    <a:bodyPr/>
-                    <a:lstStyle/>
-                    <a:p>
-                      <a:pPr algn="r" marL="38100" marR="38100">
-                        <a:lnSpc>
-                          <a:spcPct val="100000"/>
-                        </a:lnSpc>
-                        <a:spcBef>
-                          <a:spcPts val="300"/>
-                        </a:spcBef>
-                        <a:spcAft>
-                          <a:spcPts val="300"/>
-                        </a:spcAft>
-                        <a:buNone/>
-                      </a:pPr>
-                      <a:r>
-                        <a:rPr cap="none" sz="1000" i="0" b="0" u="none" strike="noStrike">
-                          <a:solidFill>
-                            <a:srgbClr val="000000">
-                              <a:alpha val="100000"/>
-                            </a:srgbClr>
-                          </a:solidFill>
-                          <a:latin typeface="Helvetica"/>
-                          <a:cs typeface="Helvetica"/>
-                          <a:ea typeface="Helvetica"/>
-                          <a:sym typeface="Helvetica"/>
-                        </a:rPr>
-                        <a:t>26.664</a:t>
-                      </a:r>
-                    </a:p>
-                  </a:txBody>
-                  <a:tcPr anchor="ctr" marB="38100" marT="38100" marR="0" marL="0">
-                    <a:lnL algn="ctr" cmpd="sng" cap="flat" w="0">
-                      <a:noFill/>
-                      <a:prstDash val="solid"/>
-                    </a:lnL>
-                    <a:lnR algn="ctr" cmpd="sng" cap="flat" w="0">
-                      <a:noFill/>
-                      <a:prstDash val="solid"/>
-                    </a:lnR>
-                    <a:lnT algn="ctr" cmpd="sng" cap="flat" w="0">
-                      <a:noFill/>
-                      <a:prstDash val="solid"/>
-                    </a:lnT>
-                    <a:lnB algn="ctr" cmpd="sng" cap="flat" w="9525">
-                      <a:solidFill>
-                        <a:srgbClr val="666666">
-                          <a:alpha val="100000"/>
-                        </a:srgbClr>
-                      </a:solidFill>
-                      <a:prstDash val="solid"/>
-                    </a:lnB>
-                    <a:solidFill>
-                      <a:srgbClr val="FFFFFF">
-                        <a:alpha val="0"/>
-                      </a:srgbClr>
-                    </a:solidFill>
-                  </a:tcPr>
-                </a:tc>
-                <a:tc>
-                  <a:txBody>
-                    <a:bodyPr/>
-                    <a:lstStyle/>
-                    <a:p>
-                      <a:pPr algn="r" marL="38100" marR="38100">
-                        <a:lnSpc>
-                          <a:spcPct val="100000"/>
-                        </a:lnSpc>
-                        <a:spcBef>
-                          <a:spcPts val="300"/>
-                        </a:spcBef>
-                        <a:spcAft>
-                          <a:spcPts val="300"/>
-                        </a:spcAft>
-                        <a:buNone/>
-                      </a:pPr>
-                      <a:r>
-                        <a:rPr cap="none" sz="1000" i="0" b="0" u="none" strike="noStrike">
-                          <a:solidFill>
-                            <a:srgbClr val="000000">
-                              <a:alpha val="100000"/>
-                            </a:srgbClr>
-                          </a:solidFill>
-                          <a:latin typeface="Helvetica"/>
-                          <a:cs typeface="Helvetica"/>
-                          <a:ea typeface="Helvetica"/>
-                          <a:sym typeface="Helvetica"/>
-                        </a:rPr>
-                        <a:t>26.664</a:t>
-                      </a:r>
-                    </a:p>
-                  </a:txBody>
-                  <a:tcPr anchor="ctr" marB="38100" marT="38100" marR="0" marL="0">
-                    <a:lnL algn="ctr" cmpd="sng" cap="flat" w="0">
-                      <a:noFill/>
-                      <a:prstDash val="solid"/>
-                    </a:lnL>
-                    <a:lnR algn="ctr" cmpd="sng" cap="flat" w="0">
-                      <a:noFill/>
-                      <a:prstDash val="solid"/>
-                    </a:lnR>
-                    <a:lnT algn="ctr" cmpd="sng" cap="flat" w="0">
-                      <a:noFill/>
-                      <a:prstDash val="solid"/>
-                    </a:lnT>
-                    <a:lnB algn="ctr" cmpd="sng" cap="flat" w="9525">
-                      <a:solidFill>
-                        <a:srgbClr val="666666">
-                          <a:alpha val="100000"/>
-                        </a:srgbClr>
-                      </a:solidFill>
-                      <a:prstDash val="solid"/>
-                    </a:lnB>
-                    <a:solidFill>
-                      <a:srgbClr val="FFFFFF">
-                        <a:alpha val="0"/>
-                      </a:srgbClr>
-                    </a:solidFill>
-                  </a:tcPr>
-                </a:tc>
-              </a:tr>
-              <a:tr h="228600">
-                <a:tc>
-                  <a:txBody>
-                    <a:bodyPr/>
-                    <a:lstStyle/>
-                    <a:p>
-                      <a:pPr algn="l" marL="38100" marR="38100">
-                        <a:lnSpc>
-                          <a:spcPct val="100000"/>
-                        </a:lnSpc>
-                        <a:spcBef>
-                          <a:spcPts val="300"/>
-                        </a:spcBef>
-                        <a:spcAft>
-                          <a:spcPts val="300"/>
-                        </a:spcAft>
-                        <a:buNone/>
-                      </a:pPr>
-                      <a:r>
-                        <a:rPr cap="none" sz="1000" i="0" b="0" u="none" strike="noStrike">
-                          <a:solidFill>
-                            <a:srgbClr val="000000">
-                              <a:alpha val="100000"/>
-                            </a:srgbClr>
-                          </a:solidFill>
-                          <a:latin typeface="Helvetica"/>
-                          <a:cs typeface="Helvetica"/>
-                          <a:ea typeface="Helvetica"/>
-                          <a:sym typeface="Helvetica"/>
-                        </a:rPr>
-                        <a:t>cyl6</a:t>
-                      </a:r>
-                    </a:p>
-                  </a:txBody>
-                  <a:tcPr anchor="ctr" marB="38100" marT="38100" marR="0" marL="0">
-                    <a:lnL algn="ctr" cmpd="sng" cap="flat" w="0">
-                      <a:noFill/>
-                      <a:prstDash val="solid"/>
-                    </a:lnL>
-                    <a:lnR algn="ctr" cmpd="sng" cap="flat" w="0">
-                      <a:noFill/>
-                      <a:prstDash val="solid"/>
-                    </a:lnR>
-                    <a:lnT algn="ctr" cmpd="sng" cap="flat" w="9525">
-                      <a:solidFill>
-                        <a:srgbClr val="666666">
-                          <a:alpha val="100000"/>
-                        </a:srgbClr>
-                      </a:solidFill>
-                      <a:prstDash val="solid"/>
-                    </a:lnT>
-                    <a:lnB algn="ctr" cmpd="sng" cap="flat" w="9525">
-                      <a:solidFill>
-                        <a:srgbClr val="666666">
-                          <a:alpha val="100000"/>
-                        </a:srgbClr>
-                      </a:solidFill>
-                      <a:prstDash val="solid"/>
-                    </a:lnB>
-                    <a:solidFill>
-                      <a:srgbClr val="FFFFFF">
-                        <a:alpha val="0"/>
-                      </a:srgbClr>
-                    </a:solidFill>
-                  </a:tcPr>
-                </a:tc>
-                <a:tc>
-                  <a:txBody>
-                    <a:bodyPr/>
-                    <a:lstStyle/>
-                    <a:p>
-                      <a:pPr algn="r" marL="38100" marR="38100">
-                        <a:lnSpc>
-                          <a:spcPct val="100000"/>
-                        </a:lnSpc>
-                        <a:spcBef>
-                          <a:spcPts val="300"/>
-                        </a:spcBef>
-                        <a:spcAft>
-                          <a:spcPts val="300"/>
-                        </a:spcAft>
-                        <a:buNone/>
-                      </a:pPr>
-                      <a:r>
-                        <a:rPr cap="none" sz="1000" i="0" b="0" u="none" strike="noStrike">
-                          <a:solidFill>
-                            <a:srgbClr val="000000">
-                              <a:alpha val="100000"/>
-                            </a:srgbClr>
-                          </a:solidFill>
-                          <a:latin typeface="Helvetica"/>
-                          <a:cs typeface="Helvetica"/>
-                          <a:ea typeface="Helvetica"/>
-                          <a:sym typeface="Helvetica"/>
-                        </a:rPr>
-                        <a:t>-6.921</a:t>
-                      </a:r>
-                    </a:p>
-                  </a:txBody>
-                  <a:tcPr anchor="ctr" marB="38100" marT="38100" marR="0" marL="0">
-                    <a:lnL algn="ctr" cmpd="sng" cap="flat" w="0">
-                      <a:noFill/>
-                      <a:prstDash val="solid"/>
-                    </a:lnL>
-                    <a:lnR algn="ctr" cmpd="sng" cap="flat" w="0">
-                      <a:noFill/>
-                      <a:prstDash val="solid"/>
-                    </a:lnR>
-                    <a:lnT algn="ctr" cmpd="sng" cap="flat" w="9525">
-                      <a:solidFill>
-                        <a:srgbClr val="666666">
-                          <a:alpha val="100000"/>
-                        </a:srgbClr>
-                      </a:solidFill>
-                      <a:prstDash val="solid"/>
-                    </a:lnT>
-                    <a:lnB algn="ctr" cmpd="sng" cap="flat" w="9525">
-                      <a:solidFill>
-                        <a:srgbClr val="666666">
-                          <a:alpha val="100000"/>
-                        </a:srgbClr>
-                      </a:solidFill>
-                      <a:prstDash val="solid"/>
-                    </a:lnB>
-                    <a:solidFill>
-                      <a:srgbClr val="FFFFFF">
-                        <a:alpha val="0"/>
-                      </a:srgbClr>
-                    </a:solidFill>
-                  </a:tcPr>
-                </a:tc>
-                <a:tc>
-                  <a:txBody>
-                    <a:bodyPr/>
-                    <a:lstStyle/>
-                    <a:p>
-                      <a:pPr algn="r" marL="38100" marR="38100">
-                        <a:lnSpc>
-                          <a:spcPct val="100000"/>
-                        </a:lnSpc>
-                        <a:spcBef>
-                          <a:spcPts val="300"/>
-                        </a:spcBef>
-                        <a:spcAft>
-                          <a:spcPts val="300"/>
-                        </a:spcAft>
-                        <a:buNone/>
-                      </a:pPr>
-                      <a:r>
-                        <a:rPr cap="none" sz="1000" i="0" b="0" u="none" strike="noStrike">
-                          <a:solidFill>
-                            <a:srgbClr val="000000">
-                              <a:alpha val="100000"/>
-                            </a:srgbClr>
-                          </a:solidFill>
-                          <a:latin typeface="Helvetica"/>
-                          <a:cs typeface="Helvetica"/>
-                          <a:ea typeface="Helvetica"/>
-                          <a:sym typeface="Helvetica"/>
-                        </a:rPr>
-                        <a:t>-6.921</a:t>
-                      </a:r>
-                    </a:p>
-                  </a:txBody>
-                  <a:tcPr anchor="ctr" marB="38100" marT="38100" marR="0" marL="0">
-                    <a:lnL algn="ctr" cmpd="sng" cap="flat" w="0">
-                      <a:noFill/>
-                      <a:prstDash val="solid"/>
-                    </a:lnL>
-                    <a:lnR algn="ctr" cmpd="sng" cap="flat" w="0">
-                      <a:noFill/>
-                      <a:prstDash val="solid"/>
-                    </a:lnR>
-                    <a:lnT algn="ctr" cmpd="sng" cap="flat" w="9525">
-                      <a:solidFill>
-                        <a:srgbClr val="666666">
-                          <a:alpha val="100000"/>
-                        </a:srgbClr>
-                      </a:solidFill>
-                      <a:prstDash val="solid"/>
-                    </a:lnT>
-                    <a:lnB algn="ctr" cmpd="sng" cap="flat" w="9525">
-                      <a:solidFill>
-                        <a:srgbClr val="666666">
-                          <a:alpha val="100000"/>
-                        </a:srgbClr>
-                      </a:solidFill>
-                      <a:prstDash val="solid"/>
-                    </a:lnB>
-                    <a:solidFill>
-                      <a:srgbClr val="FFFFFF">
-                        <a:alpha val="0"/>
-                      </a:srgbClr>
-                    </a:solidFill>
-                  </a:tcPr>
-                </a:tc>
-              </a:tr>
-              <a:tr h="228600">
-                <a:tc>
-                  <a:txBody>
-                    <a:bodyPr/>
-                    <a:lstStyle/>
-                    <a:p>
-                      <a:pPr algn="l" marL="38100" marR="38100">
-                        <a:lnSpc>
-                          <a:spcPct val="100000"/>
-                        </a:lnSpc>
-                        <a:spcBef>
-                          <a:spcPts val="300"/>
-                        </a:spcBef>
-                        <a:spcAft>
-                          <a:spcPts val="300"/>
-                        </a:spcAft>
-                        <a:buNone/>
-                      </a:pPr>
-                      <a:r>
-                        <a:rPr cap="none" sz="1000" i="0" b="0" u="none" strike="noStrike">
-                          <a:solidFill>
-                            <a:srgbClr val="000000">
-                              <a:alpha val="100000"/>
-                            </a:srgbClr>
-                          </a:solidFill>
-                          <a:latin typeface="Helvetica"/>
-                          <a:cs typeface="Helvetica"/>
-                          <a:ea typeface="Helvetica"/>
-                          <a:sym typeface="Helvetica"/>
-                        </a:rPr>
-                        <a:t>cyl8</a:t>
-                      </a:r>
-                    </a:p>
-                  </a:txBody>
-                  <a:tcPr anchor="ctr" marB="38100" marT="38100" marR="0" marL="0">
-                    <a:lnL algn="ctr" cmpd="sng" cap="flat" w="0">
-                      <a:noFill/>
-                      <a:prstDash val="solid"/>
-                    </a:lnL>
-                    <a:lnR algn="ctr" cmpd="sng" cap="flat" w="0">
-                      <a:noFill/>
-                      <a:prstDash val="solid"/>
-                    </a:lnR>
-                    <a:lnT algn="ctr" cmpd="sng" cap="flat" w="9525">
-                      <a:solidFill>
-                        <a:srgbClr val="666666">
-                          <a:alpha val="100000"/>
-                        </a:srgbClr>
-                      </a:solidFill>
-                      <a:prstDash val="solid"/>
-                    </a:lnT>
-                    <a:lnB algn="ctr" cmpd="sng" cap="flat" w="19050">
-                      <a:solidFill>
-                        <a:srgbClr val="666666">
-                          <a:alpha val="100000"/>
-                        </a:srgbClr>
-                      </a:solidFill>
-                      <a:prstDash val="solid"/>
-                    </a:lnB>
-                    <a:solidFill>
-                      <a:srgbClr val="FFFFFF">
-                        <a:alpha val="0"/>
-                      </a:srgbClr>
-                    </a:solidFill>
-                  </a:tcPr>
-                </a:tc>
-                <a:tc>
-                  <a:txBody>
-                    <a:bodyPr/>
-                    <a:lstStyle/>
-                    <a:p>
-                      <a:pPr algn="r" marL="38100" marR="38100">
-                        <a:lnSpc>
-                          <a:spcPct val="100000"/>
-                        </a:lnSpc>
-                        <a:spcBef>
-                          <a:spcPts val="300"/>
-                        </a:spcBef>
-                        <a:spcAft>
-                          <a:spcPts val="300"/>
-                        </a:spcAft>
-                        <a:buNone/>
-                      </a:pPr>
-                      <a:r>
-                        <a:rPr cap="none" sz="1000" i="0" b="0" u="none" strike="noStrike">
-                          <a:solidFill>
-                            <a:srgbClr val="000000">
-                              <a:alpha val="100000"/>
-                            </a:srgbClr>
-                          </a:solidFill>
-                          <a:latin typeface="Helvetica"/>
-                          <a:cs typeface="Helvetica"/>
-                          <a:ea typeface="Helvetica"/>
-                          <a:sym typeface="Helvetica"/>
-                        </a:rPr>
-                        <a:t>-11.564</a:t>
-                      </a:r>
-                    </a:p>
-                  </a:txBody>
-                  <a:tcPr anchor="ctr" marB="38100" marT="38100" marR="0" marL="0">
-                    <a:lnL algn="ctr" cmpd="sng" cap="flat" w="0">
-                      <a:noFill/>
-                      <a:prstDash val="solid"/>
-                    </a:lnL>
-                    <a:lnR algn="ctr" cmpd="sng" cap="flat" w="0">
-                      <a:noFill/>
-                      <a:prstDash val="solid"/>
-                    </a:lnR>
-                    <a:lnT algn="ctr" cmpd="sng" cap="flat" w="9525">
-                      <a:solidFill>
-                        <a:srgbClr val="666666">
-                          <a:alpha val="100000"/>
-                        </a:srgbClr>
-                      </a:solidFill>
-                      <a:prstDash val="solid"/>
-                    </a:lnT>
-                    <a:lnB algn="ctr" cmpd="sng" cap="flat" w="19050">
-                      <a:solidFill>
-                        <a:srgbClr val="666666">
-                          <a:alpha val="100000"/>
-                        </a:srgbClr>
-                      </a:solidFill>
-                      <a:prstDash val="solid"/>
-                    </a:lnB>
-                    <a:solidFill>
-                      <a:srgbClr val="FFFFFF">
-                        <a:alpha val="0"/>
-                      </a:srgbClr>
-                    </a:solidFill>
-                  </a:tcPr>
-                </a:tc>
-                <a:tc>
-                  <a:txBody>
-                    <a:bodyPr/>
-                    <a:lstStyle/>
-                    <a:p>
-                      <a:pPr algn="r" marL="38100" marR="38100">
-                        <a:lnSpc>
-                          <a:spcPct val="100000"/>
-                        </a:lnSpc>
-                        <a:spcBef>
-                          <a:spcPts val="300"/>
-                        </a:spcBef>
-                        <a:spcAft>
-                          <a:spcPts val="300"/>
-                        </a:spcAft>
-                        <a:buNone/>
-                      </a:pPr>
-                      <a:r>
-                        <a:rPr cap="none" sz="1000" i="0" b="0" u="none" strike="noStrike">
-                          <a:solidFill>
-                            <a:srgbClr val="000000">
-                              <a:alpha val="100000"/>
-                            </a:srgbClr>
-                          </a:solidFill>
-                          <a:latin typeface="Helvetica"/>
-                          <a:cs typeface="Helvetica"/>
-                          <a:ea typeface="Helvetica"/>
-                          <a:sym typeface="Helvetica"/>
-                        </a:rPr>
-                        <a:t>-11.564</a:t>
-                      </a:r>
-                    </a:p>
-                  </a:txBody>
-                  <a:tcPr anchor="ctr" marB="38100" marT="38100" marR="0" marL="0">
-                    <a:lnL algn="ctr" cmpd="sng" cap="flat" w="0">
-                      <a:noFill/>
-                      <a:prstDash val="solid"/>
-                    </a:lnL>
-                    <a:lnR algn="ctr" cmpd="sng" cap="flat" w="0">
-                      <a:noFill/>
-                      <a:prstDash val="solid"/>
-                    </a:lnR>
-                    <a:lnT algn="ctr" cmpd="sng" cap="flat" w="9525">
-                      <a:solidFill>
-                        <a:srgbClr val="666666">
-                          <a:alpha val="100000"/>
-                        </a:srgbClr>
-                      </a:solidFill>
-                      <a:prstDash val="solid"/>
-                    </a:lnT>
-                    <a:lnB algn="ctr" cmpd="sng" cap="flat" w="19050">
-                      <a:solidFill>
-                        <a:srgbClr val="666666">
-                          <a:alpha val="100000"/>
-                        </a:srgbClr>
-                      </a:solidFill>
-                      <a:prstDash val="solid"/>
-                    </a:lnB>
-                    <a:solidFill>
-                      <a:srgbClr val="FFFFFF">
-                        <a:alpha val="0"/>
-                      </a:srgbClr>
-                    </a:solidFill>
-                  </a:tcPr>
-                </a:tc>
-              </a:tr>
-            </a:tbl>
-          </a:graphicData>
-        </a:graphic>
-      </p:graphicFrame>
-      <p:pic>
-        <p:nvPicPr>
-          <p:cNvPr descr="14_01_lecture_powerpoint_files/figure-pptx/anova-glm-comparison-1.png" id="0" name="Picture 1"/>
-          <p:cNvPicPr>
-            <a:picLocks noGrp="1" noChangeAspect="1"/>
-          </p:cNvPicPr>
-          <p:nvPr/>
-        </p:nvPicPr>
-        <p:blipFill>
-          <a:blip r:embed="rId2"/>
-          <a:stretch>
-            <a:fillRect/>
-          </a:stretch>
-        </p:blipFill>
-        <p:spPr bwMode="auto">
-          <a:xfrm>
-            <a:off x="3657600" y="1244600"/>
-            <a:ext cx="5232400" cy="3225800"/>
-          </a:xfrm>
-          <a:prstGeom prst="rect">
-            <a:avLst/>
-          </a:prstGeom>
-          <a:noFill/>
-          <a:ln w="9525">
-            <a:noFill/>
-            <a:headEnd/>
-            <a:tailEnd/>
-          </a:ln>
-        </p:spPr>
-      </p:pic>
-    </p:spTree>
-  </p:cSld>
-</p:sld>
-</file>
-
-<file path=ppt/slides/slide33.xml><?xml version="1.0" encoding="utf-8"?>
-<p:sld xmlns:a="http://schemas.openxmlformats.org/drawingml/2006/main" xmlns:r="http://schemas.openxmlformats.org/officeDocument/2006/relationships" xmlns:p="http://schemas.openxmlformats.org/presentationml/2006/main">
-  <p:cSld>
-    <p:spTree>
-      <p:nvGrpSpPr>
-        <p:cNvPr id="1" name=""/>
-        <p:cNvGrpSpPr/>
-        <p:nvPr/>
-      </p:nvGrpSpPr>
-      <p:grpSpPr>
-        <a:xfrm>
-          <a:off x="0" y="0"/>
-          <a:ext cx="0" cy="0"/>
-          <a:chOff x="0" y="0"/>
-          <a:chExt cx="0" cy="0"/>
-        </a:xfrm>
-      </p:grpSpPr>
-      <p:sp>
-        <p:nvSpPr>
-          <p:cNvPr id="3" name="Content Placeholder 2"/>
-          <p:cNvSpPr>
-            <a:spLocks noGrp="1"/>
-          </p:cNvSpPr>
-          <p:nvPr>
-            <p:ph idx="1"/>
-          </p:nvPr>
-        </p:nvSpPr>
-        <p:spPr/>
-        <p:txBody>
-          <a:bodyPr/>
-          <a:lstStyle/>
-          <a:p>
-            <a:pPr lvl="0" indent="0" marL="0">
-              <a:buNone/>
-            </a:pPr>
-            <a:r>
-              <a:rPr/>
-              <a:t>:::</a:t>
-            </a:r>
-          </a:p>
-        </p:txBody>
-      </p:sp>
-    </p:spTree>
-  </p:cSld>
-</p:sld>
-</file>
-
-<file path=ppt/slides/slide34.xml><?xml version="1.0" encoding="utf-8"?>
 <p:sld xmlns:a="http://schemas.openxmlformats.org/drawingml/2006/main" xmlns:r="http://schemas.openxmlformats.org/officeDocument/2006/relationships" xmlns:p="http://schemas.openxmlformats.org/presentationml/2006/main">
   <p:cSld>
     <p:spTree>
@@ -10801,7 +9492,7 @@
 </p:sld>
 </file>
 
-<file path=ppt/slides/slide35.xml><?xml version="1.0" encoding="utf-8"?>
+<file path=ppt/slides/slide33.xml><?xml version="1.0" encoding="utf-8"?>
 <p:sld xmlns:a="http://schemas.openxmlformats.org/drawingml/2006/main" xmlns:r="http://schemas.openxmlformats.org/officeDocument/2006/relationships" xmlns:p="http://schemas.openxmlformats.org/presentationml/2006/main">
   <p:cSld>
     <p:spTree>
@@ -11017,7 +9708,7 @@
 </p:sld>
 </file>
 
-<file path=ppt/slides/slide36.xml><?xml version="1.0" encoding="utf-8"?>
+<file path=ppt/slides/slide34.xml><?xml version="1.0" encoding="utf-8"?>
 <p:sld xmlns:a="http://schemas.openxmlformats.org/drawingml/2006/main" xmlns:r="http://schemas.openxmlformats.org/officeDocument/2006/relationships" xmlns:p="http://schemas.openxmlformats.org/presentationml/2006/main">
   <p:cSld>
     <p:spTree>

--- a/docs/ecostats_lectures/lecture_14/14_01_lecture_powerpoint.pptx
+++ b/docs/ecostats_lectures/lecture_14/14_01_lecture_powerpoint.pptx
@@ -4659,7 +4659,7 @@
             </a:r>
           </a:p>
           <a:p>
-            <a:pPr lvl="1" indent="0">
+            <a:pPr lvl="0" indent="0">
               <a:buNone/>
             </a:pPr>
             <a:r>
@@ -5381,12 +5381,9 @@
         </p:nvSpPr>
         <p:spPr>
           <a:xfrm>
-            <a:off x="0" y="0"/>
-            <a:ext cx="9144000" cy="602780"/>
+            <a:off x="139485" y="78119"/>
+            <a:ext cx="8229600" cy="607682"/>
           </a:xfrm>
-          <a:solidFill>
-            <a:srgbClr val="70121D"/>
-          </a:solidFill>
         </p:spPr>
         <p:txBody>
           <a:bodyPr/>
@@ -5404,12 +5401,12 @@
       </p:sp>
       <p:sp>
         <p:nvSpPr>
-          <p:cNvPr id="3" name="Content Placeholder 2"/>
-          <p:cNvSpPr>
-            <a:spLocks noGrp="1"/>
-          </p:cNvSpPr>
-          <p:nvPr>
-            <p:ph idx="1" sz="half"/>
+          <p:cNvPr id="3" name="Text Placeholder 2"/>
+          <p:cNvSpPr>
+            <a:spLocks noGrp="1"/>
+          </p:cNvSpPr>
+          <p:nvPr>
+            <p:ph idx="1" type="body"/>
           </p:nvPr>
         </p:nvSpPr>
         <p:spPr/>
@@ -5430,21 +5427,46 @@
               <a:t>shows the model’s predictions on top of the real data</a:t>
             </a:r>
           </a:p>
-          <a:p>
-            <a:pPr lvl="1" indent="0" marL="342900">
-              <a:buNone/>
-            </a:pPr>
-          </a:p>
-        </p:txBody>
-      </p:sp>
-      <p:sp>
-        <p:nvSpPr>
-          <p:cNvPr id="4" name="Content Placeholder 3"/>
-          <p:cNvSpPr>
-            <a:spLocks noGrp="1"/>
-          </p:cNvSpPr>
-          <p:nvPr>
-            <p:ph idx="2" sz="half"/>
+        </p:txBody>
+      </p:sp>
+      <p:pic>
+        <p:nvPicPr>
+          <p:cNvPr descr="14_01_lecture_powerpoint_files/figure-pptx/poisson-plot-1.png" id="0" name="Picture 1"/>
+          <p:cNvPicPr>
+            <a:picLocks noGrp="1" noChangeAspect="1"/>
+          </p:cNvPicPr>
+          <p:nvPr/>
+        </p:nvPicPr>
+        <p:blipFill>
+          <a:blip r:embed="rId2"/>
+          <a:stretch>
+            <a:fillRect/>
+          </a:stretch>
+        </p:blipFill>
+        <p:spPr bwMode="auto">
+          <a:xfrm>
+            <a:off x="127000" y="1562100"/>
+            <a:ext cx="4432300" cy="2730500"/>
+          </a:xfrm>
+          <a:prstGeom prst="rect">
+            <a:avLst/>
+          </a:prstGeom>
+          <a:noFill/>
+          <a:ln w="9525">
+            <a:noFill/>
+            <a:headEnd/>
+            <a:tailEnd/>
+          </a:ln>
+        </p:spPr>
+      </p:pic>
+      <p:sp>
+        <p:nvSpPr>
+          <p:cNvPr id="5" name="Text Placeholder 4"/>
+          <p:cNvSpPr>
+            <a:spLocks noGrp="1"/>
+          </p:cNvSpPr>
+          <p:nvPr>
+            <p:ph idx="3" sz="quarter" type="body"/>
           </p:nvPr>
         </p:nvSpPr>
         <p:spPr/>
@@ -10960,67 +10982,94 @@
             </a:r>
           </a:p>
           <a:p>
-            <a:pPr lvl="0" indent="0" marL="0">
-              <a:buNone/>
-            </a:pPr>
+            <a:pPr lvl="0"/>
             <a:r>
               <a:rPr b="1"/>
               <a:t>Variables in the dataset:</a:t>
             </a:r>
-            <a:r>
-              <a:rPr/>
-              <a:t> - </a:t>
-            </a:r>
+          </a:p>
+          <a:p>
+            <a:pPr lvl="1"/>
             <a:r>
               <a:rPr>
                 <a:latin typeface="Courier"/>
               </a:rPr>
               <a:t>Species</a:t>
             </a:r>
-            <a:r>
-              <a:rPr/>
-              <a:t> - Number of plant species (count data) - </a:t>
-            </a:r>
+          </a:p>
+          <a:p>
+            <a:pPr lvl="1"/>
+            <a:r>
+              <a:rPr/>
+              <a:t>Number of plant species (count data)</a:t>
+            </a:r>
+          </a:p>
+          <a:p>
+            <a:pPr lvl="1"/>
             <a:r>
               <a:rPr>
                 <a:latin typeface="Courier"/>
               </a:rPr>
               <a:t>Endemics</a:t>
             </a:r>
-            <a:r>
-              <a:rPr/>
-              <a:t> - Number of endemic species (count data) - </a:t>
-            </a:r>
+          </a:p>
+          <a:p>
+            <a:pPr lvl="1"/>
+            <a:r>
+              <a:rPr/>
+              <a:t>Number of endemic species (count data)</a:t>
+            </a:r>
+          </a:p>
+          <a:p>
+            <a:pPr lvl="1"/>
             <a:r>
               <a:rPr>
                 <a:latin typeface="Courier"/>
               </a:rPr>
               <a:t>Area</a:t>
             </a:r>
-            <a:r>
-              <a:rPr/>
-              <a:t> - Island area (km²) - </a:t>
-            </a:r>
+          </a:p>
+          <a:p>
+            <a:pPr lvl="1"/>
+            <a:r>
+              <a:rPr/>
+              <a:t>Island area (km²)</a:t>
+            </a:r>
+          </a:p>
+          <a:p>
+            <a:pPr lvl="1"/>
             <a:r>
               <a:rPr>
                 <a:latin typeface="Courier"/>
               </a:rPr>
               <a:t>Elevation</a:t>
             </a:r>
-            <a:r>
-              <a:rPr/>
-              <a:t> - Maximum elevation (m) - </a:t>
-            </a:r>
+          </a:p>
+          <a:p>
+            <a:pPr lvl="1"/>
+            <a:r>
+              <a:rPr/>
+              <a:t>Maximum elevation (m)</a:t>
+            </a:r>
+          </a:p>
+          <a:p>
+            <a:pPr lvl="1"/>
             <a:r>
               <a:rPr>
                 <a:latin typeface="Courier"/>
               </a:rPr>
               <a:t>Nearest</a:t>
             </a:r>
-            <a:r>
-              <a:rPr/>
-              <a:t> - Distance to nearest island (km) - </a:t>
-            </a:r>
+          </a:p>
+          <a:p>
+            <a:pPr lvl="1"/>
+            <a:r>
+              <a:rPr/>
+              <a:t>Distance to nearest island (km)</a:t>
+            </a:r>
+          </a:p>
+          <a:p>
+            <a:pPr lvl="1"/>
             <a:r>
               <a:rPr>
                 <a:latin typeface="Courier"/>
@@ -11029,8 +11078,11 @@
             </a:r>
             <a:r>
               <a:rPr/>
-              <a:t> - Distance to Santa Cruz island (km) - </a:t>
-            </a:r>
+              <a:t> - Distance to Santa Cruz island (km)</a:t>
+            </a:r>
+          </a:p>
+          <a:p>
+            <a:pPr lvl="1"/>
             <a:r>
               <a:rPr>
                 <a:latin typeface="Courier"/>

--- a/docs/ecostats_lectures/lecture_14/14_01_lecture_powerpoint.pptx
+++ b/docs/ecostats_lectures/lecture_14/14_01_lecture_powerpoint.pptx
@@ -42,6 +42,8 @@
     <p:sldId id="290" r:id="rId36"/>
     <p:sldId id="291" r:id="rId37"/>
     <p:sldId id="292" r:id="rId38"/>
+    <p:sldId id="293" r:id="rId39"/>
+    <p:sldId id="294" r:id="rId40"/>
   </p:sldIdLst>
   <p:sldSz cx="9144000" cy="5143500" type="screen16x9"/>
   <p:notesSz cx="6858000" cy="9144000"/>
@@ -3478,6 +3480,15 @@
               <a:t>The key difference is that GLMs provide a framework that extends to non-normal distributions.</a:t>
             </a:r>
           </a:p>
+          <a:p>
+            <a:pPr lvl="0" indent="0" marL="0">
+              <a:buNone/>
+            </a:pPr>
+            <a:r>
+              <a:rPr b="1" u="sng"/>
+              <a:t>Note when we look at Heteroscedascidity (SP) cone of despair - this is why a Poisson model works</a:t>
+            </a:r>
+          </a:p>
         </p:txBody>
       </p:sp>
     </p:spTree>
@@ -5578,6 +5589,309 @@
         <p:spPr>
           <a:xfrm>
             <a:off x="0" y="0"/>
+            <a:ext cx="9144000" cy="871538"/>
+          </a:xfrm>
+        </p:spPr>
+        <p:txBody>
+          <a:bodyPr/>
+          <a:lstStyle/>
+          <a:p>
+            <a:pPr lvl="0" indent="0" marL="0">
+              <a:buNone/>
+            </a:pPr>
+            <a:r>
+              <a:rPr/>
+              <a:t>Comparison of interpretation</a:t>
+            </a:r>
+          </a:p>
+        </p:txBody>
+      </p:sp>
+      <p:sp>
+        <p:nvSpPr>
+          <p:cNvPr id="4" name="Text Placeholder 3"/>
+          <p:cNvSpPr>
+            <a:spLocks noGrp="1"/>
+          </p:cNvSpPr>
+          <p:nvPr>
+            <p:ph idx="2" sz="half" type="body"/>
+          </p:nvPr>
+        </p:nvSpPr>
+        <p:spPr/>
+        <p:txBody>
+          <a:bodyPr/>
+          <a:lstStyle/>
+          <a:p>
+            <a:pPr lvl="0" indent="0" marL="0">
+              <a:buNone/>
+            </a:pPr>
+            <a:r>
+              <a:rPr/>
+              <a:t>Model Type R Code (Example) Interpretation of β₁ GLM (Log-Link) glm(Y ~ X, family = poisson) A 1-unit change in X multiplies the mean of Y by exp(β₁). lm (Log-Response) lm(log(Y) ~ X) A 1-unit change in X multiplies the median of Y by exp(β₁). lm (Log-Log) lm(log(Y) ~ log(X)) A 1% change in</a:t>
+            </a:r>
+          </a:p>
+        </p:txBody>
+      </p:sp>
+      <p:graphicFrame>
+        <p:nvGraphicFramePr>
+          <p:cNvPr id="6" name="Content Placeholder 5"/>
+          <p:cNvGraphicFramePr>
+            <a:graphicFrameLocks noGrp="1"/>
+          </p:cNvGraphicFramePr>
+          <p:nvPr>
+            <p:ph idx="1"/>
+          </p:nvPr>
+        </p:nvGraphicFramePr>
+        <p:xfrm>
+          <a:off x="3657600" y="952500"/>
+          <a:ext cx="5232400" cy="3797300"/>
+        </p:xfrm>
+        <a:graphic>
+          <a:graphicData uri="http://schemas.openxmlformats.org/drawingml/2006/table">
+            <a:tbl>
+              <a:tblPr firstRow="1" bandRow="1">
+                <a:tableStyleId>{5C22544A-7EE6-4342-B048-85BDC9FD1C3A}</a:tableStyleId>
+              </a:tblPr>
+              <a:tblGrid>
+                <a:gridCol w="1308100"/>
+                <a:gridCol w="1816100"/>
+                <a:gridCol w="2108200"/>
+              </a:tblGrid>
+              <a:tr h="0">
+                <a:tc>
+                  <a:txBody>
+                    <a:bodyPr/>
+                    <a:lstStyle/>
+                    <a:p>
+                      <a:pPr lvl="0" indent="0" marL="0">
+                        <a:buNone/>
+                      </a:pPr>
+                      <a:r>
+                        <a:rPr/>
+                        <a:t>Model Type</a:t>
+                      </a:r>
+                    </a:p>
+                  </a:txBody>
+                  <a:tcPr/>
+                </a:tc>
+                <a:tc>
+                  <a:txBody>
+                    <a:bodyPr/>
+                    <a:lstStyle/>
+                    <a:p>
+                      <a:pPr lvl="0" indent="0" marL="0">
+                        <a:buNone/>
+                      </a:pPr>
+                      <a:r>
+                        <a:rPr/>
+                        <a:t>R Code (Example)</a:t>
+                      </a:r>
+                    </a:p>
+                  </a:txBody>
+                  <a:tcPr/>
+                </a:tc>
+                <a:tc>
+                  <a:txBody>
+                    <a:bodyPr/>
+                    <a:lstStyle/>
+                    <a:p>
+                      <a:pPr lvl="0" indent="0" marL="0">
+                        <a:buNone/>
+                      </a:pPr>
+                      <a:r>
+                        <a:rPr/>
+                        <a:t>Interpretation of β₁</a:t>
+                      </a:r>
+                    </a:p>
+                  </a:txBody>
+                  <a:tcPr/>
+                </a:tc>
+              </a:tr>
+              <a:tr h="0">
+                <a:tc>
+                  <a:txBody>
+                    <a:bodyPr/>
+                    <a:lstStyle/>
+                    <a:p>
+                      <a:pPr lvl="0" indent="0" marL="0">
+                        <a:buNone/>
+                      </a:pPr>
+                      <a:r>
+                        <a:rPr/>
+                        <a:t>GLM (Log-Link)</a:t>
+                      </a:r>
+                    </a:p>
+                  </a:txBody>
+                </a:tc>
+                <a:tc>
+                  <a:txBody>
+                    <a:bodyPr/>
+                    <a:lstStyle/>
+                    <a:p>
+                      <a:pPr lvl="0" indent="0" marL="0">
+                        <a:buNone/>
+                      </a:pPr>
+                      <a:r>
+                        <a:rPr>
+                          <a:latin typeface="Courier"/>
+                        </a:rPr>
+                        <a:t>glm(Y ~ X, family = poisson)</a:t>
+                      </a:r>
+                    </a:p>
+                  </a:txBody>
+                </a:tc>
+                <a:tc>
+                  <a:txBody>
+                    <a:bodyPr/>
+                    <a:lstStyle/>
+                    <a:p>
+                      <a:pPr lvl="0" indent="0" marL="0">
+                        <a:buNone/>
+                      </a:pPr>
+                      <a:r>
+                        <a:rPr/>
+                        <a:t>A 1-unit change in X multiplies the mean of Y by exp(β₁).</a:t>
+                      </a:r>
+                    </a:p>
+                  </a:txBody>
+                </a:tc>
+              </a:tr>
+              <a:tr h="0">
+                <a:tc>
+                  <a:txBody>
+                    <a:bodyPr/>
+                    <a:lstStyle/>
+                    <a:p>
+                      <a:pPr lvl="0" indent="0" marL="0">
+                        <a:buNone/>
+                      </a:pPr>
+                      <a:r>
+                        <a:rPr/>
+                        <a:t>lm (Log-Response)</a:t>
+                      </a:r>
+                    </a:p>
+                  </a:txBody>
+                </a:tc>
+                <a:tc>
+                  <a:txBody>
+                    <a:bodyPr/>
+                    <a:lstStyle/>
+                    <a:p>
+                      <a:pPr lvl="0" indent="0" marL="0">
+                        <a:buNone/>
+                      </a:pPr>
+                      <a:r>
+                        <a:rPr>
+                          <a:latin typeface="Courier"/>
+                        </a:rPr>
+                        <a:t>lm(log(Y) ~ X)</a:t>
+                      </a:r>
+                    </a:p>
+                  </a:txBody>
+                </a:tc>
+                <a:tc>
+                  <a:txBody>
+                    <a:bodyPr/>
+                    <a:lstStyle/>
+                    <a:p>
+                      <a:pPr lvl="0" indent="0" marL="0">
+                        <a:buNone/>
+                      </a:pPr>
+                      <a:r>
+                        <a:rPr/>
+                        <a:t>A 1-unit change in X multiplies the median of Y by exp(β₁).</a:t>
+                      </a:r>
+                    </a:p>
+                  </a:txBody>
+                </a:tc>
+              </a:tr>
+              <a:tr h="0">
+                <a:tc>
+                  <a:txBody>
+                    <a:bodyPr/>
+                    <a:lstStyle/>
+                    <a:p>
+                      <a:pPr lvl="0" indent="0" marL="0">
+                        <a:buNone/>
+                      </a:pPr>
+                      <a:r>
+                        <a:rPr/>
+                        <a:t>lm (Log-Log)</a:t>
+                      </a:r>
+                    </a:p>
+                  </a:txBody>
+                </a:tc>
+                <a:tc>
+                  <a:txBody>
+                    <a:bodyPr/>
+                    <a:lstStyle/>
+                    <a:p>
+                      <a:pPr lvl="0" indent="0" marL="0">
+                        <a:buNone/>
+                      </a:pPr>
+                      <a:r>
+                        <a:rPr>
+                          <a:latin typeface="Courier"/>
+                        </a:rPr>
+                        <a:t>lm(log(Y) ~ log(X))</a:t>
+                      </a:r>
+                    </a:p>
+                  </a:txBody>
+                </a:tc>
+                <a:tc>
+                  <a:txBody>
+                    <a:bodyPr/>
+                    <a:lstStyle/>
+                    <a:p>
+                      <a:pPr lvl="0" indent="0" marL="0">
+                        <a:buNone/>
+                      </a:pPr>
+                      <a:r>
+                        <a:rPr/>
+                        <a:t>A 1% change in X is associated with a β₁% change in Y.</a:t>
+                      </a:r>
+                    </a:p>
+                  </a:txBody>
+                </a:tc>
+              </a:tr>
+            </a:tbl>
+          </a:graphicData>
+        </a:graphic>
+      </p:graphicFrame>
+    </p:spTree>
+  </p:cSld>
+</p:sld>
+</file>
+
+<file path=ppt/slides/slide17.xml><?xml version="1.0" encoding="utf-8"?>
+<p:sld xmlns:a="http://schemas.openxmlformats.org/drawingml/2006/main" xmlns:r="http://schemas.openxmlformats.org/officeDocument/2006/relationships" xmlns:p="http://schemas.openxmlformats.org/presentationml/2006/main">
+  <p:cSld>
+    <p:spTree>
+      <p:nvGrpSpPr>
+        <p:cNvPr id="1" name=""/>
+        <p:cNvGrpSpPr/>
+        <p:nvPr/>
+      </p:nvGrpSpPr>
+      <p:grpSpPr>
+        <a:xfrm>
+          <a:off x="0" y="0"/>
+          <a:ext cx="0" cy="0"/>
+          <a:chOff x="0" y="0"/>
+          <a:chExt cx="0" cy="0"/>
+        </a:xfrm>
+      </p:grpSpPr>
+      <p:sp>
+        <p:nvSpPr>
+          <p:cNvPr id="2" name="Title 1"/>
+          <p:cNvSpPr>
+            <a:spLocks noGrp="1"/>
+          </p:cNvSpPr>
+          <p:nvPr>
+            <p:ph type="title"/>
+          </p:nvPr>
+        </p:nvSpPr>
+        <p:spPr>
+          <a:xfrm>
+            <a:off x="0" y="0"/>
             <a:ext cx="9144000" cy="582780"/>
           </a:xfrm>
         </p:spPr>
@@ -5621,7 +5935,7 @@
 </p:sld>
 </file>
 
-<file path=ppt/slides/slide17.xml><?xml version="1.0" encoding="utf-8"?>
+<file path=ppt/slides/slide18.xml><?xml version="1.0" encoding="utf-8"?>
 <p:sld xmlns:a="http://schemas.openxmlformats.org/drawingml/2006/main" xmlns:r="http://schemas.openxmlformats.org/officeDocument/2006/relationships" xmlns:p="http://schemas.openxmlformats.org/presentationml/2006/main">
   <p:cSld>
     <p:spTree>
@@ -5830,7 +6144,1617 @@
 </p:sld>
 </file>
 
-<file path=ppt/slides/slide18.xml><?xml version="1.0" encoding="utf-8"?>
+<file path=ppt/slides/slide19.xml><?xml version="1.0" encoding="utf-8"?>
+<p:sld xmlns:a="http://schemas.openxmlformats.org/drawingml/2006/main" xmlns:r="http://schemas.openxmlformats.org/officeDocument/2006/relationships" xmlns:p="http://schemas.openxmlformats.org/presentationml/2006/main">
+  <p:cSld>
+    <p:spTree>
+      <p:nvGrpSpPr>
+        <p:cNvPr id="1" name=""/>
+        <p:cNvGrpSpPr/>
+        <p:nvPr/>
+      </p:nvGrpSpPr>
+      <p:grpSpPr>
+        <a:xfrm>
+          <a:off x="0" y="0"/>
+          <a:ext cx="0" cy="0"/>
+          <a:chOff x="0" y="0"/>
+          <a:chExt cx="0" cy="0"/>
+        </a:xfrm>
+      </p:grpSpPr>
+      <p:sp>
+        <p:nvSpPr>
+          <p:cNvPr id="2" name="Title 1"/>
+          <p:cNvSpPr>
+            <a:spLocks noGrp="1"/>
+          </p:cNvSpPr>
+          <p:nvPr>
+            <p:ph type="title"/>
+          </p:nvPr>
+        </p:nvSpPr>
+        <p:spPr>
+          <a:xfrm>
+            <a:off x="0" y="0"/>
+            <a:ext cx="9144000" cy="582780"/>
+          </a:xfrm>
+        </p:spPr>
+        <p:txBody>
+          <a:bodyPr/>
+          <a:lstStyle/>
+          <a:p>
+            <a:pPr lvl="0" indent="0" marL="0">
+              <a:buNone/>
+            </a:pPr>
+            <a:r>
+              <a:rPr/>
+              <a:t>Example comparison of logged response variable and GLM</a:t>
+            </a:r>
+          </a:p>
+        </p:txBody>
+      </p:sp>
+      <p:sp>
+        <p:nvSpPr>
+          <p:cNvPr id="3" name="Content Placeholder 2"/>
+          <p:cNvSpPr>
+            <a:spLocks noGrp="1"/>
+          </p:cNvSpPr>
+          <p:nvPr>
+            <p:ph idx="1"/>
+          </p:nvPr>
+        </p:nvSpPr>
+        <p:spPr/>
+        <p:txBody>
+          <a:bodyPr/>
+          <a:lstStyle/>
+          <a:p>
+            <a:pPr lvl="0" indent="0" marL="1270000">
+              <a:buNone/>
+            </a:pPr>
+            <a:r>
+              <a:rPr sz="2000" b="1"/>
+              <a:t>Important</a:t>
+            </a:r>
+          </a:p>
+          <a:p>
+            <a:pPr lvl="0" indent="0">
+              <a:buNone/>
+            </a:pPr>
+            <a:r>
+              <a:rPr>
+                <a:solidFill>
+                  <a:srgbClr val="5E5E5E"/>
+                </a:solidFill>
+                <a:latin typeface="Courier"/>
+              </a:rPr>
+              <a:t># Simulate data that students might log-transform</a:t>
+            </a:r>
+            <a:br/>
+            <a:r>
+              <a:rPr>
+                <a:solidFill>
+                  <a:srgbClr val="4758AB"/>
+                </a:solidFill>
+                <a:latin typeface="Courier"/>
+              </a:rPr>
+              <a:t>set.seed</a:t>
+            </a:r>
+            <a:r>
+              <a:rPr>
+                <a:solidFill>
+                  <a:srgbClr val="003B4F"/>
+                </a:solidFill>
+                <a:latin typeface="Courier"/>
+              </a:rPr>
+              <a:t>(</a:t>
+            </a:r>
+            <a:r>
+              <a:rPr>
+                <a:solidFill>
+                  <a:srgbClr val="AD0000"/>
+                </a:solidFill>
+                <a:latin typeface="Courier"/>
+              </a:rPr>
+              <a:t>123</a:t>
+            </a:r>
+            <a:r>
+              <a:rPr>
+                <a:solidFill>
+                  <a:srgbClr val="003B4F"/>
+                </a:solidFill>
+                <a:latin typeface="Courier"/>
+              </a:rPr>
+              <a:t>)</a:t>
+            </a:r>
+            <a:br/>
+            <a:r>
+              <a:rPr>
+                <a:solidFill>
+                  <a:srgbClr val="003B4F"/>
+                </a:solidFill>
+                <a:latin typeface="Courier"/>
+              </a:rPr>
+              <a:t>treatment_data &lt;- </a:t>
+            </a:r>
+            <a:r>
+              <a:rPr>
+                <a:solidFill>
+                  <a:srgbClr val="4758AB"/>
+                </a:solidFill>
+                <a:latin typeface="Courier"/>
+              </a:rPr>
+              <a:t>data.frame</a:t>
+            </a:r>
+            <a:r>
+              <a:rPr>
+                <a:solidFill>
+                  <a:srgbClr val="003B4F"/>
+                </a:solidFill>
+                <a:latin typeface="Courier"/>
+              </a:rPr>
+              <a:t>(</a:t>
+            </a:r>
+            <a:br/>
+            <a:r>
+              <a:rPr>
+                <a:solidFill>
+                  <a:srgbClr val="003B4F"/>
+                </a:solidFill>
+                <a:latin typeface="Courier"/>
+              </a:rPr>
+              <a:t>  </a:t>
+            </a:r>
+            <a:r>
+              <a:rPr>
+                <a:solidFill>
+                  <a:srgbClr val="657422"/>
+                </a:solidFill>
+                <a:latin typeface="Courier"/>
+              </a:rPr>
+              <a:t>treatment =</a:t>
+            </a:r>
+            <a:r>
+              <a:rPr>
+                <a:solidFill>
+                  <a:srgbClr val="003B4F"/>
+                </a:solidFill>
+                <a:latin typeface="Courier"/>
+              </a:rPr>
+              <a:t> </a:t>
+            </a:r>
+            <a:r>
+              <a:rPr>
+                <a:solidFill>
+                  <a:srgbClr val="4758AB"/>
+                </a:solidFill>
+                <a:latin typeface="Courier"/>
+              </a:rPr>
+              <a:t>rep</a:t>
+            </a:r>
+            <a:r>
+              <a:rPr>
+                <a:solidFill>
+                  <a:srgbClr val="003B4F"/>
+                </a:solidFill>
+                <a:latin typeface="Courier"/>
+              </a:rPr>
+              <a:t>(</a:t>
+            </a:r>
+            <a:r>
+              <a:rPr>
+                <a:solidFill>
+                  <a:srgbClr val="4758AB"/>
+                </a:solidFill>
+                <a:latin typeface="Courier"/>
+              </a:rPr>
+              <a:t>c</a:t>
+            </a:r>
+            <a:r>
+              <a:rPr>
+                <a:solidFill>
+                  <a:srgbClr val="003B4F"/>
+                </a:solidFill>
+                <a:latin typeface="Courier"/>
+              </a:rPr>
+              <a:t>(</a:t>
+            </a:r>
+            <a:r>
+              <a:rPr>
+                <a:solidFill>
+                  <a:srgbClr val="20794D"/>
+                </a:solidFill>
+                <a:latin typeface="Courier"/>
+              </a:rPr>
+              <a:t>"Control"</a:t>
+            </a:r>
+            <a:r>
+              <a:rPr>
+                <a:solidFill>
+                  <a:srgbClr val="003B4F"/>
+                </a:solidFill>
+                <a:latin typeface="Courier"/>
+              </a:rPr>
+              <a:t>, </a:t>
+            </a:r>
+            <a:r>
+              <a:rPr>
+                <a:solidFill>
+                  <a:srgbClr val="20794D"/>
+                </a:solidFill>
+                <a:latin typeface="Courier"/>
+              </a:rPr>
+              <a:t>"Low"</a:t>
+            </a:r>
+            <a:r>
+              <a:rPr>
+                <a:solidFill>
+                  <a:srgbClr val="003B4F"/>
+                </a:solidFill>
+                <a:latin typeface="Courier"/>
+              </a:rPr>
+              <a:t>, </a:t>
+            </a:r>
+            <a:r>
+              <a:rPr>
+                <a:solidFill>
+                  <a:srgbClr val="20794D"/>
+                </a:solidFill>
+                <a:latin typeface="Courier"/>
+              </a:rPr>
+              <a:t>"High"</a:t>
+            </a:r>
+            <a:r>
+              <a:rPr>
+                <a:solidFill>
+                  <a:srgbClr val="003B4F"/>
+                </a:solidFill>
+                <a:latin typeface="Courier"/>
+              </a:rPr>
+              <a:t>), </a:t>
+            </a:r>
+            <a:r>
+              <a:rPr>
+                <a:solidFill>
+                  <a:srgbClr val="657422"/>
+                </a:solidFill>
+                <a:latin typeface="Courier"/>
+              </a:rPr>
+              <a:t>each =</a:t>
+            </a:r>
+            <a:r>
+              <a:rPr>
+                <a:solidFill>
+                  <a:srgbClr val="003B4F"/>
+                </a:solidFill>
+                <a:latin typeface="Courier"/>
+              </a:rPr>
+              <a:t> </a:t>
+            </a:r>
+            <a:r>
+              <a:rPr>
+                <a:solidFill>
+                  <a:srgbClr val="AD0000"/>
+                </a:solidFill>
+                <a:latin typeface="Courier"/>
+              </a:rPr>
+              <a:t>20</a:t>
+            </a:r>
+            <a:r>
+              <a:rPr>
+                <a:solidFill>
+                  <a:srgbClr val="003B4F"/>
+                </a:solidFill>
+                <a:latin typeface="Courier"/>
+              </a:rPr>
+              <a:t>),</a:t>
+            </a:r>
+            <a:br/>
+            <a:r>
+              <a:rPr>
+                <a:solidFill>
+                  <a:srgbClr val="003B4F"/>
+                </a:solidFill>
+                <a:latin typeface="Courier"/>
+              </a:rPr>
+              <a:t>  </a:t>
+            </a:r>
+            <a:r>
+              <a:rPr>
+                <a:solidFill>
+                  <a:srgbClr val="657422"/>
+                </a:solidFill>
+                <a:latin typeface="Courier"/>
+              </a:rPr>
+              <a:t>biomass =</a:t>
+            </a:r>
+            <a:r>
+              <a:rPr>
+                <a:solidFill>
+                  <a:srgbClr val="003B4F"/>
+                </a:solidFill>
+                <a:latin typeface="Courier"/>
+              </a:rPr>
+              <a:t> </a:t>
+            </a:r>
+            <a:r>
+              <a:rPr>
+                <a:solidFill>
+                  <a:srgbClr val="4758AB"/>
+                </a:solidFill>
+                <a:latin typeface="Courier"/>
+              </a:rPr>
+              <a:t>c</a:t>
+            </a:r>
+            <a:r>
+              <a:rPr>
+                <a:solidFill>
+                  <a:srgbClr val="003B4F"/>
+                </a:solidFill>
+                <a:latin typeface="Courier"/>
+              </a:rPr>
+              <a:t>(</a:t>
+            </a:r>
+            <a:r>
+              <a:rPr>
+                <a:solidFill>
+                  <a:srgbClr val="4758AB"/>
+                </a:solidFill>
+                <a:latin typeface="Courier"/>
+              </a:rPr>
+              <a:t>rlnorm</a:t>
+            </a:r>
+            <a:r>
+              <a:rPr>
+                <a:solidFill>
+                  <a:srgbClr val="003B4F"/>
+                </a:solidFill>
+                <a:latin typeface="Courier"/>
+              </a:rPr>
+              <a:t>(</a:t>
+            </a:r>
+            <a:r>
+              <a:rPr>
+                <a:solidFill>
+                  <a:srgbClr val="AD0000"/>
+                </a:solidFill>
+                <a:latin typeface="Courier"/>
+              </a:rPr>
+              <a:t>20</a:t>
+            </a:r>
+            <a:r>
+              <a:rPr>
+                <a:solidFill>
+                  <a:srgbClr val="003B4F"/>
+                </a:solidFill>
+                <a:latin typeface="Courier"/>
+              </a:rPr>
+              <a:t>, </a:t>
+            </a:r>
+            <a:r>
+              <a:rPr>
+                <a:solidFill>
+                  <a:srgbClr val="657422"/>
+                </a:solidFill>
+                <a:latin typeface="Courier"/>
+              </a:rPr>
+              <a:t>meanlog =</a:t>
+            </a:r>
+            <a:r>
+              <a:rPr>
+                <a:solidFill>
+                  <a:srgbClr val="003B4F"/>
+                </a:solidFill>
+                <a:latin typeface="Courier"/>
+              </a:rPr>
+              <a:t> </a:t>
+            </a:r>
+            <a:r>
+              <a:rPr>
+                <a:solidFill>
+                  <a:srgbClr val="AD0000"/>
+                </a:solidFill>
+                <a:latin typeface="Courier"/>
+              </a:rPr>
+              <a:t>2</a:t>
+            </a:r>
+            <a:r>
+              <a:rPr>
+                <a:solidFill>
+                  <a:srgbClr val="003B4F"/>
+                </a:solidFill>
+                <a:latin typeface="Courier"/>
+              </a:rPr>
+              <a:t>, </a:t>
+            </a:r>
+            <a:r>
+              <a:rPr>
+                <a:solidFill>
+                  <a:srgbClr val="657422"/>
+                </a:solidFill>
+                <a:latin typeface="Courier"/>
+              </a:rPr>
+              <a:t>sdlog =</a:t>
+            </a:r>
+            <a:r>
+              <a:rPr>
+                <a:solidFill>
+                  <a:srgbClr val="003B4F"/>
+                </a:solidFill>
+                <a:latin typeface="Courier"/>
+              </a:rPr>
+              <a:t> </a:t>
+            </a:r>
+            <a:r>
+              <a:rPr>
+                <a:solidFill>
+                  <a:srgbClr val="AD0000"/>
+                </a:solidFill>
+                <a:latin typeface="Courier"/>
+              </a:rPr>
+              <a:t>0.5</a:t>
+            </a:r>
+            <a:r>
+              <a:rPr>
+                <a:solidFill>
+                  <a:srgbClr val="003B4F"/>
+                </a:solidFill>
+                <a:latin typeface="Courier"/>
+              </a:rPr>
+              <a:t>),</a:t>
+            </a:r>
+            <a:br/>
+            <a:r>
+              <a:rPr>
+                <a:solidFill>
+                  <a:srgbClr val="003B4F"/>
+                </a:solidFill>
+                <a:latin typeface="Courier"/>
+              </a:rPr>
+              <a:t>              </a:t>
+            </a:r>
+            <a:r>
+              <a:rPr>
+                <a:solidFill>
+                  <a:srgbClr val="4758AB"/>
+                </a:solidFill>
+                <a:latin typeface="Courier"/>
+              </a:rPr>
+              <a:t>rlnorm</a:t>
+            </a:r>
+            <a:r>
+              <a:rPr>
+                <a:solidFill>
+                  <a:srgbClr val="003B4F"/>
+                </a:solidFill>
+                <a:latin typeface="Courier"/>
+              </a:rPr>
+              <a:t>(</a:t>
+            </a:r>
+            <a:r>
+              <a:rPr>
+                <a:solidFill>
+                  <a:srgbClr val="AD0000"/>
+                </a:solidFill>
+                <a:latin typeface="Courier"/>
+              </a:rPr>
+              <a:t>20</a:t>
+            </a:r>
+            <a:r>
+              <a:rPr>
+                <a:solidFill>
+                  <a:srgbClr val="003B4F"/>
+                </a:solidFill>
+                <a:latin typeface="Courier"/>
+              </a:rPr>
+              <a:t>, </a:t>
+            </a:r>
+            <a:r>
+              <a:rPr>
+                <a:solidFill>
+                  <a:srgbClr val="657422"/>
+                </a:solidFill>
+                <a:latin typeface="Courier"/>
+              </a:rPr>
+              <a:t>meanlog =</a:t>
+            </a:r>
+            <a:r>
+              <a:rPr>
+                <a:solidFill>
+                  <a:srgbClr val="003B4F"/>
+                </a:solidFill>
+                <a:latin typeface="Courier"/>
+              </a:rPr>
+              <a:t> </a:t>
+            </a:r>
+            <a:r>
+              <a:rPr>
+                <a:solidFill>
+                  <a:srgbClr val="AD0000"/>
+                </a:solidFill>
+                <a:latin typeface="Courier"/>
+              </a:rPr>
+              <a:t>2.5</a:t>
+            </a:r>
+            <a:r>
+              <a:rPr>
+                <a:solidFill>
+                  <a:srgbClr val="003B4F"/>
+                </a:solidFill>
+                <a:latin typeface="Courier"/>
+              </a:rPr>
+              <a:t>, </a:t>
+            </a:r>
+            <a:r>
+              <a:rPr>
+                <a:solidFill>
+                  <a:srgbClr val="657422"/>
+                </a:solidFill>
+                <a:latin typeface="Courier"/>
+              </a:rPr>
+              <a:t>sdlog =</a:t>
+            </a:r>
+            <a:r>
+              <a:rPr>
+                <a:solidFill>
+                  <a:srgbClr val="003B4F"/>
+                </a:solidFill>
+                <a:latin typeface="Courier"/>
+              </a:rPr>
+              <a:t> </a:t>
+            </a:r>
+            <a:r>
+              <a:rPr>
+                <a:solidFill>
+                  <a:srgbClr val="AD0000"/>
+                </a:solidFill>
+                <a:latin typeface="Courier"/>
+              </a:rPr>
+              <a:t>0.5</a:t>
+            </a:r>
+            <a:r>
+              <a:rPr>
+                <a:solidFill>
+                  <a:srgbClr val="003B4F"/>
+                </a:solidFill>
+                <a:latin typeface="Courier"/>
+              </a:rPr>
+              <a:t>),</a:t>
+            </a:r>
+            <a:br/>
+            <a:r>
+              <a:rPr>
+                <a:solidFill>
+                  <a:srgbClr val="003B4F"/>
+                </a:solidFill>
+                <a:latin typeface="Courier"/>
+              </a:rPr>
+              <a:t>              </a:t>
+            </a:r>
+            <a:r>
+              <a:rPr>
+                <a:solidFill>
+                  <a:srgbClr val="4758AB"/>
+                </a:solidFill>
+                <a:latin typeface="Courier"/>
+              </a:rPr>
+              <a:t>rlnorm</a:t>
+            </a:r>
+            <a:r>
+              <a:rPr>
+                <a:solidFill>
+                  <a:srgbClr val="003B4F"/>
+                </a:solidFill>
+                <a:latin typeface="Courier"/>
+              </a:rPr>
+              <a:t>(</a:t>
+            </a:r>
+            <a:r>
+              <a:rPr>
+                <a:solidFill>
+                  <a:srgbClr val="AD0000"/>
+                </a:solidFill>
+                <a:latin typeface="Courier"/>
+              </a:rPr>
+              <a:t>20</a:t>
+            </a:r>
+            <a:r>
+              <a:rPr>
+                <a:solidFill>
+                  <a:srgbClr val="003B4F"/>
+                </a:solidFill>
+                <a:latin typeface="Courier"/>
+              </a:rPr>
+              <a:t>, </a:t>
+            </a:r>
+            <a:r>
+              <a:rPr>
+                <a:solidFill>
+                  <a:srgbClr val="657422"/>
+                </a:solidFill>
+                <a:latin typeface="Courier"/>
+              </a:rPr>
+              <a:t>meanlog =</a:t>
+            </a:r>
+            <a:r>
+              <a:rPr>
+                <a:solidFill>
+                  <a:srgbClr val="003B4F"/>
+                </a:solidFill>
+                <a:latin typeface="Courier"/>
+              </a:rPr>
+              <a:t> </a:t>
+            </a:r>
+            <a:r>
+              <a:rPr>
+                <a:solidFill>
+                  <a:srgbClr val="AD0000"/>
+                </a:solidFill>
+                <a:latin typeface="Courier"/>
+              </a:rPr>
+              <a:t>3</a:t>
+            </a:r>
+            <a:r>
+              <a:rPr>
+                <a:solidFill>
+                  <a:srgbClr val="003B4F"/>
+                </a:solidFill>
+                <a:latin typeface="Courier"/>
+              </a:rPr>
+              <a:t>, </a:t>
+            </a:r>
+            <a:r>
+              <a:rPr>
+                <a:solidFill>
+                  <a:srgbClr val="657422"/>
+                </a:solidFill>
+                <a:latin typeface="Courier"/>
+              </a:rPr>
+              <a:t>sdlog =</a:t>
+            </a:r>
+            <a:r>
+              <a:rPr>
+                <a:solidFill>
+                  <a:srgbClr val="003B4F"/>
+                </a:solidFill>
+                <a:latin typeface="Courier"/>
+              </a:rPr>
+              <a:t> </a:t>
+            </a:r>
+            <a:r>
+              <a:rPr>
+                <a:solidFill>
+                  <a:srgbClr val="AD0000"/>
+                </a:solidFill>
+                <a:latin typeface="Courier"/>
+              </a:rPr>
+              <a:t>0.5</a:t>
+            </a:r>
+            <a:r>
+              <a:rPr>
+                <a:solidFill>
+                  <a:srgbClr val="003B4F"/>
+                </a:solidFill>
+                <a:latin typeface="Courier"/>
+              </a:rPr>
+              <a:t>))</a:t>
+            </a:r>
+            <a:br/>
+            <a:r>
+              <a:rPr>
+                <a:solidFill>
+                  <a:srgbClr val="003B4F"/>
+                </a:solidFill>
+                <a:latin typeface="Courier"/>
+              </a:rPr>
+              <a:t>)</a:t>
+            </a:r>
+            <a:br/>
+            <a:br/>
+            <a:r>
+              <a:rPr>
+                <a:solidFill>
+                  <a:srgbClr val="5E5E5E"/>
+                </a:solidFill>
+                <a:latin typeface="Courier"/>
+              </a:rPr>
+              <a:t># Approach 1: Log transformation + ANOVA</a:t>
+            </a:r>
+            <a:br/>
+            <a:r>
+              <a:rPr>
+                <a:solidFill>
+                  <a:srgbClr val="003B4F"/>
+                </a:solidFill>
+                <a:latin typeface="Courier"/>
+              </a:rPr>
+              <a:t>model_log &lt;- </a:t>
+            </a:r>
+            <a:r>
+              <a:rPr>
+                <a:solidFill>
+                  <a:srgbClr val="4758AB"/>
+                </a:solidFill>
+                <a:latin typeface="Courier"/>
+              </a:rPr>
+              <a:t>lm</a:t>
+            </a:r>
+            <a:r>
+              <a:rPr>
+                <a:solidFill>
+                  <a:srgbClr val="003B4F"/>
+                </a:solidFill>
+                <a:latin typeface="Courier"/>
+              </a:rPr>
+              <a:t>(</a:t>
+            </a:r>
+            <a:r>
+              <a:rPr>
+                <a:solidFill>
+                  <a:srgbClr val="4758AB"/>
+                </a:solidFill>
+                <a:latin typeface="Courier"/>
+              </a:rPr>
+              <a:t>log</a:t>
+            </a:r>
+            <a:r>
+              <a:rPr>
+                <a:solidFill>
+                  <a:srgbClr val="003B4F"/>
+                </a:solidFill>
+                <a:latin typeface="Courier"/>
+              </a:rPr>
+              <a:t>(biomass) </a:t>
+            </a:r>
+            <a:r>
+              <a:rPr>
+                <a:solidFill>
+                  <a:srgbClr val="5E5E5E"/>
+                </a:solidFill>
+                <a:latin typeface="Courier"/>
+              </a:rPr>
+              <a:t>~</a:t>
+            </a:r>
+            <a:r>
+              <a:rPr>
+                <a:solidFill>
+                  <a:srgbClr val="003B4F"/>
+                </a:solidFill>
+                <a:latin typeface="Courier"/>
+              </a:rPr>
+              <a:t> treatment, </a:t>
+            </a:r>
+            <a:r>
+              <a:rPr>
+                <a:solidFill>
+                  <a:srgbClr val="657422"/>
+                </a:solidFill>
+                <a:latin typeface="Courier"/>
+              </a:rPr>
+              <a:t>data =</a:t>
+            </a:r>
+            <a:r>
+              <a:rPr>
+                <a:solidFill>
+                  <a:srgbClr val="003B4F"/>
+                </a:solidFill>
+                <a:latin typeface="Courier"/>
+              </a:rPr>
+              <a:t> treatment_data)</a:t>
+            </a:r>
+            <a:br/>
+            <a:br/>
+            <a:r>
+              <a:rPr>
+                <a:solidFill>
+                  <a:srgbClr val="5E5E5E"/>
+                </a:solidFill>
+                <a:latin typeface="Courier"/>
+              </a:rPr>
+              <a:t># Approach 2: Gamma GLM with log link</a:t>
+            </a:r>
+            <a:br/>
+            <a:r>
+              <a:rPr>
+                <a:solidFill>
+                  <a:srgbClr val="003B4F"/>
+                </a:solidFill>
+                <a:latin typeface="Courier"/>
+              </a:rPr>
+              <a:t>model_glm &lt;- </a:t>
+            </a:r>
+            <a:r>
+              <a:rPr>
+                <a:solidFill>
+                  <a:srgbClr val="4758AB"/>
+                </a:solidFill>
+                <a:latin typeface="Courier"/>
+              </a:rPr>
+              <a:t>glm</a:t>
+            </a:r>
+            <a:r>
+              <a:rPr>
+                <a:solidFill>
+                  <a:srgbClr val="003B4F"/>
+                </a:solidFill>
+                <a:latin typeface="Courier"/>
+              </a:rPr>
+              <a:t>(biomass </a:t>
+            </a:r>
+            <a:r>
+              <a:rPr>
+                <a:solidFill>
+                  <a:srgbClr val="5E5E5E"/>
+                </a:solidFill>
+                <a:latin typeface="Courier"/>
+              </a:rPr>
+              <a:t>~</a:t>
+            </a:r>
+            <a:r>
+              <a:rPr>
+                <a:solidFill>
+                  <a:srgbClr val="003B4F"/>
+                </a:solidFill>
+                <a:latin typeface="Courier"/>
+              </a:rPr>
+              <a:t> treatment, </a:t>
+            </a:r>
+            <a:br/>
+            <a:r>
+              <a:rPr>
+                <a:solidFill>
+                  <a:srgbClr val="003B4F"/>
+                </a:solidFill>
+                <a:latin typeface="Courier"/>
+              </a:rPr>
+              <a:t>                 </a:t>
+            </a:r>
+            <a:r>
+              <a:rPr>
+                <a:solidFill>
+                  <a:srgbClr val="657422"/>
+                </a:solidFill>
+                <a:latin typeface="Courier"/>
+              </a:rPr>
+              <a:t>family =</a:t>
+            </a:r>
+            <a:r>
+              <a:rPr>
+                <a:solidFill>
+                  <a:srgbClr val="003B4F"/>
+                </a:solidFill>
+                <a:latin typeface="Courier"/>
+              </a:rPr>
+              <a:t> </a:t>
+            </a:r>
+            <a:r>
+              <a:rPr>
+                <a:solidFill>
+                  <a:srgbClr val="4758AB"/>
+                </a:solidFill>
+                <a:latin typeface="Courier"/>
+              </a:rPr>
+              <a:t>Gamma</a:t>
+            </a:r>
+            <a:r>
+              <a:rPr>
+                <a:solidFill>
+                  <a:srgbClr val="003B4F"/>
+                </a:solidFill>
+                <a:latin typeface="Courier"/>
+              </a:rPr>
+              <a:t>(</a:t>
+            </a:r>
+            <a:r>
+              <a:rPr>
+                <a:solidFill>
+                  <a:srgbClr val="657422"/>
+                </a:solidFill>
+                <a:latin typeface="Courier"/>
+              </a:rPr>
+              <a:t>link =</a:t>
+            </a:r>
+            <a:r>
+              <a:rPr>
+                <a:solidFill>
+                  <a:srgbClr val="003B4F"/>
+                </a:solidFill>
+                <a:latin typeface="Courier"/>
+              </a:rPr>
+              <a:t> </a:t>
+            </a:r>
+            <a:r>
+              <a:rPr>
+                <a:solidFill>
+                  <a:srgbClr val="20794D"/>
+                </a:solidFill>
+                <a:latin typeface="Courier"/>
+              </a:rPr>
+              <a:t>"log"</a:t>
+            </a:r>
+            <a:r>
+              <a:rPr>
+                <a:solidFill>
+                  <a:srgbClr val="003B4F"/>
+                </a:solidFill>
+                <a:latin typeface="Courier"/>
+              </a:rPr>
+              <a:t>), </a:t>
+            </a:r>
+            <a:br/>
+            <a:r>
+              <a:rPr>
+                <a:solidFill>
+                  <a:srgbClr val="003B4F"/>
+                </a:solidFill>
+                <a:latin typeface="Courier"/>
+              </a:rPr>
+              <a:t>                 </a:t>
+            </a:r>
+            <a:r>
+              <a:rPr>
+                <a:solidFill>
+                  <a:srgbClr val="657422"/>
+                </a:solidFill>
+                <a:latin typeface="Courier"/>
+              </a:rPr>
+              <a:t>data =</a:t>
+            </a:r>
+            <a:r>
+              <a:rPr>
+                <a:solidFill>
+                  <a:srgbClr val="003B4F"/>
+                </a:solidFill>
+                <a:latin typeface="Courier"/>
+              </a:rPr>
+              <a:t> treatment_data)</a:t>
+            </a:r>
+            <a:br/>
+            <a:br/>
+            <a:r>
+              <a:rPr>
+                <a:solidFill>
+                  <a:srgbClr val="5E5E5E"/>
+                </a:solidFill>
+                <a:latin typeface="Courier"/>
+              </a:rPr>
+              <a:t># Compare predictions on original scale</a:t>
+            </a:r>
+            <a:br/>
+            <a:r>
+              <a:rPr>
+                <a:solidFill>
+                  <a:srgbClr val="4758AB"/>
+                </a:solidFill>
+                <a:latin typeface="Courier"/>
+              </a:rPr>
+              <a:t>cat</a:t>
+            </a:r>
+            <a:r>
+              <a:rPr>
+                <a:solidFill>
+                  <a:srgbClr val="003B4F"/>
+                </a:solidFill>
+                <a:latin typeface="Courier"/>
+              </a:rPr>
+              <a:t>(</a:t>
+            </a:r>
+            <a:r>
+              <a:rPr>
+                <a:solidFill>
+                  <a:srgbClr val="20794D"/>
+                </a:solidFill>
+                <a:latin typeface="Courier"/>
+              </a:rPr>
+              <a:t>"logged response variable</a:t>
+            </a:r>
+            <a:r>
+              <a:rPr>
+                <a:solidFill>
+                  <a:srgbClr val="5E5E5E"/>
+                </a:solidFill>
+                <a:latin typeface="Courier"/>
+              </a:rPr>
+              <a:t>\n\n</a:t>
+            </a:r>
+            <a:r>
+              <a:rPr>
+                <a:solidFill>
+                  <a:srgbClr val="20794D"/>
+                </a:solidFill>
+                <a:latin typeface="Courier"/>
+              </a:rPr>
+              <a:t>"</a:t>
+            </a:r>
+            <a:r>
+              <a:rPr>
+                <a:solidFill>
+                  <a:srgbClr val="003B4F"/>
+                </a:solidFill>
+                <a:latin typeface="Courier"/>
+              </a:rPr>
+              <a:t>)</a:t>
+            </a:r>
+            <a:br/>
+            <a:r>
+              <a:rPr i="1">
+                <a:solidFill>
+                  <a:srgbClr val="5E5E5E"/>
+                </a:solidFill>
+                <a:latin typeface="Courier"/>
+              </a:rPr>
+              <a:t>## logged response variable</a:t>
+            </a:r>
+            <a:br/>
+            <a:r>
+              <a:rPr>
+                <a:solidFill>
+                  <a:srgbClr val="4758AB"/>
+                </a:solidFill>
+                <a:latin typeface="Courier"/>
+              </a:rPr>
+              <a:t>emmeans</a:t>
+            </a:r>
+            <a:r>
+              <a:rPr>
+                <a:solidFill>
+                  <a:srgbClr val="003B4F"/>
+                </a:solidFill>
+                <a:latin typeface="Courier"/>
+              </a:rPr>
+              <a:t>(model_log, </a:t>
+            </a:r>
+            <a:r>
+              <a:rPr>
+                <a:solidFill>
+                  <a:srgbClr val="5E5E5E"/>
+                </a:solidFill>
+                <a:latin typeface="Courier"/>
+              </a:rPr>
+              <a:t>~</a:t>
+            </a:r>
+            <a:r>
+              <a:rPr>
+                <a:solidFill>
+                  <a:srgbClr val="003B4F"/>
+                </a:solidFill>
+                <a:latin typeface="Courier"/>
+              </a:rPr>
+              <a:t>treatment, </a:t>
+            </a:r>
+            <a:r>
+              <a:rPr>
+                <a:solidFill>
+                  <a:srgbClr val="657422"/>
+                </a:solidFill>
+                <a:latin typeface="Courier"/>
+              </a:rPr>
+              <a:t>type =</a:t>
+            </a:r>
+            <a:r>
+              <a:rPr>
+                <a:solidFill>
+                  <a:srgbClr val="003B4F"/>
+                </a:solidFill>
+                <a:latin typeface="Courier"/>
+              </a:rPr>
+              <a:t> </a:t>
+            </a:r>
+            <a:r>
+              <a:rPr>
+                <a:solidFill>
+                  <a:srgbClr val="20794D"/>
+                </a:solidFill>
+                <a:latin typeface="Courier"/>
+              </a:rPr>
+              <a:t>"response"</a:t>
+            </a:r>
+            <a:r>
+              <a:rPr>
+                <a:solidFill>
+                  <a:srgbClr val="003B4F"/>
+                </a:solidFill>
+                <a:latin typeface="Courier"/>
+              </a:rPr>
+              <a:t>)  </a:t>
+            </a:r>
+            <a:r>
+              <a:rPr>
+                <a:solidFill>
+                  <a:srgbClr val="5E5E5E"/>
+                </a:solidFill>
+                <a:latin typeface="Courier"/>
+              </a:rPr>
+              <a:t># Geometric means</a:t>
+            </a:r>
+            <a:br/>
+            <a:r>
+              <a:rPr i="1">
+                <a:solidFill>
+                  <a:srgbClr val="5E5E5E"/>
+                </a:solidFill>
+                <a:latin typeface="Courier"/>
+              </a:rPr>
+              <a:t>##  treatment response    SE df lower.CL upper.CL</a:t>
+            </a:r>
+            <a:br/>
+            <a:r>
+              <a:rPr i="1">
+                <a:solidFill>
+                  <a:srgbClr val="5E5E5E"/>
+                </a:solidFill>
+                <a:latin typeface="Courier"/>
+              </a:rPr>
+              <a:t>##  Control       7.93 0.818 57     6.45     9.75</a:t>
+            </a:r>
+            <a:br/>
+            <a:r>
+              <a:rPr i="1">
+                <a:solidFill>
+                  <a:srgbClr val="5E5E5E"/>
+                </a:solidFill>
+                <a:latin typeface="Courier"/>
+              </a:rPr>
+              <a:t>##  High         21.18 2.180 57    17.23    26.04</a:t>
+            </a:r>
+            <a:br/>
+            <a:r>
+              <a:rPr i="1">
+                <a:solidFill>
+                  <a:srgbClr val="5E5E5E"/>
+                </a:solidFill>
+                <a:latin typeface="Courier"/>
+              </a:rPr>
+              <a:t>##  Low          11.87 1.220 57     9.66    14.60</a:t>
+            </a:r>
+            <a:br/>
+            <a:r>
+              <a:rPr i="1">
+                <a:solidFill>
+                  <a:srgbClr val="5E5E5E"/>
+                </a:solidFill>
+                <a:latin typeface="Courier"/>
+              </a:rPr>
+              <a:t>## </a:t>
+            </a:r>
+            <a:br/>
+            <a:r>
+              <a:rPr i="1">
+                <a:solidFill>
+                  <a:srgbClr val="5E5E5E"/>
+                </a:solidFill>
+                <a:latin typeface="Courier"/>
+              </a:rPr>
+              <a:t>## Confidence level used: 0.95 </a:t>
+            </a:r>
+            <a:br/>
+            <a:r>
+              <a:rPr i="1">
+                <a:solidFill>
+                  <a:srgbClr val="5E5E5E"/>
+                </a:solidFill>
+                <a:latin typeface="Courier"/>
+              </a:rPr>
+              <a:t>## Intervals are back-transformed from the log scale</a:t>
+            </a:r>
+            <a:br/>
+            <a:r>
+              <a:rPr>
+                <a:solidFill>
+                  <a:srgbClr val="4758AB"/>
+                </a:solidFill>
+                <a:latin typeface="Courier"/>
+              </a:rPr>
+              <a:t>cat</a:t>
+            </a:r>
+            <a:r>
+              <a:rPr>
+                <a:solidFill>
+                  <a:srgbClr val="003B4F"/>
+                </a:solidFill>
+                <a:latin typeface="Courier"/>
+              </a:rPr>
+              <a:t>(</a:t>
+            </a:r>
+            <a:r>
+              <a:rPr>
+                <a:solidFill>
+                  <a:srgbClr val="20794D"/>
+                </a:solidFill>
+                <a:latin typeface="Courier"/>
+              </a:rPr>
+              <a:t>"</a:t>
+            </a:r>
+            <a:r>
+              <a:rPr>
+                <a:solidFill>
+                  <a:srgbClr val="5E5E5E"/>
+                </a:solidFill>
+                <a:latin typeface="Courier"/>
+              </a:rPr>
+              <a:t>\n\n</a:t>
+            </a:r>
+            <a:r>
+              <a:rPr>
+                <a:solidFill>
+                  <a:srgbClr val="20794D"/>
+                </a:solidFill>
+                <a:latin typeface="Courier"/>
+              </a:rPr>
+              <a:t>"</a:t>
+            </a:r>
+            <a:r>
+              <a:rPr>
+                <a:solidFill>
+                  <a:srgbClr val="003B4F"/>
+                </a:solidFill>
+                <a:latin typeface="Courier"/>
+              </a:rPr>
+              <a:t>)</a:t>
+            </a:r>
+            <a:br/>
+            <a:r>
+              <a:rPr>
+                <a:solidFill>
+                  <a:srgbClr val="4758AB"/>
+                </a:solidFill>
+                <a:latin typeface="Courier"/>
+              </a:rPr>
+              <a:t>cat</a:t>
+            </a:r>
+            <a:r>
+              <a:rPr>
+                <a:solidFill>
+                  <a:srgbClr val="003B4F"/>
+                </a:solidFill>
+                <a:latin typeface="Courier"/>
+              </a:rPr>
+              <a:t>(</a:t>
+            </a:r>
+            <a:r>
+              <a:rPr>
+                <a:solidFill>
+                  <a:srgbClr val="20794D"/>
+                </a:solidFill>
+                <a:latin typeface="Courier"/>
+              </a:rPr>
+              <a:t>"using glm opn original scale</a:t>
+            </a:r>
+            <a:r>
+              <a:rPr>
+                <a:solidFill>
+                  <a:srgbClr val="5E5E5E"/>
+                </a:solidFill>
+                <a:latin typeface="Courier"/>
+              </a:rPr>
+              <a:t>\n\n</a:t>
+            </a:r>
+            <a:r>
+              <a:rPr>
+                <a:solidFill>
+                  <a:srgbClr val="20794D"/>
+                </a:solidFill>
+                <a:latin typeface="Courier"/>
+              </a:rPr>
+              <a:t>"</a:t>
+            </a:r>
+            <a:r>
+              <a:rPr>
+                <a:solidFill>
+                  <a:srgbClr val="003B4F"/>
+                </a:solidFill>
+                <a:latin typeface="Courier"/>
+              </a:rPr>
+              <a:t>)</a:t>
+            </a:r>
+            <a:br/>
+            <a:r>
+              <a:rPr i="1">
+                <a:solidFill>
+                  <a:srgbClr val="5E5E5E"/>
+                </a:solidFill>
+                <a:latin typeface="Courier"/>
+              </a:rPr>
+              <a:t>## using glm opn original scale</a:t>
+            </a:r>
+            <a:br/>
+            <a:r>
+              <a:rPr>
+                <a:solidFill>
+                  <a:srgbClr val="4758AB"/>
+                </a:solidFill>
+                <a:latin typeface="Courier"/>
+              </a:rPr>
+              <a:t>emmeans</a:t>
+            </a:r>
+            <a:r>
+              <a:rPr>
+                <a:solidFill>
+                  <a:srgbClr val="003B4F"/>
+                </a:solidFill>
+                <a:latin typeface="Courier"/>
+              </a:rPr>
+              <a:t>(model_glm, </a:t>
+            </a:r>
+            <a:r>
+              <a:rPr>
+                <a:solidFill>
+                  <a:srgbClr val="5E5E5E"/>
+                </a:solidFill>
+                <a:latin typeface="Courier"/>
+              </a:rPr>
+              <a:t>~</a:t>
+            </a:r>
+            <a:r>
+              <a:rPr>
+                <a:solidFill>
+                  <a:srgbClr val="003B4F"/>
+                </a:solidFill>
+                <a:latin typeface="Courier"/>
+              </a:rPr>
+              <a:t>treatment, </a:t>
+            </a:r>
+            <a:r>
+              <a:rPr>
+                <a:solidFill>
+                  <a:srgbClr val="657422"/>
+                </a:solidFill>
+                <a:latin typeface="Courier"/>
+              </a:rPr>
+              <a:t>type =</a:t>
+            </a:r>
+            <a:r>
+              <a:rPr>
+                <a:solidFill>
+                  <a:srgbClr val="003B4F"/>
+                </a:solidFill>
+                <a:latin typeface="Courier"/>
+              </a:rPr>
+              <a:t> </a:t>
+            </a:r>
+            <a:r>
+              <a:rPr>
+                <a:solidFill>
+                  <a:srgbClr val="20794D"/>
+                </a:solidFill>
+                <a:latin typeface="Courier"/>
+              </a:rPr>
+              <a:t>"response"</a:t>
+            </a:r>
+            <a:r>
+              <a:rPr>
+                <a:solidFill>
+                  <a:srgbClr val="003B4F"/>
+                </a:solidFill>
+                <a:latin typeface="Courier"/>
+              </a:rPr>
+              <a:t>)  </a:t>
+            </a:r>
+            <a:r>
+              <a:rPr>
+                <a:solidFill>
+                  <a:srgbClr val="5E5E5E"/>
+                </a:solidFill>
+                <a:latin typeface="Courier"/>
+              </a:rPr>
+              <a:t># Arithmetic means</a:t>
+            </a:r>
+            <a:br/>
+            <a:r>
+              <a:rPr i="1">
+                <a:solidFill>
+                  <a:srgbClr val="5E5E5E"/>
+                </a:solidFill>
+                <a:latin typeface="Courier"/>
+              </a:rPr>
+              <a:t>##  treatment response    SE df lower.CL upper.CL</a:t>
+            </a:r>
+            <a:br/>
+            <a:r>
+              <a:rPr i="1">
+                <a:solidFill>
+                  <a:srgbClr val="5E5E5E"/>
+                </a:solidFill>
+                <a:latin typeface="Courier"/>
+              </a:rPr>
+              <a:t>##  Control       8.86 0.939 57     7.16     11.0</a:t>
+            </a:r>
+            <a:br/>
+            <a:r>
+              <a:rPr i="1">
+                <a:solidFill>
+                  <a:srgbClr val="5E5E5E"/>
+                </a:solidFill>
+                <a:latin typeface="Courier"/>
+              </a:rPr>
+              <a:t>##  High         23.73 2.520 57    19.19     29.3</a:t>
+            </a:r>
+            <a:br/>
+            <a:r>
+              <a:rPr i="1">
+                <a:solidFill>
+                  <a:srgbClr val="5E5E5E"/>
+                </a:solidFill>
+                <a:latin typeface="Courier"/>
+              </a:rPr>
+              <a:t>##  Low          12.84 1.360 57    10.39     15.9</a:t>
+            </a:r>
+            <a:br/>
+            <a:r>
+              <a:rPr i="1">
+                <a:solidFill>
+                  <a:srgbClr val="5E5E5E"/>
+                </a:solidFill>
+                <a:latin typeface="Courier"/>
+              </a:rPr>
+              <a:t>## </a:t>
+            </a:r>
+            <a:br/>
+            <a:r>
+              <a:rPr i="1">
+                <a:solidFill>
+                  <a:srgbClr val="5E5E5E"/>
+                </a:solidFill>
+                <a:latin typeface="Courier"/>
+              </a:rPr>
+              <a:t>## Confidence level used: 0.95 </a:t>
+            </a:r>
+            <a:br/>
+            <a:r>
+              <a:rPr i="1">
+                <a:solidFill>
+                  <a:srgbClr val="5E5E5E"/>
+                </a:solidFill>
+                <a:latin typeface="Courier"/>
+              </a:rPr>
+              <a:t>## Intervals are back-transformed from the log scale</a:t>
+            </a:r>
+            <a:br/>
+            <a:br/>
+            <a:r>
+              <a:rPr>
+                <a:solidFill>
+                  <a:srgbClr val="5E5E5E"/>
+                </a:solidFill>
+                <a:latin typeface="Courier"/>
+              </a:rPr>
+              <a:t># Show how the interpretation differs</a:t>
+            </a:r>
+          </a:p>
+        </p:txBody>
+      </p:sp>
+    </p:spTree>
+  </p:cSld>
+</p:sld>
+</file>
+
+<file path=ppt/slides/slide2.xml><?xml version="1.0" encoding="utf-8"?>
+<p:sld xmlns:a="http://schemas.openxmlformats.org/drawingml/2006/main" xmlns:r="http://schemas.openxmlformats.org/officeDocument/2006/relationships" xmlns:p="http://schemas.openxmlformats.org/presentationml/2006/main">
+  <p:cSld>
+    <p:spTree>
+      <p:nvGrpSpPr>
+        <p:cNvPr id="1" name=""/>
+        <p:cNvGrpSpPr/>
+        <p:nvPr/>
+      </p:nvGrpSpPr>
+      <p:grpSpPr>
+        <a:xfrm>
+          <a:off x="0" y="0"/>
+          <a:ext cx="0" cy="0"/>
+          <a:chOff x="0" y="0"/>
+          <a:chExt cx="0" cy="0"/>
+        </a:xfrm>
+      </p:grpSpPr>
+      <p:sp>
+        <p:nvSpPr>
+          <p:cNvPr id="2" name="Title 1"/>
+          <p:cNvSpPr>
+            <a:spLocks noGrp="1"/>
+          </p:cNvSpPr>
+          <p:nvPr>
+            <p:ph type="title"/>
+          </p:nvPr>
+        </p:nvSpPr>
+        <p:spPr>
+          <a:xfrm>
+            <a:off x="0" y="0"/>
+            <a:ext cx="9144000" cy="582780"/>
+          </a:xfrm>
+        </p:spPr>
+        <p:txBody>
+          <a:bodyPr/>
+          <a:lstStyle/>
+          <a:p>
+            <a:pPr lvl="0" indent="0" marL="0">
+              <a:buNone/>
+            </a:pPr>
+            <a:r>
+              <a:rPr/>
+              <a:t>Lecture 13: Review of ANOVAs</a:t>
+            </a:r>
+          </a:p>
+        </p:txBody>
+      </p:sp>
+      <p:sp>
+        <p:nvSpPr>
+          <p:cNvPr id="3" name="Content Placeholder 2"/>
+          <p:cNvSpPr>
+            <a:spLocks noGrp="1"/>
+          </p:cNvSpPr>
+          <p:nvPr>
+            <p:ph idx="1"/>
+          </p:nvPr>
+        </p:nvSpPr>
+        <p:spPr/>
+        <p:txBody>
+          <a:bodyPr/>
+          <a:lstStyle/>
+          <a:p>
+            <a:pPr lvl="0" indent="0" marL="0">
+              <a:spcBef>
+                <a:spcPts val="3000"/>
+              </a:spcBef>
+              <a:buNone/>
+            </a:pPr>
+            <a:r>
+              <a:rPr b="1"/>
+              <a:t>Review</a:t>
+            </a:r>
+          </a:p>
+          <a:p>
+            <a:pPr lvl="0"/>
+            <a:r>
+              <a:rPr/>
+              <a:t>ANOVA</a:t>
+            </a:r>
+          </a:p>
+          <a:p>
+            <a:pPr lvl="0"/>
+            <a:r>
+              <a:rPr/>
+              <a:t>Factorial ANOVA</a:t>
+            </a:r>
+          </a:p>
+          <a:p>
+            <a:pPr lvl="0"/>
+            <a:r>
+              <a:rPr/>
+              <a:t>Nested ANOVA</a:t>
+            </a:r>
+          </a:p>
+          <a:p>
+            <a:pPr lvl="0"/>
+            <a:r>
+              <a:rPr/>
+              <a:t>ASSUMPTIONS OF ALL</a:t>
+            </a:r>
+          </a:p>
+          <a:p>
+            <a:pPr lvl="1"/>
+            <a:r>
+              <a:rPr/>
+              <a:t>Homogeneity of variance - Levenes or Bartletts Test</a:t>
+            </a:r>
+          </a:p>
+          <a:p>
+            <a:pPr lvl="1"/>
+            <a:r>
+              <a:rPr/>
+              <a:t>Normality of Residuals</a:t>
+            </a:r>
+          </a:p>
+          <a:p>
+            <a:pPr lvl="1"/>
+            <a:r>
+              <a:rPr/>
+              <a:t>Independence</a:t>
+            </a:r>
+          </a:p>
+        </p:txBody>
+      </p:sp>
+    </p:spTree>
+  </p:cSld>
+</p:sld>
+</file>
+
+<file path=ppt/slides/slide20.xml><?xml version="1.0" encoding="utf-8"?>
 <p:sld xmlns:a="http://schemas.openxmlformats.org/drawingml/2006/main" xmlns:r="http://schemas.openxmlformats.org/officeDocument/2006/relationships" xmlns:p="http://schemas.openxmlformats.org/presentationml/2006/main">
   <p:cSld>
     <p:spTree>
@@ -6354,7 +8278,7 @@
 </p:sld>
 </file>
 
-<file path=ppt/slides/slide19.xml><?xml version="1.0" encoding="utf-8"?>
+<file path=ppt/slides/slide21.xml><?xml version="1.0" encoding="utf-8"?>
 <p:sld xmlns:a="http://schemas.openxmlformats.org/drawingml/2006/main" xmlns:r="http://schemas.openxmlformats.org/officeDocument/2006/relationships" xmlns:p="http://schemas.openxmlformats.org/presentationml/2006/main">
   <p:cSld>
     <p:spTree>
@@ -6444,7 +8368,7 @@
 </p:sld>
 </file>
 
-<file path=ppt/slides/slide2.xml><?xml version="1.0" encoding="utf-8"?>
+<file path=ppt/slides/slide22.xml><?xml version="1.0" encoding="utf-8"?>
 <p:sld xmlns:a="http://schemas.openxmlformats.org/drawingml/2006/main" xmlns:r="http://schemas.openxmlformats.org/officeDocument/2006/relationships" xmlns:p="http://schemas.openxmlformats.org/presentationml/2006/main">
   <p:cSld>
     <p:spTree>
@@ -6486,7 +8410,7 @@
             </a:pPr>
             <a:r>
               <a:rPr/>
-              <a:t>Lecture 13: Review of ANOVAs</a:t>
+              <a:t>Example: Lizard Presence on Islands</a:t>
             </a:r>
           </a:p>
         </p:txBody>
@@ -6507,63 +8431,409 @@
           <a:lstStyle/>
           <a:p>
             <a:pPr lvl="0" indent="0" marL="0">
-              <a:spcBef>
-                <a:spcPts val="3000"/>
-              </a:spcBef>
-              <a:buNone/>
-            </a:pPr>
-            <a:r>
-              <a:rPr b="1"/>
-              <a:t>Review</a:t>
-            </a:r>
-          </a:p>
-          <a:p>
-            <a:pPr lvl="0"/>
-            <a:r>
-              <a:rPr/>
-              <a:t>ANOVA</a:t>
-            </a:r>
-          </a:p>
-          <a:p>
-            <a:pPr lvl="0"/>
-            <a:r>
-              <a:rPr/>
-              <a:t>Factorial ANOVA</a:t>
-            </a:r>
-          </a:p>
-          <a:p>
-            <a:pPr lvl="0"/>
-            <a:r>
-              <a:rPr/>
-              <a:t>Nested ANOVA</a:t>
-            </a:r>
-          </a:p>
-          <a:p>
-            <a:pPr lvl="0"/>
-            <a:r>
-              <a:rPr/>
-              <a:t>ASSUMPTIONS OF ALL</a:t>
-            </a:r>
-          </a:p>
-          <a:p>
-            <a:pPr lvl="1"/>
-            <a:r>
-              <a:rPr/>
-              <a:t>Homogeneity of variance - Levenes or Bartletts Test</a:t>
-            </a:r>
-          </a:p>
-          <a:p>
-            <a:pPr lvl="1"/>
-            <a:r>
-              <a:rPr/>
-              <a:t>Normality of Residuals</a:t>
-            </a:r>
-          </a:p>
-          <a:p>
-            <a:pPr lvl="1"/>
-            <a:r>
-              <a:rPr/>
-              <a:t>Independence</a:t>
+              <a:buNone/>
+            </a:pPr>
+            <a:r>
+              <a:rPr/>
+              <a:t>Based on the example from Polis et al. (1998), we’ll model the presence/absence of lizards (</a:t>
+            </a:r>
+            <a:r>
+              <a:rPr i="1"/>
+              <a:t>Uta</a:t>
+            </a:r>
+            <a:r>
+              <a:rPr/>
+              <a:t>) on islands in the Gulf of California based on perimeter/area ratio.</a:t>
+            </a:r>
+          </a:p>
+          <a:p>
+            <a:pPr lvl="0" indent="0">
+              <a:buNone/>
+            </a:pPr>
+            <a:r>
+              <a:rPr>
+                <a:solidFill>
+                  <a:srgbClr val="5E5E5E"/>
+                </a:solidFill>
+                <a:latin typeface="Courier"/>
+              </a:rPr>
+              <a:t># Fit the logistic regression model</a:t>
+            </a:r>
+            <a:br/>
+            <a:r>
+              <a:rPr>
+                <a:solidFill>
+                  <a:srgbClr val="003B4F"/>
+                </a:solidFill>
+                <a:latin typeface="Courier"/>
+              </a:rPr>
+              <a:t>lizard_model &lt;- </a:t>
+            </a:r>
+            <a:r>
+              <a:rPr>
+                <a:solidFill>
+                  <a:srgbClr val="4758AB"/>
+                </a:solidFill>
+                <a:latin typeface="Courier"/>
+              </a:rPr>
+              <a:t>glm</a:t>
+            </a:r>
+            <a:r>
+              <a:rPr>
+                <a:solidFill>
+                  <a:srgbClr val="003B4F"/>
+                </a:solidFill>
+                <a:latin typeface="Courier"/>
+              </a:rPr>
+              <a:t>(uta_present </a:t>
+            </a:r>
+            <a:r>
+              <a:rPr>
+                <a:solidFill>
+                  <a:srgbClr val="5E5E5E"/>
+                </a:solidFill>
+                <a:latin typeface="Courier"/>
+              </a:rPr>
+              <a:t>~</a:t>
+            </a:r>
+            <a:r>
+              <a:rPr>
+                <a:solidFill>
+                  <a:srgbClr val="003B4F"/>
+                </a:solidFill>
+                <a:latin typeface="Courier"/>
+              </a:rPr>
+              <a:t> pa_ratio, </a:t>
+            </a:r>
+            <a:br/>
+            <a:r>
+              <a:rPr>
+                <a:solidFill>
+                  <a:srgbClr val="003B4F"/>
+                </a:solidFill>
+                <a:latin typeface="Courier"/>
+              </a:rPr>
+              <a:t>                    </a:t>
+            </a:r>
+            <a:r>
+              <a:rPr>
+                <a:solidFill>
+                  <a:srgbClr val="657422"/>
+                </a:solidFill>
+                <a:latin typeface="Courier"/>
+              </a:rPr>
+              <a:t>data =</a:t>
+            </a:r>
+            <a:r>
+              <a:rPr>
+                <a:solidFill>
+                  <a:srgbClr val="003B4F"/>
+                </a:solidFill>
+                <a:latin typeface="Courier"/>
+              </a:rPr>
+              <a:t> island_data, </a:t>
+            </a:r>
+            <a:br/>
+            <a:r>
+              <a:rPr>
+                <a:solidFill>
+                  <a:srgbClr val="003B4F"/>
+                </a:solidFill>
+                <a:latin typeface="Courier"/>
+              </a:rPr>
+              <a:t>                    </a:t>
+            </a:r>
+            <a:r>
+              <a:rPr>
+                <a:solidFill>
+                  <a:srgbClr val="657422"/>
+                </a:solidFill>
+                <a:latin typeface="Courier"/>
+              </a:rPr>
+              <a:t>family =</a:t>
+            </a:r>
+            <a:r>
+              <a:rPr>
+                <a:solidFill>
+                  <a:srgbClr val="003B4F"/>
+                </a:solidFill>
+                <a:latin typeface="Courier"/>
+              </a:rPr>
+              <a:t> </a:t>
+            </a:r>
+            <a:r>
+              <a:rPr>
+                <a:solidFill>
+                  <a:srgbClr val="4758AB"/>
+                </a:solidFill>
+                <a:latin typeface="Courier"/>
+              </a:rPr>
+              <a:t>binomial</a:t>
+            </a:r>
+            <a:r>
+              <a:rPr>
+                <a:solidFill>
+                  <a:srgbClr val="003B4F"/>
+                </a:solidFill>
+                <a:latin typeface="Courier"/>
+              </a:rPr>
+              <a:t>(</a:t>
+            </a:r>
+            <a:r>
+              <a:rPr>
+                <a:solidFill>
+                  <a:srgbClr val="657422"/>
+                </a:solidFill>
+                <a:latin typeface="Courier"/>
+              </a:rPr>
+              <a:t>link =</a:t>
+            </a:r>
+            <a:r>
+              <a:rPr>
+                <a:solidFill>
+                  <a:srgbClr val="003B4F"/>
+                </a:solidFill>
+                <a:latin typeface="Courier"/>
+              </a:rPr>
+              <a:t> </a:t>
+            </a:r>
+            <a:r>
+              <a:rPr>
+                <a:solidFill>
+                  <a:srgbClr val="20794D"/>
+                </a:solidFill>
+                <a:latin typeface="Courier"/>
+              </a:rPr>
+              <a:t>"logit"</a:t>
+            </a:r>
+            <a:r>
+              <a:rPr>
+                <a:solidFill>
+                  <a:srgbClr val="003B4F"/>
+                </a:solidFill>
+                <a:latin typeface="Courier"/>
+              </a:rPr>
+              <a:t>))</a:t>
+            </a:r>
+            <a:br/>
+            <a:br/>
+            <a:r>
+              <a:rPr>
+                <a:solidFill>
+                  <a:srgbClr val="5E5E5E"/>
+                </a:solidFill>
+                <a:latin typeface="Courier"/>
+              </a:rPr>
+              <a:t># Model summary</a:t>
+            </a:r>
+            <a:br/>
+            <a:r>
+              <a:rPr>
+                <a:solidFill>
+                  <a:srgbClr val="4758AB"/>
+                </a:solidFill>
+                <a:latin typeface="Courier"/>
+              </a:rPr>
+              <a:t>summary</a:t>
+            </a:r>
+            <a:r>
+              <a:rPr>
+                <a:solidFill>
+                  <a:srgbClr val="003B4F"/>
+                </a:solidFill>
+                <a:latin typeface="Courier"/>
+              </a:rPr>
+              <a:t>(lizard_model)</a:t>
+            </a:r>
+            <a:br/>
+            <a:r>
+              <a:rPr i="1">
+                <a:solidFill>
+                  <a:srgbClr val="5E5E5E"/>
+                </a:solidFill>
+                <a:latin typeface="Courier"/>
+              </a:rPr>
+              <a:t>## </a:t>
+            </a:r>
+            <a:br/>
+            <a:r>
+              <a:rPr i="1">
+                <a:solidFill>
+                  <a:srgbClr val="5E5E5E"/>
+                </a:solidFill>
+                <a:latin typeface="Courier"/>
+              </a:rPr>
+              <a:t>## Call:</a:t>
+            </a:r>
+            <a:br/>
+            <a:r>
+              <a:rPr i="1">
+                <a:solidFill>
+                  <a:srgbClr val="5E5E5E"/>
+                </a:solidFill>
+                <a:latin typeface="Courier"/>
+              </a:rPr>
+              <a:t>## glm(formula = uta_present ~ pa_ratio, family = binomial(link = "logit"), </a:t>
+            </a:r>
+            <a:br/>
+            <a:r>
+              <a:rPr i="1">
+                <a:solidFill>
+                  <a:srgbClr val="5E5E5E"/>
+                </a:solidFill>
+                <a:latin typeface="Courier"/>
+              </a:rPr>
+              <a:t>##     data = island_data)</a:t>
+            </a:r>
+            <a:br/>
+            <a:r>
+              <a:rPr i="1">
+                <a:solidFill>
+                  <a:srgbClr val="5E5E5E"/>
+                </a:solidFill>
+                <a:latin typeface="Courier"/>
+              </a:rPr>
+              <a:t>## </a:t>
+            </a:r>
+            <a:br/>
+            <a:r>
+              <a:rPr i="1">
+                <a:solidFill>
+                  <a:srgbClr val="5E5E5E"/>
+                </a:solidFill>
+                <a:latin typeface="Courier"/>
+              </a:rPr>
+              <a:t>## Coefficients:</a:t>
+            </a:r>
+            <a:br/>
+            <a:r>
+              <a:rPr i="1">
+                <a:solidFill>
+                  <a:srgbClr val="5E5E5E"/>
+                </a:solidFill>
+                <a:latin typeface="Courier"/>
+              </a:rPr>
+              <a:t>##             Estimate Std. Error z value Pr(&gt;|z|)   </a:t>
+            </a:r>
+            <a:br/>
+            <a:r>
+              <a:rPr i="1">
+                <a:solidFill>
+                  <a:srgbClr val="5E5E5E"/>
+                </a:solidFill>
+                <a:latin typeface="Courier"/>
+              </a:rPr>
+              <a:t>## (Intercept)   5.9374     2.1297   2.788  0.00530 **</a:t>
+            </a:r>
+            <a:br/>
+            <a:r>
+              <a:rPr i="1">
+                <a:solidFill>
+                  <a:srgbClr val="5E5E5E"/>
+                </a:solidFill>
+                <a:latin typeface="Courier"/>
+              </a:rPr>
+              <a:t>## pa_ratio     -0.1493     0.0517  -2.887  0.00388 **</a:t>
+            </a:r>
+            <a:br/>
+            <a:r>
+              <a:rPr i="1">
+                <a:solidFill>
+                  <a:srgbClr val="5E5E5E"/>
+                </a:solidFill>
+                <a:latin typeface="Courier"/>
+              </a:rPr>
+              <a:t>## ---</a:t>
+            </a:r>
+            <a:br/>
+            <a:r>
+              <a:rPr i="1">
+                <a:solidFill>
+                  <a:srgbClr val="5E5E5E"/>
+                </a:solidFill>
+                <a:latin typeface="Courier"/>
+              </a:rPr>
+              <a:t>## Signif. codes:  0 '***' 0.001 '**' 0.01 '*' 0.05 '.' 0.1 ' ' 1</a:t>
+            </a:r>
+            <a:br/>
+            <a:r>
+              <a:rPr i="1">
+                <a:solidFill>
+                  <a:srgbClr val="5E5E5E"/>
+                </a:solidFill>
+                <a:latin typeface="Courier"/>
+              </a:rPr>
+              <a:t>## </a:t>
+            </a:r>
+            <a:br/>
+            <a:r>
+              <a:rPr i="1">
+                <a:solidFill>
+                  <a:srgbClr val="5E5E5E"/>
+                </a:solidFill>
+                <a:latin typeface="Courier"/>
+              </a:rPr>
+              <a:t>## (Dispersion parameter for binomial family taken to be 1)</a:t>
+            </a:r>
+            <a:br/>
+            <a:r>
+              <a:rPr i="1">
+                <a:solidFill>
+                  <a:srgbClr val="5E5E5E"/>
+                </a:solidFill>
+                <a:latin typeface="Courier"/>
+              </a:rPr>
+              <a:t>## </a:t>
+            </a:r>
+            <a:br/>
+            <a:r>
+              <a:rPr i="1">
+                <a:solidFill>
+                  <a:srgbClr val="5E5E5E"/>
+                </a:solidFill>
+                <a:latin typeface="Courier"/>
+              </a:rPr>
+              <a:t>##     Null deviance: 41.455  on 29  degrees of freedom</a:t>
+            </a:r>
+            <a:br/>
+            <a:r>
+              <a:rPr i="1">
+                <a:solidFill>
+                  <a:srgbClr val="5E5E5E"/>
+                </a:solidFill>
+                <a:latin typeface="Courier"/>
+              </a:rPr>
+              <a:t>## Residual deviance: 19.090  on 28  degrees of freedom</a:t>
+            </a:r>
+            <a:br/>
+            <a:r>
+              <a:rPr i="1">
+                <a:solidFill>
+                  <a:srgbClr val="5E5E5E"/>
+                </a:solidFill>
+                <a:latin typeface="Courier"/>
+              </a:rPr>
+              <a:t>## AIC: 23.09</a:t>
+            </a:r>
+            <a:br/>
+            <a:r>
+              <a:rPr i="1">
+                <a:solidFill>
+                  <a:srgbClr val="5E5E5E"/>
+                </a:solidFill>
+                <a:latin typeface="Courier"/>
+              </a:rPr>
+              <a:t>## </a:t>
+            </a:r>
+            <a:br/>
+            <a:r>
+              <a:rPr i="1">
+                <a:solidFill>
+                  <a:srgbClr val="5E5E5E"/>
+                </a:solidFill>
+                <a:latin typeface="Courier"/>
+              </a:rPr>
+              <a:t>## Number of Fisher Scoring iterations: 6</a:t>
             </a:r>
           </a:p>
         </p:txBody>
@@ -6573,482 +8843,7 @@
 </p:sld>
 </file>
 
-<file path=ppt/slides/slide20.xml><?xml version="1.0" encoding="utf-8"?>
-<p:sld xmlns:a="http://schemas.openxmlformats.org/drawingml/2006/main" xmlns:r="http://schemas.openxmlformats.org/officeDocument/2006/relationships" xmlns:p="http://schemas.openxmlformats.org/presentationml/2006/main">
-  <p:cSld>
-    <p:spTree>
-      <p:nvGrpSpPr>
-        <p:cNvPr id="1" name=""/>
-        <p:cNvGrpSpPr/>
-        <p:nvPr/>
-      </p:nvGrpSpPr>
-      <p:grpSpPr>
-        <a:xfrm>
-          <a:off x="0" y="0"/>
-          <a:ext cx="0" cy="0"/>
-          <a:chOff x="0" y="0"/>
-          <a:chExt cx="0" cy="0"/>
-        </a:xfrm>
-      </p:grpSpPr>
-      <p:sp>
-        <p:nvSpPr>
-          <p:cNvPr id="2" name="Title 1"/>
-          <p:cNvSpPr>
-            <a:spLocks noGrp="1"/>
-          </p:cNvSpPr>
-          <p:nvPr>
-            <p:ph type="title"/>
-          </p:nvPr>
-        </p:nvSpPr>
-        <p:spPr>
-          <a:xfrm>
-            <a:off x="0" y="0"/>
-            <a:ext cx="9144000" cy="582780"/>
-          </a:xfrm>
-        </p:spPr>
-        <p:txBody>
-          <a:bodyPr/>
-          <a:lstStyle/>
-          <a:p>
-            <a:pPr lvl="0" indent="0" marL="0">
-              <a:buNone/>
-            </a:pPr>
-            <a:r>
-              <a:rPr/>
-              <a:t>Example: Lizard Presence on Islands</a:t>
-            </a:r>
-          </a:p>
-        </p:txBody>
-      </p:sp>
-      <p:sp>
-        <p:nvSpPr>
-          <p:cNvPr id="3" name="Content Placeholder 2"/>
-          <p:cNvSpPr>
-            <a:spLocks noGrp="1"/>
-          </p:cNvSpPr>
-          <p:nvPr>
-            <p:ph idx="1"/>
-          </p:nvPr>
-        </p:nvSpPr>
-        <p:spPr/>
-        <p:txBody>
-          <a:bodyPr/>
-          <a:lstStyle/>
-          <a:p>
-            <a:pPr lvl="0" indent="0" marL="0">
-              <a:buNone/>
-            </a:pPr>
-            <a:r>
-              <a:rPr/>
-              <a:t>Based on the example from Polis et al. (1998), we’ll model the presence/absence of lizards (</a:t>
-            </a:r>
-            <a:r>
-              <a:rPr i="1"/>
-              <a:t>Uta</a:t>
-            </a:r>
-            <a:r>
-              <a:rPr/>
-              <a:t>) on islands in the Gulf of California based on perimeter/area ratio.</a:t>
-            </a:r>
-          </a:p>
-          <a:p>
-            <a:pPr lvl="0" indent="0">
-              <a:buNone/>
-            </a:pPr>
-            <a:r>
-              <a:rPr>
-                <a:solidFill>
-                  <a:srgbClr val="5E5E5E"/>
-                </a:solidFill>
-                <a:latin typeface="Courier"/>
-              </a:rPr>
-              <a:t># Fit the logistic regression model</a:t>
-            </a:r>
-            <a:br/>
-            <a:r>
-              <a:rPr>
-                <a:solidFill>
-                  <a:srgbClr val="003B4F"/>
-                </a:solidFill>
-                <a:latin typeface="Courier"/>
-              </a:rPr>
-              <a:t>lizard_model &lt;- </a:t>
-            </a:r>
-            <a:r>
-              <a:rPr>
-                <a:solidFill>
-                  <a:srgbClr val="4758AB"/>
-                </a:solidFill>
-                <a:latin typeface="Courier"/>
-              </a:rPr>
-              <a:t>glm</a:t>
-            </a:r>
-            <a:r>
-              <a:rPr>
-                <a:solidFill>
-                  <a:srgbClr val="003B4F"/>
-                </a:solidFill>
-                <a:latin typeface="Courier"/>
-              </a:rPr>
-              <a:t>(uta_present </a:t>
-            </a:r>
-            <a:r>
-              <a:rPr>
-                <a:solidFill>
-                  <a:srgbClr val="5E5E5E"/>
-                </a:solidFill>
-                <a:latin typeface="Courier"/>
-              </a:rPr>
-              <a:t>~</a:t>
-            </a:r>
-            <a:r>
-              <a:rPr>
-                <a:solidFill>
-                  <a:srgbClr val="003B4F"/>
-                </a:solidFill>
-                <a:latin typeface="Courier"/>
-              </a:rPr>
-              <a:t> pa_ratio, </a:t>
-            </a:r>
-            <a:br/>
-            <a:r>
-              <a:rPr>
-                <a:solidFill>
-                  <a:srgbClr val="003B4F"/>
-                </a:solidFill>
-                <a:latin typeface="Courier"/>
-              </a:rPr>
-              <a:t>                    </a:t>
-            </a:r>
-            <a:r>
-              <a:rPr>
-                <a:solidFill>
-                  <a:srgbClr val="657422"/>
-                </a:solidFill>
-                <a:latin typeface="Courier"/>
-              </a:rPr>
-              <a:t>data =</a:t>
-            </a:r>
-            <a:r>
-              <a:rPr>
-                <a:solidFill>
-                  <a:srgbClr val="003B4F"/>
-                </a:solidFill>
-                <a:latin typeface="Courier"/>
-              </a:rPr>
-              <a:t> island_data, </a:t>
-            </a:r>
-            <a:br/>
-            <a:r>
-              <a:rPr>
-                <a:solidFill>
-                  <a:srgbClr val="003B4F"/>
-                </a:solidFill>
-                <a:latin typeface="Courier"/>
-              </a:rPr>
-              <a:t>                    </a:t>
-            </a:r>
-            <a:r>
-              <a:rPr>
-                <a:solidFill>
-                  <a:srgbClr val="657422"/>
-                </a:solidFill>
-                <a:latin typeface="Courier"/>
-              </a:rPr>
-              <a:t>family =</a:t>
-            </a:r>
-            <a:r>
-              <a:rPr>
-                <a:solidFill>
-                  <a:srgbClr val="003B4F"/>
-                </a:solidFill>
-                <a:latin typeface="Courier"/>
-              </a:rPr>
-              <a:t> </a:t>
-            </a:r>
-            <a:r>
-              <a:rPr>
-                <a:solidFill>
-                  <a:srgbClr val="4758AB"/>
-                </a:solidFill>
-                <a:latin typeface="Courier"/>
-              </a:rPr>
-              <a:t>binomial</a:t>
-            </a:r>
-            <a:r>
-              <a:rPr>
-                <a:solidFill>
-                  <a:srgbClr val="003B4F"/>
-                </a:solidFill>
-                <a:latin typeface="Courier"/>
-              </a:rPr>
-              <a:t>(</a:t>
-            </a:r>
-            <a:r>
-              <a:rPr>
-                <a:solidFill>
-                  <a:srgbClr val="657422"/>
-                </a:solidFill>
-                <a:latin typeface="Courier"/>
-              </a:rPr>
-              <a:t>link =</a:t>
-            </a:r>
-            <a:r>
-              <a:rPr>
-                <a:solidFill>
-                  <a:srgbClr val="003B4F"/>
-                </a:solidFill>
-                <a:latin typeface="Courier"/>
-              </a:rPr>
-              <a:t> </a:t>
-            </a:r>
-            <a:r>
-              <a:rPr>
-                <a:solidFill>
-                  <a:srgbClr val="20794D"/>
-                </a:solidFill>
-                <a:latin typeface="Courier"/>
-              </a:rPr>
-              <a:t>"logit"</a:t>
-            </a:r>
-            <a:r>
-              <a:rPr>
-                <a:solidFill>
-                  <a:srgbClr val="003B4F"/>
-                </a:solidFill>
-                <a:latin typeface="Courier"/>
-              </a:rPr>
-              <a:t>))</a:t>
-            </a:r>
-            <a:br/>
-            <a:br/>
-            <a:r>
-              <a:rPr>
-                <a:solidFill>
-                  <a:srgbClr val="5E5E5E"/>
-                </a:solidFill>
-                <a:latin typeface="Courier"/>
-              </a:rPr>
-              <a:t># Model summary</a:t>
-            </a:r>
-            <a:br/>
-            <a:r>
-              <a:rPr>
-                <a:solidFill>
-                  <a:srgbClr val="4758AB"/>
-                </a:solidFill>
-                <a:latin typeface="Courier"/>
-              </a:rPr>
-              <a:t>summary</a:t>
-            </a:r>
-            <a:r>
-              <a:rPr>
-                <a:solidFill>
-                  <a:srgbClr val="003B4F"/>
-                </a:solidFill>
-                <a:latin typeface="Courier"/>
-              </a:rPr>
-              <a:t>(lizard_model)</a:t>
-            </a:r>
-            <a:br/>
-            <a:r>
-              <a:rPr i="1">
-                <a:solidFill>
-                  <a:srgbClr val="5E5E5E"/>
-                </a:solidFill>
-                <a:latin typeface="Courier"/>
-              </a:rPr>
-              <a:t>## </a:t>
-            </a:r>
-            <a:br/>
-            <a:r>
-              <a:rPr i="1">
-                <a:solidFill>
-                  <a:srgbClr val="5E5E5E"/>
-                </a:solidFill>
-                <a:latin typeface="Courier"/>
-              </a:rPr>
-              <a:t>## Call:</a:t>
-            </a:r>
-            <a:br/>
-            <a:r>
-              <a:rPr i="1">
-                <a:solidFill>
-                  <a:srgbClr val="5E5E5E"/>
-                </a:solidFill>
-                <a:latin typeface="Courier"/>
-              </a:rPr>
-              <a:t>## glm(formula = uta_present ~ pa_ratio, family = binomial(link = "logit"), </a:t>
-            </a:r>
-            <a:br/>
-            <a:r>
-              <a:rPr i="1">
-                <a:solidFill>
-                  <a:srgbClr val="5E5E5E"/>
-                </a:solidFill>
-                <a:latin typeface="Courier"/>
-              </a:rPr>
-              <a:t>##     data = island_data)</a:t>
-            </a:r>
-            <a:br/>
-            <a:r>
-              <a:rPr i="1">
-                <a:solidFill>
-                  <a:srgbClr val="5E5E5E"/>
-                </a:solidFill>
-                <a:latin typeface="Courier"/>
-              </a:rPr>
-              <a:t>## </a:t>
-            </a:r>
-            <a:br/>
-            <a:r>
-              <a:rPr i="1">
-                <a:solidFill>
-                  <a:srgbClr val="5E5E5E"/>
-                </a:solidFill>
-                <a:latin typeface="Courier"/>
-              </a:rPr>
-              <a:t>## Coefficients:</a:t>
-            </a:r>
-            <a:br/>
-            <a:r>
-              <a:rPr i="1">
-                <a:solidFill>
-                  <a:srgbClr val="5E5E5E"/>
-                </a:solidFill>
-                <a:latin typeface="Courier"/>
-              </a:rPr>
-              <a:t>##             Estimate Std. Error z value Pr(&gt;|z|)   </a:t>
-            </a:r>
-            <a:br/>
-            <a:r>
-              <a:rPr i="1">
-                <a:solidFill>
-                  <a:srgbClr val="5E5E5E"/>
-                </a:solidFill>
-                <a:latin typeface="Courier"/>
-              </a:rPr>
-              <a:t>## (Intercept)   5.9374     2.1297   2.788  0.00530 **</a:t>
-            </a:r>
-            <a:br/>
-            <a:r>
-              <a:rPr i="1">
-                <a:solidFill>
-                  <a:srgbClr val="5E5E5E"/>
-                </a:solidFill>
-                <a:latin typeface="Courier"/>
-              </a:rPr>
-              <a:t>## pa_ratio     -0.1493     0.0517  -2.887  0.00388 **</a:t>
-            </a:r>
-            <a:br/>
-            <a:r>
-              <a:rPr i="1">
-                <a:solidFill>
-                  <a:srgbClr val="5E5E5E"/>
-                </a:solidFill>
-                <a:latin typeface="Courier"/>
-              </a:rPr>
-              <a:t>## ---</a:t>
-            </a:r>
-            <a:br/>
-            <a:r>
-              <a:rPr i="1">
-                <a:solidFill>
-                  <a:srgbClr val="5E5E5E"/>
-                </a:solidFill>
-                <a:latin typeface="Courier"/>
-              </a:rPr>
-              <a:t>## Signif. codes:  0 '***' 0.001 '**' 0.01 '*' 0.05 '.' 0.1 ' ' 1</a:t>
-            </a:r>
-            <a:br/>
-            <a:r>
-              <a:rPr i="1">
-                <a:solidFill>
-                  <a:srgbClr val="5E5E5E"/>
-                </a:solidFill>
-                <a:latin typeface="Courier"/>
-              </a:rPr>
-              <a:t>## </a:t>
-            </a:r>
-            <a:br/>
-            <a:r>
-              <a:rPr i="1">
-                <a:solidFill>
-                  <a:srgbClr val="5E5E5E"/>
-                </a:solidFill>
-                <a:latin typeface="Courier"/>
-              </a:rPr>
-              <a:t>## (Dispersion parameter for binomial family taken to be 1)</a:t>
-            </a:r>
-            <a:br/>
-            <a:r>
-              <a:rPr i="1">
-                <a:solidFill>
-                  <a:srgbClr val="5E5E5E"/>
-                </a:solidFill>
-                <a:latin typeface="Courier"/>
-              </a:rPr>
-              <a:t>## </a:t>
-            </a:r>
-            <a:br/>
-            <a:r>
-              <a:rPr i="1">
-                <a:solidFill>
-                  <a:srgbClr val="5E5E5E"/>
-                </a:solidFill>
-                <a:latin typeface="Courier"/>
-              </a:rPr>
-              <a:t>##     Null deviance: 41.455  on 29  degrees of freedom</a:t>
-            </a:r>
-            <a:br/>
-            <a:r>
-              <a:rPr i="1">
-                <a:solidFill>
-                  <a:srgbClr val="5E5E5E"/>
-                </a:solidFill>
-                <a:latin typeface="Courier"/>
-              </a:rPr>
-              <a:t>## Residual deviance: 19.090  on 28  degrees of freedom</a:t>
-            </a:r>
-            <a:br/>
-            <a:r>
-              <a:rPr i="1">
-                <a:solidFill>
-                  <a:srgbClr val="5E5E5E"/>
-                </a:solidFill>
-                <a:latin typeface="Courier"/>
-              </a:rPr>
-              <a:t>## AIC: 23.09</a:t>
-            </a:r>
-            <a:br/>
-            <a:r>
-              <a:rPr i="1">
-                <a:solidFill>
-                  <a:srgbClr val="5E5E5E"/>
-                </a:solidFill>
-                <a:latin typeface="Courier"/>
-              </a:rPr>
-              <a:t>## </a:t>
-            </a:r>
-            <a:br/>
-            <a:r>
-              <a:rPr i="1">
-                <a:solidFill>
-                  <a:srgbClr val="5E5E5E"/>
-                </a:solidFill>
-                <a:latin typeface="Courier"/>
-              </a:rPr>
-              <a:t>## Number of Fisher Scoring iterations: 6</a:t>
-            </a:r>
-          </a:p>
-        </p:txBody>
-      </p:sp>
-    </p:spTree>
-  </p:cSld>
-</p:sld>
-</file>
-
-<file path=ppt/slides/slide21.xml><?xml version="1.0" encoding="utf-8"?>
+<file path=ppt/slides/slide23.xml><?xml version="1.0" encoding="utf-8"?>
 <p:sld xmlns:a="http://schemas.openxmlformats.org/drawingml/2006/main" xmlns:r="http://schemas.openxmlformats.org/officeDocument/2006/relationships" xmlns:p="http://schemas.openxmlformats.org/presentationml/2006/main">
   <p:cSld>
     <p:spTree>
@@ -7538,7 +9333,7 @@
 </p:sld>
 </file>
 
-<file path=ppt/slides/slide22.xml><?xml version="1.0" encoding="utf-8"?>
+<file path=ppt/slides/slide24.xml><?xml version="1.0" encoding="utf-8"?>
 <p:sld xmlns:a="http://schemas.openxmlformats.org/drawingml/2006/main" xmlns:r="http://schemas.openxmlformats.org/officeDocument/2006/relationships" xmlns:p="http://schemas.openxmlformats.org/presentationml/2006/main">
   <p:cSld>
     <p:spTree>
@@ -8147,7 +9942,7 @@
 </p:sld>
 </file>
 
-<file path=ppt/slides/slide23.xml><?xml version="1.0" encoding="utf-8"?>
+<file path=ppt/slides/slide25.xml><?xml version="1.0" encoding="utf-8"?>
 <p:sld xmlns:a="http://schemas.openxmlformats.org/drawingml/2006/main" xmlns:r="http://schemas.openxmlformats.org/officeDocument/2006/relationships" xmlns:p="http://schemas.openxmlformats.org/presentationml/2006/main">
   <p:cSld>
     <p:spTree>
@@ -8257,7 +10052,7 @@
 </p:sld>
 </file>
 
-<file path=ppt/slides/slide24.xml><?xml version="1.0" encoding="utf-8"?>
+<file path=ppt/slides/slide26.xml><?xml version="1.0" encoding="utf-8"?>
 <p:sld xmlns:a="http://schemas.openxmlformats.org/drawingml/2006/main" xmlns:r="http://schemas.openxmlformats.org/officeDocument/2006/relationships" xmlns:p="http://schemas.openxmlformats.org/presentationml/2006/main">
   <p:cSld>
     <p:spTree>
@@ -8598,7 +10393,7 @@
 </p:sld>
 </file>
 
-<file path=ppt/slides/slide25.xml><?xml version="1.0" encoding="utf-8"?>
+<file path=ppt/slides/slide27.xml><?xml version="1.0" encoding="utf-8"?>
 <p:sld xmlns:a="http://schemas.openxmlformats.org/drawingml/2006/main" xmlns:r="http://schemas.openxmlformats.org/officeDocument/2006/relationships" xmlns:p="http://schemas.openxmlformats.org/presentationml/2006/main">
   <p:cSld>
     <p:spTree>
@@ -8689,7 +10484,7 @@
 </p:sld>
 </file>
 
-<file path=ppt/slides/slide26.xml><?xml version="1.0" encoding="utf-8"?>
+<file path=ppt/slides/slide28.xml><?xml version="1.0" encoding="utf-8"?>
 <p:sld xmlns:a="http://schemas.openxmlformats.org/drawingml/2006/main" xmlns:r="http://schemas.openxmlformats.org/officeDocument/2006/relationships" xmlns:p="http://schemas.openxmlformats.org/presentationml/2006/main">
   <p:cSld>
     <p:spTree>
@@ -8780,7 +10575,7 @@
 </p:sld>
 </file>
 
-<file path=ppt/slides/slide27.xml><?xml version="1.0" encoding="utf-8"?>
+<file path=ppt/slides/slide29.xml><?xml version="1.0" encoding="utf-8"?>
 <p:sld xmlns:a="http://schemas.openxmlformats.org/drawingml/2006/main" xmlns:r="http://schemas.openxmlformats.org/officeDocument/2006/relationships" xmlns:p="http://schemas.openxmlformats.org/presentationml/2006/main">
   <p:cSld>
     <p:spTree>
@@ -8930,263 +10725,6 @@
           </a:ln>
         </p:spPr>
       </p:pic>
-    </p:spTree>
-  </p:cSld>
-</p:sld>
-</file>
-
-<file path=ppt/slides/slide28.xml><?xml version="1.0" encoding="utf-8"?>
-<p:sld xmlns:a="http://schemas.openxmlformats.org/drawingml/2006/main" xmlns:r="http://schemas.openxmlformats.org/officeDocument/2006/relationships" xmlns:p="http://schemas.openxmlformats.org/presentationml/2006/main">
-  <p:cSld>
-    <p:spTree>
-      <p:nvGrpSpPr>
-        <p:cNvPr id="1" name=""/>
-        <p:cNvGrpSpPr/>
-        <p:nvPr/>
-      </p:nvGrpSpPr>
-      <p:grpSpPr>
-        <a:xfrm>
-          <a:off x="0" y="0"/>
-          <a:ext cx="0" cy="0"/>
-          <a:chOff x="0" y="0"/>
-          <a:chExt cx="0" cy="0"/>
-        </a:xfrm>
-      </p:grpSpPr>
-      <p:sp>
-        <p:nvSpPr>
-          <p:cNvPr id="2" name="Title 1"/>
-          <p:cNvSpPr>
-            <a:spLocks noGrp="1"/>
-          </p:cNvSpPr>
-          <p:nvPr>
-            <p:ph type="title"/>
-          </p:nvPr>
-        </p:nvSpPr>
-        <p:spPr>
-          <a:xfrm>
-            <a:off x="0" y="0"/>
-            <a:ext cx="9144000" cy="602780"/>
-          </a:xfrm>
-          <a:solidFill>
-            <a:srgbClr val="70121D"/>
-          </a:solidFill>
-        </p:spPr>
-        <p:txBody>
-          <a:bodyPr/>
-          <a:lstStyle/>
-          <a:p>
-            <a:pPr lvl="0" indent="0" marL="0">
-              <a:buNone/>
-            </a:pPr>
-            <a:r>
-              <a:rPr/>
-              <a:t>Model Comparison and Selection</a:t>
-            </a:r>
-          </a:p>
-        </p:txBody>
-      </p:sp>
-      <p:sp>
-        <p:nvSpPr>
-          <p:cNvPr id="3" name="Content Placeholder 2"/>
-          <p:cNvSpPr>
-            <a:spLocks noGrp="1"/>
-          </p:cNvSpPr>
-          <p:nvPr>
-            <p:ph idx="1" sz="half"/>
-          </p:nvPr>
-        </p:nvSpPr>
-        <p:spPr/>
-        <p:txBody>
-          <a:bodyPr/>
-          <a:lstStyle/>
-          <a:p>
-            <a:pPr lvl="0" indent="0" marL="0">
-              <a:buNone/>
-            </a:pPr>
-            <a:r>
-              <a:rPr/>
-              <a:t>When working with multiple predictors, we often want to find the most parsimonious model. We can use:</a:t>
-            </a:r>
-          </a:p>
-          <a:p>
-            <a:pPr lvl="0" indent="-342900" marL="342900">
-              <a:buAutoNum type="arabicPeriod"/>
-            </a:pPr>
-            <a:r>
-              <a:rPr/>
-              <a:t>Likelihood ratio tests for nested models</a:t>
-            </a:r>
-          </a:p>
-          <a:p>
-            <a:pPr lvl="0" indent="-342900" marL="342900">
-              <a:buAutoNum type="arabicPeriod"/>
-            </a:pPr>
-            <a:r>
-              <a:rPr/>
-              <a:t>Information criteria (AIC, BIC) for non-nested models</a:t>
-            </a:r>
-          </a:p>
-          <a:p>
-            <a:pPr lvl="0" indent="-342900" marL="342900">
-              <a:buAutoNum type="arabicPeriod"/>
-            </a:pPr>
-            <a:r>
-              <a:rPr/>
-              <a:t>Classification metrics like accuracy, sensitivity, and specificity</a:t>
-            </a:r>
-          </a:p>
-          <a:p>
-            <a:pPr lvl="0" indent="0" marL="0">
-              <a:buNone/>
-            </a:pPr>
-            <a:r>
-              <a:rPr/>
-              <a:t>Let’s compare models and calculate AIC values:</a:t>
-            </a:r>
-          </a:p>
-          <a:p>
-            <a:pPr lvl="0" indent="0">
-              <a:buNone/>
-            </a:pPr>
-            <a:r>
-              <a:rPr>
-                <a:latin typeface="Courier"/>
-              </a:rPr>
-              <a:t>##                         Model Parameters   AIC   BIC Deviance
-## No Age                 No Age          3 17.05 20.71    11.05
-## Full                     Full          4 17.27 22.15     9.27
-## No Distance       No Distance          3 17.38 21.04    11.38
-## Intercept Only Intercept Only          1 29.55 30.77    27.55
-## No Shrub             No Shrub          3 32.73 36.39    26.73</a:t>
-            </a:r>
-          </a:p>
-        </p:txBody>
-      </p:sp>
-      <p:sp>
-        <p:nvSpPr>
-          <p:cNvPr id="4" name="Content Placeholder 3"/>
-          <p:cNvSpPr>
-            <a:spLocks noGrp="1"/>
-          </p:cNvSpPr>
-          <p:nvPr>
-            <p:ph idx="2" sz="half"/>
-          </p:nvPr>
-        </p:nvSpPr>
-        <p:spPr/>
-        <p:txBody>
-          <a:bodyPr/>
-          <a:lstStyle/>
-          <a:p>
-            <a:pPr lvl="0" indent="0" marL="0">
-              <a:buNone/>
-            </a:pPr>
-            <a:r>
-              <a:rPr/>
-              <a:t>We can also evaluate the predictive performance of our model:</a:t>
-            </a:r>
-          </a:p>
-          <a:p>
-            <a:pPr lvl="0" indent="0">
-              <a:buNone/>
-            </a:pPr>
-            <a:r>
-              <a:rPr>
-                <a:latin typeface="Courier"/>
-              </a:rPr>
-              <a:t>##          Actual
-## Predicted Absent Present
-##   Absent       5       2
-##   Present      1      17
-## 
-## Accuracy: 0.88
-## Sensitivity: 0.895
-## Specificity: 0.833</a:t>
-            </a:r>
-          </a:p>
-        </p:txBody>
-      </p:sp>
-    </p:spTree>
-  </p:cSld>
-</p:sld>
-</file>
-
-<file path=ppt/slides/slide29.xml><?xml version="1.0" encoding="utf-8"?>
-<p:sld xmlns:a="http://schemas.openxmlformats.org/drawingml/2006/main" xmlns:r="http://schemas.openxmlformats.org/officeDocument/2006/relationships" xmlns:p="http://schemas.openxmlformats.org/presentationml/2006/main">
-  <p:cSld>
-    <p:spTree>
-      <p:nvGrpSpPr>
-        <p:cNvPr id="1" name=""/>
-        <p:cNvGrpSpPr/>
-        <p:nvPr/>
-      </p:nvGrpSpPr>
-      <p:grpSpPr>
-        <a:xfrm>
-          <a:off x="0" y="0"/>
-          <a:ext cx="0" cy="0"/>
-          <a:chOff x="0" y="0"/>
-          <a:chExt cx="0" cy="0"/>
-        </a:xfrm>
-      </p:grpSpPr>
-      <p:sp>
-        <p:nvSpPr>
-          <p:cNvPr id="2" name="Title 1"/>
-          <p:cNvSpPr>
-            <a:spLocks noGrp="1"/>
-          </p:cNvSpPr>
-          <p:nvPr>
-            <p:ph type="title"/>
-          </p:nvPr>
-        </p:nvSpPr>
-        <p:spPr>
-          <a:xfrm>
-            <a:off x="0" y="0"/>
-            <a:ext cx="9144000" cy="582780"/>
-          </a:xfrm>
-        </p:spPr>
-        <p:txBody>
-          <a:bodyPr/>
-          <a:lstStyle/>
-          <a:p>
-            <a:pPr lvl="0" indent="0" marL="0">
-              <a:buNone/>
-            </a:pPr>
-            <a:r>
-              <a:rPr/>
-              <a:t>Publication-Quality Figure</a:t>
-            </a:r>
-          </a:p>
-        </p:txBody>
-      </p:sp>
-      <p:sp>
-        <p:nvSpPr>
-          <p:cNvPr id="3" name="Content Placeholder 2"/>
-          <p:cNvSpPr>
-            <a:spLocks noGrp="1"/>
-          </p:cNvSpPr>
-          <p:nvPr>
-            <p:ph idx="1"/>
-          </p:nvPr>
-        </p:nvSpPr>
-        <p:spPr/>
-        <p:txBody>
-          <a:bodyPr/>
-          <a:lstStyle/>
-          <a:p>
-            <a:pPr lvl="0" indent="0" marL="0">
-              <a:buNone/>
-            </a:pPr>
-            <a:r>
-              <a:rPr/>
-              <a:t>Let’s create a publication-quality figure for our multiple logistic regression model and show how we would write up the results for a scientific publication.</a:t>
-            </a:r>
-          </a:p>
-          <a:p>
-            <a:pPr lvl="0" indent="0" marL="0">
-              <a:buNone/>
-            </a:pPr>
-          </a:p>
-        </p:txBody>
-      </p:sp>
     </p:spTree>
   </p:cSld>
 </p:sld>
@@ -9266,9 +10804,7 @@
             </a:r>
           </a:p>
           <a:p>
-            <a:pPr lvl="0" indent="0" marL="0">
-              <a:buNone/>
-            </a:pPr>
+            <a:pPr lvl="0"/>
             <a:r>
               <a:rPr/>
               <a:t>General Linear Models GLM</a:t>
@@ -9324,16 +10860,14 @@
             </a:r>
           </a:p>
           <a:p>
-            <a:pPr lvl="0" indent="0" marL="0">
-              <a:buNone/>
-            </a:pPr>
+            <a:pPr lvl="0"/>
             <a:r>
               <a:rPr/>
               <a:t>Logistic Regression</a:t>
             </a:r>
           </a:p>
           <a:p>
-            <a:pPr lvl="0"/>
+            <a:pPr lvl="1"/>
             <a:r>
               <a:rPr/>
               <a:t>when the outcome is yes or no or categorical</a:t>
@@ -9376,8 +10910,11 @@
         <p:spPr>
           <a:xfrm>
             <a:off x="0" y="0"/>
-            <a:ext cx="9144000" cy="582780"/>
+            <a:ext cx="9144000" cy="602780"/>
           </a:xfrm>
+          <a:solidFill>
+            <a:srgbClr val="70121D"/>
+          </a:solidFill>
         </p:spPr>
         <p:txBody>
           <a:bodyPr/>
@@ -9388,7 +10925,7 @@
             </a:pPr>
             <a:r>
               <a:rPr/>
-              <a:t>Scientific Write-Up Example</a:t>
+              <a:t>Model Comparison and Selection</a:t>
             </a:r>
           </a:p>
         </p:txBody>
@@ -9400,7 +10937,7 @@
             <a:spLocks noGrp="1"/>
           </p:cNvSpPr>
           <p:nvPr>
-            <p:ph idx="1"/>
+            <p:ph idx="1" sz="half"/>
           </p:nvPr>
         </p:nvSpPr>
         <p:spPr/>
@@ -9408,48 +10945,107 @@
           <a:bodyPr/>
           <a:lstStyle/>
           <a:p>
-            <a:pPr lvl="0" indent="0" marL="1270000">
-              <a:buNone/>
-            </a:pPr>
-            <a:r>
-              <a:rPr sz="2000" b="1"/>
-              <a:t>Scientific Write-Up Example</a:t>
-            </a:r>
-          </a:p>
-          <a:p>
-            <a:pPr lvl="0" indent="0" marL="1270000">
-              <a:buNone/>
-            </a:pPr>
-            <a:r>
-              <a:rPr sz="2000" b="1"/>
-              <a:t>Results</a:t>
-            </a:r>
-          </a:p>
-          <a:p>
-            <a:pPr lvl="0" indent="0" marL="1270000">
-              <a:buNone/>
-            </a:pPr>
-            <a:r>
-              <a:rPr sz="2000"/>
-              <a:t>The presence of native rodents in canyon fragments was modeled using multiple logistic regression with three predictors: distance to nearest source canyon, years since isolation, and percentage of shrub cover. The model was statistically significant (χ² = 12.63, df = 3, p = 0.005) and explained 38.7% of the variation in rodent presence (McFadden’s R² = 0.387).</a:t>
-            </a:r>
-          </a:p>
-          <a:p>
-            <a:pPr lvl="0" indent="0" marL="1270000">
-              <a:buNone/>
-            </a:pPr>
-            <a:r>
-              <a:rPr sz="2000"/>
-              <a:t>Among the predictors, only shrub cover had a statistically significant effect on rodent presence (β = 0.091, SE = 0.041, p = 0.026). The odds ratio for shrub cover was 1.095 (95% CI: 1.011-1.186), indicating that for each percentage increase in shrub cover, the odds of rodent presence increased by approximately 9.5%. Neither distance to source canyon (β = 0.0002, p = 0.690) nor years since isolation (β = 0.022, p = 0.566) showed significant relationships with rodent presence.</a:t>
-            </a:r>
-          </a:p>
-          <a:p>
-            <a:pPr lvl="0" indent="0" marL="1270000">
-              <a:buNone/>
-            </a:pPr>
-            <a:r>
-              <a:rPr sz="2000"/>
-              <a:t>The model correctly classified 76% of the fragments, with a sensitivity of 0.77 and a specificity of 0.75. Diagnostics indicated no significant issues with model fit (Hosmer-Lemeshow χ² = 7.31, df = 8, p = 0.504).</a:t>
+            <a:pPr lvl="0" indent="0" marL="0">
+              <a:buNone/>
+            </a:pPr>
+            <a:r>
+              <a:rPr/>
+              <a:t>When working with multiple predictors, we often want to find the most parsimonious model. We can use:</a:t>
+            </a:r>
+          </a:p>
+          <a:p>
+            <a:pPr lvl="0" indent="-342900" marL="342900">
+              <a:buAutoNum type="arabicPeriod"/>
+            </a:pPr>
+            <a:r>
+              <a:rPr/>
+              <a:t>Likelihood ratio tests for nested models</a:t>
+            </a:r>
+          </a:p>
+          <a:p>
+            <a:pPr lvl="0" indent="-342900" marL="342900">
+              <a:buAutoNum type="arabicPeriod"/>
+            </a:pPr>
+            <a:r>
+              <a:rPr/>
+              <a:t>Information criteria (AIC, BIC) for non-nested models</a:t>
+            </a:r>
+          </a:p>
+          <a:p>
+            <a:pPr lvl="0" indent="-342900" marL="342900">
+              <a:buAutoNum type="arabicPeriod"/>
+            </a:pPr>
+            <a:r>
+              <a:rPr/>
+              <a:t>Classification metrics like accuracy, sensitivity, and specificity</a:t>
+            </a:r>
+          </a:p>
+          <a:p>
+            <a:pPr lvl="0" indent="0" marL="0">
+              <a:buNone/>
+            </a:pPr>
+            <a:r>
+              <a:rPr/>
+              <a:t>Let’s compare models and calculate AIC values:</a:t>
+            </a:r>
+          </a:p>
+          <a:p>
+            <a:pPr lvl="0" indent="0">
+              <a:buNone/>
+            </a:pPr>
+            <a:r>
+              <a:rPr>
+                <a:latin typeface="Courier"/>
+              </a:rPr>
+              <a:t>##                         Model Parameters   AIC   BIC Deviance
+## No Age                 No Age          3 17.05 20.71    11.05
+## Full                     Full          4 17.27 22.15     9.27
+## No Distance       No Distance          3 17.38 21.04    11.38
+## Intercept Only Intercept Only          1 29.55 30.77    27.55
+## No Shrub             No Shrub          3 32.73 36.39    26.73</a:t>
+            </a:r>
+          </a:p>
+        </p:txBody>
+      </p:sp>
+      <p:sp>
+        <p:nvSpPr>
+          <p:cNvPr id="4" name="Content Placeholder 3"/>
+          <p:cNvSpPr>
+            <a:spLocks noGrp="1"/>
+          </p:cNvSpPr>
+          <p:nvPr>
+            <p:ph idx="2" sz="half"/>
+          </p:nvPr>
+        </p:nvSpPr>
+        <p:spPr/>
+        <p:txBody>
+          <a:bodyPr/>
+          <a:lstStyle/>
+          <a:p>
+            <a:pPr lvl="0" indent="0" marL="0">
+              <a:buNone/>
+            </a:pPr>
+            <a:r>
+              <a:rPr/>
+              <a:t>We can also evaluate the predictive performance of our model:</a:t>
+            </a:r>
+          </a:p>
+          <a:p>
+            <a:pPr lvl="0" indent="0">
+              <a:buNone/>
+            </a:pPr>
+            <a:r>
+              <a:rPr>
+                <a:latin typeface="Courier"/>
+              </a:rPr>
+              <a:t>##          Actual
+## Predicted Absent Present
+##   Absent       5       2
+##   Present      1      17
+## 
+## Accuracy: 0.88
+## Sensitivity: 0.895
+## Specificity: 0.833</a:t>
             </a:r>
           </a:p>
         </p:txBody>
@@ -9501,7 +11097,7 @@
             </a:pPr>
             <a:r>
               <a:rPr/>
-              <a:t>Scientific Write-Up Example</a:t>
+              <a:t>Publication-Quality Figure</a:t>
             </a:r>
           </a:p>
         </p:txBody>
@@ -9521,31 +11117,18 @@
           <a:bodyPr/>
           <a:lstStyle/>
           <a:p>
-            <a:pPr lvl="0" indent="0" marL="1270000">
-              <a:buNone/>
-            </a:pPr>
-            <a:r>
-              <a:rPr sz="2000" b="1"/>
-              <a:t>Scientific Write-Up Example</a:t>
-            </a:r>
-          </a:p>
-          <a:p>
-            <a:pPr lvl="0" indent="0" marL="1270000">
-              <a:buNone/>
-            </a:pPr>
-            <a:r>
-              <a:rPr sz="2000" b="1"/>
-              <a:t>Discussion</a:t>
-            </a:r>
-          </a:p>
-          <a:p>
-            <a:pPr lvl="0" indent="0" marL="1270000">
-              <a:buNone/>
-            </a:pPr>
-            <a:r>
-              <a:rPr sz="2000"/>
-              <a:t>Our findings suggest that vegetation structure, as measured by shrub cover, plays a crucial role in determining the presence of native rodents in canyon fragments. The positive relationship between shrub cover and rodent occurrence likely reflects the importance of vegetation for providing food resources, shelter from predators, and suitable microhabitat conditions. Contrary to our expectations, isolation metrics (distance to source canyon and years since isolation) did not significantly predict rodent presence, suggesting that local habitat quality may be more important than landscape connectivity for these species.</a:t>
-            </a:r>
+            <a:pPr lvl="0" indent="0" marL="0">
+              <a:buNone/>
+            </a:pPr>
+            <a:r>
+              <a:rPr/>
+              <a:t>Let’s create a publication-quality figure for our multiple logistic regression model and show how we would write up the results for a scientific publication.</a:t>
+            </a:r>
+          </a:p>
+          <a:p>
+            <a:pPr lvl="0" indent="0" marL="0">
+              <a:buNone/>
+            </a:pPr>
           </a:p>
         </p:txBody>
       </p:sp>
@@ -9596,7 +11179,7 @@
             </a:pPr>
             <a:r>
               <a:rPr/>
-              <a:t>Relationship Between GLMs and ANOVAs</a:t>
+              <a:t>Scientific Write-Up Example</a:t>
             </a:r>
           </a:p>
         </p:txBody>
@@ -9616,63 +11199,48 @@
           <a:bodyPr/>
           <a:lstStyle/>
           <a:p>
-            <a:pPr lvl="0" indent="0" marL="0">
-              <a:spcBef>
-                <a:spcPts val="3000"/>
-              </a:spcBef>
-              <a:buNone/>
-            </a:pPr>
-            <a:r>
-              <a:rPr b="1"/>
-              <a:t>GLMs and ANOVAs: The Connection</a:t>
-            </a:r>
-          </a:p>
-          <a:p>
-            <a:pPr lvl="0" indent="0" marL="0">
-              <a:buNone/>
-            </a:pPr>
-            <a:r>
-              <a:rPr/>
-              <a:t>General linear models (including ANOVAs and standard regression) are special cases of Generalized Linear Models where:</a:t>
-            </a:r>
-          </a:p>
-          <a:p>
-            <a:pPr lvl="0" indent="-342900" marL="342900">
-              <a:buAutoNum type="arabicPeriod"/>
-            </a:pPr>
-            <a:r>
-              <a:rPr/>
-              <a:t>The response variable follows a normal distribution</a:t>
-            </a:r>
-          </a:p>
-          <a:p>
-            <a:pPr lvl="0" indent="-342900" marL="342900">
-              <a:buAutoNum type="arabicPeriod"/>
-            </a:pPr>
-            <a:r>
-              <a:rPr/>
-              <a:t>The link function is the identity function</a:t>
-            </a:r>
-          </a:p>
-          <a:p>
-            <a:pPr lvl="0"/>
-            <a:r>
-              <a:rPr/>
-              <a:t>Therefore, a one-way ANOVA is equivalent to:</a:t>
-            </a:r>
-          </a:p>
-          <a:p>
-            <a:pPr lvl="1"/>
-            <a:r>
-              <a:rPr/>
-              <a:t>A linear regression with a categorical predictor</a:t>
-            </a:r>
-          </a:p>
-          <a:p>
-            <a:pPr lvl="1"/>
-            <a:r>
-              <a:rPr/>
-              <a:t>A Gaussian GLM with an identity link and a categorical predictor</a:t>
+            <a:pPr lvl="0" indent="0" marL="1270000">
+              <a:buNone/>
+            </a:pPr>
+            <a:r>
+              <a:rPr sz="2000" b="1"/>
+              <a:t>Scientific Write-Up Example</a:t>
+            </a:r>
+          </a:p>
+          <a:p>
+            <a:pPr lvl="0" indent="0" marL="1270000">
+              <a:buNone/>
+            </a:pPr>
+            <a:r>
+              <a:rPr sz="2000" b="1"/>
+              <a:t>Results</a:t>
+            </a:r>
+          </a:p>
+          <a:p>
+            <a:pPr lvl="0" indent="0" marL="1270000">
+              <a:buNone/>
+            </a:pPr>
+            <a:r>
+              <a:rPr sz="2000"/>
+              <a:t>The presence of native rodents in canyon fragments was modeled using multiple logistic regression with three predictors: distance to nearest source canyon, years since isolation, and percentage of shrub cover. The model was statistically significant (χ² = 12.63, df = 3, p = 0.005) and explained 38.7% of the variation in rodent presence (McFadden’s R² = 0.387).</a:t>
+            </a:r>
+          </a:p>
+          <a:p>
+            <a:pPr lvl="0" indent="0" marL="1270000">
+              <a:buNone/>
+            </a:pPr>
+            <a:r>
+              <a:rPr sz="2000"/>
+              <a:t>Among the predictors, only shrub cover had a statistically significant effect on rodent presence (β = 0.091, SE = 0.041, p = 0.026). The odds ratio for shrub cover was 1.095 (95% CI: 1.011-1.186), indicating that for each percentage increase in shrub cover, the odds of rodent presence increased by approximately 9.5%. Neither distance to source canyon (β = 0.0002, p = 0.690) nor years since isolation (β = 0.022, p = 0.566) showed significant relationships with rodent presence.</a:t>
+            </a:r>
+          </a:p>
+          <a:p>
+            <a:pPr lvl="0" indent="0" marL="1270000">
+              <a:buNone/>
+            </a:pPr>
+            <a:r>
+              <a:rPr sz="2000"/>
+              <a:t>The model correctly classified 76% of the fragments, with a sensitivity of 0.77 and a specificity of 0.75. Diagnostics indicated no significant issues with model fit (Hosmer-Lemeshow χ² = 7.31, df = 8, p = 0.504).</a:t>
             </a:r>
           </a:p>
         </p:txBody>
@@ -9724,7 +11292,7 @@
             </a:pPr>
             <a:r>
               <a:rPr/>
-              <a:t>Demonstrating ANOVA-GLM Equivalence</a:t>
+              <a:t>Scientific Write-Up Example</a:t>
             </a:r>
           </a:p>
         </p:txBody>
@@ -9744,18 +11312,31 @@
           <a:bodyPr/>
           <a:lstStyle/>
           <a:p>
-            <a:pPr lvl="0" indent="0" marL="0">
-              <a:buNone/>
-            </a:pPr>
-            <a:r>
-              <a:rPr/>
-              <a:t>Let’s demonstrate this equivalence:</a:t>
-            </a:r>
-          </a:p>
-          <a:p>
-            <a:pPr lvl="0" indent="0" marL="0">
-              <a:buNone/>
-            </a:pPr>
+            <a:pPr lvl="0" indent="0" marL="1270000">
+              <a:buNone/>
+            </a:pPr>
+            <a:r>
+              <a:rPr sz="2000" b="1"/>
+              <a:t>Scientific Write-Up Example</a:t>
+            </a:r>
+          </a:p>
+          <a:p>
+            <a:pPr lvl="0" indent="0" marL="1270000">
+              <a:buNone/>
+            </a:pPr>
+            <a:r>
+              <a:rPr sz="2000" b="1"/>
+              <a:t>Discussion</a:t>
+            </a:r>
+          </a:p>
+          <a:p>
+            <a:pPr lvl="0" indent="0" marL="1270000">
+              <a:buNone/>
+            </a:pPr>
+            <a:r>
+              <a:rPr sz="2000"/>
+              <a:t>Our findings suggest that vegetation structure, as measured by shrub cover, plays a crucial role in determining the presence of native rodents in canyon fragments. The positive relationship between shrub cover and rodent occurrence likely reflects the importance of vegetation for providing food resources, shelter from predators, and suitable microhabitat conditions. Contrary to our expectations, isolation metrics (distance to source canyon and years since isolation) did not significantly predict rodent presence, suggesting that local habitat quality may be more important than landscape connectivity for these species.</a:t>
+            </a:r>
           </a:p>
         </p:txBody>
       </p:sp>
@@ -9793,8 +11374,8 @@
         </p:nvSpPr>
         <p:spPr>
           <a:xfrm>
-            <a:off x="139485" y="78119"/>
-            <a:ext cx="8229600" cy="607682"/>
+            <a:off x="0" y="0"/>
+            <a:ext cx="9144000" cy="582780"/>
           </a:xfrm>
         </p:spPr>
         <p:txBody>
@@ -9806,19 +11387,19 @@
             </a:pPr>
             <a:r>
               <a:rPr/>
-              <a:t>Assumptions and Diagnostics Summary</a:t>
+              <a:t>Relationship Between GLMs and ANOVAs</a:t>
             </a:r>
           </a:p>
         </p:txBody>
       </p:sp>
       <p:sp>
         <p:nvSpPr>
-          <p:cNvPr id="3" name="Text Placeholder 2"/>
+          <p:cNvPr id="3" name="Content Placeholder 2"/>
           <p:cNvSpPr>
             <a:spLocks noGrp="1"/>
           </p:cNvSpPr>
           <p:nvPr>
-            <p:ph idx="1" type="body"/>
+            <p:ph idx="1"/>
           </p:nvPr>
         </p:nvSpPr>
         <p:spPr/>
@@ -9826,160 +11407,67 @@
           <a:bodyPr/>
           <a:lstStyle/>
           <a:p>
+            <a:pPr lvl="0" indent="0" marL="0">
+              <a:spcBef>
+                <a:spcPts val="3000"/>
+              </a:spcBef>
+              <a:buNone/>
+            </a:pPr>
+            <a:r>
+              <a:rPr b="1"/>
+              <a:t>GLMs and ANOVAs: The Connection</a:t>
+            </a:r>
+          </a:p>
+          <a:p>
+            <a:pPr lvl="0" indent="0" marL="0">
+              <a:buNone/>
+            </a:pPr>
+            <a:r>
+              <a:rPr/>
+              <a:t>General linear models (including ANOVAs and standard regression) are special cases of Generalized Linear Models where:</a:t>
+            </a:r>
+          </a:p>
+          <a:p>
+            <a:pPr lvl="0" indent="-342900" marL="342900">
+              <a:buAutoNum type="arabicPeriod"/>
+            </a:pPr>
+            <a:r>
+              <a:rPr/>
+              <a:t>The response variable follows a normal distribution</a:t>
+            </a:r>
+          </a:p>
+          <a:p>
+            <a:pPr lvl="0" indent="-342900" marL="342900">
+              <a:buAutoNum type="arabicPeriod"/>
+            </a:pPr>
+            <a:r>
+              <a:rPr/>
+              <a:t>The link function is the identity function</a:t>
+            </a:r>
+          </a:p>
+          <a:p>
             <a:pPr lvl="0"/>
             <a:r>
               <a:rPr/>
-              <a:t>Generalized Linear Models- assumptions depend on distribution+link function used:</a:t>
-            </a:r>
-          </a:p>
-          <a:p>
-            <a:pPr lvl="0"/>
-            <a:r>
-              <a:rPr b="1"/>
-              <a:t>All GLMs:</a:t>
+              <a:t>Therefore, a one-way ANOVA is equivalent to:</a:t>
             </a:r>
           </a:p>
           <a:p>
             <a:pPr lvl="1"/>
             <a:r>
               <a:rPr/>
-              <a:t>Independence of observations, No outliers, No Multicolinearity</a:t>
+              <a:t>A linear regression with a categorical predictor</a:t>
             </a:r>
           </a:p>
           <a:p>
             <a:pPr lvl="1"/>
             <a:r>
               <a:rPr/>
-              <a:t>Correct specification of the link function /variance structure</a:t>
-            </a:r>
-          </a:p>
-          <a:p>
-            <a:pPr lvl="0"/>
-            <a:r>
-              <a:rPr b="1"/>
-              <a:t>Gaussian GLMs (including linear regression):</a:t>
-            </a:r>
-          </a:p>
-          <a:p>
-            <a:pPr lvl="1"/>
-            <a:r>
-              <a:rPr/>
-              <a:t>Normality of residuals</a:t>
-            </a:r>
-          </a:p>
-          <a:p>
-            <a:pPr lvl="1"/>
-            <a:r>
-              <a:rPr/>
-              <a:t>Homogeneity of variance</a:t>
-            </a:r>
-          </a:p>
-          <a:p>
-            <a:pPr lvl="0"/>
-            <a:r>
-              <a:rPr b="1"/>
-              <a:t>Poisson GLMs:</a:t>
-            </a:r>
-          </a:p>
-          <a:p>
-            <a:pPr lvl="1"/>
-            <a:r>
-              <a:rPr/>
-              <a:t>Count data (non-negative integers)</a:t>
-            </a:r>
-          </a:p>
-          <a:p>
-            <a:pPr lvl="1"/>
-            <a:r>
-              <a:rPr/>
-              <a:t>Mean equals variance - overdispersed = negative binomial)</a:t>
-            </a:r>
-          </a:p>
-          <a:p>
-            <a:pPr lvl="0"/>
-            <a:r>
-              <a:rPr b="1"/>
-              <a:t>Logistic GLMs:</a:t>
-            </a:r>
-          </a:p>
-          <a:p>
-            <a:pPr lvl="1"/>
-            <a:r>
-              <a:rPr/>
-              <a:t>Binary response variable</a:t>
-            </a:r>
-          </a:p>
-          <a:p>
-            <a:pPr lvl="1"/>
-            <a:r>
-              <a:rPr/>
-              <a:t>Linear relationship between predictors and log odds</a:t>
-            </a:r>
-          </a:p>
-          <a:p>
-            <a:pPr lvl="1"/>
-            <a:r>
-              <a:rPr/>
-              <a:t>Adequate sample size relative to number of parameters</a:t>
+              <a:t>A Gaussian GLM with an identity link and a categorical predictor</a:t>
             </a:r>
           </a:p>
         </p:txBody>
       </p:sp>
-      <p:sp>
-        <p:nvSpPr>
-          <p:cNvPr id="5" name="Text Placeholder 4"/>
-          <p:cNvSpPr>
-            <a:spLocks noGrp="1"/>
-          </p:cNvSpPr>
-          <p:nvPr>
-            <p:ph idx="3" sz="quarter" type="body"/>
-          </p:nvPr>
-        </p:nvSpPr>
-        <p:spPr/>
-        <p:txBody>
-          <a:bodyPr/>
-          <a:lstStyle/>
-          <a:p>
-            <a:pPr lvl="0" indent="0" marL="0">
-              <a:buNone/>
-            </a:pPr>
-            <a:r>
-              <a:rPr/>
-              <a:t>The following R code checks some common diagnostics for our logistic model:</a:t>
-            </a:r>
-          </a:p>
-        </p:txBody>
-      </p:sp>
-      <p:pic>
-        <p:nvPicPr>
-          <p:cNvPr descr="14_01_lecture_powerpoint_files/figure-pptx/diagnostic-summary-1.png" id="0" name="Picture 1"/>
-          <p:cNvPicPr>
-            <a:picLocks noGrp="1" noChangeAspect="1"/>
-          </p:cNvPicPr>
-          <p:nvPr/>
-        </p:nvPicPr>
-        <p:blipFill>
-          <a:blip r:embed="rId2"/>
-          <a:stretch>
-            <a:fillRect/>
-          </a:stretch>
-        </p:blipFill>
-        <p:spPr bwMode="auto">
-          <a:xfrm>
-            <a:off x="5130800" y="1295400"/>
-            <a:ext cx="3276600" cy="3276600"/>
-          </a:xfrm>
-          <a:prstGeom prst="rect">
-            <a:avLst/>
-          </a:prstGeom>
-          <a:noFill/>
-          <a:ln w="9525">
-            <a:noFill/>
-            <a:headEnd/>
-            <a:tailEnd/>
-          </a:ln>
-        </p:spPr>
-      </p:pic>
     </p:spTree>
   </p:cSld>
 </p:sld>
@@ -10027,7 +11515,7 @@
             </a:pPr>
             <a:r>
               <a:rPr/>
-              <a:t>Summary and Conclusions</a:t>
+              <a:t>Demonstrating ANOVA-GLM Equivalence</a:t>
             </a:r>
           </a:p>
         </p:txBody>
@@ -10052,95 +11540,13 @@
             </a:pPr>
             <a:r>
               <a:rPr/>
-              <a:t>Generalized Linear Models (GLMs) provide a powerful and flexible framework for analyzing a wide range of data types in biology:</a:t>
-            </a:r>
-          </a:p>
-          <a:p>
-            <a:pPr lvl="0" indent="-342900" marL="342900">
-              <a:buAutoNum type="arabicPeriod"/>
-            </a:pPr>
-            <a:r>
-              <a:rPr b="1"/>
-              <a:t>Gaussian GLMs</a:t>
-            </a:r>
-            <a:r>
-              <a:rPr/>
-              <a:t> with identity link function equivalent to standard linear models and ANOVAs</a:t>
-            </a:r>
-          </a:p>
-          <a:p>
-            <a:pPr lvl="0" indent="-342900" marL="342900">
-              <a:buAutoNum type="arabicPeriod"/>
-            </a:pPr>
-            <a:r>
-              <a:rPr b="1"/>
-              <a:t>Poisson GLMs</a:t>
-            </a:r>
-            <a:r>
-              <a:rPr/>
-              <a:t> with log link function are appropriate for count data, but be cautious of overdispersion.</a:t>
-            </a:r>
-          </a:p>
-          <a:p>
-            <a:pPr lvl="0" indent="-342900" marL="342900">
-              <a:buAutoNum type="arabicPeriod"/>
-            </a:pPr>
-            <a:r>
-              <a:rPr b="1"/>
-              <a:t>Negative Binomial</a:t>
-            </a:r>
-            <a:r>
-              <a:rPr/>
-              <a:t> works with overdispersed data</a:t>
-            </a:r>
-          </a:p>
-          <a:p>
-            <a:pPr lvl="0" indent="-342900" marL="342900">
-              <a:buAutoNum type="arabicPeriod"/>
-            </a:pPr>
-            <a:r>
-              <a:rPr b="1"/>
-              <a:t>Logistic GLMs</a:t>
-            </a:r>
-            <a:r>
-              <a:rPr/>
-              <a:t> with logit link function are useful for binary responses - probability of success or presence.</a:t>
-            </a:r>
-          </a:p>
-          <a:p>
-            <a:pPr lvl="0"/>
-            <a:r>
-              <a:rPr/>
-              <a:t>Key advantages of GLMs include:</a:t>
-            </a:r>
-          </a:p>
-          <a:p>
-            <a:pPr lvl="1"/>
-            <a:r>
-              <a:rPr/>
-              <a:t>Handle various response variables beyond normal distributions</a:t>
-            </a:r>
-          </a:p>
-          <a:p>
-            <a:pPr lvl="1"/>
-            <a:r>
-              <a:rPr/>
-              <a:t>Unified framework for linear modeling</a:t>
-            </a:r>
-          </a:p>
-          <a:p>
-            <a:pPr lvl="1"/>
-            <a:r>
-              <a:rPr/>
-              <a:t>Flexibility in specifying the link function to match the data structure</a:t>
-            </a:r>
-          </a:p>
-          <a:p>
-            <a:pPr lvl="1"/>
-            <a:r>
-              <a:rPr/>
-              <a:t>Interpretable parameters, though interpretation differs by model type</a:t>
-            </a:r>
+              <a:t>Let’s demonstrate this equivalence:</a:t>
+            </a:r>
+          </a:p>
+          <a:p>
+            <a:pPr lvl="0" indent="0" marL="0">
+              <a:buNone/>
+            </a:pPr>
           </a:p>
         </p:txBody>
       </p:sp>
@@ -10178,6 +11584,227 @@
         </p:nvSpPr>
         <p:spPr>
           <a:xfrm>
+            <a:off x="139485" y="78119"/>
+            <a:ext cx="8229600" cy="607682"/>
+          </a:xfrm>
+        </p:spPr>
+        <p:txBody>
+          <a:bodyPr/>
+          <a:lstStyle/>
+          <a:p>
+            <a:pPr lvl="0" indent="0" marL="0">
+              <a:buNone/>
+            </a:pPr>
+            <a:r>
+              <a:rPr/>
+              <a:t>Assumptions and Diagnostics Summary</a:t>
+            </a:r>
+          </a:p>
+        </p:txBody>
+      </p:sp>
+      <p:sp>
+        <p:nvSpPr>
+          <p:cNvPr id="3" name="Text Placeholder 2"/>
+          <p:cNvSpPr>
+            <a:spLocks noGrp="1"/>
+          </p:cNvSpPr>
+          <p:nvPr>
+            <p:ph idx="1" type="body"/>
+          </p:nvPr>
+        </p:nvSpPr>
+        <p:spPr/>
+        <p:txBody>
+          <a:bodyPr/>
+          <a:lstStyle/>
+          <a:p>
+            <a:pPr lvl="0"/>
+            <a:r>
+              <a:rPr/>
+              <a:t>Generalized Linear Models- assumptions depend on distribution+link function used:</a:t>
+            </a:r>
+          </a:p>
+          <a:p>
+            <a:pPr lvl="0"/>
+            <a:r>
+              <a:rPr b="1"/>
+              <a:t>All GLMs:</a:t>
+            </a:r>
+          </a:p>
+          <a:p>
+            <a:pPr lvl="1"/>
+            <a:r>
+              <a:rPr/>
+              <a:t>Independence of observations, No outliers, No Multicolinearity</a:t>
+            </a:r>
+          </a:p>
+          <a:p>
+            <a:pPr lvl="1"/>
+            <a:r>
+              <a:rPr/>
+              <a:t>Correct specification of the link function /variance structure</a:t>
+            </a:r>
+          </a:p>
+          <a:p>
+            <a:pPr lvl="0"/>
+            <a:r>
+              <a:rPr b="1"/>
+              <a:t>Gaussian GLMs (including linear regression):</a:t>
+            </a:r>
+          </a:p>
+          <a:p>
+            <a:pPr lvl="1"/>
+            <a:r>
+              <a:rPr/>
+              <a:t>Normality of residuals</a:t>
+            </a:r>
+          </a:p>
+          <a:p>
+            <a:pPr lvl="1"/>
+            <a:r>
+              <a:rPr/>
+              <a:t>Homogeneity of variance</a:t>
+            </a:r>
+          </a:p>
+          <a:p>
+            <a:pPr lvl="0"/>
+            <a:r>
+              <a:rPr b="1"/>
+              <a:t>Poisson GLMs:</a:t>
+            </a:r>
+          </a:p>
+          <a:p>
+            <a:pPr lvl="1"/>
+            <a:r>
+              <a:rPr/>
+              <a:t>Count data (non-negative integers)</a:t>
+            </a:r>
+          </a:p>
+          <a:p>
+            <a:pPr lvl="1"/>
+            <a:r>
+              <a:rPr/>
+              <a:t>Mean equals variance - overdispersed = negative binomial)</a:t>
+            </a:r>
+          </a:p>
+          <a:p>
+            <a:pPr lvl="0"/>
+            <a:r>
+              <a:rPr b="1"/>
+              <a:t>Logistic GLMs:</a:t>
+            </a:r>
+          </a:p>
+          <a:p>
+            <a:pPr lvl="1"/>
+            <a:r>
+              <a:rPr/>
+              <a:t>Binary response variable</a:t>
+            </a:r>
+          </a:p>
+          <a:p>
+            <a:pPr lvl="1"/>
+            <a:r>
+              <a:rPr/>
+              <a:t>Linear relationship between predictors and log odds</a:t>
+            </a:r>
+          </a:p>
+          <a:p>
+            <a:pPr lvl="1"/>
+            <a:r>
+              <a:rPr/>
+              <a:t>Adequate sample size relative to number of parameters</a:t>
+            </a:r>
+          </a:p>
+        </p:txBody>
+      </p:sp>
+      <p:sp>
+        <p:nvSpPr>
+          <p:cNvPr id="5" name="Text Placeholder 4"/>
+          <p:cNvSpPr>
+            <a:spLocks noGrp="1"/>
+          </p:cNvSpPr>
+          <p:nvPr>
+            <p:ph idx="3" sz="quarter" type="body"/>
+          </p:nvPr>
+        </p:nvSpPr>
+        <p:spPr/>
+        <p:txBody>
+          <a:bodyPr/>
+          <a:lstStyle/>
+          <a:p>
+            <a:pPr lvl="0" indent="0" marL="0">
+              <a:buNone/>
+            </a:pPr>
+            <a:r>
+              <a:rPr/>
+              <a:t>The following R code checks some common diagnostics for our logistic model:</a:t>
+            </a:r>
+          </a:p>
+        </p:txBody>
+      </p:sp>
+      <p:pic>
+        <p:nvPicPr>
+          <p:cNvPr descr="14_01_lecture_powerpoint_files/figure-pptx/diagnostic-summary-1.png" id="0" name="Picture 1"/>
+          <p:cNvPicPr>
+            <a:picLocks noGrp="1" noChangeAspect="1"/>
+          </p:cNvPicPr>
+          <p:nvPr/>
+        </p:nvPicPr>
+        <p:blipFill>
+          <a:blip r:embed="rId2"/>
+          <a:stretch>
+            <a:fillRect/>
+          </a:stretch>
+        </p:blipFill>
+        <p:spPr bwMode="auto">
+          <a:xfrm>
+            <a:off x="5130800" y="1295400"/>
+            <a:ext cx="3276600" cy="3276600"/>
+          </a:xfrm>
+          <a:prstGeom prst="rect">
+            <a:avLst/>
+          </a:prstGeom>
+          <a:noFill/>
+          <a:ln w="9525">
+            <a:noFill/>
+            <a:headEnd/>
+            <a:tailEnd/>
+          </a:ln>
+        </p:spPr>
+      </p:pic>
+    </p:spTree>
+  </p:cSld>
+</p:sld>
+</file>
+
+<file path=ppt/slides/slide37.xml><?xml version="1.0" encoding="utf-8"?>
+<p:sld xmlns:a="http://schemas.openxmlformats.org/drawingml/2006/main" xmlns:r="http://schemas.openxmlformats.org/officeDocument/2006/relationships" xmlns:p="http://schemas.openxmlformats.org/presentationml/2006/main">
+  <p:cSld>
+    <p:spTree>
+      <p:nvGrpSpPr>
+        <p:cNvPr id="1" name=""/>
+        <p:cNvGrpSpPr/>
+        <p:nvPr/>
+      </p:nvGrpSpPr>
+      <p:grpSpPr>
+        <a:xfrm>
+          <a:off x="0" y="0"/>
+          <a:ext cx="0" cy="0"/>
+          <a:chOff x="0" y="0"/>
+          <a:chExt cx="0" cy="0"/>
+        </a:xfrm>
+      </p:grpSpPr>
+      <p:sp>
+        <p:nvSpPr>
+          <p:cNvPr id="2" name="Title 1"/>
+          <p:cNvSpPr>
+            <a:spLocks noGrp="1"/>
+          </p:cNvSpPr>
+          <p:nvPr>
+            <p:ph type="title"/>
+          </p:nvPr>
+        </p:nvSpPr>
+        <p:spPr>
+          <a:xfrm>
             <a:off x="0" y="0"/>
             <a:ext cx="9144000" cy="582780"/>
           </a:xfrm>
@@ -10216,7 +11843,7 @@
             </a:pPr>
             <a:r>
               <a:rPr/>
-              <a:t>When working with GLMs:</a:t>
+              <a:t>Generalized Linear Models (GLMs) provide a powerful and flexible framework for analyzing a wide range of data types in biology:</a:t>
             </a:r>
           </a:p>
           <a:p>
@@ -10224,8 +11851,12 @@
               <a:buAutoNum type="arabicPeriod"/>
             </a:pPr>
             <a:r>
-              <a:rPr/>
-              <a:t>Choose the appropriate distribution family based on your response variable</a:t>
+              <a:rPr b="1"/>
+              <a:t>Gaussian GLMs</a:t>
+            </a:r>
+            <a:r>
+              <a:rPr/>
+              <a:t> with identity link function equivalent to standard linear models and ANOVAs</a:t>
             </a:r>
           </a:p>
           <a:p>
@@ -10233,8 +11864,12 @@
               <a:buAutoNum type="arabicPeriod"/>
             </a:pPr>
             <a:r>
-              <a:rPr/>
-              <a:t>Verify model assumptions through diagnostic plots</a:t>
+              <a:rPr b="1"/>
+              <a:t>Poisson GLMs</a:t>
+            </a:r>
+            <a:r>
+              <a:rPr/>
+              <a:t> with log link function are appropriate for count data, but be cautious of overdispersion.</a:t>
             </a:r>
           </a:p>
           <a:p>
@@ -10242,8 +11877,12 @@
               <a:buAutoNum type="arabicPeriod"/>
             </a:pPr>
             <a:r>
-              <a:rPr/>
-              <a:t>Watch for overdispersion in count data</a:t>
+              <a:rPr b="1"/>
+              <a:t>Negative Binomial</a:t>
+            </a:r>
+            <a:r>
+              <a:rPr/>
+              <a:t> works with overdispersed data</a:t>
             </a:r>
           </a:p>
           <a:p>
@@ -10251,26 +11890,47 @@
               <a:buAutoNum type="arabicPeriod"/>
             </a:pPr>
             <a:r>
-              <a:rPr/>
-              <a:t>Use odds ratios to interpret logistic regression results</a:t>
-            </a:r>
-          </a:p>
-          <a:p>
-            <a:pPr lvl="0" indent="-342900" marL="342900">
-              <a:buAutoNum type="arabicPeriod"/>
-            </a:pPr>
-            <a:r>
-              <a:rPr/>
-              <a:t>Compare competing models using likelihood ratio tests and information criteria</a:t>
-            </a:r>
-          </a:p>
-          <a:p>
-            <a:pPr lvl="0" indent="0" marL="0">
-              <a:buNone/>
-            </a:pPr>
-            <a:r>
-              <a:rPr/>
-              <a:t>This framework allows biologists to appropriately model many types of data encountered in ecological, behavioral, and physiological research.</a:t>
+              <a:rPr b="1"/>
+              <a:t>Logistic GLMs</a:t>
+            </a:r>
+            <a:r>
+              <a:rPr/>
+              <a:t> with logit link function are useful for binary responses - probability of success or presence.</a:t>
+            </a:r>
+          </a:p>
+          <a:p>
+            <a:pPr lvl="0"/>
+            <a:r>
+              <a:rPr/>
+              <a:t>Key advantages of GLMs include:</a:t>
+            </a:r>
+          </a:p>
+          <a:p>
+            <a:pPr lvl="1"/>
+            <a:r>
+              <a:rPr/>
+              <a:t>Handle various response variables beyond normal distributions</a:t>
+            </a:r>
+          </a:p>
+          <a:p>
+            <a:pPr lvl="1"/>
+            <a:r>
+              <a:rPr/>
+              <a:t>Unified framework for linear modeling</a:t>
+            </a:r>
+          </a:p>
+          <a:p>
+            <a:pPr lvl="1"/>
+            <a:r>
+              <a:rPr/>
+              <a:t>Flexibility in specifying the link function to match the data structure</a:t>
+            </a:r>
+          </a:p>
+          <a:p>
+            <a:pPr lvl="1"/>
+            <a:r>
+              <a:rPr/>
+              <a:t>Interpretable parameters, though interpretation differs by model type</a:t>
             </a:r>
           </a:p>
         </p:txBody>
@@ -10280,7 +11940,138 @@
 </p:sld>
 </file>
 
-<file path=ppt/slides/slide37.xml><?xml version="1.0" encoding="utf-8"?>
+<file path=ppt/slides/slide38.xml><?xml version="1.0" encoding="utf-8"?>
+<p:sld xmlns:a="http://schemas.openxmlformats.org/drawingml/2006/main" xmlns:r="http://schemas.openxmlformats.org/officeDocument/2006/relationships" xmlns:p="http://schemas.openxmlformats.org/presentationml/2006/main">
+  <p:cSld>
+    <p:spTree>
+      <p:nvGrpSpPr>
+        <p:cNvPr id="1" name=""/>
+        <p:cNvGrpSpPr/>
+        <p:nvPr/>
+      </p:nvGrpSpPr>
+      <p:grpSpPr>
+        <a:xfrm>
+          <a:off x="0" y="0"/>
+          <a:ext cx="0" cy="0"/>
+          <a:chOff x="0" y="0"/>
+          <a:chExt cx="0" cy="0"/>
+        </a:xfrm>
+      </p:grpSpPr>
+      <p:sp>
+        <p:nvSpPr>
+          <p:cNvPr id="2" name="Title 1"/>
+          <p:cNvSpPr>
+            <a:spLocks noGrp="1"/>
+          </p:cNvSpPr>
+          <p:nvPr>
+            <p:ph type="title"/>
+          </p:nvPr>
+        </p:nvSpPr>
+        <p:spPr>
+          <a:xfrm>
+            <a:off x="0" y="0"/>
+            <a:ext cx="9144000" cy="582780"/>
+          </a:xfrm>
+        </p:spPr>
+        <p:txBody>
+          <a:bodyPr/>
+          <a:lstStyle/>
+          <a:p>
+            <a:pPr lvl="0" indent="0" marL="0">
+              <a:buNone/>
+            </a:pPr>
+            <a:r>
+              <a:rPr/>
+              <a:t>Summary and Conclusions</a:t>
+            </a:r>
+          </a:p>
+        </p:txBody>
+      </p:sp>
+      <p:sp>
+        <p:nvSpPr>
+          <p:cNvPr id="3" name="Content Placeholder 2"/>
+          <p:cNvSpPr>
+            <a:spLocks noGrp="1"/>
+          </p:cNvSpPr>
+          <p:nvPr>
+            <p:ph idx="1"/>
+          </p:nvPr>
+        </p:nvSpPr>
+        <p:spPr/>
+        <p:txBody>
+          <a:bodyPr/>
+          <a:lstStyle/>
+          <a:p>
+            <a:pPr lvl="0" indent="0" marL="0">
+              <a:buNone/>
+            </a:pPr>
+            <a:r>
+              <a:rPr/>
+              <a:t>When working with GLMs:</a:t>
+            </a:r>
+          </a:p>
+          <a:p>
+            <a:pPr lvl="0" indent="-342900" marL="342900">
+              <a:buAutoNum type="arabicPeriod"/>
+            </a:pPr>
+            <a:r>
+              <a:rPr/>
+              <a:t>Choose the appropriate distribution family based on your response variable</a:t>
+            </a:r>
+          </a:p>
+          <a:p>
+            <a:pPr lvl="0" indent="-342900" marL="342900">
+              <a:buAutoNum type="arabicPeriod"/>
+            </a:pPr>
+            <a:r>
+              <a:rPr/>
+              <a:t>Verify model assumptions through diagnostic plots</a:t>
+            </a:r>
+          </a:p>
+          <a:p>
+            <a:pPr lvl="0" indent="-342900" marL="342900">
+              <a:buAutoNum type="arabicPeriod"/>
+            </a:pPr>
+            <a:r>
+              <a:rPr/>
+              <a:t>Watch for overdispersion in count data</a:t>
+            </a:r>
+          </a:p>
+          <a:p>
+            <a:pPr lvl="0" indent="-342900" marL="342900">
+              <a:buAutoNum type="arabicPeriod"/>
+            </a:pPr>
+            <a:r>
+              <a:rPr/>
+              <a:t>Use odds ratios to interpret logistic regression results</a:t>
+            </a:r>
+          </a:p>
+          <a:p>
+            <a:pPr lvl="0" indent="-342900" marL="342900">
+              <a:buAutoNum type="arabicPeriod"/>
+            </a:pPr>
+            <a:r>
+              <a:rPr/>
+              <a:t>Compare competing models using likelihood ratio tests and information criteria</a:t>
+            </a:r>
+          </a:p>
+          <a:p>
+            <a:pPr lvl="0" indent="0" marL="0">
+              <a:buNone/>
+            </a:pPr>
+            <a:r>
+              <a:rPr/>
+              <a:t>This framework allows biologists to appropriately model many types of data encountered in ecological, behavioral, and physiological research.</a:t>
+            </a:r>
+          </a:p>
+        </p:txBody>
+      </p:sp>
+    </p:spTree>
+  </p:cSld>
+</p:sld>
+</file>
+
+<file path=ppt/slides/slide39.xml><?xml version="1.0" encoding="utf-8"?>
 <p:sld xmlns:a="http://schemas.openxmlformats.org/drawingml/2006/main" xmlns:r="http://schemas.openxmlformats.org/officeDocument/2006/relationships" xmlns:p="http://schemas.openxmlformats.org/presentationml/2006/main">
   <p:cSld>
     <p:spTree>
@@ -10472,7 +12263,16 @@
             </a:pPr>
             <a:r>
               <a:rPr/>
-              <a:t>General linear models assume normal distribution of response variables and residuals. However, many types of biological data don’t meet this assumption. Generalized Linear Models (GLMs) allow for a wider range of probability distributions for the response variable.</a:t>
+              <a:t>General linear models assume normal distribution of response variables and residuals. However, many types of biological data don’t meet this assumption.</a:t>
+            </a:r>
+          </a:p>
+          <a:p>
+            <a:pPr lvl="0" indent="0" marL="0">
+              <a:buNone/>
+            </a:pPr>
+            <a:r>
+              <a:rPr/>
+              <a:t>Generalized Linear Models (GLMs) allow for a wider range of probability distributions for the response variable.</a:t>
             </a:r>
           </a:p>
           <a:p>
@@ -11288,10 +13088,10 @@
                 <a:tableStyleId>{5C22544A-7EE6-4342-B048-85BDC9FD1C3A}</a:tableStyleId>
               </a:tblPr>
               <a:tblGrid>
-                <a:gridCol w="1041400"/>
-                <a:gridCol w="749300"/>
-                <a:gridCol w="1511300"/>
-                <a:gridCol w="1130300"/>
+                <a:gridCol w="990600"/>
+                <a:gridCol w="901700"/>
+                <a:gridCol w="1447800"/>
+                <a:gridCol w="1079500"/>
               </a:tblGrid>
               <a:tr h="0">
                 <a:tc>
@@ -11370,6 +13170,378 @@
                       </a:pPr>
                       <a:r>
                         <a:rPr/>
+                        <a:t>89</a:t>
+                      </a:r>
+                    </a:p>
+                  </a:txBody>
+                </a:tc>
+                <a:tc>
+                  <a:txBody>
+                    <a:bodyPr/>
+                    <a:lstStyle/>
+                    <a:p>
+                      <a:pPr lvl="0" indent="0" marL="0">
+                        <a:buNone/>
+                      </a:pPr>
+                      <a:r>
+                        <a:rPr/>
+                        <a:t>4669.32</a:t>
+                      </a:r>
+                    </a:p>
+                  </a:txBody>
+                </a:tc>
+                <a:tc>
+                  <a:txBody>
+                    <a:bodyPr/>
+                    <a:lstStyle/>
+                    <a:p>
+                      <a:pPr lvl="0" indent="0" marL="0">
+                        <a:buNone/>
+                      </a:pPr>
+                      <a:r>
+                        <a:rPr/>
+                        <a:t>Large</a:t>
+                      </a:r>
+                    </a:p>
+                  </a:txBody>
+                </a:tc>
+                <a:tc>
+                  <a:txBody>
+                    <a:bodyPr/>
+                    <a:lstStyle/>
+                    <a:p>
+                      <a:pPr lvl="0" indent="0" marL="0">
+                        <a:buNone/>
+                      </a:pPr>
+                      <a:r>
+                        <a:rPr/>
+                        <a:t>1707</a:t>
+                      </a:r>
+                    </a:p>
+                  </a:txBody>
+                </a:tc>
+              </a:tr>
+              <a:tr h="0">
+                <a:tc>
+                  <a:txBody>
+                    <a:bodyPr/>
+                    <a:lstStyle/>
+                    <a:p>
+                      <a:pPr lvl="0" indent="0" marL="0">
+                        <a:buNone/>
+                      </a:pPr>
+                      <a:r>
+                        <a:rPr/>
+                        <a:t>95</a:t>
+                      </a:r>
+                    </a:p>
+                  </a:txBody>
+                </a:tc>
+                <a:tc>
+                  <a:txBody>
+                    <a:bodyPr/>
+                    <a:lstStyle/>
+                    <a:p>
+                      <a:pPr lvl="0" indent="0" marL="0">
+                        <a:buNone/>
+                      </a:pPr>
+                      <a:r>
+                        <a:rPr/>
+                        <a:t>903.82</a:t>
+                      </a:r>
+                    </a:p>
+                  </a:txBody>
+                </a:tc>
+                <a:tc>
+                  <a:txBody>
+                    <a:bodyPr/>
+                    <a:lstStyle/>
+                    <a:p>
+                      <a:pPr lvl="0" indent="0" marL="0">
+                        <a:buNone/>
+                      </a:pPr>
+                      <a:r>
+                        <a:rPr/>
+                        <a:t>Large</a:t>
+                      </a:r>
+                    </a:p>
+                  </a:txBody>
+                </a:tc>
+                <a:tc>
+                  <a:txBody>
+                    <a:bodyPr/>
+                    <a:lstStyle/>
+                    <a:p>
+                      <a:pPr lvl="0" indent="0" marL="0">
+                        <a:buNone/>
+                      </a:pPr>
+                      <a:r>
+                        <a:rPr/>
+                        <a:t>864</a:t>
+                      </a:r>
+                    </a:p>
+                  </a:txBody>
+                </a:tc>
+              </a:tr>
+              <a:tr h="0">
+                <a:tc>
+                  <a:txBody>
+                    <a:bodyPr/>
+                    <a:lstStyle/>
+                    <a:p>
+                      <a:pPr lvl="0" indent="0" marL="0">
+                        <a:buNone/>
+                      </a:pPr>
+                      <a:r>
+                        <a:rPr/>
+                        <a:t>35</a:t>
+                      </a:r>
+                    </a:p>
+                  </a:txBody>
+                </a:tc>
+                <a:tc>
+                  <a:txBody>
+                    <a:bodyPr/>
+                    <a:lstStyle/>
+                    <a:p>
+                      <a:pPr lvl="0" indent="0" marL="0">
+                        <a:buNone/>
+                      </a:pPr>
+                      <a:r>
+                        <a:rPr/>
+                        <a:t>634.49</a:t>
+                      </a:r>
+                    </a:p>
+                  </a:txBody>
+                </a:tc>
+                <a:tc>
+                  <a:txBody>
+                    <a:bodyPr/>
+                    <a:lstStyle/>
+                    <a:p>
+                      <a:pPr lvl="0" indent="0" marL="0">
+                        <a:buNone/>
+                      </a:pPr>
+                      <a:r>
+                        <a:rPr/>
+                        <a:t>Large</a:t>
+                      </a:r>
+                    </a:p>
+                  </a:txBody>
+                </a:tc>
+                <a:tc>
+                  <a:txBody>
+                    <a:bodyPr/>
+                    <a:lstStyle/>
+                    <a:p>
+                      <a:pPr lvl="0" indent="0" marL="0">
+                        <a:buNone/>
+                      </a:pPr>
+                      <a:r>
+                        <a:rPr/>
+                        <a:t>1494</a:t>
+                      </a:r>
+                    </a:p>
+                  </a:txBody>
+                </a:tc>
+              </a:tr>
+              <a:tr h="0">
+                <a:tc>
+                  <a:txBody>
+                    <a:bodyPr/>
+                    <a:lstStyle/>
+                    <a:p>
+                      <a:pPr lvl="0" indent="0" marL="0">
+                        <a:buNone/>
+                      </a:pPr>
+                      <a:r>
+                        <a:rPr/>
+                        <a:t>81</a:t>
+                      </a:r>
+                    </a:p>
+                  </a:txBody>
+                </a:tc>
+                <a:tc>
+                  <a:txBody>
+                    <a:bodyPr/>
+                    <a:lstStyle/>
+                    <a:p>
+                      <a:pPr lvl="0" indent="0" marL="0">
+                        <a:buNone/>
+                      </a:pPr>
+                      <a:r>
+                        <a:rPr/>
+                        <a:t>572.33</a:t>
+                      </a:r>
+                    </a:p>
+                  </a:txBody>
+                </a:tc>
+                <a:tc>
+                  <a:txBody>
+                    <a:bodyPr/>
+                    <a:lstStyle/>
+                    <a:p>
+                      <a:pPr lvl="0" indent="0" marL="0">
+                        <a:buNone/>
+                      </a:pPr>
+                      <a:r>
+                        <a:rPr/>
+                        <a:t>Large</a:t>
+                      </a:r>
+                    </a:p>
+                  </a:txBody>
+                </a:tc>
+                <a:tc>
+                  <a:txBody>
+                    <a:bodyPr/>
+                    <a:lstStyle/>
+                    <a:p>
+                      <a:pPr lvl="0" indent="0" marL="0">
+                        <a:buNone/>
+                      </a:pPr>
+                      <a:r>
+                        <a:rPr/>
+                        <a:t>906</a:t>
+                      </a:r>
+                    </a:p>
+                  </a:txBody>
+                </a:tc>
+              </a:tr>
+              <a:tr h="0">
+                <a:tc>
+                  <a:txBody>
+                    <a:bodyPr/>
+                    <a:lstStyle/>
+                    <a:p>
+                      <a:pPr lvl="0" indent="0" marL="0">
+                        <a:buNone/>
+                      </a:pPr>
+                      <a:r>
+                        <a:rPr/>
+                        <a:t>65</a:t>
+                      </a:r>
+                    </a:p>
+                  </a:txBody>
+                </a:tc>
+                <a:tc>
+                  <a:txBody>
+                    <a:bodyPr/>
+                    <a:lstStyle/>
+                    <a:p>
+                      <a:pPr lvl="0" indent="0" marL="0">
+                        <a:buNone/>
+                      </a:pPr>
+                      <a:r>
+                        <a:rPr/>
+                        <a:t>551.62</a:t>
+                      </a:r>
+                    </a:p>
+                  </a:txBody>
+                </a:tc>
+                <a:tc>
+                  <a:txBody>
+                    <a:bodyPr/>
+                    <a:lstStyle/>
+                    <a:p>
+                      <a:pPr lvl="0" indent="0" marL="0">
+                        <a:buNone/>
+                      </a:pPr>
+                      <a:r>
+                        <a:rPr/>
+                        <a:t>Large</a:t>
+                      </a:r>
+                    </a:p>
+                  </a:txBody>
+                </a:tc>
+                <a:tc>
+                  <a:txBody>
+                    <a:bodyPr/>
+                    <a:lstStyle/>
+                    <a:p>
+                      <a:pPr lvl="0" indent="0" marL="0">
+                        <a:buNone/>
+                      </a:pPr>
+                      <a:r>
+                        <a:rPr/>
+                        <a:t>716</a:t>
+                      </a:r>
+                    </a:p>
+                  </a:txBody>
+                </a:tc>
+              </a:tr>
+              <a:tr h="0">
+                <a:tc>
+                  <a:txBody>
+                    <a:bodyPr/>
+                    <a:lstStyle/>
+                    <a:p>
+                      <a:pPr lvl="0" indent="0" marL="0">
+                        <a:buNone/>
+                      </a:pPr>
+                      <a:r>
+                        <a:rPr/>
+                        <a:t>73</a:t>
+                      </a:r>
+                    </a:p>
+                  </a:txBody>
+                </a:tc>
+                <a:tc>
+                  <a:txBody>
+                    <a:bodyPr/>
+                    <a:lstStyle/>
+                    <a:p>
+                      <a:pPr lvl="0" indent="0" marL="0">
+                        <a:buNone/>
+                      </a:pPr>
+                      <a:r>
+                        <a:rPr/>
+                        <a:t>170.92</a:t>
+                      </a:r>
+                    </a:p>
+                  </a:txBody>
+                </a:tc>
+                <a:tc>
+                  <a:txBody>
+                    <a:bodyPr/>
+                    <a:lstStyle/>
+                    <a:p>
+                      <a:pPr lvl="0" indent="0" marL="0">
+                        <a:buNone/>
+                      </a:pPr>
+                      <a:r>
+                        <a:rPr/>
+                        <a:t>Large</a:t>
+                      </a:r>
+                    </a:p>
+                  </a:txBody>
+                </a:tc>
+                <a:tc>
+                  <a:txBody>
+                    <a:bodyPr/>
+                    <a:lstStyle/>
+                    <a:p>
+                      <a:pPr lvl="0" indent="0" marL="0">
+                        <a:buNone/>
+                      </a:pPr>
+                      <a:r>
+                        <a:rPr/>
+                        <a:t>640</a:t>
+                      </a:r>
+                    </a:p>
+                  </a:txBody>
+                </a:tc>
+              </a:tr>
+              <a:tr h="0">
+                <a:tc>
+                  <a:txBody>
+                    <a:bodyPr/>
+                    <a:lstStyle/>
+                    <a:p>
+                      <a:pPr lvl="0" indent="0" marL="0">
+                        <a:buNone/>
+                      </a:pPr>
+                      <a:r>
+                        <a:rPr/>
                         <a:t>23</a:t>
                       </a:r>
                     </a:p>
@@ -11385,7 +13557,69 @@
                       </a:pPr>
                       <a:r>
                         <a:rPr/>
-                        <a:t>25.09</a:t>
+                        <a:t>129.49</a:t>
+                      </a:r>
+                    </a:p>
+                  </a:txBody>
+                </a:tc>
+                <a:tc>
+                  <a:txBody>
+                    <a:bodyPr/>
+                    <a:lstStyle/>
+                    <a:p>
+                      <a:pPr lvl="0" indent="0" marL="0">
+                        <a:buNone/>
+                      </a:pPr>
+                      <a:r>
+                        <a:rPr/>
+                        <a:t>Large</a:t>
+                      </a:r>
+                    </a:p>
+                  </a:txBody>
+                </a:tc>
+                <a:tc>
+                  <a:txBody>
+                    <a:bodyPr/>
+                    <a:lstStyle/>
+                    <a:p>
+                      <a:pPr lvl="0" indent="0" marL="0">
+                        <a:buNone/>
+                      </a:pPr>
+                      <a:r>
+                        <a:rPr/>
+                        <a:t>343</a:t>
+                      </a:r>
+                    </a:p>
+                  </a:txBody>
+                </a:tc>
+              </a:tr>
+              <a:tr h="0">
+                <a:tc>
+                  <a:txBody>
+                    <a:bodyPr/>
+                    <a:lstStyle/>
+                    <a:p>
+                      <a:pPr lvl="0" indent="0" marL="0">
+                        <a:buNone/>
+                      </a:pPr>
+                      <a:r>
+                        <a:rPr/>
+                        <a:t>37</a:t>
+                      </a:r>
+                    </a:p>
+                  </a:txBody>
+                </a:tc>
+                <a:tc>
+                  <a:txBody>
+                    <a:bodyPr/>
+                    <a:lstStyle/>
+                    <a:p>
+                      <a:pPr lvl="0" indent="0" marL="0">
+                        <a:buNone/>
+                      </a:pPr>
+                      <a:r>
+                        <a:rPr/>
+                        <a:t>59.56</a:t>
                       </a:r>
                     </a:p>
                   </a:txBody>
@@ -11415,441 +13649,7 @@
                       </a:pPr>
                       <a:r>
                         <a:rPr/>
-                        <a:t>346</a:t>
-                      </a:r>
-                    </a:p>
-                  </a:txBody>
-                </a:tc>
-              </a:tr>
-              <a:tr h="0">
-                <a:tc>
-                  <a:txBody>
-                    <a:bodyPr/>
-                    <a:lstStyle/>
-                    <a:p>
-                      <a:pPr lvl="0" indent="0" marL="0">
-                        <a:buNone/>
-                      </a:pPr>
-                      <a:r>
-                        <a:rPr/>
-                        <a:t>21</a:t>
-                      </a:r>
-                    </a:p>
-                  </a:txBody>
-                </a:tc>
-                <a:tc>
-                  <a:txBody>
-                    <a:bodyPr/>
-                    <a:lstStyle/>
-                    <a:p>
-                      <a:pPr lvl="0" indent="0" marL="0">
-                        <a:buNone/>
-                      </a:pPr>
-                      <a:r>
-                        <a:rPr/>
-                        <a:t>1.24</a:t>
-                      </a:r>
-                    </a:p>
-                  </a:txBody>
-                </a:tc>
-                <a:tc>
-                  <a:txBody>
-                    <a:bodyPr/>
-                    <a:lstStyle/>
-                    <a:p>
-                      <a:pPr lvl="0" indent="0" marL="0">
-                        <a:buNone/>
-                      </a:pPr>
-                      <a:r>
-                        <a:rPr/>
-                        <a:t>Medium</a:t>
-                      </a:r>
-                    </a:p>
-                  </a:txBody>
-                </a:tc>
-                <a:tc>
-                  <a:txBody>
-                    <a:bodyPr/>
-                    <a:lstStyle/>
-                    <a:p>
-                      <a:pPr lvl="0" indent="0" marL="0">
-                        <a:buNone/>
-                      </a:pPr>
-                      <a:r>
-                        <a:rPr/>
-                        <a:t>109</a:t>
-                      </a:r>
-                    </a:p>
-                  </a:txBody>
-                </a:tc>
-              </a:tr>
-              <a:tr h="0">
-                <a:tc>
-                  <a:txBody>
-                    <a:bodyPr/>
-                    <a:lstStyle/>
-                    <a:p>
-                      <a:pPr lvl="0" indent="0" marL="0">
-                        <a:buNone/>
-                      </a:pPr>
-                      <a:r>
-                        <a:rPr/>
-                        <a:t>3</a:t>
-                      </a:r>
-                    </a:p>
-                  </a:txBody>
-                </a:tc>
-                <a:tc>
-                  <a:txBody>
-                    <a:bodyPr/>
-                    <a:lstStyle/>
-                    <a:p>
-                      <a:pPr lvl="0" indent="0" marL="0">
-                        <a:buNone/>
-                      </a:pPr>
-                      <a:r>
-                        <a:rPr/>
-                        <a:t>0.21</a:t>
-                      </a:r>
-                    </a:p>
-                  </a:txBody>
-                </a:tc>
-                <a:tc>
-                  <a:txBody>
-                    <a:bodyPr/>
-                    <a:lstStyle/>
-                    <a:p>
-                      <a:pPr lvl="0" indent="0" marL="0">
-                        <a:buNone/>
-                      </a:pPr>
-                      <a:r>
-                        <a:rPr/>
-                        <a:t>Small</a:t>
-                      </a:r>
-                    </a:p>
-                  </a:txBody>
-                </a:tc>
-                <a:tc>
-                  <a:txBody>
-                    <a:bodyPr/>
-                    <a:lstStyle/>
-                    <a:p>
-                      <a:pPr lvl="0" indent="0" marL="0">
-                        <a:buNone/>
-                      </a:pPr>
-                      <a:r>
-                        <a:rPr/>
-                        <a:t>114</a:t>
-                      </a:r>
-                    </a:p>
-                  </a:txBody>
-                </a:tc>
-              </a:tr>
-              <a:tr h="0">
-                <a:tc>
-                  <a:txBody>
-                    <a:bodyPr/>
-                    <a:lstStyle/>
-                    <a:p>
-                      <a:pPr lvl="0" indent="0" marL="0">
-                        <a:buNone/>
-                      </a:pPr>
-                      <a:r>
-                        <a:rPr/>
-                        <a:t>9</a:t>
-                      </a:r>
-                    </a:p>
-                  </a:txBody>
-                </a:tc>
-                <a:tc>
-                  <a:txBody>
-                    <a:bodyPr/>
-                    <a:lstStyle/>
-                    <a:p>
-                      <a:pPr lvl="0" indent="0" marL="0">
-                        <a:buNone/>
-                      </a:pPr>
-                      <a:r>
-                        <a:rPr/>
-                        <a:t>0.10</a:t>
-                      </a:r>
-                    </a:p>
-                  </a:txBody>
-                </a:tc>
-                <a:tc>
-                  <a:txBody>
-                    <a:bodyPr/>
-                    <a:lstStyle/>
-                    <a:p>
-                      <a:pPr lvl="0" indent="0" marL="0">
-                        <a:buNone/>
-                      </a:pPr>
-                      <a:r>
-                        <a:rPr/>
-                        <a:t>Small</a:t>
-                      </a:r>
-                    </a:p>
-                  </a:txBody>
-                </a:tc>
-                <a:tc>
-                  <a:txBody>
-                    <a:bodyPr/>
-                    <a:lstStyle/>
-                    <a:p>
-                      <a:pPr lvl="0" indent="0" marL="0">
-                        <a:buNone/>
-                      </a:pPr>
-                      <a:r>
-                        <a:rPr/>
-                        <a:t>46</a:t>
-                      </a:r>
-                    </a:p>
-                  </a:txBody>
-                </a:tc>
-              </a:tr>
-              <a:tr h="0">
-                <a:tc>
-                  <a:txBody>
-                    <a:bodyPr/>
-                    <a:lstStyle/>
-                    <a:p>
-                      <a:pPr lvl="0" indent="0" marL="0">
-                        <a:buNone/>
-                      </a:pPr>
-                      <a:r>
-                        <a:rPr/>
-                        <a:t>1</a:t>
-                      </a:r>
-                    </a:p>
-                  </a:txBody>
-                </a:tc>
-                <a:tc>
-                  <a:txBody>
-                    <a:bodyPr/>
-                    <a:lstStyle/>
-                    <a:p>
-                      <a:pPr lvl="0" indent="0" marL="0">
-                        <a:buNone/>
-                      </a:pPr>
-                      <a:r>
-                        <a:rPr/>
-                        <a:t>0.05</a:t>
-                      </a:r>
-                    </a:p>
-                  </a:txBody>
-                </a:tc>
-                <a:tc>
-                  <a:txBody>
-                    <a:bodyPr/>
-                    <a:lstStyle/>
-                    <a:p>
-                      <a:pPr lvl="0" indent="0" marL="0">
-                        <a:buNone/>
-                      </a:pPr>
-                      <a:r>
-                        <a:rPr/>
-                        <a:t>Small</a:t>
-                      </a:r>
-                    </a:p>
-                  </a:txBody>
-                </a:tc>
-                <a:tc>
-                  <a:txBody>
-                    <a:bodyPr/>
-                    <a:lstStyle/>
-                    <a:p>
-                      <a:pPr lvl="0" indent="0" marL="0">
-                        <a:buNone/>
-                      </a:pPr>
-                      <a:r>
-                        <a:rPr/>
-                        <a:t>77</a:t>
-                      </a:r>
-                    </a:p>
-                  </a:txBody>
-                </a:tc>
-              </a:tr>
-              <a:tr h="0">
-                <a:tc>
-                  <a:txBody>
-                    <a:bodyPr/>
-                    <a:lstStyle/>
-                    <a:p>
-                      <a:pPr lvl="0" indent="0" marL="0">
-                        <a:buNone/>
-                      </a:pPr>
-                      <a:r>
-                        <a:rPr/>
-                        <a:t>11</a:t>
-                      </a:r>
-                    </a:p>
-                  </a:txBody>
-                </a:tc>
-                <a:tc>
-                  <a:txBody>
-                    <a:bodyPr/>
-                    <a:lstStyle/>
-                    <a:p>
-                      <a:pPr lvl="0" indent="0" marL="0">
-                        <a:buNone/>
-                      </a:pPr>
-                      <a:r>
-                        <a:rPr/>
-                        <a:t>0.34</a:t>
-                      </a:r>
-                    </a:p>
-                  </a:txBody>
-                </a:tc>
-                <a:tc>
-                  <a:txBody>
-                    <a:bodyPr/>
-                    <a:lstStyle/>
-                    <a:p>
-                      <a:pPr lvl="0" indent="0" marL="0">
-                        <a:buNone/>
-                      </a:pPr>
-                      <a:r>
-                        <a:rPr/>
-                        <a:t>Small</a:t>
-                      </a:r>
-                    </a:p>
-                  </a:txBody>
-                </a:tc>
-                <a:tc>
-                  <a:txBody>
-                    <a:bodyPr/>
-                    <a:lstStyle/>
-                    <a:p>
-                      <a:pPr lvl="0" indent="0" marL="0">
-                        <a:buNone/>
-                      </a:pPr>
-                      <a:r>
-                        <a:rPr/>
-                        <a:t>119</a:t>
-                      </a:r>
-                    </a:p>
-                  </a:txBody>
-                </a:tc>
-              </a:tr>
-              <a:tr h="0">
-                <a:tc>
-                  <a:txBody>
-                    <a:bodyPr/>
-                    <a:lstStyle/>
-                    <a:p>
-                      <a:pPr lvl="0" indent="0" marL="0">
-                        <a:buNone/>
-                      </a:pPr>
-                      <a:r>
-                        <a:rPr/>
-                        <a:t>0</a:t>
-                      </a:r>
-                    </a:p>
-                  </a:txBody>
-                </a:tc>
-                <a:tc>
-                  <a:txBody>
-                    <a:bodyPr/>
-                    <a:lstStyle/>
-                    <a:p>
-                      <a:pPr lvl="0" indent="0" marL="0">
-                        <a:buNone/>
-                      </a:pPr>
-                      <a:r>
-                        <a:rPr/>
-                        <a:t>0.08</a:t>
-                      </a:r>
-                    </a:p>
-                  </a:txBody>
-                </a:tc>
-                <a:tc>
-                  <a:txBody>
-                    <a:bodyPr/>
-                    <a:lstStyle/>
-                    <a:p>
-                      <a:pPr lvl="0" indent="0" marL="0">
-                        <a:buNone/>
-                      </a:pPr>
-                      <a:r>
-                        <a:rPr/>
-                        <a:t>Small</a:t>
-                      </a:r>
-                    </a:p>
-                  </a:txBody>
-                </a:tc>
-                <a:tc>
-                  <a:txBody>
-                    <a:bodyPr/>
-                    <a:lstStyle/>
-                    <a:p>
-                      <a:pPr lvl="0" indent="0" marL="0">
-                        <a:buNone/>
-                      </a:pPr>
-                      <a:r>
-                        <a:rPr/>
-                        <a:t>93</a:t>
-                      </a:r>
-                    </a:p>
-                  </a:txBody>
-                </a:tc>
-              </a:tr>
-              <a:tr h="0">
-                <a:tc>
-                  <a:txBody>
-                    <a:bodyPr/>
-                    <a:lstStyle/>
-                    <a:p>
-                      <a:pPr lvl="0" indent="0" marL="0">
-                        <a:buNone/>
-                      </a:pPr>
-                      <a:r>
-                        <a:rPr/>
-                        <a:t>7</a:t>
-                      </a:r>
-                    </a:p>
-                  </a:txBody>
-                </a:tc>
-                <a:tc>
-                  <a:txBody>
-                    <a:bodyPr/>
-                    <a:lstStyle/>
-                    <a:p>
-                      <a:pPr lvl="0" indent="0" marL="0">
-                        <a:buNone/>
-                      </a:pPr>
-                      <a:r>
-                        <a:rPr/>
-                        <a:t>2.33</a:t>
-                      </a:r>
-                    </a:p>
-                  </a:txBody>
-                </a:tc>
-                <a:tc>
-                  <a:txBody>
-                    <a:bodyPr/>
-                    <a:lstStyle/>
-                    <a:p>
-                      <a:pPr lvl="0" indent="0" marL="0">
-                        <a:buNone/>
-                      </a:pPr>
-                      <a:r>
-                        <a:rPr/>
-                        <a:t>Medium</a:t>
-                      </a:r>
-                    </a:p>
-                  </a:txBody>
-                </a:tc>
-                <a:tc>
-                  <a:txBody>
-                    <a:bodyPr/>
-                    <a:lstStyle/>
-                    <a:p>
-                      <a:pPr lvl="0" indent="0" marL="0">
-                        <a:buNone/>
-                      </a:pPr>
-                      <a:r>
-                        <a:rPr/>
-                        <a:t>168</a:t>
+                        <a:t>777</a:t>
                       </a:r>
                     </a:p>
                   </a:txBody>
@@ -11969,47 +13769,116 @@
           </a:p>
         </p:txBody>
       </p:sp>
-      <p:sp>
-        <p:nvSpPr>
-          <p:cNvPr id="3" name="Content Placeholder 2"/>
-          <p:cNvSpPr>
-            <a:spLocks noGrp="1"/>
-          </p:cNvSpPr>
-          <p:nvPr>
-            <p:ph idx="1" sz="half"/>
-          </p:nvPr>
-        </p:nvSpPr>
-        <p:spPr/>
-        <p:txBody>
-          <a:bodyPr/>
-          <a:lstStyle/>
-          <a:p>
-            <a:pPr lvl="0" indent="0" marL="0">
-              <a:buNone/>
-            </a:pPr>
-            <a:r>
-              <a:rPr/>
-              <a:t>The simplest form of GLM uses a normal (Gaussian) distribution with an identity link function. This is equivalent to standard linear regression.</a:t>
-            </a:r>
-          </a:p>
-          <a:p>
-            <a:pPr lvl="0" indent="0" marL="0">
-              <a:buNone/>
-            </a:pPr>
-            <a:r>
-              <a:rPr/>
-              <a:t>Let’s compare a standard linear model and a Gaussian GLM using the Galapagos dataset, modeling endemic species richness by island size category.</a:t>
-            </a:r>
-          </a:p>
-          <a:p>
-            <a:pPr lvl="0" indent="0">
-              <a:buNone/>
-            </a:pPr>
-            <a:r>
-              <a:rPr>
-                <a:latin typeface="Courier"/>
-              </a:rPr>
-              <a:t>## 
+      <mc:AlternateContent xmlns:mc="http://schemas.openxmlformats.org/markup-compatibility/2006">
+        <mc:Choice xmlns:a14="http://schemas.microsoft.com/office/drawing/2010/main" Requires="a14">
+          <p:sp>
+            <p:nvSpPr>
+              <p:cNvPr id="3" name="Content Placeholder 2"/>
+              <p:cNvSpPr>
+                <a:spLocks noGrp="1"/>
+              </p:cNvSpPr>
+              <p:nvPr>
+                <p:ph idx="1" sz="half"/>
+              </p:nvPr>
+            </p:nvSpPr>
+            <p:spPr/>
+            <p:txBody>
+              <a:bodyPr/>
+              <a:lstStyle/>
+              <a:p>
+                <a:pPr lvl="0" indent="0" marL="0">
+                  <a:buNone/>
+                </a:pPr>
+                <a:r>
+                  <a:rPr/>
+                  <a:t>The simplest form of GLM uses a normal (Gaussian) distribution with an identity link function. This is equivalent to standard linear regression.</a:t>
+                </a:r>
+              </a:p>
+              <a:p>
+                <a:pPr lvl="0" indent="0" marL="0">
+                  <a:buNone/>
+                </a:pPr>
+                <a:r>
+                  <a:rPr/>
+                  <a:t>Let’s compare a standard linear model and a Gaussian GLM using the Galapagos dataset, modeling endemic species richness by island size category.</a:t>
+                </a:r>
+              </a:p>
+              <a:p>
+                <a:pPr lvl="0"/>
+                <a:r>
+                  <a:rPr/>
+                  <a:t>Fit a standard linear model</a:t>
+                </a:r>
+              </a:p>
+              <a:p>
+                <a:pPr lvl="1"/>
+                <a:r>
+                  <a:rPr/>
+                  <a:t>model_lm &lt;- lm(Endemics ~ size_category,</a:t>
+                </a:r>
+                <a:br/>
+                <a:r>
+                  <a:rPr/>
+                  <a:t>data = gala)</a:t>
+                </a:r>
+              </a:p>
+              <a:p>
+                <a:pPr lvl="0"/>
+                <a:r>
+                  <a:rPr/>
+                  <a:t>Fit a Gaussian GLM</a:t>
+                </a:r>
+              </a:p>
+              <a:p>
+                <a:pPr lvl="1"/>
+                <a:r>
+                  <a:rPr/>
+                  <a:t>model_gaussian &lt;- glm(Endemics ~ size_category,</a:t>
+                </a:r>
+                <a:br/>
+                <a:r>
+                  <a:rPr/>
+                  <a:t>data = gala,</a:t>
+                </a:r>
+                <a:br/>
+                <a:r>
+                  <a:rPr/>
+                  <a:t>family = gaussian(link = “identity”))</a:t>
+                </a:r>
+              </a:p>
+              <a:p>
+                <a:pPr lvl="0" indent="0" marL="0">
+                  <a:buNone/>
+                </a:pPr>
+                <a:r>
+                  <a:rPr b="1"/>
+                  <a:t>Residual Standard Error</a:t>
+                </a:r>
+                <a:r>
+                  <a:rPr/>
+                  <a:t>. This is the standard deviation of the residuals (</a:t>
+                </a:r>
+                <a14:m>
+                  <m:oMath xmlns:m="http://schemas.openxmlformats.org/officeDocument/2006/math">
+                    <m:r>
+                      <m:t>σ</m:t>
+                    </m:r>
+                  </m:oMath>
+                </a14:m>
+                <a:r>
+                  <a:rPr/>
+                  <a:t>)</a:t>
+                </a:r>
+              </a:p>
+              <a:p>
+                <a:pPr lvl="0" indent="0">
+                  <a:buNone/>
+                </a:pPr>
+                <a:r>
+                  <a:rPr>
+                    <a:latin typeface="Courier"/>
+                  </a:rPr>
+                  <a:t>## 
 ## Call:
 ## lm(formula = Endemics ~ size_category, data = gala)
 ## 
@@ -12028,42 +13897,150 @@
 ## Residual standard error: 14.6 on 27 degrees of freedom
 ## Multiple R-squared:  0.7343, Adjusted R-squared:  0.7146 
 ## F-statistic: 37.31 on 2 and 27 DF,  p-value: 1.697e-08</a:t>
-            </a:r>
-          </a:p>
-        </p:txBody>
-      </p:sp>
-      <p:sp>
-        <p:nvSpPr>
-          <p:cNvPr id="4" name="Content Placeholder 3"/>
-          <p:cNvSpPr>
-            <a:spLocks noGrp="1"/>
-          </p:cNvSpPr>
-          <p:nvPr>
-            <p:ph idx="2" sz="half"/>
-          </p:nvPr>
-        </p:nvSpPr>
-        <p:spPr/>
-        <p:txBody>
-          <a:bodyPr/>
-          <a:lstStyle/>
-          <a:p>
-            <a:pPr lvl="0" indent="0" marL="0">
-              <a:buNone/>
-            </a:pPr>
-            <a:r>
-              <a:rPr/>
-              <a:t>Let’s look at the summary of our Gaussian GLM:</a:t>
-            </a:r>
-          </a:p>
-          <a:p>
-            <a:pPr lvl="0" indent="0">
-              <a:buNone/>
-            </a:pPr>
-            <a:r>
-              <a:rPr>
-                <a:latin typeface="Courier"/>
-              </a:rPr>
-              <a:t>## 
+                </a:r>
+              </a:p>
+            </p:txBody>
+          </p:sp>
+        </mc:Choice>
+      </mc:AlternateContent>
+      <mc:AlternateContent xmlns:mc="http://schemas.openxmlformats.org/markup-compatibility/2006">
+        <mc:Choice xmlns:a14="http://schemas.microsoft.com/office/drawing/2010/main" Requires="a14">
+          <p:sp>
+            <p:nvSpPr>
+              <p:cNvPr id="4" name="Content Placeholder 3"/>
+              <p:cNvSpPr>
+                <a:spLocks noGrp="1"/>
+              </p:cNvSpPr>
+              <p:nvPr>
+                <p:ph idx="2" sz="half"/>
+              </p:nvPr>
+            </p:nvSpPr>
+            <p:spPr/>
+            <p:txBody>
+              <a:bodyPr/>
+              <a:lstStyle/>
+              <a:p>
+                <a:pPr lvl="0"/>
+                <a:r>
+                  <a:rPr/>
+                  <a:t>Let’s look at the summary of our Gaussian GLM:</a:t>
+                </a:r>
+              </a:p>
+              <a:p>
+                <a:pPr lvl="1"/>
+                <a:r>
+                  <a:rPr/>
+                  <a:t>Dispersion parameter</a:t>
+                </a:r>
+              </a:p>
+              <a:p>
+                <a:pPr lvl="2"/>
+                <a:r>
+                  <a:rPr b="1"/>
+                  <a:t>variance of the residuals</a:t>
+                </a:r>
+                <a:r>
+                  <a:rPr/>
+                  <a:t> (</a:t>
+                </a:r>
+                <a14:m>
+                  <m:oMath xmlns:m="http://schemas.openxmlformats.org/officeDocument/2006/math">
+                    <m:sSup>
+                      <m:e>
+                        <m:r>
+                          <m:t>σ</m:t>
+                        </m:r>
+                      </m:e>
+                      <m:sup>
+                        <m:r>
+                          <m:t>2</m:t>
+                        </m:r>
+                      </m:sup>
+                    </m:sSup>
+                  </m:oMath>
+                </a14:m>
+                <a:r>
+                  <a:rPr/>
+                  <a:t>)</a:t>
+                </a:r>
+              </a:p>
+              <a:p>
+                <a:pPr lvl="1"/>
+                <a:r>
+                  <a:rPr/>
+                  <a:t>Null deviance</a:t>
+                </a:r>
+              </a:p>
+              <a:p>
+                <a:pPr lvl="2"/>
+                <a:r>
+                  <a:rPr/>
+                  <a:t>This is the error (deviance) of the “Null” or “Intercept-Only” model</a:t>
+                </a:r>
+              </a:p>
+              <a:p>
+                <a:pPr lvl="2"/>
+                <a:r>
+                  <a:rPr/>
+                  <a:t>how much error you have when you try to predict the number of endemics using </a:t>
+                </a:r>
+                <a:r>
+                  <a:rPr i="1"/>
+                  <a:t>only</a:t>
+                </a:r>
+                <a:r>
+                  <a:rPr/>
+                  <a:t> the overall average, without any predictors. It’s your baseline, or the total amount of variation in the data to be explained</a:t>
+                </a:r>
+              </a:p>
+              <a:p>
+                <a:pPr lvl="1"/>
+                <a:r>
+                  <a:rPr/>
+                  <a:t>Residual deviance</a:t>
+                </a:r>
+              </a:p>
+              <a:p>
+                <a:pPr lvl="2"/>
+                <a:r>
+                  <a:rPr/>
+                  <a:t>conceptually the same as the “Model Sum of Squares” in an ANOVA</a:t>
+                </a:r>
+              </a:p>
+              <a:p>
+                <a:pPr lvl="2"/>
+                <a:r>
+                  <a:rPr/>
+                  <a:t>Null Deviance tells you your </a:t>
+                </a:r>
+                <a:r>
+                  <a:rPr>
+                    <a:latin typeface="Courier"/>
+                  </a:rPr>
+                  <a:t>size_category</a:t>
+                </a:r>
+                <a:r>
+                  <a:rPr/>
+                  <a:t> predictor is </a:t>
+                </a:r>
+                <a:r>
+                  <a:rPr i="1"/>
+                  <a:t>very</a:t>
+                </a:r>
+                <a:r>
+                  <a:rPr/>
+                  <a:t> useful for explaining the number of endemics.</a:t>
+                </a:r>
+              </a:p>
+              <a:p>
+                <a:pPr lvl="0" indent="0">
+                  <a:buNone/>
+                </a:pPr>
+                <a:r>
+                  <a:rPr>
+                    <a:latin typeface="Courier"/>
+                  </a:rPr>
+                  <a:t>## 
 ## Call:
 ## glm(formula = Endemics ~ size_category, family = gaussian(link = "identity"), 
 ##     data = gala)
@@ -12083,10 +14060,12 @@
 ## AIC: 250.84
 ## 
 ## Number of Fisher Scoring iterations: 2</a:t>
-            </a:r>
-          </a:p>
-        </p:txBody>
-      </p:sp>
+                </a:r>
+              </a:p>
+            </p:txBody>
+          </p:sp>
+        </mc:Choice>
+      </mc:AlternateContent>
     </p:spTree>
   </p:cSld>
 </p:sld>
@@ -12139,417 +14118,476 @@
           </a:p>
         </p:txBody>
       </p:sp>
-      <p:sp>
-        <p:nvSpPr>
-          <p:cNvPr id="3" name="Text Placeholder 2"/>
-          <p:cNvSpPr>
-            <a:spLocks noGrp="1"/>
-          </p:cNvSpPr>
-          <p:nvPr>
-            <p:ph idx="1" type="body"/>
-          </p:nvPr>
-        </p:nvSpPr>
-        <p:spPr/>
-        <p:txBody>
-          <a:bodyPr/>
-          <a:lstStyle/>
-          <a:p>
-            <a:pPr lvl="0" indent="0" marL="0">
-              <a:buNone/>
-            </a:pPr>
-            <a:r>
-              <a:rPr/>
-              <a:t>Now let’s perform an ANOVA on our LM and GLM model using the </a:t>
-            </a:r>
-            <a:r>
-              <a:rPr>
-                <a:latin typeface="Courier"/>
-              </a:rPr>
-              <a:t>car</a:t>
-            </a:r>
-            <a:r>
-              <a:rPr/>
-              <a:t> package:</a:t>
-            </a:r>
-          </a:p>
-          <a:p>
-            <a:pPr lvl="0" indent="0">
-              <a:buNone/>
-            </a:pPr>
-            <a:r>
-              <a:rPr>
-                <a:solidFill>
-                  <a:srgbClr val="4758AB"/>
-                </a:solidFill>
-                <a:latin typeface="Courier"/>
-              </a:rPr>
-              <a:t>Anova</a:t>
-            </a:r>
-            <a:r>
-              <a:rPr>
-                <a:solidFill>
-                  <a:srgbClr val="003B4F"/>
-                </a:solidFill>
-                <a:latin typeface="Courier"/>
-              </a:rPr>
-              <a:t>(model_lm, </a:t>
-            </a:r>
-            <a:r>
-              <a:rPr>
-                <a:solidFill>
-                  <a:srgbClr val="657422"/>
-                </a:solidFill>
-                <a:latin typeface="Courier"/>
-              </a:rPr>
-              <a:t>type =</a:t>
-            </a:r>
-            <a:r>
-              <a:rPr>
-                <a:solidFill>
-                  <a:srgbClr val="003B4F"/>
-                </a:solidFill>
-                <a:latin typeface="Courier"/>
-              </a:rPr>
-              <a:t> </a:t>
-            </a:r>
-            <a:r>
-              <a:rPr>
-                <a:solidFill>
-                  <a:srgbClr val="20794D"/>
-                </a:solidFill>
-                <a:latin typeface="Courier"/>
-              </a:rPr>
-              <a:t>"III"</a:t>
-            </a:r>
-            <a:r>
-              <a:rPr>
-                <a:solidFill>
-                  <a:srgbClr val="003B4F"/>
-                </a:solidFill>
-                <a:latin typeface="Courier"/>
-              </a:rPr>
-              <a:t>, </a:t>
-            </a:r>
-            <a:r>
-              <a:rPr>
-                <a:solidFill>
-                  <a:srgbClr val="657422"/>
-                </a:solidFill>
-                <a:latin typeface="Courier"/>
-              </a:rPr>
-              <a:t>test =</a:t>
-            </a:r>
-            <a:r>
-              <a:rPr>
-                <a:solidFill>
-                  <a:srgbClr val="003B4F"/>
-                </a:solidFill>
-                <a:latin typeface="Courier"/>
-              </a:rPr>
-              <a:t> </a:t>
-            </a:r>
-            <a:r>
-              <a:rPr>
-                <a:solidFill>
-                  <a:srgbClr val="20794D"/>
-                </a:solidFill>
-                <a:latin typeface="Courier"/>
-              </a:rPr>
-              <a:t>"F"</a:t>
-            </a:r>
-            <a:r>
-              <a:rPr>
-                <a:solidFill>
-                  <a:srgbClr val="003B4F"/>
-                </a:solidFill>
-                <a:latin typeface="Courier"/>
-              </a:rPr>
-              <a:t>)</a:t>
-            </a:r>
-            <a:br/>
-            <a:r>
-              <a:rPr i="1">
-                <a:solidFill>
-                  <a:srgbClr val="5E5E5E"/>
-                </a:solidFill>
-                <a:latin typeface="Courier"/>
-              </a:rPr>
-              <a:t>## Anova Table (Type III tests)</a:t>
-            </a:r>
-            <a:br/>
-            <a:r>
-              <a:rPr i="1">
-                <a:solidFill>
-                  <a:srgbClr val="5E5E5E"/>
-                </a:solidFill>
-                <a:latin typeface="Courier"/>
-              </a:rPr>
-              <a:t>## </a:t>
-            </a:r>
-            <a:br/>
-            <a:r>
-              <a:rPr i="1">
-                <a:solidFill>
-                  <a:srgbClr val="5E5E5E"/>
-                </a:solidFill>
-                <a:latin typeface="Courier"/>
-              </a:rPr>
-              <a:t>## Response: Endemics</a:t>
-            </a:r>
-            <a:br/>
-            <a:r>
-              <a:rPr i="1">
-                <a:solidFill>
-                  <a:srgbClr val="5E5E5E"/>
-                </a:solidFill>
-                <a:latin typeface="Courier"/>
-              </a:rPr>
-              <a:t>##                Sum Sq Df F value    Pr(&gt;F)    </a:t>
-            </a:r>
-            <a:br/>
-            <a:r>
-              <a:rPr i="1">
-                <a:solidFill>
-                  <a:srgbClr val="5E5E5E"/>
-                </a:solidFill>
-                <a:latin typeface="Courier"/>
-              </a:rPr>
-              <a:t>## (Intercept)     349.5  1  1.6392    0.2113    </a:t>
-            </a:r>
-            <a:br/>
-            <a:r>
-              <a:rPr i="1">
-                <a:solidFill>
-                  <a:srgbClr val="5E5E5E"/>
-                </a:solidFill>
-                <a:latin typeface="Courier"/>
-              </a:rPr>
-              <a:t>## size_category 15906.6  2 37.3066 1.697e-08 ***</a:t>
-            </a:r>
-            <a:br/>
-            <a:r>
-              <a:rPr i="1">
-                <a:solidFill>
-                  <a:srgbClr val="5E5E5E"/>
-                </a:solidFill>
-                <a:latin typeface="Courier"/>
-              </a:rPr>
-              <a:t>## Residuals      5756.1 27                      </a:t>
-            </a:r>
-            <a:br/>
-            <a:r>
-              <a:rPr i="1">
-                <a:solidFill>
-                  <a:srgbClr val="5E5E5E"/>
-                </a:solidFill>
-                <a:latin typeface="Courier"/>
-              </a:rPr>
-              <a:t>## ---</a:t>
-            </a:r>
-            <a:br/>
-            <a:r>
-              <a:rPr i="1">
-                <a:solidFill>
-                  <a:srgbClr val="5E5E5E"/>
-                </a:solidFill>
-                <a:latin typeface="Courier"/>
-              </a:rPr>
-              <a:t>## Signif. codes:  0 '***' 0.001 '**' 0.01 '*' 0.05 '.' 0.1 ' ' 1</a:t>
-            </a:r>
-            <a:br/>
-            <a:r>
-              <a:rPr>
-                <a:solidFill>
-                  <a:srgbClr val="4758AB"/>
-                </a:solidFill>
-                <a:latin typeface="Courier"/>
-              </a:rPr>
-              <a:t>Anova</a:t>
-            </a:r>
-            <a:r>
-              <a:rPr>
-                <a:solidFill>
-                  <a:srgbClr val="003B4F"/>
-                </a:solidFill>
-                <a:latin typeface="Courier"/>
-              </a:rPr>
-              <a:t>(model_gaussian, </a:t>
-            </a:r>
-            <a:r>
-              <a:rPr>
-                <a:solidFill>
-                  <a:srgbClr val="657422"/>
-                </a:solidFill>
-                <a:latin typeface="Courier"/>
-              </a:rPr>
-              <a:t>type =</a:t>
-            </a:r>
-            <a:r>
-              <a:rPr>
-                <a:solidFill>
-                  <a:srgbClr val="003B4F"/>
-                </a:solidFill>
-                <a:latin typeface="Courier"/>
-              </a:rPr>
-              <a:t> </a:t>
-            </a:r>
-            <a:r>
-              <a:rPr>
-                <a:solidFill>
-                  <a:srgbClr val="20794D"/>
-                </a:solidFill>
-                <a:latin typeface="Courier"/>
-              </a:rPr>
-              <a:t>"III"</a:t>
-            </a:r>
-            <a:r>
-              <a:rPr>
-                <a:solidFill>
-                  <a:srgbClr val="003B4F"/>
-                </a:solidFill>
-                <a:latin typeface="Courier"/>
-              </a:rPr>
-              <a:t>, </a:t>
-            </a:r>
-            <a:r>
-              <a:rPr>
-                <a:solidFill>
-                  <a:srgbClr val="657422"/>
-                </a:solidFill>
-                <a:latin typeface="Courier"/>
-              </a:rPr>
-              <a:t>test =</a:t>
-            </a:r>
-            <a:r>
-              <a:rPr>
-                <a:solidFill>
-                  <a:srgbClr val="003B4F"/>
-                </a:solidFill>
-                <a:latin typeface="Courier"/>
-              </a:rPr>
-              <a:t> </a:t>
-            </a:r>
-            <a:r>
-              <a:rPr>
-                <a:solidFill>
-                  <a:srgbClr val="20794D"/>
-                </a:solidFill>
-                <a:latin typeface="Courier"/>
-              </a:rPr>
-              <a:t>"F"</a:t>
-            </a:r>
-            <a:r>
-              <a:rPr>
-                <a:solidFill>
-                  <a:srgbClr val="003B4F"/>
-                </a:solidFill>
-                <a:latin typeface="Courier"/>
-              </a:rPr>
-              <a:t>)</a:t>
-            </a:r>
-            <a:br/>
-            <a:r>
-              <a:rPr i="1">
-                <a:solidFill>
-                  <a:srgbClr val="5E5E5E"/>
-                </a:solidFill>
-                <a:latin typeface="Courier"/>
-              </a:rPr>
-              <a:t>## Analysis of Deviance Table (Type III tests)</a:t>
-            </a:r>
-            <a:br/>
-            <a:r>
-              <a:rPr i="1">
-                <a:solidFill>
-                  <a:srgbClr val="5E5E5E"/>
-                </a:solidFill>
-                <a:latin typeface="Courier"/>
-              </a:rPr>
-              <a:t>## </a:t>
-            </a:r>
-            <a:br/>
-            <a:r>
-              <a:rPr i="1">
-                <a:solidFill>
-                  <a:srgbClr val="5E5E5E"/>
-                </a:solidFill>
-                <a:latin typeface="Courier"/>
-              </a:rPr>
-              <a:t>## Response: Endemics</a:t>
-            </a:r>
-            <a:br/>
-            <a:r>
-              <a:rPr i="1">
-                <a:solidFill>
-                  <a:srgbClr val="5E5E5E"/>
-                </a:solidFill>
-                <a:latin typeface="Courier"/>
-              </a:rPr>
-              <a:t>## Error estimate based on Pearson residuals </a:t>
-            </a:r>
-            <a:br/>
-            <a:r>
-              <a:rPr i="1">
-                <a:solidFill>
-                  <a:srgbClr val="5E5E5E"/>
-                </a:solidFill>
-                <a:latin typeface="Courier"/>
-              </a:rPr>
-              <a:t>## </a:t>
-            </a:r>
-            <a:br/>
-            <a:r>
-              <a:rPr i="1">
-                <a:solidFill>
-                  <a:srgbClr val="5E5E5E"/>
-                </a:solidFill>
-                <a:latin typeface="Courier"/>
-              </a:rPr>
-              <a:t>##                Sum Sq Df F values    Pr(&gt;F)    </a:t>
-            </a:r>
-            <a:br/>
-            <a:r>
-              <a:rPr i="1">
-                <a:solidFill>
-                  <a:srgbClr val="5E5E5E"/>
-                </a:solidFill>
-                <a:latin typeface="Courier"/>
-              </a:rPr>
-              <a:t>## size_category 15906.6  2   37.307 1.697e-08 ***</a:t>
-            </a:r>
-            <a:br/>
-            <a:r>
-              <a:rPr i="1">
-                <a:solidFill>
-                  <a:srgbClr val="5E5E5E"/>
-                </a:solidFill>
-                <a:latin typeface="Courier"/>
-              </a:rPr>
-              <a:t>## Residuals      5756.1 27                       </a:t>
-            </a:r>
-            <a:br/>
-            <a:r>
-              <a:rPr i="1">
-                <a:solidFill>
-                  <a:srgbClr val="5E5E5E"/>
-                </a:solidFill>
-                <a:latin typeface="Courier"/>
-              </a:rPr>
-              <a:t>## ---</a:t>
-            </a:r>
-            <a:br/>
-            <a:r>
-              <a:rPr i="1">
-                <a:solidFill>
-                  <a:srgbClr val="5E5E5E"/>
-                </a:solidFill>
-                <a:latin typeface="Courier"/>
-              </a:rPr>
-              <a:t>## Signif. codes:  0 '***' 0.001 '**' 0.01 '*' 0.05 '.' 0.1 ' ' 1</a:t>
-            </a:r>
-          </a:p>
-        </p:txBody>
-      </p:sp>
+      <mc:AlternateContent xmlns:mc="http://schemas.openxmlformats.org/markup-compatibility/2006">
+        <mc:Choice xmlns:a14="http://schemas.microsoft.com/office/drawing/2010/main" Requires="a14">
+          <p:sp>
+            <p:nvSpPr>
+              <p:cNvPr id="3" name="Text Placeholder 2"/>
+              <p:cNvSpPr>
+                <a:spLocks noGrp="1"/>
+              </p:cNvSpPr>
+              <p:nvPr>
+                <p:ph idx="1" type="body"/>
+              </p:nvPr>
+            </p:nvSpPr>
+            <p:spPr/>
+            <p:txBody>
+              <a:bodyPr/>
+              <a:lstStyle/>
+              <a:p>
+                <a:pPr lvl="0"/>
+                <a:r>
+                  <a:rPr/>
+                  <a:t>Now let’s perform an ANOVA on our LM and GLM model using the </a:t>
+                </a:r>
+                <a:r>
+                  <a:rPr>
+                    <a:latin typeface="Courier"/>
+                  </a:rPr>
+                  <a:t>car</a:t>
+                </a:r>
+                <a:r>
+                  <a:rPr/>
+                  <a:t> package:</a:t>
+                </a:r>
+              </a:p>
+              <a:p>
+                <a:pPr lvl="1"/>
+                <a:r>
+                  <a:rPr b="1"/>
+                  <a:t>Residual Standard Error</a:t>
+                </a:r>
+                <a:r>
+                  <a:rPr/>
+                  <a:t>. This is the standard deviation of the residuals (</a:t>
+                </a:r>
+                <a14:m>
+                  <m:oMath xmlns:m="http://schemas.openxmlformats.org/officeDocument/2006/math">
+                    <m:r>
+                      <m:t>σ</m:t>
+                    </m:r>
+                  </m:oMath>
+                </a14:m>
+                <a:r>
+                  <a:rPr/>
+                  <a:t>)</a:t>
+                </a:r>
+              </a:p>
+              <a:p>
+                <a:pPr lvl="1"/>
+                <a:r>
+                  <a:rPr b="1"/>
+                  <a:t>Residual Deviance divided by its degrees of freedom</a:t>
+                </a:r>
+                <a:r>
+                  <a:rPr/>
+                  <a:t>: 5756.1 / 27 = 213.1878</a:t>
+                </a:r>
+              </a:p>
+              <a:p>
+                <a:pPr lvl="1"/>
+                <a:r>
+                  <a:rPr/>
+                  <a:t>In this context, “Sum Sq” (Sum of Squares) and “Deviance” are the same thing.</a:t>
+                </a:r>
+              </a:p>
+              <a:p>
+                <a:pPr lvl="1"/>
+                <a:r>
+                  <a:rPr b="1"/>
+                  <a:t>“Pearson residuals” are essentially the same as the regular residuals</a:t>
+                </a:r>
+                <a:r>
+                  <a:rPr/>
+                  <a:t> (observed - predicted) that you get from a standard </a:t>
+                </a:r>
+                <a:r>
+                  <a:rPr>
+                    <a:latin typeface="Courier"/>
+                  </a:rPr>
+                  <a:t>lm()</a:t>
+                </a:r>
+              </a:p>
+              <a:p>
+                <a:pPr lvl="0" indent="0">
+                  <a:buNone/>
+                </a:pPr>
+                <a:r>
+                  <a:rPr>
+                    <a:solidFill>
+                      <a:srgbClr val="4758AB"/>
+                    </a:solidFill>
+                    <a:latin typeface="Courier"/>
+                  </a:rPr>
+                  <a:t>Anova</a:t>
+                </a:r>
+                <a:r>
+                  <a:rPr>
+                    <a:solidFill>
+                      <a:srgbClr val="003B4F"/>
+                    </a:solidFill>
+                    <a:latin typeface="Courier"/>
+                  </a:rPr>
+                  <a:t>(model_lm, </a:t>
+                </a:r>
+                <a:r>
+                  <a:rPr>
+                    <a:solidFill>
+                      <a:srgbClr val="657422"/>
+                    </a:solidFill>
+                    <a:latin typeface="Courier"/>
+                  </a:rPr>
+                  <a:t>type =</a:t>
+                </a:r>
+                <a:r>
+                  <a:rPr>
+                    <a:solidFill>
+                      <a:srgbClr val="003B4F"/>
+                    </a:solidFill>
+                    <a:latin typeface="Courier"/>
+                  </a:rPr>
+                  <a:t> </a:t>
+                </a:r>
+                <a:r>
+                  <a:rPr>
+                    <a:solidFill>
+                      <a:srgbClr val="20794D"/>
+                    </a:solidFill>
+                    <a:latin typeface="Courier"/>
+                  </a:rPr>
+                  <a:t>"III"</a:t>
+                </a:r>
+                <a:r>
+                  <a:rPr>
+                    <a:solidFill>
+                      <a:srgbClr val="003B4F"/>
+                    </a:solidFill>
+                    <a:latin typeface="Courier"/>
+                  </a:rPr>
+                  <a:t>, </a:t>
+                </a:r>
+                <a:r>
+                  <a:rPr>
+                    <a:solidFill>
+                      <a:srgbClr val="657422"/>
+                    </a:solidFill>
+                    <a:latin typeface="Courier"/>
+                  </a:rPr>
+                  <a:t>test =</a:t>
+                </a:r>
+                <a:r>
+                  <a:rPr>
+                    <a:solidFill>
+                      <a:srgbClr val="003B4F"/>
+                    </a:solidFill>
+                    <a:latin typeface="Courier"/>
+                  </a:rPr>
+                  <a:t> </a:t>
+                </a:r>
+                <a:r>
+                  <a:rPr>
+                    <a:solidFill>
+                      <a:srgbClr val="20794D"/>
+                    </a:solidFill>
+                    <a:latin typeface="Courier"/>
+                  </a:rPr>
+                  <a:t>"F"</a:t>
+                </a:r>
+                <a:r>
+                  <a:rPr>
+                    <a:solidFill>
+                      <a:srgbClr val="003B4F"/>
+                    </a:solidFill>
+                    <a:latin typeface="Courier"/>
+                  </a:rPr>
+                  <a:t>)</a:t>
+                </a:r>
+                <a:br/>
+                <a:r>
+                  <a:rPr i="1">
+                    <a:solidFill>
+                      <a:srgbClr val="5E5E5E"/>
+                    </a:solidFill>
+                    <a:latin typeface="Courier"/>
+                  </a:rPr>
+                  <a:t>## Anova Table (Type III tests)</a:t>
+                </a:r>
+                <a:br/>
+                <a:r>
+                  <a:rPr i="1">
+                    <a:solidFill>
+                      <a:srgbClr val="5E5E5E"/>
+                    </a:solidFill>
+                    <a:latin typeface="Courier"/>
+                  </a:rPr>
+                  <a:t>## </a:t>
+                </a:r>
+                <a:br/>
+                <a:r>
+                  <a:rPr i="1">
+                    <a:solidFill>
+                      <a:srgbClr val="5E5E5E"/>
+                    </a:solidFill>
+                    <a:latin typeface="Courier"/>
+                  </a:rPr>
+                  <a:t>## Response: Endemics</a:t>
+                </a:r>
+                <a:br/>
+                <a:r>
+                  <a:rPr i="1">
+                    <a:solidFill>
+                      <a:srgbClr val="5E5E5E"/>
+                    </a:solidFill>
+                    <a:latin typeface="Courier"/>
+                  </a:rPr>
+                  <a:t>##                Sum Sq Df F value    Pr(&gt;F)    </a:t>
+                </a:r>
+                <a:br/>
+                <a:r>
+                  <a:rPr i="1">
+                    <a:solidFill>
+                      <a:srgbClr val="5E5E5E"/>
+                    </a:solidFill>
+                    <a:latin typeface="Courier"/>
+                  </a:rPr>
+                  <a:t>## (Intercept)     349.5  1  1.6392    0.2113    </a:t>
+                </a:r>
+                <a:br/>
+                <a:r>
+                  <a:rPr i="1">
+                    <a:solidFill>
+                      <a:srgbClr val="5E5E5E"/>
+                    </a:solidFill>
+                    <a:latin typeface="Courier"/>
+                  </a:rPr>
+                  <a:t>## size_category 15906.6  2 37.3066 1.697e-08 ***</a:t>
+                </a:r>
+                <a:br/>
+                <a:r>
+                  <a:rPr i="1">
+                    <a:solidFill>
+                      <a:srgbClr val="5E5E5E"/>
+                    </a:solidFill>
+                    <a:latin typeface="Courier"/>
+                  </a:rPr>
+                  <a:t>## Residuals      5756.1 27                      </a:t>
+                </a:r>
+                <a:br/>
+                <a:r>
+                  <a:rPr i="1">
+                    <a:solidFill>
+                      <a:srgbClr val="5E5E5E"/>
+                    </a:solidFill>
+                    <a:latin typeface="Courier"/>
+                  </a:rPr>
+                  <a:t>## ---</a:t>
+                </a:r>
+                <a:br/>
+                <a:r>
+                  <a:rPr i="1">
+                    <a:solidFill>
+                      <a:srgbClr val="5E5E5E"/>
+                    </a:solidFill>
+                    <a:latin typeface="Courier"/>
+                  </a:rPr>
+                  <a:t>## Signif. codes:  0 '***' 0.001 '**' 0.01 '*' 0.05 '.' 0.1 ' ' 1</a:t>
+                </a:r>
+                <a:br/>
+                <a:r>
+                  <a:rPr>
+                    <a:solidFill>
+                      <a:srgbClr val="4758AB"/>
+                    </a:solidFill>
+                    <a:latin typeface="Courier"/>
+                  </a:rPr>
+                  <a:t>Anova</a:t>
+                </a:r>
+                <a:r>
+                  <a:rPr>
+                    <a:solidFill>
+                      <a:srgbClr val="003B4F"/>
+                    </a:solidFill>
+                    <a:latin typeface="Courier"/>
+                  </a:rPr>
+                  <a:t>(model_gaussian, </a:t>
+                </a:r>
+                <a:r>
+                  <a:rPr>
+                    <a:solidFill>
+                      <a:srgbClr val="657422"/>
+                    </a:solidFill>
+                    <a:latin typeface="Courier"/>
+                  </a:rPr>
+                  <a:t>type =</a:t>
+                </a:r>
+                <a:r>
+                  <a:rPr>
+                    <a:solidFill>
+                      <a:srgbClr val="003B4F"/>
+                    </a:solidFill>
+                    <a:latin typeface="Courier"/>
+                  </a:rPr>
+                  <a:t> </a:t>
+                </a:r>
+                <a:r>
+                  <a:rPr>
+                    <a:solidFill>
+                      <a:srgbClr val="20794D"/>
+                    </a:solidFill>
+                    <a:latin typeface="Courier"/>
+                  </a:rPr>
+                  <a:t>"III"</a:t>
+                </a:r>
+                <a:r>
+                  <a:rPr>
+                    <a:solidFill>
+                      <a:srgbClr val="003B4F"/>
+                    </a:solidFill>
+                    <a:latin typeface="Courier"/>
+                  </a:rPr>
+                  <a:t>, </a:t>
+                </a:r>
+                <a:r>
+                  <a:rPr>
+                    <a:solidFill>
+                      <a:srgbClr val="657422"/>
+                    </a:solidFill>
+                    <a:latin typeface="Courier"/>
+                  </a:rPr>
+                  <a:t>test =</a:t>
+                </a:r>
+                <a:r>
+                  <a:rPr>
+                    <a:solidFill>
+                      <a:srgbClr val="003B4F"/>
+                    </a:solidFill>
+                    <a:latin typeface="Courier"/>
+                  </a:rPr>
+                  <a:t> </a:t>
+                </a:r>
+                <a:r>
+                  <a:rPr>
+                    <a:solidFill>
+                      <a:srgbClr val="20794D"/>
+                    </a:solidFill>
+                    <a:latin typeface="Courier"/>
+                  </a:rPr>
+                  <a:t>"F"</a:t>
+                </a:r>
+                <a:r>
+                  <a:rPr>
+                    <a:solidFill>
+                      <a:srgbClr val="003B4F"/>
+                    </a:solidFill>
+                    <a:latin typeface="Courier"/>
+                  </a:rPr>
+                  <a:t>)</a:t>
+                </a:r>
+                <a:br/>
+                <a:r>
+                  <a:rPr i="1">
+                    <a:solidFill>
+                      <a:srgbClr val="5E5E5E"/>
+                    </a:solidFill>
+                    <a:latin typeface="Courier"/>
+                  </a:rPr>
+                  <a:t>## Analysis of Deviance Table (Type III tests)</a:t>
+                </a:r>
+                <a:br/>
+                <a:r>
+                  <a:rPr i="1">
+                    <a:solidFill>
+                      <a:srgbClr val="5E5E5E"/>
+                    </a:solidFill>
+                    <a:latin typeface="Courier"/>
+                  </a:rPr>
+                  <a:t>## </a:t>
+                </a:r>
+                <a:br/>
+                <a:r>
+                  <a:rPr i="1">
+                    <a:solidFill>
+                      <a:srgbClr val="5E5E5E"/>
+                    </a:solidFill>
+                    <a:latin typeface="Courier"/>
+                  </a:rPr>
+                  <a:t>## Response: Endemics</a:t>
+                </a:r>
+                <a:br/>
+                <a:r>
+                  <a:rPr i="1">
+                    <a:solidFill>
+                      <a:srgbClr val="5E5E5E"/>
+                    </a:solidFill>
+                    <a:latin typeface="Courier"/>
+                  </a:rPr>
+                  <a:t>## Error estimate based on Pearson residuals </a:t>
+                </a:r>
+                <a:br/>
+                <a:r>
+                  <a:rPr i="1">
+                    <a:solidFill>
+                      <a:srgbClr val="5E5E5E"/>
+                    </a:solidFill>
+                    <a:latin typeface="Courier"/>
+                  </a:rPr>
+                  <a:t>## </a:t>
+                </a:r>
+                <a:br/>
+                <a:r>
+                  <a:rPr i="1">
+                    <a:solidFill>
+                      <a:srgbClr val="5E5E5E"/>
+                    </a:solidFill>
+                    <a:latin typeface="Courier"/>
+                  </a:rPr>
+                  <a:t>##                Sum Sq Df F values    Pr(&gt;F)    </a:t>
+                </a:r>
+                <a:br/>
+                <a:r>
+                  <a:rPr i="1">
+                    <a:solidFill>
+                      <a:srgbClr val="5E5E5E"/>
+                    </a:solidFill>
+                    <a:latin typeface="Courier"/>
+                  </a:rPr>
+                  <a:t>## size_category 15906.6  2   37.307 1.697e-08 ***</a:t>
+                </a:r>
+                <a:br/>
+                <a:r>
+                  <a:rPr i="1">
+                    <a:solidFill>
+                      <a:srgbClr val="5E5E5E"/>
+                    </a:solidFill>
+                    <a:latin typeface="Courier"/>
+                  </a:rPr>
+                  <a:t>## Residuals      5756.1 27                       </a:t>
+                </a:r>
+                <a:br/>
+                <a:r>
+                  <a:rPr i="1">
+                    <a:solidFill>
+                      <a:srgbClr val="5E5E5E"/>
+                    </a:solidFill>
+                    <a:latin typeface="Courier"/>
+                  </a:rPr>
+                  <a:t>## ---</a:t>
+                </a:r>
+                <a:br/>
+                <a:r>
+                  <a:rPr i="1">
+                    <a:solidFill>
+                      <a:srgbClr val="5E5E5E"/>
+                    </a:solidFill>
+                    <a:latin typeface="Courier"/>
+                  </a:rPr>
+                  <a:t>## Signif. codes:  0 '***' 0.001 '**' 0.01 '*' 0.05 '.' 0.1 ' ' 1</a:t>
+                </a:r>
+              </a:p>
+            </p:txBody>
+          </p:sp>
+        </mc:Choice>
+      </mc:AlternateContent>
       <p:sp>
         <p:nvSpPr>
           <p:cNvPr id="5" name="Text Placeholder 4"/>

--- a/docs/ecostats_lectures/lecture_14/14_01_lecture_powerpoint.pptx
+++ b/docs/ecostats_lectures/lecture_14/14_01_lecture_powerpoint.pptx
@@ -3402,8 +3402,8 @@
         </p:nvSpPr>
         <p:spPr>
           <a:xfrm>
-            <a:off x="0" y="0"/>
-            <a:ext cx="9144000" cy="582780"/>
+            <a:off x="139485" y="78119"/>
+            <a:ext cx="8229600" cy="607682"/>
           </a:xfrm>
         </p:spPr>
         <p:txBody>
@@ -3415,19 +3415,489 @@
             </a:pPr>
             <a:r>
               <a:rPr/>
-              <a:t>Equivalence of Linear Models and Gaussian GLMs</a:t>
+              <a:t>GLM with Gaussian Distribution: Analysis</a:t>
             </a:r>
           </a:p>
         </p:txBody>
       </p:sp>
+      <mc:AlternateContent xmlns:mc="http://schemas.openxmlformats.org/markup-compatibility/2006">
+        <mc:Choice xmlns:a14="http://schemas.microsoft.com/office/drawing/2010/main" Requires="a14">
+          <p:sp>
+            <p:nvSpPr>
+              <p:cNvPr id="3" name="Text Placeholder 2"/>
+              <p:cNvSpPr>
+                <a:spLocks noGrp="1"/>
+              </p:cNvSpPr>
+              <p:nvPr>
+                <p:ph idx="1" type="body"/>
+              </p:nvPr>
+            </p:nvSpPr>
+            <p:spPr/>
+            <p:txBody>
+              <a:bodyPr/>
+              <a:lstStyle/>
+              <a:p>
+                <a:pPr lvl="0"/>
+                <a:r>
+                  <a:rPr/>
+                  <a:t>Now let’s perform an ANOVA on our LM and GLM model using the </a:t>
+                </a:r>
+                <a:r>
+                  <a:rPr>
+                    <a:latin typeface="Courier"/>
+                  </a:rPr>
+                  <a:t>car</a:t>
+                </a:r>
+                <a:r>
+                  <a:rPr/>
+                  <a:t> package:</a:t>
+                </a:r>
+              </a:p>
+              <a:p>
+                <a:pPr lvl="1"/>
+                <a:r>
+                  <a:rPr b="1"/>
+                  <a:t>Residual Standard Error</a:t>
+                </a:r>
+                <a:r>
+                  <a:rPr/>
+                  <a:t>. This is the standard deviation of the residuals (</a:t>
+                </a:r>
+                <a14:m>
+                  <m:oMath xmlns:m="http://schemas.openxmlformats.org/officeDocument/2006/math">
+                    <m:r>
+                      <m:t>σ</m:t>
+                    </m:r>
+                  </m:oMath>
+                </a14:m>
+                <a:r>
+                  <a:rPr/>
+                  <a:t>)</a:t>
+                </a:r>
+              </a:p>
+              <a:p>
+                <a:pPr lvl="1"/>
+                <a:r>
+                  <a:rPr b="1"/>
+                  <a:t>Residual Deviance divided by its degrees of freedom</a:t>
+                </a:r>
+                <a:r>
+                  <a:rPr/>
+                  <a:t>: 5756.1 / 27 = 213.1878</a:t>
+                </a:r>
+              </a:p>
+              <a:p>
+                <a:pPr lvl="1"/>
+                <a:r>
+                  <a:rPr/>
+                  <a:t>In this context, “Sum Sq” (Sum of Squares) and “Deviance” are the same thing.</a:t>
+                </a:r>
+              </a:p>
+              <a:p>
+                <a:pPr lvl="1"/>
+                <a:r>
+                  <a:rPr b="1"/>
+                  <a:t>“Pearson residuals” are essentially the same as the regular residuals</a:t>
+                </a:r>
+                <a:r>
+                  <a:rPr/>
+                  <a:t> (observed - predicted) that you get from a standard </a:t>
+                </a:r>
+                <a:r>
+                  <a:rPr>
+                    <a:latin typeface="Courier"/>
+                  </a:rPr>
+                  <a:t>lm()</a:t>
+                </a:r>
+              </a:p>
+              <a:p>
+                <a:pPr lvl="0" indent="0">
+                  <a:buNone/>
+                </a:pPr>
+                <a:r>
+                  <a:rPr>
+                    <a:solidFill>
+                      <a:srgbClr val="4758AB"/>
+                    </a:solidFill>
+                    <a:latin typeface="Courier"/>
+                  </a:rPr>
+                  <a:t>Anova</a:t>
+                </a:r>
+                <a:r>
+                  <a:rPr>
+                    <a:solidFill>
+                      <a:srgbClr val="003B4F"/>
+                    </a:solidFill>
+                    <a:latin typeface="Courier"/>
+                  </a:rPr>
+                  <a:t>(model_lm, </a:t>
+                </a:r>
+                <a:r>
+                  <a:rPr>
+                    <a:solidFill>
+                      <a:srgbClr val="657422"/>
+                    </a:solidFill>
+                    <a:latin typeface="Courier"/>
+                  </a:rPr>
+                  <a:t>type =</a:t>
+                </a:r>
+                <a:r>
+                  <a:rPr>
+                    <a:solidFill>
+                      <a:srgbClr val="003B4F"/>
+                    </a:solidFill>
+                    <a:latin typeface="Courier"/>
+                  </a:rPr>
+                  <a:t> </a:t>
+                </a:r>
+                <a:r>
+                  <a:rPr>
+                    <a:solidFill>
+                      <a:srgbClr val="20794D"/>
+                    </a:solidFill>
+                    <a:latin typeface="Courier"/>
+                  </a:rPr>
+                  <a:t>"III"</a:t>
+                </a:r>
+                <a:r>
+                  <a:rPr>
+                    <a:solidFill>
+                      <a:srgbClr val="003B4F"/>
+                    </a:solidFill>
+                    <a:latin typeface="Courier"/>
+                  </a:rPr>
+                  <a:t>, </a:t>
+                </a:r>
+                <a:r>
+                  <a:rPr>
+                    <a:solidFill>
+                      <a:srgbClr val="657422"/>
+                    </a:solidFill>
+                    <a:latin typeface="Courier"/>
+                  </a:rPr>
+                  <a:t>test =</a:t>
+                </a:r>
+                <a:r>
+                  <a:rPr>
+                    <a:solidFill>
+                      <a:srgbClr val="003B4F"/>
+                    </a:solidFill>
+                    <a:latin typeface="Courier"/>
+                  </a:rPr>
+                  <a:t> </a:t>
+                </a:r>
+                <a:r>
+                  <a:rPr>
+                    <a:solidFill>
+                      <a:srgbClr val="20794D"/>
+                    </a:solidFill>
+                    <a:latin typeface="Courier"/>
+                  </a:rPr>
+                  <a:t>"F"</a:t>
+                </a:r>
+                <a:r>
+                  <a:rPr>
+                    <a:solidFill>
+                      <a:srgbClr val="003B4F"/>
+                    </a:solidFill>
+                    <a:latin typeface="Courier"/>
+                  </a:rPr>
+                  <a:t>)</a:t>
+                </a:r>
+                <a:br/>
+                <a:r>
+                  <a:rPr i="1">
+                    <a:solidFill>
+                      <a:srgbClr val="5E5E5E"/>
+                    </a:solidFill>
+                    <a:latin typeface="Courier"/>
+                  </a:rPr>
+                  <a:t>## Anova Table (Type III tests)</a:t>
+                </a:r>
+                <a:br/>
+                <a:r>
+                  <a:rPr i="1">
+                    <a:solidFill>
+                      <a:srgbClr val="5E5E5E"/>
+                    </a:solidFill>
+                    <a:latin typeface="Courier"/>
+                  </a:rPr>
+                  <a:t>## </a:t>
+                </a:r>
+                <a:br/>
+                <a:r>
+                  <a:rPr i="1">
+                    <a:solidFill>
+                      <a:srgbClr val="5E5E5E"/>
+                    </a:solidFill>
+                    <a:latin typeface="Courier"/>
+                  </a:rPr>
+                  <a:t>## Response: Endemics</a:t>
+                </a:r>
+                <a:br/>
+                <a:r>
+                  <a:rPr i="1">
+                    <a:solidFill>
+                      <a:srgbClr val="5E5E5E"/>
+                    </a:solidFill>
+                    <a:latin typeface="Courier"/>
+                  </a:rPr>
+                  <a:t>##                Sum Sq Df F value    Pr(&gt;F)    </a:t>
+                </a:r>
+                <a:br/>
+                <a:r>
+                  <a:rPr i="1">
+                    <a:solidFill>
+                      <a:srgbClr val="5E5E5E"/>
+                    </a:solidFill>
+                    <a:latin typeface="Courier"/>
+                  </a:rPr>
+                  <a:t>## (Intercept)     349.5  1  1.6392    0.2113    </a:t>
+                </a:r>
+                <a:br/>
+                <a:r>
+                  <a:rPr i="1">
+                    <a:solidFill>
+                      <a:srgbClr val="5E5E5E"/>
+                    </a:solidFill>
+                    <a:latin typeface="Courier"/>
+                  </a:rPr>
+                  <a:t>## size_category 15906.6  2 37.3066 1.697e-08 ***</a:t>
+                </a:r>
+                <a:br/>
+                <a:r>
+                  <a:rPr i="1">
+                    <a:solidFill>
+                      <a:srgbClr val="5E5E5E"/>
+                    </a:solidFill>
+                    <a:latin typeface="Courier"/>
+                  </a:rPr>
+                  <a:t>## Residuals      5756.1 27                      </a:t>
+                </a:r>
+                <a:br/>
+                <a:r>
+                  <a:rPr i="1">
+                    <a:solidFill>
+                      <a:srgbClr val="5E5E5E"/>
+                    </a:solidFill>
+                    <a:latin typeface="Courier"/>
+                  </a:rPr>
+                  <a:t>## ---</a:t>
+                </a:r>
+                <a:br/>
+                <a:r>
+                  <a:rPr i="1">
+                    <a:solidFill>
+                      <a:srgbClr val="5E5E5E"/>
+                    </a:solidFill>
+                    <a:latin typeface="Courier"/>
+                  </a:rPr>
+                  <a:t>## Signif. codes:  0 '***' 0.001 '**' 0.01 '*' 0.05 '.' 0.1 ' ' 1</a:t>
+                </a:r>
+                <a:br/>
+                <a:r>
+                  <a:rPr>
+                    <a:solidFill>
+                      <a:srgbClr val="4758AB"/>
+                    </a:solidFill>
+                    <a:latin typeface="Courier"/>
+                  </a:rPr>
+                  <a:t>Anova</a:t>
+                </a:r>
+                <a:r>
+                  <a:rPr>
+                    <a:solidFill>
+                      <a:srgbClr val="003B4F"/>
+                    </a:solidFill>
+                    <a:latin typeface="Courier"/>
+                  </a:rPr>
+                  <a:t>(model_gaussian, </a:t>
+                </a:r>
+                <a:r>
+                  <a:rPr>
+                    <a:solidFill>
+                      <a:srgbClr val="657422"/>
+                    </a:solidFill>
+                    <a:latin typeface="Courier"/>
+                  </a:rPr>
+                  <a:t>type =</a:t>
+                </a:r>
+                <a:r>
+                  <a:rPr>
+                    <a:solidFill>
+                      <a:srgbClr val="003B4F"/>
+                    </a:solidFill>
+                    <a:latin typeface="Courier"/>
+                  </a:rPr>
+                  <a:t> </a:t>
+                </a:r>
+                <a:r>
+                  <a:rPr>
+                    <a:solidFill>
+                      <a:srgbClr val="20794D"/>
+                    </a:solidFill>
+                    <a:latin typeface="Courier"/>
+                  </a:rPr>
+                  <a:t>"III"</a:t>
+                </a:r>
+                <a:r>
+                  <a:rPr>
+                    <a:solidFill>
+                      <a:srgbClr val="003B4F"/>
+                    </a:solidFill>
+                    <a:latin typeface="Courier"/>
+                  </a:rPr>
+                  <a:t>, </a:t>
+                </a:r>
+                <a:r>
+                  <a:rPr>
+                    <a:solidFill>
+                      <a:srgbClr val="657422"/>
+                    </a:solidFill>
+                    <a:latin typeface="Courier"/>
+                  </a:rPr>
+                  <a:t>test =</a:t>
+                </a:r>
+                <a:r>
+                  <a:rPr>
+                    <a:solidFill>
+                      <a:srgbClr val="003B4F"/>
+                    </a:solidFill>
+                    <a:latin typeface="Courier"/>
+                  </a:rPr>
+                  <a:t> </a:t>
+                </a:r>
+                <a:r>
+                  <a:rPr>
+                    <a:solidFill>
+                      <a:srgbClr val="20794D"/>
+                    </a:solidFill>
+                    <a:latin typeface="Courier"/>
+                  </a:rPr>
+                  <a:t>"F"</a:t>
+                </a:r>
+                <a:r>
+                  <a:rPr>
+                    <a:solidFill>
+                      <a:srgbClr val="003B4F"/>
+                    </a:solidFill>
+                    <a:latin typeface="Courier"/>
+                  </a:rPr>
+                  <a:t>)</a:t>
+                </a:r>
+                <a:br/>
+                <a:r>
+                  <a:rPr i="1">
+                    <a:solidFill>
+                      <a:srgbClr val="5E5E5E"/>
+                    </a:solidFill>
+                    <a:latin typeface="Courier"/>
+                  </a:rPr>
+                  <a:t>## Analysis of Deviance Table (Type III tests)</a:t>
+                </a:r>
+                <a:br/>
+                <a:r>
+                  <a:rPr i="1">
+                    <a:solidFill>
+                      <a:srgbClr val="5E5E5E"/>
+                    </a:solidFill>
+                    <a:latin typeface="Courier"/>
+                  </a:rPr>
+                  <a:t>## </a:t>
+                </a:r>
+                <a:br/>
+                <a:r>
+                  <a:rPr i="1">
+                    <a:solidFill>
+                      <a:srgbClr val="5E5E5E"/>
+                    </a:solidFill>
+                    <a:latin typeface="Courier"/>
+                  </a:rPr>
+                  <a:t>## Response: Endemics</a:t>
+                </a:r>
+                <a:br/>
+                <a:r>
+                  <a:rPr i="1">
+                    <a:solidFill>
+                      <a:srgbClr val="5E5E5E"/>
+                    </a:solidFill>
+                    <a:latin typeface="Courier"/>
+                  </a:rPr>
+                  <a:t>## Error estimate based on Pearson residuals </a:t>
+                </a:r>
+                <a:br/>
+                <a:r>
+                  <a:rPr i="1">
+                    <a:solidFill>
+                      <a:srgbClr val="5E5E5E"/>
+                    </a:solidFill>
+                    <a:latin typeface="Courier"/>
+                  </a:rPr>
+                  <a:t>## </a:t>
+                </a:r>
+                <a:br/>
+                <a:r>
+                  <a:rPr i="1">
+                    <a:solidFill>
+                      <a:srgbClr val="5E5E5E"/>
+                    </a:solidFill>
+                    <a:latin typeface="Courier"/>
+                  </a:rPr>
+                  <a:t>##                Sum Sq Df F values    Pr(&gt;F)    </a:t>
+                </a:r>
+                <a:br/>
+                <a:r>
+                  <a:rPr i="1">
+                    <a:solidFill>
+                      <a:srgbClr val="5E5E5E"/>
+                    </a:solidFill>
+                    <a:latin typeface="Courier"/>
+                  </a:rPr>
+                  <a:t>## size_category 15906.6  2   37.307 1.697e-08 ***</a:t>
+                </a:r>
+                <a:br/>
+                <a:r>
+                  <a:rPr i="1">
+                    <a:solidFill>
+                      <a:srgbClr val="5E5E5E"/>
+                    </a:solidFill>
+                    <a:latin typeface="Courier"/>
+                  </a:rPr>
+                  <a:t>## Residuals      5756.1 27                       </a:t>
+                </a:r>
+                <a:br/>
+                <a:r>
+                  <a:rPr i="1">
+                    <a:solidFill>
+                      <a:srgbClr val="5E5E5E"/>
+                    </a:solidFill>
+                    <a:latin typeface="Courier"/>
+                  </a:rPr>
+                  <a:t>## ---</a:t>
+                </a:r>
+                <a:br/>
+                <a:r>
+                  <a:rPr i="1">
+                    <a:solidFill>
+                      <a:srgbClr val="5E5E5E"/>
+                    </a:solidFill>
+                    <a:latin typeface="Courier"/>
+                  </a:rPr>
+                  <a:t>## Signif. codes:  0 '***' 0.001 '**' 0.01 '*' 0.05 '.' 0.1 ' ' 1</a:t>
+                </a:r>
+              </a:p>
+            </p:txBody>
+          </p:sp>
+        </mc:Choice>
+      </mc:AlternateContent>
       <p:sp>
         <p:nvSpPr>
-          <p:cNvPr id="3" name="Content Placeholder 2"/>
+          <p:cNvPr id="5" name="Text Placeholder 4"/>
           <p:cNvSpPr>
             <a:spLocks noGrp="1"/>
           </p:cNvSpPr>
           <p:nvPr>
-            <p:ph idx="1"/>
+            <p:ph idx="3" sz="quarter" type="body"/>
           </p:nvPr>
         </p:nvSpPr>
         <p:spPr/>
@@ -3436,61 +3906,45 @@
           <a:lstStyle/>
           <a:p>
             <a:pPr lvl="0" indent="0" marL="0">
-              <a:spcBef>
-                <a:spcPts val="3000"/>
-              </a:spcBef>
-              <a:buNone/>
-            </a:pPr>
-            <a:r>
-              <a:rPr b="1"/>
-              <a:t>Equivalence of Linear Models and Gaussian GLMs</a:t>
-            </a:r>
-          </a:p>
-          <a:p>
-            <a:pPr lvl="0" indent="0" marL="0">
-              <a:buNone/>
-            </a:pPr>
-            <a:r>
-              <a:rPr/>
-              <a:t>When we use a </a:t>
-            </a:r>
-            <a:r>
-              <a:rPr b="1"/>
-              <a:t>Gaussian distribution</a:t>
-            </a:r>
-            <a:r>
-              <a:rPr/>
-              <a:t> with an </a:t>
-            </a:r>
-            <a:r>
-              <a:rPr b="1"/>
-              <a:t>identity link</a:t>
-            </a:r>
-            <a:r>
-              <a:rPr/>
-              <a:t>, GLM gives identical results to standard linear regression. This can be seen in the coefficient values and overall model statistics.</a:t>
-            </a:r>
-          </a:p>
-          <a:p>
-            <a:pPr lvl="0" indent="0" marL="0">
-              <a:buNone/>
-            </a:pPr>
-            <a:r>
-              <a:rPr/>
-              <a:t>The key difference is that GLMs provide a framework that extends to non-normal distributions.</a:t>
-            </a:r>
-          </a:p>
-          <a:p>
-            <a:pPr lvl="0" indent="0" marL="0">
-              <a:buNone/>
-            </a:pPr>
-            <a:r>
-              <a:rPr b="1" u="sng"/>
-              <a:t>Note when we look at Heteroscedascidity (SP) cone of despair - this is why a Poisson model works</a:t>
+              <a:buNone/>
+            </a:pPr>
+            <a:r>
+              <a:rPr/>
+              <a:t>Visualizing the results:</a:t>
             </a:r>
           </a:p>
         </p:txBody>
       </p:sp>
+      <p:pic>
+        <p:nvPicPr>
+          <p:cNvPr descr="14_01_lecture_powerpoint_files/figure-pptx/gaussian-plot-1.png" id="0" name="Picture 1"/>
+          <p:cNvPicPr>
+            <a:picLocks noGrp="1" noChangeAspect="1"/>
+          </p:cNvPicPr>
+          <p:nvPr/>
+        </p:nvPicPr>
+        <p:blipFill>
+          <a:blip r:embed="rId2"/>
+          <a:stretch>
+            <a:fillRect/>
+          </a:stretch>
+        </p:blipFill>
+        <p:spPr bwMode="auto">
+          <a:xfrm>
+            <a:off x="4749800" y="1689100"/>
+            <a:ext cx="4038600" cy="2489200"/>
+          </a:xfrm>
+          <a:prstGeom prst="rect">
+            <a:avLst/>
+          </a:prstGeom>
+          <a:noFill/>
+          <a:ln w="9525">
+            <a:noFill/>
+            <a:headEnd/>
+            <a:tailEnd/>
+          </a:ln>
+        </p:spPr>
+      </p:pic>
     </p:spTree>
   </p:cSld>
 </p:sld>
@@ -3526,11 +3980,8 @@
         <p:spPr>
           <a:xfrm>
             <a:off x="0" y="0"/>
-            <a:ext cx="9144000" cy="602780"/>
+            <a:ext cx="9144000" cy="582780"/>
           </a:xfrm>
-          <a:solidFill>
-            <a:srgbClr val="70121D"/>
-          </a:solidFill>
         </p:spPr>
         <p:txBody>
           <a:bodyPr/>
@@ -3541,7 +3992,7 @@
             </a:pPr>
             <a:r>
               <a:rPr/>
-              <a:t>GLM with Poisson Distribution: Setup</a:t>
+              <a:t>Equivalence of Linear Models and Gaussian GLMs</a:t>
             </a:r>
           </a:p>
         </p:txBody>
@@ -3553,7 +4004,7 @@
             <a:spLocks noGrp="1"/>
           </p:cNvSpPr>
           <p:nvPr>
-            <p:ph idx="1" sz="half"/>
+            <p:ph idx="1"/>
           </p:nvPr>
         </p:nvSpPr>
         <p:spPr/>
@@ -3561,99 +4012,6 @@
           <a:bodyPr/>
           <a:lstStyle/>
           <a:p>
-            <a:pPr lvl="0"/>
-            <a:r>
-              <a:rPr b="1"/>
-              <a:t>Poisson GLMs</a:t>
-            </a:r>
-            <a:r>
-              <a:rPr/>
-              <a:t> Poisson model used when response variable is </a:t>
-            </a:r>
-            <a:r>
-              <a:rPr b="1"/>
-              <a:t>count data</a:t>
-            </a:r>
-            <a:r>
-              <a:rPr/>
-              <a:t>:</a:t>
-            </a:r>
-          </a:p>
-          <a:p>
-            <a:pPr lvl="1"/>
-            <a:r>
-              <a:rPr/>
-              <a:t>Number of species on an island</a:t>
-            </a:r>
-          </a:p>
-          <a:p>
-            <a:pPr lvl="1"/>
-            <a:r>
-              <a:rPr/>
-              <a:t>Number of parasites in a host</a:t>
-            </a:r>
-          </a:p>
-          <a:p>
-            <a:pPr lvl="1"/>
-            <a:r>
-              <a:rPr/>
-              <a:t>Number of bird nests in a plot</a:t>
-            </a:r>
-          </a:p>
-          <a:p>
-            <a:pPr lvl="1"/>
-            <a:r>
-              <a:rPr/>
-              <a:t>Number of seeds produced by a plant</a:t>
-            </a:r>
-          </a:p>
-          <a:p>
-            <a:pPr lvl="0"/>
-            <a:r>
-              <a:rPr/>
-              <a:t>The Poisson distribution assumes:</a:t>
-            </a:r>
-          </a:p>
-          <a:p>
-            <a:pPr lvl="1"/>
-            <a:r>
-              <a:rPr/>
-              <a:t>Counts are non-negative integers (0, 1, 2, 3, …)</a:t>
-            </a:r>
-          </a:p>
-          <a:p>
-            <a:pPr lvl="1"/>
-            <a:r>
-              <a:rPr/>
-              <a:t>The mean equals the variance</a:t>
-            </a:r>
-          </a:p>
-          <a:p>
-            <a:pPr lvl="1"/>
-            <a:r>
-              <a:rPr/>
-              <a:t>Events occur independently</a:t>
-            </a:r>
-          </a:p>
-          <a:p>
-            <a:pPr lvl="0"/>
-            <a:r>
-              <a:rPr b="1"/>
-              <a:t>Key consideration:</a:t>
-            </a:r>
-            <a:r>
-              <a:rPr/>
-              <a:t> If variance &gt; mean (overdispersion), consider negative binomial regression instead.</a:t>
-            </a:r>
-          </a:p>
-          <a:p>
-            <a:pPr lvl="0"/>
-            <a:r>
-              <a:rPr/>
-              <a:t>Now let’s fit a Poisson GLM to model the relationship between the rounded quarter-mile time and the number of cylinders:</a:t>
-            </a:r>
-          </a:p>
-          <a:p>
             <a:pPr lvl="0" indent="0" marL="0">
               <a:spcBef>
                 <a:spcPts val="3000"/>
@@ -3662,402 +4020,50 @@
             </a:pPr>
             <a:r>
               <a:rPr b="1"/>
-              <a:t>Fit Poisson GLM with size_category as predictor</a:t>
-            </a:r>
-          </a:p>
-        </p:txBody>
-      </p:sp>
-      <p:sp>
-        <p:nvSpPr>
-          <p:cNvPr id="4" name="Content Placeholder 3"/>
-          <p:cNvSpPr>
-            <a:spLocks noGrp="1"/>
-          </p:cNvSpPr>
-          <p:nvPr>
-            <p:ph idx="2" sz="half"/>
-          </p:nvPr>
-        </p:nvSpPr>
-        <p:spPr/>
-        <p:txBody>
-          <a:bodyPr/>
-          <a:lstStyle/>
-          <a:p>
-            <a:pPr lvl="0" indent="0">
-              <a:buNone/>
-            </a:pPr>
-            <a:r>
-              <a:rPr>
-                <a:solidFill>
-                  <a:srgbClr val="003B4F"/>
-                </a:solidFill>
-                <a:latin typeface="Courier"/>
-              </a:rPr>
-              <a:t>model_poisson_gala &lt;- </a:t>
-            </a:r>
-            <a:r>
-              <a:rPr>
-                <a:solidFill>
-                  <a:srgbClr val="4758AB"/>
-                </a:solidFill>
-                <a:latin typeface="Courier"/>
-              </a:rPr>
-              <a:t>glm</a:t>
-            </a:r>
-            <a:r>
-              <a:rPr>
-                <a:solidFill>
-                  <a:srgbClr val="003B4F"/>
-                </a:solidFill>
-                <a:latin typeface="Courier"/>
-              </a:rPr>
-              <a:t>(Species </a:t>
-            </a:r>
-            <a:r>
-              <a:rPr>
-                <a:solidFill>
-                  <a:srgbClr val="5E5E5E"/>
-                </a:solidFill>
-                <a:latin typeface="Courier"/>
-              </a:rPr>
-              <a:t>~</a:t>
-            </a:r>
-            <a:r>
-              <a:rPr>
-                <a:solidFill>
-                  <a:srgbClr val="003B4F"/>
-                </a:solidFill>
-                <a:latin typeface="Courier"/>
-              </a:rPr>
-              <a:t> size_category, </a:t>
-            </a:r>
-            <a:br/>
-            <a:r>
-              <a:rPr>
-                <a:solidFill>
-                  <a:srgbClr val="003B4F"/>
-                </a:solidFill>
-                <a:latin typeface="Courier"/>
-              </a:rPr>
-              <a:t>                          </a:t>
-            </a:r>
-            <a:r>
-              <a:rPr>
-                <a:solidFill>
-                  <a:srgbClr val="657422"/>
-                </a:solidFill>
-                <a:latin typeface="Courier"/>
-              </a:rPr>
-              <a:t>data =</a:t>
-            </a:r>
-            <a:r>
-              <a:rPr>
-                <a:solidFill>
-                  <a:srgbClr val="003B4F"/>
-                </a:solidFill>
-                <a:latin typeface="Courier"/>
-              </a:rPr>
-              <a:t> gala,</a:t>
-            </a:r>
-            <a:br/>
-            <a:r>
-              <a:rPr>
-                <a:solidFill>
-                  <a:srgbClr val="003B4F"/>
-                </a:solidFill>
-                <a:latin typeface="Courier"/>
-              </a:rPr>
-              <a:t>                          </a:t>
-            </a:r>
-            <a:r>
-              <a:rPr>
-                <a:solidFill>
-                  <a:srgbClr val="657422"/>
-                </a:solidFill>
-                <a:latin typeface="Courier"/>
-              </a:rPr>
-              <a:t>family =</a:t>
-            </a:r>
-            <a:r>
-              <a:rPr>
-                <a:solidFill>
-                  <a:srgbClr val="003B4F"/>
-                </a:solidFill>
-                <a:latin typeface="Courier"/>
-              </a:rPr>
-              <a:t> </a:t>
-            </a:r>
-            <a:r>
-              <a:rPr>
-                <a:solidFill>
-                  <a:srgbClr val="4758AB"/>
-                </a:solidFill>
-                <a:latin typeface="Courier"/>
-              </a:rPr>
-              <a:t>poisson</a:t>
-            </a:r>
-            <a:r>
-              <a:rPr>
-                <a:solidFill>
-                  <a:srgbClr val="003B4F"/>
-                </a:solidFill>
-                <a:latin typeface="Courier"/>
-              </a:rPr>
-              <a:t>(</a:t>
-            </a:r>
-            <a:r>
-              <a:rPr>
-                <a:solidFill>
-                  <a:srgbClr val="657422"/>
-                </a:solidFill>
-                <a:latin typeface="Courier"/>
-              </a:rPr>
-              <a:t>link =</a:t>
-            </a:r>
-            <a:r>
-              <a:rPr>
-                <a:solidFill>
-                  <a:srgbClr val="003B4F"/>
-                </a:solidFill>
-                <a:latin typeface="Courier"/>
-              </a:rPr>
-              <a:t> </a:t>
-            </a:r>
-            <a:r>
-              <a:rPr>
-                <a:solidFill>
-                  <a:srgbClr val="20794D"/>
-                </a:solidFill>
-                <a:latin typeface="Courier"/>
-              </a:rPr>
-              <a:t>"log"</a:t>
-            </a:r>
-            <a:r>
-              <a:rPr>
-                <a:solidFill>
-                  <a:srgbClr val="003B4F"/>
-                </a:solidFill>
-                <a:latin typeface="Courier"/>
-              </a:rPr>
-              <a:t>))</a:t>
-            </a:r>
-            <a:br/>
-            <a:r>
-              <a:rPr>
-                <a:solidFill>
-                  <a:srgbClr val="4758AB"/>
-                </a:solidFill>
-                <a:latin typeface="Courier"/>
-              </a:rPr>
-              <a:t>summary</a:t>
-            </a:r>
-            <a:r>
-              <a:rPr>
-                <a:solidFill>
-                  <a:srgbClr val="003B4F"/>
-                </a:solidFill>
-                <a:latin typeface="Courier"/>
-              </a:rPr>
-              <a:t>(model_poisson_gala)</a:t>
-            </a:r>
-            <a:br/>
-            <a:r>
-              <a:rPr i="1">
-                <a:solidFill>
-                  <a:srgbClr val="5E5E5E"/>
-                </a:solidFill>
-                <a:latin typeface="Courier"/>
-              </a:rPr>
-              <a:t>## </a:t>
-            </a:r>
-            <a:br/>
-            <a:r>
-              <a:rPr i="1">
-                <a:solidFill>
-                  <a:srgbClr val="5E5E5E"/>
-                </a:solidFill>
-                <a:latin typeface="Courier"/>
-              </a:rPr>
-              <a:t>## Call:</a:t>
-            </a:r>
-            <a:br/>
-            <a:r>
-              <a:rPr i="1">
-                <a:solidFill>
-                  <a:srgbClr val="5E5E5E"/>
-                </a:solidFill>
-                <a:latin typeface="Courier"/>
-              </a:rPr>
-              <a:t>## glm(formula = Species ~ size_category, family = poisson(link = "log"), </a:t>
-            </a:r>
-            <a:br/>
-            <a:r>
-              <a:rPr i="1">
-                <a:solidFill>
-                  <a:srgbClr val="5E5E5E"/>
-                </a:solidFill>
-                <a:latin typeface="Courier"/>
-              </a:rPr>
-              <a:t>##     data = gala)</a:t>
-            </a:r>
-            <a:br/>
-            <a:r>
-              <a:rPr i="1">
-                <a:solidFill>
-                  <a:srgbClr val="5E5E5E"/>
-                </a:solidFill>
-                <a:latin typeface="Courier"/>
-              </a:rPr>
-              <a:t>## </a:t>
-            </a:r>
-            <a:br/>
-            <a:r>
-              <a:rPr i="1">
-                <a:solidFill>
-                  <a:srgbClr val="5E5E5E"/>
-                </a:solidFill>
-                <a:latin typeface="Courier"/>
-              </a:rPr>
-              <a:t>## Coefficients:</a:t>
-            </a:r>
-            <a:br/>
-            <a:r>
-              <a:rPr i="1">
-                <a:solidFill>
-                  <a:srgbClr val="5E5E5E"/>
-                </a:solidFill>
-                <a:latin typeface="Courier"/>
-              </a:rPr>
-              <a:t>##                     Estimate Std. Error z value Pr(&gt;|z|)    </a:t>
-            </a:r>
-            <a:br/>
-            <a:r>
-              <a:rPr i="1">
-                <a:solidFill>
-                  <a:srgbClr val="5E5E5E"/>
-                </a:solidFill>
-                <a:latin typeface="Courier"/>
-              </a:rPr>
-              <a:t>## (Intercept)          2.67101    0.07930   33.68   &lt;2e-16 ***</a:t>
-            </a:r>
-            <a:br/>
-            <a:r>
-              <a:rPr i="1">
-                <a:solidFill>
-                  <a:srgbClr val="5E5E5E"/>
-                </a:solidFill>
-                <a:latin typeface="Courier"/>
-              </a:rPr>
-              <a:t>## size_categoryMedium  1.33784    0.08833   15.15   &lt;2e-16 ***</a:t>
-            </a:r>
-            <a:br/>
-            <a:r>
-              <a:rPr i="1">
-                <a:solidFill>
-                  <a:srgbClr val="5E5E5E"/>
-                </a:solidFill>
-                <a:latin typeface="Courier"/>
-              </a:rPr>
-              <a:t>## size_categoryLarge   2.84300    0.08285   34.31   &lt;2e-16 ***</a:t>
-            </a:r>
-            <a:br/>
-            <a:r>
-              <a:rPr i="1">
-                <a:solidFill>
-                  <a:srgbClr val="5E5E5E"/>
-                </a:solidFill>
-                <a:latin typeface="Courier"/>
-              </a:rPr>
-              <a:t>## ---</a:t>
-            </a:r>
-            <a:br/>
-            <a:r>
-              <a:rPr i="1">
-                <a:solidFill>
-                  <a:srgbClr val="5E5E5E"/>
-                </a:solidFill>
-                <a:latin typeface="Courier"/>
-              </a:rPr>
-              <a:t>## Signif. codes:  0 '***' 0.001 '**' 0.01 '*' 0.05 '.' 0.1 ' ' 1</a:t>
-            </a:r>
-            <a:br/>
-            <a:r>
-              <a:rPr i="1">
-                <a:solidFill>
-                  <a:srgbClr val="5E5E5E"/>
-                </a:solidFill>
-                <a:latin typeface="Courier"/>
-              </a:rPr>
-              <a:t>## </a:t>
-            </a:r>
-            <a:br/>
-            <a:r>
-              <a:rPr i="1">
-                <a:solidFill>
-                  <a:srgbClr val="5E5E5E"/>
-                </a:solidFill>
-                <a:latin typeface="Courier"/>
-              </a:rPr>
-              <a:t>## (Dispersion parameter for poisson family taken to be 1)</a:t>
-            </a:r>
-            <a:br/>
-            <a:r>
-              <a:rPr i="1">
-                <a:solidFill>
-                  <a:srgbClr val="5E5E5E"/>
-                </a:solidFill>
-                <a:latin typeface="Courier"/>
-              </a:rPr>
-              <a:t>## </a:t>
-            </a:r>
-            <a:br/>
-            <a:r>
-              <a:rPr i="1">
-                <a:solidFill>
-                  <a:srgbClr val="5E5E5E"/>
-                </a:solidFill>
-                <a:latin typeface="Courier"/>
-              </a:rPr>
-              <a:t>##     Null deviance: 3510.73  on 29  degrees of freedom</a:t>
-            </a:r>
-            <a:br/>
-            <a:r>
-              <a:rPr i="1">
-                <a:solidFill>
-                  <a:srgbClr val="5E5E5E"/>
-                </a:solidFill>
-                <a:latin typeface="Courier"/>
-              </a:rPr>
-              <a:t>## Residual deviance:  939.74  on 27  degrees of freedom</a:t>
-            </a:r>
-            <a:br/>
-            <a:r>
-              <a:rPr i="1">
-                <a:solidFill>
-                  <a:srgbClr val="5E5E5E"/>
-                </a:solidFill>
-                <a:latin typeface="Courier"/>
-              </a:rPr>
-              <a:t>## AIC: 1106.6</a:t>
-            </a:r>
-            <a:br/>
-            <a:r>
-              <a:rPr i="1">
-                <a:solidFill>
-                  <a:srgbClr val="5E5E5E"/>
-                </a:solidFill>
-                <a:latin typeface="Courier"/>
-              </a:rPr>
-              <a:t>## </a:t>
-            </a:r>
-            <a:br/>
-            <a:r>
-              <a:rPr i="1">
-                <a:solidFill>
-                  <a:srgbClr val="5E5E5E"/>
-                </a:solidFill>
-                <a:latin typeface="Courier"/>
-              </a:rPr>
-              <a:t>## Number of Fisher Scoring iterations: 5</a:t>
+              <a:t>Equivalence of Linear Models and Gaussian GLMs</a:t>
+            </a:r>
+          </a:p>
+          <a:p>
+            <a:pPr lvl="0" indent="0" marL="0">
+              <a:buNone/>
+            </a:pPr>
+            <a:r>
+              <a:rPr/>
+              <a:t>When we use a </a:t>
+            </a:r>
+            <a:r>
+              <a:rPr b="1"/>
+              <a:t>Gaussian distribution</a:t>
+            </a:r>
+            <a:r>
+              <a:rPr/>
+              <a:t> with an </a:t>
+            </a:r>
+            <a:r>
+              <a:rPr b="1"/>
+              <a:t>identity link</a:t>
+            </a:r>
+            <a:r>
+              <a:rPr/>
+              <a:t>, GLM gives identical results to standard linear regression. This can be seen in the coefficient values and overall model statistics.</a:t>
+            </a:r>
+          </a:p>
+          <a:p>
+            <a:pPr lvl="0" indent="0" marL="0">
+              <a:buNone/>
+            </a:pPr>
+            <a:r>
+              <a:rPr/>
+              <a:t>The key difference is that GLMs provide a framework that extends to non-normal distributions.</a:t>
+            </a:r>
+          </a:p>
+          <a:p>
+            <a:pPr lvl="0" indent="0" marL="0">
+              <a:buNone/>
+            </a:pPr>
+            <a:r>
+              <a:rPr b="1" u="sng"/>
+              <a:t>Note when we look at Heteroscedascidity (SP) cone of despair - this is why a Poisson model works</a:t>
             </a:r>
           </a:p>
         </p:txBody>
@@ -4132,254 +4138,624 @@
           <a:bodyPr/>
           <a:lstStyle/>
           <a:p>
+            <a:pPr lvl="0"/>
+            <a:r>
+              <a:rPr b="1"/>
+              <a:t>Poisson GLMs</a:t>
+            </a:r>
+            <a:r>
+              <a:rPr/>
+              <a:t> Poisson model used when response variable is </a:t>
+            </a:r>
+            <a:r>
+              <a:rPr b="1"/>
+              <a:t>count data</a:t>
+            </a:r>
+            <a:r>
+              <a:rPr/>
+              <a:t>:</a:t>
+            </a:r>
+          </a:p>
+          <a:p>
+            <a:pPr lvl="1"/>
+            <a:r>
+              <a:rPr/>
+              <a:t>Number of species on an island</a:t>
+            </a:r>
+          </a:p>
+          <a:p>
+            <a:pPr lvl="1"/>
+            <a:r>
+              <a:rPr/>
+              <a:t>Number of parasites in a host</a:t>
+            </a:r>
+          </a:p>
+          <a:p>
+            <a:pPr lvl="1"/>
+            <a:r>
+              <a:rPr/>
+              <a:t>Number of bird nests in a plot</a:t>
+            </a:r>
+          </a:p>
+          <a:p>
+            <a:pPr lvl="1"/>
+            <a:r>
+              <a:rPr/>
+              <a:t>Number of seeds produced by a plant</a:t>
+            </a:r>
+          </a:p>
+          <a:p>
+            <a:pPr lvl="0"/>
+            <a:r>
+              <a:rPr/>
+              <a:t>The Poisson distribution assumes:</a:t>
+            </a:r>
+          </a:p>
+          <a:p>
+            <a:pPr lvl="1"/>
+            <a:r>
+              <a:rPr/>
+              <a:t>Counts are non-negative integers (0, 1, 2, 3, …)</a:t>
+            </a:r>
+          </a:p>
+          <a:p>
+            <a:pPr lvl="1"/>
+            <a:r>
+              <a:rPr/>
+              <a:t>The mean equals the variance</a:t>
+            </a:r>
+          </a:p>
+          <a:p>
+            <a:pPr lvl="1"/>
+            <a:r>
+              <a:rPr/>
+              <a:t>Events occur independently</a:t>
+            </a:r>
+          </a:p>
+          <a:p>
+            <a:pPr lvl="0"/>
+            <a:r>
+              <a:rPr b="1"/>
+              <a:t>Key consideration:</a:t>
+            </a:r>
+            <a:r>
+              <a:rPr/>
+              <a:t> If variance &gt; mean (overdispersion), consider negative binomial regression instead.</a:t>
+            </a:r>
+          </a:p>
+          <a:p>
+            <a:pPr lvl="0"/>
+            <a:r>
+              <a:rPr/>
+              <a:t>Now let’s fit a Poisson GLM to model the relationship between the rounded quarter-mile time and the number of cylinders:</a:t>
+            </a:r>
+          </a:p>
+          <a:p>
             <a:pPr lvl="0" indent="0" marL="0">
-              <a:buNone/>
-            </a:pPr>
-            <a:r>
-              <a:rPr/>
-              <a:t>Does island size category, as a whole, have a statistically significant effect on the number of plant species?</a:t>
-            </a:r>
-          </a:p>
-          <a:p>
-            <a:pPr lvl="0"/>
-            <a:r>
-              <a:rPr>
-                <a:latin typeface="Courier"/>
-              </a:rPr>
-              <a:t>test = "LR"</a:t>
-            </a:r>
-            <a:r>
-              <a:rPr/>
-              <a:t>: important part!</a:t>
-            </a:r>
-          </a:p>
-          <a:p>
-            <a:pPr lvl="1"/>
-            <a:r>
-              <a:rPr/>
-              <a:t>normal ANOVA (with a Gaussian/normal distribution) test is an F-test.</a:t>
-            </a:r>
-          </a:p>
-          <a:p>
-            <a:pPr lvl="1"/>
-            <a:r>
-              <a:rPr/>
-              <a:t>GLM (like Poisson) can’t use F-test in the same way</a:t>
-            </a:r>
-          </a:p>
-          <a:p>
-            <a:pPr lvl="2"/>
-            <a:r>
-              <a:rPr/>
-              <a:t>use a Likelihood Ratio (LR) test</a:t>
-            </a:r>
-          </a:p>
-          <a:p>
-            <a:pPr lvl="2"/>
-            <a:r>
-              <a:rPr/>
-              <a:t>LR test statistically compares fit of full model (the one with size_category) to simpler null model (one without size_category)</a:t>
-            </a:r>
-          </a:p>
-          <a:p>
-            <a:pPr lvl="2"/>
-            <a:r>
-              <a:rPr/>
-              <a:t>LR test tells us if it is significant</a:t>
+              <a:spcBef>
+                <a:spcPts val="3000"/>
+              </a:spcBef>
+              <a:buNone/>
+            </a:pPr>
+            <a:r>
+              <a:rPr b="1"/>
+              <a:t>Fit Poisson GLM with size_category as predictor</a:t>
             </a:r>
           </a:p>
         </p:txBody>
       </p:sp>
-      <p:sp>
-        <p:nvSpPr>
-          <p:cNvPr id="4" name="Content Placeholder 3"/>
-          <p:cNvSpPr>
-            <a:spLocks noGrp="1"/>
-          </p:cNvSpPr>
-          <p:nvPr>
-            <p:ph idx="2" sz="half"/>
-          </p:nvPr>
-        </p:nvSpPr>
-        <p:spPr/>
-        <p:txBody>
-          <a:bodyPr/>
-          <a:lstStyle/>
-          <a:p>
-            <a:pPr lvl="0" indent="0" marL="0">
-              <a:buNone/>
-            </a:pPr>
-            <a:r>
-              <a:rPr/>
-              <a:t>Test overall effect of size_category</a:t>
-            </a:r>
-          </a:p>
-          <a:p>
-            <a:pPr lvl="0" indent="0">
-              <a:buNone/>
-            </a:pPr>
-            <a:r>
-              <a:rPr>
-                <a:solidFill>
-                  <a:srgbClr val="4758AB"/>
-                </a:solidFill>
-                <a:latin typeface="Courier"/>
-              </a:rPr>
-              <a:t>Anova</a:t>
-            </a:r>
-            <a:r>
-              <a:rPr>
-                <a:solidFill>
-                  <a:srgbClr val="003B4F"/>
-                </a:solidFill>
-                <a:latin typeface="Courier"/>
-              </a:rPr>
-              <a:t>(model_poisson_gala, </a:t>
-            </a:r>
-            <a:r>
-              <a:rPr>
-                <a:solidFill>
-                  <a:srgbClr val="657422"/>
-                </a:solidFill>
-                <a:latin typeface="Courier"/>
-              </a:rPr>
-              <a:t>type =</a:t>
-            </a:r>
-            <a:r>
-              <a:rPr>
-                <a:solidFill>
-                  <a:srgbClr val="003B4F"/>
-                </a:solidFill>
-                <a:latin typeface="Courier"/>
-              </a:rPr>
-              <a:t> </a:t>
-            </a:r>
-            <a:r>
-              <a:rPr>
-                <a:solidFill>
-                  <a:srgbClr val="20794D"/>
-                </a:solidFill>
-                <a:latin typeface="Courier"/>
-              </a:rPr>
-              <a:t>"III"</a:t>
-            </a:r>
-            <a:r>
-              <a:rPr>
-                <a:solidFill>
-                  <a:srgbClr val="003B4F"/>
-                </a:solidFill>
-                <a:latin typeface="Courier"/>
-              </a:rPr>
-              <a:t>, </a:t>
-            </a:r>
-            <a:r>
-              <a:rPr>
-                <a:solidFill>
-                  <a:srgbClr val="657422"/>
-                </a:solidFill>
-                <a:latin typeface="Courier"/>
-              </a:rPr>
-              <a:t>test =</a:t>
-            </a:r>
-            <a:r>
-              <a:rPr>
-                <a:solidFill>
-                  <a:srgbClr val="003B4F"/>
-                </a:solidFill>
-                <a:latin typeface="Courier"/>
-              </a:rPr>
-              <a:t> </a:t>
-            </a:r>
-            <a:r>
-              <a:rPr>
-                <a:solidFill>
-                  <a:srgbClr val="20794D"/>
-                </a:solidFill>
-                <a:latin typeface="Courier"/>
-              </a:rPr>
-              <a:t>"LR"</a:t>
-            </a:r>
-            <a:r>
-              <a:rPr>
-                <a:solidFill>
-                  <a:srgbClr val="003B4F"/>
-                </a:solidFill>
-                <a:latin typeface="Courier"/>
-              </a:rPr>
-              <a:t>)</a:t>
-            </a:r>
-            <a:br/>
-            <a:r>
-              <a:rPr i="1">
-                <a:solidFill>
-                  <a:srgbClr val="5E5E5E"/>
-                </a:solidFill>
-                <a:latin typeface="Courier"/>
-              </a:rPr>
-              <a:t>## Analysis of Deviance Table (Type III tests)</a:t>
-            </a:r>
-            <a:br/>
-            <a:r>
-              <a:rPr i="1">
-                <a:solidFill>
-                  <a:srgbClr val="5E5E5E"/>
-                </a:solidFill>
-                <a:latin typeface="Courier"/>
-              </a:rPr>
-              <a:t>## </a:t>
-            </a:r>
-            <a:br/>
-            <a:r>
-              <a:rPr i="1">
-                <a:solidFill>
-                  <a:srgbClr val="5E5E5E"/>
-                </a:solidFill>
-                <a:latin typeface="Courier"/>
-              </a:rPr>
-              <a:t>## Response: Species</a:t>
-            </a:r>
-            <a:br/>
-            <a:r>
-              <a:rPr i="1">
-                <a:solidFill>
-                  <a:srgbClr val="5E5E5E"/>
-                </a:solidFill>
-                <a:latin typeface="Courier"/>
-              </a:rPr>
-              <a:t>##               LR Chisq Df Pr(&gt;Chisq)    </a:t>
-            </a:r>
-            <a:br/>
-            <a:r>
-              <a:rPr i="1">
-                <a:solidFill>
-                  <a:srgbClr val="5E5E5E"/>
-                </a:solidFill>
-                <a:latin typeface="Courier"/>
-              </a:rPr>
-              <a:t>## size_category     2571  2  &lt; 2.2e-16 ***</a:t>
-            </a:r>
-            <a:br/>
-            <a:r>
-              <a:rPr i="1">
-                <a:solidFill>
-                  <a:srgbClr val="5E5E5E"/>
-                </a:solidFill>
-                <a:latin typeface="Courier"/>
-              </a:rPr>
-              <a:t>## ---</a:t>
-            </a:r>
-            <a:br/>
-            <a:r>
-              <a:rPr i="1">
-                <a:solidFill>
-                  <a:srgbClr val="5E5E5E"/>
-                </a:solidFill>
-                <a:latin typeface="Courier"/>
-              </a:rPr>
-              <a:t>## Signif. codes:  0 '***' 0.001 '**' 0.01 '*' 0.05 '.' 0.1 ' ' 1</a:t>
-            </a:r>
-          </a:p>
-        </p:txBody>
-      </p:sp>
+      <mc:AlternateContent xmlns:mc="http://schemas.openxmlformats.org/markup-compatibility/2006">
+        <mc:Choice xmlns:a14="http://schemas.microsoft.com/office/drawing/2010/main" Requires="a14">
+          <p:sp>
+            <p:nvSpPr>
+              <p:cNvPr id="4" name="Content Placeholder 3"/>
+              <p:cNvSpPr>
+                <a:spLocks noGrp="1"/>
+              </p:cNvSpPr>
+              <p:nvPr>
+                <p:ph idx="2" sz="half"/>
+              </p:nvPr>
+            </p:nvSpPr>
+            <p:spPr/>
+            <p:txBody>
+              <a:bodyPr/>
+              <a:lstStyle/>
+              <a:p>
+                <a:pPr lvl="0"/>
+                <a:r>
+                  <a:rPr/>
+                  <a:t>model is predicting the natural logarithm (log) of the expected species count</a:t>
+                </a:r>
+              </a:p>
+              <a:p>
+                <a:pPr lvl="0"/>
+                <a:r>
+                  <a:rPr/>
+                  <a:t>exponentiate them (i.e., calculate </a:t>
+                </a:r>
+                <a14:m>
+                  <m:oMath xmlns:m="http://schemas.openxmlformats.org/officeDocument/2006/math">
+                    <m:sSup>
+                      <m:e>
+                        <m:r>
+                          <m:t>e</m:t>
+                        </m:r>
+                      </m:e>
+                      <m:sup>
+                        <m:r>
+                          <m:rPr>
+                            <m:nor/>
+                            <m:sty m:val="p"/>
+                          </m:rPr>
+                          <m:t>coefficient</m:t>
+                        </m:r>
+                      </m:sup>
+                    </m:sSup>
+                  </m:oMath>
+                </a14:m>
+                <a:r>
+                  <a:rPr/>
+                  <a:t> or exp(coefficient).</a:t>
+                </a:r>
+              </a:p>
+              <a:p>
+                <a:pPr lvl="0"/>
+                <a:r>
+                  <a:rPr/>
+                  <a:t>converts the additive log-counts back into a multiplicative effect on the actual species count</a:t>
+                </a:r>
+              </a:p>
+              <a:p>
+                <a:pPr lvl="0"/>
+                <a:r>
+                  <a:rPr/>
+                  <a:t>exp(2.67101) = 14.45 species on a “Small” island</a:t>
+                </a:r>
+              </a:p>
+              <a:p>
+                <a:pPr lvl="0"/>
+                <a:r>
+                  <a:rPr/>
+                  <a:t>exp(1.33784) = 3.81</a:t>
+                </a:r>
+              </a:p>
+              <a:p>
+                <a:pPr lvl="1"/>
+                <a:r>
+                  <a:rPr/>
+                  <a:t>“Medium” island predicted to have 3.81x more species than “Small” island, on average</a:t>
+                </a:r>
+              </a:p>
+              <a:p>
+                <a:pPr lvl="0"/>
+                <a:r>
+                  <a:rPr/>
+                  <a:t>exp(2.84300) = 17.17</a:t>
+                </a:r>
+              </a:p>
+              <a:p>
+                <a:pPr lvl="1"/>
+                <a:r>
+                  <a:rPr/>
+                  <a:t>“Large” island is predicted to have 17.17 times more species than a “Small” island, on average</a:t>
+                </a:r>
+              </a:p>
+              <a:p>
+                <a:pPr lvl="0"/>
+                <a:r>
+                  <a:rPr/>
+                  <a:t>Dispersion - Divide the deviance by its df: </a:t>
+                </a:r>
+                <a14:m>
+                  <m:oMath xmlns:m="http://schemas.openxmlformats.org/officeDocument/2006/math">
+                    <m:r>
+                      <m:t>939.74</m:t>
+                    </m:r>
+                    <m:r>
+                      <m:rPr>
+                        <m:sty m:val="p"/>
+                      </m:rPr>
+                      <m:t>/</m:t>
+                    </m:r>
+                    <m:r>
+                      <m:t>27</m:t>
+                    </m:r>
+                    <m:r>
+                      <m:rPr>
+                        <m:sty m:val="p"/>
+                      </m:rPr>
+                      <m:t>≈</m:t>
+                    </m:r>
+                  </m:oMath>
+                </a14:m>
+                <a:r>
+                  <a:rPr/>
+                  <a:t> 34.8</a:t>
+                </a:r>
+              </a:p>
+              <a:p>
+                <a:pPr lvl="0" indent="0">
+                  <a:buNone/>
+                </a:pPr>
+                <a:r>
+                  <a:rPr>
+                    <a:solidFill>
+                      <a:srgbClr val="003B4F"/>
+                    </a:solidFill>
+                    <a:latin typeface="Courier"/>
+                  </a:rPr>
+                  <a:t>model_poisson_gala &lt;- </a:t>
+                </a:r>
+                <a:r>
+                  <a:rPr>
+                    <a:solidFill>
+                      <a:srgbClr val="4758AB"/>
+                    </a:solidFill>
+                    <a:latin typeface="Courier"/>
+                  </a:rPr>
+                  <a:t>glm</a:t>
+                </a:r>
+                <a:r>
+                  <a:rPr>
+                    <a:solidFill>
+                      <a:srgbClr val="003B4F"/>
+                    </a:solidFill>
+                    <a:latin typeface="Courier"/>
+                  </a:rPr>
+                  <a:t>(Species </a:t>
+                </a:r>
+                <a:r>
+                  <a:rPr>
+                    <a:solidFill>
+                      <a:srgbClr val="5E5E5E"/>
+                    </a:solidFill>
+                    <a:latin typeface="Courier"/>
+                  </a:rPr>
+                  <a:t>~</a:t>
+                </a:r>
+                <a:r>
+                  <a:rPr>
+                    <a:solidFill>
+                      <a:srgbClr val="003B4F"/>
+                    </a:solidFill>
+                    <a:latin typeface="Courier"/>
+                  </a:rPr>
+                  <a:t> size_category, </a:t>
+                </a:r>
+                <a:br/>
+                <a:r>
+                  <a:rPr>
+                    <a:solidFill>
+                      <a:srgbClr val="003B4F"/>
+                    </a:solidFill>
+                    <a:latin typeface="Courier"/>
+                  </a:rPr>
+                  <a:t>                          </a:t>
+                </a:r>
+                <a:r>
+                  <a:rPr>
+                    <a:solidFill>
+                      <a:srgbClr val="657422"/>
+                    </a:solidFill>
+                    <a:latin typeface="Courier"/>
+                  </a:rPr>
+                  <a:t>data =</a:t>
+                </a:r>
+                <a:r>
+                  <a:rPr>
+                    <a:solidFill>
+                      <a:srgbClr val="003B4F"/>
+                    </a:solidFill>
+                    <a:latin typeface="Courier"/>
+                  </a:rPr>
+                  <a:t> gala,</a:t>
+                </a:r>
+                <a:br/>
+                <a:r>
+                  <a:rPr>
+                    <a:solidFill>
+                      <a:srgbClr val="003B4F"/>
+                    </a:solidFill>
+                    <a:latin typeface="Courier"/>
+                  </a:rPr>
+                  <a:t>                          </a:t>
+                </a:r>
+                <a:r>
+                  <a:rPr>
+                    <a:solidFill>
+                      <a:srgbClr val="657422"/>
+                    </a:solidFill>
+                    <a:latin typeface="Courier"/>
+                  </a:rPr>
+                  <a:t>family =</a:t>
+                </a:r>
+                <a:r>
+                  <a:rPr>
+                    <a:solidFill>
+                      <a:srgbClr val="003B4F"/>
+                    </a:solidFill>
+                    <a:latin typeface="Courier"/>
+                  </a:rPr>
+                  <a:t> </a:t>
+                </a:r>
+                <a:r>
+                  <a:rPr>
+                    <a:solidFill>
+                      <a:srgbClr val="4758AB"/>
+                    </a:solidFill>
+                    <a:latin typeface="Courier"/>
+                  </a:rPr>
+                  <a:t>poisson</a:t>
+                </a:r>
+                <a:r>
+                  <a:rPr>
+                    <a:solidFill>
+                      <a:srgbClr val="003B4F"/>
+                    </a:solidFill>
+                    <a:latin typeface="Courier"/>
+                  </a:rPr>
+                  <a:t>(</a:t>
+                </a:r>
+                <a:r>
+                  <a:rPr>
+                    <a:solidFill>
+                      <a:srgbClr val="657422"/>
+                    </a:solidFill>
+                    <a:latin typeface="Courier"/>
+                  </a:rPr>
+                  <a:t>link =</a:t>
+                </a:r>
+                <a:r>
+                  <a:rPr>
+                    <a:solidFill>
+                      <a:srgbClr val="003B4F"/>
+                    </a:solidFill>
+                    <a:latin typeface="Courier"/>
+                  </a:rPr>
+                  <a:t> </a:t>
+                </a:r>
+                <a:r>
+                  <a:rPr>
+                    <a:solidFill>
+                      <a:srgbClr val="20794D"/>
+                    </a:solidFill>
+                    <a:latin typeface="Courier"/>
+                  </a:rPr>
+                  <a:t>"log"</a:t>
+                </a:r>
+                <a:r>
+                  <a:rPr>
+                    <a:solidFill>
+                      <a:srgbClr val="003B4F"/>
+                    </a:solidFill>
+                    <a:latin typeface="Courier"/>
+                  </a:rPr>
+                  <a:t>))</a:t>
+                </a:r>
+                <a:br/>
+                <a:r>
+                  <a:rPr>
+                    <a:solidFill>
+                      <a:srgbClr val="4758AB"/>
+                    </a:solidFill>
+                    <a:latin typeface="Courier"/>
+                  </a:rPr>
+                  <a:t>summary</a:t>
+                </a:r>
+                <a:r>
+                  <a:rPr>
+                    <a:solidFill>
+                      <a:srgbClr val="003B4F"/>
+                    </a:solidFill>
+                    <a:latin typeface="Courier"/>
+                  </a:rPr>
+                  <a:t>(model_poisson_gala)</a:t>
+                </a:r>
+                <a:br/>
+                <a:r>
+                  <a:rPr i="1">
+                    <a:solidFill>
+                      <a:srgbClr val="5E5E5E"/>
+                    </a:solidFill>
+                    <a:latin typeface="Courier"/>
+                  </a:rPr>
+                  <a:t>## </a:t>
+                </a:r>
+                <a:br/>
+                <a:r>
+                  <a:rPr i="1">
+                    <a:solidFill>
+                      <a:srgbClr val="5E5E5E"/>
+                    </a:solidFill>
+                    <a:latin typeface="Courier"/>
+                  </a:rPr>
+                  <a:t>## Call:</a:t>
+                </a:r>
+                <a:br/>
+                <a:r>
+                  <a:rPr i="1">
+                    <a:solidFill>
+                      <a:srgbClr val="5E5E5E"/>
+                    </a:solidFill>
+                    <a:latin typeface="Courier"/>
+                  </a:rPr>
+                  <a:t>## glm(formula = Species ~ size_category, family = poisson(link = "log"), </a:t>
+                </a:r>
+                <a:br/>
+                <a:r>
+                  <a:rPr i="1">
+                    <a:solidFill>
+                      <a:srgbClr val="5E5E5E"/>
+                    </a:solidFill>
+                    <a:latin typeface="Courier"/>
+                  </a:rPr>
+                  <a:t>##     data = gala)</a:t>
+                </a:r>
+                <a:br/>
+                <a:r>
+                  <a:rPr i="1">
+                    <a:solidFill>
+                      <a:srgbClr val="5E5E5E"/>
+                    </a:solidFill>
+                    <a:latin typeface="Courier"/>
+                  </a:rPr>
+                  <a:t>## </a:t>
+                </a:r>
+                <a:br/>
+                <a:r>
+                  <a:rPr i="1">
+                    <a:solidFill>
+                      <a:srgbClr val="5E5E5E"/>
+                    </a:solidFill>
+                    <a:latin typeface="Courier"/>
+                  </a:rPr>
+                  <a:t>## Coefficients:</a:t>
+                </a:r>
+                <a:br/>
+                <a:r>
+                  <a:rPr i="1">
+                    <a:solidFill>
+                      <a:srgbClr val="5E5E5E"/>
+                    </a:solidFill>
+                    <a:latin typeface="Courier"/>
+                  </a:rPr>
+                  <a:t>##                     Estimate Std. Error z value Pr(&gt;|z|)    </a:t>
+                </a:r>
+                <a:br/>
+                <a:r>
+                  <a:rPr i="1">
+                    <a:solidFill>
+                      <a:srgbClr val="5E5E5E"/>
+                    </a:solidFill>
+                    <a:latin typeface="Courier"/>
+                  </a:rPr>
+                  <a:t>## (Intercept)          2.67101    0.07930   33.68   &lt;2e-16 ***</a:t>
+                </a:r>
+                <a:br/>
+                <a:r>
+                  <a:rPr i="1">
+                    <a:solidFill>
+                      <a:srgbClr val="5E5E5E"/>
+                    </a:solidFill>
+                    <a:latin typeface="Courier"/>
+                  </a:rPr>
+                  <a:t>## size_categoryMedium  1.33784    0.08833   15.15   &lt;2e-16 ***</a:t>
+                </a:r>
+                <a:br/>
+                <a:r>
+                  <a:rPr i="1">
+                    <a:solidFill>
+                      <a:srgbClr val="5E5E5E"/>
+                    </a:solidFill>
+                    <a:latin typeface="Courier"/>
+                  </a:rPr>
+                  <a:t>## size_categoryLarge   2.84300    0.08285   34.31   &lt;2e-16 ***</a:t>
+                </a:r>
+                <a:br/>
+                <a:r>
+                  <a:rPr i="1">
+                    <a:solidFill>
+                      <a:srgbClr val="5E5E5E"/>
+                    </a:solidFill>
+                    <a:latin typeface="Courier"/>
+                  </a:rPr>
+                  <a:t>## ---</a:t>
+                </a:r>
+                <a:br/>
+                <a:r>
+                  <a:rPr i="1">
+                    <a:solidFill>
+                      <a:srgbClr val="5E5E5E"/>
+                    </a:solidFill>
+                    <a:latin typeface="Courier"/>
+                  </a:rPr>
+                  <a:t>## Signif. codes:  0 '***' 0.001 '**' 0.01 '*' 0.05 '.' 0.1 ' ' 1</a:t>
+                </a:r>
+                <a:br/>
+                <a:r>
+                  <a:rPr i="1">
+                    <a:solidFill>
+                      <a:srgbClr val="5E5E5E"/>
+                    </a:solidFill>
+                    <a:latin typeface="Courier"/>
+                  </a:rPr>
+                  <a:t>## </a:t>
+                </a:r>
+                <a:br/>
+                <a:r>
+                  <a:rPr i="1">
+                    <a:solidFill>
+                      <a:srgbClr val="5E5E5E"/>
+                    </a:solidFill>
+                    <a:latin typeface="Courier"/>
+                  </a:rPr>
+                  <a:t>## (Dispersion parameter for poisson family taken to be 1)</a:t>
+                </a:r>
+                <a:br/>
+                <a:r>
+                  <a:rPr i="1">
+                    <a:solidFill>
+                      <a:srgbClr val="5E5E5E"/>
+                    </a:solidFill>
+                    <a:latin typeface="Courier"/>
+                  </a:rPr>
+                  <a:t>## </a:t>
+                </a:r>
+                <a:br/>
+                <a:r>
+                  <a:rPr i="1">
+                    <a:solidFill>
+                      <a:srgbClr val="5E5E5E"/>
+                    </a:solidFill>
+                    <a:latin typeface="Courier"/>
+                  </a:rPr>
+                  <a:t>##     Null deviance: 3510.73  on 29  degrees of freedom</a:t>
+                </a:r>
+                <a:br/>
+                <a:r>
+                  <a:rPr i="1">
+                    <a:solidFill>
+                      <a:srgbClr val="5E5E5E"/>
+                    </a:solidFill>
+                    <a:latin typeface="Courier"/>
+                  </a:rPr>
+                  <a:t>## Residual deviance:  939.74  on 27  degrees of freedom</a:t>
+                </a:r>
+                <a:br/>
+                <a:r>
+                  <a:rPr i="1">
+                    <a:solidFill>
+                      <a:srgbClr val="5E5E5E"/>
+                    </a:solidFill>
+                    <a:latin typeface="Courier"/>
+                  </a:rPr>
+                  <a:t>## AIC: 1106.6</a:t>
+                </a:r>
+                <a:br/>
+                <a:r>
+                  <a:rPr i="1">
+                    <a:solidFill>
+                      <a:srgbClr val="5E5E5E"/>
+                    </a:solidFill>
+                    <a:latin typeface="Courier"/>
+                  </a:rPr>
+                  <a:t>## </a:t>
+                </a:r>
+                <a:br/>
+                <a:r>
+                  <a:rPr i="1">
+                    <a:solidFill>
+                      <a:srgbClr val="5E5E5E"/>
+                    </a:solidFill>
+                    <a:latin typeface="Courier"/>
+                  </a:rPr>
+                  <a:t>## Number of Fisher Scoring iterations: 5</a:t>
+                </a:r>
+              </a:p>
+            </p:txBody>
+          </p:sp>
+        </mc:Choice>
+      </mc:AlternateContent>
     </p:spTree>
   </p:cSld>
 </p:sld>
@@ -4454,106 +4830,56 @@
               <a:buNone/>
             </a:pPr>
             <a:r>
-              <a:rPr b="1"/>
-              <a:t>Poisson GLMs</a:t>
-            </a:r>
-            <a:r>
-              <a:rPr/>
-              <a:t> are appropriate for </a:t>
-            </a:r>
-            <a:r>
-              <a:rPr b="1"/>
-              <a:t>count data</a:t>
-            </a:r>
-            <a:r>
-              <a:rPr/>
-              <a:t>. The Poisson distribution assumes that the variance equals the mean.</a:t>
+              <a:rPr/>
+              <a:t>Does island size category, as a whole, have a statistically significant effect on the number of plant species?</a:t>
             </a:r>
           </a:p>
           <a:p>
             <a:pPr lvl="0"/>
             <a:r>
-              <a:rPr/>
-              <a:t>Use the quarter-mile time (</a:t>
-            </a:r>
-            <a:r>
-              <a:rPr>
-                <a:latin typeface="Courier"/>
-              </a:rPr>
-              <a:t>qsec</a:t>
-            </a:r>
-            <a:r>
-              <a:rPr/>
-              <a:t>) from the </a:t>
-            </a:r>
-            <a:r>
-              <a:rPr>
-                <a:latin typeface="Courier"/>
-              </a:rPr>
-              <a:t>mtcars</a:t>
-            </a:r>
-            <a:r>
-              <a:rPr/>
-              <a:t> dataset, rounded to create a count-like variable.</a:t>
-            </a:r>
-          </a:p>
-          <a:p>
-            <a:pPr lvl="0"/>
-            <a:r>
-              <a:rPr/>
-              <a:t>With the natural log link, coefficients represent </a:t>
-            </a:r>
-            <a:r>
-              <a:rPr b="1"/>
-              <a:t>multiplicative effects</a:t>
-            </a:r>
-            <a:r>
-              <a:rPr/>
-              <a:t>:</a:t>
-            </a:r>
-          </a:p>
-          <a:p>
-            <a:pPr lvl="0"/>
-            <a:r>
-              <a:rPr/>
-              <a:t>A coefficient of β means: for each 1-unit increase in X, the response is multiplied by exp(β)</a:t>
-            </a:r>
-          </a:p>
-          <a:p>
-            <a:pPr lvl="0"/>
-            <a:r>
-              <a:rPr/>
-              <a:t>For small β, exp(β) ≈ 1 + β, so β × 100% gives approximate percentage change</a:t>
-            </a:r>
-          </a:p>
-          <a:p>
-            <a:pPr lvl="0" indent="0">
-              <a:buNone/>
-            </a:pPr>
-            <a:r>
-              <a:rPr>
-                <a:latin typeface="Courier"/>
-              </a:rPr>
-              <a:t>## 
-## Call:
-## glm(formula = Species ~ size_category, family = poisson(link = "log"), 
-##     data = gala)
-## 
-## Coefficients:
-##                     Estimate Std. Error z value Pr(&gt;|z|)    
-## (Intercept)          2.67101    0.07930   33.68   &lt;2e-16 ***
-## size_categoryMedium  1.33784    0.08833   15.15   &lt;2e-16 ***
-## size_categoryLarge   2.84300    0.08285   34.31   &lt;2e-16 ***
-## ---
-## Signif. codes:  0 '***' 0.001 '**' 0.01 '*' 0.05 '.' 0.1 ' ' 1
-## 
-## (Dispersion parameter for poisson family taken to be 1)
-## 
-##     Null deviance: 3510.73  on 29  degrees of freedom
-## Residual deviance:  939.74  on 27  degrees of freedom
-## AIC: 1106.6
-## 
-## Number of Fisher Scoring iterations: 5</a:t>
+              <a:rPr>
+                <a:latin typeface="Courier"/>
+              </a:rPr>
+              <a:t>test = "LR"</a:t>
+            </a:r>
+            <a:r>
+              <a:rPr/>
+              <a:t>: important part!</a:t>
+            </a:r>
+          </a:p>
+          <a:p>
+            <a:pPr lvl="1"/>
+            <a:r>
+              <a:rPr/>
+              <a:t>normal ANOVA (with a Gaussian/normal distribution) test is an F-test.</a:t>
+            </a:r>
+          </a:p>
+          <a:p>
+            <a:pPr lvl="1"/>
+            <a:r>
+              <a:rPr/>
+              <a:t>GLM (like Poisson) can’t use F-test in the same way</a:t>
+            </a:r>
+          </a:p>
+          <a:p>
+            <a:pPr lvl="2"/>
+            <a:r>
+              <a:rPr/>
+              <a:t>use a Likelihood Ratio (LR) test</a:t>
+            </a:r>
+          </a:p>
+          <a:p>
+            <a:pPr lvl="2"/>
+            <a:r>
+              <a:rPr/>
+              <a:t>LR test statistically compares fit of full model (the one with size_category) to simpler null model (one without size_category)</a:t>
+            </a:r>
+          </a:p>
+          <a:p>
+            <a:pPr lvl="2"/>
+            <a:r>
+              <a:rPr/>
+              <a:t>LR test tells us if it is significant</a:t>
             </a:r>
           </a:p>
         </p:txBody>
@@ -4573,100 +4899,12 @@
           <a:bodyPr/>
           <a:lstStyle/>
           <a:p>
-            <a:pPr lvl="0"/>
-            <a:r>
-              <a:rPr/>
-              <a:t>Let’s check for overdispersion, which is common in count data:</a:t>
-            </a:r>
-          </a:p>
-          <a:p>
-            <a:pPr lvl="0"/>
-            <a:r>
-              <a:rPr/>
-              <a:t>Should be close to 1 for a well-fitting Poisson model</a:t>
-            </a:r>
-          </a:p>
-          <a:p>
-            <a:pPr lvl="0"/>
-            <a:r>
-              <a:rPr/>
-              <a:t>If &gt; 1.5, may indicate overdispersion</a:t>
-            </a:r>
-          </a:p>
-          <a:p>
-            <a:pPr lvl="1"/>
-            <a:r>
-              <a:rPr b="1"/>
-              <a:t>What is Underdispersion?</a:t>
-            </a:r>
-          </a:p>
-          <a:p>
-            <a:pPr lvl="2"/>
-            <a:r>
-              <a:rPr/>
-              <a:t>In a Poisson model, we expect the variance to equal the mean. The dispersion parameter measures the ratio of observed variance to expected variance:</a:t>
-            </a:r>
-          </a:p>
-          <a:p>
-            <a:pPr lvl="3"/>
-            <a:r>
-              <a:rPr b="1"/>
-              <a:t>Dispersion ≈ 1</a:t>
-            </a:r>
-            <a:r>
-              <a:rPr/>
-              <a:t>: Good fit (variance = mean, as Poisson assumes)</a:t>
-            </a:r>
-          </a:p>
-          <a:p>
-            <a:pPr lvl="3"/>
-            <a:r>
-              <a:rPr b="1"/>
-              <a:t>Dispersion &gt; 1</a:t>
-            </a:r>
-            <a:r>
-              <a:rPr/>
-              <a:t>: Overdispersion (variance &gt; mean)</a:t>
-            </a:r>
-          </a:p>
-          <a:p>
-            <a:pPr lvl="3"/>
-            <a:r>
-              <a:rPr b="1"/>
-              <a:t>Dispersion &lt; 1</a:t>
-            </a:r>
-            <a:r>
-              <a:rPr/>
-              <a:t>: </a:t>
-            </a:r>
-            <a:r>
-              <a:rPr b="1"/>
-              <a:t>Underdispersion</a:t>
-            </a:r>
-            <a:r>
-              <a:rPr/>
-              <a:t> (variance &lt; mean)</a:t>
-            </a:r>
-          </a:p>
-          <a:p>
-            <a:pPr lvl="1"/>
-            <a:r>
-              <a:rPr/>
-              <a:t>a dispersion parameter this large is a warning</a:t>
-            </a:r>
-          </a:p>
-          <a:p>
-            <a:pPr lvl="1"/>
-            <a:r>
-              <a:rPr/>
-              <a:t>our data more variable than a Poisson model expects</a:t>
-            </a:r>
-          </a:p>
-          <a:p>
-            <a:pPr lvl="1"/>
-            <a:r>
-              <a:rPr/>
-              <a:t>use a Negative Binomial model</a:t>
+            <a:pPr lvl="0" indent="0" marL="0">
+              <a:buNone/>
+            </a:pPr>
+            <a:r>
+              <a:rPr/>
+              <a:t>Test overall effect of size_category</a:t>
             </a:r>
           </a:p>
           <a:p>
@@ -4676,306 +4914,162 @@
             <a:r>
               <a:rPr>
                 <a:solidFill>
+                  <a:srgbClr val="4758AB"/>
+                </a:solidFill>
+                <a:latin typeface="Courier"/>
+              </a:rPr>
+              <a:t>Anova</a:t>
+            </a:r>
+            <a:r>
+              <a:rPr>
+                <a:solidFill>
+                  <a:srgbClr val="003B4F"/>
+                </a:solidFill>
+                <a:latin typeface="Courier"/>
+              </a:rPr>
+              <a:t>(model_poisson_gala, </a:t>
+            </a:r>
+            <a:r>
+              <a:rPr>
+                <a:solidFill>
+                  <a:srgbClr val="657422"/>
+                </a:solidFill>
+                <a:latin typeface="Courier"/>
+              </a:rPr>
+              <a:t>type =</a:t>
+            </a:r>
+            <a:r>
+              <a:rPr>
+                <a:solidFill>
+                  <a:srgbClr val="003B4F"/>
+                </a:solidFill>
+                <a:latin typeface="Courier"/>
+              </a:rPr>
+              <a:t> </a:t>
+            </a:r>
+            <a:r>
+              <a:rPr>
+                <a:solidFill>
+                  <a:srgbClr val="20794D"/>
+                </a:solidFill>
+                <a:latin typeface="Courier"/>
+              </a:rPr>
+              <a:t>"III"</a:t>
+            </a:r>
+            <a:r>
+              <a:rPr>
+                <a:solidFill>
+                  <a:srgbClr val="003B4F"/>
+                </a:solidFill>
+                <a:latin typeface="Courier"/>
+              </a:rPr>
+              <a:t>, </a:t>
+            </a:r>
+            <a:r>
+              <a:rPr>
+                <a:solidFill>
+                  <a:srgbClr val="657422"/>
+                </a:solidFill>
+                <a:latin typeface="Courier"/>
+              </a:rPr>
+              <a:t>test =</a:t>
+            </a:r>
+            <a:r>
+              <a:rPr>
+                <a:solidFill>
+                  <a:srgbClr val="003B4F"/>
+                </a:solidFill>
+                <a:latin typeface="Courier"/>
+              </a:rPr>
+              <a:t> </a:t>
+            </a:r>
+            <a:r>
+              <a:rPr>
+                <a:solidFill>
+                  <a:srgbClr val="20794D"/>
+                </a:solidFill>
+                <a:latin typeface="Courier"/>
+              </a:rPr>
+              <a:t>"LR"</a:t>
+            </a:r>
+            <a:r>
+              <a:rPr>
+                <a:solidFill>
+                  <a:srgbClr val="003B4F"/>
+                </a:solidFill>
+                <a:latin typeface="Courier"/>
+              </a:rPr>
+              <a:t>)</a:t>
+            </a:r>
+            <a:br/>
+            <a:r>
+              <a:rPr i="1">
+                <a:solidFill>
                   <a:srgbClr val="5E5E5E"/>
                 </a:solidFill>
                 <a:latin typeface="Courier"/>
               </a:rPr>
-              <a:t># Calculate the dispersion parameter</a:t>
+              <a:t>## Analysis of Deviance Table (Type III tests)</a:t>
             </a:r>
             <a:br/>
             <a:r>
-              <a:rPr>
+              <a:rPr i="1">
                 <a:solidFill>
                   <a:srgbClr val="5E5E5E"/>
                 </a:solidFill>
                 <a:latin typeface="Courier"/>
               </a:rPr>
-              <a:t># (Pearson's Chi-Squared statistic / residual degrees of freedom)</a:t>
+              <a:t>## </a:t>
             </a:r>
             <a:br/>
             <a:r>
-              <a:rPr>
-                <a:solidFill>
-                  <a:srgbClr val="003B4F"/>
-                </a:solidFill>
-                <a:latin typeface="Courier"/>
-              </a:rPr>
-              <a:t>dispersion_gala &lt;- </a:t>
-            </a:r>
-            <a:r>
-              <a:rPr>
-                <a:solidFill>
-                  <a:srgbClr val="4758AB"/>
-                </a:solidFill>
-                <a:latin typeface="Courier"/>
-              </a:rPr>
-              <a:t>sum</a:t>
-            </a:r>
-            <a:r>
-              <a:rPr>
-                <a:solidFill>
-                  <a:srgbClr val="003B4F"/>
-                </a:solidFill>
-                <a:latin typeface="Courier"/>
-              </a:rPr>
-              <a:t>(</a:t>
-            </a:r>
-            <a:r>
-              <a:rPr>
-                <a:solidFill>
-                  <a:srgbClr val="4758AB"/>
-                </a:solidFill>
-                <a:latin typeface="Courier"/>
-              </a:rPr>
-              <a:t>residuals</a:t>
-            </a:r>
-            <a:r>
-              <a:rPr>
-                <a:solidFill>
-                  <a:srgbClr val="003B4F"/>
-                </a:solidFill>
-                <a:latin typeface="Courier"/>
-              </a:rPr>
-              <a:t>(model_poisson_gala, </a:t>
-            </a:r>
-            <a:r>
-              <a:rPr>
-                <a:solidFill>
-                  <a:srgbClr val="657422"/>
-                </a:solidFill>
-                <a:latin typeface="Courier"/>
-              </a:rPr>
-              <a:t>type =</a:t>
-            </a:r>
-            <a:r>
-              <a:rPr>
-                <a:solidFill>
-                  <a:srgbClr val="003B4F"/>
-                </a:solidFill>
-                <a:latin typeface="Courier"/>
-              </a:rPr>
-              <a:t> </a:t>
-            </a:r>
-            <a:r>
-              <a:rPr>
-                <a:solidFill>
-                  <a:srgbClr val="20794D"/>
-                </a:solidFill>
-                <a:latin typeface="Courier"/>
-              </a:rPr>
-              <a:t>"pearson"</a:t>
-            </a:r>
-            <a:r>
-              <a:rPr>
-                <a:solidFill>
-                  <a:srgbClr val="003B4F"/>
-                </a:solidFill>
-                <a:latin typeface="Courier"/>
-              </a:rPr>
-              <a:t>)</a:t>
-            </a:r>
-            <a:r>
-              <a:rPr>
+              <a:rPr i="1">
                 <a:solidFill>
                   <a:srgbClr val="5E5E5E"/>
                 </a:solidFill>
                 <a:latin typeface="Courier"/>
               </a:rPr>
-              <a:t>^</a:t>
-            </a:r>
-            <a:r>
-              <a:rPr>
-                <a:solidFill>
-                  <a:srgbClr val="AD0000"/>
-                </a:solidFill>
-                <a:latin typeface="Courier"/>
-              </a:rPr>
-              <a:t>2</a:t>
-            </a:r>
-            <a:r>
-              <a:rPr>
-                <a:solidFill>
-                  <a:srgbClr val="003B4F"/>
-                </a:solidFill>
-                <a:latin typeface="Courier"/>
-              </a:rPr>
-              <a:t>) </a:t>
-            </a:r>
-            <a:r>
-              <a:rPr>
+              <a:t>## Response: Species</a:t>
+            </a:r>
+            <a:br/>
+            <a:r>
+              <a:rPr i="1">
                 <a:solidFill>
                   <a:srgbClr val="5E5E5E"/>
                 </a:solidFill>
                 <a:latin typeface="Courier"/>
               </a:rPr>
-              <a:t>/</a:t>
-            </a:r>
-            <a:r>
-              <a:rPr>
-                <a:solidFill>
-                  <a:srgbClr val="003B4F"/>
-                </a:solidFill>
-                <a:latin typeface="Courier"/>
-              </a:rPr>
-              <a:t> </a:t>
+              <a:t>##               LR Chisq Df Pr(&gt;Chisq)    </a:t>
             </a:r>
             <a:br/>
             <a:r>
-              <a:rPr>
-                <a:solidFill>
-                  <a:srgbClr val="003B4F"/>
-                </a:solidFill>
-                <a:latin typeface="Courier"/>
-              </a:rPr>
-              <a:t>                   model_poisson_gala</a:t>
-            </a:r>
-            <a:r>
-              <a:rPr>
+              <a:rPr i="1">
                 <a:solidFill>
                   <a:srgbClr val="5E5E5E"/>
                 </a:solidFill>
                 <a:latin typeface="Courier"/>
               </a:rPr>
-              <a:t>$</a:t>
-            </a:r>
-            <a:r>
-              <a:rPr>
-                <a:solidFill>
-                  <a:srgbClr val="003B4F"/>
-                </a:solidFill>
-                <a:latin typeface="Courier"/>
-              </a:rPr>
-              <a:t>df.residual</a:t>
+              <a:t>## size_category     2571  2  &lt; 2.2e-16 ***</a:t>
             </a:r>
             <a:br/>
+            <a:r>
+              <a:rPr i="1">
+                <a:solidFill>
+                  <a:srgbClr val="5E5E5E"/>
+                </a:solidFill>
+                <a:latin typeface="Courier"/>
+              </a:rPr>
+              <a:t>## ---</a:t>
+            </a:r>
             <a:br/>
             <a:r>
-              <a:rPr>
+              <a:rPr i="1">
                 <a:solidFill>
                   <a:srgbClr val="5E5E5E"/>
                 </a:solidFill>
                 <a:latin typeface="Courier"/>
               </a:rPr>
-              <a:t># Print dispersion parameter</a:t>
-            </a:r>
-            <a:br/>
-            <a:r>
-              <a:rPr>
-                <a:solidFill>
-                  <a:srgbClr val="4758AB"/>
-                </a:solidFill>
-                <a:latin typeface="Courier"/>
-              </a:rPr>
-              <a:t>cat</a:t>
-            </a:r>
-            <a:r>
-              <a:rPr>
-                <a:solidFill>
-                  <a:srgbClr val="003B4F"/>
-                </a:solidFill>
-                <a:latin typeface="Courier"/>
-              </a:rPr>
-              <a:t>(</a:t>
-            </a:r>
-            <a:r>
-              <a:rPr>
-                <a:solidFill>
-                  <a:srgbClr val="20794D"/>
-                </a:solidFill>
-                <a:latin typeface="Courier"/>
-              </a:rPr>
-              <a:t>"Dispersion parameter:"</a:t>
-            </a:r>
-            <a:r>
-              <a:rPr>
-                <a:solidFill>
-                  <a:srgbClr val="003B4F"/>
-                </a:solidFill>
-                <a:latin typeface="Courier"/>
-              </a:rPr>
-              <a:t>, </a:t>
-            </a:r>
-            <a:r>
-              <a:rPr>
-                <a:solidFill>
-                  <a:srgbClr val="4758AB"/>
-                </a:solidFill>
-                <a:latin typeface="Courier"/>
-              </a:rPr>
-              <a:t>round</a:t>
-            </a:r>
-            <a:r>
-              <a:rPr>
-                <a:solidFill>
-                  <a:srgbClr val="003B4F"/>
-                </a:solidFill>
-                <a:latin typeface="Courier"/>
-              </a:rPr>
-              <a:t>(dispersion_gala, </a:t>
-            </a:r>
-            <a:r>
-              <a:rPr>
-                <a:solidFill>
-                  <a:srgbClr val="AD0000"/>
-                </a:solidFill>
-                <a:latin typeface="Courier"/>
-              </a:rPr>
-              <a:t>2</a:t>
-            </a:r>
-            <a:r>
-              <a:rPr>
-                <a:solidFill>
-                  <a:srgbClr val="003B4F"/>
-                </a:solidFill>
-                <a:latin typeface="Courier"/>
-              </a:rPr>
-              <a:t>), </a:t>
-            </a:r>
-            <a:r>
-              <a:rPr>
-                <a:solidFill>
-                  <a:srgbClr val="20794D"/>
-                </a:solidFill>
-                <a:latin typeface="Courier"/>
-              </a:rPr>
-              <a:t>"</a:t>
-            </a:r>
-            <a:r>
-              <a:rPr>
-                <a:solidFill>
-                  <a:srgbClr val="5E5E5E"/>
-                </a:solidFill>
-                <a:latin typeface="Courier"/>
-              </a:rPr>
-              <a:t>\n</a:t>
-            </a:r>
-            <a:r>
-              <a:rPr>
-                <a:solidFill>
-                  <a:srgbClr val="20794D"/>
-                </a:solidFill>
-                <a:latin typeface="Courier"/>
-              </a:rPr>
-              <a:t>"</a:t>
-            </a:r>
-            <a:r>
-              <a:rPr>
-                <a:solidFill>
-                  <a:srgbClr val="003B4F"/>
-                </a:solidFill>
-                <a:latin typeface="Courier"/>
-              </a:rPr>
-              <a:t>)</a:t>
-            </a:r>
-            <a:br/>
-            <a:r>
-              <a:rPr i="1">
-                <a:solidFill>
-                  <a:srgbClr val="5E5E5E"/>
-                </a:solidFill>
-                <a:latin typeface="Courier"/>
-              </a:rPr>
-              <a:t>## Dispersion parameter: 32.9</a:t>
+              <a:t>## Signif. codes:  0 '***' 0.001 '**' 0.01 '*' 0.05 '.' 0.1 ' ' 1</a:t>
             </a:r>
           </a:p>
         </p:txBody>
@@ -5050,6 +5144,606 @@
           <a:bodyPr/>
           <a:lstStyle/>
           <a:p>
+            <a:pPr lvl="0" indent="0" marL="0">
+              <a:buNone/>
+            </a:pPr>
+            <a:r>
+              <a:rPr b="1"/>
+              <a:t>Poisson GLMs</a:t>
+            </a:r>
+            <a:r>
+              <a:rPr/>
+              <a:t> are appropriate for </a:t>
+            </a:r>
+            <a:r>
+              <a:rPr b="1"/>
+              <a:t>count data</a:t>
+            </a:r>
+            <a:r>
+              <a:rPr/>
+              <a:t>. The Poisson distribution assumes that the variance equals the mean.</a:t>
+            </a:r>
+          </a:p>
+          <a:p>
+            <a:pPr lvl="0"/>
+            <a:r>
+              <a:rPr/>
+              <a:t>Use the quarter-mile time (</a:t>
+            </a:r>
+            <a:r>
+              <a:rPr>
+                <a:latin typeface="Courier"/>
+              </a:rPr>
+              <a:t>qsec</a:t>
+            </a:r>
+            <a:r>
+              <a:rPr/>
+              <a:t>) from the </a:t>
+            </a:r>
+            <a:r>
+              <a:rPr>
+                <a:latin typeface="Courier"/>
+              </a:rPr>
+              <a:t>mtcars</a:t>
+            </a:r>
+            <a:r>
+              <a:rPr/>
+              <a:t> dataset, rounded to create a count-like variable.</a:t>
+            </a:r>
+          </a:p>
+          <a:p>
+            <a:pPr lvl="0"/>
+            <a:r>
+              <a:rPr/>
+              <a:t>With the natural log link, coefficients represent </a:t>
+            </a:r>
+            <a:r>
+              <a:rPr b="1"/>
+              <a:t>multiplicative effects</a:t>
+            </a:r>
+            <a:r>
+              <a:rPr/>
+              <a:t>:</a:t>
+            </a:r>
+          </a:p>
+          <a:p>
+            <a:pPr lvl="0"/>
+            <a:r>
+              <a:rPr/>
+              <a:t>A coefficient of β means: for each 1-unit increase in X, the response is multiplied by exp(β)</a:t>
+            </a:r>
+          </a:p>
+          <a:p>
+            <a:pPr lvl="0"/>
+            <a:r>
+              <a:rPr/>
+              <a:t>For small β, exp(β) ≈ 1 + β, so β × 100% gives approximate percentage change</a:t>
+            </a:r>
+          </a:p>
+          <a:p>
+            <a:pPr lvl="0" indent="0">
+              <a:buNone/>
+            </a:pPr>
+            <a:r>
+              <a:rPr>
+                <a:latin typeface="Courier"/>
+              </a:rPr>
+              <a:t>## 
+## Call:
+## glm(formula = Species ~ size_category, family = poisson(link = "log"), 
+##     data = gala)
+## 
+## Coefficients:
+##                     Estimate Std. Error z value Pr(&gt;|z|)    
+## (Intercept)          2.67101    0.07930   33.68   &lt;2e-16 ***
+## size_categoryMedium  1.33784    0.08833   15.15   &lt;2e-16 ***
+## size_categoryLarge   2.84300    0.08285   34.31   &lt;2e-16 ***
+## ---
+## Signif. codes:  0 '***' 0.001 '**' 0.01 '*' 0.05 '.' 0.1 ' ' 1
+## 
+## (Dispersion parameter for poisson family taken to be 1)
+## 
+##     Null deviance: 3510.73  on 29  degrees of freedom
+## Residual deviance:  939.74  on 27  degrees of freedom
+## AIC: 1106.6
+## 
+## Number of Fisher Scoring iterations: 5</a:t>
+            </a:r>
+          </a:p>
+        </p:txBody>
+      </p:sp>
+      <p:sp>
+        <p:nvSpPr>
+          <p:cNvPr id="4" name="Content Placeholder 3"/>
+          <p:cNvSpPr>
+            <a:spLocks noGrp="1"/>
+          </p:cNvSpPr>
+          <p:nvPr>
+            <p:ph idx="2" sz="half"/>
+          </p:nvPr>
+        </p:nvSpPr>
+        <p:spPr/>
+        <p:txBody>
+          <a:bodyPr/>
+          <a:lstStyle/>
+          <a:p>
+            <a:pPr lvl="0"/>
+            <a:r>
+              <a:rPr/>
+              <a:t>Let’s check for overdispersion, which is common in count data:</a:t>
+            </a:r>
+          </a:p>
+          <a:p>
+            <a:pPr lvl="0"/>
+            <a:r>
+              <a:rPr/>
+              <a:t>Should be close to 1 for a well-fitting Poisson model</a:t>
+            </a:r>
+          </a:p>
+          <a:p>
+            <a:pPr lvl="0"/>
+            <a:r>
+              <a:rPr/>
+              <a:t>If &gt; 1.5, may indicate overdispersion</a:t>
+            </a:r>
+          </a:p>
+          <a:p>
+            <a:pPr lvl="1"/>
+            <a:r>
+              <a:rPr b="1"/>
+              <a:t>What is Underdispersion?</a:t>
+            </a:r>
+          </a:p>
+          <a:p>
+            <a:pPr lvl="2"/>
+            <a:r>
+              <a:rPr/>
+              <a:t>In a Poisson model, we expect the variance to equal the mean. The dispersion parameter measures the ratio of observed variance to expected variance:</a:t>
+            </a:r>
+          </a:p>
+          <a:p>
+            <a:pPr lvl="3"/>
+            <a:r>
+              <a:rPr b="1"/>
+              <a:t>Dispersion ≈ 1</a:t>
+            </a:r>
+            <a:r>
+              <a:rPr/>
+              <a:t>: Good fit (variance = mean, as Poisson assumes)</a:t>
+            </a:r>
+          </a:p>
+          <a:p>
+            <a:pPr lvl="3"/>
+            <a:r>
+              <a:rPr b="1"/>
+              <a:t>Dispersion &gt; 1</a:t>
+            </a:r>
+            <a:r>
+              <a:rPr/>
+              <a:t>: Overdispersion (variance &gt; mean)</a:t>
+            </a:r>
+          </a:p>
+          <a:p>
+            <a:pPr lvl="3"/>
+            <a:r>
+              <a:rPr b="1"/>
+              <a:t>Dispersion &lt; 1</a:t>
+            </a:r>
+            <a:r>
+              <a:rPr/>
+              <a:t>: </a:t>
+            </a:r>
+            <a:r>
+              <a:rPr b="1"/>
+              <a:t>Underdispersion</a:t>
+            </a:r>
+            <a:r>
+              <a:rPr/>
+              <a:t> (variance &lt; mean)</a:t>
+            </a:r>
+          </a:p>
+          <a:p>
+            <a:pPr lvl="1"/>
+            <a:r>
+              <a:rPr/>
+              <a:t>a dispersion parameter this large is a warning</a:t>
+            </a:r>
+          </a:p>
+          <a:p>
+            <a:pPr lvl="1"/>
+            <a:r>
+              <a:rPr/>
+              <a:t>our data more variable than a Poisson model expects</a:t>
+            </a:r>
+          </a:p>
+          <a:p>
+            <a:pPr lvl="1"/>
+            <a:r>
+              <a:rPr/>
+              <a:t>use a Negative Binomial model</a:t>
+            </a:r>
+          </a:p>
+          <a:p>
+            <a:pPr lvl="0" indent="0">
+              <a:buNone/>
+            </a:pPr>
+            <a:r>
+              <a:rPr>
+                <a:solidFill>
+                  <a:srgbClr val="5E5E5E"/>
+                </a:solidFill>
+                <a:latin typeface="Courier"/>
+              </a:rPr>
+              <a:t># Calculate the dispersion parameter</a:t>
+            </a:r>
+            <a:br/>
+            <a:r>
+              <a:rPr>
+                <a:solidFill>
+                  <a:srgbClr val="5E5E5E"/>
+                </a:solidFill>
+                <a:latin typeface="Courier"/>
+              </a:rPr>
+              <a:t># (Pearson's Chi-Squared statistic / residual degrees of freedom)</a:t>
+            </a:r>
+            <a:br/>
+            <a:r>
+              <a:rPr>
+                <a:solidFill>
+                  <a:srgbClr val="003B4F"/>
+                </a:solidFill>
+                <a:latin typeface="Courier"/>
+              </a:rPr>
+              <a:t>dispersion_gala &lt;- </a:t>
+            </a:r>
+            <a:r>
+              <a:rPr>
+                <a:solidFill>
+                  <a:srgbClr val="4758AB"/>
+                </a:solidFill>
+                <a:latin typeface="Courier"/>
+              </a:rPr>
+              <a:t>sum</a:t>
+            </a:r>
+            <a:r>
+              <a:rPr>
+                <a:solidFill>
+                  <a:srgbClr val="003B4F"/>
+                </a:solidFill>
+                <a:latin typeface="Courier"/>
+              </a:rPr>
+              <a:t>(</a:t>
+            </a:r>
+            <a:r>
+              <a:rPr>
+                <a:solidFill>
+                  <a:srgbClr val="4758AB"/>
+                </a:solidFill>
+                <a:latin typeface="Courier"/>
+              </a:rPr>
+              <a:t>residuals</a:t>
+            </a:r>
+            <a:r>
+              <a:rPr>
+                <a:solidFill>
+                  <a:srgbClr val="003B4F"/>
+                </a:solidFill>
+                <a:latin typeface="Courier"/>
+              </a:rPr>
+              <a:t>(model_poisson_gala, </a:t>
+            </a:r>
+            <a:r>
+              <a:rPr>
+                <a:solidFill>
+                  <a:srgbClr val="657422"/>
+                </a:solidFill>
+                <a:latin typeface="Courier"/>
+              </a:rPr>
+              <a:t>type =</a:t>
+            </a:r>
+            <a:r>
+              <a:rPr>
+                <a:solidFill>
+                  <a:srgbClr val="003B4F"/>
+                </a:solidFill>
+                <a:latin typeface="Courier"/>
+              </a:rPr>
+              <a:t> </a:t>
+            </a:r>
+            <a:r>
+              <a:rPr>
+                <a:solidFill>
+                  <a:srgbClr val="20794D"/>
+                </a:solidFill>
+                <a:latin typeface="Courier"/>
+              </a:rPr>
+              <a:t>"pearson"</a:t>
+            </a:r>
+            <a:r>
+              <a:rPr>
+                <a:solidFill>
+                  <a:srgbClr val="003B4F"/>
+                </a:solidFill>
+                <a:latin typeface="Courier"/>
+              </a:rPr>
+              <a:t>)</a:t>
+            </a:r>
+            <a:r>
+              <a:rPr>
+                <a:solidFill>
+                  <a:srgbClr val="5E5E5E"/>
+                </a:solidFill>
+                <a:latin typeface="Courier"/>
+              </a:rPr>
+              <a:t>^</a:t>
+            </a:r>
+            <a:r>
+              <a:rPr>
+                <a:solidFill>
+                  <a:srgbClr val="AD0000"/>
+                </a:solidFill>
+                <a:latin typeface="Courier"/>
+              </a:rPr>
+              <a:t>2</a:t>
+            </a:r>
+            <a:r>
+              <a:rPr>
+                <a:solidFill>
+                  <a:srgbClr val="003B4F"/>
+                </a:solidFill>
+                <a:latin typeface="Courier"/>
+              </a:rPr>
+              <a:t>) </a:t>
+            </a:r>
+            <a:r>
+              <a:rPr>
+                <a:solidFill>
+                  <a:srgbClr val="5E5E5E"/>
+                </a:solidFill>
+                <a:latin typeface="Courier"/>
+              </a:rPr>
+              <a:t>/</a:t>
+            </a:r>
+            <a:r>
+              <a:rPr>
+                <a:solidFill>
+                  <a:srgbClr val="003B4F"/>
+                </a:solidFill>
+                <a:latin typeface="Courier"/>
+              </a:rPr>
+              <a:t> </a:t>
+            </a:r>
+            <a:br/>
+            <a:r>
+              <a:rPr>
+                <a:solidFill>
+                  <a:srgbClr val="003B4F"/>
+                </a:solidFill>
+                <a:latin typeface="Courier"/>
+              </a:rPr>
+              <a:t>                   model_poisson_gala</a:t>
+            </a:r>
+            <a:r>
+              <a:rPr>
+                <a:solidFill>
+                  <a:srgbClr val="5E5E5E"/>
+                </a:solidFill>
+                <a:latin typeface="Courier"/>
+              </a:rPr>
+              <a:t>$</a:t>
+            </a:r>
+            <a:r>
+              <a:rPr>
+                <a:solidFill>
+                  <a:srgbClr val="003B4F"/>
+                </a:solidFill>
+                <a:latin typeface="Courier"/>
+              </a:rPr>
+              <a:t>df.residual</a:t>
+            </a:r>
+            <a:br/>
+            <a:br/>
+            <a:r>
+              <a:rPr>
+                <a:solidFill>
+                  <a:srgbClr val="5E5E5E"/>
+                </a:solidFill>
+                <a:latin typeface="Courier"/>
+              </a:rPr>
+              <a:t># Print dispersion parameter</a:t>
+            </a:r>
+            <a:br/>
+            <a:r>
+              <a:rPr>
+                <a:solidFill>
+                  <a:srgbClr val="4758AB"/>
+                </a:solidFill>
+                <a:latin typeface="Courier"/>
+              </a:rPr>
+              <a:t>cat</a:t>
+            </a:r>
+            <a:r>
+              <a:rPr>
+                <a:solidFill>
+                  <a:srgbClr val="003B4F"/>
+                </a:solidFill>
+                <a:latin typeface="Courier"/>
+              </a:rPr>
+              <a:t>(</a:t>
+            </a:r>
+            <a:r>
+              <a:rPr>
+                <a:solidFill>
+                  <a:srgbClr val="20794D"/>
+                </a:solidFill>
+                <a:latin typeface="Courier"/>
+              </a:rPr>
+              <a:t>"Dispersion parameter:"</a:t>
+            </a:r>
+            <a:r>
+              <a:rPr>
+                <a:solidFill>
+                  <a:srgbClr val="003B4F"/>
+                </a:solidFill>
+                <a:latin typeface="Courier"/>
+              </a:rPr>
+              <a:t>, </a:t>
+            </a:r>
+            <a:r>
+              <a:rPr>
+                <a:solidFill>
+                  <a:srgbClr val="4758AB"/>
+                </a:solidFill>
+                <a:latin typeface="Courier"/>
+              </a:rPr>
+              <a:t>round</a:t>
+            </a:r>
+            <a:r>
+              <a:rPr>
+                <a:solidFill>
+                  <a:srgbClr val="003B4F"/>
+                </a:solidFill>
+                <a:latin typeface="Courier"/>
+              </a:rPr>
+              <a:t>(dispersion_gala, </a:t>
+            </a:r>
+            <a:r>
+              <a:rPr>
+                <a:solidFill>
+                  <a:srgbClr val="AD0000"/>
+                </a:solidFill>
+                <a:latin typeface="Courier"/>
+              </a:rPr>
+              <a:t>2</a:t>
+            </a:r>
+            <a:r>
+              <a:rPr>
+                <a:solidFill>
+                  <a:srgbClr val="003B4F"/>
+                </a:solidFill>
+                <a:latin typeface="Courier"/>
+              </a:rPr>
+              <a:t>), </a:t>
+            </a:r>
+            <a:r>
+              <a:rPr>
+                <a:solidFill>
+                  <a:srgbClr val="20794D"/>
+                </a:solidFill>
+                <a:latin typeface="Courier"/>
+              </a:rPr>
+              <a:t>"</a:t>
+            </a:r>
+            <a:r>
+              <a:rPr>
+                <a:solidFill>
+                  <a:srgbClr val="5E5E5E"/>
+                </a:solidFill>
+                <a:latin typeface="Courier"/>
+              </a:rPr>
+              <a:t>\n</a:t>
+            </a:r>
+            <a:r>
+              <a:rPr>
+                <a:solidFill>
+                  <a:srgbClr val="20794D"/>
+                </a:solidFill>
+                <a:latin typeface="Courier"/>
+              </a:rPr>
+              <a:t>"</a:t>
+            </a:r>
+            <a:r>
+              <a:rPr>
+                <a:solidFill>
+                  <a:srgbClr val="003B4F"/>
+                </a:solidFill>
+                <a:latin typeface="Courier"/>
+              </a:rPr>
+              <a:t>)</a:t>
+            </a:r>
+            <a:br/>
+            <a:r>
+              <a:rPr i="1">
+                <a:solidFill>
+                  <a:srgbClr val="5E5E5E"/>
+                </a:solidFill>
+                <a:latin typeface="Courier"/>
+              </a:rPr>
+              <a:t>## Dispersion parameter: 32.9</a:t>
+            </a:r>
+          </a:p>
+        </p:txBody>
+      </p:sp>
+    </p:spTree>
+  </p:cSld>
+</p:sld>
+</file>
+
+<file path=ppt/slides/slide15.xml><?xml version="1.0" encoding="utf-8"?>
+<p:sld xmlns:a="http://schemas.openxmlformats.org/drawingml/2006/main" xmlns:r="http://schemas.openxmlformats.org/officeDocument/2006/relationships" xmlns:p="http://schemas.openxmlformats.org/presentationml/2006/main">
+  <p:cSld>
+    <p:spTree>
+      <p:nvGrpSpPr>
+        <p:cNvPr id="1" name=""/>
+        <p:cNvGrpSpPr/>
+        <p:nvPr/>
+      </p:nvGrpSpPr>
+      <p:grpSpPr>
+        <a:xfrm>
+          <a:off x="0" y="0"/>
+          <a:ext cx="0" cy="0"/>
+          <a:chOff x="0" y="0"/>
+          <a:chExt cx="0" cy="0"/>
+        </a:xfrm>
+      </p:grpSpPr>
+      <p:sp>
+        <p:nvSpPr>
+          <p:cNvPr id="2" name="Title 1"/>
+          <p:cNvSpPr>
+            <a:spLocks noGrp="1"/>
+          </p:cNvSpPr>
+          <p:nvPr>
+            <p:ph type="title"/>
+          </p:nvPr>
+        </p:nvSpPr>
+        <p:spPr>
+          <a:xfrm>
+            <a:off x="0" y="0"/>
+            <a:ext cx="9144000" cy="602780"/>
+          </a:xfrm>
+          <a:solidFill>
+            <a:srgbClr val="70121D"/>
+          </a:solidFill>
+        </p:spPr>
+        <p:txBody>
+          <a:bodyPr/>
+          <a:lstStyle/>
+          <a:p>
+            <a:pPr lvl="0" indent="0" marL="0">
+              <a:buNone/>
+            </a:pPr>
+            <a:r>
+              <a:rPr/>
+              <a:t>GLM with Poisson Distribution: Setup</a:t>
+            </a:r>
+          </a:p>
+        </p:txBody>
+      </p:sp>
+      <p:sp>
+        <p:nvSpPr>
+          <p:cNvPr id="3" name="Content Placeholder 2"/>
+          <p:cNvSpPr>
+            <a:spLocks noGrp="1"/>
+          </p:cNvSpPr>
+          <p:nvPr>
+            <p:ph idx="1" sz="half"/>
+          </p:nvPr>
+        </p:nvSpPr>
+        <p:spPr/>
+        <p:txBody>
+          <a:bodyPr/>
+          <a:lstStyle/>
+          <a:p>
             <a:pPr lvl="0"/>
             <a:r>
               <a:rPr b="1"/>
@@ -5363,7 +6057,7 @@
 </p:sld>
 </file>
 
-<file path=ppt/slides/slide15.xml><?xml version="1.0" encoding="utf-8"?>
+<file path=ppt/slides/slide16.xml><?xml version="1.0" encoding="utf-8"?>
 <p:sld xmlns:a="http://schemas.openxmlformats.org/drawingml/2006/main" xmlns:r="http://schemas.openxmlformats.org/officeDocument/2006/relationships" xmlns:p="http://schemas.openxmlformats.org/presentationml/2006/main">
   <p:cSld>
     <p:spTree>
@@ -5559,7 +6253,7 @@
 </p:sld>
 </file>
 
-<file path=ppt/slides/slide16.xml><?xml version="1.0" encoding="utf-8"?>
+<file path=ppt/slides/slide17.xml><?xml version="1.0" encoding="utf-8"?>
 <p:sld xmlns:a="http://schemas.openxmlformats.org/drawingml/2006/main" xmlns:r="http://schemas.openxmlformats.org/officeDocument/2006/relationships" xmlns:p="http://schemas.openxmlformats.org/presentationml/2006/main">
   <p:cSld>
     <p:spTree>
@@ -5652,9 +6346,9 @@
                 <a:tableStyleId>{5C22544A-7EE6-4342-B048-85BDC9FD1C3A}</a:tableStyleId>
               </a:tblPr>
               <a:tblGrid>
-                <a:gridCol w="1308100"/>
-                <a:gridCol w="1816100"/>
-                <a:gridCol w="2108200"/>
+                <a:gridCol w="1739900"/>
+                <a:gridCol w="1739900"/>
+                <a:gridCol w="1739900"/>
               </a:tblGrid>
               <a:tr h="0">
                 <a:tc>
@@ -5862,7 +6556,7 @@
 </p:sld>
 </file>
 
-<file path=ppt/slides/slide17.xml><?xml version="1.0" encoding="utf-8"?>
+<file path=ppt/slides/slide18.xml><?xml version="1.0" encoding="utf-8"?>
 <p:sld xmlns:a="http://schemas.openxmlformats.org/drawingml/2006/main" xmlns:r="http://schemas.openxmlformats.org/officeDocument/2006/relationships" xmlns:p="http://schemas.openxmlformats.org/presentationml/2006/main">
   <p:cSld>
     <p:spTree>
@@ -5935,7 +6629,7 @@
 </p:sld>
 </file>
 
-<file path=ppt/slides/slide18.xml><?xml version="1.0" encoding="utf-8"?>
+<file path=ppt/slides/slide19.xml><?xml version="1.0" encoding="utf-8"?>
 <p:sld xmlns:a="http://schemas.openxmlformats.org/drawingml/2006/main" xmlns:r="http://schemas.openxmlformats.org/officeDocument/2006/relationships" xmlns:p="http://schemas.openxmlformats.org/presentationml/2006/main">
   <p:cSld>
     <p:spTree>
@@ -6139,1487 +6833,6 @@
           </a:ln>
         </p:spPr>
       </p:pic>
-    </p:spTree>
-  </p:cSld>
-</p:sld>
-</file>
-
-<file path=ppt/slides/slide19.xml><?xml version="1.0" encoding="utf-8"?>
-<p:sld xmlns:a="http://schemas.openxmlformats.org/drawingml/2006/main" xmlns:r="http://schemas.openxmlformats.org/officeDocument/2006/relationships" xmlns:p="http://schemas.openxmlformats.org/presentationml/2006/main">
-  <p:cSld>
-    <p:spTree>
-      <p:nvGrpSpPr>
-        <p:cNvPr id="1" name=""/>
-        <p:cNvGrpSpPr/>
-        <p:nvPr/>
-      </p:nvGrpSpPr>
-      <p:grpSpPr>
-        <a:xfrm>
-          <a:off x="0" y="0"/>
-          <a:ext cx="0" cy="0"/>
-          <a:chOff x="0" y="0"/>
-          <a:chExt cx="0" cy="0"/>
-        </a:xfrm>
-      </p:grpSpPr>
-      <p:sp>
-        <p:nvSpPr>
-          <p:cNvPr id="2" name="Title 1"/>
-          <p:cNvSpPr>
-            <a:spLocks noGrp="1"/>
-          </p:cNvSpPr>
-          <p:nvPr>
-            <p:ph type="title"/>
-          </p:nvPr>
-        </p:nvSpPr>
-        <p:spPr>
-          <a:xfrm>
-            <a:off x="0" y="0"/>
-            <a:ext cx="9144000" cy="582780"/>
-          </a:xfrm>
-        </p:spPr>
-        <p:txBody>
-          <a:bodyPr/>
-          <a:lstStyle/>
-          <a:p>
-            <a:pPr lvl="0" indent="0" marL="0">
-              <a:buNone/>
-            </a:pPr>
-            <a:r>
-              <a:rPr/>
-              <a:t>Example comparison of logged response variable and GLM</a:t>
-            </a:r>
-          </a:p>
-        </p:txBody>
-      </p:sp>
-      <p:sp>
-        <p:nvSpPr>
-          <p:cNvPr id="3" name="Content Placeholder 2"/>
-          <p:cNvSpPr>
-            <a:spLocks noGrp="1"/>
-          </p:cNvSpPr>
-          <p:nvPr>
-            <p:ph idx="1"/>
-          </p:nvPr>
-        </p:nvSpPr>
-        <p:spPr/>
-        <p:txBody>
-          <a:bodyPr/>
-          <a:lstStyle/>
-          <a:p>
-            <a:pPr lvl="0" indent="0" marL="1270000">
-              <a:buNone/>
-            </a:pPr>
-            <a:r>
-              <a:rPr sz="2000" b="1"/>
-              <a:t>Important</a:t>
-            </a:r>
-          </a:p>
-          <a:p>
-            <a:pPr lvl="0" indent="0">
-              <a:buNone/>
-            </a:pPr>
-            <a:r>
-              <a:rPr>
-                <a:solidFill>
-                  <a:srgbClr val="5E5E5E"/>
-                </a:solidFill>
-                <a:latin typeface="Courier"/>
-              </a:rPr>
-              <a:t># Simulate data that students might log-transform</a:t>
-            </a:r>
-            <a:br/>
-            <a:r>
-              <a:rPr>
-                <a:solidFill>
-                  <a:srgbClr val="4758AB"/>
-                </a:solidFill>
-                <a:latin typeface="Courier"/>
-              </a:rPr>
-              <a:t>set.seed</a:t>
-            </a:r>
-            <a:r>
-              <a:rPr>
-                <a:solidFill>
-                  <a:srgbClr val="003B4F"/>
-                </a:solidFill>
-                <a:latin typeface="Courier"/>
-              </a:rPr>
-              <a:t>(</a:t>
-            </a:r>
-            <a:r>
-              <a:rPr>
-                <a:solidFill>
-                  <a:srgbClr val="AD0000"/>
-                </a:solidFill>
-                <a:latin typeface="Courier"/>
-              </a:rPr>
-              <a:t>123</a:t>
-            </a:r>
-            <a:r>
-              <a:rPr>
-                <a:solidFill>
-                  <a:srgbClr val="003B4F"/>
-                </a:solidFill>
-                <a:latin typeface="Courier"/>
-              </a:rPr>
-              <a:t>)</a:t>
-            </a:r>
-            <a:br/>
-            <a:r>
-              <a:rPr>
-                <a:solidFill>
-                  <a:srgbClr val="003B4F"/>
-                </a:solidFill>
-                <a:latin typeface="Courier"/>
-              </a:rPr>
-              <a:t>treatment_data &lt;- </a:t>
-            </a:r>
-            <a:r>
-              <a:rPr>
-                <a:solidFill>
-                  <a:srgbClr val="4758AB"/>
-                </a:solidFill>
-                <a:latin typeface="Courier"/>
-              </a:rPr>
-              <a:t>data.frame</a:t>
-            </a:r>
-            <a:r>
-              <a:rPr>
-                <a:solidFill>
-                  <a:srgbClr val="003B4F"/>
-                </a:solidFill>
-                <a:latin typeface="Courier"/>
-              </a:rPr>
-              <a:t>(</a:t>
-            </a:r>
-            <a:br/>
-            <a:r>
-              <a:rPr>
-                <a:solidFill>
-                  <a:srgbClr val="003B4F"/>
-                </a:solidFill>
-                <a:latin typeface="Courier"/>
-              </a:rPr>
-              <a:t>  </a:t>
-            </a:r>
-            <a:r>
-              <a:rPr>
-                <a:solidFill>
-                  <a:srgbClr val="657422"/>
-                </a:solidFill>
-                <a:latin typeface="Courier"/>
-              </a:rPr>
-              <a:t>treatment =</a:t>
-            </a:r>
-            <a:r>
-              <a:rPr>
-                <a:solidFill>
-                  <a:srgbClr val="003B4F"/>
-                </a:solidFill>
-                <a:latin typeface="Courier"/>
-              </a:rPr>
-              <a:t> </a:t>
-            </a:r>
-            <a:r>
-              <a:rPr>
-                <a:solidFill>
-                  <a:srgbClr val="4758AB"/>
-                </a:solidFill>
-                <a:latin typeface="Courier"/>
-              </a:rPr>
-              <a:t>rep</a:t>
-            </a:r>
-            <a:r>
-              <a:rPr>
-                <a:solidFill>
-                  <a:srgbClr val="003B4F"/>
-                </a:solidFill>
-                <a:latin typeface="Courier"/>
-              </a:rPr>
-              <a:t>(</a:t>
-            </a:r>
-            <a:r>
-              <a:rPr>
-                <a:solidFill>
-                  <a:srgbClr val="4758AB"/>
-                </a:solidFill>
-                <a:latin typeface="Courier"/>
-              </a:rPr>
-              <a:t>c</a:t>
-            </a:r>
-            <a:r>
-              <a:rPr>
-                <a:solidFill>
-                  <a:srgbClr val="003B4F"/>
-                </a:solidFill>
-                <a:latin typeface="Courier"/>
-              </a:rPr>
-              <a:t>(</a:t>
-            </a:r>
-            <a:r>
-              <a:rPr>
-                <a:solidFill>
-                  <a:srgbClr val="20794D"/>
-                </a:solidFill>
-                <a:latin typeface="Courier"/>
-              </a:rPr>
-              <a:t>"Control"</a:t>
-            </a:r>
-            <a:r>
-              <a:rPr>
-                <a:solidFill>
-                  <a:srgbClr val="003B4F"/>
-                </a:solidFill>
-                <a:latin typeface="Courier"/>
-              </a:rPr>
-              <a:t>, </a:t>
-            </a:r>
-            <a:r>
-              <a:rPr>
-                <a:solidFill>
-                  <a:srgbClr val="20794D"/>
-                </a:solidFill>
-                <a:latin typeface="Courier"/>
-              </a:rPr>
-              <a:t>"Low"</a:t>
-            </a:r>
-            <a:r>
-              <a:rPr>
-                <a:solidFill>
-                  <a:srgbClr val="003B4F"/>
-                </a:solidFill>
-                <a:latin typeface="Courier"/>
-              </a:rPr>
-              <a:t>, </a:t>
-            </a:r>
-            <a:r>
-              <a:rPr>
-                <a:solidFill>
-                  <a:srgbClr val="20794D"/>
-                </a:solidFill>
-                <a:latin typeface="Courier"/>
-              </a:rPr>
-              <a:t>"High"</a:t>
-            </a:r>
-            <a:r>
-              <a:rPr>
-                <a:solidFill>
-                  <a:srgbClr val="003B4F"/>
-                </a:solidFill>
-                <a:latin typeface="Courier"/>
-              </a:rPr>
-              <a:t>), </a:t>
-            </a:r>
-            <a:r>
-              <a:rPr>
-                <a:solidFill>
-                  <a:srgbClr val="657422"/>
-                </a:solidFill>
-                <a:latin typeface="Courier"/>
-              </a:rPr>
-              <a:t>each =</a:t>
-            </a:r>
-            <a:r>
-              <a:rPr>
-                <a:solidFill>
-                  <a:srgbClr val="003B4F"/>
-                </a:solidFill>
-                <a:latin typeface="Courier"/>
-              </a:rPr>
-              <a:t> </a:t>
-            </a:r>
-            <a:r>
-              <a:rPr>
-                <a:solidFill>
-                  <a:srgbClr val="AD0000"/>
-                </a:solidFill>
-                <a:latin typeface="Courier"/>
-              </a:rPr>
-              <a:t>20</a:t>
-            </a:r>
-            <a:r>
-              <a:rPr>
-                <a:solidFill>
-                  <a:srgbClr val="003B4F"/>
-                </a:solidFill>
-                <a:latin typeface="Courier"/>
-              </a:rPr>
-              <a:t>),</a:t>
-            </a:r>
-            <a:br/>
-            <a:r>
-              <a:rPr>
-                <a:solidFill>
-                  <a:srgbClr val="003B4F"/>
-                </a:solidFill>
-                <a:latin typeface="Courier"/>
-              </a:rPr>
-              <a:t>  </a:t>
-            </a:r>
-            <a:r>
-              <a:rPr>
-                <a:solidFill>
-                  <a:srgbClr val="657422"/>
-                </a:solidFill>
-                <a:latin typeface="Courier"/>
-              </a:rPr>
-              <a:t>biomass =</a:t>
-            </a:r>
-            <a:r>
-              <a:rPr>
-                <a:solidFill>
-                  <a:srgbClr val="003B4F"/>
-                </a:solidFill>
-                <a:latin typeface="Courier"/>
-              </a:rPr>
-              <a:t> </a:t>
-            </a:r>
-            <a:r>
-              <a:rPr>
-                <a:solidFill>
-                  <a:srgbClr val="4758AB"/>
-                </a:solidFill>
-                <a:latin typeface="Courier"/>
-              </a:rPr>
-              <a:t>c</a:t>
-            </a:r>
-            <a:r>
-              <a:rPr>
-                <a:solidFill>
-                  <a:srgbClr val="003B4F"/>
-                </a:solidFill>
-                <a:latin typeface="Courier"/>
-              </a:rPr>
-              <a:t>(</a:t>
-            </a:r>
-            <a:r>
-              <a:rPr>
-                <a:solidFill>
-                  <a:srgbClr val="4758AB"/>
-                </a:solidFill>
-                <a:latin typeface="Courier"/>
-              </a:rPr>
-              <a:t>rlnorm</a:t>
-            </a:r>
-            <a:r>
-              <a:rPr>
-                <a:solidFill>
-                  <a:srgbClr val="003B4F"/>
-                </a:solidFill>
-                <a:latin typeface="Courier"/>
-              </a:rPr>
-              <a:t>(</a:t>
-            </a:r>
-            <a:r>
-              <a:rPr>
-                <a:solidFill>
-                  <a:srgbClr val="AD0000"/>
-                </a:solidFill>
-                <a:latin typeface="Courier"/>
-              </a:rPr>
-              <a:t>20</a:t>
-            </a:r>
-            <a:r>
-              <a:rPr>
-                <a:solidFill>
-                  <a:srgbClr val="003B4F"/>
-                </a:solidFill>
-                <a:latin typeface="Courier"/>
-              </a:rPr>
-              <a:t>, </a:t>
-            </a:r>
-            <a:r>
-              <a:rPr>
-                <a:solidFill>
-                  <a:srgbClr val="657422"/>
-                </a:solidFill>
-                <a:latin typeface="Courier"/>
-              </a:rPr>
-              <a:t>meanlog =</a:t>
-            </a:r>
-            <a:r>
-              <a:rPr>
-                <a:solidFill>
-                  <a:srgbClr val="003B4F"/>
-                </a:solidFill>
-                <a:latin typeface="Courier"/>
-              </a:rPr>
-              <a:t> </a:t>
-            </a:r>
-            <a:r>
-              <a:rPr>
-                <a:solidFill>
-                  <a:srgbClr val="AD0000"/>
-                </a:solidFill>
-                <a:latin typeface="Courier"/>
-              </a:rPr>
-              <a:t>2</a:t>
-            </a:r>
-            <a:r>
-              <a:rPr>
-                <a:solidFill>
-                  <a:srgbClr val="003B4F"/>
-                </a:solidFill>
-                <a:latin typeface="Courier"/>
-              </a:rPr>
-              <a:t>, </a:t>
-            </a:r>
-            <a:r>
-              <a:rPr>
-                <a:solidFill>
-                  <a:srgbClr val="657422"/>
-                </a:solidFill>
-                <a:latin typeface="Courier"/>
-              </a:rPr>
-              <a:t>sdlog =</a:t>
-            </a:r>
-            <a:r>
-              <a:rPr>
-                <a:solidFill>
-                  <a:srgbClr val="003B4F"/>
-                </a:solidFill>
-                <a:latin typeface="Courier"/>
-              </a:rPr>
-              <a:t> </a:t>
-            </a:r>
-            <a:r>
-              <a:rPr>
-                <a:solidFill>
-                  <a:srgbClr val="AD0000"/>
-                </a:solidFill>
-                <a:latin typeface="Courier"/>
-              </a:rPr>
-              <a:t>0.5</a:t>
-            </a:r>
-            <a:r>
-              <a:rPr>
-                <a:solidFill>
-                  <a:srgbClr val="003B4F"/>
-                </a:solidFill>
-                <a:latin typeface="Courier"/>
-              </a:rPr>
-              <a:t>),</a:t>
-            </a:r>
-            <a:br/>
-            <a:r>
-              <a:rPr>
-                <a:solidFill>
-                  <a:srgbClr val="003B4F"/>
-                </a:solidFill>
-                <a:latin typeface="Courier"/>
-              </a:rPr>
-              <a:t>              </a:t>
-            </a:r>
-            <a:r>
-              <a:rPr>
-                <a:solidFill>
-                  <a:srgbClr val="4758AB"/>
-                </a:solidFill>
-                <a:latin typeface="Courier"/>
-              </a:rPr>
-              <a:t>rlnorm</a:t>
-            </a:r>
-            <a:r>
-              <a:rPr>
-                <a:solidFill>
-                  <a:srgbClr val="003B4F"/>
-                </a:solidFill>
-                <a:latin typeface="Courier"/>
-              </a:rPr>
-              <a:t>(</a:t>
-            </a:r>
-            <a:r>
-              <a:rPr>
-                <a:solidFill>
-                  <a:srgbClr val="AD0000"/>
-                </a:solidFill>
-                <a:latin typeface="Courier"/>
-              </a:rPr>
-              <a:t>20</a:t>
-            </a:r>
-            <a:r>
-              <a:rPr>
-                <a:solidFill>
-                  <a:srgbClr val="003B4F"/>
-                </a:solidFill>
-                <a:latin typeface="Courier"/>
-              </a:rPr>
-              <a:t>, </a:t>
-            </a:r>
-            <a:r>
-              <a:rPr>
-                <a:solidFill>
-                  <a:srgbClr val="657422"/>
-                </a:solidFill>
-                <a:latin typeface="Courier"/>
-              </a:rPr>
-              <a:t>meanlog =</a:t>
-            </a:r>
-            <a:r>
-              <a:rPr>
-                <a:solidFill>
-                  <a:srgbClr val="003B4F"/>
-                </a:solidFill>
-                <a:latin typeface="Courier"/>
-              </a:rPr>
-              <a:t> </a:t>
-            </a:r>
-            <a:r>
-              <a:rPr>
-                <a:solidFill>
-                  <a:srgbClr val="AD0000"/>
-                </a:solidFill>
-                <a:latin typeface="Courier"/>
-              </a:rPr>
-              <a:t>2.5</a:t>
-            </a:r>
-            <a:r>
-              <a:rPr>
-                <a:solidFill>
-                  <a:srgbClr val="003B4F"/>
-                </a:solidFill>
-                <a:latin typeface="Courier"/>
-              </a:rPr>
-              <a:t>, </a:t>
-            </a:r>
-            <a:r>
-              <a:rPr>
-                <a:solidFill>
-                  <a:srgbClr val="657422"/>
-                </a:solidFill>
-                <a:latin typeface="Courier"/>
-              </a:rPr>
-              <a:t>sdlog =</a:t>
-            </a:r>
-            <a:r>
-              <a:rPr>
-                <a:solidFill>
-                  <a:srgbClr val="003B4F"/>
-                </a:solidFill>
-                <a:latin typeface="Courier"/>
-              </a:rPr>
-              <a:t> </a:t>
-            </a:r>
-            <a:r>
-              <a:rPr>
-                <a:solidFill>
-                  <a:srgbClr val="AD0000"/>
-                </a:solidFill>
-                <a:latin typeface="Courier"/>
-              </a:rPr>
-              <a:t>0.5</a:t>
-            </a:r>
-            <a:r>
-              <a:rPr>
-                <a:solidFill>
-                  <a:srgbClr val="003B4F"/>
-                </a:solidFill>
-                <a:latin typeface="Courier"/>
-              </a:rPr>
-              <a:t>),</a:t>
-            </a:r>
-            <a:br/>
-            <a:r>
-              <a:rPr>
-                <a:solidFill>
-                  <a:srgbClr val="003B4F"/>
-                </a:solidFill>
-                <a:latin typeface="Courier"/>
-              </a:rPr>
-              <a:t>              </a:t>
-            </a:r>
-            <a:r>
-              <a:rPr>
-                <a:solidFill>
-                  <a:srgbClr val="4758AB"/>
-                </a:solidFill>
-                <a:latin typeface="Courier"/>
-              </a:rPr>
-              <a:t>rlnorm</a:t>
-            </a:r>
-            <a:r>
-              <a:rPr>
-                <a:solidFill>
-                  <a:srgbClr val="003B4F"/>
-                </a:solidFill>
-                <a:latin typeface="Courier"/>
-              </a:rPr>
-              <a:t>(</a:t>
-            </a:r>
-            <a:r>
-              <a:rPr>
-                <a:solidFill>
-                  <a:srgbClr val="AD0000"/>
-                </a:solidFill>
-                <a:latin typeface="Courier"/>
-              </a:rPr>
-              <a:t>20</a:t>
-            </a:r>
-            <a:r>
-              <a:rPr>
-                <a:solidFill>
-                  <a:srgbClr val="003B4F"/>
-                </a:solidFill>
-                <a:latin typeface="Courier"/>
-              </a:rPr>
-              <a:t>, </a:t>
-            </a:r>
-            <a:r>
-              <a:rPr>
-                <a:solidFill>
-                  <a:srgbClr val="657422"/>
-                </a:solidFill>
-                <a:latin typeface="Courier"/>
-              </a:rPr>
-              <a:t>meanlog =</a:t>
-            </a:r>
-            <a:r>
-              <a:rPr>
-                <a:solidFill>
-                  <a:srgbClr val="003B4F"/>
-                </a:solidFill>
-                <a:latin typeface="Courier"/>
-              </a:rPr>
-              <a:t> </a:t>
-            </a:r>
-            <a:r>
-              <a:rPr>
-                <a:solidFill>
-                  <a:srgbClr val="AD0000"/>
-                </a:solidFill>
-                <a:latin typeface="Courier"/>
-              </a:rPr>
-              <a:t>3</a:t>
-            </a:r>
-            <a:r>
-              <a:rPr>
-                <a:solidFill>
-                  <a:srgbClr val="003B4F"/>
-                </a:solidFill>
-                <a:latin typeface="Courier"/>
-              </a:rPr>
-              <a:t>, </a:t>
-            </a:r>
-            <a:r>
-              <a:rPr>
-                <a:solidFill>
-                  <a:srgbClr val="657422"/>
-                </a:solidFill>
-                <a:latin typeface="Courier"/>
-              </a:rPr>
-              <a:t>sdlog =</a:t>
-            </a:r>
-            <a:r>
-              <a:rPr>
-                <a:solidFill>
-                  <a:srgbClr val="003B4F"/>
-                </a:solidFill>
-                <a:latin typeface="Courier"/>
-              </a:rPr>
-              <a:t> </a:t>
-            </a:r>
-            <a:r>
-              <a:rPr>
-                <a:solidFill>
-                  <a:srgbClr val="AD0000"/>
-                </a:solidFill>
-                <a:latin typeface="Courier"/>
-              </a:rPr>
-              <a:t>0.5</a:t>
-            </a:r>
-            <a:r>
-              <a:rPr>
-                <a:solidFill>
-                  <a:srgbClr val="003B4F"/>
-                </a:solidFill>
-                <a:latin typeface="Courier"/>
-              </a:rPr>
-              <a:t>))</a:t>
-            </a:r>
-            <a:br/>
-            <a:r>
-              <a:rPr>
-                <a:solidFill>
-                  <a:srgbClr val="003B4F"/>
-                </a:solidFill>
-                <a:latin typeface="Courier"/>
-              </a:rPr>
-              <a:t>)</a:t>
-            </a:r>
-            <a:br/>
-            <a:br/>
-            <a:r>
-              <a:rPr>
-                <a:solidFill>
-                  <a:srgbClr val="5E5E5E"/>
-                </a:solidFill>
-                <a:latin typeface="Courier"/>
-              </a:rPr>
-              <a:t># Approach 1: Log transformation + ANOVA</a:t>
-            </a:r>
-            <a:br/>
-            <a:r>
-              <a:rPr>
-                <a:solidFill>
-                  <a:srgbClr val="003B4F"/>
-                </a:solidFill>
-                <a:latin typeface="Courier"/>
-              </a:rPr>
-              <a:t>model_log &lt;- </a:t>
-            </a:r>
-            <a:r>
-              <a:rPr>
-                <a:solidFill>
-                  <a:srgbClr val="4758AB"/>
-                </a:solidFill>
-                <a:latin typeface="Courier"/>
-              </a:rPr>
-              <a:t>lm</a:t>
-            </a:r>
-            <a:r>
-              <a:rPr>
-                <a:solidFill>
-                  <a:srgbClr val="003B4F"/>
-                </a:solidFill>
-                <a:latin typeface="Courier"/>
-              </a:rPr>
-              <a:t>(</a:t>
-            </a:r>
-            <a:r>
-              <a:rPr>
-                <a:solidFill>
-                  <a:srgbClr val="4758AB"/>
-                </a:solidFill>
-                <a:latin typeface="Courier"/>
-              </a:rPr>
-              <a:t>log</a:t>
-            </a:r>
-            <a:r>
-              <a:rPr>
-                <a:solidFill>
-                  <a:srgbClr val="003B4F"/>
-                </a:solidFill>
-                <a:latin typeface="Courier"/>
-              </a:rPr>
-              <a:t>(biomass) </a:t>
-            </a:r>
-            <a:r>
-              <a:rPr>
-                <a:solidFill>
-                  <a:srgbClr val="5E5E5E"/>
-                </a:solidFill>
-                <a:latin typeface="Courier"/>
-              </a:rPr>
-              <a:t>~</a:t>
-            </a:r>
-            <a:r>
-              <a:rPr>
-                <a:solidFill>
-                  <a:srgbClr val="003B4F"/>
-                </a:solidFill>
-                <a:latin typeface="Courier"/>
-              </a:rPr>
-              <a:t> treatment, </a:t>
-            </a:r>
-            <a:r>
-              <a:rPr>
-                <a:solidFill>
-                  <a:srgbClr val="657422"/>
-                </a:solidFill>
-                <a:latin typeface="Courier"/>
-              </a:rPr>
-              <a:t>data =</a:t>
-            </a:r>
-            <a:r>
-              <a:rPr>
-                <a:solidFill>
-                  <a:srgbClr val="003B4F"/>
-                </a:solidFill>
-                <a:latin typeface="Courier"/>
-              </a:rPr>
-              <a:t> treatment_data)</a:t>
-            </a:r>
-            <a:br/>
-            <a:br/>
-            <a:r>
-              <a:rPr>
-                <a:solidFill>
-                  <a:srgbClr val="5E5E5E"/>
-                </a:solidFill>
-                <a:latin typeface="Courier"/>
-              </a:rPr>
-              <a:t># Approach 2: Gamma GLM with log link</a:t>
-            </a:r>
-            <a:br/>
-            <a:r>
-              <a:rPr>
-                <a:solidFill>
-                  <a:srgbClr val="003B4F"/>
-                </a:solidFill>
-                <a:latin typeface="Courier"/>
-              </a:rPr>
-              <a:t>model_glm &lt;- </a:t>
-            </a:r>
-            <a:r>
-              <a:rPr>
-                <a:solidFill>
-                  <a:srgbClr val="4758AB"/>
-                </a:solidFill>
-                <a:latin typeface="Courier"/>
-              </a:rPr>
-              <a:t>glm</a:t>
-            </a:r>
-            <a:r>
-              <a:rPr>
-                <a:solidFill>
-                  <a:srgbClr val="003B4F"/>
-                </a:solidFill>
-                <a:latin typeface="Courier"/>
-              </a:rPr>
-              <a:t>(biomass </a:t>
-            </a:r>
-            <a:r>
-              <a:rPr>
-                <a:solidFill>
-                  <a:srgbClr val="5E5E5E"/>
-                </a:solidFill>
-                <a:latin typeface="Courier"/>
-              </a:rPr>
-              <a:t>~</a:t>
-            </a:r>
-            <a:r>
-              <a:rPr>
-                <a:solidFill>
-                  <a:srgbClr val="003B4F"/>
-                </a:solidFill>
-                <a:latin typeface="Courier"/>
-              </a:rPr>
-              <a:t> treatment, </a:t>
-            </a:r>
-            <a:br/>
-            <a:r>
-              <a:rPr>
-                <a:solidFill>
-                  <a:srgbClr val="003B4F"/>
-                </a:solidFill>
-                <a:latin typeface="Courier"/>
-              </a:rPr>
-              <a:t>                 </a:t>
-            </a:r>
-            <a:r>
-              <a:rPr>
-                <a:solidFill>
-                  <a:srgbClr val="657422"/>
-                </a:solidFill>
-                <a:latin typeface="Courier"/>
-              </a:rPr>
-              <a:t>family =</a:t>
-            </a:r>
-            <a:r>
-              <a:rPr>
-                <a:solidFill>
-                  <a:srgbClr val="003B4F"/>
-                </a:solidFill>
-                <a:latin typeface="Courier"/>
-              </a:rPr>
-              <a:t> </a:t>
-            </a:r>
-            <a:r>
-              <a:rPr>
-                <a:solidFill>
-                  <a:srgbClr val="4758AB"/>
-                </a:solidFill>
-                <a:latin typeface="Courier"/>
-              </a:rPr>
-              <a:t>Gamma</a:t>
-            </a:r>
-            <a:r>
-              <a:rPr>
-                <a:solidFill>
-                  <a:srgbClr val="003B4F"/>
-                </a:solidFill>
-                <a:latin typeface="Courier"/>
-              </a:rPr>
-              <a:t>(</a:t>
-            </a:r>
-            <a:r>
-              <a:rPr>
-                <a:solidFill>
-                  <a:srgbClr val="657422"/>
-                </a:solidFill>
-                <a:latin typeface="Courier"/>
-              </a:rPr>
-              <a:t>link =</a:t>
-            </a:r>
-            <a:r>
-              <a:rPr>
-                <a:solidFill>
-                  <a:srgbClr val="003B4F"/>
-                </a:solidFill>
-                <a:latin typeface="Courier"/>
-              </a:rPr>
-              <a:t> </a:t>
-            </a:r>
-            <a:r>
-              <a:rPr>
-                <a:solidFill>
-                  <a:srgbClr val="20794D"/>
-                </a:solidFill>
-                <a:latin typeface="Courier"/>
-              </a:rPr>
-              <a:t>"log"</a:t>
-            </a:r>
-            <a:r>
-              <a:rPr>
-                <a:solidFill>
-                  <a:srgbClr val="003B4F"/>
-                </a:solidFill>
-                <a:latin typeface="Courier"/>
-              </a:rPr>
-              <a:t>), </a:t>
-            </a:r>
-            <a:br/>
-            <a:r>
-              <a:rPr>
-                <a:solidFill>
-                  <a:srgbClr val="003B4F"/>
-                </a:solidFill>
-                <a:latin typeface="Courier"/>
-              </a:rPr>
-              <a:t>                 </a:t>
-            </a:r>
-            <a:r>
-              <a:rPr>
-                <a:solidFill>
-                  <a:srgbClr val="657422"/>
-                </a:solidFill>
-                <a:latin typeface="Courier"/>
-              </a:rPr>
-              <a:t>data =</a:t>
-            </a:r>
-            <a:r>
-              <a:rPr>
-                <a:solidFill>
-                  <a:srgbClr val="003B4F"/>
-                </a:solidFill>
-                <a:latin typeface="Courier"/>
-              </a:rPr>
-              <a:t> treatment_data)</a:t>
-            </a:r>
-            <a:br/>
-            <a:br/>
-            <a:r>
-              <a:rPr>
-                <a:solidFill>
-                  <a:srgbClr val="5E5E5E"/>
-                </a:solidFill>
-                <a:latin typeface="Courier"/>
-              </a:rPr>
-              <a:t># Compare predictions on original scale</a:t>
-            </a:r>
-            <a:br/>
-            <a:r>
-              <a:rPr>
-                <a:solidFill>
-                  <a:srgbClr val="4758AB"/>
-                </a:solidFill>
-                <a:latin typeface="Courier"/>
-              </a:rPr>
-              <a:t>cat</a:t>
-            </a:r>
-            <a:r>
-              <a:rPr>
-                <a:solidFill>
-                  <a:srgbClr val="003B4F"/>
-                </a:solidFill>
-                <a:latin typeface="Courier"/>
-              </a:rPr>
-              <a:t>(</a:t>
-            </a:r>
-            <a:r>
-              <a:rPr>
-                <a:solidFill>
-                  <a:srgbClr val="20794D"/>
-                </a:solidFill>
-                <a:latin typeface="Courier"/>
-              </a:rPr>
-              <a:t>"logged response variable</a:t>
-            </a:r>
-            <a:r>
-              <a:rPr>
-                <a:solidFill>
-                  <a:srgbClr val="5E5E5E"/>
-                </a:solidFill>
-                <a:latin typeface="Courier"/>
-              </a:rPr>
-              <a:t>\n\n</a:t>
-            </a:r>
-            <a:r>
-              <a:rPr>
-                <a:solidFill>
-                  <a:srgbClr val="20794D"/>
-                </a:solidFill>
-                <a:latin typeface="Courier"/>
-              </a:rPr>
-              <a:t>"</a:t>
-            </a:r>
-            <a:r>
-              <a:rPr>
-                <a:solidFill>
-                  <a:srgbClr val="003B4F"/>
-                </a:solidFill>
-                <a:latin typeface="Courier"/>
-              </a:rPr>
-              <a:t>)</a:t>
-            </a:r>
-            <a:br/>
-            <a:r>
-              <a:rPr i="1">
-                <a:solidFill>
-                  <a:srgbClr val="5E5E5E"/>
-                </a:solidFill>
-                <a:latin typeface="Courier"/>
-              </a:rPr>
-              <a:t>## logged response variable</a:t>
-            </a:r>
-            <a:br/>
-            <a:r>
-              <a:rPr>
-                <a:solidFill>
-                  <a:srgbClr val="4758AB"/>
-                </a:solidFill>
-                <a:latin typeface="Courier"/>
-              </a:rPr>
-              <a:t>emmeans</a:t>
-            </a:r>
-            <a:r>
-              <a:rPr>
-                <a:solidFill>
-                  <a:srgbClr val="003B4F"/>
-                </a:solidFill>
-                <a:latin typeface="Courier"/>
-              </a:rPr>
-              <a:t>(model_log, </a:t>
-            </a:r>
-            <a:r>
-              <a:rPr>
-                <a:solidFill>
-                  <a:srgbClr val="5E5E5E"/>
-                </a:solidFill>
-                <a:latin typeface="Courier"/>
-              </a:rPr>
-              <a:t>~</a:t>
-            </a:r>
-            <a:r>
-              <a:rPr>
-                <a:solidFill>
-                  <a:srgbClr val="003B4F"/>
-                </a:solidFill>
-                <a:latin typeface="Courier"/>
-              </a:rPr>
-              <a:t>treatment, </a:t>
-            </a:r>
-            <a:r>
-              <a:rPr>
-                <a:solidFill>
-                  <a:srgbClr val="657422"/>
-                </a:solidFill>
-                <a:latin typeface="Courier"/>
-              </a:rPr>
-              <a:t>type =</a:t>
-            </a:r>
-            <a:r>
-              <a:rPr>
-                <a:solidFill>
-                  <a:srgbClr val="003B4F"/>
-                </a:solidFill>
-                <a:latin typeface="Courier"/>
-              </a:rPr>
-              <a:t> </a:t>
-            </a:r>
-            <a:r>
-              <a:rPr>
-                <a:solidFill>
-                  <a:srgbClr val="20794D"/>
-                </a:solidFill>
-                <a:latin typeface="Courier"/>
-              </a:rPr>
-              <a:t>"response"</a:t>
-            </a:r>
-            <a:r>
-              <a:rPr>
-                <a:solidFill>
-                  <a:srgbClr val="003B4F"/>
-                </a:solidFill>
-                <a:latin typeface="Courier"/>
-              </a:rPr>
-              <a:t>)  </a:t>
-            </a:r>
-            <a:r>
-              <a:rPr>
-                <a:solidFill>
-                  <a:srgbClr val="5E5E5E"/>
-                </a:solidFill>
-                <a:latin typeface="Courier"/>
-              </a:rPr>
-              <a:t># Geometric means</a:t>
-            </a:r>
-            <a:br/>
-            <a:r>
-              <a:rPr i="1">
-                <a:solidFill>
-                  <a:srgbClr val="5E5E5E"/>
-                </a:solidFill>
-                <a:latin typeface="Courier"/>
-              </a:rPr>
-              <a:t>##  treatment response    SE df lower.CL upper.CL</a:t>
-            </a:r>
-            <a:br/>
-            <a:r>
-              <a:rPr i="1">
-                <a:solidFill>
-                  <a:srgbClr val="5E5E5E"/>
-                </a:solidFill>
-                <a:latin typeface="Courier"/>
-              </a:rPr>
-              <a:t>##  Control       7.93 0.818 57     6.45     9.75</a:t>
-            </a:r>
-            <a:br/>
-            <a:r>
-              <a:rPr i="1">
-                <a:solidFill>
-                  <a:srgbClr val="5E5E5E"/>
-                </a:solidFill>
-                <a:latin typeface="Courier"/>
-              </a:rPr>
-              <a:t>##  High         21.18 2.180 57    17.23    26.04</a:t>
-            </a:r>
-            <a:br/>
-            <a:r>
-              <a:rPr i="1">
-                <a:solidFill>
-                  <a:srgbClr val="5E5E5E"/>
-                </a:solidFill>
-                <a:latin typeface="Courier"/>
-              </a:rPr>
-              <a:t>##  Low          11.87 1.220 57     9.66    14.60</a:t>
-            </a:r>
-            <a:br/>
-            <a:r>
-              <a:rPr i="1">
-                <a:solidFill>
-                  <a:srgbClr val="5E5E5E"/>
-                </a:solidFill>
-                <a:latin typeface="Courier"/>
-              </a:rPr>
-              <a:t>## </a:t>
-            </a:r>
-            <a:br/>
-            <a:r>
-              <a:rPr i="1">
-                <a:solidFill>
-                  <a:srgbClr val="5E5E5E"/>
-                </a:solidFill>
-                <a:latin typeface="Courier"/>
-              </a:rPr>
-              <a:t>## Confidence level used: 0.95 </a:t>
-            </a:r>
-            <a:br/>
-            <a:r>
-              <a:rPr i="1">
-                <a:solidFill>
-                  <a:srgbClr val="5E5E5E"/>
-                </a:solidFill>
-                <a:latin typeface="Courier"/>
-              </a:rPr>
-              <a:t>## Intervals are back-transformed from the log scale</a:t>
-            </a:r>
-            <a:br/>
-            <a:r>
-              <a:rPr>
-                <a:solidFill>
-                  <a:srgbClr val="4758AB"/>
-                </a:solidFill>
-                <a:latin typeface="Courier"/>
-              </a:rPr>
-              <a:t>cat</a:t>
-            </a:r>
-            <a:r>
-              <a:rPr>
-                <a:solidFill>
-                  <a:srgbClr val="003B4F"/>
-                </a:solidFill>
-                <a:latin typeface="Courier"/>
-              </a:rPr>
-              <a:t>(</a:t>
-            </a:r>
-            <a:r>
-              <a:rPr>
-                <a:solidFill>
-                  <a:srgbClr val="20794D"/>
-                </a:solidFill>
-                <a:latin typeface="Courier"/>
-              </a:rPr>
-              <a:t>"</a:t>
-            </a:r>
-            <a:r>
-              <a:rPr>
-                <a:solidFill>
-                  <a:srgbClr val="5E5E5E"/>
-                </a:solidFill>
-                <a:latin typeface="Courier"/>
-              </a:rPr>
-              <a:t>\n\n</a:t>
-            </a:r>
-            <a:r>
-              <a:rPr>
-                <a:solidFill>
-                  <a:srgbClr val="20794D"/>
-                </a:solidFill>
-                <a:latin typeface="Courier"/>
-              </a:rPr>
-              <a:t>"</a:t>
-            </a:r>
-            <a:r>
-              <a:rPr>
-                <a:solidFill>
-                  <a:srgbClr val="003B4F"/>
-                </a:solidFill>
-                <a:latin typeface="Courier"/>
-              </a:rPr>
-              <a:t>)</a:t>
-            </a:r>
-            <a:br/>
-            <a:r>
-              <a:rPr>
-                <a:solidFill>
-                  <a:srgbClr val="4758AB"/>
-                </a:solidFill>
-                <a:latin typeface="Courier"/>
-              </a:rPr>
-              <a:t>cat</a:t>
-            </a:r>
-            <a:r>
-              <a:rPr>
-                <a:solidFill>
-                  <a:srgbClr val="003B4F"/>
-                </a:solidFill>
-                <a:latin typeface="Courier"/>
-              </a:rPr>
-              <a:t>(</a:t>
-            </a:r>
-            <a:r>
-              <a:rPr>
-                <a:solidFill>
-                  <a:srgbClr val="20794D"/>
-                </a:solidFill>
-                <a:latin typeface="Courier"/>
-              </a:rPr>
-              <a:t>"using glm opn original scale</a:t>
-            </a:r>
-            <a:r>
-              <a:rPr>
-                <a:solidFill>
-                  <a:srgbClr val="5E5E5E"/>
-                </a:solidFill>
-                <a:latin typeface="Courier"/>
-              </a:rPr>
-              <a:t>\n\n</a:t>
-            </a:r>
-            <a:r>
-              <a:rPr>
-                <a:solidFill>
-                  <a:srgbClr val="20794D"/>
-                </a:solidFill>
-                <a:latin typeface="Courier"/>
-              </a:rPr>
-              <a:t>"</a:t>
-            </a:r>
-            <a:r>
-              <a:rPr>
-                <a:solidFill>
-                  <a:srgbClr val="003B4F"/>
-                </a:solidFill>
-                <a:latin typeface="Courier"/>
-              </a:rPr>
-              <a:t>)</a:t>
-            </a:r>
-            <a:br/>
-            <a:r>
-              <a:rPr i="1">
-                <a:solidFill>
-                  <a:srgbClr val="5E5E5E"/>
-                </a:solidFill>
-                <a:latin typeface="Courier"/>
-              </a:rPr>
-              <a:t>## using glm opn original scale</a:t>
-            </a:r>
-            <a:br/>
-            <a:r>
-              <a:rPr>
-                <a:solidFill>
-                  <a:srgbClr val="4758AB"/>
-                </a:solidFill>
-                <a:latin typeface="Courier"/>
-              </a:rPr>
-              <a:t>emmeans</a:t>
-            </a:r>
-            <a:r>
-              <a:rPr>
-                <a:solidFill>
-                  <a:srgbClr val="003B4F"/>
-                </a:solidFill>
-                <a:latin typeface="Courier"/>
-              </a:rPr>
-              <a:t>(model_glm, </a:t>
-            </a:r>
-            <a:r>
-              <a:rPr>
-                <a:solidFill>
-                  <a:srgbClr val="5E5E5E"/>
-                </a:solidFill>
-                <a:latin typeface="Courier"/>
-              </a:rPr>
-              <a:t>~</a:t>
-            </a:r>
-            <a:r>
-              <a:rPr>
-                <a:solidFill>
-                  <a:srgbClr val="003B4F"/>
-                </a:solidFill>
-                <a:latin typeface="Courier"/>
-              </a:rPr>
-              <a:t>treatment, </a:t>
-            </a:r>
-            <a:r>
-              <a:rPr>
-                <a:solidFill>
-                  <a:srgbClr val="657422"/>
-                </a:solidFill>
-                <a:latin typeface="Courier"/>
-              </a:rPr>
-              <a:t>type =</a:t>
-            </a:r>
-            <a:r>
-              <a:rPr>
-                <a:solidFill>
-                  <a:srgbClr val="003B4F"/>
-                </a:solidFill>
-                <a:latin typeface="Courier"/>
-              </a:rPr>
-              <a:t> </a:t>
-            </a:r>
-            <a:r>
-              <a:rPr>
-                <a:solidFill>
-                  <a:srgbClr val="20794D"/>
-                </a:solidFill>
-                <a:latin typeface="Courier"/>
-              </a:rPr>
-              <a:t>"response"</a:t>
-            </a:r>
-            <a:r>
-              <a:rPr>
-                <a:solidFill>
-                  <a:srgbClr val="003B4F"/>
-                </a:solidFill>
-                <a:latin typeface="Courier"/>
-              </a:rPr>
-              <a:t>)  </a:t>
-            </a:r>
-            <a:r>
-              <a:rPr>
-                <a:solidFill>
-                  <a:srgbClr val="5E5E5E"/>
-                </a:solidFill>
-                <a:latin typeface="Courier"/>
-              </a:rPr>
-              <a:t># Arithmetic means</a:t>
-            </a:r>
-            <a:br/>
-            <a:r>
-              <a:rPr i="1">
-                <a:solidFill>
-                  <a:srgbClr val="5E5E5E"/>
-                </a:solidFill>
-                <a:latin typeface="Courier"/>
-              </a:rPr>
-              <a:t>##  treatment response    SE df lower.CL upper.CL</a:t>
-            </a:r>
-            <a:br/>
-            <a:r>
-              <a:rPr i="1">
-                <a:solidFill>
-                  <a:srgbClr val="5E5E5E"/>
-                </a:solidFill>
-                <a:latin typeface="Courier"/>
-              </a:rPr>
-              <a:t>##  Control       8.86 0.939 57     7.16     11.0</a:t>
-            </a:r>
-            <a:br/>
-            <a:r>
-              <a:rPr i="1">
-                <a:solidFill>
-                  <a:srgbClr val="5E5E5E"/>
-                </a:solidFill>
-                <a:latin typeface="Courier"/>
-              </a:rPr>
-              <a:t>##  High         23.73 2.520 57    19.19     29.3</a:t>
-            </a:r>
-            <a:br/>
-            <a:r>
-              <a:rPr i="1">
-                <a:solidFill>
-                  <a:srgbClr val="5E5E5E"/>
-                </a:solidFill>
-                <a:latin typeface="Courier"/>
-              </a:rPr>
-              <a:t>##  Low          12.84 1.360 57    10.39     15.9</a:t>
-            </a:r>
-            <a:br/>
-            <a:r>
-              <a:rPr i="1">
-                <a:solidFill>
-                  <a:srgbClr val="5E5E5E"/>
-                </a:solidFill>
-                <a:latin typeface="Courier"/>
-              </a:rPr>
-              <a:t>## </a:t>
-            </a:r>
-            <a:br/>
-            <a:r>
-              <a:rPr i="1">
-                <a:solidFill>
-                  <a:srgbClr val="5E5E5E"/>
-                </a:solidFill>
-                <a:latin typeface="Courier"/>
-              </a:rPr>
-              <a:t>## Confidence level used: 0.95 </a:t>
-            </a:r>
-            <a:br/>
-            <a:r>
-              <a:rPr i="1">
-                <a:solidFill>
-                  <a:srgbClr val="5E5E5E"/>
-                </a:solidFill>
-                <a:latin typeface="Courier"/>
-              </a:rPr>
-              <a:t>## Intervals are back-transformed from the log scale</a:t>
-            </a:r>
-            <a:br/>
-            <a:br/>
-            <a:r>
-              <a:rPr>
-                <a:solidFill>
-                  <a:srgbClr val="5E5E5E"/>
-                </a:solidFill>
-                <a:latin typeface="Courier"/>
-              </a:rPr>
-              <a:t># Show how the interpretation differs</a:t>
-            </a:r>
-          </a:p>
-        </p:txBody>
-      </p:sp>
     </p:spTree>
   </p:cSld>
 </p:sld>
@@ -12457,6 +11670,1487 @@
             </a:pPr>
             <a:r>
               <a:rPr/>
+              <a:t>Example comparison of logged response variable and GLM</a:t>
+            </a:r>
+          </a:p>
+        </p:txBody>
+      </p:sp>
+      <p:sp>
+        <p:nvSpPr>
+          <p:cNvPr id="3" name="Content Placeholder 2"/>
+          <p:cNvSpPr>
+            <a:spLocks noGrp="1"/>
+          </p:cNvSpPr>
+          <p:nvPr>
+            <p:ph idx="1"/>
+          </p:nvPr>
+        </p:nvSpPr>
+        <p:spPr/>
+        <p:txBody>
+          <a:bodyPr/>
+          <a:lstStyle/>
+          <a:p>
+            <a:pPr lvl="0" indent="0" marL="1270000">
+              <a:buNone/>
+            </a:pPr>
+            <a:r>
+              <a:rPr sz="2000" b="1"/>
+              <a:t>Important</a:t>
+            </a:r>
+          </a:p>
+          <a:p>
+            <a:pPr lvl="0" indent="0">
+              <a:buNone/>
+            </a:pPr>
+            <a:r>
+              <a:rPr>
+                <a:solidFill>
+                  <a:srgbClr val="5E5E5E"/>
+                </a:solidFill>
+                <a:latin typeface="Courier"/>
+              </a:rPr>
+              <a:t># Simulate data that students might log-transform</a:t>
+            </a:r>
+            <a:br/>
+            <a:r>
+              <a:rPr>
+                <a:solidFill>
+                  <a:srgbClr val="4758AB"/>
+                </a:solidFill>
+                <a:latin typeface="Courier"/>
+              </a:rPr>
+              <a:t>set.seed</a:t>
+            </a:r>
+            <a:r>
+              <a:rPr>
+                <a:solidFill>
+                  <a:srgbClr val="003B4F"/>
+                </a:solidFill>
+                <a:latin typeface="Courier"/>
+              </a:rPr>
+              <a:t>(</a:t>
+            </a:r>
+            <a:r>
+              <a:rPr>
+                <a:solidFill>
+                  <a:srgbClr val="AD0000"/>
+                </a:solidFill>
+                <a:latin typeface="Courier"/>
+              </a:rPr>
+              <a:t>123</a:t>
+            </a:r>
+            <a:r>
+              <a:rPr>
+                <a:solidFill>
+                  <a:srgbClr val="003B4F"/>
+                </a:solidFill>
+                <a:latin typeface="Courier"/>
+              </a:rPr>
+              <a:t>)</a:t>
+            </a:r>
+            <a:br/>
+            <a:r>
+              <a:rPr>
+                <a:solidFill>
+                  <a:srgbClr val="003B4F"/>
+                </a:solidFill>
+                <a:latin typeface="Courier"/>
+              </a:rPr>
+              <a:t>treatment_data &lt;- </a:t>
+            </a:r>
+            <a:r>
+              <a:rPr>
+                <a:solidFill>
+                  <a:srgbClr val="4758AB"/>
+                </a:solidFill>
+                <a:latin typeface="Courier"/>
+              </a:rPr>
+              <a:t>data.frame</a:t>
+            </a:r>
+            <a:r>
+              <a:rPr>
+                <a:solidFill>
+                  <a:srgbClr val="003B4F"/>
+                </a:solidFill>
+                <a:latin typeface="Courier"/>
+              </a:rPr>
+              <a:t>(</a:t>
+            </a:r>
+            <a:br/>
+            <a:r>
+              <a:rPr>
+                <a:solidFill>
+                  <a:srgbClr val="003B4F"/>
+                </a:solidFill>
+                <a:latin typeface="Courier"/>
+              </a:rPr>
+              <a:t>  </a:t>
+            </a:r>
+            <a:r>
+              <a:rPr>
+                <a:solidFill>
+                  <a:srgbClr val="657422"/>
+                </a:solidFill>
+                <a:latin typeface="Courier"/>
+              </a:rPr>
+              <a:t>treatment =</a:t>
+            </a:r>
+            <a:r>
+              <a:rPr>
+                <a:solidFill>
+                  <a:srgbClr val="003B4F"/>
+                </a:solidFill>
+                <a:latin typeface="Courier"/>
+              </a:rPr>
+              <a:t> </a:t>
+            </a:r>
+            <a:r>
+              <a:rPr>
+                <a:solidFill>
+                  <a:srgbClr val="4758AB"/>
+                </a:solidFill>
+                <a:latin typeface="Courier"/>
+              </a:rPr>
+              <a:t>rep</a:t>
+            </a:r>
+            <a:r>
+              <a:rPr>
+                <a:solidFill>
+                  <a:srgbClr val="003B4F"/>
+                </a:solidFill>
+                <a:latin typeface="Courier"/>
+              </a:rPr>
+              <a:t>(</a:t>
+            </a:r>
+            <a:r>
+              <a:rPr>
+                <a:solidFill>
+                  <a:srgbClr val="4758AB"/>
+                </a:solidFill>
+                <a:latin typeface="Courier"/>
+              </a:rPr>
+              <a:t>c</a:t>
+            </a:r>
+            <a:r>
+              <a:rPr>
+                <a:solidFill>
+                  <a:srgbClr val="003B4F"/>
+                </a:solidFill>
+                <a:latin typeface="Courier"/>
+              </a:rPr>
+              <a:t>(</a:t>
+            </a:r>
+            <a:r>
+              <a:rPr>
+                <a:solidFill>
+                  <a:srgbClr val="20794D"/>
+                </a:solidFill>
+                <a:latin typeface="Courier"/>
+              </a:rPr>
+              <a:t>"Control"</a:t>
+            </a:r>
+            <a:r>
+              <a:rPr>
+                <a:solidFill>
+                  <a:srgbClr val="003B4F"/>
+                </a:solidFill>
+                <a:latin typeface="Courier"/>
+              </a:rPr>
+              <a:t>, </a:t>
+            </a:r>
+            <a:r>
+              <a:rPr>
+                <a:solidFill>
+                  <a:srgbClr val="20794D"/>
+                </a:solidFill>
+                <a:latin typeface="Courier"/>
+              </a:rPr>
+              <a:t>"Low"</a:t>
+            </a:r>
+            <a:r>
+              <a:rPr>
+                <a:solidFill>
+                  <a:srgbClr val="003B4F"/>
+                </a:solidFill>
+                <a:latin typeface="Courier"/>
+              </a:rPr>
+              <a:t>, </a:t>
+            </a:r>
+            <a:r>
+              <a:rPr>
+                <a:solidFill>
+                  <a:srgbClr val="20794D"/>
+                </a:solidFill>
+                <a:latin typeface="Courier"/>
+              </a:rPr>
+              <a:t>"High"</a:t>
+            </a:r>
+            <a:r>
+              <a:rPr>
+                <a:solidFill>
+                  <a:srgbClr val="003B4F"/>
+                </a:solidFill>
+                <a:latin typeface="Courier"/>
+              </a:rPr>
+              <a:t>), </a:t>
+            </a:r>
+            <a:r>
+              <a:rPr>
+                <a:solidFill>
+                  <a:srgbClr val="657422"/>
+                </a:solidFill>
+                <a:latin typeface="Courier"/>
+              </a:rPr>
+              <a:t>each =</a:t>
+            </a:r>
+            <a:r>
+              <a:rPr>
+                <a:solidFill>
+                  <a:srgbClr val="003B4F"/>
+                </a:solidFill>
+                <a:latin typeface="Courier"/>
+              </a:rPr>
+              <a:t> </a:t>
+            </a:r>
+            <a:r>
+              <a:rPr>
+                <a:solidFill>
+                  <a:srgbClr val="AD0000"/>
+                </a:solidFill>
+                <a:latin typeface="Courier"/>
+              </a:rPr>
+              <a:t>20</a:t>
+            </a:r>
+            <a:r>
+              <a:rPr>
+                <a:solidFill>
+                  <a:srgbClr val="003B4F"/>
+                </a:solidFill>
+                <a:latin typeface="Courier"/>
+              </a:rPr>
+              <a:t>),</a:t>
+            </a:r>
+            <a:br/>
+            <a:r>
+              <a:rPr>
+                <a:solidFill>
+                  <a:srgbClr val="003B4F"/>
+                </a:solidFill>
+                <a:latin typeface="Courier"/>
+              </a:rPr>
+              <a:t>  </a:t>
+            </a:r>
+            <a:r>
+              <a:rPr>
+                <a:solidFill>
+                  <a:srgbClr val="657422"/>
+                </a:solidFill>
+                <a:latin typeface="Courier"/>
+              </a:rPr>
+              <a:t>biomass =</a:t>
+            </a:r>
+            <a:r>
+              <a:rPr>
+                <a:solidFill>
+                  <a:srgbClr val="003B4F"/>
+                </a:solidFill>
+                <a:latin typeface="Courier"/>
+              </a:rPr>
+              <a:t> </a:t>
+            </a:r>
+            <a:r>
+              <a:rPr>
+                <a:solidFill>
+                  <a:srgbClr val="4758AB"/>
+                </a:solidFill>
+                <a:latin typeface="Courier"/>
+              </a:rPr>
+              <a:t>c</a:t>
+            </a:r>
+            <a:r>
+              <a:rPr>
+                <a:solidFill>
+                  <a:srgbClr val="003B4F"/>
+                </a:solidFill>
+                <a:latin typeface="Courier"/>
+              </a:rPr>
+              <a:t>(</a:t>
+            </a:r>
+            <a:r>
+              <a:rPr>
+                <a:solidFill>
+                  <a:srgbClr val="4758AB"/>
+                </a:solidFill>
+                <a:latin typeface="Courier"/>
+              </a:rPr>
+              <a:t>rlnorm</a:t>
+            </a:r>
+            <a:r>
+              <a:rPr>
+                <a:solidFill>
+                  <a:srgbClr val="003B4F"/>
+                </a:solidFill>
+                <a:latin typeface="Courier"/>
+              </a:rPr>
+              <a:t>(</a:t>
+            </a:r>
+            <a:r>
+              <a:rPr>
+                <a:solidFill>
+                  <a:srgbClr val="AD0000"/>
+                </a:solidFill>
+                <a:latin typeface="Courier"/>
+              </a:rPr>
+              <a:t>20</a:t>
+            </a:r>
+            <a:r>
+              <a:rPr>
+                <a:solidFill>
+                  <a:srgbClr val="003B4F"/>
+                </a:solidFill>
+                <a:latin typeface="Courier"/>
+              </a:rPr>
+              <a:t>, </a:t>
+            </a:r>
+            <a:r>
+              <a:rPr>
+                <a:solidFill>
+                  <a:srgbClr val="657422"/>
+                </a:solidFill>
+                <a:latin typeface="Courier"/>
+              </a:rPr>
+              <a:t>meanlog =</a:t>
+            </a:r>
+            <a:r>
+              <a:rPr>
+                <a:solidFill>
+                  <a:srgbClr val="003B4F"/>
+                </a:solidFill>
+                <a:latin typeface="Courier"/>
+              </a:rPr>
+              <a:t> </a:t>
+            </a:r>
+            <a:r>
+              <a:rPr>
+                <a:solidFill>
+                  <a:srgbClr val="AD0000"/>
+                </a:solidFill>
+                <a:latin typeface="Courier"/>
+              </a:rPr>
+              <a:t>2</a:t>
+            </a:r>
+            <a:r>
+              <a:rPr>
+                <a:solidFill>
+                  <a:srgbClr val="003B4F"/>
+                </a:solidFill>
+                <a:latin typeface="Courier"/>
+              </a:rPr>
+              <a:t>, </a:t>
+            </a:r>
+            <a:r>
+              <a:rPr>
+                <a:solidFill>
+                  <a:srgbClr val="657422"/>
+                </a:solidFill>
+                <a:latin typeface="Courier"/>
+              </a:rPr>
+              <a:t>sdlog =</a:t>
+            </a:r>
+            <a:r>
+              <a:rPr>
+                <a:solidFill>
+                  <a:srgbClr val="003B4F"/>
+                </a:solidFill>
+                <a:latin typeface="Courier"/>
+              </a:rPr>
+              <a:t> </a:t>
+            </a:r>
+            <a:r>
+              <a:rPr>
+                <a:solidFill>
+                  <a:srgbClr val="AD0000"/>
+                </a:solidFill>
+                <a:latin typeface="Courier"/>
+              </a:rPr>
+              <a:t>0.5</a:t>
+            </a:r>
+            <a:r>
+              <a:rPr>
+                <a:solidFill>
+                  <a:srgbClr val="003B4F"/>
+                </a:solidFill>
+                <a:latin typeface="Courier"/>
+              </a:rPr>
+              <a:t>),</a:t>
+            </a:r>
+            <a:br/>
+            <a:r>
+              <a:rPr>
+                <a:solidFill>
+                  <a:srgbClr val="003B4F"/>
+                </a:solidFill>
+                <a:latin typeface="Courier"/>
+              </a:rPr>
+              <a:t>              </a:t>
+            </a:r>
+            <a:r>
+              <a:rPr>
+                <a:solidFill>
+                  <a:srgbClr val="4758AB"/>
+                </a:solidFill>
+                <a:latin typeface="Courier"/>
+              </a:rPr>
+              <a:t>rlnorm</a:t>
+            </a:r>
+            <a:r>
+              <a:rPr>
+                <a:solidFill>
+                  <a:srgbClr val="003B4F"/>
+                </a:solidFill>
+                <a:latin typeface="Courier"/>
+              </a:rPr>
+              <a:t>(</a:t>
+            </a:r>
+            <a:r>
+              <a:rPr>
+                <a:solidFill>
+                  <a:srgbClr val="AD0000"/>
+                </a:solidFill>
+                <a:latin typeface="Courier"/>
+              </a:rPr>
+              <a:t>20</a:t>
+            </a:r>
+            <a:r>
+              <a:rPr>
+                <a:solidFill>
+                  <a:srgbClr val="003B4F"/>
+                </a:solidFill>
+                <a:latin typeface="Courier"/>
+              </a:rPr>
+              <a:t>, </a:t>
+            </a:r>
+            <a:r>
+              <a:rPr>
+                <a:solidFill>
+                  <a:srgbClr val="657422"/>
+                </a:solidFill>
+                <a:latin typeface="Courier"/>
+              </a:rPr>
+              <a:t>meanlog =</a:t>
+            </a:r>
+            <a:r>
+              <a:rPr>
+                <a:solidFill>
+                  <a:srgbClr val="003B4F"/>
+                </a:solidFill>
+                <a:latin typeface="Courier"/>
+              </a:rPr>
+              <a:t> </a:t>
+            </a:r>
+            <a:r>
+              <a:rPr>
+                <a:solidFill>
+                  <a:srgbClr val="AD0000"/>
+                </a:solidFill>
+                <a:latin typeface="Courier"/>
+              </a:rPr>
+              <a:t>2.5</a:t>
+            </a:r>
+            <a:r>
+              <a:rPr>
+                <a:solidFill>
+                  <a:srgbClr val="003B4F"/>
+                </a:solidFill>
+                <a:latin typeface="Courier"/>
+              </a:rPr>
+              <a:t>, </a:t>
+            </a:r>
+            <a:r>
+              <a:rPr>
+                <a:solidFill>
+                  <a:srgbClr val="657422"/>
+                </a:solidFill>
+                <a:latin typeface="Courier"/>
+              </a:rPr>
+              <a:t>sdlog =</a:t>
+            </a:r>
+            <a:r>
+              <a:rPr>
+                <a:solidFill>
+                  <a:srgbClr val="003B4F"/>
+                </a:solidFill>
+                <a:latin typeface="Courier"/>
+              </a:rPr>
+              <a:t> </a:t>
+            </a:r>
+            <a:r>
+              <a:rPr>
+                <a:solidFill>
+                  <a:srgbClr val="AD0000"/>
+                </a:solidFill>
+                <a:latin typeface="Courier"/>
+              </a:rPr>
+              <a:t>0.5</a:t>
+            </a:r>
+            <a:r>
+              <a:rPr>
+                <a:solidFill>
+                  <a:srgbClr val="003B4F"/>
+                </a:solidFill>
+                <a:latin typeface="Courier"/>
+              </a:rPr>
+              <a:t>),</a:t>
+            </a:r>
+            <a:br/>
+            <a:r>
+              <a:rPr>
+                <a:solidFill>
+                  <a:srgbClr val="003B4F"/>
+                </a:solidFill>
+                <a:latin typeface="Courier"/>
+              </a:rPr>
+              <a:t>              </a:t>
+            </a:r>
+            <a:r>
+              <a:rPr>
+                <a:solidFill>
+                  <a:srgbClr val="4758AB"/>
+                </a:solidFill>
+                <a:latin typeface="Courier"/>
+              </a:rPr>
+              <a:t>rlnorm</a:t>
+            </a:r>
+            <a:r>
+              <a:rPr>
+                <a:solidFill>
+                  <a:srgbClr val="003B4F"/>
+                </a:solidFill>
+                <a:latin typeface="Courier"/>
+              </a:rPr>
+              <a:t>(</a:t>
+            </a:r>
+            <a:r>
+              <a:rPr>
+                <a:solidFill>
+                  <a:srgbClr val="AD0000"/>
+                </a:solidFill>
+                <a:latin typeface="Courier"/>
+              </a:rPr>
+              <a:t>20</a:t>
+            </a:r>
+            <a:r>
+              <a:rPr>
+                <a:solidFill>
+                  <a:srgbClr val="003B4F"/>
+                </a:solidFill>
+                <a:latin typeface="Courier"/>
+              </a:rPr>
+              <a:t>, </a:t>
+            </a:r>
+            <a:r>
+              <a:rPr>
+                <a:solidFill>
+                  <a:srgbClr val="657422"/>
+                </a:solidFill>
+                <a:latin typeface="Courier"/>
+              </a:rPr>
+              <a:t>meanlog =</a:t>
+            </a:r>
+            <a:r>
+              <a:rPr>
+                <a:solidFill>
+                  <a:srgbClr val="003B4F"/>
+                </a:solidFill>
+                <a:latin typeface="Courier"/>
+              </a:rPr>
+              <a:t> </a:t>
+            </a:r>
+            <a:r>
+              <a:rPr>
+                <a:solidFill>
+                  <a:srgbClr val="AD0000"/>
+                </a:solidFill>
+                <a:latin typeface="Courier"/>
+              </a:rPr>
+              <a:t>3</a:t>
+            </a:r>
+            <a:r>
+              <a:rPr>
+                <a:solidFill>
+                  <a:srgbClr val="003B4F"/>
+                </a:solidFill>
+                <a:latin typeface="Courier"/>
+              </a:rPr>
+              <a:t>, </a:t>
+            </a:r>
+            <a:r>
+              <a:rPr>
+                <a:solidFill>
+                  <a:srgbClr val="657422"/>
+                </a:solidFill>
+                <a:latin typeface="Courier"/>
+              </a:rPr>
+              <a:t>sdlog =</a:t>
+            </a:r>
+            <a:r>
+              <a:rPr>
+                <a:solidFill>
+                  <a:srgbClr val="003B4F"/>
+                </a:solidFill>
+                <a:latin typeface="Courier"/>
+              </a:rPr>
+              <a:t> </a:t>
+            </a:r>
+            <a:r>
+              <a:rPr>
+                <a:solidFill>
+                  <a:srgbClr val="AD0000"/>
+                </a:solidFill>
+                <a:latin typeface="Courier"/>
+              </a:rPr>
+              <a:t>0.5</a:t>
+            </a:r>
+            <a:r>
+              <a:rPr>
+                <a:solidFill>
+                  <a:srgbClr val="003B4F"/>
+                </a:solidFill>
+                <a:latin typeface="Courier"/>
+              </a:rPr>
+              <a:t>))</a:t>
+            </a:r>
+            <a:br/>
+            <a:r>
+              <a:rPr>
+                <a:solidFill>
+                  <a:srgbClr val="003B4F"/>
+                </a:solidFill>
+                <a:latin typeface="Courier"/>
+              </a:rPr>
+              <a:t>)</a:t>
+            </a:r>
+            <a:br/>
+            <a:br/>
+            <a:r>
+              <a:rPr>
+                <a:solidFill>
+                  <a:srgbClr val="5E5E5E"/>
+                </a:solidFill>
+                <a:latin typeface="Courier"/>
+              </a:rPr>
+              <a:t># Approach 1: Log transformation + ANOVA</a:t>
+            </a:r>
+            <a:br/>
+            <a:r>
+              <a:rPr>
+                <a:solidFill>
+                  <a:srgbClr val="003B4F"/>
+                </a:solidFill>
+                <a:latin typeface="Courier"/>
+              </a:rPr>
+              <a:t>model_log &lt;- </a:t>
+            </a:r>
+            <a:r>
+              <a:rPr>
+                <a:solidFill>
+                  <a:srgbClr val="4758AB"/>
+                </a:solidFill>
+                <a:latin typeface="Courier"/>
+              </a:rPr>
+              <a:t>lm</a:t>
+            </a:r>
+            <a:r>
+              <a:rPr>
+                <a:solidFill>
+                  <a:srgbClr val="003B4F"/>
+                </a:solidFill>
+                <a:latin typeface="Courier"/>
+              </a:rPr>
+              <a:t>(</a:t>
+            </a:r>
+            <a:r>
+              <a:rPr>
+                <a:solidFill>
+                  <a:srgbClr val="4758AB"/>
+                </a:solidFill>
+                <a:latin typeface="Courier"/>
+              </a:rPr>
+              <a:t>log</a:t>
+            </a:r>
+            <a:r>
+              <a:rPr>
+                <a:solidFill>
+                  <a:srgbClr val="003B4F"/>
+                </a:solidFill>
+                <a:latin typeface="Courier"/>
+              </a:rPr>
+              <a:t>(biomass) </a:t>
+            </a:r>
+            <a:r>
+              <a:rPr>
+                <a:solidFill>
+                  <a:srgbClr val="5E5E5E"/>
+                </a:solidFill>
+                <a:latin typeface="Courier"/>
+              </a:rPr>
+              <a:t>~</a:t>
+            </a:r>
+            <a:r>
+              <a:rPr>
+                <a:solidFill>
+                  <a:srgbClr val="003B4F"/>
+                </a:solidFill>
+                <a:latin typeface="Courier"/>
+              </a:rPr>
+              <a:t> treatment, </a:t>
+            </a:r>
+            <a:r>
+              <a:rPr>
+                <a:solidFill>
+                  <a:srgbClr val="657422"/>
+                </a:solidFill>
+                <a:latin typeface="Courier"/>
+              </a:rPr>
+              <a:t>data =</a:t>
+            </a:r>
+            <a:r>
+              <a:rPr>
+                <a:solidFill>
+                  <a:srgbClr val="003B4F"/>
+                </a:solidFill>
+                <a:latin typeface="Courier"/>
+              </a:rPr>
+              <a:t> treatment_data)</a:t>
+            </a:r>
+            <a:br/>
+            <a:br/>
+            <a:r>
+              <a:rPr>
+                <a:solidFill>
+                  <a:srgbClr val="5E5E5E"/>
+                </a:solidFill>
+                <a:latin typeface="Courier"/>
+              </a:rPr>
+              <a:t># Approach 2: Gamma GLM with log link</a:t>
+            </a:r>
+            <a:br/>
+            <a:r>
+              <a:rPr>
+                <a:solidFill>
+                  <a:srgbClr val="003B4F"/>
+                </a:solidFill>
+                <a:latin typeface="Courier"/>
+              </a:rPr>
+              <a:t>model_glm &lt;- </a:t>
+            </a:r>
+            <a:r>
+              <a:rPr>
+                <a:solidFill>
+                  <a:srgbClr val="4758AB"/>
+                </a:solidFill>
+                <a:latin typeface="Courier"/>
+              </a:rPr>
+              <a:t>glm</a:t>
+            </a:r>
+            <a:r>
+              <a:rPr>
+                <a:solidFill>
+                  <a:srgbClr val="003B4F"/>
+                </a:solidFill>
+                <a:latin typeface="Courier"/>
+              </a:rPr>
+              <a:t>(biomass </a:t>
+            </a:r>
+            <a:r>
+              <a:rPr>
+                <a:solidFill>
+                  <a:srgbClr val="5E5E5E"/>
+                </a:solidFill>
+                <a:latin typeface="Courier"/>
+              </a:rPr>
+              <a:t>~</a:t>
+            </a:r>
+            <a:r>
+              <a:rPr>
+                <a:solidFill>
+                  <a:srgbClr val="003B4F"/>
+                </a:solidFill>
+                <a:latin typeface="Courier"/>
+              </a:rPr>
+              <a:t> treatment, </a:t>
+            </a:r>
+            <a:br/>
+            <a:r>
+              <a:rPr>
+                <a:solidFill>
+                  <a:srgbClr val="003B4F"/>
+                </a:solidFill>
+                <a:latin typeface="Courier"/>
+              </a:rPr>
+              <a:t>                 </a:t>
+            </a:r>
+            <a:r>
+              <a:rPr>
+                <a:solidFill>
+                  <a:srgbClr val="657422"/>
+                </a:solidFill>
+                <a:latin typeface="Courier"/>
+              </a:rPr>
+              <a:t>family =</a:t>
+            </a:r>
+            <a:r>
+              <a:rPr>
+                <a:solidFill>
+                  <a:srgbClr val="003B4F"/>
+                </a:solidFill>
+                <a:latin typeface="Courier"/>
+              </a:rPr>
+              <a:t> </a:t>
+            </a:r>
+            <a:r>
+              <a:rPr>
+                <a:solidFill>
+                  <a:srgbClr val="4758AB"/>
+                </a:solidFill>
+                <a:latin typeface="Courier"/>
+              </a:rPr>
+              <a:t>Gamma</a:t>
+            </a:r>
+            <a:r>
+              <a:rPr>
+                <a:solidFill>
+                  <a:srgbClr val="003B4F"/>
+                </a:solidFill>
+                <a:latin typeface="Courier"/>
+              </a:rPr>
+              <a:t>(</a:t>
+            </a:r>
+            <a:r>
+              <a:rPr>
+                <a:solidFill>
+                  <a:srgbClr val="657422"/>
+                </a:solidFill>
+                <a:latin typeface="Courier"/>
+              </a:rPr>
+              <a:t>link =</a:t>
+            </a:r>
+            <a:r>
+              <a:rPr>
+                <a:solidFill>
+                  <a:srgbClr val="003B4F"/>
+                </a:solidFill>
+                <a:latin typeface="Courier"/>
+              </a:rPr>
+              <a:t> </a:t>
+            </a:r>
+            <a:r>
+              <a:rPr>
+                <a:solidFill>
+                  <a:srgbClr val="20794D"/>
+                </a:solidFill>
+                <a:latin typeface="Courier"/>
+              </a:rPr>
+              <a:t>"log"</a:t>
+            </a:r>
+            <a:r>
+              <a:rPr>
+                <a:solidFill>
+                  <a:srgbClr val="003B4F"/>
+                </a:solidFill>
+                <a:latin typeface="Courier"/>
+              </a:rPr>
+              <a:t>), </a:t>
+            </a:r>
+            <a:br/>
+            <a:r>
+              <a:rPr>
+                <a:solidFill>
+                  <a:srgbClr val="003B4F"/>
+                </a:solidFill>
+                <a:latin typeface="Courier"/>
+              </a:rPr>
+              <a:t>                 </a:t>
+            </a:r>
+            <a:r>
+              <a:rPr>
+                <a:solidFill>
+                  <a:srgbClr val="657422"/>
+                </a:solidFill>
+                <a:latin typeface="Courier"/>
+              </a:rPr>
+              <a:t>data =</a:t>
+            </a:r>
+            <a:r>
+              <a:rPr>
+                <a:solidFill>
+                  <a:srgbClr val="003B4F"/>
+                </a:solidFill>
+                <a:latin typeface="Courier"/>
+              </a:rPr>
+              <a:t> treatment_data)</a:t>
+            </a:r>
+            <a:br/>
+            <a:br/>
+            <a:r>
+              <a:rPr>
+                <a:solidFill>
+                  <a:srgbClr val="5E5E5E"/>
+                </a:solidFill>
+                <a:latin typeface="Courier"/>
+              </a:rPr>
+              <a:t># Compare predictions on original scale</a:t>
+            </a:r>
+            <a:br/>
+            <a:r>
+              <a:rPr>
+                <a:solidFill>
+                  <a:srgbClr val="4758AB"/>
+                </a:solidFill>
+                <a:latin typeface="Courier"/>
+              </a:rPr>
+              <a:t>cat</a:t>
+            </a:r>
+            <a:r>
+              <a:rPr>
+                <a:solidFill>
+                  <a:srgbClr val="003B4F"/>
+                </a:solidFill>
+                <a:latin typeface="Courier"/>
+              </a:rPr>
+              <a:t>(</a:t>
+            </a:r>
+            <a:r>
+              <a:rPr>
+                <a:solidFill>
+                  <a:srgbClr val="20794D"/>
+                </a:solidFill>
+                <a:latin typeface="Courier"/>
+              </a:rPr>
+              <a:t>"logged response variable</a:t>
+            </a:r>
+            <a:r>
+              <a:rPr>
+                <a:solidFill>
+                  <a:srgbClr val="5E5E5E"/>
+                </a:solidFill>
+                <a:latin typeface="Courier"/>
+              </a:rPr>
+              <a:t>\n\n</a:t>
+            </a:r>
+            <a:r>
+              <a:rPr>
+                <a:solidFill>
+                  <a:srgbClr val="20794D"/>
+                </a:solidFill>
+                <a:latin typeface="Courier"/>
+              </a:rPr>
+              <a:t>"</a:t>
+            </a:r>
+            <a:r>
+              <a:rPr>
+                <a:solidFill>
+                  <a:srgbClr val="003B4F"/>
+                </a:solidFill>
+                <a:latin typeface="Courier"/>
+              </a:rPr>
+              <a:t>)</a:t>
+            </a:r>
+            <a:br/>
+            <a:r>
+              <a:rPr i="1">
+                <a:solidFill>
+                  <a:srgbClr val="5E5E5E"/>
+                </a:solidFill>
+                <a:latin typeface="Courier"/>
+              </a:rPr>
+              <a:t>## logged response variable</a:t>
+            </a:r>
+            <a:br/>
+            <a:r>
+              <a:rPr>
+                <a:solidFill>
+                  <a:srgbClr val="4758AB"/>
+                </a:solidFill>
+                <a:latin typeface="Courier"/>
+              </a:rPr>
+              <a:t>emmeans</a:t>
+            </a:r>
+            <a:r>
+              <a:rPr>
+                <a:solidFill>
+                  <a:srgbClr val="003B4F"/>
+                </a:solidFill>
+                <a:latin typeface="Courier"/>
+              </a:rPr>
+              <a:t>(model_log, </a:t>
+            </a:r>
+            <a:r>
+              <a:rPr>
+                <a:solidFill>
+                  <a:srgbClr val="5E5E5E"/>
+                </a:solidFill>
+                <a:latin typeface="Courier"/>
+              </a:rPr>
+              <a:t>~</a:t>
+            </a:r>
+            <a:r>
+              <a:rPr>
+                <a:solidFill>
+                  <a:srgbClr val="003B4F"/>
+                </a:solidFill>
+                <a:latin typeface="Courier"/>
+              </a:rPr>
+              <a:t>treatment, </a:t>
+            </a:r>
+            <a:r>
+              <a:rPr>
+                <a:solidFill>
+                  <a:srgbClr val="657422"/>
+                </a:solidFill>
+                <a:latin typeface="Courier"/>
+              </a:rPr>
+              <a:t>type =</a:t>
+            </a:r>
+            <a:r>
+              <a:rPr>
+                <a:solidFill>
+                  <a:srgbClr val="003B4F"/>
+                </a:solidFill>
+                <a:latin typeface="Courier"/>
+              </a:rPr>
+              <a:t> </a:t>
+            </a:r>
+            <a:r>
+              <a:rPr>
+                <a:solidFill>
+                  <a:srgbClr val="20794D"/>
+                </a:solidFill>
+                <a:latin typeface="Courier"/>
+              </a:rPr>
+              <a:t>"response"</a:t>
+            </a:r>
+            <a:r>
+              <a:rPr>
+                <a:solidFill>
+                  <a:srgbClr val="003B4F"/>
+                </a:solidFill>
+                <a:latin typeface="Courier"/>
+              </a:rPr>
+              <a:t>)  </a:t>
+            </a:r>
+            <a:r>
+              <a:rPr>
+                <a:solidFill>
+                  <a:srgbClr val="5E5E5E"/>
+                </a:solidFill>
+                <a:latin typeface="Courier"/>
+              </a:rPr>
+              <a:t># Geometric means</a:t>
+            </a:r>
+            <a:br/>
+            <a:r>
+              <a:rPr i="1">
+                <a:solidFill>
+                  <a:srgbClr val="5E5E5E"/>
+                </a:solidFill>
+                <a:latin typeface="Courier"/>
+              </a:rPr>
+              <a:t>##  treatment response    SE df lower.CL upper.CL</a:t>
+            </a:r>
+            <a:br/>
+            <a:r>
+              <a:rPr i="1">
+                <a:solidFill>
+                  <a:srgbClr val="5E5E5E"/>
+                </a:solidFill>
+                <a:latin typeface="Courier"/>
+              </a:rPr>
+              <a:t>##  Control       7.93 0.818 57     6.45     9.75</a:t>
+            </a:r>
+            <a:br/>
+            <a:r>
+              <a:rPr i="1">
+                <a:solidFill>
+                  <a:srgbClr val="5E5E5E"/>
+                </a:solidFill>
+                <a:latin typeface="Courier"/>
+              </a:rPr>
+              <a:t>##  High         21.18 2.180 57    17.23    26.04</a:t>
+            </a:r>
+            <a:br/>
+            <a:r>
+              <a:rPr i="1">
+                <a:solidFill>
+                  <a:srgbClr val="5E5E5E"/>
+                </a:solidFill>
+                <a:latin typeface="Courier"/>
+              </a:rPr>
+              <a:t>##  Low          11.87 1.220 57     9.66    14.60</a:t>
+            </a:r>
+            <a:br/>
+            <a:r>
+              <a:rPr i="1">
+                <a:solidFill>
+                  <a:srgbClr val="5E5E5E"/>
+                </a:solidFill>
+                <a:latin typeface="Courier"/>
+              </a:rPr>
+              <a:t>## </a:t>
+            </a:r>
+            <a:br/>
+            <a:r>
+              <a:rPr i="1">
+                <a:solidFill>
+                  <a:srgbClr val="5E5E5E"/>
+                </a:solidFill>
+                <a:latin typeface="Courier"/>
+              </a:rPr>
+              <a:t>## Confidence level used: 0.95 </a:t>
+            </a:r>
+            <a:br/>
+            <a:r>
+              <a:rPr i="1">
+                <a:solidFill>
+                  <a:srgbClr val="5E5E5E"/>
+                </a:solidFill>
+                <a:latin typeface="Courier"/>
+              </a:rPr>
+              <a:t>## Intervals are back-transformed from the log scale</a:t>
+            </a:r>
+            <a:br/>
+            <a:r>
+              <a:rPr>
+                <a:solidFill>
+                  <a:srgbClr val="4758AB"/>
+                </a:solidFill>
+                <a:latin typeface="Courier"/>
+              </a:rPr>
+              <a:t>cat</a:t>
+            </a:r>
+            <a:r>
+              <a:rPr>
+                <a:solidFill>
+                  <a:srgbClr val="003B4F"/>
+                </a:solidFill>
+                <a:latin typeface="Courier"/>
+              </a:rPr>
+              <a:t>(</a:t>
+            </a:r>
+            <a:r>
+              <a:rPr>
+                <a:solidFill>
+                  <a:srgbClr val="20794D"/>
+                </a:solidFill>
+                <a:latin typeface="Courier"/>
+              </a:rPr>
+              <a:t>"</a:t>
+            </a:r>
+            <a:r>
+              <a:rPr>
+                <a:solidFill>
+                  <a:srgbClr val="5E5E5E"/>
+                </a:solidFill>
+                <a:latin typeface="Courier"/>
+              </a:rPr>
+              <a:t>\n\n</a:t>
+            </a:r>
+            <a:r>
+              <a:rPr>
+                <a:solidFill>
+                  <a:srgbClr val="20794D"/>
+                </a:solidFill>
+                <a:latin typeface="Courier"/>
+              </a:rPr>
+              <a:t>"</a:t>
+            </a:r>
+            <a:r>
+              <a:rPr>
+                <a:solidFill>
+                  <a:srgbClr val="003B4F"/>
+                </a:solidFill>
+                <a:latin typeface="Courier"/>
+              </a:rPr>
+              <a:t>)</a:t>
+            </a:r>
+            <a:br/>
+            <a:r>
+              <a:rPr>
+                <a:solidFill>
+                  <a:srgbClr val="4758AB"/>
+                </a:solidFill>
+                <a:latin typeface="Courier"/>
+              </a:rPr>
+              <a:t>cat</a:t>
+            </a:r>
+            <a:r>
+              <a:rPr>
+                <a:solidFill>
+                  <a:srgbClr val="003B4F"/>
+                </a:solidFill>
+                <a:latin typeface="Courier"/>
+              </a:rPr>
+              <a:t>(</a:t>
+            </a:r>
+            <a:r>
+              <a:rPr>
+                <a:solidFill>
+                  <a:srgbClr val="20794D"/>
+                </a:solidFill>
+                <a:latin typeface="Courier"/>
+              </a:rPr>
+              <a:t>"using glm opn original scale</a:t>
+            </a:r>
+            <a:r>
+              <a:rPr>
+                <a:solidFill>
+                  <a:srgbClr val="5E5E5E"/>
+                </a:solidFill>
+                <a:latin typeface="Courier"/>
+              </a:rPr>
+              <a:t>\n\n</a:t>
+            </a:r>
+            <a:r>
+              <a:rPr>
+                <a:solidFill>
+                  <a:srgbClr val="20794D"/>
+                </a:solidFill>
+                <a:latin typeface="Courier"/>
+              </a:rPr>
+              <a:t>"</a:t>
+            </a:r>
+            <a:r>
+              <a:rPr>
+                <a:solidFill>
+                  <a:srgbClr val="003B4F"/>
+                </a:solidFill>
+                <a:latin typeface="Courier"/>
+              </a:rPr>
+              <a:t>)</a:t>
+            </a:r>
+            <a:br/>
+            <a:r>
+              <a:rPr i="1">
+                <a:solidFill>
+                  <a:srgbClr val="5E5E5E"/>
+                </a:solidFill>
+                <a:latin typeface="Courier"/>
+              </a:rPr>
+              <a:t>## using glm opn original scale</a:t>
+            </a:r>
+            <a:br/>
+            <a:r>
+              <a:rPr>
+                <a:solidFill>
+                  <a:srgbClr val="4758AB"/>
+                </a:solidFill>
+                <a:latin typeface="Courier"/>
+              </a:rPr>
+              <a:t>emmeans</a:t>
+            </a:r>
+            <a:r>
+              <a:rPr>
+                <a:solidFill>
+                  <a:srgbClr val="003B4F"/>
+                </a:solidFill>
+                <a:latin typeface="Courier"/>
+              </a:rPr>
+              <a:t>(model_glm, </a:t>
+            </a:r>
+            <a:r>
+              <a:rPr>
+                <a:solidFill>
+                  <a:srgbClr val="5E5E5E"/>
+                </a:solidFill>
+                <a:latin typeface="Courier"/>
+              </a:rPr>
+              <a:t>~</a:t>
+            </a:r>
+            <a:r>
+              <a:rPr>
+                <a:solidFill>
+                  <a:srgbClr val="003B4F"/>
+                </a:solidFill>
+                <a:latin typeface="Courier"/>
+              </a:rPr>
+              <a:t>treatment, </a:t>
+            </a:r>
+            <a:r>
+              <a:rPr>
+                <a:solidFill>
+                  <a:srgbClr val="657422"/>
+                </a:solidFill>
+                <a:latin typeface="Courier"/>
+              </a:rPr>
+              <a:t>type =</a:t>
+            </a:r>
+            <a:r>
+              <a:rPr>
+                <a:solidFill>
+                  <a:srgbClr val="003B4F"/>
+                </a:solidFill>
+                <a:latin typeface="Courier"/>
+              </a:rPr>
+              <a:t> </a:t>
+            </a:r>
+            <a:r>
+              <a:rPr>
+                <a:solidFill>
+                  <a:srgbClr val="20794D"/>
+                </a:solidFill>
+                <a:latin typeface="Courier"/>
+              </a:rPr>
+              <a:t>"response"</a:t>
+            </a:r>
+            <a:r>
+              <a:rPr>
+                <a:solidFill>
+                  <a:srgbClr val="003B4F"/>
+                </a:solidFill>
+                <a:latin typeface="Courier"/>
+              </a:rPr>
+              <a:t>)  </a:t>
+            </a:r>
+            <a:r>
+              <a:rPr>
+                <a:solidFill>
+                  <a:srgbClr val="5E5E5E"/>
+                </a:solidFill>
+                <a:latin typeface="Courier"/>
+              </a:rPr>
+              <a:t># Arithmetic means</a:t>
+            </a:r>
+            <a:br/>
+            <a:r>
+              <a:rPr i="1">
+                <a:solidFill>
+                  <a:srgbClr val="5E5E5E"/>
+                </a:solidFill>
+                <a:latin typeface="Courier"/>
+              </a:rPr>
+              <a:t>##  treatment response    SE df lower.CL upper.CL</a:t>
+            </a:r>
+            <a:br/>
+            <a:r>
+              <a:rPr i="1">
+                <a:solidFill>
+                  <a:srgbClr val="5E5E5E"/>
+                </a:solidFill>
+                <a:latin typeface="Courier"/>
+              </a:rPr>
+              <a:t>##  Control       8.86 0.939 57     7.16     11.0</a:t>
+            </a:r>
+            <a:br/>
+            <a:r>
+              <a:rPr i="1">
+                <a:solidFill>
+                  <a:srgbClr val="5E5E5E"/>
+                </a:solidFill>
+                <a:latin typeface="Courier"/>
+              </a:rPr>
+              <a:t>##  High         23.73 2.520 57    19.19     29.3</a:t>
+            </a:r>
+            <a:br/>
+            <a:r>
+              <a:rPr i="1">
+                <a:solidFill>
+                  <a:srgbClr val="5E5E5E"/>
+                </a:solidFill>
+                <a:latin typeface="Courier"/>
+              </a:rPr>
+              <a:t>##  Low          12.84 1.360 57    10.39     15.9</a:t>
+            </a:r>
+            <a:br/>
+            <a:r>
+              <a:rPr i="1">
+                <a:solidFill>
+                  <a:srgbClr val="5E5E5E"/>
+                </a:solidFill>
+                <a:latin typeface="Courier"/>
+              </a:rPr>
+              <a:t>## </a:t>
+            </a:r>
+            <a:br/>
+            <a:r>
+              <a:rPr i="1">
+                <a:solidFill>
+                  <a:srgbClr val="5E5E5E"/>
+                </a:solidFill>
+                <a:latin typeface="Courier"/>
+              </a:rPr>
+              <a:t>## Confidence level used: 0.95 </a:t>
+            </a:r>
+            <a:br/>
+            <a:r>
+              <a:rPr i="1">
+                <a:solidFill>
+                  <a:srgbClr val="5E5E5E"/>
+                </a:solidFill>
+                <a:latin typeface="Courier"/>
+              </a:rPr>
+              <a:t>## Intervals are back-transformed from the log scale</a:t>
+            </a:r>
+            <a:br/>
+            <a:br/>
+            <a:r>
+              <a:rPr>
+                <a:solidFill>
+                  <a:srgbClr val="5E5E5E"/>
+                </a:solidFill>
+                <a:latin typeface="Courier"/>
+              </a:rPr>
+              <a:t># Show how the interpretation differs</a:t>
+            </a:r>
+          </a:p>
+        </p:txBody>
+      </p:sp>
+    </p:spTree>
+  </p:cSld>
+</p:sld>
+</file>
+
+<file path=ppt/slides/slide6.xml><?xml version="1.0" encoding="utf-8"?>
+<p:sld xmlns:a="http://schemas.openxmlformats.org/drawingml/2006/main" xmlns:r="http://schemas.openxmlformats.org/officeDocument/2006/relationships" xmlns:p="http://schemas.openxmlformats.org/presentationml/2006/main">
+  <p:cSld>
+    <p:spTree>
+      <p:nvGrpSpPr>
+        <p:cNvPr id="1" name=""/>
+        <p:cNvGrpSpPr/>
+        <p:nvPr/>
+      </p:nvGrpSpPr>
+      <p:grpSpPr>
+        <a:xfrm>
+          <a:off x="0" y="0"/>
+          <a:ext cx="0" cy="0"/>
+          <a:chOff x="0" y="0"/>
+          <a:chExt cx="0" cy="0"/>
+        </a:xfrm>
+      </p:grpSpPr>
+      <p:sp>
+        <p:nvSpPr>
+          <p:cNvPr id="2" name="Title 1"/>
+          <p:cNvSpPr>
+            <a:spLocks noGrp="1"/>
+          </p:cNvSpPr>
+          <p:nvPr>
+            <p:ph type="title"/>
+          </p:nvPr>
+        </p:nvSpPr>
+        <p:spPr>
+          <a:xfrm>
+            <a:off x="0" y="0"/>
+            <a:ext cx="9144000" cy="582780"/>
+          </a:xfrm>
+        </p:spPr>
+        <p:txBody>
+          <a:bodyPr/>
+          <a:lstStyle/>
+          <a:p>
+            <a:pPr lvl="0" indent="0" marL="0">
+              <a:buNone/>
+            </a:pPr>
+            <a:r>
+              <a:rPr/>
               <a:t>The Three Elements of a GLM</a:t>
             </a:r>
           </a:p>
@@ -12673,7 +13367,7 @@
 </p:sld>
 </file>
 
-<file path=ppt/slides/slide6.xml><?xml version="1.0" encoding="utf-8"?>
+<file path=ppt/slides/slide7.xml><?xml version="1.0" encoding="utf-8"?>
 <p:sld xmlns:a="http://schemas.openxmlformats.org/drawingml/2006/main" xmlns:r="http://schemas.openxmlformats.org/officeDocument/2006/relationships" xmlns:p="http://schemas.openxmlformats.org/presentationml/2006/main">
   <p:cSld>
     <p:spTree>
@@ -12986,7 +13680,7 @@
 </p:sld>
 </file>
 
-<file path=ppt/slides/slide7.xml><?xml version="1.0" encoding="utf-8"?>
+<file path=ppt/slides/slide8.xml><?xml version="1.0" encoding="utf-8"?>
 <p:sld xmlns:a="http://schemas.openxmlformats.org/drawingml/2006/main" xmlns:r="http://schemas.openxmlformats.org/officeDocument/2006/relationships" xmlns:p="http://schemas.openxmlformats.org/presentationml/2006/main">
   <p:cSld>
     <p:spTree>
@@ -13719,7 +14413,7 @@
 </p:sld>
 </file>
 
-<file path=ppt/slides/slide8.xml><?xml version="1.0" encoding="utf-8"?>
+<file path=ppt/slides/slide9.xml><?xml version="1.0" encoding="utf-8"?>
 <p:sld xmlns:a="http://schemas.openxmlformats.org/drawingml/2006/main" xmlns:r="http://schemas.openxmlformats.org/officeDocument/2006/relationships" xmlns:p="http://schemas.openxmlformats.org/presentationml/2006/main">
   <p:cSld>
     <p:spTree>
@@ -14066,583 +14760,6 @@
           </p:sp>
         </mc:Choice>
       </mc:AlternateContent>
-    </p:spTree>
-  </p:cSld>
-</p:sld>
-</file>
-
-<file path=ppt/slides/slide9.xml><?xml version="1.0" encoding="utf-8"?>
-<p:sld xmlns:a="http://schemas.openxmlformats.org/drawingml/2006/main" xmlns:r="http://schemas.openxmlformats.org/officeDocument/2006/relationships" xmlns:p="http://schemas.openxmlformats.org/presentationml/2006/main">
-  <p:cSld>
-    <p:spTree>
-      <p:nvGrpSpPr>
-        <p:cNvPr id="1" name=""/>
-        <p:cNvGrpSpPr/>
-        <p:nvPr/>
-      </p:nvGrpSpPr>
-      <p:grpSpPr>
-        <a:xfrm>
-          <a:off x="0" y="0"/>
-          <a:ext cx="0" cy="0"/>
-          <a:chOff x="0" y="0"/>
-          <a:chExt cx="0" cy="0"/>
-        </a:xfrm>
-      </p:grpSpPr>
-      <p:sp>
-        <p:nvSpPr>
-          <p:cNvPr id="2" name="Title 1"/>
-          <p:cNvSpPr>
-            <a:spLocks noGrp="1"/>
-          </p:cNvSpPr>
-          <p:nvPr>
-            <p:ph type="title"/>
-          </p:nvPr>
-        </p:nvSpPr>
-        <p:spPr>
-          <a:xfrm>
-            <a:off x="139485" y="78119"/>
-            <a:ext cx="8229600" cy="607682"/>
-          </a:xfrm>
-        </p:spPr>
-        <p:txBody>
-          <a:bodyPr/>
-          <a:lstStyle/>
-          <a:p>
-            <a:pPr lvl="0" indent="0" marL="0">
-              <a:buNone/>
-            </a:pPr>
-            <a:r>
-              <a:rPr/>
-              <a:t>GLM with Gaussian Distribution: Analysis</a:t>
-            </a:r>
-          </a:p>
-        </p:txBody>
-      </p:sp>
-      <mc:AlternateContent xmlns:mc="http://schemas.openxmlformats.org/markup-compatibility/2006">
-        <mc:Choice xmlns:a14="http://schemas.microsoft.com/office/drawing/2010/main" Requires="a14">
-          <p:sp>
-            <p:nvSpPr>
-              <p:cNvPr id="3" name="Text Placeholder 2"/>
-              <p:cNvSpPr>
-                <a:spLocks noGrp="1"/>
-              </p:cNvSpPr>
-              <p:nvPr>
-                <p:ph idx="1" type="body"/>
-              </p:nvPr>
-            </p:nvSpPr>
-            <p:spPr/>
-            <p:txBody>
-              <a:bodyPr/>
-              <a:lstStyle/>
-              <a:p>
-                <a:pPr lvl="0"/>
-                <a:r>
-                  <a:rPr/>
-                  <a:t>Now let’s perform an ANOVA on our LM and GLM model using the </a:t>
-                </a:r>
-                <a:r>
-                  <a:rPr>
-                    <a:latin typeface="Courier"/>
-                  </a:rPr>
-                  <a:t>car</a:t>
-                </a:r>
-                <a:r>
-                  <a:rPr/>
-                  <a:t> package:</a:t>
-                </a:r>
-              </a:p>
-              <a:p>
-                <a:pPr lvl="1"/>
-                <a:r>
-                  <a:rPr b="1"/>
-                  <a:t>Residual Standard Error</a:t>
-                </a:r>
-                <a:r>
-                  <a:rPr/>
-                  <a:t>. This is the standard deviation of the residuals (</a:t>
-                </a:r>
-                <a14:m>
-                  <m:oMath xmlns:m="http://schemas.openxmlformats.org/officeDocument/2006/math">
-                    <m:r>
-                      <m:t>σ</m:t>
-                    </m:r>
-                  </m:oMath>
-                </a14:m>
-                <a:r>
-                  <a:rPr/>
-                  <a:t>)</a:t>
-                </a:r>
-              </a:p>
-              <a:p>
-                <a:pPr lvl="1"/>
-                <a:r>
-                  <a:rPr b="1"/>
-                  <a:t>Residual Deviance divided by its degrees of freedom</a:t>
-                </a:r>
-                <a:r>
-                  <a:rPr/>
-                  <a:t>: 5756.1 / 27 = 213.1878</a:t>
-                </a:r>
-              </a:p>
-              <a:p>
-                <a:pPr lvl="1"/>
-                <a:r>
-                  <a:rPr/>
-                  <a:t>In this context, “Sum Sq” (Sum of Squares) and “Deviance” are the same thing.</a:t>
-                </a:r>
-              </a:p>
-              <a:p>
-                <a:pPr lvl="1"/>
-                <a:r>
-                  <a:rPr b="1"/>
-                  <a:t>“Pearson residuals” are essentially the same as the regular residuals</a:t>
-                </a:r>
-                <a:r>
-                  <a:rPr/>
-                  <a:t> (observed - predicted) that you get from a standard </a:t>
-                </a:r>
-                <a:r>
-                  <a:rPr>
-                    <a:latin typeface="Courier"/>
-                  </a:rPr>
-                  <a:t>lm()</a:t>
-                </a:r>
-              </a:p>
-              <a:p>
-                <a:pPr lvl="0" indent="0">
-                  <a:buNone/>
-                </a:pPr>
-                <a:r>
-                  <a:rPr>
-                    <a:solidFill>
-                      <a:srgbClr val="4758AB"/>
-                    </a:solidFill>
-                    <a:latin typeface="Courier"/>
-                  </a:rPr>
-                  <a:t>Anova</a:t>
-                </a:r>
-                <a:r>
-                  <a:rPr>
-                    <a:solidFill>
-                      <a:srgbClr val="003B4F"/>
-                    </a:solidFill>
-                    <a:latin typeface="Courier"/>
-                  </a:rPr>
-                  <a:t>(model_lm, </a:t>
-                </a:r>
-                <a:r>
-                  <a:rPr>
-                    <a:solidFill>
-                      <a:srgbClr val="657422"/>
-                    </a:solidFill>
-                    <a:latin typeface="Courier"/>
-                  </a:rPr>
-                  <a:t>type =</a:t>
-                </a:r>
-                <a:r>
-                  <a:rPr>
-                    <a:solidFill>
-                      <a:srgbClr val="003B4F"/>
-                    </a:solidFill>
-                    <a:latin typeface="Courier"/>
-                  </a:rPr>
-                  <a:t> </a:t>
-                </a:r>
-                <a:r>
-                  <a:rPr>
-                    <a:solidFill>
-                      <a:srgbClr val="20794D"/>
-                    </a:solidFill>
-                    <a:latin typeface="Courier"/>
-                  </a:rPr>
-                  <a:t>"III"</a:t>
-                </a:r>
-                <a:r>
-                  <a:rPr>
-                    <a:solidFill>
-                      <a:srgbClr val="003B4F"/>
-                    </a:solidFill>
-                    <a:latin typeface="Courier"/>
-                  </a:rPr>
-                  <a:t>, </a:t>
-                </a:r>
-                <a:r>
-                  <a:rPr>
-                    <a:solidFill>
-                      <a:srgbClr val="657422"/>
-                    </a:solidFill>
-                    <a:latin typeface="Courier"/>
-                  </a:rPr>
-                  <a:t>test =</a:t>
-                </a:r>
-                <a:r>
-                  <a:rPr>
-                    <a:solidFill>
-                      <a:srgbClr val="003B4F"/>
-                    </a:solidFill>
-                    <a:latin typeface="Courier"/>
-                  </a:rPr>
-                  <a:t> </a:t>
-                </a:r>
-                <a:r>
-                  <a:rPr>
-                    <a:solidFill>
-                      <a:srgbClr val="20794D"/>
-                    </a:solidFill>
-                    <a:latin typeface="Courier"/>
-                  </a:rPr>
-                  <a:t>"F"</a:t>
-                </a:r>
-                <a:r>
-                  <a:rPr>
-                    <a:solidFill>
-                      <a:srgbClr val="003B4F"/>
-                    </a:solidFill>
-                    <a:latin typeface="Courier"/>
-                  </a:rPr>
-                  <a:t>)</a:t>
-                </a:r>
-                <a:br/>
-                <a:r>
-                  <a:rPr i="1">
-                    <a:solidFill>
-                      <a:srgbClr val="5E5E5E"/>
-                    </a:solidFill>
-                    <a:latin typeface="Courier"/>
-                  </a:rPr>
-                  <a:t>## Anova Table (Type III tests)</a:t>
-                </a:r>
-                <a:br/>
-                <a:r>
-                  <a:rPr i="1">
-                    <a:solidFill>
-                      <a:srgbClr val="5E5E5E"/>
-                    </a:solidFill>
-                    <a:latin typeface="Courier"/>
-                  </a:rPr>
-                  <a:t>## </a:t>
-                </a:r>
-                <a:br/>
-                <a:r>
-                  <a:rPr i="1">
-                    <a:solidFill>
-                      <a:srgbClr val="5E5E5E"/>
-                    </a:solidFill>
-                    <a:latin typeface="Courier"/>
-                  </a:rPr>
-                  <a:t>## Response: Endemics</a:t>
-                </a:r>
-                <a:br/>
-                <a:r>
-                  <a:rPr i="1">
-                    <a:solidFill>
-                      <a:srgbClr val="5E5E5E"/>
-                    </a:solidFill>
-                    <a:latin typeface="Courier"/>
-                  </a:rPr>
-                  <a:t>##                Sum Sq Df F value    Pr(&gt;F)    </a:t>
-                </a:r>
-                <a:br/>
-                <a:r>
-                  <a:rPr i="1">
-                    <a:solidFill>
-                      <a:srgbClr val="5E5E5E"/>
-                    </a:solidFill>
-                    <a:latin typeface="Courier"/>
-                  </a:rPr>
-                  <a:t>## (Intercept)     349.5  1  1.6392    0.2113    </a:t>
-                </a:r>
-                <a:br/>
-                <a:r>
-                  <a:rPr i="1">
-                    <a:solidFill>
-                      <a:srgbClr val="5E5E5E"/>
-                    </a:solidFill>
-                    <a:latin typeface="Courier"/>
-                  </a:rPr>
-                  <a:t>## size_category 15906.6  2 37.3066 1.697e-08 ***</a:t>
-                </a:r>
-                <a:br/>
-                <a:r>
-                  <a:rPr i="1">
-                    <a:solidFill>
-                      <a:srgbClr val="5E5E5E"/>
-                    </a:solidFill>
-                    <a:latin typeface="Courier"/>
-                  </a:rPr>
-                  <a:t>## Residuals      5756.1 27                      </a:t>
-                </a:r>
-                <a:br/>
-                <a:r>
-                  <a:rPr i="1">
-                    <a:solidFill>
-                      <a:srgbClr val="5E5E5E"/>
-                    </a:solidFill>
-                    <a:latin typeface="Courier"/>
-                  </a:rPr>
-                  <a:t>## ---</a:t>
-                </a:r>
-                <a:br/>
-                <a:r>
-                  <a:rPr i="1">
-                    <a:solidFill>
-                      <a:srgbClr val="5E5E5E"/>
-                    </a:solidFill>
-                    <a:latin typeface="Courier"/>
-                  </a:rPr>
-                  <a:t>## Signif. codes:  0 '***' 0.001 '**' 0.01 '*' 0.05 '.' 0.1 ' ' 1</a:t>
-                </a:r>
-                <a:br/>
-                <a:r>
-                  <a:rPr>
-                    <a:solidFill>
-                      <a:srgbClr val="4758AB"/>
-                    </a:solidFill>
-                    <a:latin typeface="Courier"/>
-                  </a:rPr>
-                  <a:t>Anova</a:t>
-                </a:r>
-                <a:r>
-                  <a:rPr>
-                    <a:solidFill>
-                      <a:srgbClr val="003B4F"/>
-                    </a:solidFill>
-                    <a:latin typeface="Courier"/>
-                  </a:rPr>
-                  <a:t>(model_gaussian, </a:t>
-                </a:r>
-                <a:r>
-                  <a:rPr>
-                    <a:solidFill>
-                      <a:srgbClr val="657422"/>
-                    </a:solidFill>
-                    <a:latin typeface="Courier"/>
-                  </a:rPr>
-                  <a:t>type =</a:t>
-                </a:r>
-                <a:r>
-                  <a:rPr>
-                    <a:solidFill>
-                      <a:srgbClr val="003B4F"/>
-                    </a:solidFill>
-                    <a:latin typeface="Courier"/>
-                  </a:rPr>
-                  <a:t> </a:t>
-                </a:r>
-                <a:r>
-                  <a:rPr>
-                    <a:solidFill>
-                      <a:srgbClr val="20794D"/>
-                    </a:solidFill>
-                    <a:latin typeface="Courier"/>
-                  </a:rPr>
-                  <a:t>"III"</a:t>
-                </a:r>
-                <a:r>
-                  <a:rPr>
-                    <a:solidFill>
-                      <a:srgbClr val="003B4F"/>
-                    </a:solidFill>
-                    <a:latin typeface="Courier"/>
-                  </a:rPr>
-                  <a:t>, </a:t>
-                </a:r>
-                <a:r>
-                  <a:rPr>
-                    <a:solidFill>
-                      <a:srgbClr val="657422"/>
-                    </a:solidFill>
-                    <a:latin typeface="Courier"/>
-                  </a:rPr>
-                  <a:t>test =</a:t>
-                </a:r>
-                <a:r>
-                  <a:rPr>
-                    <a:solidFill>
-                      <a:srgbClr val="003B4F"/>
-                    </a:solidFill>
-                    <a:latin typeface="Courier"/>
-                  </a:rPr>
-                  <a:t> </a:t>
-                </a:r>
-                <a:r>
-                  <a:rPr>
-                    <a:solidFill>
-                      <a:srgbClr val="20794D"/>
-                    </a:solidFill>
-                    <a:latin typeface="Courier"/>
-                  </a:rPr>
-                  <a:t>"F"</a:t>
-                </a:r>
-                <a:r>
-                  <a:rPr>
-                    <a:solidFill>
-                      <a:srgbClr val="003B4F"/>
-                    </a:solidFill>
-                    <a:latin typeface="Courier"/>
-                  </a:rPr>
-                  <a:t>)</a:t>
-                </a:r>
-                <a:br/>
-                <a:r>
-                  <a:rPr i="1">
-                    <a:solidFill>
-                      <a:srgbClr val="5E5E5E"/>
-                    </a:solidFill>
-                    <a:latin typeface="Courier"/>
-                  </a:rPr>
-                  <a:t>## Analysis of Deviance Table (Type III tests)</a:t>
-                </a:r>
-                <a:br/>
-                <a:r>
-                  <a:rPr i="1">
-                    <a:solidFill>
-                      <a:srgbClr val="5E5E5E"/>
-                    </a:solidFill>
-                    <a:latin typeface="Courier"/>
-                  </a:rPr>
-                  <a:t>## </a:t>
-                </a:r>
-                <a:br/>
-                <a:r>
-                  <a:rPr i="1">
-                    <a:solidFill>
-                      <a:srgbClr val="5E5E5E"/>
-                    </a:solidFill>
-                    <a:latin typeface="Courier"/>
-                  </a:rPr>
-                  <a:t>## Response: Endemics</a:t>
-                </a:r>
-                <a:br/>
-                <a:r>
-                  <a:rPr i="1">
-                    <a:solidFill>
-                      <a:srgbClr val="5E5E5E"/>
-                    </a:solidFill>
-                    <a:latin typeface="Courier"/>
-                  </a:rPr>
-                  <a:t>## Error estimate based on Pearson residuals </a:t>
-                </a:r>
-                <a:br/>
-                <a:r>
-                  <a:rPr i="1">
-                    <a:solidFill>
-                      <a:srgbClr val="5E5E5E"/>
-                    </a:solidFill>
-                    <a:latin typeface="Courier"/>
-                  </a:rPr>
-                  <a:t>## </a:t>
-                </a:r>
-                <a:br/>
-                <a:r>
-                  <a:rPr i="1">
-                    <a:solidFill>
-                      <a:srgbClr val="5E5E5E"/>
-                    </a:solidFill>
-                    <a:latin typeface="Courier"/>
-                  </a:rPr>
-                  <a:t>##                Sum Sq Df F values    Pr(&gt;F)    </a:t>
-                </a:r>
-                <a:br/>
-                <a:r>
-                  <a:rPr i="1">
-                    <a:solidFill>
-                      <a:srgbClr val="5E5E5E"/>
-                    </a:solidFill>
-                    <a:latin typeface="Courier"/>
-                  </a:rPr>
-                  <a:t>## size_category 15906.6  2   37.307 1.697e-08 ***</a:t>
-                </a:r>
-                <a:br/>
-                <a:r>
-                  <a:rPr i="1">
-                    <a:solidFill>
-                      <a:srgbClr val="5E5E5E"/>
-                    </a:solidFill>
-                    <a:latin typeface="Courier"/>
-                  </a:rPr>
-                  <a:t>## Residuals      5756.1 27                       </a:t>
-                </a:r>
-                <a:br/>
-                <a:r>
-                  <a:rPr i="1">
-                    <a:solidFill>
-                      <a:srgbClr val="5E5E5E"/>
-                    </a:solidFill>
-                    <a:latin typeface="Courier"/>
-                  </a:rPr>
-                  <a:t>## ---</a:t>
-                </a:r>
-                <a:br/>
-                <a:r>
-                  <a:rPr i="1">
-                    <a:solidFill>
-                      <a:srgbClr val="5E5E5E"/>
-                    </a:solidFill>
-                    <a:latin typeface="Courier"/>
-                  </a:rPr>
-                  <a:t>## Signif. codes:  0 '***' 0.001 '**' 0.01 '*' 0.05 '.' 0.1 ' ' 1</a:t>
-                </a:r>
-              </a:p>
-            </p:txBody>
-          </p:sp>
-        </mc:Choice>
-      </mc:AlternateContent>
-      <p:sp>
-        <p:nvSpPr>
-          <p:cNvPr id="5" name="Text Placeholder 4"/>
-          <p:cNvSpPr>
-            <a:spLocks noGrp="1"/>
-          </p:cNvSpPr>
-          <p:nvPr>
-            <p:ph idx="3" sz="quarter" type="body"/>
-          </p:nvPr>
-        </p:nvSpPr>
-        <p:spPr/>
-        <p:txBody>
-          <a:bodyPr/>
-          <a:lstStyle/>
-          <a:p>
-            <a:pPr lvl="0" indent="0" marL="0">
-              <a:buNone/>
-            </a:pPr>
-            <a:r>
-              <a:rPr/>
-              <a:t>Visualizing the results:</a:t>
-            </a:r>
-          </a:p>
-        </p:txBody>
-      </p:sp>
-      <p:pic>
-        <p:nvPicPr>
-          <p:cNvPr descr="14_01_lecture_powerpoint_files/figure-pptx/gaussian-plot-1.png" id="0" name="Picture 1"/>
-          <p:cNvPicPr>
-            <a:picLocks noGrp="1" noChangeAspect="1"/>
-          </p:cNvPicPr>
-          <p:nvPr/>
-        </p:nvPicPr>
-        <p:blipFill>
-          <a:blip r:embed="rId2"/>
-          <a:stretch>
-            <a:fillRect/>
-          </a:stretch>
-        </p:blipFill>
-        <p:spPr bwMode="auto">
-          <a:xfrm>
-            <a:off x="4749800" y="1689100"/>
-            <a:ext cx="4038600" cy="2489200"/>
-          </a:xfrm>
-          <a:prstGeom prst="rect">
-            <a:avLst/>
-          </a:prstGeom>
-          <a:noFill/>
-          <a:ln w="9525">
-            <a:noFill/>
-            <a:headEnd/>
-            <a:tailEnd/>
-          </a:ln>
-        </p:spPr>
-      </p:pic>
     </p:spTree>
   </p:cSld>
 </p:sld>

--- a/docs/ecostats_lectures/lecture_14/14_01_lecture_powerpoint.pptx
+++ b/docs/ecostats_lectures/lecture_14/14_01_lecture_powerpoint.pptx
@@ -4323,7 +4323,7 @@
                 <a:pPr lvl="1"/>
                 <a:r>
                   <a:rPr/>
-                  <a:t>“Medium” island predicted to have 3.81x more species than “Small” island, on average</a:t>
+                  <a:t>“Medium” predicted to have 3.81x more spp than “Small” island</a:t>
                 </a:r>
               </a:p>
               <a:p>
@@ -11658,8 +11658,11 @@
         <p:spPr>
           <a:xfrm>
             <a:off x="0" y="0"/>
-            <a:ext cx="9144000" cy="582780"/>
+            <a:ext cx="9144000" cy="602780"/>
           </a:xfrm>
+          <a:solidFill>
+            <a:srgbClr val="70121D"/>
+          </a:solidFill>
         </p:spPr>
         <p:txBody>
           <a:bodyPr/>
@@ -11682,7 +11685,7 @@
             <a:spLocks noGrp="1"/>
           </p:cNvSpPr>
           <p:nvPr>
-            <p:ph idx="1"/>
+            <p:ph idx="1" sz="half"/>
           </p:nvPr>
         </p:nvSpPr>
         <p:spPr/>
@@ -11690,15 +11693,6 @@
           <a:bodyPr/>
           <a:lstStyle/>
           <a:p>
-            <a:pPr lvl="0" indent="0" marL="1270000">
-              <a:buNone/>
-            </a:pPr>
-            <a:r>
-              <a:rPr sz="2000" b="1"/>
-              <a:t>Important</a:t>
-            </a:r>
-          </a:p>
-          <a:p>
             <a:pPr lvl="0" indent="0">
               <a:buNone/>
             </a:pPr>
@@ -12318,17 +12312,99 @@
                 </a:solidFill>
                 <a:latin typeface="Courier"/>
               </a:rPr>
-              <a:t>))</a:t>
+              <a:t>)))</a:t>
             </a:r>
             <a:br/>
             <a:r>
               <a:rPr>
                 <a:solidFill>
+                  <a:srgbClr val="5E5E5E"/>
+                </a:solidFill>
+                <a:latin typeface="Courier"/>
+              </a:rPr>
+              <a:t># Approach 1: Log transformation + ANOVA</a:t>
+            </a:r>
+            <a:br/>
+            <a:r>
+              <a:rPr>
+                <a:solidFill>
                   <a:srgbClr val="003B4F"/>
                 </a:solidFill>
                 <a:latin typeface="Courier"/>
               </a:rPr>
-              <a:t>)</a:t>
+              <a:t>model_log &lt;- </a:t>
+            </a:r>
+            <a:r>
+              <a:rPr>
+                <a:solidFill>
+                  <a:srgbClr val="4758AB"/>
+                </a:solidFill>
+                <a:latin typeface="Courier"/>
+              </a:rPr>
+              <a:t>lm</a:t>
+            </a:r>
+            <a:r>
+              <a:rPr>
+                <a:solidFill>
+                  <a:srgbClr val="003B4F"/>
+                </a:solidFill>
+                <a:latin typeface="Courier"/>
+              </a:rPr>
+              <a:t>(</a:t>
+            </a:r>
+            <a:r>
+              <a:rPr>
+                <a:solidFill>
+                  <a:srgbClr val="4758AB"/>
+                </a:solidFill>
+                <a:latin typeface="Courier"/>
+              </a:rPr>
+              <a:t>log</a:t>
+            </a:r>
+            <a:r>
+              <a:rPr>
+                <a:solidFill>
+                  <a:srgbClr val="003B4F"/>
+                </a:solidFill>
+                <a:latin typeface="Courier"/>
+              </a:rPr>
+              <a:t>(biomass) </a:t>
+            </a:r>
+            <a:r>
+              <a:rPr>
+                <a:solidFill>
+                  <a:srgbClr val="5E5E5E"/>
+                </a:solidFill>
+                <a:latin typeface="Courier"/>
+              </a:rPr>
+              <a:t>~</a:t>
+            </a:r>
+            <a:r>
+              <a:rPr>
+                <a:solidFill>
+                  <a:srgbClr val="003B4F"/>
+                </a:solidFill>
+                <a:latin typeface="Courier"/>
+              </a:rPr>
+              <a:t> treatment, </a:t>
+            </a:r>
+            <a:r>
+              <a:rPr>
+                <a:solidFill>
+                  <a:srgbClr val="657422"/>
+                </a:solidFill>
+                <a:latin typeface="Courier"/>
+              </a:rPr>
+              <a:t>data =</a:t>
+            </a:r>
+            <a:r>
+              <a:rPr>
+                <a:solidFill>
+                  <a:srgbClr val="003B4F"/>
+                </a:solidFill>
+                <a:latin typeface="Courier"/>
+              </a:rPr>
+              <a:t> treatment_data)</a:t>
             </a:r>
             <a:br/>
             <a:br/>
@@ -12339,7 +12415,7 @@
                 </a:solidFill>
                 <a:latin typeface="Courier"/>
               </a:rPr>
-              <a:t># Approach 1: Log transformation + ANOVA</a:t>
+              <a:t># Approach 2: Gamma GLM with log link</a:t>
             </a:r>
             <a:br/>
             <a:r>
@@ -12349,7 +12425,7 @@
                 </a:solidFill>
                 <a:latin typeface="Courier"/>
               </a:rPr>
-              <a:t>model_log &lt;- </a:t>
+              <a:t>model_glm &lt;- </a:t>
             </a:r>
             <a:r>
               <a:rPr>
@@ -12358,7 +12434,7 @@
                 </a:solidFill>
                 <a:latin typeface="Courier"/>
               </a:rPr>
-              <a:t>lm</a:t>
+              <a:t>glm</a:t>
             </a:r>
             <a:r>
               <a:rPr>
@@ -12367,16 +12443,184 @@
                 </a:solidFill>
                 <a:latin typeface="Courier"/>
               </a:rPr>
+              <a:t>(biomass </a:t>
+            </a:r>
+            <a:r>
+              <a:rPr>
+                <a:solidFill>
+                  <a:srgbClr val="5E5E5E"/>
+                </a:solidFill>
+                <a:latin typeface="Courier"/>
+              </a:rPr>
+              <a:t>~</a:t>
+            </a:r>
+            <a:r>
+              <a:rPr>
+                <a:solidFill>
+                  <a:srgbClr val="003B4F"/>
+                </a:solidFill>
+                <a:latin typeface="Courier"/>
+              </a:rPr>
+              <a:t> treatment, </a:t>
+            </a:r>
+            <a:br/>
+            <a:r>
+              <a:rPr>
+                <a:solidFill>
+                  <a:srgbClr val="003B4F"/>
+                </a:solidFill>
+                <a:latin typeface="Courier"/>
+              </a:rPr>
+              <a:t>                 </a:t>
+            </a:r>
+            <a:r>
+              <a:rPr>
+                <a:solidFill>
+                  <a:srgbClr val="657422"/>
+                </a:solidFill>
+                <a:latin typeface="Courier"/>
+              </a:rPr>
+              <a:t>family =</a:t>
+            </a:r>
+            <a:r>
+              <a:rPr>
+                <a:solidFill>
+                  <a:srgbClr val="003B4F"/>
+                </a:solidFill>
+                <a:latin typeface="Courier"/>
+              </a:rPr>
+              <a:t> </a:t>
+            </a:r>
+            <a:r>
+              <a:rPr>
+                <a:solidFill>
+                  <a:srgbClr val="4758AB"/>
+                </a:solidFill>
+                <a:latin typeface="Courier"/>
+              </a:rPr>
+              <a:t>Gamma</a:t>
+            </a:r>
+            <a:r>
+              <a:rPr>
+                <a:solidFill>
+                  <a:srgbClr val="003B4F"/>
+                </a:solidFill>
+                <a:latin typeface="Courier"/>
+              </a:rPr>
               <a:t>(</a:t>
             </a:r>
             <a:r>
               <a:rPr>
                 <a:solidFill>
+                  <a:srgbClr val="657422"/>
+                </a:solidFill>
+                <a:latin typeface="Courier"/>
+              </a:rPr>
+              <a:t>link =</a:t>
+            </a:r>
+            <a:r>
+              <a:rPr>
+                <a:solidFill>
+                  <a:srgbClr val="003B4F"/>
+                </a:solidFill>
+                <a:latin typeface="Courier"/>
+              </a:rPr>
+              <a:t> </a:t>
+            </a:r>
+            <a:r>
+              <a:rPr>
+                <a:solidFill>
+                  <a:srgbClr val="20794D"/>
+                </a:solidFill>
+                <a:latin typeface="Courier"/>
+              </a:rPr>
+              <a:t>"log"</a:t>
+            </a:r>
+            <a:r>
+              <a:rPr>
+                <a:solidFill>
+                  <a:srgbClr val="003B4F"/>
+                </a:solidFill>
+                <a:latin typeface="Courier"/>
+              </a:rPr>
+              <a:t>), </a:t>
+            </a:r>
+            <a:br/>
+            <a:r>
+              <a:rPr>
+                <a:solidFill>
+                  <a:srgbClr val="003B4F"/>
+                </a:solidFill>
+                <a:latin typeface="Courier"/>
+              </a:rPr>
+              <a:t>                 </a:t>
+            </a:r>
+            <a:r>
+              <a:rPr>
+                <a:solidFill>
+                  <a:srgbClr val="657422"/>
+                </a:solidFill>
+                <a:latin typeface="Courier"/>
+              </a:rPr>
+              <a:t>data =</a:t>
+            </a:r>
+            <a:r>
+              <a:rPr>
+                <a:solidFill>
+                  <a:srgbClr val="003B4F"/>
+                </a:solidFill>
+                <a:latin typeface="Courier"/>
+              </a:rPr>
+              <a:t> treatment_data)</a:t>
+            </a:r>
+          </a:p>
+        </p:txBody>
+      </p:sp>
+      <p:sp>
+        <p:nvSpPr>
+          <p:cNvPr id="4" name="Content Placeholder 3"/>
+          <p:cNvSpPr>
+            <a:spLocks noGrp="1"/>
+          </p:cNvSpPr>
+          <p:nvPr>
+            <p:ph idx="2" sz="half"/>
+          </p:nvPr>
+        </p:nvSpPr>
+        <p:spPr/>
+        <p:txBody>
+          <a:bodyPr/>
+          <a:lstStyle/>
+          <a:p>
+            <a:pPr lvl="0" indent="0" marL="0">
+              <a:buNone/>
+            </a:pPr>
+            <a:r>
+              <a:rPr/>
+              <a:t>Here is the difference</a:t>
+            </a:r>
+          </a:p>
+          <a:p>
+            <a:pPr lvl="0" indent="0">
+              <a:buNone/>
+            </a:pPr>
+            <a:r>
+              <a:rPr>
+                <a:solidFill>
+                  <a:srgbClr val="5E5E5E"/>
+                </a:solidFill>
+                <a:latin typeface="Courier"/>
+              </a:rPr>
+              <a:t># Compare predictions on original scale</a:t>
+            </a:r>
+            <a:br/>
+            <a:r>
+              <a:rPr>
+                <a:solidFill>
                   <a:srgbClr val="4758AB"/>
                 </a:solidFill>
                 <a:latin typeface="Courier"/>
               </a:rPr>
-              <a:t>log</a:t>
+              <a:t>cat</a:t>
             </a:r>
             <a:r>
               <a:rPr>
@@ -12385,7 +12629,16 @@
                 </a:solidFill>
                 <a:latin typeface="Courier"/>
               </a:rPr>
-              <a:t>(biomass) </a:t>
+              <a:t>(</a:t>
+            </a:r>
+            <a:r>
+              <a:rPr>
+                <a:solidFill>
+                  <a:srgbClr val="20794D"/>
+                </a:solidFill>
+                <a:latin typeface="Courier"/>
+              </a:rPr>
+              <a:t>"logged response variable</a:t>
             </a:r>
             <a:r>
               <a:rPr>
@@ -12394,6 +12647,62 @@
                 </a:solidFill>
                 <a:latin typeface="Courier"/>
               </a:rPr>
+              <a:t>\n\n</a:t>
+            </a:r>
+            <a:r>
+              <a:rPr>
+                <a:solidFill>
+                  <a:srgbClr val="20794D"/>
+                </a:solidFill>
+                <a:latin typeface="Courier"/>
+              </a:rPr>
+              <a:t>"</a:t>
+            </a:r>
+            <a:r>
+              <a:rPr>
+                <a:solidFill>
+                  <a:srgbClr val="003B4F"/>
+                </a:solidFill>
+                <a:latin typeface="Courier"/>
+              </a:rPr>
+              <a:t>)</a:t>
+            </a:r>
+            <a:br/>
+            <a:r>
+              <a:rPr i="1">
+                <a:solidFill>
+                  <a:srgbClr val="5E5E5E"/>
+                </a:solidFill>
+                <a:latin typeface="Courier"/>
+              </a:rPr>
+              <a:t>## logged response variable</a:t>
+            </a:r>
+            <a:br/>
+            <a:r>
+              <a:rPr>
+                <a:solidFill>
+                  <a:srgbClr val="4758AB"/>
+                </a:solidFill>
+                <a:latin typeface="Courier"/>
+              </a:rPr>
+              <a:t>emmeans</a:t>
+            </a:r>
+            <a:r>
+              <a:rPr>
+                <a:solidFill>
+                  <a:srgbClr val="003B4F"/>
+                </a:solidFill>
+                <a:latin typeface="Courier"/>
+              </a:rPr>
+              <a:t>(model_log, </a:t>
+            </a:r>
+            <a:r>
+              <a:rPr>
+                <a:solidFill>
+                  <a:srgbClr val="5E5E5E"/>
+                </a:solidFill>
+                <a:latin typeface="Courier"/>
+              </a:rPr>
               <a:t>~</a:t>
             </a:r>
             <a:r>
@@ -12403,7 +12712,7 @@
                 </a:solidFill>
                 <a:latin typeface="Courier"/>
               </a:rPr>
-              <a:t> treatment, </a:t>
+              <a:t>treatment, </a:t>
             </a:r>
             <a:r>
               <a:rPr>
@@ -12412,7 +12721,7 @@
                 </a:solidFill>
                 <a:latin typeface="Courier"/>
               </a:rPr>
-              <a:t>data =</a:t>
+              <a:t>type =</a:t>
             </a:r>
             <a:r>
               <a:rPr>
@@ -12421,29 +12730,161 @@
                 </a:solidFill>
                 <a:latin typeface="Courier"/>
               </a:rPr>
-              <a:t> treatment_data)</a:t>
+              <a:t> </a:t>
+            </a:r>
+            <a:r>
+              <a:rPr>
+                <a:solidFill>
+                  <a:srgbClr val="20794D"/>
+                </a:solidFill>
+                <a:latin typeface="Courier"/>
+              </a:rPr>
+              <a:t>"response"</a:t>
+            </a:r>
+            <a:r>
+              <a:rPr>
+                <a:solidFill>
+                  <a:srgbClr val="003B4F"/>
+                </a:solidFill>
+                <a:latin typeface="Courier"/>
+              </a:rPr>
+              <a:t>)  </a:t>
+            </a:r>
+            <a:r>
+              <a:rPr>
+                <a:solidFill>
+                  <a:srgbClr val="5E5E5E"/>
+                </a:solidFill>
+                <a:latin typeface="Courier"/>
+              </a:rPr>
+              <a:t># Geometric means</a:t>
             </a:r>
             <a:br/>
+            <a:r>
+              <a:rPr i="1">
+                <a:solidFill>
+                  <a:srgbClr val="5E5E5E"/>
+                </a:solidFill>
+                <a:latin typeface="Courier"/>
+              </a:rPr>
+              <a:t>##  treatment response    SE df lower.CL upper.CL</a:t>
+            </a:r>
             <a:br/>
             <a:r>
-              <a:rPr>
+              <a:rPr i="1">
                 <a:solidFill>
                   <a:srgbClr val="5E5E5E"/>
                 </a:solidFill>
                 <a:latin typeface="Courier"/>
               </a:rPr>
-              <a:t># Approach 2: Gamma GLM with log link</a:t>
+              <a:t>##  Control       7.93 0.818 57     6.45     9.75</a:t>
             </a:r>
             <a:br/>
             <a:r>
+              <a:rPr i="1">
+                <a:solidFill>
+                  <a:srgbClr val="5E5E5E"/>
+                </a:solidFill>
+                <a:latin typeface="Courier"/>
+              </a:rPr>
+              <a:t>##  High         21.18 2.180 57    17.23    26.04</a:t>
+            </a:r>
+            <a:br/>
+            <a:r>
+              <a:rPr i="1">
+                <a:solidFill>
+                  <a:srgbClr val="5E5E5E"/>
+                </a:solidFill>
+                <a:latin typeface="Courier"/>
+              </a:rPr>
+              <a:t>##  Low          11.87 1.220 57     9.66    14.60</a:t>
+            </a:r>
+            <a:br/>
+            <a:r>
+              <a:rPr i="1">
+                <a:solidFill>
+                  <a:srgbClr val="5E5E5E"/>
+                </a:solidFill>
+                <a:latin typeface="Courier"/>
+              </a:rPr>
+              <a:t>## </a:t>
+            </a:r>
+            <a:br/>
+            <a:r>
+              <a:rPr i="1">
+                <a:solidFill>
+                  <a:srgbClr val="5E5E5E"/>
+                </a:solidFill>
+                <a:latin typeface="Courier"/>
+              </a:rPr>
+              <a:t>## Confidence level used: 0.95 </a:t>
+            </a:r>
+            <a:br/>
+            <a:r>
+              <a:rPr i="1">
+                <a:solidFill>
+                  <a:srgbClr val="5E5E5E"/>
+                </a:solidFill>
+                <a:latin typeface="Courier"/>
+              </a:rPr>
+              <a:t>## Intervals are back-transformed from the log scale</a:t>
+            </a:r>
+            <a:br/>
+            <a:r>
+              <a:rPr>
+                <a:solidFill>
+                  <a:srgbClr val="4758AB"/>
+                </a:solidFill>
+                <a:latin typeface="Courier"/>
+              </a:rPr>
+              <a:t>cat</a:t>
+            </a:r>
+            <a:r>
               <a:rPr>
                 <a:solidFill>
                   <a:srgbClr val="003B4F"/>
                 </a:solidFill>
                 <a:latin typeface="Courier"/>
               </a:rPr>
-              <a:t>model_glm &lt;- </a:t>
-            </a:r>
+              <a:t>(</a:t>
+            </a:r>
+            <a:r>
+              <a:rPr>
+                <a:solidFill>
+                  <a:srgbClr val="20794D"/>
+                </a:solidFill>
+                <a:latin typeface="Courier"/>
+              </a:rPr>
+              <a:t>"</a:t>
+            </a:r>
+            <a:r>
+              <a:rPr>
+                <a:solidFill>
+                  <a:srgbClr val="5E5E5E"/>
+                </a:solidFill>
+                <a:latin typeface="Courier"/>
+              </a:rPr>
+              <a:t>\n\n</a:t>
+            </a:r>
+            <a:r>
+              <a:rPr>
+                <a:solidFill>
+                  <a:srgbClr val="20794D"/>
+                </a:solidFill>
+                <a:latin typeface="Courier"/>
+              </a:rPr>
+              <a:t>"</a:t>
+            </a:r>
+            <a:r>
+              <a:rPr>
+                <a:solidFill>
+                  <a:srgbClr val="003B4F"/>
+                </a:solidFill>
+                <a:latin typeface="Courier"/>
+              </a:rPr>
+              <a:t>)</a:t>
+            </a:r>
+            <a:br/>
             <a:r>
               <a:rPr>
                 <a:solidFill>
@@ -12451,7 +12892,7 @@
                 </a:solidFill>
                 <a:latin typeface="Courier"/>
               </a:rPr>
-              <a:t>glm</a:t>
+              <a:t>cat</a:t>
             </a:r>
             <a:r>
               <a:rPr>
@@ -12460,7 +12901,16 @@
                 </a:solidFill>
                 <a:latin typeface="Courier"/>
               </a:rPr>
-              <a:t>(biomass </a:t>
+              <a:t>(</a:t>
+            </a:r>
+            <a:r>
+              <a:rPr>
+                <a:solidFill>
+                  <a:srgbClr val="20794D"/>
+                </a:solidFill>
+                <a:latin typeface="Courier"/>
+              </a:rPr>
+              <a:t>"using glm opn original scale</a:t>
             </a:r>
             <a:r>
               <a:rPr>
@@ -12469,6 +12919,62 @@
                 </a:solidFill>
                 <a:latin typeface="Courier"/>
               </a:rPr>
+              <a:t>\n\n</a:t>
+            </a:r>
+            <a:r>
+              <a:rPr>
+                <a:solidFill>
+                  <a:srgbClr val="20794D"/>
+                </a:solidFill>
+                <a:latin typeface="Courier"/>
+              </a:rPr>
+              <a:t>"</a:t>
+            </a:r>
+            <a:r>
+              <a:rPr>
+                <a:solidFill>
+                  <a:srgbClr val="003B4F"/>
+                </a:solidFill>
+                <a:latin typeface="Courier"/>
+              </a:rPr>
+              <a:t>)</a:t>
+            </a:r>
+            <a:br/>
+            <a:r>
+              <a:rPr i="1">
+                <a:solidFill>
+                  <a:srgbClr val="5E5E5E"/>
+                </a:solidFill>
+                <a:latin typeface="Courier"/>
+              </a:rPr>
+              <a:t>## using glm opn original scale</a:t>
+            </a:r>
+            <a:br/>
+            <a:r>
+              <a:rPr>
+                <a:solidFill>
+                  <a:srgbClr val="4758AB"/>
+                </a:solidFill>
+                <a:latin typeface="Courier"/>
+              </a:rPr>
+              <a:t>emmeans</a:t>
+            </a:r>
+            <a:r>
+              <a:rPr>
+                <a:solidFill>
+                  <a:srgbClr val="003B4F"/>
+                </a:solidFill>
+                <a:latin typeface="Courier"/>
+              </a:rPr>
+              <a:t>(model_glm, </a:t>
+            </a:r>
+            <a:r>
+              <a:rPr>
+                <a:solidFill>
+                  <a:srgbClr val="5E5E5E"/>
+                </a:solidFill>
+                <a:latin typeface="Courier"/>
+              </a:rPr>
               <a:t>~</a:t>
             </a:r>
             <a:r>
@@ -12478,183 +12984,102 @@
                 </a:solidFill>
                 <a:latin typeface="Courier"/>
               </a:rPr>
-              <a:t> treatment, </a:t>
+              <a:t>treatment, </a:t>
+            </a:r>
+            <a:r>
+              <a:rPr>
+                <a:solidFill>
+                  <a:srgbClr val="657422"/>
+                </a:solidFill>
+                <a:latin typeface="Courier"/>
+              </a:rPr>
+              <a:t>type =</a:t>
+            </a:r>
+            <a:r>
+              <a:rPr>
+                <a:solidFill>
+                  <a:srgbClr val="003B4F"/>
+                </a:solidFill>
+                <a:latin typeface="Courier"/>
+              </a:rPr>
+              <a:t> </a:t>
+            </a:r>
+            <a:r>
+              <a:rPr>
+                <a:solidFill>
+                  <a:srgbClr val="20794D"/>
+                </a:solidFill>
+                <a:latin typeface="Courier"/>
+              </a:rPr>
+              <a:t>"response"</a:t>
+            </a:r>
+            <a:r>
+              <a:rPr>
+                <a:solidFill>
+                  <a:srgbClr val="003B4F"/>
+                </a:solidFill>
+                <a:latin typeface="Courier"/>
+              </a:rPr>
+              <a:t>)  </a:t>
+            </a:r>
+            <a:r>
+              <a:rPr>
+                <a:solidFill>
+                  <a:srgbClr val="5E5E5E"/>
+                </a:solidFill>
+                <a:latin typeface="Courier"/>
+              </a:rPr>
+              <a:t># Arithmetic means</a:t>
             </a:r>
             <a:br/>
             <a:r>
-              <a:rPr>
-                <a:solidFill>
-                  <a:srgbClr val="003B4F"/>
-                </a:solidFill>
-                <a:latin typeface="Courier"/>
-              </a:rPr>
-              <a:t>                 </a:t>
-            </a:r>
-            <a:r>
-              <a:rPr>
-                <a:solidFill>
-                  <a:srgbClr val="657422"/>
-                </a:solidFill>
-                <a:latin typeface="Courier"/>
-              </a:rPr>
-              <a:t>family =</a:t>
-            </a:r>
-            <a:r>
-              <a:rPr>
-                <a:solidFill>
-                  <a:srgbClr val="003B4F"/>
-                </a:solidFill>
-                <a:latin typeface="Courier"/>
-              </a:rPr>
-              <a:t> </a:t>
-            </a:r>
-            <a:r>
-              <a:rPr>
-                <a:solidFill>
-                  <a:srgbClr val="4758AB"/>
-                </a:solidFill>
-                <a:latin typeface="Courier"/>
-              </a:rPr>
-              <a:t>Gamma</a:t>
-            </a:r>
-            <a:r>
-              <a:rPr>
-                <a:solidFill>
-                  <a:srgbClr val="003B4F"/>
-                </a:solidFill>
-                <a:latin typeface="Courier"/>
-              </a:rPr>
-              <a:t>(</a:t>
-            </a:r>
-            <a:r>
-              <a:rPr>
-                <a:solidFill>
-                  <a:srgbClr val="657422"/>
-                </a:solidFill>
-                <a:latin typeface="Courier"/>
-              </a:rPr>
-              <a:t>link =</a:t>
-            </a:r>
-            <a:r>
-              <a:rPr>
-                <a:solidFill>
-                  <a:srgbClr val="003B4F"/>
-                </a:solidFill>
-                <a:latin typeface="Courier"/>
-              </a:rPr>
-              <a:t> </a:t>
-            </a:r>
-            <a:r>
-              <a:rPr>
-                <a:solidFill>
-                  <a:srgbClr val="20794D"/>
-                </a:solidFill>
-                <a:latin typeface="Courier"/>
-              </a:rPr>
-              <a:t>"log"</a:t>
-            </a:r>
-            <a:r>
-              <a:rPr>
-                <a:solidFill>
-                  <a:srgbClr val="003B4F"/>
-                </a:solidFill>
-                <a:latin typeface="Courier"/>
-              </a:rPr>
-              <a:t>), </a:t>
+              <a:rPr i="1">
+                <a:solidFill>
+                  <a:srgbClr val="5E5E5E"/>
+                </a:solidFill>
+                <a:latin typeface="Courier"/>
+              </a:rPr>
+              <a:t>##  treatment response    SE df lower.CL upper.CL</a:t>
             </a:r>
             <a:br/>
             <a:r>
-              <a:rPr>
-                <a:solidFill>
-                  <a:srgbClr val="003B4F"/>
-                </a:solidFill>
-                <a:latin typeface="Courier"/>
-              </a:rPr>
-              <a:t>                 </a:t>
-            </a:r>
-            <a:r>
-              <a:rPr>
-                <a:solidFill>
-                  <a:srgbClr val="657422"/>
-                </a:solidFill>
-                <a:latin typeface="Courier"/>
-              </a:rPr>
-              <a:t>data =</a:t>
-            </a:r>
-            <a:r>
-              <a:rPr>
-                <a:solidFill>
-                  <a:srgbClr val="003B4F"/>
-                </a:solidFill>
-                <a:latin typeface="Courier"/>
-              </a:rPr>
-              <a:t> treatment_data)</a:t>
+              <a:rPr i="1">
+                <a:solidFill>
+                  <a:srgbClr val="5E5E5E"/>
+                </a:solidFill>
+                <a:latin typeface="Courier"/>
+              </a:rPr>
+              <a:t>##  Control       8.86 0.939 57     7.16     11.0</a:t>
             </a:r>
             <a:br/>
+            <a:r>
+              <a:rPr i="1">
+                <a:solidFill>
+                  <a:srgbClr val="5E5E5E"/>
+                </a:solidFill>
+                <a:latin typeface="Courier"/>
+              </a:rPr>
+              <a:t>##  High         23.73 2.520 57    19.19     29.3</a:t>
+            </a:r>
             <a:br/>
             <a:r>
-              <a:rPr>
+              <a:rPr i="1">
                 <a:solidFill>
                   <a:srgbClr val="5E5E5E"/>
                 </a:solidFill>
                 <a:latin typeface="Courier"/>
               </a:rPr>
-              <a:t># Compare predictions on original scale</a:t>
+              <a:t>##  Low          12.84 1.360 57    10.39     15.9</a:t>
             </a:r>
             <a:br/>
             <a:r>
-              <a:rPr>
-                <a:solidFill>
-                  <a:srgbClr val="4758AB"/>
-                </a:solidFill>
-                <a:latin typeface="Courier"/>
-              </a:rPr>
-              <a:t>cat</a:t>
-            </a:r>
-            <a:r>
-              <a:rPr>
-                <a:solidFill>
-                  <a:srgbClr val="003B4F"/>
-                </a:solidFill>
-                <a:latin typeface="Courier"/>
-              </a:rPr>
-              <a:t>(</a:t>
-            </a:r>
-            <a:r>
-              <a:rPr>
-                <a:solidFill>
-                  <a:srgbClr val="20794D"/>
-                </a:solidFill>
-                <a:latin typeface="Courier"/>
-              </a:rPr>
-              <a:t>"logged response variable</a:t>
-            </a:r>
-            <a:r>
-              <a:rPr>
+              <a:rPr i="1">
                 <a:solidFill>
                   <a:srgbClr val="5E5E5E"/>
                 </a:solidFill>
                 <a:latin typeface="Courier"/>
               </a:rPr>
-              <a:t>\n\n</a:t>
-            </a:r>
-            <a:r>
-              <a:rPr>
-                <a:solidFill>
-                  <a:srgbClr val="20794D"/>
-                </a:solidFill>
-                <a:latin typeface="Courier"/>
-              </a:rPr>
-              <a:t>"</a:t>
-            </a:r>
-            <a:r>
-              <a:rPr>
-                <a:solidFill>
-                  <a:srgbClr val="003B4F"/>
-                </a:solidFill>
-                <a:latin typeface="Courier"/>
-              </a:rPr>
-              <a:t>)</a:t>
+              <a:t>## </a:t>
             </a:r>
             <a:br/>
             <a:r>
@@ -12664,442 +13089,17 @@
                 </a:solidFill>
                 <a:latin typeface="Courier"/>
               </a:rPr>
-              <a:t>## logged response variable</a:t>
+              <a:t>## Confidence level used: 0.95 </a:t>
             </a:r>
             <a:br/>
             <a:r>
-              <a:rPr>
-                <a:solidFill>
-                  <a:srgbClr val="4758AB"/>
-                </a:solidFill>
-                <a:latin typeface="Courier"/>
-              </a:rPr>
-              <a:t>emmeans</a:t>
-            </a:r>
-            <a:r>
-              <a:rPr>
-                <a:solidFill>
-                  <a:srgbClr val="003B4F"/>
-                </a:solidFill>
-                <a:latin typeface="Courier"/>
-              </a:rPr>
-              <a:t>(model_log, </a:t>
-            </a:r>
-            <a:r>
-              <a:rPr>
+              <a:rPr i="1">
                 <a:solidFill>
                   <a:srgbClr val="5E5E5E"/>
                 </a:solidFill>
                 <a:latin typeface="Courier"/>
               </a:rPr>
-              <a:t>~</a:t>
-            </a:r>
-            <a:r>
-              <a:rPr>
-                <a:solidFill>
-                  <a:srgbClr val="003B4F"/>
-                </a:solidFill>
-                <a:latin typeface="Courier"/>
-              </a:rPr>
-              <a:t>treatment, </a:t>
-            </a:r>
-            <a:r>
-              <a:rPr>
-                <a:solidFill>
-                  <a:srgbClr val="657422"/>
-                </a:solidFill>
-                <a:latin typeface="Courier"/>
-              </a:rPr>
-              <a:t>type =</a:t>
-            </a:r>
-            <a:r>
-              <a:rPr>
-                <a:solidFill>
-                  <a:srgbClr val="003B4F"/>
-                </a:solidFill>
-                <a:latin typeface="Courier"/>
-              </a:rPr>
-              <a:t> </a:t>
-            </a:r>
-            <a:r>
-              <a:rPr>
-                <a:solidFill>
-                  <a:srgbClr val="20794D"/>
-                </a:solidFill>
-                <a:latin typeface="Courier"/>
-              </a:rPr>
-              <a:t>"response"</a:t>
-            </a:r>
-            <a:r>
-              <a:rPr>
-                <a:solidFill>
-                  <a:srgbClr val="003B4F"/>
-                </a:solidFill>
-                <a:latin typeface="Courier"/>
-              </a:rPr>
-              <a:t>)  </a:t>
-            </a:r>
-            <a:r>
-              <a:rPr>
-                <a:solidFill>
-                  <a:srgbClr val="5E5E5E"/>
-                </a:solidFill>
-                <a:latin typeface="Courier"/>
-              </a:rPr>
-              <a:t># Geometric means</a:t>
-            </a:r>
-            <a:br/>
-            <a:r>
-              <a:rPr i="1">
-                <a:solidFill>
-                  <a:srgbClr val="5E5E5E"/>
-                </a:solidFill>
-                <a:latin typeface="Courier"/>
-              </a:rPr>
-              <a:t>##  treatment response    SE df lower.CL upper.CL</a:t>
-            </a:r>
-            <a:br/>
-            <a:r>
-              <a:rPr i="1">
-                <a:solidFill>
-                  <a:srgbClr val="5E5E5E"/>
-                </a:solidFill>
-                <a:latin typeface="Courier"/>
-              </a:rPr>
-              <a:t>##  Control       7.93 0.818 57     6.45     9.75</a:t>
-            </a:r>
-            <a:br/>
-            <a:r>
-              <a:rPr i="1">
-                <a:solidFill>
-                  <a:srgbClr val="5E5E5E"/>
-                </a:solidFill>
-                <a:latin typeface="Courier"/>
-              </a:rPr>
-              <a:t>##  High         21.18 2.180 57    17.23    26.04</a:t>
-            </a:r>
-            <a:br/>
-            <a:r>
-              <a:rPr i="1">
-                <a:solidFill>
-                  <a:srgbClr val="5E5E5E"/>
-                </a:solidFill>
-                <a:latin typeface="Courier"/>
-              </a:rPr>
-              <a:t>##  Low          11.87 1.220 57     9.66    14.60</a:t>
-            </a:r>
-            <a:br/>
-            <a:r>
-              <a:rPr i="1">
-                <a:solidFill>
-                  <a:srgbClr val="5E5E5E"/>
-                </a:solidFill>
-                <a:latin typeface="Courier"/>
-              </a:rPr>
-              <a:t>## </a:t>
-            </a:r>
-            <a:br/>
-            <a:r>
-              <a:rPr i="1">
-                <a:solidFill>
-                  <a:srgbClr val="5E5E5E"/>
-                </a:solidFill>
-                <a:latin typeface="Courier"/>
-              </a:rPr>
-              <a:t>## Confidence level used: 0.95 </a:t>
-            </a:r>
-            <a:br/>
-            <a:r>
-              <a:rPr i="1">
-                <a:solidFill>
-                  <a:srgbClr val="5E5E5E"/>
-                </a:solidFill>
-                <a:latin typeface="Courier"/>
-              </a:rPr>
               <a:t>## Intervals are back-transformed from the log scale</a:t>
-            </a:r>
-            <a:br/>
-            <a:r>
-              <a:rPr>
-                <a:solidFill>
-                  <a:srgbClr val="4758AB"/>
-                </a:solidFill>
-                <a:latin typeface="Courier"/>
-              </a:rPr>
-              <a:t>cat</a:t>
-            </a:r>
-            <a:r>
-              <a:rPr>
-                <a:solidFill>
-                  <a:srgbClr val="003B4F"/>
-                </a:solidFill>
-                <a:latin typeface="Courier"/>
-              </a:rPr>
-              <a:t>(</a:t>
-            </a:r>
-            <a:r>
-              <a:rPr>
-                <a:solidFill>
-                  <a:srgbClr val="20794D"/>
-                </a:solidFill>
-                <a:latin typeface="Courier"/>
-              </a:rPr>
-              <a:t>"</a:t>
-            </a:r>
-            <a:r>
-              <a:rPr>
-                <a:solidFill>
-                  <a:srgbClr val="5E5E5E"/>
-                </a:solidFill>
-                <a:latin typeface="Courier"/>
-              </a:rPr>
-              <a:t>\n\n</a:t>
-            </a:r>
-            <a:r>
-              <a:rPr>
-                <a:solidFill>
-                  <a:srgbClr val="20794D"/>
-                </a:solidFill>
-                <a:latin typeface="Courier"/>
-              </a:rPr>
-              <a:t>"</a:t>
-            </a:r>
-            <a:r>
-              <a:rPr>
-                <a:solidFill>
-                  <a:srgbClr val="003B4F"/>
-                </a:solidFill>
-                <a:latin typeface="Courier"/>
-              </a:rPr>
-              <a:t>)</a:t>
-            </a:r>
-            <a:br/>
-            <a:r>
-              <a:rPr>
-                <a:solidFill>
-                  <a:srgbClr val="4758AB"/>
-                </a:solidFill>
-                <a:latin typeface="Courier"/>
-              </a:rPr>
-              <a:t>cat</a:t>
-            </a:r>
-            <a:r>
-              <a:rPr>
-                <a:solidFill>
-                  <a:srgbClr val="003B4F"/>
-                </a:solidFill>
-                <a:latin typeface="Courier"/>
-              </a:rPr>
-              <a:t>(</a:t>
-            </a:r>
-            <a:r>
-              <a:rPr>
-                <a:solidFill>
-                  <a:srgbClr val="20794D"/>
-                </a:solidFill>
-                <a:latin typeface="Courier"/>
-              </a:rPr>
-              <a:t>"using glm opn original scale</a:t>
-            </a:r>
-            <a:r>
-              <a:rPr>
-                <a:solidFill>
-                  <a:srgbClr val="5E5E5E"/>
-                </a:solidFill>
-                <a:latin typeface="Courier"/>
-              </a:rPr>
-              <a:t>\n\n</a:t>
-            </a:r>
-            <a:r>
-              <a:rPr>
-                <a:solidFill>
-                  <a:srgbClr val="20794D"/>
-                </a:solidFill>
-                <a:latin typeface="Courier"/>
-              </a:rPr>
-              <a:t>"</a:t>
-            </a:r>
-            <a:r>
-              <a:rPr>
-                <a:solidFill>
-                  <a:srgbClr val="003B4F"/>
-                </a:solidFill>
-                <a:latin typeface="Courier"/>
-              </a:rPr>
-              <a:t>)</a:t>
-            </a:r>
-            <a:br/>
-            <a:r>
-              <a:rPr i="1">
-                <a:solidFill>
-                  <a:srgbClr val="5E5E5E"/>
-                </a:solidFill>
-                <a:latin typeface="Courier"/>
-              </a:rPr>
-              <a:t>## using glm opn original scale</a:t>
-            </a:r>
-            <a:br/>
-            <a:r>
-              <a:rPr>
-                <a:solidFill>
-                  <a:srgbClr val="4758AB"/>
-                </a:solidFill>
-                <a:latin typeface="Courier"/>
-              </a:rPr>
-              <a:t>emmeans</a:t>
-            </a:r>
-            <a:r>
-              <a:rPr>
-                <a:solidFill>
-                  <a:srgbClr val="003B4F"/>
-                </a:solidFill>
-                <a:latin typeface="Courier"/>
-              </a:rPr>
-              <a:t>(model_glm, </a:t>
-            </a:r>
-            <a:r>
-              <a:rPr>
-                <a:solidFill>
-                  <a:srgbClr val="5E5E5E"/>
-                </a:solidFill>
-                <a:latin typeface="Courier"/>
-              </a:rPr>
-              <a:t>~</a:t>
-            </a:r>
-            <a:r>
-              <a:rPr>
-                <a:solidFill>
-                  <a:srgbClr val="003B4F"/>
-                </a:solidFill>
-                <a:latin typeface="Courier"/>
-              </a:rPr>
-              <a:t>treatment, </a:t>
-            </a:r>
-            <a:r>
-              <a:rPr>
-                <a:solidFill>
-                  <a:srgbClr val="657422"/>
-                </a:solidFill>
-                <a:latin typeface="Courier"/>
-              </a:rPr>
-              <a:t>type =</a:t>
-            </a:r>
-            <a:r>
-              <a:rPr>
-                <a:solidFill>
-                  <a:srgbClr val="003B4F"/>
-                </a:solidFill>
-                <a:latin typeface="Courier"/>
-              </a:rPr>
-              <a:t> </a:t>
-            </a:r>
-            <a:r>
-              <a:rPr>
-                <a:solidFill>
-                  <a:srgbClr val="20794D"/>
-                </a:solidFill>
-                <a:latin typeface="Courier"/>
-              </a:rPr>
-              <a:t>"response"</a:t>
-            </a:r>
-            <a:r>
-              <a:rPr>
-                <a:solidFill>
-                  <a:srgbClr val="003B4F"/>
-                </a:solidFill>
-                <a:latin typeface="Courier"/>
-              </a:rPr>
-              <a:t>)  </a:t>
-            </a:r>
-            <a:r>
-              <a:rPr>
-                <a:solidFill>
-                  <a:srgbClr val="5E5E5E"/>
-                </a:solidFill>
-                <a:latin typeface="Courier"/>
-              </a:rPr>
-              <a:t># Arithmetic means</a:t>
-            </a:r>
-            <a:br/>
-            <a:r>
-              <a:rPr i="1">
-                <a:solidFill>
-                  <a:srgbClr val="5E5E5E"/>
-                </a:solidFill>
-                <a:latin typeface="Courier"/>
-              </a:rPr>
-              <a:t>##  treatment response    SE df lower.CL upper.CL</a:t>
-            </a:r>
-            <a:br/>
-            <a:r>
-              <a:rPr i="1">
-                <a:solidFill>
-                  <a:srgbClr val="5E5E5E"/>
-                </a:solidFill>
-                <a:latin typeface="Courier"/>
-              </a:rPr>
-              <a:t>##  Control       8.86 0.939 57     7.16     11.0</a:t>
-            </a:r>
-            <a:br/>
-            <a:r>
-              <a:rPr i="1">
-                <a:solidFill>
-                  <a:srgbClr val="5E5E5E"/>
-                </a:solidFill>
-                <a:latin typeface="Courier"/>
-              </a:rPr>
-              <a:t>##  High         23.73 2.520 57    19.19     29.3</a:t>
-            </a:r>
-            <a:br/>
-            <a:r>
-              <a:rPr i="1">
-                <a:solidFill>
-                  <a:srgbClr val="5E5E5E"/>
-                </a:solidFill>
-                <a:latin typeface="Courier"/>
-              </a:rPr>
-              <a:t>##  Low          12.84 1.360 57    10.39     15.9</a:t>
-            </a:r>
-            <a:br/>
-            <a:r>
-              <a:rPr i="1">
-                <a:solidFill>
-                  <a:srgbClr val="5E5E5E"/>
-                </a:solidFill>
-                <a:latin typeface="Courier"/>
-              </a:rPr>
-              <a:t>## </a:t>
-            </a:r>
-            <a:br/>
-            <a:r>
-              <a:rPr i="1">
-                <a:solidFill>
-                  <a:srgbClr val="5E5E5E"/>
-                </a:solidFill>
-                <a:latin typeface="Courier"/>
-              </a:rPr>
-              <a:t>## Confidence level used: 0.95 </a:t>
-            </a:r>
-            <a:br/>
-            <a:r>
-              <a:rPr i="1">
-                <a:solidFill>
-                  <a:srgbClr val="5E5E5E"/>
-                </a:solidFill>
-                <a:latin typeface="Courier"/>
-              </a:rPr>
-              <a:t>## Intervals are back-transformed from the log scale</a:t>
-            </a:r>
-            <a:br/>
-            <a:br/>
-            <a:r>
-              <a:rPr>
-                <a:solidFill>
-                  <a:srgbClr val="5E5E5E"/>
-                </a:solidFill>
-                <a:latin typeface="Courier"/>
-              </a:rPr>
-              <a:t># Show how the interpretation differs</a:t>
             </a:r>
           </a:p>
         </p:txBody>
@@ -13490,12 +13490,22 @@
               </a:rPr>
               <a:t>Species</a:t>
             </a:r>
+            <a:r>
+              <a:rPr/>
+              <a:t>- Number of plant species (count data)</a:t>
+            </a:r>
           </a:p>
           <a:p>
             <a:pPr lvl="1"/>
             <a:r>
-              <a:rPr/>
-              <a:t>Number of plant species (count data)</a:t>
+              <a:rPr>
+                <a:latin typeface="Courier"/>
+              </a:rPr>
+              <a:t>Endemics</a:t>
+            </a:r>
+            <a:r>
+              <a:rPr/>
+              <a:t>- Number of endemic species (count data)</a:t>
             </a:r>
           </a:p>
           <a:p>
@@ -13504,14 +13514,24 @@
               <a:rPr>
                 <a:latin typeface="Courier"/>
               </a:rPr>
-              <a:t>Endemics</a:t>
+              <a:t>Area</a:t>
+            </a:r>
+            <a:r>
+              <a:rPr/>
+              <a:t>- Island area (km²)</a:t>
             </a:r>
           </a:p>
           <a:p>
             <a:pPr lvl="1"/>
             <a:r>
-              <a:rPr/>
-              <a:t>Number of endemic species (count data)</a:t>
+              <a:rPr>
+                <a:latin typeface="Courier"/>
+              </a:rPr>
+              <a:t>Elevation</a:t>
+            </a:r>
+            <a:r>
+              <a:rPr/>
+              <a:t>- Maximum elevation (m)</a:t>
             </a:r>
           </a:p>
           <a:p>
@@ -13520,46 +13540,11 @@
               <a:rPr>
                 <a:latin typeface="Courier"/>
               </a:rPr>
-              <a:t>Area</a:t>
-            </a:r>
-          </a:p>
-          <a:p>
-            <a:pPr lvl="1"/>
-            <a:r>
-              <a:rPr/>
-              <a:t>Island area (km²)</a:t>
-            </a:r>
-          </a:p>
-          <a:p>
-            <a:pPr lvl="1"/>
-            <a:r>
-              <a:rPr>
-                <a:latin typeface="Courier"/>
-              </a:rPr>
-              <a:t>Elevation</a:t>
-            </a:r>
-          </a:p>
-          <a:p>
-            <a:pPr lvl="1"/>
-            <a:r>
-              <a:rPr/>
-              <a:t>Maximum elevation (m)</a:t>
-            </a:r>
-          </a:p>
-          <a:p>
-            <a:pPr lvl="1"/>
-            <a:r>
-              <a:rPr>
-                <a:latin typeface="Courier"/>
-              </a:rPr>
               <a:t>Nearest</a:t>
             </a:r>
-          </a:p>
-          <a:p>
-            <a:pPr lvl="1"/>
-            <a:r>
-              <a:rPr/>
-              <a:t>Distance to nearest island (km)</a:t>
+            <a:r>
+              <a:rPr/>
+              <a:t>- Distance to nearest island (km)</a:t>
             </a:r>
           </a:p>
           <a:p>

--- a/docs/ecostats_lectures/lecture_14/14_01_lecture_powerpoint.pptx
+++ b/docs/ecostats_lectures/lecture_14/14_01_lecture_powerpoint.pptx
@@ -44,6 +44,7 @@
     <p:sldId id="292" r:id="rId38"/>
     <p:sldId id="293" r:id="rId39"/>
     <p:sldId id="294" r:id="rId40"/>
+    <p:sldId id="295" r:id="rId41"/>
   </p:sldIdLst>
   <p:sldSz cx="9144000" cy="5143500" type="screen16x9"/>
   <p:notesSz cx="6858000" cy="9144000"/>
@@ -3402,6 +3403,240 @@
         </p:nvSpPr>
         <p:spPr>
           <a:xfrm>
+            <a:off x="0" y="0"/>
+            <a:ext cx="9144000" cy="602780"/>
+          </a:xfrm>
+          <a:solidFill>
+            <a:srgbClr val="70121D"/>
+          </a:solidFill>
+        </p:spPr>
+        <p:txBody>
+          <a:bodyPr/>
+          <a:lstStyle/>
+          <a:p>
+            <a:pPr lvl="0" indent="0" marL="0">
+              <a:buNone/>
+            </a:pPr>
+            <a:r>
+              <a:rPr/>
+              <a:t>GLM with Gaussian (Normal) Distribution: Setup</a:t>
+            </a:r>
+          </a:p>
+        </p:txBody>
+      </p:sp>
+      <mc:AlternateContent xmlns:mc="http://schemas.openxmlformats.org/markup-compatibility/2006">
+        <mc:Choice xmlns:a14="http://schemas.microsoft.com/office/drawing/2010/main" Requires="a14">
+          <p:sp>
+            <p:nvSpPr>
+              <p:cNvPr id="3" name="Content Placeholder 2"/>
+              <p:cNvSpPr>
+                <a:spLocks noGrp="1"/>
+              </p:cNvSpPr>
+              <p:nvPr>
+                <p:ph idx="1" sz="half"/>
+              </p:nvPr>
+            </p:nvSpPr>
+            <p:spPr/>
+            <p:txBody>
+              <a:bodyPr/>
+              <a:lstStyle/>
+              <a:p>
+                <a:pPr lvl="0"/>
+                <a:r>
+                  <a:rPr/>
+                  <a:t>Let’s look at the summary of our Gaussian GLM:</a:t>
+                </a:r>
+              </a:p>
+              <a:p>
+                <a:pPr lvl="1"/>
+                <a:r>
+                  <a:rPr/>
+                  <a:t>Dispersion parameter</a:t>
+                </a:r>
+              </a:p>
+              <a:p>
+                <a:pPr lvl="2"/>
+                <a:r>
+                  <a:rPr b="1"/>
+                  <a:t>variance of the residuals</a:t>
+                </a:r>
+                <a:r>
+                  <a:rPr/>
+                  <a:t> (</a:t>
+                </a:r>
+                <a14:m>
+                  <m:oMath xmlns:m="http://schemas.openxmlformats.org/officeDocument/2006/math">
+                    <m:sSup>
+                      <m:e>
+                        <m:r>
+                          <m:t>σ</m:t>
+                        </m:r>
+                      </m:e>
+                      <m:sup>
+                        <m:r>
+                          <m:t>2</m:t>
+                        </m:r>
+                      </m:sup>
+                    </m:sSup>
+                  </m:oMath>
+                </a14:m>
+                <a:r>
+                  <a:rPr/>
+                  <a:t>)</a:t>
+                </a:r>
+              </a:p>
+              <a:p>
+                <a:pPr lvl="1"/>
+                <a:r>
+                  <a:rPr/>
+                  <a:t>Null deviance</a:t>
+                </a:r>
+              </a:p>
+              <a:p>
+                <a:pPr lvl="2"/>
+                <a:r>
+                  <a:rPr/>
+                  <a:t>This is the error (deviance) of the “Null” or “Intercept-Only” model</a:t>
+                </a:r>
+              </a:p>
+              <a:p>
+                <a:pPr lvl="2"/>
+                <a:r>
+                  <a:rPr/>
+                  <a:t>how much error you have when you try to predict the number of endemics using </a:t>
+                </a:r>
+                <a:r>
+                  <a:rPr i="1"/>
+                  <a:t>only</a:t>
+                </a:r>
+                <a:r>
+                  <a:rPr/>
+                  <a:t> the overall average, without any predictors. It’s your baseline, or the total amount of variation in the data to be explained</a:t>
+                </a:r>
+              </a:p>
+              <a:p>
+                <a:pPr lvl="1"/>
+                <a:r>
+                  <a:rPr/>
+                  <a:t>Residual deviance</a:t>
+                </a:r>
+              </a:p>
+              <a:p>
+                <a:pPr lvl="2"/>
+                <a:r>
+                  <a:rPr/>
+                  <a:t>conceptually the same as the “Model Sum of Squares” in an ANOVA</a:t>
+                </a:r>
+              </a:p>
+              <a:p>
+                <a:pPr lvl="2"/>
+                <a:r>
+                  <a:rPr/>
+                  <a:t>Null Deviance tells you your </a:t>
+                </a:r>
+                <a:r>
+                  <a:rPr>
+                    <a:latin typeface="Courier"/>
+                  </a:rPr>
+                  <a:t>size_category</a:t>
+                </a:r>
+                <a:r>
+                  <a:rPr/>
+                  <a:t> predictor is </a:t>
+                </a:r>
+                <a:r>
+                  <a:rPr i="1"/>
+                  <a:t>very</a:t>
+                </a:r>
+                <a:r>
+                  <a:rPr/>
+                  <a:t> useful for explaining the number of endemics.</a:t>
+                </a:r>
+              </a:p>
+            </p:txBody>
+          </p:sp>
+        </mc:Choice>
+      </mc:AlternateContent>
+      <p:sp>
+        <p:nvSpPr>
+          <p:cNvPr id="4" name="Content Placeholder 3"/>
+          <p:cNvSpPr>
+            <a:spLocks noGrp="1"/>
+          </p:cNvSpPr>
+          <p:nvPr>
+            <p:ph idx="2" sz="half"/>
+          </p:nvPr>
+        </p:nvSpPr>
+        <p:spPr/>
+        <p:txBody>
+          <a:bodyPr/>
+          <a:lstStyle/>
+          <a:p>
+            <a:pPr lvl="0" indent="0">
+              <a:buNone/>
+            </a:pPr>
+            <a:r>
+              <a:rPr>
+                <a:latin typeface="Courier"/>
+              </a:rPr>
+              <a:t>## 
+## Call:
+## glm(formula = Endemics ~ size_category, family = gaussian(link = "identity"), 
+##     data = gala)
+## 
+## Coefficients:
+##                     Estimate Std. Error t value Pr(&gt;|t|)    
+## (Intercept)            5.636      4.402    1.28   0.2113    
+## size_categoryMedium   16.030      6.095    2.63   0.0139 *  
+## size_categoryLarge    60.221      7.059    8.53 3.82e-09 ***
+## ---
+## Signif. codes:  0 '***' 0.001 '**' 0.01 '*' 0.05 '.' 0.1 ' ' 1
+## 
+## (Dispersion parameter for gaussian family taken to be 213.1878)
+## 
+##     Null deviance: 21662.7  on 29  degrees of freedom
+## Residual deviance:  5756.1  on 27  degrees of freedom
+## AIC: 250.84
+## 
+## Number of Fisher Scoring iterations: 2</a:t>
+            </a:r>
+          </a:p>
+        </p:txBody>
+      </p:sp>
+    </p:spTree>
+  </p:cSld>
+</p:sld>
+</file>
+
+<file path=ppt/slides/slide11.xml><?xml version="1.0" encoding="utf-8"?>
+<p:sld xmlns:a="http://schemas.openxmlformats.org/drawingml/2006/main" xmlns:r="http://schemas.openxmlformats.org/officeDocument/2006/relationships" xmlns:p="http://schemas.openxmlformats.org/presentationml/2006/main">
+  <p:cSld>
+    <p:spTree>
+      <p:nvGrpSpPr>
+        <p:cNvPr id="1" name=""/>
+        <p:cNvGrpSpPr/>
+        <p:nvPr/>
+      </p:nvGrpSpPr>
+      <p:grpSpPr>
+        <a:xfrm>
+          <a:off x="0" y="0"/>
+          <a:ext cx="0" cy="0"/>
+          <a:chOff x="0" y="0"/>
+          <a:chExt cx="0" cy="0"/>
+        </a:xfrm>
+      </p:grpSpPr>
+      <p:sp>
+        <p:nvSpPr>
+          <p:cNvPr id="2" name="Title 1"/>
+          <p:cNvSpPr>
+            <a:spLocks noGrp="1"/>
+          </p:cNvSpPr>
+          <p:nvPr>
+            <p:ph type="title"/>
+          </p:nvPr>
+        </p:nvSpPr>
+        <p:spPr>
+          <a:xfrm>
             <a:off x="139485" y="78119"/>
             <a:ext cx="8229600" cy="607682"/>
           </a:xfrm>
@@ -3440,7 +3675,7 @@
                 <a:pPr lvl="0"/>
                 <a:r>
                   <a:rPr/>
-                  <a:t>Now let’s perform an ANOVA on our LM and GLM model using the </a:t>
+                  <a:t>Now let’s perform an ANOVA on LM and GLM model using </a:t>
                 </a:r>
                 <a:r>
                   <a:rPr>
@@ -3450,7 +3685,7 @@
                 </a:r>
                 <a:r>
                   <a:rPr/>
-                  <a:t> package:</a:t>
+                  <a:t>:</a:t>
                 </a:r>
               </a:p>
               <a:p>
@@ -3479,7 +3714,7 @@
                 <a:pPr lvl="1"/>
                 <a:r>
                   <a:rPr b="1"/>
-                  <a:t>Residual Deviance divided by its degrees of freedom</a:t>
+                  <a:t>Residual Deviance/df</a:t>
                 </a:r>
                 <a:r>
                   <a:rPr/>
@@ -3950,7 +4185,7 @@
 </p:sld>
 </file>
 
-<file path=ppt/slides/slide11.xml><?xml version="1.0" encoding="utf-8"?>
+<file path=ppt/slides/slide12.xml><?xml version="1.0" encoding="utf-8"?>
 <p:sld xmlns:a="http://schemas.openxmlformats.org/drawingml/2006/main" xmlns:r="http://schemas.openxmlformats.org/officeDocument/2006/relationships" xmlns:p="http://schemas.openxmlformats.org/presentationml/2006/main">
   <p:cSld>
     <p:spTree>
@@ -4073,7 +4308,7 @@
 </p:sld>
 </file>
 
-<file path=ppt/slides/slide12.xml><?xml version="1.0" encoding="utf-8"?>
+<file path=ppt/slides/slide13.xml><?xml version="1.0" encoding="utf-8"?>
 <p:sld xmlns:a="http://schemas.openxmlformats.org/drawingml/2006/main" xmlns:r="http://schemas.openxmlformats.org/officeDocument/2006/relationships" xmlns:p="http://schemas.openxmlformats.org/presentationml/2006/main">
   <p:cSld>
     <p:spTree>
@@ -4761,324 +4996,6 @@
 </p:sld>
 </file>
 
-<file path=ppt/slides/slide13.xml><?xml version="1.0" encoding="utf-8"?>
-<p:sld xmlns:a="http://schemas.openxmlformats.org/drawingml/2006/main" xmlns:r="http://schemas.openxmlformats.org/officeDocument/2006/relationships" xmlns:p="http://schemas.openxmlformats.org/presentationml/2006/main">
-  <p:cSld>
-    <p:spTree>
-      <p:nvGrpSpPr>
-        <p:cNvPr id="1" name=""/>
-        <p:cNvGrpSpPr/>
-        <p:nvPr/>
-      </p:nvGrpSpPr>
-      <p:grpSpPr>
-        <a:xfrm>
-          <a:off x="0" y="0"/>
-          <a:ext cx="0" cy="0"/>
-          <a:chOff x="0" y="0"/>
-          <a:chExt cx="0" cy="0"/>
-        </a:xfrm>
-      </p:grpSpPr>
-      <p:sp>
-        <p:nvSpPr>
-          <p:cNvPr id="2" name="Title 1"/>
-          <p:cNvSpPr>
-            <a:spLocks noGrp="1"/>
-          </p:cNvSpPr>
-          <p:nvPr>
-            <p:ph type="title"/>
-          </p:nvPr>
-        </p:nvSpPr>
-        <p:spPr>
-          <a:xfrm>
-            <a:off x="0" y="0"/>
-            <a:ext cx="9144000" cy="602780"/>
-          </a:xfrm>
-          <a:solidFill>
-            <a:srgbClr val="70121D"/>
-          </a:solidFill>
-        </p:spPr>
-        <p:txBody>
-          <a:bodyPr/>
-          <a:lstStyle/>
-          <a:p>
-            <a:pPr lvl="0" indent="0" marL="0">
-              <a:buNone/>
-            </a:pPr>
-            <a:r>
-              <a:rPr/>
-              <a:t>GLM with Poisson Distribution: Setup</a:t>
-            </a:r>
-          </a:p>
-        </p:txBody>
-      </p:sp>
-      <p:sp>
-        <p:nvSpPr>
-          <p:cNvPr id="3" name="Content Placeholder 2"/>
-          <p:cNvSpPr>
-            <a:spLocks noGrp="1"/>
-          </p:cNvSpPr>
-          <p:nvPr>
-            <p:ph idx="1" sz="half"/>
-          </p:nvPr>
-        </p:nvSpPr>
-        <p:spPr/>
-        <p:txBody>
-          <a:bodyPr/>
-          <a:lstStyle/>
-          <a:p>
-            <a:pPr lvl="0" indent="0" marL="0">
-              <a:buNone/>
-            </a:pPr>
-            <a:r>
-              <a:rPr/>
-              <a:t>Does island size category, as a whole, have a statistically significant effect on the number of plant species?</a:t>
-            </a:r>
-          </a:p>
-          <a:p>
-            <a:pPr lvl="0"/>
-            <a:r>
-              <a:rPr>
-                <a:latin typeface="Courier"/>
-              </a:rPr>
-              <a:t>test = "LR"</a:t>
-            </a:r>
-            <a:r>
-              <a:rPr/>
-              <a:t>: important part!</a:t>
-            </a:r>
-          </a:p>
-          <a:p>
-            <a:pPr lvl="1"/>
-            <a:r>
-              <a:rPr/>
-              <a:t>normal ANOVA (with a Gaussian/normal distribution) test is an F-test.</a:t>
-            </a:r>
-          </a:p>
-          <a:p>
-            <a:pPr lvl="1"/>
-            <a:r>
-              <a:rPr/>
-              <a:t>GLM (like Poisson) can’t use F-test in the same way</a:t>
-            </a:r>
-          </a:p>
-          <a:p>
-            <a:pPr lvl="2"/>
-            <a:r>
-              <a:rPr/>
-              <a:t>use a Likelihood Ratio (LR) test</a:t>
-            </a:r>
-          </a:p>
-          <a:p>
-            <a:pPr lvl="2"/>
-            <a:r>
-              <a:rPr/>
-              <a:t>LR test statistically compares fit of full model (the one with size_category) to simpler null model (one without size_category)</a:t>
-            </a:r>
-          </a:p>
-          <a:p>
-            <a:pPr lvl="2"/>
-            <a:r>
-              <a:rPr/>
-              <a:t>LR test tells us if it is significant</a:t>
-            </a:r>
-          </a:p>
-        </p:txBody>
-      </p:sp>
-      <p:sp>
-        <p:nvSpPr>
-          <p:cNvPr id="4" name="Content Placeholder 3"/>
-          <p:cNvSpPr>
-            <a:spLocks noGrp="1"/>
-          </p:cNvSpPr>
-          <p:nvPr>
-            <p:ph idx="2" sz="half"/>
-          </p:nvPr>
-        </p:nvSpPr>
-        <p:spPr/>
-        <p:txBody>
-          <a:bodyPr/>
-          <a:lstStyle/>
-          <a:p>
-            <a:pPr lvl="0" indent="0" marL="0">
-              <a:buNone/>
-            </a:pPr>
-            <a:r>
-              <a:rPr/>
-              <a:t>Test overall effect of size_category</a:t>
-            </a:r>
-          </a:p>
-          <a:p>
-            <a:pPr lvl="0" indent="0">
-              <a:buNone/>
-            </a:pPr>
-            <a:r>
-              <a:rPr>
-                <a:solidFill>
-                  <a:srgbClr val="4758AB"/>
-                </a:solidFill>
-                <a:latin typeface="Courier"/>
-              </a:rPr>
-              <a:t>Anova</a:t>
-            </a:r>
-            <a:r>
-              <a:rPr>
-                <a:solidFill>
-                  <a:srgbClr val="003B4F"/>
-                </a:solidFill>
-                <a:latin typeface="Courier"/>
-              </a:rPr>
-              <a:t>(model_poisson_gala, </a:t>
-            </a:r>
-            <a:r>
-              <a:rPr>
-                <a:solidFill>
-                  <a:srgbClr val="657422"/>
-                </a:solidFill>
-                <a:latin typeface="Courier"/>
-              </a:rPr>
-              <a:t>type =</a:t>
-            </a:r>
-            <a:r>
-              <a:rPr>
-                <a:solidFill>
-                  <a:srgbClr val="003B4F"/>
-                </a:solidFill>
-                <a:latin typeface="Courier"/>
-              </a:rPr>
-              <a:t> </a:t>
-            </a:r>
-            <a:r>
-              <a:rPr>
-                <a:solidFill>
-                  <a:srgbClr val="20794D"/>
-                </a:solidFill>
-                <a:latin typeface="Courier"/>
-              </a:rPr>
-              <a:t>"III"</a:t>
-            </a:r>
-            <a:r>
-              <a:rPr>
-                <a:solidFill>
-                  <a:srgbClr val="003B4F"/>
-                </a:solidFill>
-                <a:latin typeface="Courier"/>
-              </a:rPr>
-              <a:t>, </a:t>
-            </a:r>
-            <a:r>
-              <a:rPr>
-                <a:solidFill>
-                  <a:srgbClr val="657422"/>
-                </a:solidFill>
-                <a:latin typeface="Courier"/>
-              </a:rPr>
-              <a:t>test =</a:t>
-            </a:r>
-            <a:r>
-              <a:rPr>
-                <a:solidFill>
-                  <a:srgbClr val="003B4F"/>
-                </a:solidFill>
-                <a:latin typeface="Courier"/>
-              </a:rPr>
-              <a:t> </a:t>
-            </a:r>
-            <a:r>
-              <a:rPr>
-                <a:solidFill>
-                  <a:srgbClr val="20794D"/>
-                </a:solidFill>
-                <a:latin typeface="Courier"/>
-              </a:rPr>
-              <a:t>"LR"</a:t>
-            </a:r>
-            <a:r>
-              <a:rPr>
-                <a:solidFill>
-                  <a:srgbClr val="003B4F"/>
-                </a:solidFill>
-                <a:latin typeface="Courier"/>
-              </a:rPr>
-              <a:t>)</a:t>
-            </a:r>
-            <a:br/>
-            <a:r>
-              <a:rPr i="1">
-                <a:solidFill>
-                  <a:srgbClr val="5E5E5E"/>
-                </a:solidFill>
-                <a:latin typeface="Courier"/>
-              </a:rPr>
-              <a:t>## Analysis of Deviance Table (Type III tests)</a:t>
-            </a:r>
-            <a:br/>
-            <a:r>
-              <a:rPr i="1">
-                <a:solidFill>
-                  <a:srgbClr val="5E5E5E"/>
-                </a:solidFill>
-                <a:latin typeface="Courier"/>
-              </a:rPr>
-              <a:t>## </a:t>
-            </a:r>
-            <a:br/>
-            <a:r>
-              <a:rPr i="1">
-                <a:solidFill>
-                  <a:srgbClr val="5E5E5E"/>
-                </a:solidFill>
-                <a:latin typeface="Courier"/>
-              </a:rPr>
-              <a:t>## Response: Species</a:t>
-            </a:r>
-            <a:br/>
-            <a:r>
-              <a:rPr i="1">
-                <a:solidFill>
-                  <a:srgbClr val="5E5E5E"/>
-                </a:solidFill>
-                <a:latin typeface="Courier"/>
-              </a:rPr>
-              <a:t>##               LR Chisq Df Pr(&gt;Chisq)    </a:t>
-            </a:r>
-            <a:br/>
-            <a:r>
-              <a:rPr i="1">
-                <a:solidFill>
-                  <a:srgbClr val="5E5E5E"/>
-                </a:solidFill>
-                <a:latin typeface="Courier"/>
-              </a:rPr>
-              <a:t>## size_category     2571  2  &lt; 2.2e-16 ***</a:t>
-            </a:r>
-            <a:br/>
-            <a:r>
-              <a:rPr i="1">
-                <a:solidFill>
-                  <a:srgbClr val="5E5E5E"/>
-                </a:solidFill>
-                <a:latin typeface="Courier"/>
-              </a:rPr>
-              <a:t>## ---</a:t>
-            </a:r>
-            <a:br/>
-            <a:r>
-              <a:rPr i="1">
-                <a:solidFill>
-                  <a:srgbClr val="5E5E5E"/>
-                </a:solidFill>
-                <a:latin typeface="Courier"/>
-              </a:rPr>
-              <a:t>## Signif. codes:  0 '***' 0.001 '**' 0.01 '*' 0.05 '.' 0.1 ' ' 1</a:t>
-            </a:r>
-          </a:p>
-        </p:txBody>
-      </p:sp>
-    </p:spTree>
-  </p:cSld>
-</p:sld>
-</file>
-
 <file path=ppt/slides/slide14.xml><?xml version="1.0" encoding="utf-8"?>
 <p:sld xmlns:a="http://schemas.openxmlformats.org/drawingml/2006/main" xmlns:r="http://schemas.openxmlformats.org/officeDocument/2006/relationships" xmlns:p="http://schemas.openxmlformats.org/presentationml/2006/main">
   <p:cSld>
@@ -5148,106 +5065,56 @@
               <a:buNone/>
             </a:pPr>
             <a:r>
-              <a:rPr b="1"/>
-              <a:t>Poisson GLMs</a:t>
-            </a:r>
-            <a:r>
-              <a:rPr/>
-              <a:t> are appropriate for </a:t>
-            </a:r>
-            <a:r>
-              <a:rPr b="1"/>
-              <a:t>count data</a:t>
-            </a:r>
-            <a:r>
-              <a:rPr/>
-              <a:t>. The Poisson distribution assumes that the variance equals the mean.</a:t>
+              <a:rPr/>
+              <a:t>Does island size category, as a whole, have a statistically significant effect on the number of plant species?</a:t>
             </a:r>
           </a:p>
           <a:p>
             <a:pPr lvl="0"/>
             <a:r>
-              <a:rPr/>
-              <a:t>Use the quarter-mile time (</a:t>
-            </a:r>
-            <a:r>
-              <a:rPr>
-                <a:latin typeface="Courier"/>
-              </a:rPr>
-              <a:t>qsec</a:t>
-            </a:r>
-            <a:r>
-              <a:rPr/>
-              <a:t>) from the </a:t>
-            </a:r>
-            <a:r>
-              <a:rPr>
-                <a:latin typeface="Courier"/>
-              </a:rPr>
-              <a:t>mtcars</a:t>
-            </a:r>
-            <a:r>
-              <a:rPr/>
-              <a:t> dataset, rounded to create a count-like variable.</a:t>
-            </a:r>
-          </a:p>
-          <a:p>
-            <a:pPr lvl="0"/>
-            <a:r>
-              <a:rPr/>
-              <a:t>With the natural log link, coefficients represent </a:t>
-            </a:r>
-            <a:r>
-              <a:rPr b="1"/>
-              <a:t>multiplicative effects</a:t>
-            </a:r>
-            <a:r>
-              <a:rPr/>
-              <a:t>:</a:t>
-            </a:r>
-          </a:p>
-          <a:p>
-            <a:pPr lvl="0"/>
-            <a:r>
-              <a:rPr/>
-              <a:t>A coefficient of β means: for each 1-unit increase in X, the response is multiplied by exp(β)</a:t>
-            </a:r>
-          </a:p>
-          <a:p>
-            <a:pPr lvl="0"/>
-            <a:r>
-              <a:rPr/>
-              <a:t>For small β, exp(β) ≈ 1 + β, so β × 100% gives approximate percentage change</a:t>
-            </a:r>
-          </a:p>
-          <a:p>
-            <a:pPr lvl="0" indent="0">
-              <a:buNone/>
-            </a:pPr>
-            <a:r>
-              <a:rPr>
-                <a:latin typeface="Courier"/>
-              </a:rPr>
-              <a:t>## 
-## Call:
-## glm(formula = Species ~ size_category, family = poisson(link = "log"), 
-##     data = gala)
-## 
-## Coefficients:
-##                     Estimate Std. Error z value Pr(&gt;|z|)    
-## (Intercept)          2.67101    0.07930   33.68   &lt;2e-16 ***
-## size_categoryMedium  1.33784    0.08833   15.15   &lt;2e-16 ***
-## size_categoryLarge   2.84300    0.08285   34.31   &lt;2e-16 ***
-## ---
-## Signif. codes:  0 '***' 0.001 '**' 0.01 '*' 0.05 '.' 0.1 ' ' 1
-## 
-## (Dispersion parameter for poisson family taken to be 1)
-## 
-##     Null deviance: 3510.73  on 29  degrees of freedom
-## Residual deviance:  939.74  on 27  degrees of freedom
-## AIC: 1106.6
-## 
-## Number of Fisher Scoring iterations: 5</a:t>
+              <a:rPr>
+                <a:latin typeface="Courier"/>
+              </a:rPr>
+              <a:t>test = "LR"</a:t>
+            </a:r>
+            <a:r>
+              <a:rPr/>
+              <a:t>: important part!</a:t>
+            </a:r>
+          </a:p>
+          <a:p>
+            <a:pPr lvl="1"/>
+            <a:r>
+              <a:rPr/>
+              <a:t>normal ANOVA (with a Gaussian/normal distribution) test is an F-test.</a:t>
+            </a:r>
+          </a:p>
+          <a:p>
+            <a:pPr lvl="1"/>
+            <a:r>
+              <a:rPr/>
+              <a:t>GLM (like Poisson) can’t use F-test in the same way</a:t>
+            </a:r>
+          </a:p>
+          <a:p>
+            <a:pPr lvl="2"/>
+            <a:r>
+              <a:rPr/>
+              <a:t>use a Likelihood Ratio (LR) test</a:t>
+            </a:r>
+          </a:p>
+          <a:p>
+            <a:pPr lvl="2"/>
+            <a:r>
+              <a:rPr/>
+              <a:t>LR test statistically compares fit of full model (the one with size_category) to simpler null model (one without size_category)</a:t>
+            </a:r>
+          </a:p>
+          <a:p>
+            <a:pPr lvl="2"/>
+            <a:r>
+              <a:rPr/>
+              <a:t>LR test tells us if it is significant</a:t>
             </a:r>
           </a:p>
         </p:txBody>
@@ -5267,100 +5134,12 @@
           <a:bodyPr/>
           <a:lstStyle/>
           <a:p>
-            <a:pPr lvl="0"/>
-            <a:r>
-              <a:rPr/>
-              <a:t>Let’s check for overdispersion, which is common in count data:</a:t>
-            </a:r>
-          </a:p>
-          <a:p>
-            <a:pPr lvl="0"/>
-            <a:r>
-              <a:rPr/>
-              <a:t>Should be close to 1 for a well-fitting Poisson model</a:t>
-            </a:r>
-          </a:p>
-          <a:p>
-            <a:pPr lvl="0"/>
-            <a:r>
-              <a:rPr/>
-              <a:t>If &gt; 1.5, may indicate overdispersion</a:t>
-            </a:r>
-          </a:p>
-          <a:p>
-            <a:pPr lvl="1"/>
-            <a:r>
-              <a:rPr b="1"/>
-              <a:t>What is Underdispersion?</a:t>
-            </a:r>
-          </a:p>
-          <a:p>
-            <a:pPr lvl="2"/>
-            <a:r>
-              <a:rPr/>
-              <a:t>In a Poisson model, we expect the variance to equal the mean. The dispersion parameter measures the ratio of observed variance to expected variance:</a:t>
-            </a:r>
-          </a:p>
-          <a:p>
-            <a:pPr lvl="3"/>
-            <a:r>
-              <a:rPr b="1"/>
-              <a:t>Dispersion ≈ 1</a:t>
-            </a:r>
-            <a:r>
-              <a:rPr/>
-              <a:t>: Good fit (variance = mean, as Poisson assumes)</a:t>
-            </a:r>
-          </a:p>
-          <a:p>
-            <a:pPr lvl="3"/>
-            <a:r>
-              <a:rPr b="1"/>
-              <a:t>Dispersion &gt; 1</a:t>
-            </a:r>
-            <a:r>
-              <a:rPr/>
-              <a:t>: Overdispersion (variance &gt; mean)</a:t>
-            </a:r>
-          </a:p>
-          <a:p>
-            <a:pPr lvl="3"/>
-            <a:r>
-              <a:rPr b="1"/>
-              <a:t>Dispersion &lt; 1</a:t>
-            </a:r>
-            <a:r>
-              <a:rPr/>
-              <a:t>: </a:t>
-            </a:r>
-            <a:r>
-              <a:rPr b="1"/>
-              <a:t>Underdispersion</a:t>
-            </a:r>
-            <a:r>
-              <a:rPr/>
-              <a:t> (variance &lt; mean)</a:t>
-            </a:r>
-          </a:p>
-          <a:p>
-            <a:pPr lvl="1"/>
-            <a:r>
-              <a:rPr/>
-              <a:t>a dispersion parameter this large is a warning</a:t>
-            </a:r>
-          </a:p>
-          <a:p>
-            <a:pPr lvl="1"/>
-            <a:r>
-              <a:rPr/>
-              <a:t>our data more variable than a Poisson model expects</a:t>
-            </a:r>
-          </a:p>
-          <a:p>
-            <a:pPr lvl="1"/>
-            <a:r>
-              <a:rPr/>
-              <a:t>use a Negative Binomial model</a:t>
+            <a:pPr lvl="0" indent="0" marL="0">
+              <a:buNone/>
+            </a:pPr>
+            <a:r>
+              <a:rPr/>
+              <a:t>Test overall effect of size_category</a:t>
             </a:r>
           </a:p>
           <a:p>
@@ -5370,306 +5149,162 @@
             <a:r>
               <a:rPr>
                 <a:solidFill>
+                  <a:srgbClr val="4758AB"/>
+                </a:solidFill>
+                <a:latin typeface="Courier"/>
+              </a:rPr>
+              <a:t>Anova</a:t>
+            </a:r>
+            <a:r>
+              <a:rPr>
+                <a:solidFill>
+                  <a:srgbClr val="003B4F"/>
+                </a:solidFill>
+                <a:latin typeface="Courier"/>
+              </a:rPr>
+              <a:t>(model_poisson_gala, </a:t>
+            </a:r>
+            <a:r>
+              <a:rPr>
+                <a:solidFill>
+                  <a:srgbClr val="657422"/>
+                </a:solidFill>
+                <a:latin typeface="Courier"/>
+              </a:rPr>
+              <a:t>type =</a:t>
+            </a:r>
+            <a:r>
+              <a:rPr>
+                <a:solidFill>
+                  <a:srgbClr val="003B4F"/>
+                </a:solidFill>
+                <a:latin typeface="Courier"/>
+              </a:rPr>
+              <a:t> </a:t>
+            </a:r>
+            <a:r>
+              <a:rPr>
+                <a:solidFill>
+                  <a:srgbClr val="20794D"/>
+                </a:solidFill>
+                <a:latin typeface="Courier"/>
+              </a:rPr>
+              <a:t>"III"</a:t>
+            </a:r>
+            <a:r>
+              <a:rPr>
+                <a:solidFill>
+                  <a:srgbClr val="003B4F"/>
+                </a:solidFill>
+                <a:latin typeface="Courier"/>
+              </a:rPr>
+              <a:t>, </a:t>
+            </a:r>
+            <a:r>
+              <a:rPr>
+                <a:solidFill>
+                  <a:srgbClr val="657422"/>
+                </a:solidFill>
+                <a:latin typeface="Courier"/>
+              </a:rPr>
+              <a:t>test =</a:t>
+            </a:r>
+            <a:r>
+              <a:rPr>
+                <a:solidFill>
+                  <a:srgbClr val="003B4F"/>
+                </a:solidFill>
+                <a:latin typeface="Courier"/>
+              </a:rPr>
+              <a:t> </a:t>
+            </a:r>
+            <a:r>
+              <a:rPr>
+                <a:solidFill>
+                  <a:srgbClr val="20794D"/>
+                </a:solidFill>
+                <a:latin typeface="Courier"/>
+              </a:rPr>
+              <a:t>"LR"</a:t>
+            </a:r>
+            <a:r>
+              <a:rPr>
+                <a:solidFill>
+                  <a:srgbClr val="003B4F"/>
+                </a:solidFill>
+                <a:latin typeface="Courier"/>
+              </a:rPr>
+              <a:t>)</a:t>
+            </a:r>
+            <a:br/>
+            <a:r>
+              <a:rPr i="1">
+                <a:solidFill>
                   <a:srgbClr val="5E5E5E"/>
                 </a:solidFill>
                 <a:latin typeface="Courier"/>
               </a:rPr>
-              <a:t># Calculate the dispersion parameter</a:t>
+              <a:t>## Analysis of Deviance Table (Type III tests)</a:t>
             </a:r>
             <a:br/>
             <a:r>
-              <a:rPr>
+              <a:rPr i="1">
                 <a:solidFill>
                   <a:srgbClr val="5E5E5E"/>
                 </a:solidFill>
                 <a:latin typeface="Courier"/>
               </a:rPr>
-              <a:t># (Pearson's Chi-Squared statistic / residual degrees of freedom)</a:t>
+              <a:t>## </a:t>
             </a:r>
             <a:br/>
             <a:r>
-              <a:rPr>
-                <a:solidFill>
-                  <a:srgbClr val="003B4F"/>
-                </a:solidFill>
-                <a:latin typeface="Courier"/>
-              </a:rPr>
-              <a:t>dispersion_gala &lt;- </a:t>
-            </a:r>
-            <a:r>
-              <a:rPr>
-                <a:solidFill>
-                  <a:srgbClr val="4758AB"/>
-                </a:solidFill>
-                <a:latin typeface="Courier"/>
-              </a:rPr>
-              <a:t>sum</a:t>
-            </a:r>
-            <a:r>
-              <a:rPr>
-                <a:solidFill>
-                  <a:srgbClr val="003B4F"/>
-                </a:solidFill>
-                <a:latin typeface="Courier"/>
-              </a:rPr>
-              <a:t>(</a:t>
-            </a:r>
-            <a:r>
-              <a:rPr>
-                <a:solidFill>
-                  <a:srgbClr val="4758AB"/>
-                </a:solidFill>
-                <a:latin typeface="Courier"/>
-              </a:rPr>
-              <a:t>residuals</a:t>
-            </a:r>
-            <a:r>
-              <a:rPr>
-                <a:solidFill>
-                  <a:srgbClr val="003B4F"/>
-                </a:solidFill>
-                <a:latin typeface="Courier"/>
-              </a:rPr>
-              <a:t>(model_poisson_gala, </a:t>
-            </a:r>
-            <a:r>
-              <a:rPr>
-                <a:solidFill>
-                  <a:srgbClr val="657422"/>
-                </a:solidFill>
-                <a:latin typeface="Courier"/>
-              </a:rPr>
-              <a:t>type =</a:t>
-            </a:r>
-            <a:r>
-              <a:rPr>
-                <a:solidFill>
-                  <a:srgbClr val="003B4F"/>
-                </a:solidFill>
-                <a:latin typeface="Courier"/>
-              </a:rPr>
-              <a:t> </a:t>
-            </a:r>
-            <a:r>
-              <a:rPr>
-                <a:solidFill>
-                  <a:srgbClr val="20794D"/>
-                </a:solidFill>
-                <a:latin typeface="Courier"/>
-              </a:rPr>
-              <a:t>"pearson"</a:t>
-            </a:r>
-            <a:r>
-              <a:rPr>
-                <a:solidFill>
-                  <a:srgbClr val="003B4F"/>
-                </a:solidFill>
-                <a:latin typeface="Courier"/>
-              </a:rPr>
-              <a:t>)</a:t>
-            </a:r>
-            <a:r>
-              <a:rPr>
+              <a:rPr i="1">
                 <a:solidFill>
                   <a:srgbClr val="5E5E5E"/>
                 </a:solidFill>
                 <a:latin typeface="Courier"/>
               </a:rPr>
-              <a:t>^</a:t>
-            </a:r>
-            <a:r>
-              <a:rPr>
-                <a:solidFill>
-                  <a:srgbClr val="AD0000"/>
-                </a:solidFill>
-                <a:latin typeface="Courier"/>
-              </a:rPr>
-              <a:t>2</a:t>
-            </a:r>
-            <a:r>
-              <a:rPr>
-                <a:solidFill>
-                  <a:srgbClr val="003B4F"/>
-                </a:solidFill>
-                <a:latin typeface="Courier"/>
-              </a:rPr>
-              <a:t>) </a:t>
-            </a:r>
-            <a:r>
-              <a:rPr>
+              <a:t>## Response: Species</a:t>
+            </a:r>
+            <a:br/>
+            <a:r>
+              <a:rPr i="1">
                 <a:solidFill>
                   <a:srgbClr val="5E5E5E"/>
                 </a:solidFill>
                 <a:latin typeface="Courier"/>
               </a:rPr>
-              <a:t>/</a:t>
-            </a:r>
-            <a:r>
-              <a:rPr>
-                <a:solidFill>
-                  <a:srgbClr val="003B4F"/>
-                </a:solidFill>
-                <a:latin typeface="Courier"/>
-              </a:rPr>
-              <a:t> </a:t>
+              <a:t>##               LR Chisq Df Pr(&gt;Chisq)    </a:t>
             </a:r>
             <a:br/>
             <a:r>
-              <a:rPr>
-                <a:solidFill>
-                  <a:srgbClr val="003B4F"/>
-                </a:solidFill>
-                <a:latin typeface="Courier"/>
-              </a:rPr>
-              <a:t>                   model_poisson_gala</a:t>
-            </a:r>
-            <a:r>
-              <a:rPr>
+              <a:rPr i="1">
                 <a:solidFill>
                   <a:srgbClr val="5E5E5E"/>
                 </a:solidFill>
                 <a:latin typeface="Courier"/>
               </a:rPr>
-              <a:t>$</a:t>
-            </a:r>
-            <a:r>
-              <a:rPr>
-                <a:solidFill>
-                  <a:srgbClr val="003B4F"/>
-                </a:solidFill>
-                <a:latin typeface="Courier"/>
-              </a:rPr>
-              <a:t>df.residual</a:t>
+              <a:t>## size_category     2571  2  &lt; 2.2e-16 ***</a:t>
             </a:r>
             <a:br/>
+            <a:r>
+              <a:rPr i="1">
+                <a:solidFill>
+                  <a:srgbClr val="5E5E5E"/>
+                </a:solidFill>
+                <a:latin typeface="Courier"/>
+              </a:rPr>
+              <a:t>## ---</a:t>
+            </a:r>
             <a:br/>
             <a:r>
-              <a:rPr>
+              <a:rPr i="1">
                 <a:solidFill>
                   <a:srgbClr val="5E5E5E"/>
                 </a:solidFill>
                 <a:latin typeface="Courier"/>
               </a:rPr>
-              <a:t># Print dispersion parameter</a:t>
-            </a:r>
-            <a:br/>
-            <a:r>
-              <a:rPr>
-                <a:solidFill>
-                  <a:srgbClr val="4758AB"/>
-                </a:solidFill>
-                <a:latin typeface="Courier"/>
-              </a:rPr>
-              <a:t>cat</a:t>
-            </a:r>
-            <a:r>
-              <a:rPr>
-                <a:solidFill>
-                  <a:srgbClr val="003B4F"/>
-                </a:solidFill>
-                <a:latin typeface="Courier"/>
-              </a:rPr>
-              <a:t>(</a:t>
-            </a:r>
-            <a:r>
-              <a:rPr>
-                <a:solidFill>
-                  <a:srgbClr val="20794D"/>
-                </a:solidFill>
-                <a:latin typeface="Courier"/>
-              </a:rPr>
-              <a:t>"Dispersion parameter:"</a:t>
-            </a:r>
-            <a:r>
-              <a:rPr>
-                <a:solidFill>
-                  <a:srgbClr val="003B4F"/>
-                </a:solidFill>
-                <a:latin typeface="Courier"/>
-              </a:rPr>
-              <a:t>, </a:t>
-            </a:r>
-            <a:r>
-              <a:rPr>
-                <a:solidFill>
-                  <a:srgbClr val="4758AB"/>
-                </a:solidFill>
-                <a:latin typeface="Courier"/>
-              </a:rPr>
-              <a:t>round</a:t>
-            </a:r>
-            <a:r>
-              <a:rPr>
-                <a:solidFill>
-                  <a:srgbClr val="003B4F"/>
-                </a:solidFill>
-                <a:latin typeface="Courier"/>
-              </a:rPr>
-              <a:t>(dispersion_gala, </a:t>
-            </a:r>
-            <a:r>
-              <a:rPr>
-                <a:solidFill>
-                  <a:srgbClr val="AD0000"/>
-                </a:solidFill>
-                <a:latin typeface="Courier"/>
-              </a:rPr>
-              <a:t>2</a:t>
-            </a:r>
-            <a:r>
-              <a:rPr>
-                <a:solidFill>
-                  <a:srgbClr val="003B4F"/>
-                </a:solidFill>
-                <a:latin typeface="Courier"/>
-              </a:rPr>
-              <a:t>), </a:t>
-            </a:r>
-            <a:r>
-              <a:rPr>
-                <a:solidFill>
-                  <a:srgbClr val="20794D"/>
-                </a:solidFill>
-                <a:latin typeface="Courier"/>
-              </a:rPr>
-              <a:t>"</a:t>
-            </a:r>
-            <a:r>
-              <a:rPr>
-                <a:solidFill>
-                  <a:srgbClr val="5E5E5E"/>
-                </a:solidFill>
-                <a:latin typeface="Courier"/>
-              </a:rPr>
-              <a:t>\n</a:t>
-            </a:r>
-            <a:r>
-              <a:rPr>
-                <a:solidFill>
-                  <a:srgbClr val="20794D"/>
-                </a:solidFill>
-                <a:latin typeface="Courier"/>
-              </a:rPr>
-              <a:t>"</a:t>
-            </a:r>
-            <a:r>
-              <a:rPr>
-                <a:solidFill>
-                  <a:srgbClr val="003B4F"/>
-                </a:solidFill>
-                <a:latin typeface="Courier"/>
-              </a:rPr>
-              <a:t>)</a:t>
-            </a:r>
-            <a:br/>
-            <a:r>
-              <a:rPr i="1">
-                <a:solidFill>
-                  <a:srgbClr val="5E5E5E"/>
-                </a:solidFill>
-                <a:latin typeface="Courier"/>
-              </a:rPr>
-              <a:t>## Dispersion parameter: 32.9</a:t>
+              <a:t>## Signif. codes:  0 '***' 0.001 '**' 0.01 '*' 0.05 '.' 0.1 ' ' 1</a:t>
             </a:r>
           </a:p>
         </p:txBody>
@@ -5744,6 +5379,606 @@
           <a:bodyPr/>
           <a:lstStyle/>
           <a:p>
+            <a:pPr lvl="0" indent="0" marL="0">
+              <a:buNone/>
+            </a:pPr>
+            <a:r>
+              <a:rPr b="1"/>
+              <a:t>Poisson GLMs</a:t>
+            </a:r>
+            <a:r>
+              <a:rPr/>
+              <a:t> are appropriate for </a:t>
+            </a:r>
+            <a:r>
+              <a:rPr b="1"/>
+              <a:t>count data</a:t>
+            </a:r>
+            <a:r>
+              <a:rPr/>
+              <a:t>. The Poisson distribution assumes that the variance equals the mean.</a:t>
+            </a:r>
+          </a:p>
+          <a:p>
+            <a:pPr lvl="0"/>
+            <a:r>
+              <a:rPr/>
+              <a:t>Use the quarter-mile time (</a:t>
+            </a:r>
+            <a:r>
+              <a:rPr>
+                <a:latin typeface="Courier"/>
+              </a:rPr>
+              <a:t>qsec</a:t>
+            </a:r>
+            <a:r>
+              <a:rPr/>
+              <a:t>) from the </a:t>
+            </a:r>
+            <a:r>
+              <a:rPr>
+                <a:latin typeface="Courier"/>
+              </a:rPr>
+              <a:t>mtcars</a:t>
+            </a:r>
+            <a:r>
+              <a:rPr/>
+              <a:t> dataset, rounded to create a count-like variable.</a:t>
+            </a:r>
+          </a:p>
+          <a:p>
+            <a:pPr lvl="0"/>
+            <a:r>
+              <a:rPr/>
+              <a:t>With the natural log link, coefficients represent </a:t>
+            </a:r>
+            <a:r>
+              <a:rPr b="1"/>
+              <a:t>multiplicative effects</a:t>
+            </a:r>
+            <a:r>
+              <a:rPr/>
+              <a:t>:</a:t>
+            </a:r>
+          </a:p>
+          <a:p>
+            <a:pPr lvl="0"/>
+            <a:r>
+              <a:rPr/>
+              <a:t>A coefficient of β means: for each 1-unit increase in X, the response is multiplied by exp(β)</a:t>
+            </a:r>
+          </a:p>
+          <a:p>
+            <a:pPr lvl="0"/>
+            <a:r>
+              <a:rPr/>
+              <a:t>For small β, exp(β) ≈ 1 + β, so β × 100% gives approximate percentage change</a:t>
+            </a:r>
+          </a:p>
+          <a:p>
+            <a:pPr lvl="0" indent="0">
+              <a:buNone/>
+            </a:pPr>
+            <a:r>
+              <a:rPr>
+                <a:latin typeface="Courier"/>
+              </a:rPr>
+              <a:t>## 
+## Call:
+## glm(formula = Species ~ size_category, family = poisson(link = "log"), 
+##     data = gala)
+## 
+## Coefficients:
+##                     Estimate Std. Error z value Pr(&gt;|z|)    
+## (Intercept)          2.67101    0.07930   33.68   &lt;2e-16 ***
+## size_categoryMedium  1.33784    0.08833   15.15   &lt;2e-16 ***
+## size_categoryLarge   2.84300    0.08285   34.31   &lt;2e-16 ***
+## ---
+## Signif. codes:  0 '***' 0.001 '**' 0.01 '*' 0.05 '.' 0.1 ' ' 1
+## 
+## (Dispersion parameter for poisson family taken to be 1)
+## 
+##     Null deviance: 3510.73  on 29  degrees of freedom
+## Residual deviance:  939.74  on 27  degrees of freedom
+## AIC: 1106.6
+## 
+## Number of Fisher Scoring iterations: 5</a:t>
+            </a:r>
+          </a:p>
+        </p:txBody>
+      </p:sp>
+      <p:sp>
+        <p:nvSpPr>
+          <p:cNvPr id="4" name="Content Placeholder 3"/>
+          <p:cNvSpPr>
+            <a:spLocks noGrp="1"/>
+          </p:cNvSpPr>
+          <p:nvPr>
+            <p:ph idx="2" sz="half"/>
+          </p:nvPr>
+        </p:nvSpPr>
+        <p:spPr/>
+        <p:txBody>
+          <a:bodyPr/>
+          <a:lstStyle/>
+          <a:p>
+            <a:pPr lvl="0"/>
+            <a:r>
+              <a:rPr/>
+              <a:t>Let’s check for overdispersion, which is common in count data:</a:t>
+            </a:r>
+          </a:p>
+          <a:p>
+            <a:pPr lvl="0"/>
+            <a:r>
+              <a:rPr/>
+              <a:t>Should be close to 1 for a well-fitting Poisson model</a:t>
+            </a:r>
+          </a:p>
+          <a:p>
+            <a:pPr lvl="0"/>
+            <a:r>
+              <a:rPr/>
+              <a:t>If &gt; 1.5, may indicate overdispersion</a:t>
+            </a:r>
+          </a:p>
+          <a:p>
+            <a:pPr lvl="1"/>
+            <a:r>
+              <a:rPr b="1"/>
+              <a:t>What is Underdispersion?</a:t>
+            </a:r>
+          </a:p>
+          <a:p>
+            <a:pPr lvl="2"/>
+            <a:r>
+              <a:rPr/>
+              <a:t>In a Poisson model, we expect the variance to equal the mean. The dispersion parameter measures the ratio of observed variance to expected variance:</a:t>
+            </a:r>
+          </a:p>
+          <a:p>
+            <a:pPr lvl="3"/>
+            <a:r>
+              <a:rPr b="1"/>
+              <a:t>Dispersion ≈ 1</a:t>
+            </a:r>
+            <a:r>
+              <a:rPr/>
+              <a:t>: Good fit (variance = mean, as Poisson assumes)</a:t>
+            </a:r>
+          </a:p>
+          <a:p>
+            <a:pPr lvl="3"/>
+            <a:r>
+              <a:rPr b="1"/>
+              <a:t>Dispersion &gt; 1</a:t>
+            </a:r>
+            <a:r>
+              <a:rPr/>
+              <a:t>: Overdispersion (variance &gt; mean)</a:t>
+            </a:r>
+          </a:p>
+          <a:p>
+            <a:pPr lvl="3"/>
+            <a:r>
+              <a:rPr b="1"/>
+              <a:t>Dispersion &lt; 1</a:t>
+            </a:r>
+            <a:r>
+              <a:rPr/>
+              <a:t>: </a:t>
+            </a:r>
+            <a:r>
+              <a:rPr b="1"/>
+              <a:t>Underdispersion</a:t>
+            </a:r>
+            <a:r>
+              <a:rPr/>
+              <a:t> (variance &lt; mean)</a:t>
+            </a:r>
+          </a:p>
+          <a:p>
+            <a:pPr lvl="1"/>
+            <a:r>
+              <a:rPr/>
+              <a:t>a dispersion parameter this large is a warning</a:t>
+            </a:r>
+          </a:p>
+          <a:p>
+            <a:pPr lvl="1"/>
+            <a:r>
+              <a:rPr/>
+              <a:t>our data more variable than a Poisson model expects</a:t>
+            </a:r>
+          </a:p>
+          <a:p>
+            <a:pPr lvl="1"/>
+            <a:r>
+              <a:rPr/>
+              <a:t>use a Negative Binomial model</a:t>
+            </a:r>
+          </a:p>
+          <a:p>
+            <a:pPr lvl="0" indent="0">
+              <a:buNone/>
+            </a:pPr>
+            <a:r>
+              <a:rPr>
+                <a:solidFill>
+                  <a:srgbClr val="5E5E5E"/>
+                </a:solidFill>
+                <a:latin typeface="Courier"/>
+              </a:rPr>
+              <a:t># Calculate the dispersion parameter</a:t>
+            </a:r>
+            <a:br/>
+            <a:r>
+              <a:rPr>
+                <a:solidFill>
+                  <a:srgbClr val="5E5E5E"/>
+                </a:solidFill>
+                <a:latin typeface="Courier"/>
+              </a:rPr>
+              <a:t># (Pearson's Chi-Squared statistic / residual degrees of freedom)</a:t>
+            </a:r>
+            <a:br/>
+            <a:r>
+              <a:rPr>
+                <a:solidFill>
+                  <a:srgbClr val="003B4F"/>
+                </a:solidFill>
+                <a:latin typeface="Courier"/>
+              </a:rPr>
+              <a:t>dispersion_gala &lt;- </a:t>
+            </a:r>
+            <a:r>
+              <a:rPr>
+                <a:solidFill>
+                  <a:srgbClr val="4758AB"/>
+                </a:solidFill>
+                <a:latin typeface="Courier"/>
+              </a:rPr>
+              <a:t>sum</a:t>
+            </a:r>
+            <a:r>
+              <a:rPr>
+                <a:solidFill>
+                  <a:srgbClr val="003B4F"/>
+                </a:solidFill>
+                <a:latin typeface="Courier"/>
+              </a:rPr>
+              <a:t>(</a:t>
+            </a:r>
+            <a:r>
+              <a:rPr>
+                <a:solidFill>
+                  <a:srgbClr val="4758AB"/>
+                </a:solidFill>
+                <a:latin typeface="Courier"/>
+              </a:rPr>
+              <a:t>residuals</a:t>
+            </a:r>
+            <a:r>
+              <a:rPr>
+                <a:solidFill>
+                  <a:srgbClr val="003B4F"/>
+                </a:solidFill>
+                <a:latin typeface="Courier"/>
+              </a:rPr>
+              <a:t>(model_poisson_gala, </a:t>
+            </a:r>
+            <a:r>
+              <a:rPr>
+                <a:solidFill>
+                  <a:srgbClr val="657422"/>
+                </a:solidFill>
+                <a:latin typeface="Courier"/>
+              </a:rPr>
+              <a:t>type =</a:t>
+            </a:r>
+            <a:r>
+              <a:rPr>
+                <a:solidFill>
+                  <a:srgbClr val="003B4F"/>
+                </a:solidFill>
+                <a:latin typeface="Courier"/>
+              </a:rPr>
+              <a:t> </a:t>
+            </a:r>
+            <a:r>
+              <a:rPr>
+                <a:solidFill>
+                  <a:srgbClr val="20794D"/>
+                </a:solidFill>
+                <a:latin typeface="Courier"/>
+              </a:rPr>
+              <a:t>"pearson"</a:t>
+            </a:r>
+            <a:r>
+              <a:rPr>
+                <a:solidFill>
+                  <a:srgbClr val="003B4F"/>
+                </a:solidFill>
+                <a:latin typeface="Courier"/>
+              </a:rPr>
+              <a:t>)</a:t>
+            </a:r>
+            <a:r>
+              <a:rPr>
+                <a:solidFill>
+                  <a:srgbClr val="5E5E5E"/>
+                </a:solidFill>
+                <a:latin typeface="Courier"/>
+              </a:rPr>
+              <a:t>^</a:t>
+            </a:r>
+            <a:r>
+              <a:rPr>
+                <a:solidFill>
+                  <a:srgbClr val="AD0000"/>
+                </a:solidFill>
+                <a:latin typeface="Courier"/>
+              </a:rPr>
+              <a:t>2</a:t>
+            </a:r>
+            <a:r>
+              <a:rPr>
+                <a:solidFill>
+                  <a:srgbClr val="003B4F"/>
+                </a:solidFill>
+                <a:latin typeface="Courier"/>
+              </a:rPr>
+              <a:t>) </a:t>
+            </a:r>
+            <a:r>
+              <a:rPr>
+                <a:solidFill>
+                  <a:srgbClr val="5E5E5E"/>
+                </a:solidFill>
+                <a:latin typeface="Courier"/>
+              </a:rPr>
+              <a:t>/</a:t>
+            </a:r>
+            <a:r>
+              <a:rPr>
+                <a:solidFill>
+                  <a:srgbClr val="003B4F"/>
+                </a:solidFill>
+                <a:latin typeface="Courier"/>
+              </a:rPr>
+              <a:t> </a:t>
+            </a:r>
+            <a:br/>
+            <a:r>
+              <a:rPr>
+                <a:solidFill>
+                  <a:srgbClr val="003B4F"/>
+                </a:solidFill>
+                <a:latin typeface="Courier"/>
+              </a:rPr>
+              <a:t>                   model_poisson_gala</a:t>
+            </a:r>
+            <a:r>
+              <a:rPr>
+                <a:solidFill>
+                  <a:srgbClr val="5E5E5E"/>
+                </a:solidFill>
+                <a:latin typeface="Courier"/>
+              </a:rPr>
+              <a:t>$</a:t>
+            </a:r>
+            <a:r>
+              <a:rPr>
+                <a:solidFill>
+                  <a:srgbClr val="003B4F"/>
+                </a:solidFill>
+                <a:latin typeface="Courier"/>
+              </a:rPr>
+              <a:t>df.residual</a:t>
+            </a:r>
+            <a:br/>
+            <a:br/>
+            <a:r>
+              <a:rPr>
+                <a:solidFill>
+                  <a:srgbClr val="5E5E5E"/>
+                </a:solidFill>
+                <a:latin typeface="Courier"/>
+              </a:rPr>
+              <a:t># Print dispersion parameter</a:t>
+            </a:r>
+            <a:br/>
+            <a:r>
+              <a:rPr>
+                <a:solidFill>
+                  <a:srgbClr val="4758AB"/>
+                </a:solidFill>
+                <a:latin typeface="Courier"/>
+              </a:rPr>
+              <a:t>cat</a:t>
+            </a:r>
+            <a:r>
+              <a:rPr>
+                <a:solidFill>
+                  <a:srgbClr val="003B4F"/>
+                </a:solidFill>
+                <a:latin typeface="Courier"/>
+              </a:rPr>
+              <a:t>(</a:t>
+            </a:r>
+            <a:r>
+              <a:rPr>
+                <a:solidFill>
+                  <a:srgbClr val="20794D"/>
+                </a:solidFill>
+                <a:latin typeface="Courier"/>
+              </a:rPr>
+              <a:t>"Dispersion parameter:"</a:t>
+            </a:r>
+            <a:r>
+              <a:rPr>
+                <a:solidFill>
+                  <a:srgbClr val="003B4F"/>
+                </a:solidFill>
+                <a:latin typeface="Courier"/>
+              </a:rPr>
+              <a:t>, </a:t>
+            </a:r>
+            <a:r>
+              <a:rPr>
+                <a:solidFill>
+                  <a:srgbClr val="4758AB"/>
+                </a:solidFill>
+                <a:latin typeface="Courier"/>
+              </a:rPr>
+              <a:t>round</a:t>
+            </a:r>
+            <a:r>
+              <a:rPr>
+                <a:solidFill>
+                  <a:srgbClr val="003B4F"/>
+                </a:solidFill>
+                <a:latin typeface="Courier"/>
+              </a:rPr>
+              <a:t>(dispersion_gala, </a:t>
+            </a:r>
+            <a:r>
+              <a:rPr>
+                <a:solidFill>
+                  <a:srgbClr val="AD0000"/>
+                </a:solidFill>
+                <a:latin typeface="Courier"/>
+              </a:rPr>
+              <a:t>2</a:t>
+            </a:r>
+            <a:r>
+              <a:rPr>
+                <a:solidFill>
+                  <a:srgbClr val="003B4F"/>
+                </a:solidFill>
+                <a:latin typeface="Courier"/>
+              </a:rPr>
+              <a:t>), </a:t>
+            </a:r>
+            <a:r>
+              <a:rPr>
+                <a:solidFill>
+                  <a:srgbClr val="20794D"/>
+                </a:solidFill>
+                <a:latin typeface="Courier"/>
+              </a:rPr>
+              <a:t>"</a:t>
+            </a:r>
+            <a:r>
+              <a:rPr>
+                <a:solidFill>
+                  <a:srgbClr val="5E5E5E"/>
+                </a:solidFill>
+                <a:latin typeface="Courier"/>
+              </a:rPr>
+              <a:t>\n</a:t>
+            </a:r>
+            <a:r>
+              <a:rPr>
+                <a:solidFill>
+                  <a:srgbClr val="20794D"/>
+                </a:solidFill>
+                <a:latin typeface="Courier"/>
+              </a:rPr>
+              <a:t>"</a:t>
+            </a:r>
+            <a:r>
+              <a:rPr>
+                <a:solidFill>
+                  <a:srgbClr val="003B4F"/>
+                </a:solidFill>
+                <a:latin typeface="Courier"/>
+              </a:rPr>
+              <a:t>)</a:t>
+            </a:r>
+            <a:br/>
+            <a:r>
+              <a:rPr i="1">
+                <a:solidFill>
+                  <a:srgbClr val="5E5E5E"/>
+                </a:solidFill>
+                <a:latin typeface="Courier"/>
+              </a:rPr>
+              <a:t>## Dispersion parameter: 32.9</a:t>
+            </a:r>
+          </a:p>
+        </p:txBody>
+      </p:sp>
+    </p:spTree>
+  </p:cSld>
+</p:sld>
+</file>
+
+<file path=ppt/slides/slide16.xml><?xml version="1.0" encoding="utf-8"?>
+<p:sld xmlns:a="http://schemas.openxmlformats.org/drawingml/2006/main" xmlns:r="http://schemas.openxmlformats.org/officeDocument/2006/relationships" xmlns:p="http://schemas.openxmlformats.org/presentationml/2006/main">
+  <p:cSld>
+    <p:spTree>
+      <p:nvGrpSpPr>
+        <p:cNvPr id="1" name=""/>
+        <p:cNvGrpSpPr/>
+        <p:nvPr/>
+      </p:nvGrpSpPr>
+      <p:grpSpPr>
+        <a:xfrm>
+          <a:off x="0" y="0"/>
+          <a:ext cx="0" cy="0"/>
+          <a:chOff x="0" y="0"/>
+          <a:chExt cx="0" cy="0"/>
+        </a:xfrm>
+      </p:grpSpPr>
+      <p:sp>
+        <p:nvSpPr>
+          <p:cNvPr id="2" name="Title 1"/>
+          <p:cNvSpPr>
+            <a:spLocks noGrp="1"/>
+          </p:cNvSpPr>
+          <p:nvPr>
+            <p:ph type="title"/>
+          </p:nvPr>
+        </p:nvSpPr>
+        <p:spPr>
+          <a:xfrm>
+            <a:off x="0" y="0"/>
+            <a:ext cx="9144000" cy="602780"/>
+          </a:xfrm>
+          <a:solidFill>
+            <a:srgbClr val="70121D"/>
+          </a:solidFill>
+        </p:spPr>
+        <p:txBody>
+          <a:bodyPr/>
+          <a:lstStyle/>
+          <a:p>
+            <a:pPr lvl="0" indent="0" marL="0">
+              <a:buNone/>
+            </a:pPr>
+            <a:r>
+              <a:rPr/>
+              <a:t>GLM with Poisson Distribution: Setup</a:t>
+            </a:r>
+          </a:p>
+        </p:txBody>
+      </p:sp>
+      <p:sp>
+        <p:nvSpPr>
+          <p:cNvPr id="3" name="Content Placeholder 2"/>
+          <p:cNvSpPr>
+            <a:spLocks noGrp="1"/>
+          </p:cNvSpPr>
+          <p:nvPr>
+            <p:ph idx="1" sz="half"/>
+          </p:nvPr>
+        </p:nvSpPr>
+        <p:spPr/>
+        <p:txBody>
+          <a:bodyPr/>
+          <a:lstStyle/>
+          <a:p>
             <a:pPr lvl="0"/>
             <a:r>
               <a:rPr b="1"/>
@@ -6057,7 +6292,7 @@
 </p:sld>
 </file>
 
-<file path=ppt/slides/slide16.xml><?xml version="1.0" encoding="utf-8"?>
+<file path=ppt/slides/slide17.xml><?xml version="1.0" encoding="utf-8"?>
 <p:sld xmlns:a="http://schemas.openxmlformats.org/drawingml/2006/main" xmlns:r="http://schemas.openxmlformats.org/officeDocument/2006/relationships" xmlns:p="http://schemas.openxmlformats.org/presentationml/2006/main">
   <p:cSld>
     <p:spTree>
@@ -6253,7 +6488,7 @@
 </p:sld>
 </file>
 
-<file path=ppt/slides/slide17.xml><?xml version="1.0" encoding="utf-8"?>
+<file path=ppt/slides/slide18.xml><?xml version="1.0" encoding="utf-8"?>
 <p:sld xmlns:a="http://schemas.openxmlformats.org/drawingml/2006/main" xmlns:r="http://schemas.openxmlformats.org/officeDocument/2006/relationships" xmlns:p="http://schemas.openxmlformats.org/presentationml/2006/main">
   <p:cSld>
     <p:spTree>
@@ -6556,7 +6791,7 @@
 </p:sld>
 </file>
 
-<file path=ppt/slides/slide18.xml><?xml version="1.0" encoding="utf-8"?>
+<file path=ppt/slides/slide19.xml><?xml version="1.0" encoding="utf-8"?>
 <p:sld xmlns:a="http://schemas.openxmlformats.org/drawingml/2006/main" xmlns:r="http://schemas.openxmlformats.org/officeDocument/2006/relationships" xmlns:p="http://schemas.openxmlformats.org/presentationml/2006/main">
   <p:cSld>
     <p:spTree>
@@ -6624,215 +6859,6 @@
           </a:p>
         </p:txBody>
       </p:sp>
-    </p:spTree>
-  </p:cSld>
-</p:sld>
-</file>
-
-<file path=ppt/slides/slide19.xml><?xml version="1.0" encoding="utf-8"?>
-<p:sld xmlns:a="http://schemas.openxmlformats.org/drawingml/2006/main" xmlns:r="http://schemas.openxmlformats.org/officeDocument/2006/relationships" xmlns:p="http://schemas.openxmlformats.org/presentationml/2006/main">
-  <p:cSld>
-    <p:spTree>
-      <p:nvGrpSpPr>
-        <p:cNvPr id="1" name=""/>
-        <p:cNvGrpSpPr/>
-        <p:nvPr/>
-      </p:nvGrpSpPr>
-      <p:grpSpPr>
-        <a:xfrm>
-          <a:off x="0" y="0"/>
-          <a:ext cx="0" cy="0"/>
-          <a:chOff x="0" y="0"/>
-          <a:chExt cx="0" cy="0"/>
-        </a:xfrm>
-      </p:grpSpPr>
-      <p:sp>
-        <p:nvSpPr>
-          <p:cNvPr id="2" name="Title 1"/>
-          <p:cNvSpPr>
-            <a:spLocks noGrp="1"/>
-          </p:cNvSpPr>
-          <p:nvPr>
-            <p:ph type="title"/>
-          </p:nvPr>
-        </p:nvSpPr>
-        <p:spPr>
-          <a:xfrm>
-            <a:off x="139485" y="78119"/>
-            <a:ext cx="8229600" cy="607682"/>
-          </a:xfrm>
-        </p:spPr>
-        <p:txBody>
-          <a:bodyPr/>
-          <a:lstStyle/>
-          <a:p>
-            <a:pPr lvl="0" indent="0" marL="0">
-              <a:buNone/>
-            </a:pPr>
-            <a:r>
-              <a:rPr/>
-              <a:t>Dealing with Overdispersion in Count Data</a:t>
-            </a:r>
-          </a:p>
-        </p:txBody>
-      </p:sp>
-      <p:sp>
-        <p:nvSpPr>
-          <p:cNvPr id="3" name="Text Placeholder 2"/>
-          <p:cNvSpPr>
-            <a:spLocks noGrp="1"/>
-          </p:cNvSpPr>
-          <p:nvPr>
-            <p:ph idx="1" type="body"/>
-          </p:nvPr>
-        </p:nvSpPr>
-        <p:spPr/>
-        <p:txBody>
-          <a:bodyPr/>
-          <a:lstStyle/>
-          <a:p>
-            <a:pPr lvl="0" indent="0" marL="0">
-              <a:buNone/>
-            </a:pPr>
-            <a:r>
-              <a:rPr/>
-              <a:t>When count data shows more variability than expected under a Poisson distribution (variance &gt; mean), may need to use negative binomial model </a:t>
-            </a:r>
-            <a:r>
-              <a:rPr>
-                <a:latin typeface="Courier"/>
-              </a:rPr>
-              <a:t>model_nb &lt;- glm.nb(qsec_round ~ cyl, data = mtcars_count)</a:t>
-            </a:r>
-          </a:p>
-          <a:p>
-            <a:pPr lvl="0" indent="0">
-              <a:buNone/>
-            </a:pPr>
-            <a:r>
-              <a:rPr>
-                <a:latin typeface="Courier"/>
-              </a:rPr>
-              <a:t>## 
-## Call:
-## glm.nb(formula = Species ~ size_category, data = gala, init.theta = 1.709503171, 
-##     link = log)
-## 
-## Coefficients:
-##                     Estimate Std. Error z value Pr(&gt;|z|)    
-## (Intercept)           2.6710     0.2439  10.953  &lt; 2e-16 ***
-## size_categoryMedium   1.3378     0.3313   4.039 5.37e-05 ***
-## size_categoryLarge    2.8430     0.3790   7.502 6.28e-14 ***
-## ---
-## Signif. codes:  0 '***' 0.001 '**' 0.01 '*' 0.05 '.' 0.1 ' ' 1
-## 
-## (Dispersion parameter for Negative Binomial(1.7095) family taken to be 1)
-## 
-##     Null deviance: 90.168  on 29  degrees of freedom
-## Residual deviance: 32.932  on 27  degrees of freedom
-## AIC: 297.35
-## 
-## Number of Fisher Scoring iterations: 1
-## 
-## 
-##               Theta:  1.710 
-##           Std. Err.:  0.449 
-## 
-##  2 x log-likelihood:  -289.348</a:t>
-            </a:r>
-          </a:p>
-          <a:p>
-            <a:pPr lvl="0"/>
-            <a:r>
-              <a:rPr/>
-              <a:t>negative binomial model includes a dispersion parameter (theta)</a:t>
-            </a:r>
-          </a:p>
-          <a:p>
-            <a:pPr lvl="1"/>
-            <a:r>
-              <a:rPr/>
-              <a:t>allows the variance to be larger than the mean</a:t>
-            </a:r>
-          </a:p>
-          <a:p>
-            <a:pPr lvl="1"/>
-            <a:r>
-              <a:rPr/>
-              <a:t>standard errors bigger because NB model accounts for high variability (overdispersion)</a:t>
-            </a:r>
-          </a:p>
-          <a:p>
-            <a:pPr lvl="1"/>
-            <a:r>
-              <a:rPr/>
-              <a:t>estimates dispersion parameter ‘Theta’ (or 1/theta)</a:t>
-            </a:r>
-          </a:p>
-          <a:p>
-            <a:pPr lvl="1"/>
-            <a:r>
-              <a:rPr/>
-              <a:t>how it models the overdispersion.</a:t>
-            </a:r>
-          </a:p>
-        </p:txBody>
-      </p:sp>
-      <p:sp>
-        <p:nvSpPr>
-          <p:cNvPr id="5" name="Text Placeholder 4"/>
-          <p:cNvSpPr>
-            <a:spLocks noGrp="1"/>
-          </p:cNvSpPr>
-          <p:nvPr>
-            <p:ph idx="3" sz="quarter" type="body"/>
-          </p:nvPr>
-        </p:nvSpPr>
-        <p:spPr/>
-        <p:txBody>
-          <a:bodyPr/>
-          <a:lstStyle/>
-          <a:p>
-            <a:pPr lvl="0" indent="0" marL="0">
-              <a:buNone/>
-            </a:pPr>
-            <a:r>
-              <a:rPr/>
-              <a:t>Let’s compare the predictions from both models:</a:t>
-            </a:r>
-          </a:p>
-        </p:txBody>
-      </p:sp>
-      <p:pic>
-        <p:nvPicPr>
-          <p:cNvPr descr="14_01_lecture_powerpoint_files/figure-pptx/gala-compare-models-1.png" id="0" name="Picture 1"/>
-          <p:cNvPicPr>
-            <a:picLocks noGrp="1" noChangeAspect="1"/>
-          </p:cNvPicPr>
-          <p:nvPr/>
-        </p:nvPicPr>
-        <p:blipFill>
-          <a:blip r:embed="rId2"/>
-          <a:stretch>
-            <a:fillRect/>
-          </a:stretch>
-        </p:blipFill>
-        <p:spPr bwMode="auto">
-          <a:xfrm>
-            <a:off x="4749800" y="1689100"/>
-            <a:ext cx="4038600" cy="2489200"/>
-          </a:xfrm>
-          <a:prstGeom prst="rect">
-            <a:avLst/>
-          </a:prstGeom>
-          <a:noFill/>
-          <a:ln w="9525">
-            <a:noFill/>
-            <a:headEnd/>
-            <a:tailEnd/>
-          </a:ln>
-        </p:spPr>
-      </p:pic>
     </p:spTree>
   </p:cSld>
 </p:sld>
@@ -6968,6 +6994,215 @@
 </file>
 
 <file path=ppt/slides/slide20.xml><?xml version="1.0" encoding="utf-8"?>
+<p:sld xmlns:a="http://schemas.openxmlformats.org/drawingml/2006/main" xmlns:r="http://schemas.openxmlformats.org/officeDocument/2006/relationships" xmlns:p="http://schemas.openxmlformats.org/presentationml/2006/main">
+  <p:cSld>
+    <p:spTree>
+      <p:nvGrpSpPr>
+        <p:cNvPr id="1" name=""/>
+        <p:cNvGrpSpPr/>
+        <p:nvPr/>
+      </p:nvGrpSpPr>
+      <p:grpSpPr>
+        <a:xfrm>
+          <a:off x="0" y="0"/>
+          <a:ext cx="0" cy="0"/>
+          <a:chOff x="0" y="0"/>
+          <a:chExt cx="0" cy="0"/>
+        </a:xfrm>
+      </p:grpSpPr>
+      <p:sp>
+        <p:nvSpPr>
+          <p:cNvPr id="2" name="Title 1"/>
+          <p:cNvSpPr>
+            <a:spLocks noGrp="1"/>
+          </p:cNvSpPr>
+          <p:nvPr>
+            <p:ph type="title"/>
+          </p:nvPr>
+        </p:nvSpPr>
+        <p:spPr>
+          <a:xfrm>
+            <a:off x="139485" y="78119"/>
+            <a:ext cx="8229600" cy="607682"/>
+          </a:xfrm>
+        </p:spPr>
+        <p:txBody>
+          <a:bodyPr/>
+          <a:lstStyle/>
+          <a:p>
+            <a:pPr lvl="0" indent="0" marL="0">
+              <a:buNone/>
+            </a:pPr>
+            <a:r>
+              <a:rPr/>
+              <a:t>Dealing with Overdispersion in Count Data</a:t>
+            </a:r>
+          </a:p>
+        </p:txBody>
+      </p:sp>
+      <p:sp>
+        <p:nvSpPr>
+          <p:cNvPr id="3" name="Text Placeholder 2"/>
+          <p:cNvSpPr>
+            <a:spLocks noGrp="1"/>
+          </p:cNvSpPr>
+          <p:nvPr>
+            <p:ph idx="1" type="body"/>
+          </p:nvPr>
+        </p:nvSpPr>
+        <p:spPr/>
+        <p:txBody>
+          <a:bodyPr/>
+          <a:lstStyle/>
+          <a:p>
+            <a:pPr lvl="0" indent="0" marL="0">
+              <a:buNone/>
+            </a:pPr>
+            <a:r>
+              <a:rPr/>
+              <a:t>When count data shows more variability than expected under a Poisson distribution (variance &gt; mean), may need to use negative binomial model </a:t>
+            </a:r>
+            <a:r>
+              <a:rPr>
+                <a:latin typeface="Courier"/>
+              </a:rPr>
+              <a:t>model_nb &lt;- glm.nb(qsec_round ~ cyl, data = mtcars_count)</a:t>
+            </a:r>
+          </a:p>
+          <a:p>
+            <a:pPr lvl="0" indent="0">
+              <a:buNone/>
+            </a:pPr>
+            <a:r>
+              <a:rPr>
+                <a:latin typeface="Courier"/>
+              </a:rPr>
+              <a:t>## 
+## Call:
+## glm.nb(formula = Species ~ size_category, data = gala, init.theta = 1.709503171, 
+##     link = log)
+## 
+## Coefficients:
+##                     Estimate Std. Error z value Pr(&gt;|z|)    
+## (Intercept)           2.6710     0.2439  10.953  &lt; 2e-16 ***
+## size_categoryMedium   1.3378     0.3313   4.039 5.37e-05 ***
+## size_categoryLarge    2.8430     0.3790   7.502 6.28e-14 ***
+## ---
+## Signif. codes:  0 '***' 0.001 '**' 0.01 '*' 0.05 '.' 0.1 ' ' 1
+## 
+## (Dispersion parameter for Negative Binomial(1.7095) family taken to be 1)
+## 
+##     Null deviance: 90.168  on 29  degrees of freedom
+## Residual deviance: 32.932  on 27  degrees of freedom
+## AIC: 297.35
+## 
+## Number of Fisher Scoring iterations: 1
+## 
+## 
+##               Theta:  1.710 
+##           Std. Err.:  0.449 
+## 
+##  2 x log-likelihood:  -289.348</a:t>
+            </a:r>
+          </a:p>
+          <a:p>
+            <a:pPr lvl="0"/>
+            <a:r>
+              <a:rPr/>
+              <a:t>negative binomial model includes a dispersion parameter (theta)</a:t>
+            </a:r>
+          </a:p>
+          <a:p>
+            <a:pPr lvl="1"/>
+            <a:r>
+              <a:rPr/>
+              <a:t>allows the variance to be larger than the mean</a:t>
+            </a:r>
+          </a:p>
+          <a:p>
+            <a:pPr lvl="1"/>
+            <a:r>
+              <a:rPr/>
+              <a:t>standard errors bigger because NB model accounts for high variability (overdispersion)</a:t>
+            </a:r>
+          </a:p>
+          <a:p>
+            <a:pPr lvl="1"/>
+            <a:r>
+              <a:rPr/>
+              <a:t>estimates dispersion parameter ‘Theta’ (or 1/theta)</a:t>
+            </a:r>
+          </a:p>
+          <a:p>
+            <a:pPr lvl="1"/>
+            <a:r>
+              <a:rPr/>
+              <a:t>how it models the overdispersion.</a:t>
+            </a:r>
+          </a:p>
+        </p:txBody>
+      </p:sp>
+      <p:sp>
+        <p:nvSpPr>
+          <p:cNvPr id="5" name="Text Placeholder 4"/>
+          <p:cNvSpPr>
+            <a:spLocks noGrp="1"/>
+          </p:cNvSpPr>
+          <p:nvPr>
+            <p:ph idx="3" sz="quarter" type="body"/>
+          </p:nvPr>
+        </p:nvSpPr>
+        <p:spPr/>
+        <p:txBody>
+          <a:bodyPr/>
+          <a:lstStyle/>
+          <a:p>
+            <a:pPr lvl="0" indent="0" marL="0">
+              <a:buNone/>
+            </a:pPr>
+            <a:r>
+              <a:rPr/>
+              <a:t>Let’s compare the predictions from both models:</a:t>
+            </a:r>
+          </a:p>
+        </p:txBody>
+      </p:sp>
+      <p:pic>
+        <p:nvPicPr>
+          <p:cNvPr descr="14_01_lecture_powerpoint_files/figure-pptx/gala-compare-models-1.png" id="0" name="Picture 1"/>
+          <p:cNvPicPr>
+            <a:picLocks noGrp="1" noChangeAspect="1"/>
+          </p:cNvPicPr>
+          <p:nvPr/>
+        </p:nvPicPr>
+        <p:blipFill>
+          <a:blip r:embed="rId2"/>
+          <a:stretch>
+            <a:fillRect/>
+          </a:stretch>
+        </p:blipFill>
+        <p:spPr bwMode="auto">
+          <a:xfrm>
+            <a:off x="4749800" y="1689100"/>
+            <a:ext cx="4038600" cy="2489200"/>
+          </a:xfrm>
+          <a:prstGeom prst="rect">
+            <a:avLst/>
+          </a:prstGeom>
+          <a:noFill/>
+          <a:ln w="9525">
+            <a:noFill/>
+            <a:headEnd/>
+            <a:tailEnd/>
+          </a:ln>
+        </p:spPr>
+      </p:pic>
+    </p:spTree>
+  </p:cSld>
+</p:sld>
+</file>
+
+<file path=ppt/slides/slide21.xml><?xml version="1.0" encoding="utf-8"?>
 <p:sld xmlns:a="http://schemas.openxmlformats.org/drawingml/2006/main" xmlns:r="http://schemas.openxmlformats.org/officeDocument/2006/relationships" xmlns:p="http://schemas.openxmlformats.org/presentationml/2006/main">
   <p:cSld>
     <p:spTree>
@@ -7491,96 +7726,6 @@
 </p:sld>
 </file>
 
-<file path=ppt/slides/slide21.xml><?xml version="1.0" encoding="utf-8"?>
-<p:sld xmlns:a="http://schemas.openxmlformats.org/drawingml/2006/main" xmlns:r="http://schemas.openxmlformats.org/officeDocument/2006/relationships" xmlns:p="http://schemas.openxmlformats.org/presentationml/2006/main">
-  <p:cSld>
-    <p:spTree>
-      <p:nvGrpSpPr>
-        <p:cNvPr id="1" name=""/>
-        <p:cNvGrpSpPr/>
-        <p:nvPr/>
-      </p:nvGrpSpPr>
-      <p:grpSpPr>
-        <a:xfrm>
-          <a:off x="0" y="0"/>
-          <a:ext cx="0" cy="0"/>
-          <a:chOff x="0" y="0"/>
-          <a:chExt cx="0" cy="0"/>
-        </a:xfrm>
-      </p:grpSpPr>
-      <p:sp>
-        <p:nvSpPr>
-          <p:cNvPr id="2" name="Title 1"/>
-          <p:cNvSpPr>
-            <a:spLocks noGrp="1"/>
-          </p:cNvSpPr>
-          <p:nvPr>
-            <p:ph type="title"/>
-          </p:nvPr>
-        </p:nvSpPr>
-        <p:spPr>
-          <a:xfrm>
-            <a:off x="0" y="0"/>
-            <a:ext cx="9144000" cy="582780"/>
-          </a:xfrm>
-        </p:spPr>
-        <p:txBody>
-          <a:bodyPr/>
-          <a:lstStyle/>
-          <a:p>
-            <a:pPr lvl="0" indent="0" marL="0">
-              <a:buNone/>
-            </a:pPr>
-            <a:r>
-              <a:rPr/>
-              <a:t>Example: Lizard Presence on Islands</a:t>
-            </a:r>
-          </a:p>
-        </p:txBody>
-      </p:sp>
-      <p:sp>
-        <p:nvSpPr>
-          <p:cNvPr id="3" name="Content Placeholder 2"/>
-          <p:cNvSpPr>
-            <a:spLocks noGrp="1"/>
-          </p:cNvSpPr>
-          <p:nvPr>
-            <p:ph idx="1"/>
-          </p:nvPr>
-        </p:nvSpPr>
-        <p:spPr/>
-        <p:txBody>
-          <a:bodyPr/>
-          <a:lstStyle/>
-          <a:p>
-            <a:pPr lvl="0" indent="0" marL="0">
-              <a:buNone/>
-            </a:pPr>
-            <a:r>
-              <a:rPr/>
-              <a:t>Based on the example from Polis et al. (1998), we’ll model the presence/absence of lizards (</a:t>
-            </a:r>
-            <a:r>
-              <a:rPr i="1"/>
-              <a:t>Uta</a:t>
-            </a:r>
-            <a:r>
-              <a:rPr/>
-              <a:t>) on islands in the Gulf of California based on perimeter/area ratio.</a:t>
-            </a:r>
-          </a:p>
-          <a:p>
-            <a:pPr lvl="0" indent="0" marL="0">
-              <a:buNone/>
-            </a:pPr>
-          </a:p>
-        </p:txBody>
-      </p:sp>
-    </p:spTree>
-  </p:cSld>
-</p:sld>
-</file>
-
 <file path=ppt/slides/slide22.xml><?xml version="1.0" encoding="utf-8"?>
 <p:sld xmlns:a="http://schemas.openxmlformats.org/drawingml/2006/main" xmlns:r="http://schemas.openxmlformats.org/officeDocument/2006/relationships" xmlns:p="http://schemas.openxmlformats.org/presentationml/2006/main">
   <p:cSld>
@@ -7660,394 +7805,9 @@
             </a:r>
           </a:p>
           <a:p>
-            <a:pPr lvl="0" indent="0">
-              <a:buNone/>
-            </a:pPr>
-            <a:r>
-              <a:rPr>
-                <a:solidFill>
-                  <a:srgbClr val="5E5E5E"/>
-                </a:solidFill>
-                <a:latin typeface="Courier"/>
-              </a:rPr>
-              <a:t># Fit the logistic regression model</a:t>
-            </a:r>
-            <a:br/>
-            <a:r>
-              <a:rPr>
-                <a:solidFill>
-                  <a:srgbClr val="003B4F"/>
-                </a:solidFill>
-                <a:latin typeface="Courier"/>
-              </a:rPr>
-              <a:t>lizard_model &lt;- </a:t>
-            </a:r>
-            <a:r>
-              <a:rPr>
-                <a:solidFill>
-                  <a:srgbClr val="4758AB"/>
-                </a:solidFill>
-                <a:latin typeface="Courier"/>
-              </a:rPr>
-              <a:t>glm</a:t>
-            </a:r>
-            <a:r>
-              <a:rPr>
-                <a:solidFill>
-                  <a:srgbClr val="003B4F"/>
-                </a:solidFill>
-                <a:latin typeface="Courier"/>
-              </a:rPr>
-              <a:t>(uta_present </a:t>
-            </a:r>
-            <a:r>
-              <a:rPr>
-                <a:solidFill>
-                  <a:srgbClr val="5E5E5E"/>
-                </a:solidFill>
-                <a:latin typeface="Courier"/>
-              </a:rPr>
-              <a:t>~</a:t>
-            </a:r>
-            <a:r>
-              <a:rPr>
-                <a:solidFill>
-                  <a:srgbClr val="003B4F"/>
-                </a:solidFill>
-                <a:latin typeface="Courier"/>
-              </a:rPr>
-              <a:t> pa_ratio, </a:t>
-            </a:r>
-            <a:br/>
-            <a:r>
-              <a:rPr>
-                <a:solidFill>
-                  <a:srgbClr val="003B4F"/>
-                </a:solidFill>
-                <a:latin typeface="Courier"/>
-              </a:rPr>
-              <a:t>                    </a:t>
-            </a:r>
-            <a:r>
-              <a:rPr>
-                <a:solidFill>
-                  <a:srgbClr val="657422"/>
-                </a:solidFill>
-                <a:latin typeface="Courier"/>
-              </a:rPr>
-              <a:t>data =</a:t>
-            </a:r>
-            <a:r>
-              <a:rPr>
-                <a:solidFill>
-                  <a:srgbClr val="003B4F"/>
-                </a:solidFill>
-                <a:latin typeface="Courier"/>
-              </a:rPr>
-              <a:t> island_data, </a:t>
-            </a:r>
-            <a:br/>
-            <a:r>
-              <a:rPr>
-                <a:solidFill>
-                  <a:srgbClr val="003B4F"/>
-                </a:solidFill>
-                <a:latin typeface="Courier"/>
-              </a:rPr>
-              <a:t>                    </a:t>
-            </a:r>
-            <a:r>
-              <a:rPr>
-                <a:solidFill>
-                  <a:srgbClr val="657422"/>
-                </a:solidFill>
-                <a:latin typeface="Courier"/>
-              </a:rPr>
-              <a:t>family =</a:t>
-            </a:r>
-            <a:r>
-              <a:rPr>
-                <a:solidFill>
-                  <a:srgbClr val="003B4F"/>
-                </a:solidFill>
-                <a:latin typeface="Courier"/>
-              </a:rPr>
-              <a:t> </a:t>
-            </a:r>
-            <a:r>
-              <a:rPr>
-                <a:solidFill>
-                  <a:srgbClr val="4758AB"/>
-                </a:solidFill>
-                <a:latin typeface="Courier"/>
-              </a:rPr>
-              <a:t>binomial</a:t>
-            </a:r>
-            <a:r>
-              <a:rPr>
-                <a:solidFill>
-                  <a:srgbClr val="003B4F"/>
-                </a:solidFill>
-                <a:latin typeface="Courier"/>
-              </a:rPr>
-              <a:t>(</a:t>
-            </a:r>
-            <a:r>
-              <a:rPr>
-                <a:solidFill>
-                  <a:srgbClr val="657422"/>
-                </a:solidFill>
-                <a:latin typeface="Courier"/>
-              </a:rPr>
-              <a:t>link =</a:t>
-            </a:r>
-            <a:r>
-              <a:rPr>
-                <a:solidFill>
-                  <a:srgbClr val="003B4F"/>
-                </a:solidFill>
-                <a:latin typeface="Courier"/>
-              </a:rPr>
-              <a:t> </a:t>
-            </a:r>
-            <a:r>
-              <a:rPr>
-                <a:solidFill>
-                  <a:srgbClr val="20794D"/>
-                </a:solidFill>
-                <a:latin typeface="Courier"/>
-              </a:rPr>
-              <a:t>"logit"</a:t>
-            </a:r>
-            <a:r>
-              <a:rPr>
-                <a:solidFill>
-                  <a:srgbClr val="003B4F"/>
-                </a:solidFill>
-                <a:latin typeface="Courier"/>
-              </a:rPr>
-              <a:t>))</a:t>
-            </a:r>
-            <a:br/>
-            <a:br/>
-            <a:r>
-              <a:rPr>
-                <a:solidFill>
-                  <a:srgbClr val="5E5E5E"/>
-                </a:solidFill>
-                <a:latin typeface="Courier"/>
-              </a:rPr>
-              <a:t># Model summary</a:t>
-            </a:r>
-            <a:br/>
-            <a:r>
-              <a:rPr>
-                <a:solidFill>
-                  <a:srgbClr val="4758AB"/>
-                </a:solidFill>
-                <a:latin typeface="Courier"/>
-              </a:rPr>
-              <a:t>summary</a:t>
-            </a:r>
-            <a:r>
-              <a:rPr>
-                <a:solidFill>
-                  <a:srgbClr val="003B4F"/>
-                </a:solidFill>
-                <a:latin typeface="Courier"/>
-              </a:rPr>
-              <a:t>(lizard_model)</a:t>
-            </a:r>
-            <a:br/>
-            <a:r>
-              <a:rPr i="1">
-                <a:solidFill>
-                  <a:srgbClr val="5E5E5E"/>
-                </a:solidFill>
-                <a:latin typeface="Courier"/>
-              </a:rPr>
-              <a:t>## </a:t>
-            </a:r>
-            <a:br/>
-            <a:r>
-              <a:rPr i="1">
-                <a:solidFill>
-                  <a:srgbClr val="5E5E5E"/>
-                </a:solidFill>
-                <a:latin typeface="Courier"/>
-              </a:rPr>
-              <a:t>## Call:</a:t>
-            </a:r>
-            <a:br/>
-            <a:r>
-              <a:rPr i="1">
-                <a:solidFill>
-                  <a:srgbClr val="5E5E5E"/>
-                </a:solidFill>
-                <a:latin typeface="Courier"/>
-              </a:rPr>
-              <a:t>## glm(formula = uta_present ~ pa_ratio, family = binomial(link = "logit"), </a:t>
-            </a:r>
-            <a:br/>
-            <a:r>
-              <a:rPr i="1">
-                <a:solidFill>
-                  <a:srgbClr val="5E5E5E"/>
-                </a:solidFill>
-                <a:latin typeface="Courier"/>
-              </a:rPr>
-              <a:t>##     data = island_data)</a:t>
-            </a:r>
-            <a:br/>
-            <a:r>
-              <a:rPr i="1">
-                <a:solidFill>
-                  <a:srgbClr val="5E5E5E"/>
-                </a:solidFill>
-                <a:latin typeface="Courier"/>
-              </a:rPr>
-              <a:t>## </a:t>
-            </a:r>
-            <a:br/>
-            <a:r>
-              <a:rPr i="1">
-                <a:solidFill>
-                  <a:srgbClr val="5E5E5E"/>
-                </a:solidFill>
-                <a:latin typeface="Courier"/>
-              </a:rPr>
-              <a:t>## Coefficients:</a:t>
-            </a:r>
-            <a:br/>
-            <a:r>
-              <a:rPr i="1">
-                <a:solidFill>
-                  <a:srgbClr val="5E5E5E"/>
-                </a:solidFill>
-                <a:latin typeface="Courier"/>
-              </a:rPr>
-              <a:t>##             Estimate Std. Error z value Pr(&gt;|z|)   </a:t>
-            </a:r>
-            <a:br/>
-            <a:r>
-              <a:rPr i="1">
-                <a:solidFill>
-                  <a:srgbClr val="5E5E5E"/>
-                </a:solidFill>
-                <a:latin typeface="Courier"/>
-              </a:rPr>
-              <a:t>## (Intercept)   5.9374     2.1297   2.788  0.00530 **</a:t>
-            </a:r>
-            <a:br/>
-            <a:r>
-              <a:rPr i="1">
-                <a:solidFill>
-                  <a:srgbClr val="5E5E5E"/>
-                </a:solidFill>
-                <a:latin typeface="Courier"/>
-              </a:rPr>
-              <a:t>## pa_ratio     -0.1493     0.0517  -2.887  0.00388 **</a:t>
-            </a:r>
-            <a:br/>
-            <a:r>
-              <a:rPr i="1">
-                <a:solidFill>
-                  <a:srgbClr val="5E5E5E"/>
-                </a:solidFill>
-                <a:latin typeface="Courier"/>
-              </a:rPr>
-              <a:t>## ---</a:t>
-            </a:r>
-            <a:br/>
-            <a:r>
-              <a:rPr i="1">
-                <a:solidFill>
-                  <a:srgbClr val="5E5E5E"/>
-                </a:solidFill>
-                <a:latin typeface="Courier"/>
-              </a:rPr>
-              <a:t>## Signif. codes:  0 '***' 0.001 '**' 0.01 '*' 0.05 '.' 0.1 ' ' 1</a:t>
-            </a:r>
-            <a:br/>
-            <a:r>
-              <a:rPr i="1">
-                <a:solidFill>
-                  <a:srgbClr val="5E5E5E"/>
-                </a:solidFill>
-                <a:latin typeface="Courier"/>
-              </a:rPr>
-              <a:t>## </a:t>
-            </a:r>
-            <a:br/>
-            <a:r>
-              <a:rPr i="1">
-                <a:solidFill>
-                  <a:srgbClr val="5E5E5E"/>
-                </a:solidFill>
-                <a:latin typeface="Courier"/>
-              </a:rPr>
-              <a:t>## (Dispersion parameter for binomial family taken to be 1)</a:t>
-            </a:r>
-            <a:br/>
-            <a:r>
-              <a:rPr i="1">
-                <a:solidFill>
-                  <a:srgbClr val="5E5E5E"/>
-                </a:solidFill>
-                <a:latin typeface="Courier"/>
-              </a:rPr>
-              <a:t>## </a:t>
-            </a:r>
-            <a:br/>
-            <a:r>
-              <a:rPr i="1">
-                <a:solidFill>
-                  <a:srgbClr val="5E5E5E"/>
-                </a:solidFill>
-                <a:latin typeface="Courier"/>
-              </a:rPr>
-              <a:t>##     Null deviance: 41.455  on 29  degrees of freedom</a:t>
-            </a:r>
-            <a:br/>
-            <a:r>
-              <a:rPr i="1">
-                <a:solidFill>
-                  <a:srgbClr val="5E5E5E"/>
-                </a:solidFill>
-                <a:latin typeface="Courier"/>
-              </a:rPr>
-              <a:t>## Residual deviance: 19.090  on 28  degrees of freedom</a:t>
-            </a:r>
-            <a:br/>
-            <a:r>
-              <a:rPr i="1">
-                <a:solidFill>
-                  <a:srgbClr val="5E5E5E"/>
-                </a:solidFill>
-                <a:latin typeface="Courier"/>
-              </a:rPr>
-              <a:t>## AIC: 23.09</a:t>
-            </a:r>
-            <a:br/>
-            <a:r>
-              <a:rPr i="1">
-                <a:solidFill>
-                  <a:srgbClr val="5E5E5E"/>
-                </a:solidFill>
-                <a:latin typeface="Courier"/>
-              </a:rPr>
-              <a:t>## </a:t>
-            </a:r>
-            <a:br/>
-            <a:r>
-              <a:rPr i="1">
-                <a:solidFill>
-                  <a:srgbClr val="5E5E5E"/>
-                </a:solidFill>
-                <a:latin typeface="Courier"/>
-              </a:rPr>
-              <a:t>## Number of Fisher Scoring iterations: 6</a:t>
-            </a:r>
+            <a:pPr lvl="0" indent="0" marL="0">
+              <a:buNone/>
+            </a:pPr>
           </a:p>
         </p:txBody>
       </p:sp>
@@ -8057,6 +7817,481 @@
 </file>
 
 <file path=ppt/slides/slide23.xml><?xml version="1.0" encoding="utf-8"?>
+<p:sld xmlns:a="http://schemas.openxmlformats.org/drawingml/2006/main" xmlns:r="http://schemas.openxmlformats.org/officeDocument/2006/relationships" xmlns:p="http://schemas.openxmlformats.org/presentationml/2006/main">
+  <p:cSld>
+    <p:spTree>
+      <p:nvGrpSpPr>
+        <p:cNvPr id="1" name=""/>
+        <p:cNvGrpSpPr/>
+        <p:nvPr/>
+      </p:nvGrpSpPr>
+      <p:grpSpPr>
+        <a:xfrm>
+          <a:off x="0" y="0"/>
+          <a:ext cx="0" cy="0"/>
+          <a:chOff x="0" y="0"/>
+          <a:chExt cx="0" cy="0"/>
+        </a:xfrm>
+      </p:grpSpPr>
+      <p:sp>
+        <p:nvSpPr>
+          <p:cNvPr id="2" name="Title 1"/>
+          <p:cNvSpPr>
+            <a:spLocks noGrp="1"/>
+          </p:cNvSpPr>
+          <p:nvPr>
+            <p:ph type="title"/>
+          </p:nvPr>
+        </p:nvSpPr>
+        <p:spPr>
+          <a:xfrm>
+            <a:off x="0" y="0"/>
+            <a:ext cx="9144000" cy="582780"/>
+          </a:xfrm>
+        </p:spPr>
+        <p:txBody>
+          <a:bodyPr/>
+          <a:lstStyle/>
+          <a:p>
+            <a:pPr lvl="0" indent="0" marL="0">
+              <a:buNone/>
+            </a:pPr>
+            <a:r>
+              <a:rPr/>
+              <a:t>Example: Lizard Presence on Islands</a:t>
+            </a:r>
+          </a:p>
+        </p:txBody>
+      </p:sp>
+      <p:sp>
+        <p:nvSpPr>
+          <p:cNvPr id="3" name="Content Placeholder 2"/>
+          <p:cNvSpPr>
+            <a:spLocks noGrp="1"/>
+          </p:cNvSpPr>
+          <p:nvPr>
+            <p:ph idx="1"/>
+          </p:nvPr>
+        </p:nvSpPr>
+        <p:spPr/>
+        <p:txBody>
+          <a:bodyPr/>
+          <a:lstStyle/>
+          <a:p>
+            <a:pPr lvl="0" indent="0" marL="0">
+              <a:buNone/>
+            </a:pPr>
+            <a:r>
+              <a:rPr/>
+              <a:t>Based on the example from Polis et al. (1998), we’ll model the presence/absence of lizards (</a:t>
+            </a:r>
+            <a:r>
+              <a:rPr i="1"/>
+              <a:t>Uta</a:t>
+            </a:r>
+            <a:r>
+              <a:rPr/>
+              <a:t>) on islands in the Gulf of California based on perimeter/area ratio.</a:t>
+            </a:r>
+          </a:p>
+          <a:p>
+            <a:pPr lvl="0" indent="0">
+              <a:buNone/>
+            </a:pPr>
+            <a:r>
+              <a:rPr>
+                <a:solidFill>
+                  <a:srgbClr val="5E5E5E"/>
+                </a:solidFill>
+                <a:latin typeface="Courier"/>
+              </a:rPr>
+              <a:t># Fit the logistic regression model</a:t>
+            </a:r>
+            <a:br/>
+            <a:r>
+              <a:rPr>
+                <a:solidFill>
+                  <a:srgbClr val="003B4F"/>
+                </a:solidFill>
+                <a:latin typeface="Courier"/>
+              </a:rPr>
+              <a:t>lizard_model &lt;- </a:t>
+            </a:r>
+            <a:r>
+              <a:rPr>
+                <a:solidFill>
+                  <a:srgbClr val="4758AB"/>
+                </a:solidFill>
+                <a:latin typeface="Courier"/>
+              </a:rPr>
+              <a:t>glm</a:t>
+            </a:r>
+            <a:r>
+              <a:rPr>
+                <a:solidFill>
+                  <a:srgbClr val="003B4F"/>
+                </a:solidFill>
+                <a:latin typeface="Courier"/>
+              </a:rPr>
+              <a:t>(uta_present </a:t>
+            </a:r>
+            <a:r>
+              <a:rPr>
+                <a:solidFill>
+                  <a:srgbClr val="5E5E5E"/>
+                </a:solidFill>
+                <a:latin typeface="Courier"/>
+              </a:rPr>
+              <a:t>~</a:t>
+            </a:r>
+            <a:r>
+              <a:rPr>
+                <a:solidFill>
+                  <a:srgbClr val="003B4F"/>
+                </a:solidFill>
+                <a:latin typeface="Courier"/>
+              </a:rPr>
+              <a:t> pa_ratio, </a:t>
+            </a:r>
+            <a:br/>
+            <a:r>
+              <a:rPr>
+                <a:solidFill>
+                  <a:srgbClr val="003B4F"/>
+                </a:solidFill>
+                <a:latin typeface="Courier"/>
+              </a:rPr>
+              <a:t>                    </a:t>
+            </a:r>
+            <a:r>
+              <a:rPr>
+                <a:solidFill>
+                  <a:srgbClr val="657422"/>
+                </a:solidFill>
+                <a:latin typeface="Courier"/>
+              </a:rPr>
+              <a:t>data =</a:t>
+            </a:r>
+            <a:r>
+              <a:rPr>
+                <a:solidFill>
+                  <a:srgbClr val="003B4F"/>
+                </a:solidFill>
+                <a:latin typeface="Courier"/>
+              </a:rPr>
+              <a:t> island_data, </a:t>
+            </a:r>
+            <a:br/>
+            <a:r>
+              <a:rPr>
+                <a:solidFill>
+                  <a:srgbClr val="003B4F"/>
+                </a:solidFill>
+                <a:latin typeface="Courier"/>
+              </a:rPr>
+              <a:t>                    </a:t>
+            </a:r>
+            <a:r>
+              <a:rPr>
+                <a:solidFill>
+                  <a:srgbClr val="657422"/>
+                </a:solidFill>
+                <a:latin typeface="Courier"/>
+              </a:rPr>
+              <a:t>family =</a:t>
+            </a:r>
+            <a:r>
+              <a:rPr>
+                <a:solidFill>
+                  <a:srgbClr val="003B4F"/>
+                </a:solidFill>
+                <a:latin typeface="Courier"/>
+              </a:rPr>
+              <a:t> </a:t>
+            </a:r>
+            <a:r>
+              <a:rPr>
+                <a:solidFill>
+                  <a:srgbClr val="4758AB"/>
+                </a:solidFill>
+                <a:latin typeface="Courier"/>
+              </a:rPr>
+              <a:t>binomial</a:t>
+            </a:r>
+            <a:r>
+              <a:rPr>
+                <a:solidFill>
+                  <a:srgbClr val="003B4F"/>
+                </a:solidFill>
+                <a:latin typeface="Courier"/>
+              </a:rPr>
+              <a:t>(</a:t>
+            </a:r>
+            <a:r>
+              <a:rPr>
+                <a:solidFill>
+                  <a:srgbClr val="657422"/>
+                </a:solidFill>
+                <a:latin typeface="Courier"/>
+              </a:rPr>
+              <a:t>link =</a:t>
+            </a:r>
+            <a:r>
+              <a:rPr>
+                <a:solidFill>
+                  <a:srgbClr val="003B4F"/>
+                </a:solidFill>
+                <a:latin typeface="Courier"/>
+              </a:rPr>
+              <a:t> </a:t>
+            </a:r>
+            <a:r>
+              <a:rPr>
+                <a:solidFill>
+                  <a:srgbClr val="20794D"/>
+                </a:solidFill>
+                <a:latin typeface="Courier"/>
+              </a:rPr>
+              <a:t>"logit"</a:t>
+            </a:r>
+            <a:r>
+              <a:rPr>
+                <a:solidFill>
+                  <a:srgbClr val="003B4F"/>
+                </a:solidFill>
+                <a:latin typeface="Courier"/>
+              </a:rPr>
+              <a:t>))</a:t>
+            </a:r>
+            <a:br/>
+            <a:br/>
+            <a:r>
+              <a:rPr>
+                <a:solidFill>
+                  <a:srgbClr val="5E5E5E"/>
+                </a:solidFill>
+                <a:latin typeface="Courier"/>
+              </a:rPr>
+              <a:t># Model summary</a:t>
+            </a:r>
+            <a:br/>
+            <a:r>
+              <a:rPr>
+                <a:solidFill>
+                  <a:srgbClr val="4758AB"/>
+                </a:solidFill>
+                <a:latin typeface="Courier"/>
+              </a:rPr>
+              <a:t>summary</a:t>
+            </a:r>
+            <a:r>
+              <a:rPr>
+                <a:solidFill>
+                  <a:srgbClr val="003B4F"/>
+                </a:solidFill>
+                <a:latin typeface="Courier"/>
+              </a:rPr>
+              <a:t>(lizard_model)</a:t>
+            </a:r>
+            <a:br/>
+            <a:r>
+              <a:rPr i="1">
+                <a:solidFill>
+                  <a:srgbClr val="5E5E5E"/>
+                </a:solidFill>
+                <a:latin typeface="Courier"/>
+              </a:rPr>
+              <a:t>## </a:t>
+            </a:r>
+            <a:br/>
+            <a:r>
+              <a:rPr i="1">
+                <a:solidFill>
+                  <a:srgbClr val="5E5E5E"/>
+                </a:solidFill>
+                <a:latin typeface="Courier"/>
+              </a:rPr>
+              <a:t>## Call:</a:t>
+            </a:r>
+            <a:br/>
+            <a:r>
+              <a:rPr i="1">
+                <a:solidFill>
+                  <a:srgbClr val="5E5E5E"/>
+                </a:solidFill>
+                <a:latin typeface="Courier"/>
+              </a:rPr>
+              <a:t>## glm(formula = uta_present ~ pa_ratio, family = binomial(link = "logit"), </a:t>
+            </a:r>
+            <a:br/>
+            <a:r>
+              <a:rPr i="1">
+                <a:solidFill>
+                  <a:srgbClr val="5E5E5E"/>
+                </a:solidFill>
+                <a:latin typeface="Courier"/>
+              </a:rPr>
+              <a:t>##     data = island_data)</a:t>
+            </a:r>
+            <a:br/>
+            <a:r>
+              <a:rPr i="1">
+                <a:solidFill>
+                  <a:srgbClr val="5E5E5E"/>
+                </a:solidFill>
+                <a:latin typeface="Courier"/>
+              </a:rPr>
+              <a:t>## </a:t>
+            </a:r>
+            <a:br/>
+            <a:r>
+              <a:rPr i="1">
+                <a:solidFill>
+                  <a:srgbClr val="5E5E5E"/>
+                </a:solidFill>
+                <a:latin typeface="Courier"/>
+              </a:rPr>
+              <a:t>## Coefficients:</a:t>
+            </a:r>
+            <a:br/>
+            <a:r>
+              <a:rPr i="1">
+                <a:solidFill>
+                  <a:srgbClr val="5E5E5E"/>
+                </a:solidFill>
+                <a:latin typeface="Courier"/>
+              </a:rPr>
+              <a:t>##             Estimate Std. Error z value Pr(&gt;|z|)   </a:t>
+            </a:r>
+            <a:br/>
+            <a:r>
+              <a:rPr i="1">
+                <a:solidFill>
+                  <a:srgbClr val="5E5E5E"/>
+                </a:solidFill>
+                <a:latin typeface="Courier"/>
+              </a:rPr>
+              <a:t>## (Intercept)   5.9374     2.1297   2.788  0.00530 **</a:t>
+            </a:r>
+            <a:br/>
+            <a:r>
+              <a:rPr i="1">
+                <a:solidFill>
+                  <a:srgbClr val="5E5E5E"/>
+                </a:solidFill>
+                <a:latin typeface="Courier"/>
+              </a:rPr>
+              <a:t>## pa_ratio     -0.1493     0.0517  -2.887  0.00388 **</a:t>
+            </a:r>
+            <a:br/>
+            <a:r>
+              <a:rPr i="1">
+                <a:solidFill>
+                  <a:srgbClr val="5E5E5E"/>
+                </a:solidFill>
+                <a:latin typeface="Courier"/>
+              </a:rPr>
+              <a:t>## ---</a:t>
+            </a:r>
+            <a:br/>
+            <a:r>
+              <a:rPr i="1">
+                <a:solidFill>
+                  <a:srgbClr val="5E5E5E"/>
+                </a:solidFill>
+                <a:latin typeface="Courier"/>
+              </a:rPr>
+              <a:t>## Signif. codes:  0 '***' 0.001 '**' 0.01 '*' 0.05 '.' 0.1 ' ' 1</a:t>
+            </a:r>
+            <a:br/>
+            <a:r>
+              <a:rPr i="1">
+                <a:solidFill>
+                  <a:srgbClr val="5E5E5E"/>
+                </a:solidFill>
+                <a:latin typeface="Courier"/>
+              </a:rPr>
+              <a:t>## </a:t>
+            </a:r>
+            <a:br/>
+            <a:r>
+              <a:rPr i="1">
+                <a:solidFill>
+                  <a:srgbClr val="5E5E5E"/>
+                </a:solidFill>
+                <a:latin typeface="Courier"/>
+              </a:rPr>
+              <a:t>## (Dispersion parameter for binomial family taken to be 1)</a:t>
+            </a:r>
+            <a:br/>
+            <a:r>
+              <a:rPr i="1">
+                <a:solidFill>
+                  <a:srgbClr val="5E5E5E"/>
+                </a:solidFill>
+                <a:latin typeface="Courier"/>
+              </a:rPr>
+              <a:t>## </a:t>
+            </a:r>
+            <a:br/>
+            <a:r>
+              <a:rPr i="1">
+                <a:solidFill>
+                  <a:srgbClr val="5E5E5E"/>
+                </a:solidFill>
+                <a:latin typeface="Courier"/>
+              </a:rPr>
+              <a:t>##     Null deviance: 41.455  on 29  degrees of freedom</a:t>
+            </a:r>
+            <a:br/>
+            <a:r>
+              <a:rPr i="1">
+                <a:solidFill>
+                  <a:srgbClr val="5E5E5E"/>
+                </a:solidFill>
+                <a:latin typeface="Courier"/>
+              </a:rPr>
+              <a:t>## Residual deviance: 19.090  on 28  degrees of freedom</a:t>
+            </a:r>
+            <a:br/>
+            <a:r>
+              <a:rPr i="1">
+                <a:solidFill>
+                  <a:srgbClr val="5E5E5E"/>
+                </a:solidFill>
+                <a:latin typeface="Courier"/>
+              </a:rPr>
+              <a:t>## AIC: 23.09</a:t>
+            </a:r>
+            <a:br/>
+            <a:r>
+              <a:rPr i="1">
+                <a:solidFill>
+                  <a:srgbClr val="5E5E5E"/>
+                </a:solidFill>
+                <a:latin typeface="Courier"/>
+              </a:rPr>
+              <a:t>## </a:t>
+            </a:r>
+            <a:br/>
+            <a:r>
+              <a:rPr i="1">
+                <a:solidFill>
+                  <a:srgbClr val="5E5E5E"/>
+                </a:solidFill>
+                <a:latin typeface="Courier"/>
+              </a:rPr>
+              <a:t>## Number of Fisher Scoring iterations: 6</a:t>
+            </a:r>
+          </a:p>
+        </p:txBody>
+      </p:sp>
+    </p:spTree>
+  </p:cSld>
+</p:sld>
+</file>
+
+<file path=ppt/slides/slide24.xml><?xml version="1.0" encoding="utf-8"?>
 <p:sld xmlns:a="http://schemas.openxmlformats.org/drawingml/2006/main" xmlns:r="http://schemas.openxmlformats.org/officeDocument/2006/relationships" xmlns:p="http://schemas.openxmlformats.org/presentationml/2006/main">
   <p:cSld>
     <p:spTree>
@@ -8546,615 +8781,6 @@
 </p:sld>
 </file>
 
-<file path=ppt/slides/slide24.xml><?xml version="1.0" encoding="utf-8"?>
-<p:sld xmlns:a="http://schemas.openxmlformats.org/drawingml/2006/main" xmlns:r="http://schemas.openxmlformats.org/officeDocument/2006/relationships" xmlns:p="http://schemas.openxmlformats.org/presentationml/2006/main">
-  <p:cSld>
-    <p:spTree>
-      <p:nvGrpSpPr>
-        <p:cNvPr id="1" name=""/>
-        <p:cNvGrpSpPr/>
-        <p:nvPr/>
-      </p:nvGrpSpPr>
-      <p:grpSpPr>
-        <a:xfrm>
-          <a:off x="0" y="0"/>
-          <a:ext cx="0" cy="0"/>
-          <a:chOff x="0" y="0"/>
-          <a:chExt cx="0" cy="0"/>
-        </a:xfrm>
-      </p:grpSpPr>
-      <p:sp>
-        <p:nvSpPr>
-          <p:cNvPr id="2" name="Title 1"/>
-          <p:cNvSpPr>
-            <a:spLocks noGrp="1"/>
-          </p:cNvSpPr>
-          <p:nvPr>
-            <p:ph type="title"/>
-          </p:nvPr>
-        </p:nvSpPr>
-        <p:spPr>
-          <a:xfrm>
-            <a:off x="0" y="0"/>
-            <a:ext cx="9144000" cy="582780"/>
-          </a:xfrm>
-        </p:spPr>
-        <p:txBody>
-          <a:bodyPr/>
-          <a:lstStyle/>
-          <a:p>
-            <a:pPr lvl="0" indent="0" marL="0">
-              <a:buNone/>
-            </a:pPr>
-            <a:r>
-              <a:rPr/>
-              <a:t>Interpreting the Odds Ratio</a:t>
-            </a:r>
-          </a:p>
-        </p:txBody>
-      </p:sp>
-      <p:sp>
-        <p:nvSpPr>
-          <p:cNvPr id="3" name="Content Placeholder 2"/>
-          <p:cNvSpPr>
-            <a:spLocks noGrp="1"/>
-          </p:cNvSpPr>
-          <p:nvPr>
-            <p:ph idx="1"/>
-          </p:nvPr>
-        </p:nvSpPr>
-        <p:spPr/>
-        <p:txBody>
-          <a:bodyPr/>
-          <a:lstStyle/>
-          <a:p>
-            <a:pPr lvl="0" indent="0" marL="0">
-              <a:spcBef>
-                <a:spcPts val="3000"/>
-              </a:spcBef>
-              <a:buNone/>
-            </a:pPr>
-            <a:r>
-              <a:rPr b="1"/>
-              <a:t>Working with Odds Ratios</a:t>
-            </a:r>
-          </a:p>
-          <a:p>
-            <a:pPr lvl="0" indent="0" marL="0">
-              <a:buNone/>
-            </a:pPr>
-            <a:r>
-              <a:rPr/>
-              <a:t>The odds ratio represents how the odds of the event (e.g., lizard presence) change with a unit increase in the predictor.</a:t>
-            </a:r>
-          </a:p>
-          <a:p>
-            <a:pPr lvl="0"/>
-            <a:r>
-              <a:rPr b="1"/>
-              <a:t>Odds ratio = exp(β₁)</a:t>
-            </a:r>
-          </a:p>
-          <a:p>
-            <a:pPr lvl="0"/>
-            <a:r>
-              <a:rPr/>
-              <a:t>If odds ratio &gt; 1: Increasing the predictor increases the odds of event</a:t>
-            </a:r>
-          </a:p>
-          <a:p>
-            <a:pPr lvl="0"/>
-            <a:r>
-              <a:rPr/>
-              <a:t>If odds ratio &lt; 1: Increasing the predictor decreases the odds of event</a:t>
-            </a:r>
-          </a:p>
-          <a:p>
-            <a:pPr lvl="0"/>
-            <a:r>
-              <a:rPr/>
-              <a:t>If odds ratio = 1: No effect of predictor on odds of event</a:t>
-            </a:r>
-          </a:p>
-          <a:p>
-            <a:pPr lvl="0"/>
-            <a:r>
-              <a:rPr/>
-              <a:t>For every one-unit increase in island’s Perimeter/Area Ratio - odds of finding a lizard present multiplied by 0.898</a:t>
-            </a:r>
-          </a:p>
-          <a:p>
-            <a:pPr lvl="0"/>
-            <a:r>
-              <a:rPr/>
-              <a:t>the odds decrease by 10.2% (which is 1 - 0.898) for every one-unit increase in the P/A ratio</a:t>
-            </a:r>
-          </a:p>
-          <a:p>
-            <a:pPr lvl="0"/>
-            <a:r>
-              <a:rPr/>
-              <a:t>entire interval is below 1.0, you can be confident the relationship is negative: more P/A ratio means lower odds of lizards</a:t>
-            </a:r>
-          </a:p>
-          <a:p>
-            <a:pPr lvl="0" indent="0">
-              <a:buNone/>
-            </a:pPr>
-            <a:r>
-              <a:rPr>
-                <a:solidFill>
-                  <a:srgbClr val="003B4F"/>
-                </a:solidFill>
-                <a:latin typeface="Courier"/>
-              </a:rPr>
-              <a:t>coef_lizard &lt;- </a:t>
-            </a:r>
-            <a:r>
-              <a:rPr>
-                <a:solidFill>
-                  <a:srgbClr val="4758AB"/>
-                </a:solidFill>
-                <a:latin typeface="Courier"/>
-              </a:rPr>
-              <a:t>coef</a:t>
-            </a:r>
-            <a:r>
-              <a:rPr>
-                <a:solidFill>
-                  <a:srgbClr val="003B4F"/>
-                </a:solidFill>
-                <a:latin typeface="Courier"/>
-              </a:rPr>
-              <a:t>(lizard_model)[</a:t>
-            </a:r>
-            <a:r>
-              <a:rPr>
-                <a:solidFill>
-                  <a:srgbClr val="AD0000"/>
-                </a:solidFill>
-                <a:latin typeface="Courier"/>
-              </a:rPr>
-              <a:t>2</a:t>
-            </a:r>
-            <a:r>
-              <a:rPr>
-                <a:solidFill>
-                  <a:srgbClr val="003B4F"/>
-                </a:solidFill>
-                <a:latin typeface="Courier"/>
-              </a:rPr>
-              <a:t>]  </a:t>
-            </a:r>
-            <a:r>
-              <a:rPr>
-                <a:solidFill>
-                  <a:srgbClr val="5E5E5E"/>
-                </a:solidFill>
-                <a:latin typeface="Courier"/>
-              </a:rPr>
-              <a:t># Extract slope coefficient</a:t>
-            </a:r>
-            <a:br/>
-            <a:r>
-              <a:rPr>
-                <a:solidFill>
-                  <a:srgbClr val="003B4F"/>
-                </a:solidFill>
-                <a:latin typeface="Courier"/>
-              </a:rPr>
-              <a:t>odds_ratio &lt;- </a:t>
-            </a:r>
-            <a:r>
-              <a:rPr>
-                <a:solidFill>
-                  <a:srgbClr val="4758AB"/>
-                </a:solidFill>
-                <a:latin typeface="Courier"/>
-              </a:rPr>
-              <a:t>exp</a:t>
-            </a:r>
-            <a:r>
-              <a:rPr>
-                <a:solidFill>
-                  <a:srgbClr val="003B4F"/>
-                </a:solidFill>
-                <a:latin typeface="Courier"/>
-              </a:rPr>
-              <a:t>(coef_lizard)</a:t>
-            </a:r>
-            <a:br/>
-            <a:r>
-              <a:rPr>
-                <a:solidFill>
-                  <a:srgbClr val="003B4F"/>
-                </a:solidFill>
-                <a:latin typeface="Courier"/>
-              </a:rPr>
-              <a:t>ci &lt;- </a:t>
-            </a:r>
-            <a:r>
-              <a:rPr>
-                <a:solidFill>
-                  <a:srgbClr val="4758AB"/>
-                </a:solidFill>
-                <a:latin typeface="Courier"/>
-              </a:rPr>
-              <a:t>exp</a:t>
-            </a:r>
-            <a:r>
-              <a:rPr>
-                <a:solidFill>
-                  <a:srgbClr val="003B4F"/>
-                </a:solidFill>
-                <a:latin typeface="Courier"/>
-              </a:rPr>
-              <a:t>(</a:t>
-            </a:r>
-            <a:r>
-              <a:rPr>
-                <a:solidFill>
-                  <a:srgbClr val="4758AB"/>
-                </a:solidFill>
-                <a:latin typeface="Courier"/>
-              </a:rPr>
-              <a:t>confint</a:t>
-            </a:r>
-            <a:r>
-              <a:rPr>
-                <a:solidFill>
-                  <a:srgbClr val="003B4F"/>
-                </a:solidFill>
-                <a:latin typeface="Courier"/>
-              </a:rPr>
-              <a:t>(lizard_model, </a:t>
-            </a:r>
-            <a:r>
-              <a:rPr>
-                <a:solidFill>
-                  <a:srgbClr val="20794D"/>
-                </a:solidFill>
-                <a:latin typeface="Courier"/>
-              </a:rPr>
-              <a:t>"pa_ratio"</a:t>
-            </a:r>
-            <a:r>
-              <a:rPr>
-                <a:solidFill>
-                  <a:srgbClr val="003B4F"/>
-                </a:solidFill>
-                <a:latin typeface="Courier"/>
-              </a:rPr>
-              <a:t>))</a:t>
-            </a:r>
-            <a:br/>
-            <a:r>
-              <a:rPr>
-                <a:solidFill>
-                  <a:srgbClr val="4758AB"/>
-                </a:solidFill>
-                <a:latin typeface="Courier"/>
-              </a:rPr>
-              <a:t>cat</a:t>
-            </a:r>
-            <a:r>
-              <a:rPr>
-                <a:solidFill>
-                  <a:srgbClr val="003B4F"/>
-                </a:solidFill>
-                <a:latin typeface="Courier"/>
-              </a:rPr>
-              <a:t>(</a:t>
-            </a:r>
-            <a:r>
-              <a:rPr>
-                <a:solidFill>
-                  <a:srgbClr val="20794D"/>
-                </a:solidFill>
-                <a:latin typeface="Courier"/>
-              </a:rPr>
-              <a:t>"Odds Ratio:"</a:t>
-            </a:r>
-            <a:r>
-              <a:rPr>
-                <a:solidFill>
-                  <a:srgbClr val="003B4F"/>
-                </a:solidFill>
-                <a:latin typeface="Courier"/>
-              </a:rPr>
-              <a:t>, </a:t>
-            </a:r>
-            <a:r>
-              <a:rPr>
-                <a:solidFill>
-                  <a:srgbClr val="4758AB"/>
-                </a:solidFill>
-                <a:latin typeface="Courier"/>
-              </a:rPr>
-              <a:t>round</a:t>
-            </a:r>
-            <a:r>
-              <a:rPr>
-                <a:solidFill>
-                  <a:srgbClr val="003B4F"/>
-                </a:solidFill>
-                <a:latin typeface="Courier"/>
-              </a:rPr>
-              <a:t>(odds_ratio, </a:t>
-            </a:r>
-            <a:r>
-              <a:rPr>
-                <a:solidFill>
-                  <a:srgbClr val="AD0000"/>
-                </a:solidFill>
-                <a:latin typeface="Courier"/>
-              </a:rPr>
-              <a:t>3</a:t>
-            </a:r>
-            <a:r>
-              <a:rPr>
-                <a:solidFill>
-                  <a:srgbClr val="003B4F"/>
-                </a:solidFill>
-                <a:latin typeface="Courier"/>
-              </a:rPr>
-              <a:t>), </a:t>
-            </a:r>
-            <a:r>
-              <a:rPr>
-                <a:solidFill>
-                  <a:srgbClr val="20794D"/>
-                </a:solidFill>
-                <a:latin typeface="Courier"/>
-              </a:rPr>
-              <a:t>"</a:t>
-            </a:r>
-            <a:r>
-              <a:rPr>
-                <a:solidFill>
-                  <a:srgbClr val="5E5E5E"/>
-                </a:solidFill>
-                <a:latin typeface="Courier"/>
-              </a:rPr>
-              <a:t>\n\n</a:t>
-            </a:r>
-            <a:r>
-              <a:rPr>
-                <a:solidFill>
-                  <a:srgbClr val="20794D"/>
-                </a:solidFill>
-                <a:latin typeface="Courier"/>
-              </a:rPr>
-              <a:t>"</a:t>
-            </a:r>
-            <a:r>
-              <a:rPr>
-                <a:solidFill>
-                  <a:srgbClr val="003B4F"/>
-                </a:solidFill>
-                <a:latin typeface="Courier"/>
-              </a:rPr>
-              <a:t>,</a:t>
-            </a:r>
-            <a:br/>
-            <a:r>
-              <a:rPr>
-                <a:solidFill>
-                  <a:srgbClr val="20794D"/>
-                </a:solidFill>
-                <a:latin typeface="Courier"/>
-              </a:rPr>
-              <a:t>"95% CI:"</a:t>
-            </a:r>
-            <a:r>
-              <a:rPr>
-                <a:solidFill>
-                  <a:srgbClr val="003B4F"/>
-                </a:solidFill>
-                <a:latin typeface="Courier"/>
-              </a:rPr>
-              <a:t>, </a:t>
-            </a:r>
-            <a:r>
-              <a:rPr>
-                <a:solidFill>
-                  <a:srgbClr val="4758AB"/>
-                </a:solidFill>
-                <a:latin typeface="Courier"/>
-              </a:rPr>
-              <a:t>round</a:t>
-            </a:r>
-            <a:r>
-              <a:rPr>
-                <a:solidFill>
-                  <a:srgbClr val="003B4F"/>
-                </a:solidFill>
-                <a:latin typeface="Courier"/>
-              </a:rPr>
-              <a:t>(ci[</a:t>
-            </a:r>
-            <a:r>
-              <a:rPr>
-                <a:solidFill>
-                  <a:srgbClr val="AD0000"/>
-                </a:solidFill>
-                <a:latin typeface="Courier"/>
-              </a:rPr>
-              <a:t>1</a:t>
-            </a:r>
-            <a:r>
-              <a:rPr>
-                <a:solidFill>
-                  <a:srgbClr val="003B4F"/>
-                </a:solidFill>
-                <a:latin typeface="Courier"/>
-              </a:rPr>
-              <a:t>], </a:t>
-            </a:r>
-            <a:r>
-              <a:rPr>
-                <a:solidFill>
-                  <a:srgbClr val="AD0000"/>
-                </a:solidFill>
-                <a:latin typeface="Courier"/>
-              </a:rPr>
-              <a:t>3</a:t>
-            </a:r>
-            <a:r>
-              <a:rPr>
-                <a:solidFill>
-                  <a:srgbClr val="003B4F"/>
-                </a:solidFill>
-                <a:latin typeface="Courier"/>
-              </a:rPr>
-              <a:t>), </a:t>
-            </a:r>
-            <a:r>
-              <a:rPr>
-                <a:solidFill>
-                  <a:srgbClr val="20794D"/>
-                </a:solidFill>
-                <a:latin typeface="Courier"/>
-              </a:rPr>
-              <a:t>"to"</a:t>
-            </a:r>
-            <a:r>
-              <a:rPr>
-                <a:solidFill>
-                  <a:srgbClr val="003B4F"/>
-                </a:solidFill>
-                <a:latin typeface="Courier"/>
-              </a:rPr>
-              <a:t>, </a:t>
-            </a:r>
-            <a:r>
-              <a:rPr>
-                <a:solidFill>
-                  <a:srgbClr val="4758AB"/>
-                </a:solidFill>
-                <a:latin typeface="Courier"/>
-              </a:rPr>
-              <a:t>round</a:t>
-            </a:r>
-            <a:r>
-              <a:rPr>
-                <a:solidFill>
-                  <a:srgbClr val="003B4F"/>
-                </a:solidFill>
-                <a:latin typeface="Courier"/>
-              </a:rPr>
-              <a:t>(ci[</a:t>
-            </a:r>
-            <a:r>
-              <a:rPr>
-                <a:solidFill>
-                  <a:srgbClr val="AD0000"/>
-                </a:solidFill>
-                <a:latin typeface="Courier"/>
-              </a:rPr>
-              <a:t>2</a:t>
-            </a:r>
-            <a:r>
-              <a:rPr>
-                <a:solidFill>
-                  <a:srgbClr val="003B4F"/>
-                </a:solidFill>
-                <a:latin typeface="Courier"/>
-              </a:rPr>
-              <a:t>], </a:t>
-            </a:r>
-            <a:r>
-              <a:rPr>
-                <a:solidFill>
-                  <a:srgbClr val="AD0000"/>
-                </a:solidFill>
-                <a:latin typeface="Courier"/>
-              </a:rPr>
-              <a:t>3</a:t>
-            </a:r>
-            <a:r>
-              <a:rPr>
-                <a:solidFill>
-                  <a:srgbClr val="003B4F"/>
-                </a:solidFill>
-                <a:latin typeface="Courier"/>
-              </a:rPr>
-              <a:t>), </a:t>
-            </a:r>
-            <a:r>
-              <a:rPr>
-                <a:solidFill>
-                  <a:srgbClr val="20794D"/>
-                </a:solidFill>
-                <a:latin typeface="Courier"/>
-              </a:rPr>
-              <a:t>"</a:t>
-            </a:r>
-            <a:r>
-              <a:rPr>
-                <a:solidFill>
-                  <a:srgbClr val="5E5E5E"/>
-                </a:solidFill>
-                <a:latin typeface="Courier"/>
-              </a:rPr>
-              <a:t>\n</a:t>
-            </a:r>
-            <a:r>
-              <a:rPr>
-                <a:solidFill>
-                  <a:srgbClr val="20794D"/>
-                </a:solidFill>
-                <a:latin typeface="Courier"/>
-              </a:rPr>
-              <a:t>"</a:t>
-            </a:r>
-            <a:r>
-              <a:rPr>
-                <a:solidFill>
-                  <a:srgbClr val="003B4F"/>
-                </a:solidFill>
-                <a:latin typeface="Courier"/>
-              </a:rPr>
-              <a:t>)</a:t>
-            </a:r>
-            <a:br/>
-            <a:r>
-              <a:rPr i="1">
-                <a:solidFill>
-                  <a:srgbClr val="5E5E5E"/>
-                </a:solidFill>
-                <a:latin typeface="Courier"/>
-              </a:rPr>
-              <a:t>## Odds Ratio: 0.861 </a:t>
-            </a:r>
-            <a:br/>
-            <a:r>
-              <a:rPr i="1">
-                <a:solidFill>
-                  <a:srgbClr val="5E5E5E"/>
-                </a:solidFill>
-                <a:latin typeface="Courier"/>
-              </a:rPr>
-              <a:t>## </a:t>
-            </a:r>
-            <a:br/>
-            <a:r>
-              <a:rPr i="1">
-                <a:solidFill>
-                  <a:srgbClr val="5E5E5E"/>
-                </a:solidFill>
-                <a:latin typeface="Courier"/>
-              </a:rPr>
-              <a:t>##  95% CI: 0.753 to 0.932</a:t>
-            </a:r>
-          </a:p>
-        </p:txBody>
-      </p:sp>
-    </p:spTree>
-  </p:cSld>
-</p:sld>
-</file>
-
 <file path=ppt/slides/slide25.xml><?xml version="1.0" encoding="utf-8"?>
 <p:sld xmlns:a="http://schemas.openxmlformats.org/drawingml/2006/main" xmlns:r="http://schemas.openxmlformats.org/officeDocument/2006/relationships" xmlns:p="http://schemas.openxmlformats.org/presentationml/2006/main">
   <p:cSld>
@@ -9197,6 +8823,615 @@
             </a:pPr>
             <a:r>
               <a:rPr/>
+              <a:t>Interpreting the Odds Ratio</a:t>
+            </a:r>
+          </a:p>
+        </p:txBody>
+      </p:sp>
+      <p:sp>
+        <p:nvSpPr>
+          <p:cNvPr id="3" name="Content Placeholder 2"/>
+          <p:cNvSpPr>
+            <a:spLocks noGrp="1"/>
+          </p:cNvSpPr>
+          <p:nvPr>
+            <p:ph idx="1"/>
+          </p:nvPr>
+        </p:nvSpPr>
+        <p:spPr/>
+        <p:txBody>
+          <a:bodyPr/>
+          <a:lstStyle/>
+          <a:p>
+            <a:pPr lvl="0" indent="0" marL="0">
+              <a:spcBef>
+                <a:spcPts val="3000"/>
+              </a:spcBef>
+              <a:buNone/>
+            </a:pPr>
+            <a:r>
+              <a:rPr b="1"/>
+              <a:t>Working with Odds Ratios</a:t>
+            </a:r>
+          </a:p>
+          <a:p>
+            <a:pPr lvl="0" indent="0" marL="0">
+              <a:buNone/>
+            </a:pPr>
+            <a:r>
+              <a:rPr/>
+              <a:t>The odds ratio represents how the odds of the event (e.g., lizard presence) change with a unit increase in the predictor.</a:t>
+            </a:r>
+          </a:p>
+          <a:p>
+            <a:pPr lvl="0"/>
+            <a:r>
+              <a:rPr b="1"/>
+              <a:t>Odds ratio = exp(β₁)</a:t>
+            </a:r>
+          </a:p>
+          <a:p>
+            <a:pPr lvl="0"/>
+            <a:r>
+              <a:rPr/>
+              <a:t>If odds ratio &gt; 1: Increasing the predictor increases the odds of event</a:t>
+            </a:r>
+          </a:p>
+          <a:p>
+            <a:pPr lvl="0"/>
+            <a:r>
+              <a:rPr/>
+              <a:t>If odds ratio &lt; 1: Increasing the predictor decreases the odds of event</a:t>
+            </a:r>
+          </a:p>
+          <a:p>
+            <a:pPr lvl="0"/>
+            <a:r>
+              <a:rPr/>
+              <a:t>If odds ratio = 1: No effect of predictor on odds of event</a:t>
+            </a:r>
+          </a:p>
+          <a:p>
+            <a:pPr lvl="0"/>
+            <a:r>
+              <a:rPr/>
+              <a:t>For every one-unit increase in island’s Perimeter/Area Ratio - odds of finding a lizard present multiplied by 0.898</a:t>
+            </a:r>
+          </a:p>
+          <a:p>
+            <a:pPr lvl="0"/>
+            <a:r>
+              <a:rPr/>
+              <a:t>the odds decrease by 10.2% (which is 1 - 0.898) for every one-unit increase in the P/A ratio</a:t>
+            </a:r>
+          </a:p>
+          <a:p>
+            <a:pPr lvl="0"/>
+            <a:r>
+              <a:rPr/>
+              <a:t>entire interval is below 1.0, you can be confident the relationship is negative: more P/A ratio means lower odds of lizards</a:t>
+            </a:r>
+          </a:p>
+          <a:p>
+            <a:pPr lvl="0" indent="0">
+              <a:buNone/>
+            </a:pPr>
+            <a:r>
+              <a:rPr>
+                <a:solidFill>
+                  <a:srgbClr val="003B4F"/>
+                </a:solidFill>
+                <a:latin typeface="Courier"/>
+              </a:rPr>
+              <a:t>coef_lizard &lt;- </a:t>
+            </a:r>
+            <a:r>
+              <a:rPr>
+                <a:solidFill>
+                  <a:srgbClr val="4758AB"/>
+                </a:solidFill>
+                <a:latin typeface="Courier"/>
+              </a:rPr>
+              <a:t>coef</a:t>
+            </a:r>
+            <a:r>
+              <a:rPr>
+                <a:solidFill>
+                  <a:srgbClr val="003B4F"/>
+                </a:solidFill>
+                <a:latin typeface="Courier"/>
+              </a:rPr>
+              <a:t>(lizard_model)[</a:t>
+            </a:r>
+            <a:r>
+              <a:rPr>
+                <a:solidFill>
+                  <a:srgbClr val="AD0000"/>
+                </a:solidFill>
+                <a:latin typeface="Courier"/>
+              </a:rPr>
+              <a:t>2</a:t>
+            </a:r>
+            <a:r>
+              <a:rPr>
+                <a:solidFill>
+                  <a:srgbClr val="003B4F"/>
+                </a:solidFill>
+                <a:latin typeface="Courier"/>
+              </a:rPr>
+              <a:t>]  </a:t>
+            </a:r>
+            <a:r>
+              <a:rPr>
+                <a:solidFill>
+                  <a:srgbClr val="5E5E5E"/>
+                </a:solidFill>
+                <a:latin typeface="Courier"/>
+              </a:rPr>
+              <a:t># Extract slope coefficient</a:t>
+            </a:r>
+            <a:br/>
+            <a:r>
+              <a:rPr>
+                <a:solidFill>
+                  <a:srgbClr val="003B4F"/>
+                </a:solidFill>
+                <a:latin typeface="Courier"/>
+              </a:rPr>
+              <a:t>odds_ratio &lt;- </a:t>
+            </a:r>
+            <a:r>
+              <a:rPr>
+                <a:solidFill>
+                  <a:srgbClr val="4758AB"/>
+                </a:solidFill>
+                <a:latin typeface="Courier"/>
+              </a:rPr>
+              <a:t>exp</a:t>
+            </a:r>
+            <a:r>
+              <a:rPr>
+                <a:solidFill>
+                  <a:srgbClr val="003B4F"/>
+                </a:solidFill>
+                <a:latin typeface="Courier"/>
+              </a:rPr>
+              <a:t>(coef_lizard)</a:t>
+            </a:r>
+            <a:br/>
+            <a:r>
+              <a:rPr>
+                <a:solidFill>
+                  <a:srgbClr val="003B4F"/>
+                </a:solidFill>
+                <a:latin typeface="Courier"/>
+              </a:rPr>
+              <a:t>ci &lt;- </a:t>
+            </a:r>
+            <a:r>
+              <a:rPr>
+                <a:solidFill>
+                  <a:srgbClr val="4758AB"/>
+                </a:solidFill>
+                <a:latin typeface="Courier"/>
+              </a:rPr>
+              <a:t>exp</a:t>
+            </a:r>
+            <a:r>
+              <a:rPr>
+                <a:solidFill>
+                  <a:srgbClr val="003B4F"/>
+                </a:solidFill>
+                <a:latin typeface="Courier"/>
+              </a:rPr>
+              <a:t>(</a:t>
+            </a:r>
+            <a:r>
+              <a:rPr>
+                <a:solidFill>
+                  <a:srgbClr val="4758AB"/>
+                </a:solidFill>
+                <a:latin typeface="Courier"/>
+              </a:rPr>
+              <a:t>confint</a:t>
+            </a:r>
+            <a:r>
+              <a:rPr>
+                <a:solidFill>
+                  <a:srgbClr val="003B4F"/>
+                </a:solidFill>
+                <a:latin typeface="Courier"/>
+              </a:rPr>
+              <a:t>(lizard_model, </a:t>
+            </a:r>
+            <a:r>
+              <a:rPr>
+                <a:solidFill>
+                  <a:srgbClr val="20794D"/>
+                </a:solidFill>
+                <a:latin typeface="Courier"/>
+              </a:rPr>
+              <a:t>"pa_ratio"</a:t>
+            </a:r>
+            <a:r>
+              <a:rPr>
+                <a:solidFill>
+                  <a:srgbClr val="003B4F"/>
+                </a:solidFill>
+                <a:latin typeface="Courier"/>
+              </a:rPr>
+              <a:t>))</a:t>
+            </a:r>
+            <a:br/>
+            <a:r>
+              <a:rPr>
+                <a:solidFill>
+                  <a:srgbClr val="4758AB"/>
+                </a:solidFill>
+                <a:latin typeface="Courier"/>
+              </a:rPr>
+              <a:t>cat</a:t>
+            </a:r>
+            <a:r>
+              <a:rPr>
+                <a:solidFill>
+                  <a:srgbClr val="003B4F"/>
+                </a:solidFill>
+                <a:latin typeface="Courier"/>
+              </a:rPr>
+              <a:t>(</a:t>
+            </a:r>
+            <a:r>
+              <a:rPr>
+                <a:solidFill>
+                  <a:srgbClr val="20794D"/>
+                </a:solidFill>
+                <a:latin typeface="Courier"/>
+              </a:rPr>
+              <a:t>"Odds Ratio:"</a:t>
+            </a:r>
+            <a:r>
+              <a:rPr>
+                <a:solidFill>
+                  <a:srgbClr val="003B4F"/>
+                </a:solidFill>
+                <a:latin typeface="Courier"/>
+              </a:rPr>
+              <a:t>, </a:t>
+            </a:r>
+            <a:r>
+              <a:rPr>
+                <a:solidFill>
+                  <a:srgbClr val="4758AB"/>
+                </a:solidFill>
+                <a:latin typeface="Courier"/>
+              </a:rPr>
+              <a:t>round</a:t>
+            </a:r>
+            <a:r>
+              <a:rPr>
+                <a:solidFill>
+                  <a:srgbClr val="003B4F"/>
+                </a:solidFill>
+                <a:latin typeface="Courier"/>
+              </a:rPr>
+              <a:t>(odds_ratio, </a:t>
+            </a:r>
+            <a:r>
+              <a:rPr>
+                <a:solidFill>
+                  <a:srgbClr val="AD0000"/>
+                </a:solidFill>
+                <a:latin typeface="Courier"/>
+              </a:rPr>
+              <a:t>3</a:t>
+            </a:r>
+            <a:r>
+              <a:rPr>
+                <a:solidFill>
+                  <a:srgbClr val="003B4F"/>
+                </a:solidFill>
+                <a:latin typeface="Courier"/>
+              </a:rPr>
+              <a:t>), </a:t>
+            </a:r>
+            <a:r>
+              <a:rPr>
+                <a:solidFill>
+                  <a:srgbClr val="20794D"/>
+                </a:solidFill>
+                <a:latin typeface="Courier"/>
+              </a:rPr>
+              <a:t>"</a:t>
+            </a:r>
+            <a:r>
+              <a:rPr>
+                <a:solidFill>
+                  <a:srgbClr val="5E5E5E"/>
+                </a:solidFill>
+                <a:latin typeface="Courier"/>
+              </a:rPr>
+              <a:t>\n\n</a:t>
+            </a:r>
+            <a:r>
+              <a:rPr>
+                <a:solidFill>
+                  <a:srgbClr val="20794D"/>
+                </a:solidFill>
+                <a:latin typeface="Courier"/>
+              </a:rPr>
+              <a:t>"</a:t>
+            </a:r>
+            <a:r>
+              <a:rPr>
+                <a:solidFill>
+                  <a:srgbClr val="003B4F"/>
+                </a:solidFill>
+                <a:latin typeface="Courier"/>
+              </a:rPr>
+              <a:t>,</a:t>
+            </a:r>
+            <a:br/>
+            <a:r>
+              <a:rPr>
+                <a:solidFill>
+                  <a:srgbClr val="20794D"/>
+                </a:solidFill>
+                <a:latin typeface="Courier"/>
+              </a:rPr>
+              <a:t>"95% CI:"</a:t>
+            </a:r>
+            <a:r>
+              <a:rPr>
+                <a:solidFill>
+                  <a:srgbClr val="003B4F"/>
+                </a:solidFill>
+                <a:latin typeface="Courier"/>
+              </a:rPr>
+              <a:t>, </a:t>
+            </a:r>
+            <a:r>
+              <a:rPr>
+                <a:solidFill>
+                  <a:srgbClr val="4758AB"/>
+                </a:solidFill>
+                <a:latin typeface="Courier"/>
+              </a:rPr>
+              <a:t>round</a:t>
+            </a:r>
+            <a:r>
+              <a:rPr>
+                <a:solidFill>
+                  <a:srgbClr val="003B4F"/>
+                </a:solidFill>
+                <a:latin typeface="Courier"/>
+              </a:rPr>
+              <a:t>(ci[</a:t>
+            </a:r>
+            <a:r>
+              <a:rPr>
+                <a:solidFill>
+                  <a:srgbClr val="AD0000"/>
+                </a:solidFill>
+                <a:latin typeface="Courier"/>
+              </a:rPr>
+              <a:t>1</a:t>
+            </a:r>
+            <a:r>
+              <a:rPr>
+                <a:solidFill>
+                  <a:srgbClr val="003B4F"/>
+                </a:solidFill>
+                <a:latin typeface="Courier"/>
+              </a:rPr>
+              <a:t>], </a:t>
+            </a:r>
+            <a:r>
+              <a:rPr>
+                <a:solidFill>
+                  <a:srgbClr val="AD0000"/>
+                </a:solidFill>
+                <a:latin typeface="Courier"/>
+              </a:rPr>
+              <a:t>3</a:t>
+            </a:r>
+            <a:r>
+              <a:rPr>
+                <a:solidFill>
+                  <a:srgbClr val="003B4F"/>
+                </a:solidFill>
+                <a:latin typeface="Courier"/>
+              </a:rPr>
+              <a:t>), </a:t>
+            </a:r>
+            <a:r>
+              <a:rPr>
+                <a:solidFill>
+                  <a:srgbClr val="20794D"/>
+                </a:solidFill>
+                <a:latin typeface="Courier"/>
+              </a:rPr>
+              <a:t>"to"</a:t>
+            </a:r>
+            <a:r>
+              <a:rPr>
+                <a:solidFill>
+                  <a:srgbClr val="003B4F"/>
+                </a:solidFill>
+                <a:latin typeface="Courier"/>
+              </a:rPr>
+              <a:t>, </a:t>
+            </a:r>
+            <a:r>
+              <a:rPr>
+                <a:solidFill>
+                  <a:srgbClr val="4758AB"/>
+                </a:solidFill>
+                <a:latin typeface="Courier"/>
+              </a:rPr>
+              <a:t>round</a:t>
+            </a:r>
+            <a:r>
+              <a:rPr>
+                <a:solidFill>
+                  <a:srgbClr val="003B4F"/>
+                </a:solidFill>
+                <a:latin typeface="Courier"/>
+              </a:rPr>
+              <a:t>(ci[</a:t>
+            </a:r>
+            <a:r>
+              <a:rPr>
+                <a:solidFill>
+                  <a:srgbClr val="AD0000"/>
+                </a:solidFill>
+                <a:latin typeface="Courier"/>
+              </a:rPr>
+              <a:t>2</a:t>
+            </a:r>
+            <a:r>
+              <a:rPr>
+                <a:solidFill>
+                  <a:srgbClr val="003B4F"/>
+                </a:solidFill>
+                <a:latin typeface="Courier"/>
+              </a:rPr>
+              <a:t>], </a:t>
+            </a:r>
+            <a:r>
+              <a:rPr>
+                <a:solidFill>
+                  <a:srgbClr val="AD0000"/>
+                </a:solidFill>
+                <a:latin typeface="Courier"/>
+              </a:rPr>
+              <a:t>3</a:t>
+            </a:r>
+            <a:r>
+              <a:rPr>
+                <a:solidFill>
+                  <a:srgbClr val="003B4F"/>
+                </a:solidFill>
+                <a:latin typeface="Courier"/>
+              </a:rPr>
+              <a:t>), </a:t>
+            </a:r>
+            <a:r>
+              <a:rPr>
+                <a:solidFill>
+                  <a:srgbClr val="20794D"/>
+                </a:solidFill>
+                <a:latin typeface="Courier"/>
+              </a:rPr>
+              <a:t>"</a:t>
+            </a:r>
+            <a:r>
+              <a:rPr>
+                <a:solidFill>
+                  <a:srgbClr val="5E5E5E"/>
+                </a:solidFill>
+                <a:latin typeface="Courier"/>
+              </a:rPr>
+              <a:t>\n</a:t>
+            </a:r>
+            <a:r>
+              <a:rPr>
+                <a:solidFill>
+                  <a:srgbClr val="20794D"/>
+                </a:solidFill>
+                <a:latin typeface="Courier"/>
+              </a:rPr>
+              <a:t>"</a:t>
+            </a:r>
+            <a:r>
+              <a:rPr>
+                <a:solidFill>
+                  <a:srgbClr val="003B4F"/>
+                </a:solidFill>
+                <a:latin typeface="Courier"/>
+              </a:rPr>
+              <a:t>)</a:t>
+            </a:r>
+            <a:br/>
+            <a:r>
+              <a:rPr i="1">
+                <a:solidFill>
+                  <a:srgbClr val="5E5E5E"/>
+                </a:solidFill>
+                <a:latin typeface="Courier"/>
+              </a:rPr>
+              <a:t>## Odds Ratio: 0.861 </a:t>
+            </a:r>
+            <a:br/>
+            <a:r>
+              <a:rPr i="1">
+                <a:solidFill>
+                  <a:srgbClr val="5E5E5E"/>
+                </a:solidFill>
+                <a:latin typeface="Courier"/>
+              </a:rPr>
+              <a:t>## </a:t>
+            </a:r>
+            <a:br/>
+            <a:r>
+              <a:rPr i="1">
+                <a:solidFill>
+                  <a:srgbClr val="5E5E5E"/>
+                </a:solidFill>
+                <a:latin typeface="Courier"/>
+              </a:rPr>
+              <a:t>##  95% CI: 0.753 to 0.932</a:t>
+            </a:r>
+          </a:p>
+        </p:txBody>
+      </p:sp>
+    </p:spTree>
+  </p:cSld>
+</p:sld>
+</file>
+
+<file path=ppt/slides/slide26.xml><?xml version="1.0" encoding="utf-8"?>
+<p:sld xmlns:a="http://schemas.openxmlformats.org/drawingml/2006/main" xmlns:r="http://schemas.openxmlformats.org/officeDocument/2006/relationships" xmlns:p="http://schemas.openxmlformats.org/presentationml/2006/main">
+  <p:cSld>
+    <p:spTree>
+      <p:nvGrpSpPr>
+        <p:cNvPr id="1" name=""/>
+        <p:cNvGrpSpPr/>
+        <p:nvPr/>
+      </p:nvGrpSpPr>
+      <p:grpSpPr>
+        <a:xfrm>
+          <a:off x="0" y="0"/>
+          <a:ext cx="0" cy="0"/>
+          <a:chOff x="0" y="0"/>
+          <a:chExt cx="0" cy="0"/>
+        </a:xfrm>
+      </p:grpSpPr>
+      <p:sp>
+        <p:nvSpPr>
+          <p:cNvPr id="2" name="Title 1"/>
+          <p:cNvSpPr>
+            <a:spLocks noGrp="1"/>
+          </p:cNvSpPr>
+          <p:nvPr>
+            <p:ph type="title"/>
+          </p:nvPr>
+        </p:nvSpPr>
+        <p:spPr>
+          <a:xfrm>
+            <a:off x="0" y="0"/>
+            <a:ext cx="9144000" cy="582780"/>
+          </a:xfrm>
+        </p:spPr>
+        <p:txBody>
+          <a:bodyPr/>
+          <a:lstStyle/>
+          <a:p>
+            <a:pPr lvl="0" indent="0" marL="0">
+              <a:buNone/>
+            </a:pPr>
+            <a:r>
+              <a:rPr/>
               <a:t>Assessing Model Fit</a:t>
             </a:r>
           </a:p>
@@ -9265,7 +9500,7 @@
 </p:sld>
 </file>
 
-<file path=ppt/slides/slide26.xml><?xml version="1.0" encoding="utf-8"?>
+<file path=ppt/slides/slide27.xml><?xml version="1.0" encoding="utf-8"?>
 <p:sld xmlns:a="http://schemas.openxmlformats.org/drawingml/2006/main" xmlns:r="http://schemas.openxmlformats.org/officeDocument/2006/relationships" xmlns:p="http://schemas.openxmlformats.org/presentationml/2006/main">
   <p:cSld>
     <p:spTree>
@@ -9606,97 +9841,6 @@
 </p:sld>
 </file>
 
-<file path=ppt/slides/slide27.xml><?xml version="1.0" encoding="utf-8"?>
-<p:sld xmlns:a="http://schemas.openxmlformats.org/drawingml/2006/main" xmlns:r="http://schemas.openxmlformats.org/officeDocument/2006/relationships" xmlns:p="http://schemas.openxmlformats.org/presentationml/2006/main">
-  <p:cSld>
-    <p:spTree>
-      <p:nvGrpSpPr>
-        <p:cNvPr id="1" name=""/>
-        <p:cNvGrpSpPr/>
-        <p:nvPr/>
-      </p:nvGrpSpPr>
-      <p:grpSpPr>
-        <a:xfrm>
-          <a:off x="0" y="0"/>
-          <a:ext cx="0" cy="0"/>
-          <a:chOff x="0" y="0"/>
-          <a:chExt cx="0" cy="0"/>
-        </a:xfrm>
-      </p:grpSpPr>
-      <p:sp>
-        <p:nvSpPr>
-          <p:cNvPr id="2" name="Title 1"/>
-          <p:cNvSpPr>
-            <a:spLocks noGrp="1"/>
-          </p:cNvSpPr>
-          <p:nvPr>
-            <p:ph type="title"/>
-          </p:nvPr>
-        </p:nvSpPr>
-        <p:spPr>
-          <a:xfrm>
-            <a:off x="0" y="0"/>
-            <a:ext cx="9144000" cy="582780"/>
-          </a:xfrm>
-        </p:spPr>
-        <p:txBody>
-          <a:bodyPr/>
-          <a:lstStyle/>
-          <a:p>
-            <a:pPr lvl="0" indent="0" marL="0">
-              <a:buNone/>
-            </a:pPr>
-            <a:r>
-              <a:rPr/>
-              <a:t>Multiple Logistic Regression: Odds Ratios</a:t>
-            </a:r>
-          </a:p>
-        </p:txBody>
-      </p:sp>
-      <p:sp>
-        <p:nvSpPr>
-          <p:cNvPr id="3" name="Content Placeholder 2"/>
-          <p:cNvSpPr>
-            <a:spLocks noGrp="1"/>
-          </p:cNvSpPr>
-          <p:nvPr>
-            <p:ph idx="1"/>
-          </p:nvPr>
-        </p:nvSpPr>
-        <p:spPr/>
-        <p:txBody>
-          <a:bodyPr/>
-          <a:lstStyle/>
-          <a:p>
-            <a:pPr lvl="0" indent="0" marL="0">
-              <a:buNone/>
-            </a:pPr>
-            <a:r>
-              <a:rPr/>
-              <a:t>Let’s calculate odds ratios and confidence intervals for all predictors.</a:t>
-            </a:r>
-          </a:p>
-          <a:p>
-            <a:pPr lvl="0" indent="0">
-              <a:buNone/>
-            </a:pPr>
-            <a:r>
-              <a:rPr>
-                <a:latin typeface="Courier"/>
-              </a:rPr>
-              <a:t>##               Predictor OddsRatio               CI
-## distance       distance    1.0021 (0.9994, 1.0069)
-## age                 age    1.0712 (0.9721, 1.2577)
-## shrub_cover shrub_cover    1.2129 (1.0645, 1.7909)</a:t>
-            </a:r>
-          </a:p>
-        </p:txBody>
-      </p:sp>
-    </p:spTree>
-  </p:cSld>
-</p:sld>
-</file>
-
 <file path=ppt/slides/slide28.xml><?xml version="1.0" encoding="utf-8"?>
 <p:sld xmlns:a="http://schemas.openxmlformats.org/drawingml/2006/main" xmlns:r="http://schemas.openxmlformats.org/officeDocument/2006/relationships" xmlns:p="http://schemas.openxmlformats.org/presentationml/2006/main">
   <p:cSld>
@@ -9739,7 +9883,7 @@
             </a:pPr>
             <a:r>
               <a:rPr/>
-              <a:t>Visualizing Multiple Logistic Regression</a:t>
+              <a:t>Multiple Logistic Regression: Odds Ratios</a:t>
             </a:r>
           </a:p>
         </p:txBody>
@@ -9764,22 +9908,22 @@
             </a:pPr>
             <a:r>
               <a:rPr/>
-              <a:t>For multiple predictors, we can visualize the effect of each predictor while holding others constant at their mean or median values.</a:t>
-            </a:r>
-          </a:p>
-          <a:p>
-            <a:pPr lvl="0" indent="0" marL="0">
-              <a:buNone/>
-            </a:pPr>
-            <a:r>
-              <a:rPr/>
-              <a:t>This visualization shows the effect of each predictor on the probability of rodent presence, while holding the other predictors constant at their mean values.</a:t>
-            </a:r>
-          </a:p>
-          <a:p>
-            <a:pPr lvl="0" indent="0" marL="0">
-              <a:buNone/>
-            </a:pPr>
+              <a:t>Let’s calculate odds ratios and confidence intervals for all predictors.</a:t>
+            </a:r>
+          </a:p>
+          <a:p>
+            <a:pPr lvl="0" indent="0">
+              <a:buNone/>
+            </a:pPr>
+            <a:r>
+              <a:rPr>
+                <a:latin typeface="Courier"/>
+              </a:rPr>
+              <a:t>##               Predictor OddsRatio               CI
+## distance       distance    1.0021 (0.9994, 1.0069)
+## age                 age    1.0712 (0.9721, 1.2577)
+## shrub_cover shrub_cover    1.2129 (1.0645, 1.7909)</a:t>
+            </a:r>
           </a:p>
         </p:txBody>
       </p:sp>
@@ -9818,11 +9962,8 @@
         <p:spPr>
           <a:xfrm>
             <a:off x="0" y="0"/>
-            <a:ext cx="9144000" cy="602780"/>
+            <a:ext cx="9144000" cy="582780"/>
           </a:xfrm>
-          <a:solidFill>
-            <a:srgbClr val="70121D"/>
-          </a:solidFill>
         </p:spPr>
         <p:txBody>
           <a:bodyPr/>
@@ -9833,7 +9974,7 @@
             </a:pPr>
             <a:r>
               <a:rPr/>
-              <a:t>Assumptions and Diagnostics of Logistic Regression</a:t>
+              <a:t>Visualizing Multiple Logistic Regression</a:t>
             </a:r>
           </a:p>
         </p:txBody>
@@ -9845,7 +9986,7 @@
             <a:spLocks noGrp="1"/>
           </p:cNvSpPr>
           <p:nvPr>
-            <p:ph idx="1" sz="half"/>
+            <p:ph idx="1"/>
           </p:nvPr>
         </p:nvSpPr>
         <p:spPr/>
@@ -9858,43 +9999,7 @@
             </a:pPr>
             <a:r>
               <a:rPr/>
-              <a:t>Logistic regression has several key assumptions:</a:t>
-            </a:r>
-          </a:p>
-          <a:p>
-            <a:pPr lvl="0" indent="-342900" marL="342900">
-              <a:buAutoNum type="arabicPeriod"/>
-            </a:pPr>
-            <a:r>
-              <a:rPr/>
-              <a:t>Independence of observations</a:t>
-            </a:r>
-          </a:p>
-          <a:p>
-            <a:pPr lvl="0" indent="-342900" marL="342900">
-              <a:buAutoNum type="arabicPeriod"/>
-            </a:pPr>
-            <a:r>
-              <a:rPr/>
-              <a:t>Linear relationship between predictors and log odds</a:t>
-            </a:r>
-          </a:p>
-          <a:p>
-            <a:pPr lvl="0" indent="-342900" marL="342900">
-              <a:buAutoNum type="arabicPeriod"/>
-            </a:pPr>
-            <a:r>
-              <a:rPr/>
-              <a:t>No extreme outliers</a:t>
-            </a:r>
-          </a:p>
-          <a:p>
-            <a:pPr lvl="0" indent="-342900" marL="342900">
-              <a:buAutoNum type="arabicPeriod"/>
-            </a:pPr>
-            <a:r>
-              <a:rPr/>
-              <a:t>No multicollinearity (when multiple predictors are used)</a:t>
+              <a:t>For multiple predictors, we can visualize the effect of each predictor while holding others constant at their mean or median values.</a:t>
             </a:r>
           </a:p>
           <a:p>
@@ -9903,41 +10008,16 @@
             </a:pPr>
             <a:r>
               <a:rPr/>
-              <a:t>Let’s check the diagnostics for our multiple logistic regression model:</a:t>
-            </a:r>
+              <a:t>This visualization shows the effect of each predictor on the probability of rodent presence, while holding the other predictors constant at their mean values.</a:t>
+            </a:r>
+          </a:p>
+          <a:p>
+            <a:pPr lvl="0" indent="0" marL="0">
+              <a:buNone/>
+            </a:pPr>
           </a:p>
         </p:txBody>
       </p:sp>
-      <p:pic>
-        <p:nvPicPr>
-          <p:cNvPr descr="14_01_lecture_powerpoint_files/figure-pptx/diagnostics-1.png" id="0" name="Picture 1"/>
-          <p:cNvPicPr>
-            <a:picLocks noGrp="1" noChangeAspect="1"/>
-          </p:cNvPicPr>
-          <p:nvPr/>
-        </p:nvPicPr>
-        <p:blipFill>
-          <a:blip r:embed="rId2"/>
-          <a:stretch>
-            <a:fillRect/>
-          </a:stretch>
-        </p:blipFill>
-        <p:spPr bwMode="auto">
-          <a:xfrm>
-            <a:off x="6121400" y="1498600"/>
-            <a:ext cx="2781300" cy="2781300"/>
-          </a:xfrm>
-          <a:prstGeom prst="rect">
-            <a:avLst/>
-          </a:prstGeom>
-          <a:noFill/>
-          <a:ln w="9525">
-            <a:noFill/>
-            <a:headEnd/>
-            <a:tailEnd/>
-          </a:ln>
-        </p:spPr>
-      </p:pic>
     </p:spTree>
   </p:cSld>
 </p:sld>
@@ -10138,7 +10218,7 @@
             </a:pPr>
             <a:r>
               <a:rPr/>
-              <a:t>Model Comparison and Selection</a:t>
+              <a:t>Assumptions and Diagnostics of Logistic Regression</a:t>
             </a:r>
           </a:p>
         </p:txBody>
@@ -10163,7 +10243,7 @@
             </a:pPr>
             <a:r>
               <a:rPr/>
-              <a:t>When working with multiple predictors, we often want to find the most parsimonious model. We can use:</a:t>
+              <a:t>Logistic regression has several key assumptions:</a:t>
             </a:r>
           </a:p>
           <a:p>
@@ -10172,7 +10252,7 @@
             </a:pPr>
             <a:r>
               <a:rPr/>
-              <a:t>Likelihood ratio tests for nested models</a:t>
+              <a:t>Independence of observations</a:t>
             </a:r>
           </a:p>
           <a:p>
@@ -10181,7 +10261,7 @@
             </a:pPr>
             <a:r>
               <a:rPr/>
-              <a:t>Information criteria (AIC, BIC) for non-nested models</a:t>
+              <a:t>Linear relationship between predictors and log odds</a:t>
             </a:r>
           </a:p>
           <a:p>
@@ -10190,7 +10270,16 @@
             </a:pPr>
             <a:r>
               <a:rPr/>
-              <a:t>Classification metrics like accuracy, sensitivity, and specificity</a:t>
+              <a:t>No extreme outliers</a:t>
+            </a:r>
+          </a:p>
+          <a:p>
+            <a:pPr lvl="0" indent="-342900" marL="342900">
+              <a:buAutoNum type="arabicPeriod"/>
+            </a:pPr>
+            <a:r>
+              <a:rPr/>
+              <a:t>No multicollinearity (when multiple predictors are used)</a:t>
             </a:r>
           </a:p>
           <a:p>
@@ -10199,70 +10288,41 @@
             </a:pPr>
             <a:r>
               <a:rPr/>
-              <a:t>Let’s compare models and calculate AIC values:</a:t>
-            </a:r>
-          </a:p>
-          <a:p>
-            <a:pPr lvl="0" indent="0">
-              <a:buNone/>
-            </a:pPr>
-            <a:r>
-              <a:rPr>
-                <a:latin typeface="Courier"/>
-              </a:rPr>
-              <a:t>##                         Model Parameters   AIC   BIC Deviance
-## No Age                 No Age          3 17.05 20.71    11.05
-## Full                     Full          4 17.27 22.15     9.27
-## No Distance       No Distance          3 17.38 21.04    11.38
-## Intercept Only Intercept Only          1 29.55 30.77    27.55
-## No Shrub             No Shrub          3 32.73 36.39    26.73</a:t>
+              <a:t>Let’s check the diagnostics for our multiple logistic regression model:</a:t>
             </a:r>
           </a:p>
         </p:txBody>
       </p:sp>
-      <p:sp>
-        <p:nvSpPr>
-          <p:cNvPr id="4" name="Content Placeholder 3"/>
-          <p:cNvSpPr>
-            <a:spLocks noGrp="1"/>
-          </p:cNvSpPr>
-          <p:nvPr>
-            <p:ph idx="2" sz="half"/>
-          </p:nvPr>
-        </p:nvSpPr>
-        <p:spPr/>
-        <p:txBody>
-          <a:bodyPr/>
-          <a:lstStyle/>
-          <a:p>
-            <a:pPr lvl="0" indent="0" marL="0">
-              <a:buNone/>
-            </a:pPr>
-            <a:r>
-              <a:rPr/>
-              <a:t>We can also evaluate the predictive performance of our model:</a:t>
-            </a:r>
-          </a:p>
-          <a:p>
-            <a:pPr lvl="0" indent="0">
-              <a:buNone/>
-            </a:pPr>
-            <a:r>
-              <a:rPr>
-                <a:latin typeface="Courier"/>
-              </a:rPr>
-              <a:t>##          Actual
-## Predicted Absent Present
-##   Absent       5       2
-##   Present      1      17
-## 
-## Accuracy: 0.88
-## Sensitivity: 0.895
-## Specificity: 0.833</a:t>
-            </a:r>
-          </a:p>
-        </p:txBody>
-      </p:sp>
+      <p:pic>
+        <p:nvPicPr>
+          <p:cNvPr descr="14_01_lecture_powerpoint_files/figure-pptx/diagnostics-1.png" id="0" name="Picture 1"/>
+          <p:cNvPicPr>
+            <a:picLocks noGrp="1" noChangeAspect="1"/>
+          </p:cNvPicPr>
+          <p:nvPr/>
+        </p:nvPicPr>
+        <p:blipFill>
+          <a:blip r:embed="rId2"/>
+          <a:stretch>
+            <a:fillRect/>
+          </a:stretch>
+        </p:blipFill>
+        <p:spPr bwMode="auto">
+          <a:xfrm>
+            <a:off x="6121400" y="1498600"/>
+            <a:ext cx="2781300" cy="2781300"/>
+          </a:xfrm>
+          <a:prstGeom prst="rect">
+            <a:avLst/>
+          </a:prstGeom>
+          <a:noFill/>
+          <a:ln w="9525">
+            <a:noFill/>
+            <a:headEnd/>
+            <a:tailEnd/>
+          </a:ln>
+        </p:spPr>
+      </p:pic>
     </p:spTree>
   </p:cSld>
 </p:sld>
@@ -10298,8 +10358,11 @@
         <p:spPr>
           <a:xfrm>
             <a:off x="0" y="0"/>
-            <a:ext cx="9144000" cy="582780"/>
+            <a:ext cx="9144000" cy="602780"/>
           </a:xfrm>
+          <a:solidFill>
+            <a:srgbClr val="70121D"/>
+          </a:solidFill>
         </p:spPr>
         <p:txBody>
           <a:bodyPr/>
@@ -10310,7 +10373,7 @@
             </a:pPr>
             <a:r>
               <a:rPr/>
-              <a:t>Publication-Quality Figure</a:t>
+              <a:t>Model Comparison and Selection</a:t>
             </a:r>
           </a:p>
         </p:txBody>
@@ -10322,7 +10385,7 @@
             <a:spLocks noGrp="1"/>
           </p:cNvSpPr>
           <p:nvPr>
-            <p:ph idx="1"/>
+            <p:ph idx="1" sz="half"/>
           </p:nvPr>
         </p:nvSpPr>
         <p:spPr/>
@@ -10335,13 +10398,103 @@
             </a:pPr>
             <a:r>
               <a:rPr/>
-              <a:t>Let’s create a publication-quality figure for our multiple logistic regression model and show how we would write up the results for a scientific publication.</a:t>
+              <a:t>When working with multiple predictors, we often want to find the most parsimonious model. We can use:</a:t>
+            </a:r>
+          </a:p>
+          <a:p>
+            <a:pPr lvl="0" indent="-342900" marL="342900">
+              <a:buAutoNum type="arabicPeriod"/>
+            </a:pPr>
+            <a:r>
+              <a:rPr/>
+              <a:t>Likelihood ratio tests for nested models</a:t>
+            </a:r>
+          </a:p>
+          <a:p>
+            <a:pPr lvl="0" indent="-342900" marL="342900">
+              <a:buAutoNum type="arabicPeriod"/>
+            </a:pPr>
+            <a:r>
+              <a:rPr/>
+              <a:t>Information criteria (AIC, BIC) for non-nested models</a:t>
+            </a:r>
+          </a:p>
+          <a:p>
+            <a:pPr lvl="0" indent="-342900" marL="342900">
+              <a:buAutoNum type="arabicPeriod"/>
+            </a:pPr>
+            <a:r>
+              <a:rPr/>
+              <a:t>Classification metrics like accuracy, sensitivity, and specificity</a:t>
             </a:r>
           </a:p>
           <a:p>
             <a:pPr lvl="0" indent="0" marL="0">
               <a:buNone/>
             </a:pPr>
+            <a:r>
+              <a:rPr/>
+              <a:t>Let’s compare models and calculate AIC values:</a:t>
+            </a:r>
+          </a:p>
+          <a:p>
+            <a:pPr lvl="0" indent="0">
+              <a:buNone/>
+            </a:pPr>
+            <a:r>
+              <a:rPr>
+                <a:latin typeface="Courier"/>
+              </a:rPr>
+              <a:t>##                         Model Parameters   AIC   BIC Deviance
+## No Age                 No Age          3 17.05 20.71    11.05
+## Full                     Full          4 17.27 22.15     9.27
+## No Distance       No Distance          3 17.38 21.04    11.38
+## Intercept Only Intercept Only          1 29.55 30.77    27.55
+## No Shrub             No Shrub          3 32.73 36.39    26.73</a:t>
+            </a:r>
+          </a:p>
+        </p:txBody>
+      </p:sp>
+      <p:sp>
+        <p:nvSpPr>
+          <p:cNvPr id="4" name="Content Placeholder 3"/>
+          <p:cNvSpPr>
+            <a:spLocks noGrp="1"/>
+          </p:cNvSpPr>
+          <p:nvPr>
+            <p:ph idx="2" sz="half"/>
+          </p:nvPr>
+        </p:nvSpPr>
+        <p:spPr/>
+        <p:txBody>
+          <a:bodyPr/>
+          <a:lstStyle/>
+          <a:p>
+            <a:pPr lvl="0" indent="0" marL="0">
+              <a:buNone/>
+            </a:pPr>
+            <a:r>
+              <a:rPr/>
+              <a:t>We can also evaluate the predictive performance of our model:</a:t>
+            </a:r>
+          </a:p>
+          <a:p>
+            <a:pPr lvl="0" indent="0">
+              <a:buNone/>
+            </a:pPr>
+            <a:r>
+              <a:rPr>
+                <a:latin typeface="Courier"/>
+              </a:rPr>
+              <a:t>##          Actual
+## Predicted Absent Present
+##   Absent       5       2
+##   Present      1      17
+## 
+## Accuracy: 0.88
+## Sensitivity: 0.895
+## Specificity: 0.833</a:t>
+            </a:r>
           </a:p>
         </p:txBody>
       </p:sp>
@@ -10392,7 +10545,7 @@
             </a:pPr>
             <a:r>
               <a:rPr/>
-              <a:t>Scientific Write-Up Example</a:t>
+              <a:t>Publication-Quality Figure</a:t>
             </a:r>
           </a:p>
         </p:txBody>
@@ -10412,49 +10565,18 @@
           <a:bodyPr/>
           <a:lstStyle/>
           <a:p>
-            <a:pPr lvl="0" indent="0" marL="1270000">
-              <a:buNone/>
-            </a:pPr>
-            <a:r>
-              <a:rPr sz="2000" b="1"/>
-              <a:t>Scientific Write-Up Example</a:t>
-            </a:r>
-          </a:p>
-          <a:p>
-            <a:pPr lvl="0" indent="0" marL="1270000">
-              <a:buNone/>
-            </a:pPr>
-            <a:r>
-              <a:rPr sz="2000" b="1"/>
-              <a:t>Results</a:t>
-            </a:r>
-          </a:p>
-          <a:p>
-            <a:pPr lvl="0" indent="0" marL="1270000">
-              <a:buNone/>
-            </a:pPr>
-            <a:r>
-              <a:rPr sz="2000"/>
-              <a:t>The presence of native rodents in canyon fragments was modeled using multiple logistic regression with three predictors: distance to nearest source canyon, years since isolation, and percentage of shrub cover. The model was statistically significant (χ² = 12.63, df = 3, p = 0.005) and explained 38.7% of the variation in rodent presence (McFadden’s R² = 0.387).</a:t>
-            </a:r>
-          </a:p>
-          <a:p>
-            <a:pPr lvl="0" indent="0" marL="1270000">
-              <a:buNone/>
-            </a:pPr>
-            <a:r>
-              <a:rPr sz="2000"/>
-              <a:t>Among the predictors, only shrub cover had a statistically significant effect on rodent presence (β = 0.091, SE = 0.041, p = 0.026). The odds ratio for shrub cover was 1.095 (95% CI: 1.011-1.186), indicating that for each percentage increase in shrub cover, the odds of rodent presence increased by approximately 9.5%. Neither distance to source canyon (β = 0.0002, p = 0.690) nor years since isolation (β = 0.022, p = 0.566) showed significant relationships with rodent presence.</a:t>
-            </a:r>
-          </a:p>
-          <a:p>
-            <a:pPr lvl="0" indent="0" marL="1270000">
-              <a:buNone/>
-            </a:pPr>
-            <a:r>
-              <a:rPr sz="2000"/>
-              <a:t>The model correctly classified 76% of the fragments, with a sensitivity of 0.77 and a specificity of 0.75. Diagnostics indicated no significant issues with model fit (Hosmer-Lemeshow χ² = 7.31, df = 8, p = 0.504).</a:t>
-            </a:r>
+            <a:pPr lvl="0" indent="0" marL="0">
+              <a:buNone/>
+            </a:pPr>
+            <a:r>
+              <a:rPr/>
+              <a:t>Let’s create a publication-quality figure for our multiple logistic regression model and show how we would write up the results for a scientific publication.</a:t>
+            </a:r>
+          </a:p>
+          <a:p>
+            <a:pPr lvl="0" indent="0" marL="0">
+              <a:buNone/>
+            </a:pPr>
           </a:p>
         </p:txBody>
       </p:sp>
@@ -10539,7 +10661,7 @@
             </a:pPr>
             <a:r>
               <a:rPr sz="2000" b="1"/>
-              <a:t>Discussion</a:t>
+              <a:t>Results</a:t>
             </a:r>
           </a:p>
           <a:p>
@@ -10548,7 +10670,25 @@
             </a:pPr>
             <a:r>
               <a:rPr sz="2000"/>
-              <a:t>Our findings suggest that vegetation structure, as measured by shrub cover, plays a crucial role in determining the presence of native rodents in canyon fragments. The positive relationship between shrub cover and rodent occurrence likely reflects the importance of vegetation for providing food resources, shelter from predators, and suitable microhabitat conditions. Contrary to our expectations, isolation metrics (distance to source canyon and years since isolation) did not significantly predict rodent presence, suggesting that local habitat quality may be more important than landscape connectivity for these species.</a:t>
+              <a:t>The presence of native rodents in canyon fragments was modeled using multiple logistic regression with three predictors: distance to nearest source canyon, years since isolation, and percentage of shrub cover. The model was statistically significant (χ² = 12.63, df = 3, p = 0.005) and explained 38.7% of the variation in rodent presence (McFadden’s R² = 0.387).</a:t>
+            </a:r>
+          </a:p>
+          <a:p>
+            <a:pPr lvl="0" indent="0" marL="1270000">
+              <a:buNone/>
+            </a:pPr>
+            <a:r>
+              <a:rPr sz="2000"/>
+              <a:t>Among the predictors, only shrub cover had a statistically significant effect on rodent presence (β = 0.091, SE = 0.041, p = 0.026). The odds ratio for shrub cover was 1.095 (95% CI: 1.011-1.186), indicating that for each percentage increase in shrub cover, the odds of rodent presence increased by approximately 9.5%. Neither distance to source canyon (β = 0.0002, p = 0.690) nor years since isolation (β = 0.022, p = 0.566) showed significant relationships with rodent presence.</a:t>
+            </a:r>
+          </a:p>
+          <a:p>
+            <a:pPr lvl="0" indent="0" marL="1270000">
+              <a:buNone/>
+            </a:pPr>
+            <a:r>
+              <a:rPr sz="2000"/>
+              <a:t>The model correctly classified 76% of the fragments, with a sensitivity of 0.77 and a specificity of 0.75. Diagnostics indicated no significant issues with model fit (Hosmer-Lemeshow χ² = 7.31, df = 8, p = 0.504).</a:t>
             </a:r>
           </a:p>
         </p:txBody>
@@ -10600,7 +10740,7 @@
             </a:pPr>
             <a:r>
               <a:rPr/>
-              <a:t>Relationship Between GLMs and ANOVAs</a:t>
+              <a:t>Scientific Write-Up Example</a:t>
             </a:r>
           </a:p>
         </p:txBody>
@@ -10620,63 +10760,30 @@
           <a:bodyPr/>
           <a:lstStyle/>
           <a:p>
-            <a:pPr lvl="0" indent="0" marL="0">
-              <a:spcBef>
-                <a:spcPts val="3000"/>
-              </a:spcBef>
-              <a:buNone/>
-            </a:pPr>
-            <a:r>
-              <a:rPr b="1"/>
-              <a:t>GLMs and ANOVAs: The Connection</a:t>
-            </a:r>
-          </a:p>
-          <a:p>
-            <a:pPr lvl="0" indent="0" marL="0">
-              <a:buNone/>
-            </a:pPr>
-            <a:r>
-              <a:rPr/>
-              <a:t>General linear models (including ANOVAs and standard regression) are special cases of Generalized Linear Models where:</a:t>
-            </a:r>
-          </a:p>
-          <a:p>
-            <a:pPr lvl="0" indent="-342900" marL="342900">
-              <a:buAutoNum type="arabicPeriod"/>
-            </a:pPr>
-            <a:r>
-              <a:rPr/>
-              <a:t>The response variable follows a normal distribution</a:t>
-            </a:r>
-          </a:p>
-          <a:p>
-            <a:pPr lvl="0" indent="-342900" marL="342900">
-              <a:buAutoNum type="arabicPeriod"/>
-            </a:pPr>
-            <a:r>
-              <a:rPr/>
-              <a:t>The link function is the identity function</a:t>
-            </a:r>
-          </a:p>
-          <a:p>
-            <a:pPr lvl="0"/>
-            <a:r>
-              <a:rPr/>
-              <a:t>Therefore, a one-way ANOVA is equivalent to:</a:t>
-            </a:r>
-          </a:p>
-          <a:p>
-            <a:pPr lvl="1"/>
-            <a:r>
-              <a:rPr/>
-              <a:t>A linear regression with a categorical predictor</a:t>
-            </a:r>
-          </a:p>
-          <a:p>
-            <a:pPr lvl="1"/>
-            <a:r>
-              <a:rPr/>
-              <a:t>A Gaussian GLM with an identity link and a categorical predictor</a:t>
+            <a:pPr lvl="0" indent="0" marL="1270000">
+              <a:buNone/>
+            </a:pPr>
+            <a:r>
+              <a:rPr sz="2000" b="1"/>
+              <a:t>Scientific Write-Up Example</a:t>
+            </a:r>
+          </a:p>
+          <a:p>
+            <a:pPr lvl="0" indent="0" marL="1270000">
+              <a:buNone/>
+            </a:pPr>
+            <a:r>
+              <a:rPr sz="2000" b="1"/>
+              <a:t>Discussion</a:t>
+            </a:r>
+          </a:p>
+          <a:p>
+            <a:pPr lvl="0" indent="0" marL="1270000">
+              <a:buNone/>
+            </a:pPr>
+            <a:r>
+              <a:rPr sz="2000"/>
+              <a:t>Our findings suggest that vegetation structure, as measured by shrub cover, plays a crucial role in determining the presence of native rodents in canyon fragments. The positive relationship between shrub cover and rodent occurrence likely reflects the importance of vegetation for providing food resources, shelter from predators, and suitable microhabitat conditions. Contrary to our expectations, isolation metrics (distance to source canyon and years since isolation) did not significantly predict rodent presence, suggesting that local habitat quality may be more important than landscape connectivity for these species.</a:t>
             </a:r>
           </a:p>
         </p:txBody>
@@ -10728,7 +10835,7 @@
             </a:pPr>
             <a:r>
               <a:rPr/>
-              <a:t>Demonstrating ANOVA-GLM Equivalence</a:t>
+              <a:t>Relationship Between GLMs and ANOVAs</a:t>
             </a:r>
           </a:p>
         </p:txBody>
@@ -10749,17 +10856,63 @@
           <a:lstStyle/>
           <a:p>
             <a:pPr lvl="0" indent="0" marL="0">
-              <a:buNone/>
-            </a:pPr>
-            <a:r>
-              <a:rPr/>
-              <a:t>Let’s demonstrate this equivalence:</a:t>
+              <a:spcBef>
+                <a:spcPts val="3000"/>
+              </a:spcBef>
+              <a:buNone/>
+            </a:pPr>
+            <a:r>
+              <a:rPr b="1"/>
+              <a:t>GLMs and ANOVAs: The Connection</a:t>
             </a:r>
           </a:p>
           <a:p>
             <a:pPr lvl="0" indent="0" marL="0">
               <a:buNone/>
             </a:pPr>
+            <a:r>
+              <a:rPr/>
+              <a:t>General linear models (including ANOVAs and standard regression) are special cases of Generalized Linear Models where:</a:t>
+            </a:r>
+          </a:p>
+          <a:p>
+            <a:pPr lvl="0" indent="-342900" marL="342900">
+              <a:buAutoNum type="arabicPeriod"/>
+            </a:pPr>
+            <a:r>
+              <a:rPr/>
+              <a:t>The response variable follows a normal distribution</a:t>
+            </a:r>
+          </a:p>
+          <a:p>
+            <a:pPr lvl="0" indent="-342900" marL="342900">
+              <a:buAutoNum type="arabicPeriod"/>
+            </a:pPr>
+            <a:r>
+              <a:rPr/>
+              <a:t>The link function is the identity function</a:t>
+            </a:r>
+          </a:p>
+          <a:p>
+            <a:pPr lvl="0"/>
+            <a:r>
+              <a:rPr/>
+              <a:t>Therefore, a one-way ANOVA is equivalent to:</a:t>
+            </a:r>
+          </a:p>
+          <a:p>
+            <a:pPr lvl="1"/>
+            <a:r>
+              <a:rPr/>
+              <a:t>A linear regression with a categorical predictor</a:t>
+            </a:r>
+          </a:p>
+          <a:p>
+            <a:pPr lvl="1"/>
+            <a:r>
+              <a:rPr/>
+              <a:t>A Gaussian GLM with an identity link and a categorical predictor</a:t>
+            </a:r>
           </a:p>
         </p:txBody>
       </p:sp>
@@ -10797,8 +10950,8 @@
         </p:nvSpPr>
         <p:spPr>
           <a:xfrm>
-            <a:off x="139485" y="78119"/>
-            <a:ext cx="8229600" cy="607682"/>
+            <a:off x="0" y="0"/>
+            <a:ext cx="9144000" cy="582780"/>
           </a:xfrm>
         </p:spPr>
         <p:txBody>
@@ -10810,19 +10963,19 @@
             </a:pPr>
             <a:r>
               <a:rPr/>
-              <a:t>Assumptions and Diagnostics Summary</a:t>
+              <a:t>Demonstrating ANOVA-GLM Equivalence</a:t>
             </a:r>
           </a:p>
         </p:txBody>
       </p:sp>
       <p:sp>
         <p:nvSpPr>
-          <p:cNvPr id="3" name="Text Placeholder 2"/>
+          <p:cNvPr id="3" name="Content Placeholder 2"/>
           <p:cNvSpPr>
             <a:spLocks noGrp="1"/>
           </p:cNvSpPr>
           <p:nvPr>
-            <p:ph idx="1" type="body"/>
+            <p:ph idx="1"/>
           </p:nvPr>
         </p:nvSpPr>
         <p:spPr/>
@@ -10830,160 +10983,21 @@
           <a:bodyPr/>
           <a:lstStyle/>
           <a:p>
-            <a:pPr lvl="0"/>
-            <a:r>
-              <a:rPr/>
-              <a:t>Generalized Linear Models- assumptions depend on distribution+link function used:</a:t>
-            </a:r>
-          </a:p>
-          <a:p>
-            <a:pPr lvl="0"/>
-            <a:r>
-              <a:rPr b="1"/>
-              <a:t>All GLMs:</a:t>
-            </a:r>
-          </a:p>
-          <a:p>
-            <a:pPr lvl="1"/>
-            <a:r>
-              <a:rPr/>
-              <a:t>Independence of observations, No outliers, No Multicolinearity</a:t>
-            </a:r>
-          </a:p>
-          <a:p>
-            <a:pPr lvl="1"/>
-            <a:r>
-              <a:rPr/>
-              <a:t>Correct specification of the link function /variance structure</a:t>
-            </a:r>
-          </a:p>
-          <a:p>
-            <a:pPr lvl="0"/>
-            <a:r>
-              <a:rPr b="1"/>
-              <a:t>Gaussian GLMs (including linear regression):</a:t>
-            </a:r>
-          </a:p>
-          <a:p>
-            <a:pPr lvl="1"/>
-            <a:r>
-              <a:rPr/>
-              <a:t>Normality of residuals</a:t>
-            </a:r>
-          </a:p>
-          <a:p>
-            <a:pPr lvl="1"/>
-            <a:r>
-              <a:rPr/>
-              <a:t>Homogeneity of variance</a:t>
-            </a:r>
-          </a:p>
-          <a:p>
-            <a:pPr lvl="0"/>
-            <a:r>
-              <a:rPr b="1"/>
-              <a:t>Poisson GLMs:</a:t>
-            </a:r>
-          </a:p>
-          <a:p>
-            <a:pPr lvl="1"/>
-            <a:r>
-              <a:rPr/>
-              <a:t>Count data (non-negative integers)</a:t>
-            </a:r>
-          </a:p>
-          <a:p>
-            <a:pPr lvl="1"/>
-            <a:r>
-              <a:rPr/>
-              <a:t>Mean equals variance - overdispersed = negative binomial)</a:t>
-            </a:r>
-          </a:p>
-          <a:p>
-            <a:pPr lvl="0"/>
-            <a:r>
-              <a:rPr b="1"/>
-              <a:t>Logistic GLMs:</a:t>
-            </a:r>
-          </a:p>
-          <a:p>
-            <a:pPr lvl="1"/>
-            <a:r>
-              <a:rPr/>
-              <a:t>Binary response variable</a:t>
-            </a:r>
-          </a:p>
-          <a:p>
-            <a:pPr lvl="1"/>
-            <a:r>
-              <a:rPr/>
-              <a:t>Linear relationship between predictors and log odds</a:t>
-            </a:r>
-          </a:p>
-          <a:p>
-            <a:pPr lvl="1"/>
-            <a:r>
-              <a:rPr/>
-              <a:t>Adequate sample size relative to number of parameters</a:t>
-            </a:r>
+            <a:pPr lvl="0" indent="0" marL="0">
+              <a:buNone/>
+            </a:pPr>
+            <a:r>
+              <a:rPr/>
+              <a:t>Let’s demonstrate this equivalence:</a:t>
+            </a:r>
+          </a:p>
+          <a:p>
+            <a:pPr lvl="0" indent="0" marL="0">
+              <a:buNone/>
+            </a:pPr>
           </a:p>
         </p:txBody>
       </p:sp>
-      <p:sp>
-        <p:nvSpPr>
-          <p:cNvPr id="5" name="Text Placeholder 4"/>
-          <p:cNvSpPr>
-            <a:spLocks noGrp="1"/>
-          </p:cNvSpPr>
-          <p:nvPr>
-            <p:ph idx="3" sz="quarter" type="body"/>
-          </p:nvPr>
-        </p:nvSpPr>
-        <p:spPr/>
-        <p:txBody>
-          <a:bodyPr/>
-          <a:lstStyle/>
-          <a:p>
-            <a:pPr lvl="0" indent="0" marL="0">
-              <a:buNone/>
-            </a:pPr>
-            <a:r>
-              <a:rPr/>
-              <a:t>The following R code checks some common diagnostics for our logistic model:</a:t>
-            </a:r>
-          </a:p>
-        </p:txBody>
-      </p:sp>
-      <p:pic>
-        <p:nvPicPr>
-          <p:cNvPr descr="14_01_lecture_powerpoint_files/figure-pptx/diagnostic-summary-1.png" id="0" name="Picture 1"/>
-          <p:cNvPicPr>
-            <a:picLocks noGrp="1" noChangeAspect="1"/>
-          </p:cNvPicPr>
-          <p:nvPr/>
-        </p:nvPicPr>
-        <p:blipFill>
-          <a:blip r:embed="rId2"/>
-          <a:stretch>
-            <a:fillRect/>
-          </a:stretch>
-        </p:blipFill>
-        <p:spPr bwMode="auto">
-          <a:xfrm>
-            <a:off x="5130800" y="1295400"/>
-            <a:ext cx="3276600" cy="3276600"/>
-          </a:xfrm>
-          <a:prstGeom prst="rect">
-            <a:avLst/>
-          </a:prstGeom>
-          <a:noFill/>
-          <a:ln w="9525">
-            <a:noFill/>
-            <a:headEnd/>
-            <a:tailEnd/>
-          </a:ln>
-        </p:spPr>
-      </p:pic>
     </p:spTree>
   </p:cSld>
 </p:sld>
@@ -11018,8 +11032,8 @@
         </p:nvSpPr>
         <p:spPr>
           <a:xfrm>
-            <a:off x="0" y="0"/>
-            <a:ext cx="9144000" cy="582780"/>
+            <a:off x="139485" y="78119"/>
+            <a:ext cx="8229600" cy="607682"/>
           </a:xfrm>
         </p:spPr>
         <p:txBody>
@@ -11031,19 +11045,19 @@
             </a:pPr>
             <a:r>
               <a:rPr/>
-              <a:t>Summary and Conclusions</a:t>
+              <a:t>Assumptions and Diagnostics Summary</a:t>
             </a:r>
           </a:p>
         </p:txBody>
       </p:sp>
       <p:sp>
         <p:nvSpPr>
-          <p:cNvPr id="3" name="Content Placeholder 2"/>
+          <p:cNvPr id="3" name="Text Placeholder 2"/>
           <p:cNvSpPr>
             <a:spLocks noGrp="1"/>
           </p:cNvSpPr>
           <p:nvPr>
-            <p:ph idx="1"/>
+            <p:ph idx="1" type="body"/>
           </p:nvPr>
         </p:nvSpPr>
         <p:spPr/>
@@ -11051,103 +11065,160 @@
           <a:bodyPr/>
           <a:lstStyle/>
           <a:p>
-            <a:pPr lvl="0" indent="0" marL="0">
-              <a:buNone/>
-            </a:pPr>
-            <a:r>
-              <a:rPr/>
-              <a:t>Generalized Linear Models (GLMs) provide a powerful and flexible framework for analyzing a wide range of data types in biology:</a:t>
-            </a:r>
-          </a:p>
-          <a:p>
-            <a:pPr lvl="0" indent="-342900" marL="342900">
-              <a:buAutoNum type="arabicPeriod"/>
-            </a:pPr>
+            <a:pPr lvl="0"/>
+            <a:r>
+              <a:rPr/>
+              <a:t>Generalized Linear Models- assumptions depend on distribution+link function used:</a:t>
+            </a:r>
+          </a:p>
+          <a:p>
+            <a:pPr lvl="0"/>
             <a:r>
               <a:rPr b="1"/>
-              <a:t>Gaussian GLMs</a:t>
-            </a:r>
-            <a:r>
-              <a:rPr/>
-              <a:t> with identity link function equivalent to standard linear models and ANOVAs</a:t>
-            </a:r>
-          </a:p>
-          <a:p>
-            <a:pPr lvl="0" indent="-342900" marL="342900">
-              <a:buAutoNum type="arabicPeriod"/>
-            </a:pPr>
+              <a:t>All GLMs:</a:t>
+            </a:r>
+          </a:p>
+          <a:p>
+            <a:pPr lvl="1"/>
+            <a:r>
+              <a:rPr/>
+              <a:t>Independence of observations, No outliers, No Multicolinearity</a:t>
+            </a:r>
+          </a:p>
+          <a:p>
+            <a:pPr lvl="1"/>
+            <a:r>
+              <a:rPr/>
+              <a:t>Correct specification of the link function /variance structure</a:t>
+            </a:r>
+          </a:p>
+          <a:p>
+            <a:pPr lvl="0"/>
             <a:r>
               <a:rPr b="1"/>
-              <a:t>Poisson GLMs</a:t>
-            </a:r>
-            <a:r>
-              <a:rPr/>
-              <a:t> with log link function are appropriate for count data, but be cautious of overdispersion.</a:t>
-            </a:r>
-          </a:p>
-          <a:p>
-            <a:pPr lvl="0" indent="-342900" marL="342900">
-              <a:buAutoNum type="arabicPeriod"/>
-            </a:pPr>
+              <a:t>Gaussian GLMs (including linear regression):</a:t>
+            </a:r>
+          </a:p>
+          <a:p>
+            <a:pPr lvl="1"/>
+            <a:r>
+              <a:rPr/>
+              <a:t>Normality of residuals</a:t>
+            </a:r>
+          </a:p>
+          <a:p>
+            <a:pPr lvl="1"/>
+            <a:r>
+              <a:rPr/>
+              <a:t>Homogeneity of variance</a:t>
+            </a:r>
+          </a:p>
+          <a:p>
+            <a:pPr lvl="0"/>
             <a:r>
               <a:rPr b="1"/>
-              <a:t>Negative Binomial</a:t>
-            </a:r>
-            <a:r>
-              <a:rPr/>
-              <a:t> works with overdispersed data</a:t>
-            </a:r>
-          </a:p>
-          <a:p>
-            <a:pPr lvl="0" indent="-342900" marL="342900">
-              <a:buAutoNum type="arabicPeriod"/>
-            </a:pPr>
+              <a:t>Poisson GLMs:</a:t>
+            </a:r>
+          </a:p>
+          <a:p>
+            <a:pPr lvl="1"/>
+            <a:r>
+              <a:rPr/>
+              <a:t>Count data (non-negative integers)</a:t>
+            </a:r>
+          </a:p>
+          <a:p>
+            <a:pPr lvl="1"/>
+            <a:r>
+              <a:rPr/>
+              <a:t>Mean equals variance - overdispersed = negative binomial)</a:t>
+            </a:r>
+          </a:p>
+          <a:p>
+            <a:pPr lvl="0"/>
             <a:r>
               <a:rPr b="1"/>
-              <a:t>Logistic GLMs</a:t>
-            </a:r>
-            <a:r>
-              <a:rPr/>
-              <a:t> with logit link function are useful for binary responses - probability of success or presence.</a:t>
-            </a:r>
-          </a:p>
-          <a:p>
-            <a:pPr lvl="0"/>
-            <a:r>
-              <a:rPr/>
-              <a:t>Key advantages of GLMs include:</a:t>
+              <a:t>Logistic GLMs:</a:t>
             </a:r>
           </a:p>
           <a:p>
             <a:pPr lvl="1"/>
             <a:r>
               <a:rPr/>
-              <a:t>Handle various response variables beyond normal distributions</a:t>
+              <a:t>Binary response variable</a:t>
             </a:r>
           </a:p>
           <a:p>
             <a:pPr lvl="1"/>
             <a:r>
               <a:rPr/>
-              <a:t>Unified framework for linear modeling</a:t>
+              <a:t>Linear relationship between predictors and log odds</a:t>
             </a:r>
           </a:p>
           <a:p>
             <a:pPr lvl="1"/>
             <a:r>
               <a:rPr/>
-              <a:t>Flexibility in specifying the link function to match the data structure</a:t>
-            </a:r>
-          </a:p>
-          <a:p>
-            <a:pPr lvl="1"/>
-            <a:r>
-              <a:rPr/>
-              <a:t>Interpretable parameters, though interpretation differs by model type</a:t>
+              <a:t>Adequate sample size relative to number of parameters</a:t>
             </a:r>
           </a:p>
         </p:txBody>
       </p:sp>
+      <p:sp>
+        <p:nvSpPr>
+          <p:cNvPr id="5" name="Text Placeholder 4"/>
+          <p:cNvSpPr>
+            <a:spLocks noGrp="1"/>
+          </p:cNvSpPr>
+          <p:nvPr>
+            <p:ph idx="3" sz="quarter" type="body"/>
+          </p:nvPr>
+        </p:nvSpPr>
+        <p:spPr/>
+        <p:txBody>
+          <a:bodyPr/>
+          <a:lstStyle/>
+          <a:p>
+            <a:pPr lvl="0" indent="0" marL="0">
+              <a:buNone/>
+            </a:pPr>
+            <a:r>
+              <a:rPr/>
+              <a:t>The following R code checks some common diagnostics for our logistic model:</a:t>
+            </a:r>
+          </a:p>
+        </p:txBody>
+      </p:sp>
+      <p:pic>
+        <p:nvPicPr>
+          <p:cNvPr descr="14_01_lecture_powerpoint_files/figure-pptx/diagnostic-summary-1.png" id="0" name="Picture 1"/>
+          <p:cNvPicPr>
+            <a:picLocks noGrp="1" noChangeAspect="1"/>
+          </p:cNvPicPr>
+          <p:nvPr/>
+        </p:nvPicPr>
+        <p:blipFill>
+          <a:blip r:embed="rId2"/>
+          <a:stretch>
+            <a:fillRect/>
+          </a:stretch>
+        </p:blipFill>
+        <p:spPr bwMode="auto">
+          <a:xfrm>
+            <a:off x="5130800" y="1295400"/>
+            <a:ext cx="3276600" cy="3276600"/>
+          </a:xfrm>
+          <a:prstGeom prst="rect">
+            <a:avLst/>
+          </a:prstGeom>
+          <a:noFill/>
+          <a:ln w="9525">
+            <a:noFill/>
+            <a:headEnd/>
+            <a:tailEnd/>
+          </a:ln>
+        </p:spPr>
+      </p:pic>
     </p:spTree>
   </p:cSld>
 </p:sld>
@@ -11220,7 +11291,7 @@
             </a:pPr>
             <a:r>
               <a:rPr/>
-              <a:t>When working with GLMs:</a:t>
+              <a:t>Generalized Linear Models (GLMs) provide a powerful and flexible framework for analyzing a wide range of data types in biology:</a:t>
             </a:r>
           </a:p>
           <a:p>
@@ -11228,8 +11299,12 @@
               <a:buAutoNum type="arabicPeriod"/>
             </a:pPr>
             <a:r>
-              <a:rPr/>
-              <a:t>Choose the appropriate distribution family based on your response variable</a:t>
+              <a:rPr b="1"/>
+              <a:t>Gaussian GLMs</a:t>
+            </a:r>
+            <a:r>
+              <a:rPr/>
+              <a:t> with identity link function equivalent to standard linear models and ANOVAs</a:t>
             </a:r>
           </a:p>
           <a:p>
@@ -11237,8 +11312,12 @@
               <a:buAutoNum type="arabicPeriod"/>
             </a:pPr>
             <a:r>
-              <a:rPr/>
-              <a:t>Verify model assumptions through diagnostic plots</a:t>
+              <a:rPr b="1"/>
+              <a:t>Poisson GLMs</a:t>
+            </a:r>
+            <a:r>
+              <a:rPr/>
+              <a:t> with log link function are appropriate for count data, but be cautious of overdispersion.</a:t>
             </a:r>
           </a:p>
           <a:p>
@@ -11246,8 +11325,12 @@
               <a:buAutoNum type="arabicPeriod"/>
             </a:pPr>
             <a:r>
-              <a:rPr/>
-              <a:t>Watch for overdispersion in count data</a:t>
+              <a:rPr b="1"/>
+              <a:t>Negative Binomial</a:t>
+            </a:r>
+            <a:r>
+              <a:rPr/>
+              <a:t> works with overdispersed data</a:t>
             </a:r>
           </a:p>
           <a:p>
@@ -11255,26 +11338,47 @@
               <a:buAutoNum type="arabicPeriod"/>
             </a:pPr>
             <a:r>
-              <a:rPr/>
-              <a:t>Use odds ratios to interpret logistic regression results</a:t>
-            </a:r>
-          </a:p>
-          <a:p>
-            <a:pPr lvl="0" indent="-342900" marL="342900">
-              <a:buAutoNum type="arabicPeriod"/>
-            </a:pPr>
-            <a:r>
-              <a:rPr/>
-              <a:t>Compare competing models using likelihood ratio tests and information criteria</a:t>
-            </a:r>
-          </a:p>
-          <a:p>
-            <a:pPr lvl="0" indent="0" marL="0">
-              <a:buNone/>
-            </a:pPr>
-            <a:r>
-              <a:rPr/>
-              <a:t>This framework allows biologists to appropriately model many types of data encountered in ecological, behavioral, and physiological research.</a:t>
+              <a:rPr b="1"/>
+              <a:t>Logistic GLMs</a:t>
+            </a:r>
+            <a:r>
+              <a:rPr/>
+              <a:t> with logit link function are useful for binary responses - probability of success or presence.</a:t>
+            </a:r>
+          </a:p>
+          <a:p>
+            <a:pPr lvl="0"/>
+            <a:r>
+              <a:rPr/>
+              <a:t>Key advantages of GLMs include:</a:t>
+            </a:r>
+          </a:p>
+          <a:p>
+            <a:pPr lvl="1"/>
+            <a:r>
+              <a:rPr/>
+              <a:t>Handle various response variables beyond normal distributions</a:t>
+            </a:r>
+          </a:p>
+          <a:p>
+            <a:pPr lvl="1"/>
+            <a:r>
+              <a:rPr/>
+              <a:t>Unified framework for linear modeling</a:t>
+            </a:r>
+          </a:p>
+          <a:p>
+            <a:pPr lvl="1"/>
+            <a:r>
+              <a:rPr/>
+              <a:t>Flexibility in specifying the link function to match the data structure</a:t>
+            </a:r>
+          </a:p>
+          <a:p>
+            <a:pPr lvl="1"/>
+            <a:r>
+              <a:rPr/>
+              <a:t>Interpretable parameters, though interpretation differs by model type</a:t>
             </a:r>
           </a:p>
         </p:txBody>
@@ -11326,7 +11430,7 @@
             </a:pPr>
             <a:r>
               <a:rPr/>
-              <a:t>References</a:t>
+              <a:t>Summary and Conclusions</a:t>
             </a:r>
           </a:p>
         </p:txBody>
@@ -11351,7 +11455,52 @@
             </a:pPr>
             <a:r>
               <a:rPr/>
-              <a:t>Agresti, A. (1996). An Introduction to Categorical Data Analysis. Wiley, New York.</a:t>
+              <a:t>When working with GLMs:</a:t>
+            </a:r>
+          </a:p>
+          <a:p>
+            <a:pPr lvl="0" indent="-342900" marL="342900">
+              <a:buAutoNum type="arabicPeriod"/>
+            </a:pPr>
+            <a:r>
+              <a:rPr/>
+              <a:t>Choose the appropriate distribution family based on your response variable</a:t>
+            </a:r>
+          </a:p>
+          <a:p>
+            <a:pPr lvl="0" indent="-342900" marL="342900">
+              <a:buAutoNum type="arabicPeriod"/>
+            </a:pPr>
+            <a:r>
+              <a:rPr/>
+              <a:t>Verify model assumptions through diagnostic plots</a:t>
+            </a:r>
+          </a:p>
+          <a:p>
+            <a:pPr lvl="0" indent="-342900" marL="342900">
+              <a:buAutoNum type="arabicPeriod"/>
+            </a:pPr>
+            <a:r>
+              <a:rPr/>
+              <a:t>Watch for overdispersion in count data</a:t>
+            </a:r>
+          </a:p>
+          <a:p>
+            <a:pPr lvl="0" indent="-342900" marL="342900">
+              <a:buAutoNum type="arabicPeriod"/>
+            </a:pPr>
+            <a:r>
+              <a:rPr/>
+              <a:t>Use odds ratios to interpret logistic regression results</a:t>
+            </a:r>
+          </a:p>
+          <a:p>
+            <a:pPr lvl="0" indent="-342900" marL="342900">
+              <a:buAutoNum type="arabicPeriod"/>
+            </a:pPr>
+            <a:r>
+              <a:rPr/>
+              <a:t>Compare competing models using likelihood ratio tests and information criteria</a:t>
             </a:r>
           </a:p>
           <a:p>
@@ -11360,43 +11509,7 @@
             </a:pPr>
             <a:r>
               <a:rPr/>
-              <a:t>Bolger, D. T., Alberts, A. C., Sauvajot, R. M., Potenza, P., McCalvin, C., Tran, D., Mazzoni, S., &amp; Soulé, M. E. (1997). Response of rodents to habitat fragmentation in coastal southern California. Ecological Applications, 7(2), 552-563.</a:t>
-            </a:r>
-          </a:p>
-          <a:p>
-            <a:pPr lvl="0" indent="0" marL="0">
-              <a:buNone/>
-            </a:pPr>
-            <a:r>
-              <a:rPr/>
-              <a:t>Christensen, R. (1997). Log-linear Models and Logistic Regression. Springer, New York.</a:t>
-            </a:r>
-          </a:p>
-          <a:p>
-            <a:pPr lvl="0" indent="0" marL="0">
-              <a:buNone/>
-            </a:pPr>
-            <a:r>
-              <a:rPr/>
-              <a:t>Hosmer, D. W., &amp; Lemeshow, S. (1989). Applied Logistic Regression. Wiley, New York.</a:t>
-            </a:r>
-          </a:p>
-          <a:p>
-            <a:pPr lvl="0" indent="0" marL="0">
-              <a:buNone/>
-            </a:pPr>
-            <a:r>
-              <a:rPr/>
-              <a:t>McCullagh, P., &amp; Nelder, J. A. (1989). Generalized Linear Models. Chapman and Hall, London.</a:t>
-            </a:r>
-          </a:p>
-          <a:p>
-            <a:pPr lvl="0" indent="0" marL="0">
-              <a:buNone/>
-            </a:pPr>
-            <a:r>
-              <a:rPr/>
-              <a:t>Polis, G. A., Hurd, S. D., Jackson, C. T., &amp; Piñero, F. S. (1998). Multifactor analysis of ecosystem patterns on islands in the Gulf of California. Ecological Monographs, 68, 490-502.</a:t>
+              <a:t>This framework allows biologists to appropriately model many types of data encountered in ecological, behavioral, and physiological research.</a:t>
             </a:r>
           </a:p>
         </p:txBody>
@@ -11619,6 +11732,128 @@
             <a:r>
               <a:rPr/>
               <a:t>Examples of distributions in the exponential family</a:t>
+            </a:r>
+          </a:p>
+        </p:txBody>
+      </p:sp>
+    </p:spTree>
+  </p:cSld>
+</p:sld>
+</file>
+
+<file path=ppt/slides/slide40.xml><?xml version="1.0" encoding="utf-8"?>
+<p:sld xmlns:a="http://schemas.openxmlformats.org/drawingml/2006/main" xmlns:r="http://schemas.openxmlformats.org/officeDocument/2006/relationships" xmlns:p="http://schemas.openxmlformats.org/presentationml/2006/main">
+  <p:cSld>
+    <p:spTree>
+      <p:nvGrpSpPr>
+        <p:cNvPr id="1" name=""/>
+        <p:cNvGrpSpPr/>
+        <p:nvPr/>
+      </p:nvGrpSpPr>
+      <p:grpSpPr>
+        <a:xfrm>
+          <a:off x="0" y="0"/>
+          <a:ext cx="0" cy="0"/>
+          <a:chOff x="0" y="0"/>
+          <a:chExt cx="0" cy="0"/>
+        </a:xfrm>
+      </p:grpSpPr>
+      <p:sp>
+        <p:nvSpPr>
+          <p:cNvPr id="2" name="Title 1"/>
+          <p:cNvSpPr>
+            <a:spLocks noGrp="1"/>
+          </p:cNvSpPr>
+          <p:nvPr>
+            <p:ph type="title"/>
+          </p:nvPr>
+        </p:nvSpPr>
+        <p:spPr>
+          <a:xfrm>
+            <a:off x="0" y="0"/>
+            <a:ext cx="9144000" cy="582780"/>
+          </a:xfrm>
+        </p:spPr>
+        <p:txBody>
+          <a:bodyPr/>
+          <a:lstStyle/>
+          <a:p>
+            <a:pPr lvl="0" indent="0" marL="0">
+              <a:buNone/>
+            </a:pPr>
+            <a:r>
+              <a:rPr/>
+              <a:t>References</a:t>
+            </a:r>
+          </a:p>
+        </p:txBody>
+      </p:sp>
+      <p:sp>
+        <p:nvSpPr>
+          <p:cNvPr id="3" name="Content Placeholder 2"/>
+          <p:cNvSpPr>
+            <a:spLocks noGrp="1"/>
+          </p:cNvSpPr>
+          <p:nvPr>
+            <p:ph idx="1"/>
+          </p:nvPr>
+        </p:nvSpPr>
+        <p:spPr/>
+        <p:txBody>
+          <a:bodyPr/>
+          <a:lstStyle/>
+          <a:p>
+            <a:pPr lvl="0" indent="0" marL="0">
+              <a:buNone/>
+            </a:pPr>
+            <a:r>
+              <a:rPr/>
+              <a:t>Agresti, A. (1996). An Introduction to Categorical Data Analysis. Wiley, New York.</a:t>
+            </a:r>
+          </a:p>
+          <a:p>
+            <a:pPr lvl="0" indent="0" marL="0">
+              <a:buNone/>
+            </a:pPr>
+            <a:r>
+              <a:rPr/>
+              <a:t>Bolger, D. T., Alberts, A. C., Sauvajot, R. M., Potenza, P., McCalvin, C., Tran, D., Mazzoni, S., &amp; Soulé, M. E. (1997). Response of rodents to habitat fragmentation in coastal southern California. Ecological Applications, 7(2), 552-563.</a:t>
+            </a:r>
+          </a:p>
+          <a:p>
+            <a:pPr lvl="0" indent="0" marL="0">
+              <a:buNone/>
+            </a:pPr>
+            <a:r>
+              <a:rPr/>
+              <a:t>Christensen, R. (1997). Log-linear Models and Logistic Regression. Springer, New York.</a:t>
+            </a:r>
+          </a:p>
+          <a:p>
+            <a:pPr lvl="0" indent="0" marL="0">
+              <a:buNone/>
+            </a:pPr>
+            <a:r>
+              <a:rPr/>
+              <a:t>Hosmer, D. W., &amp; Lemeshow, S. (1989). Applied Logistic Regression. Wiley, New York.</a:t>
+            </a:r>
+          </a:p>
+          <a:p>
+            <a:pPr lvl="0" indent="0" marL="0">
+              <a:buNone/>
+            </a:pPr>
+            <a:r>
+              <a:rPr/>
+              <a:t>McCullagh, P., &amp; Nelder, J. A. (1989). Generalized Linear Models. Chapman and Hall, London.</a:t>
+            </a:r>
+          </a:p>
+          <a:p>
+            <a:pPr lvl="0" indent="0" marL="0">
+              <a:buNone/>
+            </a:pPr>
+            <a:r>
+              <a:rPr/>
+              <a:t>Polis, G. A., Hurd, S. D., Jackson, C. T., &amp; Piñero, F. S. (1998). Multifactor analysis of ecosystem patterns on islands in the Gulf of California. Ecological Monographs, 68, 490-502.</a:t>
             </a:r>
           </a:p>
         </p:txBody>
@@ -13438,18 +13673,21 @@
             </a:r>
           </a:p>
           <a:p>
-            <a:pPr lvl="0" indent="0" marL="0">
-              <a:buNone/>
-            </a:pPr>
-            <a:r>
-              <a:rPr/>
-              <a:t>Let’s compare a standard linear model and a Gaussian GLM ### Island Biogeography Data</a:t>
-            </a:r>
-          </a:p>
-          <a:p>
-            <a:pPr lvl="0" indent="0" marL="0">
-              <a:buNone/>
-            </a:pPr>
+            <a:pPr lvl="0"/>
+            <a:r>
+              <a:rPr/>
+              <a:t>Let’s compare a standard linear model and a Gaussian GLM</a:t>
+            </a:r>
+          </a:p>
+          <a:p>
+            <a:pPr lvl="0"/>
+            <a:r>
+              <a:rPr/>
+              <a:t>Island Biogeography Data</a:t>
+            </a:r>
+          </a:p>
+          <a:p>
+            <a:pPr lvl="0"/>
             <a:r>
               <a:rPr/>
               <a:t>The </a:t>
@@ -13535,54 +13773,6 @@
             </a:r>
           </a:p>
           <a:p>
-            <a:pPr lvl="1"/>
-            <a:r>
-              <a:rPr>
-                <a:latin typeface="Courier"/>
-              </a:rPr>
-              <a:t>Nearest</a:t>
-            </a:r>
-            <a:r>
-              <a:rPr/>
-              <a:t>- Distance to nearest island (km)</a:t>
-            </a:r>
-          </a:p>
-          <a:p>
-            <a:pPr lvl="1"/>
-            <a:r>
-              <a:rPr>
-                <a:latin typeface="Courier"/>
-              </a:rPr>
-              <a:t>Scruz</a:t>
-            </a:r>
-            <a:r>
-              <a:rPr/>
-              <a:t> - Distance to Santa Cruz island (km)</a:t>
-            </a:r>
-          </a:p>
-          <a:p>
-            <a:pPr lvl="1"/>
-            <a:r>
-              <a:rPr>
-                <a:latin typeface="Courier"/>
-              </a:rPr>
-              <a:t>Adjacent</a:t>
-            </a:r>
-            <a:r>
-              <a:rPr/>
-              <a:t> - Area of adjacent island (km²)</a:t>
-            </a:r>
-          </a:p>
-          <a:p>
-            <a:pPr lvl="0" indent="0" marL="0">
-              <a:buNone/>
-            </a:pPr>
-            <a:r>
-              <a:rPr/>
-              <a:t>We’ll use this dataset throughout to demonstrate different GLM types with biologically meaningful examples.</a:t>
-            </a:r>
-          </a:p>
-          <a:p>
             <a:pPr lvl="0" indent="0">
               <a:buNone/>
             </a:pPr>
@@ -13590,17 +13780,10 @@
               <a:rPr>
                 <a:latin typeface="Courier"/>
               </a:rPr>
-              <a:t>##              Species Endemics  Area Elevation Nearest size_category
-## Baltra            58       23 25.09       346     0.6        Medium
-## Bartolome         31       21  1.24       109     0.6        Medium
-## Caldwell           3        3  0.21       114     2.8         Small
-## Champion          25        9  0.10        46     1.9         Small
-## Coamano            2        1  0.05        77     1.9         Small
-## Daphne.Major      18       11  0.34       119     8.0         Small
-## Daphne.Minor      24        0  0.08        93     6.0         Small
-## Darwin            10        7  2.33       168    34.1        Medium
-## Eden               8        4  0.03        71     0.4         Small
-## Enderby            2        2  0.18       112     2.6         Small</a:t>
+              <a:t>##           Species Endemics  Area Elevation Nearest size_category
+## Baltra         58       23 25.09       346     0.6        Medium
+## Bartolome      31       21  1.24       109     0.6        Medium
+## Caldwell        3        3  0.21       114     2.8         Small</a:t>
             </a:r>
           </a:p>
         </p:txBody>
@@ -14486,14 +14669,7 @@
                 <a:pPr lvl="0"/>
                 <a:r>
                   <a:rPr/>
-                  <a:t>Fit a standard linear model</a:t>
-                </a:r>
-              </a:p>
-              <a:p>
-                <a:pPr lvl="1"/>
-                <a:r>
-                  <a:rPr/>
-                  <a:t>model_lm &lt;- lm(Endemics ~ size_category,</a:t>
+                  <a:t>Fit a standard linear model - model_lm &lt;- lm(Endemics ~ size_category,</a:t>
                 </a:r>
                 <a:br/>
                 <a:r>
@@ -14512,23 +14688,13 @@
                 <a:pPr lvl="1"/>
                 <a:r>
                   <a:rPr/>
-                  <a:t>model_gaussian &lt;- glm(Endemics ~ size_category,</a:t>
+                  <a:t>model_gaussian &lt;- glm(Endemics ~ size_category, data = gala,</a:t>
                 </a:r>
                 <a:br/>
                 <a:r>
                   <a:rPr/>
-                  <a:t>data = gala,</a:t>
+                  <a:t>family = gaussian(link = “identity”)) </a:t>
                 </a:r>
-                <a:br/>
-                <a:r>
-                  <a:rPr/>
-                  <a:t>family = gaussian(link = “identity”))</a:t>
-                </a:r>
-              </a:p>
-              <a:p>
-                <a:pPr lvl="0" indent="0" marL="0">
-                  <a:buNone/>
-                </a:pPr>
                 <a:r>
                   <a:rPr b="1"/>
                   <a:t>Residual Standard Error</a:t>
@@ -14549,15 +14715,40 @@
                   <a:t>)</a:t>
                 </a:r>
               </a:p>
-              <a:p>
-                <a:pPr lvl="0" indent="0">
-                  <a:buNone/>
-                </a:pPr>
-                <a:r>
-                  <a:rPr>
-                    <a:latin typeface="Courier"/>
-                  </a:rPr>
-                  <a:t>## 
+            </p:txBody>
+          </p:sp>
+        </mc:Choice>
+      </mc:AlternateContent>
+      <p:sp>
+        <p:nvSpPr>
+          <p:cNvPr id="4" name="Content Placeholder 3"/>
+          <p:cNvSpPr>
+            <a:spLocks noGrp="1"/>
+          </p:cNvSpPr>
+          <p:nvPr>
+            <p:ph idx="2" sz="half"/>
+          </p:nvPr>
+        </p:nvSpPr>
+        <p:spPr/>
+        <p:txBody>
+          <a:bodyPr/>
+          <a:lstStyle/>
+          <a:p>
+            <a:pPr lvl="0"/>
+            <a:r>
+              <a:rPr/>
+              <a:t>Let’s look at the summary of our Gaussian GLM:</a:t>
+            </a:r>
+          </a:p>
+          <a:p>
+            <a:pPr lvl="0" indent="0">
+              <a:buNone/>
+            </a:pPr>
+            <a:r>
+              <a:rPr>
+                <a:latin typeface="Courier"/>
+              </a:rPr>
+              <a:t>## 
 ## Call:
 ## lm(formula = Endemics ~ size_category, data = gala)
 ## 
@@ -14576,175 +14767,10 @@
 ## Residual standard error: 14.6 on 27 degrees of freedom
 ## Multiple R-squared:  0.7343, Adjusted R-squared:  0.7146 
 ## F-statistic: 37.31 on 2 and 27 DF,  p-value: 1.697e-08</a:t>
-                </a:r>
-              </a:p>
-            </p:txBody>
-          </p:sp>
-        </mc:Choice>
-      </mc:AlternateContent>
-      <mc:AlternateContent xmlns:mc="http://schemas.openxmlformats.org/markup-compatibility/2006">
-        <mc:Choice xmlns:a14="http://schemas.microsoft.com/office/drawing/2010/main" Requires="a14">
-          <p:sp>
-            <p:nvSpPr>
-              <p:cNvPr id="4" name="Content Placeholder 3"/>
-              <p:cNvSpPr>
-                <a:spLocks noGrp="1"/>
-              </p:cNvSpPr>
-              <p:nvPr>
-                <p:ph idx="2" sz="half"/>
-              </p:nvPr>
-            </p:nvSpPr>
-            <p:spPr/>
-            <p:txBody>
-              <a:bodyPr/>
-              <a:lstStyle/>
-              <a:p>
-                <a:pPr lvl="0"/>
-                <a:r>
-                  <a:rPr/>
-                  <a:t>Let’s look at the summary of our Gaussian GLM:</a:t>
-                </a:r>
-              </a:p>
-              <a:p>
-                <a:pPr lvl="1"/>
-                <a:r>
-                  <a:rPr/>
-                  <a:t>Dispersion parameter</a:t>
-                </a:r>
-              </a:p>
-              <a:p>
-                <a:pPr lvl="2"/>
-                <a:r>
-                  <a:rPr b="1"/>
-                  <a:t>variance of the residuals</a:t>
-                </a:r>
-                <a:r>
-                  <a:rPr/>
-                  <a:t> (</a:t>
-                </a:r>
-                <a14:m>
-                  <m:oMath xmlns:m="http://schemas.openxmlformats.org/officeDocument/2006/math">
-                    <m:sSup>
-                      <m:e>
-                        <m:r>
-                          <m:t>σ</m:t>
-                        </m:r>
-                      </m:e>
-                      <m:sup>
-                        <m:r>
-                          <m:t>2</m:t>
-                        </m:r>
-                      </m:sup>
-                    </m:sSup>
-                  </m:oMath>
-                </a14:m>
-                <a:r>
-                  <a:rPr/>
-                  <a:t>)</a:t>
-                </a:r>
-              </a:p>
-              <a:p>
-                <a:pPr lvl="1"/>
-                <a:r>
-                  <a:rPr/>
-                  <a:t>Null deviance</a:t>
-                </a:r>
-              </a:p>
-              <a:p>
-                <a:pPr lvl="2"/>
-                <a:r>
-                  <a:rPr/>
-                  <a:t>This is the error (deviance) of the “Null” or “Intercept-Only” model</a:t>
-                </a:r>
-              </a:p>
-              <a:p>
-                <a:pPr lvl="2"/>
-                <a:r>
-                  <a:rPr/>
-                  <a:t>how much error you have when you try to predict the number of endemics using </a:t>
-                </a:r>
-                <a:r>
-                  <a:rPr i="1"/>
-                  <a:t>only</a:t>
-                </a:r>
-                <a:r>
-                  <a:rPr/>
-                  <a:t> the overall average, without any predictors. It’s your baseline, or the total amount of variation in the data to be explained</a:t>
-                </a:r>
-              </a:p>
-              <a:p>
-                <a:pPr lvl="1"/>
-                <a:r>
-                  <a:rPr/>
-                  <a:t>Residual deviance</a:t>
-                </a:r>
-              </a:p>
-              <a:p>
-                <a:pPr lvl="2"/>
-                <a:r>
-                  <a:rPr/>
-                  <a:t>conceptually the same as the “Model Sum of Squares” in an ANOVA</a:t>
-                </a:r>
-              </a:p>
-              <a:p>
-                <a:pPr lvl="2"/>
-                <a:r>
-                  <a:rPr/>
-                  <a:t>Null Deviance tells you your </a:t>
-                </a:r>
-                <a:r>
-                  <a:rPr>
-                    <a:latin typeface="Courier"/>
-                  </a:rPr>
-                  <a:t>size_category</a:t>
-                </a:r>
-                <a:r>
-                  <a:rPr/>
-                  <a:t> predictor is </a:t>
-                </a:r>
-                <a:r>
-                  <a:rPr i="1"/>
-                  <a:t>very</a:t>
-                </a:r>
-                <a:r>
-                  <a:rPr/>
-                  <a:t> useful for explaining the number of endemics.</a:t>
-                </a:r>
-              </a:p>
-              <a:p>
-                <a:pPr lvl="0" indent="0">
-                  <a:buNone/>
-                </a:pPr>
-                <a:r>
-                  <a:rPr>
-                    <a:latin typeface="Courier"/>
-                  </a:rPr>
-                  <a:t>## 
-## Call:
-## glm(formula = Endemics ~ size_category, family = gaussian(link = "identity"), 
-##     data = gala)
-## 
-## Coefficients:
-##                     Estimate Std. Error t value Pr(&gt;|t|)    
-## (Intercept)            5.636      4.402    1.28   0.2113    
-## size_categoryMedium   16.030      6.095    2.63   0.0139 *  
-## size_categoryLarge    60.221      7.059    8.53 3.82e-09 ***
-## ---
-## Signif. codes:  0 '***' 0.001 '**' 0.01 '*' 0.05 '.' 0.1 ' ' 1
-## 
-## (Dispersion parameter for gaussian family taken to be 213.1878)
-## 
-##     Null deviance: 21662.7  on 29  degrees of freedom
-## Residual deviance:  5756.1  on 27  degrees of freedom
-## AIC: 250.84
-## 
-## Number of Fisher Scoring iterations: 2</a:t>
-                </a:r>
-              </a:p>
-            </p:txBody>
-          </p:sp>
-        </mc:Choice>
-      </mc:AlternateContent>
+            </a:r>
+          </a:p>
+        </p:txBody>
+      </p:sp>
     </p:spTree>
   </p:cSld>
 </p:sld>

--- a/docs/ecostats_lectures/lecture_14/14_01_lecture_powerpoint.pptx
+++ b/docs/ecostats_lectures/lecture_14/14_01_lecture_powerpoint.pptx
@@ -45,6 +45,7 @@
     <p:sldId id="293" r:id="rId39"/>
     <p:sldId id="294" r:id="rId40"/>
     <p:sldId id="295" r:id="rId41"/>
+    <p:sldId id="296" r:id="rId42"/>
   </p:sldIdLst>
   <p:sldSz cx="9144000" cy="5143500" type="screen16x9"/>
   <p:notesSz cx="6858000" cy="9144000"/>
@@ -3734,16 +3735,6 @@
                   <a:rPr b="1"/>
                   <a:t>“Pearson residuals” are essentially the same as the regular residuals</a:t>
                 </a:r>
-                <a:r>
-                  <a:rPr/>
-                  <a:t> (observed - predicted) that you get from a standard </a:t>
-                </a:r>
-                <a:r>
-                  <a:rPr>
-                    <a:latin typeface="Courier"/>
-                  </a:rPr>
-                  <a:t>lm()</a:t>
-                </a:r>
               </a:p>
               <a:p>
                 <a:pPr lvl="0" indent="0">
@@ -3751,374 +3742,27 @@
                 </a:pPr>
                 <a:r>
                   <a:rPr>
-                    <a:solidFill>
-                      <a:srgbClr val="4758AB"/>
-                    </a:solidFill>
                     <a:latin typeface="Courier"/>
                   </a:rPr>
-                  <a:t>Anova</a:t>
-                </a:r>
-                <a:r>
-                  <a:rPr>
-                    <a:solidFill>
-                      <a:srgbClr val="003B4F"/>
-                    </a:solidFill>
-                    <a:latin typeface="Courier"/>
-                  </a:rPr>
-                  <a:t>(model_lm, </a:t>
-                </a:r>
-                <a:r>
-                  <a:rPr>
-                    <a:solidFill>
-                      <a:srgbClr val="657422"/>
-                    </a:solidFill>
-                    <a:latin typeface="Courier"/>
-                  </a:rPr>
-                  <a:t>type =</a:t>
-                </a:r>
-                <a:r>
-                  <a:rPr>
-                    <a:solidFill>
-                      <a:srgbClr val="003B4F"/>
-                    </a:solidFill>
-                    <a:latin typeface="Courier"/>
-                  </a:rPr>
-                  <a:t> </a:t>
-                </a:r>
-                <a:r>
-                  <a:rPr>
-                    <a:solidFill>
-                      <a:srgbClr val="20794D"/>
-                    </a:solidFill>
-                    <a:latin typeface="Courier"/>
-                  </a:rPr>
-                  <a:t>"III"</a:t>
-                </a:r>
-                <a:r>
-                  <a:rPr>
-                    <a:solidFill>
-                      <a:srgbClr val="003B4F"/>
-                    </a:solidFill>
-                    <a:latin typeface="Courier"/>
-                  </a:rPr>
-                  <a:t>, </a:t>
-                </a:r>
-                <a:r>
-                  <a:rPr>
-                    <a:solidFill>
-                      <a:srgbClr val="657422"/>
-                    </a:solidFill>
-                    <a:latin typeface="Courier"/>
-                  </a:rPr>
-                  <a:t>test =</a:t>
-                </a:r>
-                <a:r>
-                  <a:rPr>
-                    <a:solidFill>
-                      <a:srgbClr val="003B4F"/>
-                    </a:solidFill>
-                    <a:latin typeface="Courier"/>
-                  </a:rPr>
-                  <a:t> </a:t>
-                </a:r>
-                <a:r>
-                  <a:rPr>
-                    <a:solidFill>
-                      <a:srgbClr val="20794D"/>
-                    </a:solidFill>
-                    <a:latin typeface="Courier"/>
-                  </a:rPr>
-                  <a:t>"F"</a:t>
-                </a:r>
-                <a:r>
-                  <a:rPr>
-                    <a:solidFill>
-                      <a:srgbClr val="003B4F"/>
-                    </a:solidFill>
-                    <a:latin typeface="Courier"/>
-                  </a:rPr>
-                  <a:t>)</a:t>
-                </a:r>
-                <a:br/>
-                <a:r>
-                  <a:rPr i="1">
-                    <a:solidFill>
-                      <a:srgbClr val="5E5E5E"/>
-                    </a:solidFill>
-                    <a:latin typeface="Courier"/>
-                  </a:rPr>
-                  <a:t>## Anova Table (Type III tests)</a:t>
-                </a:r>
-                <a:br/>
-                <a:r>
-                  <a:rPr i="1">
-                    <a:solidFill>
-                      <a:srgbClr val="5E5E5E"/>
-                    </a:solidFill>
-                    <a:latin typeface="Courier"/>
-                  </a:rPr>
-                  <a:t>## </a:t>
-                </a:r>
-                <a:br/>
-                <a:r>
-                  <a:rPr i="1">
-                    <a:solidFill>
-                      <a:srgbClr val="5E5E5E"/>
-                    </a:solidFill>
-                    <a:latin typeface="Courier"/>
-                  </a:rPr>
-                  <a:t>## Response: Endemics</a:t>
-                </a:r>
-                <a:br/>
-                <a:r>
-                  <a:rPr i="1">
-                    <a:solidFill>
-                      <a:srgbClr val="5E5E5E"/>
-                    </a:solidFill>
-                    <a:latin typeface="Courier"/>
-                  </a:rPr>
-                  <a:t>##                Sum Sq Df F value    Pr(&gt;F)    </a:t>
-                </a:r>
-                <a:br/>
-                <a:r>
-                  <a:rPr i="1">
-                    <a:solidFill>
-                      <a:srgbClr val="5E5E5E"/>
-                    </a:solidFill>
-                    <a:latin typeface="Courier"/>
-                  </a:rPr>
-                  <a:t>## (Intercept)     349.5  1  1.6392    0.2113    </a:t>
-                </a:r>
-                <a:br/>
-                <a:r>
-                  <a:rPr i="1">
-                    <a:solidFill>
-                      <a:srgbClr val="5E5E5E"/>
-                    </a:solidFill>
-                    <a:latin typeface="Courier"/>
-                  </a:rPr>
-                  <a:t>## size_category 15906.6  2 37.3066 1.697e-08 ***</a:t>
-                </a:r>
-                <a:br/>
-                <a:r>
-                  <a:rPr i="1">
-                    <a:solidFill>
-                      <a:srgbClr val="5E5E5E"/>
-                    </a:solidFill>
-                    <a:latin typeface="Courier"/>
-                  </a:rPr>
-                  <a:t>## Residuals      5756.1 27                      </a:t>
-                </a:r>
-                <a:br/>
-                <a:r>
-                  <a:rPr i="1">
-                    <a:solidFill>
-                      <a:srgbClr val="5E5E5E"/>
-                    </a:solidFill>
-                    <a:latin typeface="Courier"/>
-                  </a:rPr>
-                  <a:t>## ---</a:t>
-                </a:r>
-                <a:br/>
-                <a:r>
-                  <a:rPr i="1">
-                    <a:solidFill>
-                      <a:srgbClr val="5E5E5E"/>
-                    </a:solidFill>
-                    <a:latin typeface="Courier"/>
-                  </a:rPr>
-                  <a:t>## Signif. codes:  0 '***' 0.001 '**' 0.01 '*' 0.05 '.' 0.1 ' ' 1</a:t>
-                </a:r>
-                <a:br/>
-                <a:r>
-                  <a:rPr>
-                    <a:solidFill>
-                      <a:srgbClr val="4758AB"/>
-                    </a:solidFill>
-                    <a:latin typeface="Courier"/>
-                  </a:rPr>
-                  <a:t>Anova</a:t>
-                </a:r>
-                <a:r>
-                  <a:rPr>
-                    <a:solidFill>
-                      <a:srgbClr val="003B4F"/>
-                    </a:solidFill>
-                    <a:latin typeface="Courier"/>
-                  </a:rPr>
-                  <a:t>(model_gaussian, </a:t>
-                </a:r>
-                <a:r>
-                  <a:rPr>
-                    <a:solidFill>
-                      <a:srgbClr val="657422"/>
-                    </a:solidFill>
-                    <a:latin typeface="Courier"/>
-                  </a:rPr>
-                  <a:t>type =</a:t>
-                </a:r>
-                <a:r>
-                  <a:rPr>
-                    <a:solidFill>
-                      <a:srgbClr val="003B4F"/>
-                    </a:solidFill>
-                    <a:latin typeface="Courier"/>
-                  </a:rPr>
-                  <a:t> </a:t>
-                </a:r>
-                <a:r>
-                  <a:rPr>
-                    <a:solidFill>
-                      <a:srgbClr val="20794D"/>
-                    </a:solidFill>
-                    <a:latin typeface="Courier"/>
-                  </a:rPr>
-                  <a:t>"III"</a:t>
-                </a:r>
-                <a:r>
-                  <a:rPr>
-                    <a:solidFill>
-                      <a:srgbClr val="003B4F"/>
-                    </a:solidFill>
-                    <a:latin typeface="Courier"/>
-                  </a:rPr>
-                  <a:t>, </a:t>
-                </a:r>
-                <a:r>
-                  <a:rPr>
-                    <a:solidFill>
-                      <a:srgbClr val="657422"/>
-                    </a:solidFill>
-                    <a:latin typeface="Courier"/>
-                  </a:rPr>
-                  <a:t>test =</a:t>
-                </a:r>
-                <a:r>
-                  <a:rPr>
-                    <a:solidFill>
-                      <a:srgbClr val="003B4F"/>
-                    </a:solidFill>
-                    <a:latin typeface="Courier"/>
-                  </a:rPr>
-                  <a:t> </a:t>
-                </a:r>
-                <a:r>
-                  <a:rPr>
-                    <a:solidFill>
-                      <a:srgbClr val="20794D"/>
-                    </a:solidFill>
-                    <a:latin typeface="Courier"/>
-                  </a:rPr>
-                  <a:t>"F"</a:t>
-                </a:r>
-                <a:r>
-                  <a:rPr>
-                    <a:solidFill>
-                      <a:srgbClr val="003B4F"/>
-                    </a:solidFill>
-                    <a:latin typeface="Courier"/>
-                  </a:rPr>
-                  <a:t>)</a:t>
-                </a:r>
-                <a:br/>
-                <a:r>
-                  <a:rPr i="1">
-                    <a:solidFill>
-                      <a:srgbClr val="5E5E5E"/>
-                    </a:solidFill>
-                    <a:latin typeface="Courier"/>
-                  </a:rPr>
-                  <a:t>## Analysis of Deviance Table (Type III tests)</a:t>
-                </a:r>
-                <a:br/>
-                <a:r>
-                  <a:rPr i="1">
-                    <a:solidFill>
-                      <a:srgbClr val="5E5E5E"/>
-                    </a:solidFill>
-                    <a:latin typeface="Courier"/>
-                  </a:rPr>
-                  <a:t>## </a:t>
-                </a:r>
-                <a:br/>
-                <a:r>
-                  <a:rPr i="1">
-                    <a:solidFill>
-                      <a:srgbClr val="5E5E5E"/>
-                    </a:solidFill>
-                    <a:latin typeface="Courier"/>
-                  </a:rPr>
-                  <a:t>## Response: Endemics</a:t>
-                </a:r>
-                <a:br/>
-                <a:r>
-                  <a:rPr i="1">
-                    <a:solidFill>
-                      <a:srgbClr val="5E5E5E"/>
-                    </a:solidFill>
-                    <a:latin typeface="Courier"/>
-                  </a:rPr>
-                  <a:t>## Error estimate based on Pearson residuals </a:t>
-                </a:r>
-                <a:br/>
-                <a:r>
-                  <a:rPr i="1">
-                    <a:solidFill>
-                      <a:srgbClr val="5E5E5E"/>
-                    </a:solidFill>
-                    <a:latin typeface="Courier"/>
-                  </a:rPr>
-                  <a:t>## </a:t>
-                </a:r>
-                <a:br/>
-                <a:r>
-                  <a:rPr i="1">
-                    <a:solidFill>
-                      <a:srgbClr val="5E5E5E"/>
-                    </a:solidFill>
-                    <a:latin typeface="Courier"/>
-                  </a:rPr>
-                  <a:t>##                Sum Sq Df F values    Pr(&gt;F)    </a:t>
-                </a:r>
-                <a:br/>
-                <a:r>
-                  <a:rPr i="1">
-                    <a:solidFill>
-                      <a:srgbClr val="5E5E5E"/>
-                    </a:solidFill>
-                    <a:latin typeface="Courier"/>
-                  </a:rPr>
-                  <a:t>## size_category 15906.6  2   37.307 1.697e-08 ***</a:t>
-                </a:r>
-                <a:br/>
-                <a:r>
-                  <a:rPr i="1">
-                    <a:solidFill>
-                      <a:srgbClr val="5E5E5E"/>
-                    </a:solidFill>
-                    <a:latin typeface="Courier"/>
-                  </a:rPr>
-                  <a:t>## Residuals      5756.1 27                       </a:t>
-                </a:r>
-                <a:br/>
-                <a:r>
-                  <a:rPr i="1">
-                    <a:solidFill>
-                      <a:srgbClr val="5E5E5E"/>
-                    </a:solidFill>
-                    <a:latin typeface="Courier"/>
-                  </a:rPr>
-                  <a:t>## ---</a:t>
-                </a:r>
-                <a:br/>
-                <a:r>
-                  <a:rPr i="1">
-                    <a:solidFill>
-                      <a:srgbClr val="5E5E5E"/>
-                    </a:solidFill>
-                    <a:latin typeface="Courier"/>
-                  </a:rPr>
-                  <a:t>## Signif. codes:  0 '***' 0.001 '**' 0.01 '*' 0.05 '.' 0.1 ' ' 1</a:t>
+                  <a:t>## Anova Table (Type III tests)
+## 
+## Response: Endemics
+##                Sum Sq Df F value    Pr(&gt;F)    
+## (Intercept)     349.5  1  1.6392    0.2113    
+## size_category 15906.6  2 37.3066 1.697e-08 ***
+## Residuals      5756.1 27                      
+## ---
+## Signif. codes:  0 '***' 0.001 '**' 0.01 '*' 0.05 '.' 0.1 ' ' 1
+## Analysis of Deviance Table (Type III tests)
+## 
+## Response: Endemics
+## Error estimate based on Pearson residuals 
+## 
+##                Sum Sq Df F values    Pr(&gt;F)    
+## size_category 15906.6  2   37.307 1.697e-08 ***
+## Residuals      5756.1 27                       
+## ---
+## Signif. codes:  0 '***' 0.001 '**' 0.01 '*' 0.05 '.' 0.1 ' ' 1</a:t>
                 </a:r>
               </a:p>
             </p:txBody>
@@ -4338,6 +3982,167 @@
         <p:spPr>
           <a:xfrm>
             <a:off x="0" y="0"/>
+            <a:ext cx="9144000" cy="582780"/>
+          </a:xfrm>
+        </p:spPr>
+        <p:txBody>
+          <a:bodyPr/>
+          <a:lstStyle/>
+          <a:p>
+            <a:pPr lvl="0" indent="0" marL="0">
+              <a:buNone/>
+            </a:pPr>
+            <a:r>
+              <a:rPr/>
+              <a:t>GLM with Poisson Distribution: Setup</a:t>
+            </a:r>
+          </a:p>
+        </p:txBody>
+      </p:sp>
+      <p:sp>
+        <p:nvSpPr>
+          <p:cNvPr id="3" name="Content Placeholder 2"/>
+          <p:cNvSpPr>
+            <a:spLocks noGrp="1"/>
+          </p:cNvSpPr>
+          <p:nvPr>
+            <p:ph idx="1"/>
+          </p:nvPr>
+        </p:nvSpPr>
+        <p:spPr/>
+        <p:txBody>
+          <a:bodyPr/>
+          <a:lstStyle/>
+          <a:p>
+            <a:pPr lvl="0"/>
+            <a:r>
+              <a:rPr b="1"/>
+              <a:t>Poisson GLMs</a:t>
+            </a:r>
+            <a:r>
+              <a:rPr/>
+              <a:t> Poisson model used when response variable is </a:t>
+            </a:r>
+            <a:r>
+              <a:rPr b="1"/>
+              <a:t>count data</a:t>
+            </a:r>
+            <a:r>
+              <a:rPr/>
+              <a:t>:</a:t>
+            </a:r>
+          </a:p>
+          <a:p>
+            <a:pPr lvl="1"/>
+            <a:r>
+              <a:rPr/>
+              <a:t>Number of species on an island</a:t>
+            </a:r>
+          </a:p>
+          <a:p>
+            <a:pPr lvl="1"/>
+            <a:r>
+              <a:rPr/>
+              <a:t>Number of parasites in a host</a:t>
+            </a:r>
+          </a:p>
+          <a:p>
+            <a:pPr lvl="1"/>
+            <a:r>
+              <a:rPr/>
+              <a:t>Number of bird nests in a plot</a:t>
+            </a:r>
+          </a:p>
+          <a:p>
+            <a:pPr lvl="1"/>
+            <a:r>
+              <a:rPr/>
+              <a:t>Number of seeds produced by a plant</a:t>
+            </a:r>
+          </a:p>
+          <a:p>
+            <a:pPr lvl="0"/>
+            <a:r>
+              <a:rPr/>
+              <a:t>The Poisson distribution assumes:</a:t>
+            </a:r>
+          </a:p>
+          <a:p>
+            <a:pPr lvl="1"/>
+            <a:r>
+              <a:rPr/>
+              <a:t>Counts are non-negative integers (0, 1, 2, 3, …)</a:t>
+            </a:r>
+          </a:p>
+          <a:p>
+            <a:pPr lvl="1"/>
+            <a:r>
+              <a:rPr/>
+              <a:t>The mean equals the variance</a:t>
+            </a:r>
+          </a:p>
+          <a:p>
+            <a:pPr lvl="1"/>
+            <a:r>
+              <a:rPr/>
+              <a:t>Events occur independently</a:t>
+            </a:r>
+          </a:p>
+          <a:p>
+            <a:pPr lvl="0"/>
+            <a:r>
+              <a:rPr b="1"/>
+              <a:t>Key consideration:</a:t>
+            </a:r>
+            <a:r>
+              <a:rPr/>
+              <a:t> If variance &gt; mean (overdispersion), consider negative binomial regression instead.</a:t>
+            </a:r>
+          </a:p>
+          <a:p>
+            <a:pPr lvl="0"/>
+            <a:r>
+              <a:rPr/>
+              <a:t>Now let’s fit a Poisson GLM to model the relationship between the rounded quarter-mile time and the number of cylinders:</a:t>
+            </a:r>
+          </a:p>
+        </p:txBody>
+      </p:sp>
+    </p:spTree>
+  </p:cSld>
+</p:sld>
+</file>
+
+<file path=ppt/slides/slide14.xml><?xml version="1.0" encoding="utf-8"?>
+<p:sld xmlns:a="http://schemas.openxmlformats.org/drawingml/2006/main" xmlns:r="http://schemas.openxmlformats.org/officeDocument/2006/relationships" xmlns:p="http://schemas.openxmlformats.org/presentationml/2006/main">
+  <p:cSld>
+    <p:spTree>
+      <p:nvGrpSpPr>
+        <p:cNvPr id="1" name=""/>
+        <p:cNvGrpSpPr/>
+        <p:nvPr/>
+      </p:nvGrpSpPr>
+      <p:grpSpPr>
+        <a:xfrm>
+          <a:off x="0" y="0"/>
+          <a:ext cx="0" cy="0"/>
+          <a:chOff x="0" y="0"/>
+          <a:chExt cx="0" cy="0"/>
+        </a:xfrm>
+      </p:grpSpPr>
+      <p:sp>
+        <p:nvSpPr>
+          <p:cNvPr id="2" name="Title 1"/>
+          <p:cNvSpPr>
+            <a:spLocks noGrp="1"/>
+          </p:cNvSpPr>
+          <p:nvPr>
+            <p:ph type="title"/>
+          </p:nvPr>
+        </p:nvSpPr>
+        <p:spPr>
+          <a:xfrm>
+            <a:off x="0" y="0"/>
             <a:ext cx="9144000" cy="602780"/>
           </a:xfrm>
           <a:solidFill>
@@ -4353,127 +4158,6 @@
             </a:pPr>
             <a:r>
               <a:rPr/>
-              <a:t>GLM with Poisson Distribution: Setup</a:t>
-            </a:r>
-          </a:p>
-        </p:txBody>
-      </p:sp>
-      <p:sp>
-        <p:nvSpPr>
-          <p:cNvPr id="3" name="Content Placeholder 2"/>
-          <p:cNvSpPr>
-            <a:spLocks noGrp="1"/>
-          </p:cNvSpPr>
-          <p:nvPr>
-            <p:ph idx="1" sz="half"/>
-          </p:nvPr>
-        </p:nvSpPr>
-        <p:spPr/>
-        <p:txBody>
-          <a:bodyPr/>
-          <a:lstStyle/>
-          <a:p>
-            <a:pPr lvl="0"/>
-            <a:r>
-              <a:rPr b="1"/>
-              <a:t>Poisson GLMs</a:t>
-            </a:r>
-            <a:r>
-              <a:rPr/>
-              <a:t> Poisson model used when response variable is </a:t>
-            </a:r>
-            <a:r>
-              <a:rPr b="1"/>
-              <a:t>count data</a:t>
-            </a:r>
-            <a:r>
-              <a:rPr/>
-              <a:t>:</a:t>
-            </a:r>
-          </a:p>
-          <a:p>
-            <a:pPr lvl="1"/>
-            <a:r>
-              <a:rPr/>
-              <a:t>Number of species on an island</a:t>
-            </a:r>
-          </a:p>
-          <a:p>
-            <a:pPr lvl="1"/>
-            <a:r>
-              <a:rPr/>
-              <a:t>Number of parasites in a host</a:t>
-            </a:r>
-          </a:p>
-          <a:p>
-            <a:pPr lvl="1"/>
-            <a:r>
-              <a:rPr/>
-              <a:t>Number of bird nests in a plot</a:t>
-            </a:r>
-          </a:p>
-          <a:p>
-            <a:pPr lvl="1"/>
-            <a:r>
-              <a:rPr/>
-              <a:t>Number of seeds produced by a plant</a:t>
-            </a:r>
-          </a:p>
-          <a:p>
-            <a:pPr lvl="0"/>
-            <a:r>
-              <a:rPr/>
-              <a:t>The Poisson distribution assumes:</a:t>
-            </a:r>
-          </a:p>
-          <a:p>
-            <a:pPr lvl="1"/>
-            <a:r>
-              <a:rPr/>
-              <a:t>Counts are non-negative integers (0, 1, 2, 3, …)</a:t>
-            </a:r>
-          </a:p>
-          <a:p>
-            <a:pPr lvl="1"/>
-            <a:r>
-              <a:rPr/>
-              <a:t>The mean equals the variance</a:t>
-            </a:r>
-          </a:p>
-          <a:p>
-            <a:pPr lvl="1"/>
-            <a:r>
-              <a:rPr/>
-              <a:t>Events occur independently</a:t>
-            </a:r>
-          </a:p>
-          <a:p>
-            <a:pPr lvl="0"/>
-            <a:r>
-              <a:rPr b="1"/>
-              <a:t>Key consideration:</a:t>
-            </a:r>
-            <a:r>
-              <a:rPr/>
-              <a:t> If variance &gt; mean (overdispersion), consider negative binomial regression instead.</a:t>
-            </a:r>
-          </a:p>
-          <a:p>
-            <a:pPr lvl="0"/>
-            <a:r>
-              <a:rPr/>
-              <a:t>Now let’s fit a Poisson GLM to model the relationship between the rounded quarter-mile time and the number of cylinders:</a:t>
-            </a:r>
-          </a:p>
-          <a:p>
-            <a:pPr lvl="0" indent="0" marL="0">
-              <a:spcBef>
-                <a:spcPts val="3000"/>
-              </a:spcBef>
-              <a:buNone/>
-            </a:pPr>
-            <a:r>
-              <a:rPr b="1"/>
               <a:t>Fit Poisson GLM with size_category as predictor</a:t>
             </a:r>
           </a:p>
@@ -4483,12 +4167,12 @@
         <mc:Choice xmlns:a14="http://schemas.microsoft.com/office/drawing/2010/main" Requires="a14">
           <p:sp>
             <p:nvSpPr>
-              <p:cNvPr id="4" name="Content Placeholder 3"/>
+              <p:cNvPr id="3" name="Content Placeholder 2"/>
               <p:cNvSpPr>
                 <a:spLocks noGrp="1"/>
               </p:cNvSpPr>
               <p:nvPr>
-                <p:ph idx="2" sz="half"/>
+                <p:ph idx="1" sz="half"/>
               </p:nvPr>
             </p:nvSpPr>
             <p:spPr/>
@@ -4608,544 +4292,37 @@
                   <a:t> 34.8</a:t>
                 </a:r>
               </a:p>
-              <a:p>
-                <a:pPr lvl="0" indent="0">
-                  <a:buNone/>
-                </a:pPr>
-                <a:r>
-                  <a:rPr>
-                    <a:solidFill>
-                      <a:srgbClr val="003B4F"/>
-                    </a:solidFill>
-                    <a:latin typeface="Courier"/>
-                  </a:rPr>
-                  <a:t>model_poisson_gala &lt;- </a:t>
-                </a:r>
-                <a:r>
-                  <a:rPr>
-                    <a:solidFill>
-                      <a:srgbClr val="4758AB"/>
-                    </a:solidFill>
-                    <a:latin typeface="Courier"/>
-                  </a:rPr>
-                  <a:t>glm</a:t>
-                </a:r>
-                <a:r>
-                  <a:rPr>
-                    <a:solidFill>
-                      <a:srgbClr val="003B4F"/>
-                    </a:solidFill>
-                    <a:latin typeface="Courier"/>
-                  </a:rPr>
-                  <a:t>(Species </a:t>
-                </a:r>
-                <a:r>
-                  <a:rPr>
-                    <a:solidFill>
-                      <a:srgbClr val="5E5E5E"/>
-                    </a:solidFill>
-                    <a:latin typeface="Courier"/>
-                  </a:rPr>
-                  <a:t>~</a:t>
-                </a:r>
-                <a:r>
-                  <a:rPr>
-                    <a:solidFill>
-                      <a:srgbClr val="003B4F"/>
-                    </a:solidFill>
-                    <a:latin typeface="Courier"/>
-                  </a:rPr>
-                  <a:t> size_category, </a:t>
-                </a:r>
-                <a:br/>
-                <a:r>
-                  <a:rPr>
-                    <a:solidFill>
-                      <a:srgbClr val="003B4F"/>
-                    </a:solidFill>
-                    <a:latin typeface="Courier"/>
-                  </a:rPr>
-                  <a:t>                          </a:t>
-                </a:r>
-                <a:r>
-                  <a:rPr>
-                    <a:solidFill>
-                      <a:srgbClr val="657422"/>
-                    </a:solidFill>
-                    <a:latin typeface="Courier"/>
-                  </a:rPr>
-                  <a:t>data =</a:t>
-                </a:r>
-                <a:r>
-                  <a:rPr>
-                    <a:solidFill>
-                      <a:srgbClr val="003B4F"/>
-                    </a:solidFill>
-                    <a:latin typeface="Courier"/>
-                  </a:rPr>
-                  <a:t> gala,</a:t>
-                </a:r>
-                <a:br/>
-                <a:r>
-                  <a:rPr>
-                    <a:solidFill>
-                      <a:srgbClr val="003B4F"/>
-                    </a:solidFill>
-                    <a:latin typeface="Courier"/>
-                  </a:rPr>
-                  <a:t>                          </a:t>
-                </a:r>
-                <a:r>
-                  <a:rPr>
-                    <a:solidFill>
-                      <a:srgbClr val="657422"/>
-                    </a:solidFill>
-                    <a:latin typeface="Courier"/>
-                  </a:rPr>
-                  <a:t>family =</a:t>
-                </a:r>
-                <a:r>
-                  <a:rPr>
-                    <a:solidFill>
-                      <a:srgbClr val="003B4F"/>
-                    </a:solidFill>
-                    <a:latin typeface="Courier"/>
-                  </a:rPr>
-                  <a:t> </a:t>
-                </a:r>
-                <a:r>
-                  <a:rPr>
-                    <a:solidFill>
-                      <a:srgbClr val="4758AB"/>
-                    </a:solidFill>
-                    <a:latin typeface="Courier"/>
-                  </a:rPr>
-                  <a:t>poisson</a:t>
-                </a:r>
-                <a:r>
-                  <a:rPr>
-                    <a:solidFill>
-                      <a:srgbClr val="003B4F"/>
-                    </a:solidFill>
-                    <a:latin typeface="Courier"/>
-                  </a:rPr>
-                  <a:t>(</a:t>
-                </a:r>
-                <a:r>
-                  <a:rPr>
-                    <a:solidFill>
-                      <a:srgbClr val="657422"/>
-                    </a:solidFill>
-                    <a:latin typeface="Courier"/>
-                  </a:rPr>
-                  <a:t>link =</a:t>
-                </a:r>
-                <a:r>
-                  <a:rPr>
-                    <a:solidFill>
-                      <a:srgbClr val="003B4F"/>
-                    </a:solidFill>
-                    <a:latin typeface="Courier"/>
-                  </a:rPr>
-                  <a:t> </a:t>
-                </a:r>
-                <a:r>
-                  <a:rPr>
-                    <a:solidFill>
-                      <a:srgbClr val="20794D"/>
-                    </a:solidFill>
-                    <a:latin typeface="Courier"/>
-                  </a:rPr>
-                  <a:t>"log"</a:t>
-                </a:r>
-                <a:r>
-                  <a:rPr>
-                    <a:solidFill>
-                      <a:srgbClr val="003B4F"/>
-                    </a:solidFill>
-                    <a:latin typeface="Courier"/>
-                  </a:rPr>
-                  <a:t>))</a:t>
-                </a:r>
-                <a:br/>
-                <a:r>
-                  <a:rPr>
-                    <a:solidFill>
-                      <a:srgbClr val="4758AB"/>
-                    </a:solidFill>
-                    <a:latin typeface="Courier"/>
-                  </a:rPr>
-                  <a:t>summary</a:t>
-                </a:r>
-                <a:r>
-                  <a:rPr>
-                    <a:solidFill>
-                      <a:srgbClr val="003B4F"/>
-                    </a:solidFill>
-                    <a:latin typeface="Courier"/>
-                  </a:rPr>
-                  <a:t>(model_poisson_gala)</a:t>
-                </a:r>
-                <a:br/>
-                <a:r>
-                  <a:rPr i="1">
-                    <a:solidFill>
-                      <a:srgbClr val="5E5E5E"/>
-                    </a:solidFill>
-                    <a:latin typeface="Courier"/>
-                  </a:rPr>
-                  <a:t>## </a:t>
-                </a:r>
-                <a:br/>
-                <a:r>
-                  <a:rPr i="1">
-                    <a:solidFill>
-                      <a:srgbClr val="5E5E5E"/>
-                    </a:solidFill>
-                    <a:latin typeface="Courier"/>
-                  </a:rPr>
-                  <a:t>## Call:</a:t>
-                </a:r>
-                <a:br/>
-                <a:r>
-                  <a:rPr i="1">
-                    <a:solidFill>
-                      <a:srgbClr val="5E5E5E"/>
-                    </a:solidFill>
-                    <a:latin typeface="Courier"/>
-                  </a:rPr>
-                  <a:t>## glm(formula = Species ~ size_category, family = poisson(link = "log"), </a:t>
-                </a:r>
-                <a:br/>
-                <a:r>
-                  <a:rPr i="1">
-                    <a:solidFill>
-                      <a:srgbClr val="5E5E5E"/>
-                    </a:solidFill>
-                    <a:latin typeface="Courier"/>
-                  </a:rPr>
-                  <a:t>##     data = gala)</a:t>
-                </a:r>
-                <a:br/>
-                <a:r>
-                  <a:rPr i="1">
-                    <a:solidFill>
-                      <a:srgbClr val="5E5E5E"/>
-                    </a:solidFill>
-                    <a:latin typeface="Courier"/>
-                  </a:rPr>
-                  <a:t>## </a:t>
-                </a:r>
-                <a:br/>
-                <a:r>
-                  <a:rPr i="1">
-                    <a:solidFill>
-                      <a:srgbClr val="5E5E5E"/>
-                    </a:solidFill>
-                    <a:latin typeface="Courier"/>
-                  </a:rPr>
-                  <a:t>## Coefficients:</a:t>
-                </a:r>
-                <a:br/>
-                <a:r>
-                  <a:rPr i="1">
-                    <a:solidFill>
-                      <a:srgbClr val="5E5E5E"/>
-                    </a:solidFill>
-                    <a:latin typeface="Courier"/>
-                  </a:rPr>
-                  <a:t>##                     Estimate Std. Error z value Pr(&gt;|z|)    </a:t>
-                </a:r>
-                <a:br/>
-                <a:r>
-                  <a:rPr i="1">
-                    <a:solidFill>
-                      <a:srgbClr val="5E5E5E"/>
-                    </a:solidFill>
-                    <a:latin typeface="Courier"/>
-                  </a:rPr>
-                  <a:t>## (Intercept)          2.67101    0.07930   33.68   &lt;2e-16 ***</a:t>
-                </a:r>
-                <a:br/>
-                <a:r>
-                  <a:rPr i="1">
-                    <a:solidFill>
-                      <a:srgbClr val="5E5E5E"/>
-                    </a:solidFill>
-                    <a:latin typeface="Courier"/>
-                  </a:rPr>
-                  <a:t>## size_categoryMedium  1.33784    0.08833   15.15   &lt;2e-16 ***</a:t>
-                </a:r>
-                <a:br/>
-                <a:r>
-                  <a:rPr i="1">
-                    <a:solidFill>
-                      <a:srgbClr val="5E5E5E"/>
-                    </a:solidFill>
-                    <a:latin typeface="Courier"/>
-                  </a:rPr>
-                  <a:t>## size_categoryLarge   2.84300    0.08285   34.31   &lt;2e-16 ***</a:t>
-                </a:r>
-                <a:br/>
-                <a:r>
-                  <a:rPr i="1">
-                    <a:solidFill>
-                      <a:srgbClr val="5E5E5E"/>
-                    </a:solidFill>
-                    <a:latin typeface="Courier"/>
-                  </a:rPr>
-                  <a:t>## ---</a:t>
-                </a:r>
-                <a:br/>
-                <a:r>
-                  <a:rPr i="1">
-                    <a:solidFill>
-                      <a:srgbClr val="5E5E5E"/>
-                    </a:solidFill>
-                    <a:latin typeface="Courier"/>
-                  </a:rPr>
-                  <a:t>## Signif. codes:  0 '***' 0.001 '**' 0.01 '*' 0.05 '.' 0.1 ' ' 1</a:t>
-                </a:r>
-                <a:br/>
-                <a:r>
-                  <a:rPr i="1">
-                    <a:solidFill>
-                      <a:srgbClr val="5E5E5E"/>
-                    </a:solidFill>
-                    <a:latin typeface="Courier"/>
-                  </a:rPr>
-                  <a:t>## </a:t>
-                </a:r>
-                <a:br/>
-                <a:r>
-                  <a:rPr i="1">
-                    <a:solidFill>
-                      <a:srgbClr val="5E5E5E"/>
-                    </a:solidFill>
-                    <a:latin typeface="Courier"/>
-                  </a:rPr>
-                  <a:t>## (Dispersion parameter for poisson family taken to be 1)</a:t>
-                </a:r>
-                <a:br/>
-                <a:r>
-                  <a:rPr i="1">
-                    <a:solidFill>
-                      <a:srgbClr val="5E5E5E"/>
-                    </a:solidFill>
-                    <a:latin typeface="Courier"/>
-                  </a:rPr>
-                  <a:t>## </a:t>
-                </a:r>
-                <a:br/>
-                <a:r>
-                  <a:rPr i="1">
-                    <a:solidFill>
-                      <a:srgbClr val="5E5E5E"/>
-                    </a:solidFill>
-                    <a:latin typeface="Courier"/>
-                  </a:rPr>
-                  <a:t>##     Null deviance: 3510.73  on 29  degrees of freedom</a:t>
-                </a:r>
-                <a:br/>
-                <a:r>
-                  <a:rPr i="1">
-                    <a:solidFill>
-                      <a:srgbClr val="5E5E5E"/>
-                    </a:solidFill>
-                    <a:latin typeface="Courier"/>
-                  </a:rPr>
-                  <a:t>## Residual deviance:  939.74  on 27  degrees of freedom</a:t>
-                </a:r>
-                <a:br/>
-                <a:r>
-                  <a:rPr i="1">
-                    <a:solidFill>
-                      <a:srgbClr val="5E5E5E"/>
-                    </a:solidFill>
-                    <a:latin typeface="Courier"/>
-                  </a:rPr>
-                  <a:t>## AIC: 1106.6</a:t>
-                </a:r>
-                <a:br/>
-                <a:r>
-                  <a:rPr i="1">
-                    <a:solidFill>
-                      <a:srgbClr val="5E5E5E"/>
-                    </a:solidFill>
-                    <a:latin typeface="Courier"/>
-                  </a:rPr>
-                  <a:t>## </a:t>
-                </a:r>
-                <a:br/>
-                <a:r>
-                  <a:rPr i="1">
-                    <a:solidFill>
-                      <a:srgbClr val="5E5E5E"/>
-                    </a:solidFill>
-                    <a:latin typeface="Courier"/>
-                  </a:rPr>
-                  <a:t>## Number of Fisher Scoring iterations: 5</a:t>
-                </a:r>
-              </a:p>
             </p:txBody>
           </p:sp>
         </mc:Choice>
       </mc:AlternateContent>
-    </p:spTree>
-  </p:cSld>
-</p:sld>
-</file>
-
-<file path=ppt/slides/slide14.xml><?xml version="1.0" encoding="utf-8"?>
-<p:sld xmlns:a="http://schemas.openxmlformats.org/drawingml/2006/main" xmlns:r="http://schemas.openxmlformats.org/officeDocument/2006/relationships" xmlns:p="http://schemas.openxmlformats.org/presentationml/2006/main">
-  <p:cSld>
-    <p:spTree>
-      <p:nvGrpSpPr>
-        <p:cNvPr id="1" name=""/>
-        <p:cNvGrpSpPr/>
-        <p:nvPr/>
-      </p:nvGrpSpPr>
-      <p:grpSpPr>
-        <a:xfrm>
-          <a:off x="0" y="0"/>
-          <a:ext cx="0" cy="0"/>
-          <a:chOff x="0" y="0"/>
-          <a:chExt cx="0" cy="0"/>
-        </a:xfrm>
-      </p:grpSpPr>
-      <p:sp>
-        <p:nvSpPr>
-          <p:cNvPr id="2" name="Title 1"/>
-          <p:cNvSpPr>
-            <a:spLocks noGrp="1"/>
-          </p:cNvSpPr>
-          <p:nvPr>
-            <p:ph type="title"/>
-          </p:nvPr>
-        </p:nvSpPr>
-        <p:spPr>
-          <a:xfrm>
-            <a:off x="0" y="0"/>
-            <a:ext cx="9144000" cy="602780"/>
-          </a:xfrm>
-          <a:solidFill>
-            <a:srgbClr val="70121D"/>
-          </a:solidFill>
-        </p:spPr>
+      <p:sp>
+        <p:nvSpPr>
+          <p:cNvPr id="4" name="Content Placeholder 3"/>
+          <p:cNvSpPr>
+            <a:spLocks noGrp="1"/>
+          </p:cNvSpPr>
+          <p:nvPr>
+            <p:ph idx="2" sz="half"/>
+          </p:nvPr>
+        </p:nvSpPr>
+        <p:spPr/>
         <p:txBody>
           <a:bodyPr/>
           <a:lstStyle/>
           <a:p>
-            <a:pPr lvl="0" indent="0" marL="0">
+            <a:pPr lvl="0" indent="0">
               <a:buNone/>
             </a:pPr>
             <a:r>
-              <a:rPr/>
-              <a:t>GLM with Poisson Distribution: Setup</a:t>
-            </a:r>
-          </a:p>
-        </p:txBody>
-      </p:sp>
-      <p:sp>
-        <p:nvSpPr>
-          <p:cNvPr id="3" name="Content Placeholder 2"/>
-          <p:cNvSpPr>
-            <a:spLocks noGrp="1"/>
-          </p:cNvSpPr>
-          <p:nvPr>
-            <p:ph idx="1" sz="half"/>
-          </p:nvPr>
-        </p:nvSpPr>
-        <p:spPr/>
-        <p:txBody>
-          <a:bodyPr/>
-          <a:lstStyle/>
-          <a:p>
-            <a:pPr lvl="0" indent="0" marL="0">
-              <a:buNone/>
-            </a:pPr>
-            <a:r>
-              <a:rPr/>
-              <a:t>Does island size category, as a whole, have a statistically significant effect on the number of plant species?</a:t>
-            </a:r>
-          </a:p>
-          <a:p>
-            <a:pPr lvl="0"/>
-            <a:r>
-              <a:rPr>
-                <a:latin typeface="Courier"/>
-              </a:rPr>
-              <a:t>test = "LR"</a:t>
-            </a:r>
-            <a:r>
-              <a:rPr/>
-              <a:t>: important part!</a:t>
-            </a:r>
-          </a:p>
-          <a:p>
-            <a:pPr lvl="1"/>
-            <a:r>
-              <a:rPr/>
-              <a:t>normal ANOVA (with a Gaussian/normal distribution) test is an F-test.</a:t>
-            </a:r>
-          </a:p>
-          <a:p>
-            <a:pPr lvl="1"/>
-            <a:r>
-              <a:rPr/>
-              <a:t>GLM (like Poisson) can’t use F-test in the same way</a:t>
-            </a:r>
-          </a:p>
-          <a:p>
-            <a:pPr lvl="2"/>
-            <a:r>
-              <a:rPr/>
-              <a:t>use a Likelihood Ratio (LR) test</a:t>
-            </a:r>
-          </a:p>
-          <a:p>
-            <a:pPr lvl="2"/>
-            <a:r>
-              <a:rPr/>
-              <a:t>LR test statistically compares fit of full model (the one with size_category) to simpler null model (one without size_category)</a:t>
-            </a:r>
-          </a:p>
-          <a:p>
-            <a:pPr lvl="2"/>
-            <a:r>
-              <a:rPr/>
-              <a:t>LR test tells us if it is significant</a:t>
-            </a:r>
-          </a:p>
-        </p:txBody>
-      </p:sp>
-      <p:sp>
-        <p:nvSpPr>
-          <p:cNvPr id="4" name="Content Placeholder 3"/>
-          <p:cNvSpPr>
-            <a:spLocks noGrp="1"/>
-          </p:cNvSpPr>
-          <p:nvPr>
-            <p:ph idx="2" sz="half"/>
-          </p:nvPr>
-        </p:nvSpPr>
-        <p:spPr/>
-        <p:txBody>
-          <a:bodyPr/>
-          <a:lstStyle/>
-          <a:p>
-            <a:pPr lvl="0" indent="0" marL="0">
-              <a:buNone/>
-            </a:pPr>
-            <a:r>
-              <a:rPr/>
-              <a:t>Test overall effect of size_category</a:t>
-            </a:r>
-          </a:p>
-          <a:p>
-            <a:pPr lvl="0" indent="0">
-              <a:buNone/>
-            </a:pPr>
+              <a:rPr>
+                <a:solidFill>
+                  <a:srgbClr val="003B4F"/>
+                </a:solidFill>
+                <a:latin typeface="Courier"/>
+              </a:rPr>
+              <a:t>model_poisson_gala &lt;- </a:t>
+            </a:r>
             <a:r>
               <a:rPr>
                 <a:solidFill>
@@ -5153,16 +4330,44 @@
                 </a:solidFill>
                 <a:latin typeface="Courier"/>
               </a:rPr>
-              <a:t>Anova</a:t>
-            </a:r>
-            <a:r>
-              <a:rPr>
-                <a:solidFill>
-                  <a:srgbClr val="003B4F"/>
-                </a:solidFill>
-                <a:latin typeface="Courier"/>
-              </a:rPr>
-              <a:t>(model_poisson_gala, </a:t>
+              <a:t>glm</a:t>
+            </a:r>
+            <a:r>
+              <a:rPr>
+                <a:solidFill>
+                  <a:srgbClr val="003B4F"/>
+                </a:solidFill>
+                <a:latin typeface="Courier"/>
+              </a:rPr>
+              <a:t>(Endemics </a:t>
+            </a:r>
+            <a:r>
+              <a:rPr>
+                <a:solidFill>
+                  <a:srgbClr val="5E5E5E"/>
+                </a:solidFill>
+                <a:latin typeface="Courier"/>
+              </a:rPr>
+              <a:t>~</a:t>
+            </a:r>
+            <a:r>
+              <a:rPr>
+                <a:solidFill>
+                  <a:srgbClr val="003B4F"/>
+                </a:solidFill>
+                <a:latin typeface="Courier"/>
+              </a:rPr>
+              <a:t> size_category, </a:t>
+            </a:r>
+            <a:br/>
+            <a:r>
+              <a:rPr>
+                <a:solidFill>
+                  <a:srgbClr val="003B4F"/>
+                </a:solidFill>
+                <a:latin typeface="Courier"/>
+              </a:rPr>
+              <a:t>                          </a:t>
             </a:r>
             <a:r>
               <a:rPr>
@@ -5171,7 +4376,35 @@
                 </a:solidFill>
                 <a:latin typeface="Courier"/>
               </a:rPr>
-              <a:t>type =</a:t>
+              <a:t>data =</a:t>
+            </a:r>
+            <a:r>
+              <a:rPr>
+                <a:solidFill>
+                  <a:srgbClr val="003B4F"/>
+                </a:solidFill>
+                <a:latin typeface="Courier"/>
+              </a:rPr>
+              <a:t> gala,</a:t>
+            </a:r>
+            <a:br/>
+            <a:r>
+              <a:rPr>
+                <a:solidFill>
+                  <a:srgbClr val="003B4F"/>
+                </a:solidFill>
+                <a:latin typeface="Courier"/>
+              </a:rPr>
+              <a:t>                          </a:t>
+            </a:r>
+            <a:r>
+              <a:rPr>
+                <a:solidFill>
+                  <a:srgbClr val="657422"/>
+                </a:solidFill>
+                <a:latin typeface="Courier"/>
+              </a:rPr>
+              <a:t>family =</a:t>
             </a:r>
             <a:r>
               <a:rPr>
@@ -5185,66 +4418,85 @@
             <a:r>
               <a:rPr>
                 <a:solidFill>
+                  <a:srgbClr val="4758AB"/>
+                </a:solidFill>
+                <a:latin typeface="Courier"/>
+              </a:rPr>
+              <a:t>poisson</a:t>
+            </a:r>
+            <a:r>
+              <a:rPr>
+                <a:solidFill>
+                  <a:srgbClr val="003B4F"/>
+                </a:solidFill>
+                <a:latin typeface="Courier"/>
+              </a:rPr>
+              <a:t>(</a:t>
+            </a:r>
+            <a:r>
+              <a:rPr>
+                <a:solidFill>
+                  <a:srgbClr val="657422"/>
+                </a:solidFill>
+                <a:latin typeface="Courier"/>
+              </a:rPr>
+              <a:t>link =</a:t>
+            </a:r>
+            <a:r>
+              <a:rPr>
+                <a:solidFill>
+                  <a:srgbClr val="003B4F"/>
+                </a:solidFill>
+                <a:latin typeface="Courier"/>
+              </a:rPr>
+              <a:t> </a:t>
+            </a:r>
+            <a:r>
+              <a:rPr>
+                <a:solidFill>
                   <a:srgbClr val="20794D"/>
                 </a:solidFill>
                 <a:latin typeface="Courier"/>
               </a:rPr>
-              <a:t>"III"</a:t>
-            </a:r>
-            <a:r>
-              <a:rPr>
-                <a:solidFill>
-                  <a:srgbClr val="003B4F"/>
-                </a:solidFill>
-                <a:latin typeface="Courier"/>
-              </a:rPr>
-              <a:t>, </a:t>
-            </a:r>
-            <a:r>
-              <a:rPr>
-                <a:solidFill>
-                  <a:srgbClr val="657422"/>
-                </a:solidFill>
-                <a:latin typeface="Courier"/>
-              </a:rPr>
-              <a:t>test =</a:t>
-            </a:r>
-            <a:r>
-              <a:rPr>
-                <a:solidFill>
-                  <a:srgbClr val="003B4F"/>
-                </a:solidFill>
-                <a:latin typeface="Courier"/>
-              </a:rPr>
-              <a:t> </a:t>
-            </a:r>
-            <a:r>
-              <a:rPr>
-                <a:solidFill>
-                  <a:srgbClr val="20794D"/>
-                </a:solidFill>
-                <a:latin typeface="Courier"/>
-              </a:rPr>
-              <a:t>"LR"</a:t>
-            </a:r>
-            <a:r>
-              <a:rPr>
-                <a:solidFill>
-                  <a:srgbClr val="003B4F"/>
-                </a:solidFill>
-                <a:latin typeface="Courier"/>
-              </a:rPr>
-              <a:t>)</a:t>
+              <a:t>"log"</a:t>
+            </a:r>
+            <a:r>
+              <a:rPr>
+                <a:solidFill>
+                  <a:srgbClr val="003B4F"/>
+                </a:solidFill>
+                <a:latin typeface="Courier"/>
+              </a:rPr>
+              <a:t>))</a:t>
             </a:r>
             <a:br/>
             <a:r>
+              <a:rPr>
+                <a:solidFill>
+                  <a:srgbClr val="4758AB"/>
+                </a:solidFill>
+                <a:latin typeface="Courier"/>
+              </a:rPr>
+              <a:t>summary</a:t>
+            </a:r>
+            <a:r>
+              <a:rPr>
+                <a:solidFill>
+                  <a:srgbClr val="003B4F"/>
+                </a:solidFill>
+                <a:latin typeface="Courier"/>
+              </a:rPr>
+              <a:t>(model_poisson_gala)</a:t>
+            </a:r>
+            <a:br/>
+            <a:r>
               <a:rPr i="1">
                 <a:solidFill>
                   <a:srgbClr val="5E5E5E"/>
                 </a:solidFill>
                 <a:latin typeface="Courier"/>
               </a:rPr>
-              <a:t>## Analysis of Deviance Table (Type III tests)</a:t>
+              <a:t>## </a:t>
             </a:r>
             <a:br/>
             <a:r>
@@ -5254,6 +4506,36 @@
                 </a:solidFill>
                 <a:latin typeface="Courier"/>
               </a:rPr>
+              <a:t>## Call:</a:t>
+            </a:r>
+            <a:br/>
+            <a:r>
+              <a:rPr i="1">
+                <a:solidFill>
+                  <a:srgbClr val="5E5E5E"/>
+                </a:solidFill>
+                <a:latin typeface="Courier"/>
+              </a:rPr>
+              <a:t>## glm(formula = Endemics ~ size_category, family = poisson(link = "log"), </a:t>
+            </a:r>
+            <a:br/>
+            <a:r>
+              <a:rPr i="1">
+                <a:solidFill>
+                  <a:srgbClr val="5E5E5E"/>
+                </a:solidFill>
+                <a:latin typeface="Courier"/>
+              </a:rPr>
+              <a:t>##     data = gala)</a:t>
+            </a:r>
+            <a:br/>
+            <a:r>
+              <a:rPr i="1">
+                <a:solidFill>
+                  <a:srgbClr val="5E5E5E"/>
+                </a:solidFill>
+                <a:latin typeface="Courier"/>
+              </a:rPr>
               <a:t>## </a:t>
             </a:r>
             <a:br/>
@@ -5264,7 +4546,7 @@
                 </a:solidFill>
                 <a:latin typeface="Courier"/>
               </a:rPr>
-              <a:t>## Response: Species</a:t>
+              <a:t>## Coefficients:</a:t>
             </a:r>
             <a:br/>
             <a:r>
@@ -5274,7 +4556,7 @@
                 </a:solidFill>
                 <a:latin typeface="Courier"/>
               </a:rPr>
-              <a:t>##               LR Chisq Df Pr(&gt;Chisq)    </a:t>
+              <a:t>##                     Estimate Std. Error z value Pr(&gt;|z|)    </a:t>
             </a:r>
             <a:br/>
             <a:r>
@@ -5284,7 +4566,7 @@
                 </a:solidFill>
                 <a:latin typeface="Courier"/>
               </a:rPr>
-              <a:t>## size_category     2571  2  &lt; 2.2e-16 ***</a:t>
+              <a:t>## (Intercept)           1.7292     0.1270  13.616   &lt;2e-16 ***</a:t>
             </a:r>
             <a:br/>
             <a:r>
@@ -5294,6 +4576,26 @@
                 </a:solidFill>
                 <a:latin typeface="Courier"/>
               </a:rPr>
+              <a:t>## size_categoryMedium   1.3465     0.1413   9.527   &lt;2e-16 ***</a:t>
+            </a:r>
+            <a:br/>
+            <a:r>
+              <a:rPr i="1">
+                <a:solidFill>
+                  <a:srgbClr val="5E5E5E"/>
+                </a:solidFill>
+                <a:latin typeface="Courier"/>
+              </a:rPr>
+              <a:t>## size_categoryLarge    2.4582     0.1353  18.173   &lt;2e-16 ***</a:t>
+            </a:r>
+            <a:br/>
+            <a:r>
+              <a:rPr i="1">
+                <a:solidFill>
+                  <a:srgbClr val="5E5E5E"/>
+                </a:solidFill>
+                <a:latin typeface="Courier"/>
+              </a:rPr>
               <a:t>## ---</a:t>
             </a:r>
             <a:br/>
@@ -5305,6 +4607,86 @@
                 <a:latin typeface="Courier"/>
               </a:rPr>
               <a:t>## Signif. codes:  0 '***' 0.001 '**' 0.01 '*' 0.05 '.' 0.1 ' ' 1</a:t>
+            </a:r>
+            <a:br/>
+            <a:r>
+              <a:rPr i="1">
+                <a:solidFill>
+                  <a:srgbClr val="5E5E5E"/>
+                </a:solidFill>
+                <a:latin typeface="Courier"/>
+              </a:rPr>
+              <a:t>## </a:t>
+            </a:r>
+            <a:br/>
+            <a:r>
+              <a:rPr i="1">
+                <a:solidFill>
+                  <a:srgbClr val="5E5E5E"/>
+                </a:solidFill>
+                <a:latin typeface="Courier"/>
+              </a:rPr>
+              <a:t>## (Dispersion parameter for poisson family taken to be 1)</a:t>
+            </a:r>
+            <a:br/>
+            <a:r>
+              <a:rPr i="1">
+                <a:solidFill>
+                  <a:srgbClr val="5E5E5E"/>
+                </a:solidFill>
+                <a:latin typeface="Courier"/>
+              </a:rPr>
+              <a:t>## </a:t>
+            </a:r>
+            <a:br/>
+            <a:r>
+              <a:rPr i="1">
+                <a:solidFill>
+                  <a:srgbClr val="5E5E5E"/>
+                </a:solidFill>
+                <a:latin typeface="Courier"/>
+              </a:rPr>
+              <a:t>##     Null deviance: 743.55  on 29  degrees of freedom</a:t>
+            </a:r>
+            <a:br/>
+            <a:r>
+              <a:rPr i="1">
+                <a:solidFill>
+                  <a:srgbClr val="5E5E5E"/>
+                </a:solidFill>
+                <a:latin typeface="Courier"/>
+              </a:rPr>
+              <a:t>## Residual deviance: 177.05  on 27  degrees of freedom</a:t>
+            </a:r>
+            <a:br/>
+            <a:r>
+              <a:rPr i="1">
+                <a:solidFill>
+                  <a:srgbClr val="5E5E5E"/>
+                </a:solidFill>
+                <a:latin typeface="Courier"/>
+              </a:rPr>
+              <a:t>## AIC: 316</a:t>
+            </a:r>
+            <a:br/>
+            <a:r>
+              <a:rPr i="1">
+                <a:solidFill>
+                  <a:srgbClr val="5E5E5E"/>
+                </a:solidFill>
+                <a:latin typeface="Courier"/>
+              </a:rPr>
+              <a:t>## </a:t>
+            </a:r>
+            <a:br/>
+            <a:r>
+              <a:rPr i="1">
+                <a:solidFill>
+                  <a:srgbClr val="5E5E5E"/>
+                </a:solidFill>
+                <a:latin typeface="Courier"/>
+              </a:rPr>
+              <a:t>## Number of Fisher Scoring iterations: 5</a:t>
             </a:r>
           </a:p>
         </p:txBody>
@@ -5383,106 +4765,56 @@
               <a:buNone/>
             </a:pPr>
             <a:r>
-              <a:rPr b="1"/>
-              <a:t>Poisson GLMs</a:t>
-            </a:r>
-            <a:r>
-              <a:rPr/>
-              <a:t> are appropriate for </a:t>
-            </a:r>
-            <a:r>
-              <a:rPr b="1"/>
-              <a:t>count data</a:t>
-            </a:r>
-            <a:r>
-              <a:rPr/>
-              <a:t>. The Poisson distribution assumes that the variance equals the mean.</a:t>
+              <a:rPr/>
+              <a:t>Does island size category, as a whole, have a statistically significant effect on the number of plant species?</a:t>
             </a:r>
           </a:p>
           <a:p>
             <a:pPr lvl="0"/>
             <a:r>
-              <a:rPr/>
-              <a:t>Use the quarter-mile time (</a:t>
-            </a:r>
-            <a:r>
-              <a:rPr>
-                <a:latin typeface="Courier"/>
-              </a:rPr>
-              <a:t>qsec</a:t>
-            </a:r>
-            <a:r>
-              <a:rPr/>
-              <a:t>) from the </a:t>
-            </a:r>
-            <a:r>
-              <a:rPr>
-                <a:latin typeface="Courier"/>
-              </a:rPr>
-              <a:t>mtcars</a:t>
-            </a:r>
-            <a:r>
-              <a:rPr/>
-              <a:t> dataset, rounded to create a count-like variable.</a:t>
-            </a:r>
-          </a:p>
-          <a:p>
-            <a:pPr lvl="0"/>
-            <a:r>
-              <a:rPr/>
-              <a:t>With the natural log link, coefficients represent </a:t>
-            </a:r>
-            <a:r>
-              <a:rPr b="1"/>
-              <a:t>multiplicative effects</a:t>
-            </a:r>
-            <a:r>
-              <a:rPr/>
-              <a:t>:</a:t>
-            </a:r>
-          </a:p>
-          <a:p>
-            <a:pPr lvl="0"/>
-            <a:r>
-              <a:rPr/>
-              <a:t>A coefficient of β means: for each 1-unit increase in X, the response is multiplied by exp(β)</a:t>
-            </a:r>
-          </a:p>
-          <a:p>
-            <a:pPr lvl="0"/>
-            <a:r>
-              <a:rPr/>
-              <a:t>For small β, exp(β) ≈ 1 + β, so β × 100% gives approximate percentage change</a:t>
-            </a:r>
-          </a:p>
-          <a:p>
-            <a:pPr lvl="0" indent="0">
-              <a:buNone/>
-            </a:pPr>
-            <a:r>
-              <a:rPr>
-                <a:latin typeface="Courier"/>
-              </a:rPr>
-              <a:t>## 
-## Call:
-## glm(formula = Species ~ size_category, family = poisson(link = "log"), 
-##     data = gala)
-## 
-## Coefficients:
-##                     Estimate Std. Error z value Pr(&gt;|z|)    
-## (Intercept)          2.67101    0.07930   33.68   &lt;2e-16 ***
-## size_categoryMedium  1.33784    0.08833   15.15   &lt;2e-16 ***
-## size_categoryLarge   2.84300    0.08285   34.31   &lt;2e-16 ***
-## ---
-## Signif. codes:  0 '***' 0.001 '**' 0.01 '*' 0.05 '.' 0.1 ' ' 1
-## 
-## (Dispersion parameter for poisson family taken to be 1)
-## 
-##     Null deviance: 3510.73  on 29  degrees of freedom
-## Residual deviance:  939.74  on 27  degrees of freedom
-## AIC: 1106.6
-## 
-## Number of Fisher Scoring iterations: 5</a:t>
+              <a:rPr>
+                <a:latin typeface="Courier"/>
+              </a:rPr>
+              <a:t>test = "LR"</a:t>
+            </a:r>
+            <a:r>
+              <a:rPr/>
+              <a:t>: important part!</a:t>
+            </a:r>
+          </a:p>
+          <a:p>
+            <a:pPr lvl="1"/>
+            <a:r>
+              <a:rPr/>
+              <a:t>normal ANOVA (with a Gaussian/normal distribution) test is an F-test.</a:t>
+            </a:r>
+          </a:p>
+          <a:p>
+            <a:pPr lvl="1"/>
+            <a:r>
+              <a:rPr/>
+              <a:t>GLM (like Poisson) can’t use F-test in the same way</a:t>
+            </a:r>
+          </a:p>
+          <a:p>
+            <a:pPr lvl="2"/>
+            <a:r>
+              <a:rPr/>
+              <a:t>use a Likelihood Ratio (LR) test</a:t>
+            </a:r>
+          </a:p>
+          <a:p>
+            <a:pPr lvl="2"/>
+            <a:r>
+              <a:rPr/>
+              <a:t>LR test statistically compares fit of full model (the one with size_category) to simpler null model (one without size_category)</a:t>
+            </a:r>
+          </a:p>
+          <a:p>
+            <a:pPr lvl="2"/>
+            <a:r>
+              <a:rPr/>
+              <a:t>LR test tells us if it is significant</a:t>
             </a:r>
           </a:p>
         </p:txBody>
@@ -5502,100 +4834,12 @@
           <a:bodyPr/>
           <a:lstStyle/>
           <a:p>
-            <a:pPr lvl="0"/>
-            <a:r>
-              <a:rPr/>
-              <a:t>Let’s check for overdispersion, which is common in count data:</a:t>
-            </a:r>
-          </a:p>
-          <a:p>
-            <a:pPr lvl="0"/>
-            <a:r>
-              <a:rPr/>
-              <a:t>Should be close to 1 for a well-fitting Poisson model</a:t>
-            </a:r>
-          </a:p>
-          <a:p>
-            <a:pPr lvl="0"/>
-            <a:r>
-              <a:rPr/>
-              <a:t>If &gt; 1.5, may indicate overdispersion</a:t>
-            </a:r>
-          </a:p>
-          <a:p>
-            <a:pPr lvl="1"/>
-            <a:r>
-              <a:rPr b="1"/>
-              <a:t>What is Underdispersion?</a:t>
-            </a:r>
-          </a:p>
-          <a:p>
-            <a:pPr lvl="2"/>
-            <a:r>
-              <a:rPr/>
-              <a:t>In a Poisson model, we expect the variance to equal the mean. The dispersion parameter measures the ratio of observed variance to expected variance:</a:t>
-            </a:r>
-          </a:p>
-          <a:p>
-            <a:pPr lvl="3"/>
-            <a:r>
-              <a:rPr b="1"/>
-              <a:t>Dispersion ≈ 1</a:t>
-            </a:r>
-            <a:r>
-              <a:rPr/>
-              <a:t>: Good fit (variance = mean, as Poisson assumes)</a:t>
-            </a:r>
-          </a:p>
-          <a:p>
-            <a:pPr lvl="3"/>
-            <a:r>
-              <a:rPr b="1"/>
-              <a:t>Dispersion &gt; 1</a:t>
-            </a:r>
-            <a:r>
-              <a:rPr/>
-              <a:t>: Overdispersion (variance &gt; mean)</a:t>
-            </a:r>
-          </a:p>
-          <a:p>
-            <a:pPr lvl="3"/>
-            <a:r>
-              <a:rPr b="1"/>
-              <a:t>Dispersion &lt; 1</a:t>
-            </a:r>
-            <a:r>
-              <a:rPr/>
-              <a:t>: </a:t>
-            </a:r>
-            <a:r>
-              <a:rPr b="1"/>
-              <a:t>Underdispersion</a:t>
-            </a:r>
-            <a:r>
-              <a:rPr/>
-              <a:t> (variance &lt; mean)</a:t>
-            </a:r>
-          </a:p>
-          <a:p>
-            <a:pPr lvl="1"/>
-            <a:r>
-              <a:rPr/>
-              <a:t>a dispersion parameter this large is a warning</a:t>
-            </a:r>
-          </a:p>
-          <a:p>
-            <a:pPr lvl="1"/>
-            <a:r>
-              <a:rPr/>
-              <a:t>our data more variable than a Poisson model expects</a:t>
-            </a:r>
-          </a:p>
-          <a:p>
-            <a:pPr lvl="1"/>
-            <a:r>
-              <a:rPr/>
-              <a:t>use a Negative Binomial model</a:t>
+            <a:pPr lvl="0" indent="0" marL="0">
+              <a:buNone/>
+            </a:pPr>
+            <a:r>
+              <a:rPr/>
+              <a:t>Test overall effect of size_category</a:t>
             </a:r>
           </a:p>
           <a:p>
@@ -5605,306 +4849,162 @@
             <a:r>
               <a:rPr>
                 <a:solidFill>
+                  <a:srgbClr val="4758AB"/>
+                </a:solidFill>
+                <a:latin typeface="Courier"/>
+              </a:rPr>
+              <a:t>Anova</a:t>
+            </a:r>
+            <a:r>
+              <a:rPr>
+                <a:solidFill>
+                  <a:srgbClr val="003B4F"/>
+                </a:solidFill>
+                <a:latin typeface="Courier"/>
+              </a:rPr>
+              <a:t>(model_poisson_gala, </a:t>
+            </a:r>
+            <a:r>
+              <a:rPr>
+                <a:solidFill>
+                  <a:srgbClr val="657422"/>
+                </a:solidFill>
+                <a:latin typeface="Courier"/>
+              </a:rPr>
+              <a:t>type =</a:t>
+            </a:r>
+            <a:r>
+              <a:rPr>
+                <a:solidFill>
+                  <a:srgbClr val="003B4F"/>
+                </a:solidFill>
+                <a:latin typeface="Courier"/>
+              </a:rPr>
+              <a:t> </a:t>
+            </a:r>
+            <a:r>
+              <a:rPr>
+                <a:solidFill>
+                  <a:srgbClr val="20794D"/>
+                </a:solidFill>
+                <a:latin typeface="Courier"/>
+              </a:rPr>
+              <a:t>"III"</a:t>
+            </a:r>
+            <a:r>
+              <a:rPr>
+                <a:solidFill>
+                  <a:srgbClr val="003B4F"/>
+                </a:solidFill>
+                <a:latin typeface="Courier"/>
+              </a:rPr>
+              <a:t>, </a:t>
+            </a:r>
+            <a:r>
+              <a:rPr>
+                <a:solidFill>
+                  <a:srgbClr val="657422"/>
+                </a:solidFill>
+                <a:latin typeface="Courier"/>
+              </a:rPr>
+              <a:t>test =</a:t>
+            </a:r>
+            <a:r>
+              <a:rPr>
+                <a:solidFill>
+                  <a:srgbClr val="003B4F"/>
+                </a:solidFill>
+                <a:latin typeface="Courier"/>
+              </a:rPr>
+              <a:t> </a:t>
+            </a:r>
+            <a:r>
+              <a:rPr>
+                <a:solidFill>
+                  <a:srgbClr val="20794D"/>
+                </a:solidFill>
+                <a:latin typeface="Courier"/>
+              </a:rPr>
+              <a:t>"LR"</a:t>
+            </a:r>
+            <a:r>
+              <a:rPr>
+                <a:solidFill>
+                  <a:srgbClr val="003B4F"/>
+                </a:solidFill>
+                <a:latin typeface="Courier"/>
+              </a:rPr>
+              <a:t>)</a:t>
+            </a:r>
+            <a:br/>
+            <a:r>
+              <a:rPr i="1">
+                <a:solidFill>
                   <a:srgbClr val="5E5E5E"/>
                 </a:solidFill>
                 <a:latin typeface="Courier"/>
               </a:rPr>
-              <a:t># Calculate the dispersion parameter</a:t>
+              <a:t>## Analysis of Deviance Table (Type III tests)</a:t>
             </a:r>
             <a:br/>
             <a:r>
-              <a:rPr>
+              <a:rPr i="1">
                 <a:solidFill>
                   <a:srgbClr val="5E5E5E"/>
                 </a:solidFill>
                 <a:latin typeface="Courier"/>
               </a:rPr>
-              <a:t># (Pearson's Chi-Squared statistic / residual degrees of freedom)</a:t>
+              <a:t>## </a:t>
             </a:r>
             <a:br/>
             <a:r>
-              <a:rPr>
-                <a:solidFill>
-                  <a:srgbClr val="003B4F"/>
-                </a:solidFill>
-                <a:latin typeface="Courier"/>
-              </a:rPr>
-              <a:t>dispersion_gala &lt;- </a:t>
-            </a:r>
-            <a:r>
-              <a:rPr>
-                <a:solidFill>
-                  <a:srgbClr val="4758AB"/>
-                </a:solidFill>
-                <a:latin typeface="Courier"/>
-              </a:rPr>
-              <a:t>sum</a:t>
-            </a:r>
-            <a:r>
-              <a:rPr>
-                <a:solidFill>
-                  <a:srgbClr val="003B4F"/>
-                </a:solidFill>
-                <a:latin typeface="Courier"/>
-              </a:rPr>
-              <a:t>(</a:t>
-            </a:r>
-            <a:r>
-              <a:rPr>
-                <a:solidFill>
-                  <a:srgbClr val="4758AB"/>
-                </a:solidFill>
-                <a:latin typeface="Courier"/>
-              </a:rPr>
-              <a:t>residuals</a:t>
-            </a:r>
-            <a:r>
-              <a:rPr>
-                <a:solidFill>
-                  <a:srgbClr val="003B4F"/>
-                </a:solidFill>
-                <a:latin typeface="Courier"/>
-              </a:rPr>
-              <a:t>(model_poisson_gala, </a:t>
-            </a:r>
-            <a:r>
-              <a:rPr>
-                <a:solidFill>
-                  <a:srgbClr val="657422"/>
-                </a:solidFill>
-                <a:latin typeface="Courier"/>
-              </a:rPr>
-              <a:t>type =</a:t>
-            </a:r>
-            <a:r>
-              <a:rPr>
-                <a:solidFill>
-                  <a:srgbClr val="003B4F"/>
-                </a:solidFill>
-                <a:latin typeface="Courier"/>
-              </a:rPr>
-              <a:t> </a:t>
-            </a:r>
-            <a:r>
-              <a:rPr>
-                <a:solidFill>
-                  <a:srgbClr val="20794D"/>
-                </a:solidFill>
-                <a:latin typeface="Courier"/>
-              </a:rPr>
-              <a:t>"pearson"</a:t>
-            </a:r>
-            <a:r>
-              <a:rPr>
-                <a:solidFill>
-                  <a:srgbClr val="003B4F"/>
-                </a:solidFill>
-                <a:latin typeface="Courier"/>
-              </a:rPr>
-              <a:t>)</a:t>
-            </a:r>
-            <a:r>
-              <a:rPr>
+              <a:rPr i="1">
                 <a:solidFill>
                   <a:srgbClr val="5E5E5E"/>
                 </a:solidFill>
                 <a:latin typeface="Courier"/>
               </a:rPr>
-              <a:t>^</a:t>
-            </a:r>
-            <a:r>
-              <a:rPr>
-                <a:solidFill>
-                  <a:srgbClr val="AD0000"/>
-                </a:solidFill>
-                <a:latin typeface="Courier"/>
-              </a:rPr>
-              <a:t>2</a:t>
-            </a:r>
-            <a:r>
-              <a:rPr>
-                <a:solidFill>
-                  <a:srgbClr val="003B4F"/>
-                </a:solidFill>
-                <a:latin typeface="Courier"/>
-              </a:rPr>
-              <a:t>) </a:t>
-            </a:r>
-            <a:r>
-              <a:rPr>
+              <a:t>## Response: Species</a:t>
+            </a:r>
+            <a:br/>
+            <a:r>
+              <a:rPr i="1">
                 <a:solidFill>
                   <a:srgbClr val="5E5E5E"/>
                 </a:solidFill>
                 <a:latin typeface="Courier"/>
               </a:rPr>
-              <a:t>/</a:t>
-            </a:r>
-            <a:r>
-              <a:rPr>
-                <a:solidFill>
-                  <a:srgbClr val="003B4F"/>
-                </a:solidFill>
-                <a:latin typeface="Courier"/>
-              </a:rPr>
-              <a:t> </a:t>
+              <a:t>##               LR Chisq Df Pr(&gt;Chisq)    </a:t>
             </a:r>
             <a:br/>
             <a:r>
-              <a:rPr>
-                <a:solidFill>
-                  <a:srgbClr val="003B4F"/>
-                </a:solidFill>
-                <a:latin typeface="Courier"/>
-              </a:rPr>
-              <a:t>                   model_poisson_gala</a:t>
-            </a:r>
-            <a:r>
-              <a:rPr>
+              <a:rPr i="1">
                 <a:solidFill>
                   <a:srgbClr val="5E5E5E"/>
                 </a:solidFill>
                 <a:latin typeface="Courier"/>
               </a:rPr>
-              <a:t>$</a:t>
-            </a:r>
-            <a:r>
-              <a:rPr>
-                <a:solidFill>
-                  <a:srgbClr val="003B4F"/>
-                </a:solidFill>
-                <a:latin typeface="Courier"/>
-              </a:rPr>
-              <a:t>df.residual</a:t>
+              <a:t>## size_category     2571  2  &lt; 2.2e-16 ***</a:t>
             </a:r>
             <a:br/>
+            <a:r>
+              <a:rPr i="1">
+                <a:solidFill>
+                  <a:srgbClr val="5E5E5E"/>
+                </a:solidFill>
+                <a:latin typeface="Courier"/>
+              </a:rPr>
+              <a:t>## ---</a:t>
+            </a:r>
             <a:br/>
             <a:r>
-              <a:rPr>
+              <a:rPr i="1">
                 <a:solidFill>
                   <a:srgbClr val="5E5E5E"/>
                 </a:solidFill>
                 <a:latin typeface="Courier"/>
               </a:rPr>
-              <a:t># Print dispersion parameter</a:t>
-            </a:r>
-            <a:br/>
-            <a:r>
-              <a:rPr>
-                <a:solidFill>
-                  <a:srgbClr val="4758AB"/>
-                </a:solidFill>
-                <a:latin typeface="Courier"/>
-              </a:rPr>
-              <a:t>cat</a:t>
-            </a:r>
-            <a:r>
-              <a:rPr>
-                <a:solidFill>
-                  <a:srgbClr val="003B4F"/>
-                </a:solidFill>
-                <a:latin typeface="Courier"/>
-              </a:rPr>
-              <a:t>(</a:t>
-            </a:r>
-            <a:r>
-              <a:rPr>
-                <a:solidFill>
-                  <a:srgbClr val="20794D"/>
-                </a:solidFill>
-                <a:latin typeface="Courier"/>
-              </a:rPr>
-              <a:t>"Dispersion parameter:"</a:t>
-            </a:r>
-            <a:r>
-              <a:rPr>
-                <a:solidFill>
-                  <a:srgbClr val="003B4F"/>
-                </a:solidFill>
-                <a:latin typeface="Courier"/>
-              </a:rPr>
-              <a:t>, </a:t>
-            </a:r>
-            <a:r>
-              <a:rPr>
-                <a:solidFill>
-                  <a:srgbClr val="4758AB"/>
-                </a:solidFill>
-                <a:latin typeface="Courier"/>
-              </a:rPr>
-              <a:t>round</a:t>
-            </a:r>
-            <a:r>
-              <a:rPr>
-                <a:solidFill>
-                  <a:srgbClr val="003B4F"/>
-                </a:solidFill>
-                <a:latin typeface="Courier"/>
-              </a:rPr>
-              <a:t>(dispersion_gala, </a:t>
-            </a:r>
-            <a:r>
-              <a:rPr>
-                <a:solidFill>
-                  <a:srgbClr val="AD0000"/>
-                </a:solidFill>
-                <a:latin typeface="Courier"/>
-              </a:rPr>
-              <a:t>2</a:t>
-            </a:r>
-            <a:r>
-              <a:rPr>
-                <a:solidFill>
-                  <a:srgbClr val="003B4F"/>
-                </a:solidFill>
-                <a:latin typeface="Courier"/>
-              </a:rPr>
-              <a:t>), </a:t>
-            </a:r>
-            <a:r>
-              <a:rPr>
-                <a:solidFill>
-                  <a:srgbClr val="20794D"/>
-                </a:solidFill>
-                <a:latin typeface="Courier"/>
-              </a:rPr>
-              <a:t>"</a:t>
-            </a:r>
-            <a:r>
-              <a:rPr>
-                <a:solidFill>
-                  <a:srgbClr val="5E5E5E"/>
-                </a:solidFill>
-                <a:latin typeface="Courier"/>
-              </a:rPr>
-              <a:t>\n</a:t>
-            </a:r>
-            <a:r>
-              <a:rPr>
-                <a:solidFill>
-                  <a:srgbClr val="20794D"/>
-                </a:solidFill>
-                <a:latin typeface="Courier"/>
-              </a:rPr>
-              <a:t>"</a:t>
-            </a:r>
-            <a:r>
-              <a:rPr>
-                <a:solidFill>
-                  <a:srgbClr val="003B4F"/>
-                </a:solidFill>
-                <a:latin typeface="Courier"/>
-              </a:rPr>
-              <a:t>)</a:t>
-            </a:r>
-            <a:br/>
-            <a:r>
-              <a:rPr i="1">
-                <a:solidFill>
-                  <a:srgbClr val="5E5E5E"/>
-                </a:solidFill>
-                <a:latin typeface="Courier"/>
-              </a:rPr>
-              <a:t>## Dispersion parameter: 32.9</a:t>
+              <a:t>## Signif. codes:  0 '***' 0.001 '**' 0.01 '*' 0.05 '.' 0.1 ' ' 1</a:t>
             </a:r>
           </a:p>
         </p:txBody>
@@ -5979,14 +5079,16 @@
           <a:bodyPr/>
           <a:lstStyle/>
           <a:p>
-            <a:pPr lvl="0"/>
+            <a:pPr lvl="0" indent="0" marL="0">
+              <a:buNone/>
+            </a:pPr>
             <a:r>
               <a:rPr b="1"/>
               <a:t>Poisson GLMs</a:t>
             </a:r>
             <a:r>
               <a:rPr/>
-              <a:t> are appropriate for </a:t>
+              <a:t> appropriate for </a:t>
             </a:r>
             <a:r>
               <a:rPr b="1"/>
@@ -5994,7 +5096,15 @@
             </a:r>
             <a:r>
               <a:rPr/>
-              <a:t>. The Poisson distribution assumes that the variance equals the mean.</a:t>
+              <a:t> and assumes variance equals mean - use the Gala Data and endemics - With natural log link, coefficients = </a:t>
+            </a:r>
+            <a:r>
+              <a:rPr b="1"/>
+              <a:t>multiplicative effects</a:t>
+            </a:r>
+            <a:r>
+              <a:rPr/>
+              <a:t>: - A coefficient of β means: for each 1-unit increase in X, the response is multiplied by exp(β) - For small β, exp(β) ≈ 1 + β, so β × 100% =app. %change</a:t>
             </a:r>
           </a:p>
           <a:p>
@@ -6003,231 +5113,28 @@
             </a:pPr>
             <a:r>
               <a:rPr>
-                <a:solidFill>
-                  <a:srgbClr val="5E5E5E"/>
-                </a:solidFill>
-                <a:latin typeface="Courier"/>
-              </a:rPr>
-              <a:t># 1. Calculate Estimated Marginal Means (EMMs)</a:t>
-            </a:r>
-            <a:br/>
-            <a:r>
-              <a:rPr>
-                <a:solidFill>
-                  <a:srgbClr val="5E5E5E"/>
-                </a:solidFill>
-                <a:latin typeface="Courier"/>
-              </a:rPr>
-              <a:t># type = "response" converts the log-means back to the "Species count" scale</a:t>
-            </a:r>
-            <a:br/>
-            <a:r>
-              <a:rPr>
-                <a:solidFill>
-                  <a:srgbClr val="003B4F"/>
-                </a:solidFill>
-                <a:latin typeface="Courier"/>
-              </a:rPr>
-              <a:t>emm_gala &lt;- </a:t>
-            </a:r>
-            <a:r>
-              <a:rPr>
-                <a:solidFill>
-                  <a:srgbClr val="4758AB"/>
-                </a:solidFill>
-                <a:latin typeface="Courier"/>
-              </a:rPr>
-              <a:t>emmeans</a:t>
-            </a:r>
-            <a:r>
-              <a:rPr>
-                <a:solidFill>
-                  <a:srgbClr val="003B4F"/>
-                </a:solidFill>
-                <a:latin typeface="Courier"/>
-              </a:rPr>
-              <a:t>(model_poisson_gala, </a:t>
-            </a:r>
-            <a:br/>
-            <a:r>
-              <a:rPr>
-                <a:solidFill>
-                  <a:srgbClr val="003B4F"/>
-                </a:solidFill>
-                <a:latin typeface="Courier"/>
-              </a:rPr>
-              <a:t>                    </a:t>
-            </a:r>
-            <a:r>
-              <a:rPr>
-                <a:solidFill>
-                  <a:srgbClr val="657422"/>
-                </a:solidFill>
-                <a:latin typeface="Courier"/>
-              </a:rPr>
-              <a:t>specs =</a:t>
-            </a:r>
-            <a:r>
-              <a:rPr>
-                <a:solidFill>
-                  <a:srgbClr val="003B4F"/>
-                </a:solidFill>
-                <a:latin typeface="Courier"/>
-              </a:rPr>
-              <a:t> </a:t>
-            </a:r>
-            <a:r>
-              <a:rPr>
-                <a:solidFill>
-                  <a:srgbClr val="5E5E5E"/>
-                </a:solidFill>
-                <a:latin typeface="Courier"/>
-              </a:rPr>
-              <a:t>~</a:t>
-            </a:r>
-            <a:r>
-              <a:rPr>
-                <a:solidFill>
-                  <a:srgbClr val="003B4F"/>
-                </a:solidFill>
-                <a:latin typeface="Courier"/>
-              </a:rPr>
-              <a:t> size_category,</a:t>
-            </a:r>
-            <a:br/>
-            <a:r>
-              <a:rPr>
-                <a:solidFill>
-                  <a:srgbClr val="003B4F"/>
-                </a:solidFill>
-                <a:latin typeface="Courier"/>
-              </a:rPr>
-              <a:t>                    </a:t>
-            </a:r>
-            <a:r>
-              <a:rPr>
-                <a:solidFill>
-                  <a:srgbClr val="657422"/>
-                </a:solidFill>
-                <a:latin typeface="Courier"/>
-              </a:rPr>
-              <a:t>type =</a:t>
-            </a:r>
-            <a:r>
-              <a:rPr>
-                <a:solidFill>
-                  <a:srgbClr val="003B4F"/>
-                </a:solidFill>
-                <a:latin typeface="Courier"/>
-              </a:rPr>
-              <a:t> </a:t>
-            </a:r>
-            <a:r>
-              <a:rPr>
-                <a:solidFill>
-                  <a:srgbClr val="20794D"/>
-                </a:solidFill>
-                <a:latin typeface="Courier"/>
-              </a:rPr>
-              <a:t>"response"</a:t>
-            </a:r>
-            <a:r>
-              <a:rPr>
-                <a:solidFill>
-                  <a:srgbClr val="003B4F"/>
-                </a:solidFill>
-                <a:latin typeface="Courier"/>
-              </a:rPr>
-              <a:t>)</a:t>
-            </a:r>
-            <a:br/>
-            <a:r>
-              <a:rPr>
-                <a:solidFill>
-                  <a:srgbClr val="4758AB"/>
-                </a:solidFill>
-                <a:latin typeface="Courier"/>
-              </a:rPr>
-              <a:t>print</a:t>
-            </a:r>
-            <a:r>
-              <a:rPr>
-                <a:solidFill>
-                  <a:srgbClr val="003B4F"/>
-                </a:solidFill>
-                <a:latin typeface="Courier"/>
-              </a:rPr>
-              <a:t>(emm_gala)</a:t>
-            </a:r>
-            <a:br/>
-            <a:r>
-              <a:rPr i="1">
-                <a:solidFill>
-                  <a:srgbClr val="5E5E5E"/>
-                </a:solidFill>
-                <a:latin typeface="Courier"/>
-              </a:rPr>
-              <a:t>##  size_category  rate   SE  df asymp.LCL asymp.UCL</a:t>
-            </a:r>
-            <a:br/>
-            <a:r>
-              <a:rPr i="1">
-                <a:solidFill>
-                  <a:srgbClr val="5E5E5E"/>
-                </a:solidFill>
-                <a:latin typeface="Courier"/>
-              </a:rPr>
-              <a:t>##  Small          14.5 1.15 Inf      12.4      16.9</a:t>
-            </a:r>
-            <a:br/>
-            <a:r>
-              <a:rPr i="1">
-                <a:solidFill>
-                  <a:srgbClr val="5E5E5E"/>
-                </a:solidFill>
-                <a:latin typeface="Courier"/>
-              </a:rPr>
-              <a:t>##  Medium         55.1 2.14 Inf      51.0      59.4</a:t>
-            </a:r>
-            <a:br/>
-            <a:r>
-              <a:rPr i="1">
-                <a:solidFill>
-                  <a:srgbClr val="5E5E5E"/>
-                </a:solidFill>
-                <a:latin typeface="Courier"/>
-              </a:rPr>
-              <a:t>##  Large         248.1 5.95 Inf     236.7     260.1</a:t>
-            </a:r>
-            <a:br/>
-            <a:r>
-              <a:rPr i="1">
-                <a:solidFill>
-                  <a:srgbClr val="5E5E5E"/>
-                </a:solidFill>
-                <a:latin typeface="Courier"/>
-              </a:rPr>
-              <a:t>## </a:t>
-            </a:r>
-            <a:br/>
-            <a:r>
-              <a:rPr i="1">
-                <a:solidFill>
-                  <a:srgbClr val="5E5E5E"/>
-                </a:solidFill>
-                <a:latin typeface="Courier"/>
-              </a:rPr>
-              <a:t>## Confidence level used: 0.95 </a:t>
-            </a:r>
-            <a:br/>
-            <a:r>
-              <a:rPr i="1">
-                <a:solidFill>
-                  <a:srgbClr val="5E5E5E"/>
-                </a:solidFill>
-                <a:latin typeface="Courier"/>
-              </a:rPr>
-              <a:t>## Intervals are back-transformed from the log scale</a:t>
+                <a:latin typeface="Courier"/>
+              </a:rPr>
+              <a:t>## 
+## Call:
+## glm(formula = Species ~ size_category, family = poisson(link = "log"), 
+##     data = gala)
+## 
+## Coefficients:
+##                     Estimate Std. Error z value Pr(&gt;|z|)    
+## (Intercept)          2.67101    0.07930   33.68   &lt;2e-16 ***
+## size_categoryMedium  1.33784    0.08833   15.15   &lt;2e-16 ***
+## size_categoryLarge   2.84300    0.08285   34.31   &lt;2e-16 ***
+## ---
+## Signif. codes:  0 '***' 0.001 '**' 0.01 '*' 0.05 '.' 0.1 ' ' 1
+## 
+## (Dispersion parameter for poisson family taken to be 1)
+## 
+##     Null deviance: 3510.73  on 29  degrees of freedom
+## Residual deviance:  939.74  on 27  degrees of freedom
+## AIC: 1106.6
+## 
+## Number of Fisher Scoring iterations: 5</a:t>
             </a:r>
           </a:p>
         </p:txBody>
@@ -6247,42 +5154,388 @@
           <a:bodyPr/>
           <a:lstStyle/>
           <a:p>
-            <a:pPr lvl="0" indent="0" marL="0">
+            <a:pPr lvl="0"/>
+            <a:r>
+              <a:rPr/>
+              <a:t>check overdispersion- common in count data:</a:t>
+            </a:r>
+          </a:p>
+          <a:p>
+            <a:pPr lvl="0"/>
+            <a:r>
+              <a:rPr/>
+              <a:t>Should be close to 1 for well-fitting Poisson model</a:t>
+            </a:r>
+          </a:p>
+          <a:p>
+            <a:pPr lvl="0"/>
+            <a:r>
+              <a:rPr/>
+              <a:t>If &gt; 1.5, may indicate overdispersion</a:t>
+            </a:r>
+          </a:p>
+          <a:p>
+            <a:pPr lvl="0"/>
+            <a:r>
+              <a:rPr/>
+              <a:t>Dispersion parameter measures obs var / expected var:</a:t>
+            </a:r>
+          </a:p>
+          <a:p>
+            <a:pPr lvl="0"/>
+            <a:r>
+              <a:rPr b="1"/>
+              <a:t>Dispersion ≈ 1</a:t>
+            </a:r>
+            <a:r>
+              <a:rPr/>
+              <a:t>: Good fit (var = mean)</a:t>
+            </a:r>
+          </a:p>
+          <a:p>
+            <a:pPr lvl="0"/>
+            <a:r>
+              <a:rPr b="1"/>
+              <a:t>Dispersion &gt; 1</a:t>
+            </a:r>
+            <a:r>
+              <a:rPr/>
+              <a:t>: Overdispersion (var &gt; mean)</a:t>
+            </a:r>
+          </a:p>
+          <a:p>
+            <a:pPr lvl="0"/>
+            <a:r>
+              <a:rPr b="1"/>
+              <a:t>Dispersion &lt; 1</a:t>
+            </a:r>
+            <a:r>
+              <a:rPr/>
+              <a:t>: </a:t>
+            </a:r>
+            <a:r>
+              <a:rPr b="1"/>
+              <a:t>Underdispersion</a:t>
+            </a:r>
+            <a:r>
+              <a:rPr/>
+              <a:t> (var &lt; mean)</a:t>
+            </a:r>
+          </a:p>
+          <a:p>
+            <a:pPr lvl="0"/>
+            <a:r>
+              <a:rPr/>
+              <a:t>use Negative Binomial model</a:t>
+            </a:r>
+          </a:p>
+          <a:p>
+            <a:pPr lvl="0" indent="0">
               <a:buNone/>
             </a:pPr>
             <a:r>
-              <a:rPr/>
-              <a:t>Let’s check the emmeans and pairwise comparisons</a:t>
-            </a:r>
-          </a:p>
-          <a:p>
-            <a:pPr lvl="0" indent="0">
-              <a:buNone/>
-            </a:pPr>
-            <a:r>
-              <a:rPr>
-                <a:latin typeface="Courier"/>
-              </a:rPr>
-              <a:t>##  contrast        ratio      SE  df null z.ratio p.value
-##  Small / Medium 0.2624 0.02320 Inf    1 -15.146  &lt;.0001
-##  Small / Large  0.0583 0.00483 Inf    1 -34.313  &lt;.0001
-##  Medium / Large 0.2220 0.01010 Inf    1 -32.935  &lt;.0001
-## 
-## P value adjustment: tukey method for comparing a family of 3 estimates 
-## Tests are performed on the log scale
-##  size_category  rate   SE  df asymp.LCL asymp.UCL .group
-##  Small          14.5 1.15 Inf      12.4      16.9  a    
-##  Medium         55.1 2.14 Inf      51.0      59.4   b   
-##  Large         248.1 5.95 Inf     236.7     260.1    c  
-## 
-## Confidence level used: 0.95 
-## Intervals are back-transformed from the log scale 
-## P value adjustment: tukey method for comparing a family of 3 estimates 
-## Tests are performed on the log scale 
-## significance level used: alpha = 0.05 
-## NOTE: If two or more means share the same grouping symbol,
-##       then we cannot show them to be different.
-##       But we also did not show them to be the same.</a:t>
+              <a:rPr>
+                <a:solidFill>
+                  <a:srgbClr val="5E5E5E"/>
+                </a:solidFill>
+                <a:latin typeface="Courier"/>
+              </a:rPr>
+              <a:t># Calculate the dispersion parameter</a:t>
+            </a:r>
+            <a:br/>
+            <a:r>
+              <a:rPr>
+                <a:solidFill>
+                  <a:srgbClr val="5E5E5E"/>
+                </a:solidFill>
+                <a:latin typeface="Courier"/>
+              </a:rPr>
+              <a:t># (Pearson's Chi-Squared statistic / residual degrees of freedom)</a:t>
+            </a:r>
+            <a:br/>
+            <a:r>
+              <a:rPr>
+                <a:solidFill>
+                  <a:srgbClr val="003B4F"/>
+                </a:solidFill>
+                <a:latin typeface="Courier"/>
+              </a:rPr>
+              <a:t>dispersion_gala &lt;- </a:t>
+            </a:r>
+            <a:r>
+              <a:rPr>
+                <a:solidFill>
+                  <a:srgbClr val="4758AB"/>
+                </a:solidFill>
+                <a:latin typeface="Courier"/>
+              </a:rPr>
+              <a:t>sum</a:t>
+            </a:r>
+            <a:r>
+              <a:rPr>
+                <a:solidFill>
+                  <a:srgbClr val="003B4F"/>
+                </a:solidFill>
+                <a:latin typeface="Courier"/>
+              </a:rPr>
+              <a:t>(</a:t>
+            </a:r>
+            <a:r>
+              <a:rPr>
+                <a:solidFill>
+                  <a:srgbClr val="4758AB"/>
+                </a:solidFill>
+                <a:latin typeface="Courier"/>
+              </a:rPr>
+              <a:t>residuals</a:t>
+            </a:r>
+            <a:r>
+              <a:rPr>
+                <a:solidFill>
+                  <a:srgbClr val="003B4F"/>
+                </a:solidFill>
+                <a:latin typeface="Courier"/>
+              </a:rPr>
+              <a:t>(model_poisson_gala, </a:t>
+            </a:r>
+            <a:r>
+              <a:rPr>
+                <a:solidFill>
+                  <a:srgbClr val="657422"/>
+                </a:solidFill>
+                <a:latin typeface="Courier"/>
+              </a:rPr>
+              <a:t>type =</a:t>
+            </a:r>
+            <a:r>
+              <a:rPr>
+                <a:solidFill>
+                  <a:srgbClr val="003B4F"/>
+                </a:solidFill>
+                <a:latin typeface="Courier"/>
+              </a:rPr>
+              <a:t> </a:t>
+            </a:r>
+            <a:r>
+              <a:rPr>
+                <a:solidFill>
+                  <a:srgbClr val="20794D"/>
+                </a:solidFill>
+                <a:latin typeface="Courier"/>
+              </a:rPr>
+              <a:t>"pearson"</a:t>
+            </a:r>
+            <a:r>
+              <a:rPr>
+                <a:solidFill>
+                  <a:srgbClr val="003B4F"/>
+                </a:solidFill>
+                <a:latin typeface="Courier"/>
+              </a:rPr>
+              <a:t>)</a:t>
+            </a:r>
+            <a:r>
+              <a:rPr>
+                <a:solidFill>
+                  <a:srgbClr val="5E5E5E"/>
+                </a:solidFill>
+                <a:latin typeface="Courier"/>
+              </a:rPr>
+              <a:t>^</a:t>
+            </a:r>
+            <a:r>
+              <a:rPr>
+                <a:solidFill>
+                  <a:srgbClr val="AD0000"/>
+                </a:solidFill>
+                <a:latin typeface="Courier"/>
+              </a:rPr>
+              <a:t>2</a:t>
+            </a:r>
+            <a:r>
+              <a:rPr>
+                <a:solidFill>
+                  <a:srgbClr val="003B4F"/>
+                </a:solidFill>
+                <a:latin typeface="Courier"/>
+              </a:rPr>
+              <a:t>) </a:t>
+            </a:r>
+            <a:r>
+              <a:rPr>
+                <a:solidFill>
+                  <a:srgbClr val="5E5E5E"/>
+                </a:solidFill>
+                <a:latin typeface="Courier"/>
+              </a:rPr>
+              <a:t>/</a:t>
+            </a:r>
+            <a:r>
+              <a:rPr>
+                <a:solidFill>
+                  <a:srgbClr val="003B4F"/>
+                </a:solidFill>
+                <a:latin typeface="Courier"/>
+              </a:rPr>
+              <a:t> </a:t>
+            </a:r>
+            <a:br/>
+            <a:r>
+              <a:rPr>
+                <a:solidFill>
+                  <a:srgbClr val="003B4F"/>
+                </a:solidFill>
+                <a:latin typeface="Courier"/>
+              </a:rPr>
+              <a:t>                   model_poisson_gala</a:t>
+            </a:r>
+            <a:r>
+              <a:rPr>
+                <a:solidFill>
+                  <a:srgbClr val="5E5E5E"/>
+                </a:solidFill>
+                <a:latin typeface="Courier"/>
+              </a:rPr>
+              <a:t>$</a:t>
+            </a:r>
+            <a:r>
+              <a:rPr>
+                <a:solidFill>
+                  <a:srgbClr val="003B4F"/>
+                </a:solidFill>
+                <a:latin typeface="Courier"/>
+              </a:rPr>
+              <a:t>df.residual</a:t>
+            </a:r>
+            <a:br/>
+            <a:br/>
+            <a:r>
+              <a:rPr>
+                <a:solidFill>
+                  <a:srgbClr val="5E5E5E"/>
+                </a:solidFill>
+                <a:latin typeface="Courier"/>
+              </a:rPr>
+              <a:t># Print dispersion parameter</a:t>
+            </a:r>
+            <a:br/>
+            <a:r>
+              <a:rPr>
+                <a:solidFill>
+                  <a:srgbClr val="4758AB"/>
+                </a:solidFill>
+                <a:latin typeface="Courier"/>
+              </a:rPr>
+              <a:t>cat</a:t>
+            </a:r>
+            <a:r>
+              <a:rPr>
+                <a:solidFill>
+                  <a:srgbClr val="003B4F"/>
+                </a:solidFill>
+                <a:latin typeface="Courier"/>
+              </a:rPr>
+              <a:t>(</a:t>
+            </a:r>
+            <a:r>
+              <a:rPr>
+                <a:solidFill>
+                  <a:srgbClr val="20794D"/>
+                </a:solidFill>
+                <a:latin typeface="Courier"/>
+              </a:rPr>
+              <a:t>"Dispersion parameter:"</a:t>
+            </a:r>
+            <a:r>
+              <a:rPr>
+                <a:solidFill>
+                  <a:srgbClr val="003B4F"/>
+                </a:solidFill>
+                <a:latin typeface="Courier"/>
+              </a:rPr>
+              <a:t>, </a:t>
+            </a:r>
+            <a:r>
+              <a:rPr>
+                <a:solidFill>
+                  <a:srgbClr val="4758AB"/>
+                </a:solidFill>
+                <a:latin typeface="Courier"/>
+              </a:rPr>
+              <a:t>round</a:t>
+            </a:r>
+            <a:r>
+              <a:rPr>
+                <a:solidFill>
+                  <a:srgbClr val="003B4F"/>
+                </a:solidFill>
+                <a:latin typeface="Courier"/>
+              </a:rPr>
+              <a:t>(dispersion_gala, </a:t>
+            </a:r>
+            <a:r>
+              <a:rPr>
+                <a:solidFill>
+                  <a:srgbClr val="AD0000"/>
+                </a:solidFill>
+                <a:latin typeface="Courier"/>
+              </a:rPr>
+              <a:t>2</a:t>
+            </a:r>
+            <a:r>
+              <a:rPr>
+                <a:solidFill>
+                  <a:srgbClr val="003B4F"/>
+                </a:solidFill>
+                <a:latin typeface="Courier"/>
+              </a:rPr>
+              <a:t>), </a:t>
+            </a:r>
+            <a:r>
+              <a:rPr>
+                <a:solidFill>
+                  <a:srgbClr val="20794D"/>
+                </a:solidFill>
+                <a:latin typeface="Courier"/>
+              </a:rPr>
+              <a:t>"</a:t>
+            </a:r>
+            <a:r>
+              <a:rPr>
+                <a:solidFill>
+                  <a:srgbClr val="5E5E5E"/>
+                </a:solidFill>
+                <a:latin typeface="Courier"/>
+              </a:rPr>
+              <a:t>\n</a:t>
+            </a:r>
+            <a:r>
+              <a:rPr>
+                <a:solidFill>
+                  <a:srgbClr val="20794D"/>
+                </a:solidFill>
+                <a:latin typeface="Courier"/>
+              </a:rPr>
+              <a:t>"</a:t>
+            </a:r>
+            <a:r>
+              <a:rPr>
+                <a:solidFill>
+                  <a:srgbClr val="003B4F"/>
+                </a:solidFill>
+                <a:latin typeface="Courier"/>
+              </a:rPr>
+              <a:t>)</a:t>
+            </a:r>
+            <a:br/>
+            <a:r>
+              <a:rPr i="1">
+                <a:solidFill>
+                  <a:srgbClr val="5E5E5E"/>
+                </a:solidFill>
+                <a:latin typeface="Courier"/>
+              </a:rPr>
+              <a:t>## Dispersion parameter: 6.05</a:t>
             </a:r>
           </a:p>
         </p:txBody>
@@ -6321,9 +5574,12 @@
         </p:nvSpPr>
         <p:spPr>
           <a:xfrm>
-            <a:off x="139485" y="78119"/>
-            <a:ext cx="8229600" cy="607682"/>
+            <a:off x="0" y="0"/>
+            <a:ext cx="9144000" cy="602780"/>
           </a:xfrm>
+          <a:solidFill>
+            <a:srgbClr val="70121D"/>
+          </a:solidFill>
         </p:spPr>
         <p:txBody>
           <a:bodyPr/>
@@ -6334,19 +5590,19 @@
             </a:pPr>
             <a:r>
               <a:rPr/>
-              <a:t>Poisson GLM: Visualization and Interpretation</a:t>
-            </a:r>
-          </a:p>
-        </p:txBody>
-      </p:sp>
-      <p:sp>
-        <p:nvSpPr>
-          <p:cNvPr id="3" name="Text Placeholder 2"/>
-          <p:cNvSpPr>
-            <a:spLocks noGrp="1"/>
-          </p:cNvSpPr>
-          <p:nvPr>
-            <p:ph idx="1" type="body"/>
+              <a:t>GLM with Poisson Distribution: Setup</a:t>
+            </a:r>
+          </a:p>
+        </p:txBody>
+      </p:sp>
+      <p:sp>
+        <p:nvSpPr>
+          <p:cNvPr id="3" name="Content Placeholder 2"/>
+          <p:cNvSpPr>
+            <a:spLocks noGrp="1"/>
+          </p:cNvSpPr>
+          <p:nvPr>
+            <p:ph idx="1" sz="half"/>
           </p:nvPr>
         </p:nvSpPr>
         <p:spPr/>
@@ -6356,57 +5612,268 @@
           <a:p>
             <a:pPr lvl="0"/>
             <a:r>
-              <a:rPr/>
-              <a:t>Plot raw data and our emmeans results</a:t>
-            </a:r>
-          </a:p>
-          <a:p>
-            <a:pPr lvl="1"/>
-            <a:r>
-              <a:rPr/>
-              <a:t>shows the model’s predictions on top of the real data</a:t>
-            </a:r>
-          </a:p>
-        </p:txBody>
-      </p:sp>
-      <p:pic>
-        <p:nvPicPr>
-          <p:cNvPr descr="14_01_lecture_powerpoint_files/figure-pptx/poisson-plot-1.png" id="0" name="Picture 1"/>
-          <p:cNvPicPr>
-            <a:picLocks noGrp="1" noChangeAspect="1"/>
-          </p:cNvPicPr>
-          <p:nvPr/>
-        </p:nvPicPr>
-        <p:blipFill>
-          <a:blip r:embed="rId2"/>
-          <a:stretch>
-            <a:fillRect/>
-          </a:stretch>
-        </p:blipFill>
-        <p:spPr bwMode="auto">
-          <a:xfrm>
-            <a:off x="127000" y="1562100"/>
-            <a:ext cx="4432300" cy="2730500"/>
-          </a:xfrm>
-          <a:prstGeom prst="rect">
-            <a:avLst/>
-          </a:prstGeom>
-          <a:noFill/>
-          <a:ln w="9525">
-            <a:noFill/>
-            <a:headEnd/>
-            <a:tailEnd/>
-          </a:ln>
-        </p:spPr>
-      </p:pic>
-      <p:sp>
-        <p:nvSpPr>
-          <p:cNvPr id="5" name="Text Placeholder 4"/>
-          <p:cNvSpPr>
-            <a:spLocks noGrp="1"/>
-          </p:cNvSpPr>
-          <p:nvPr>
-            <p:ph idx="3" sz="quarter" type="body"/>
+              <a:rPr b="1"/>
+              <a:t>Poisson GLMs</a:t>
+            </a:r>
+            <a:r>
+              <a:rPr/>
+              <a:t> are appropriate for </a:t>
+            </a:r>
+            <a:r>
+              <a:rPr b="1"/>
+              <a:t>count data</a:t>
+            </a:r>
+          </a:p>
+          <a:p>
+            <a:pPr lvl="0"/>
+            <a:r>
+              <a:rPr/>
+              <a:t>assumes that the variance equals the mean.</a:t>
+            </a:r>
+          </a:p>
+          <a:p>
+            <a:pPr lvl="0" indent="0">
+              <a:buNone/>
+            </a:pPr>
+            <a:r>
+              <a:rPr>
+                <a:solidFill>
+                  <a:srgbClr val="5E5E5E"/>
+                </a:solidFill>
+                <a:latin typeface="Courier"/>
+              </a:rPr>
+              <a:t># 1. Calculate Estimated Marginal Means (EMMs)</a:t>
+            </a:r>
+            <a:br/>
+            <a:r>
+              <a:rPr>
+                <a:solidFill>
+                  <a:srgbClr val="5E5E5E"/>
+                </a:solidFill>
+                <a:latin typeface="Courier"/>
+              </a:rPr>
+              <a:t># type = "response" converts the log-means back to the "Endemics count" scale</a:t>
+            </a:r>
+            <a:br/>
+            <a:r>
+              <a:rPr>
+                <a:solidFill>
+                  <a:srgbClr val="003B4F"/>
+                </a:solidFill>
+                <a:latin typeface="Courier"/>
+              </a:rPr>
+              <a:t>emm_gala &lt;- </a:t>
+            </a:r>
+            <a:r>
+              <a:rPr>
+                <a:solidFill>
+                  <a:srgbClr val="4758AB"/>
+                </a:solidFill>
+                <a:latin typeface="Courier"/>
+              </a:rPr>
+              <a:t>emmeans</a:t>
+            </a:r>
+            <a:r>
+              <a:rPr>
+                <a:solidFill>
+                  <a:srgbClr val="003B4F"/>
+                </a:solidFill>
+                <a:latin typeface="Courier"/>
+              </a:rPr>
+              <a:t>(model_poisson_gala, </a:t>
+            </a:r>
+            <a:br/>
+            <a:r>
+              <a:rPr>
+                <a:solidFill>
+                  <a:srgbClr val="003B4F"/>
+                </a:solidFill>
+                <a:latin typeface="Courier"/>
+              </a:rPr>
+              <a:t>                    </a:t>
+            </a:r>
+            <a:r>
+              <a:rPr>
+                <a:solidFill>
+                  <a:srgbClr val="657422"/>
+                </a:solidFill>
+                <a:latin typeface="Courier"/>
+              </a:rPr>
+              <a:t>specs =</a:t>
+            </a:r>
+            <a:r>
+              <a:rPr>
+                <a:solidFill>
+                  <a:srgbClr val="003B4F"/>
+                </a:solidFill>
+                <a:latin typeface="Courier"/>
+              </a:rPr>
+              <a:t> </a:t>
+            </a:r>
+            <a:r>
+              <a:rPr>
+                <a:solidFill>
+                  <a:srgbClr val="5E5E5E"/>
+                </a:solidFill>
+                <a:latin typeface="Courier"/>
+              </a:rPr>
+              <a:t>~</a:t>
+            </a:r>
+            <a:r>
+              <a:rPr>
+                <a:solidFill>
+                  <a:srgbClr val="003B4F"/>
+                </a:solidFill>
+                <a:latin typeface="Courier"/>
+              </a:rPr>
+              <a:t> size_category,</a:t>
+            </a:r>
+            <a:br/>
+            <a:r>
+              <a:rPr>
+                <a:solidFill>
+                  <a:srgbClr val="003B4F"/>
+                </a:solidFill>
+                <a:latin typeface="Courier"/>
+              </a:rPr>
+              <a:t>                    </a:t>
+            </a:r>
+            <a:r>
+              <a:rPr>
+                <a:solidFill>
+                  <a:srgbClr val="657422"/>
+                </a:solidFill>
+                <a:latin typeface="Courier"/>
+              </a:rPr>
+              <a:t>type =</a:t>
+            </a:r>
+            <a:r>
+              <a:rPr>
+                <a:solidFill>
+                  <a:srgbClr val="003B4F"/>
+                </a:solidFill>
+                <a:latin typeface="Courier"/>
+              </a:rPr>
+              <a:t> </a:t>
+            </a:r>
+            <a:r>
+              <a:rPr>
+                <a:solidFill>
+                  <a:srgbClr val="20794D"/>
+                </a:solidFill>
+                <a:latin typeface="Courier"/>
+              </a:rPr>
+              <a:t>"response"</a:t>
+            </a:r>
+            <a:r>
+              <a:rPr>
+                <a:solidFill>
+                  <a:srgbClr val="003B4F"/>
+                </a:solidFill>
+                <a:latin typeface="Courier"/>
+              </a:rPr>
+              <a:t>)</a:t>
+            </a:r>
+            <a:br/>
+            <a:r>
+              <a:rPr>
+                <a:solidFill>
+                  <a:srgbClr val="4758AB"/>
+                </a:solidFill>
+                <a:latin typeface="Courier"/>
+              </a:rPr>
+              <a:t>print</a:t>
+            </a:r>
+            <a:r>
+              <a:rPr>
+                <a:solidFill>
+                  <a:srgbClr val="003B4F"/>
+                </a:solidFill>
+                <a:latin typeface="Courier"/>
+              </a:rPr>
+              <a:t>(emm_gala)</a:t>
+            </a:r>
+            <a:br/>
+            <a:r>
+              <a:rPr i="1">
+                <a:solidFill>
+                  <a:srgbClr val="5E5E5E"/>
+                </a:solidFill>
+                <a:latin typeface="Courier"/>
+              </a:rPr>
+              <a:t>##  size_category  rate    SE  df asymp.LCL asymp.UCL</a:t>
+            </a:r>
+            <a:br/>
+            <a:r>
+              <a:rPr i="1">
+                <a:solidFill>
+                  <a:srgbClr val="5E5E5E"/>
+                </a:solidFill>
+                <a:latin typeface="Courier"/>
+              </a:rPr>
+              <a:t>##  Small          5.64 0.716 Inf      4.39      7.23</a:t>
+            </a:r>
+            <a:br/>
+            <a:r>
+              <a:rPr i="1">
+                <a:solidFill>
+                  <a:srgbClr val="5E5E5E"/>
+                </a:solidFill>
+                <a:latin typeface="Courier"/>
+              </a:rPr>
+              <a:t>##  Medium        21.67 1.340 Inf     19.19     24.47</a:t>
+            </a:r>
+            <a:br/>
+            <a:r>
+              <a:rPr i="1">
+                <a:solidFill>
+                  <a:srgbClr val="5E5E5E"/>
+                </a:solidFill>
+                <a:latin typeface="Courier"/>
+              </a:rPr>
+              <a:t>##  Large         65.86 3.070 Inf     60.11     72.15</a:t>
+            </a:r>
+            <a:br/>
+            <a:r>
+              <a:rPr i="1">
+                <a:solidFill>
+                  <a:srgbClr val="5E5E5E"/>
+                </a:solidFill>
+                <a:latin typeface="Courier"/>
+              </a:rPr>
+              <a:t>## </a:t>
+            </a:r>
+            <a:br/>
+            <a:r>
+              <a:rPr i="1">
+                <a:solidFill>
+                  <a:srgbClr val="5E5E5E"/>
+                </a:solidFill>
+                <a:latin typeface="Courier"/>
+              </a:rPr>
+              <a:t>## Confidence level used: 0.95 </a:t>
+            </a:r>
+            <a:br/>
+            <a:r>
+              <a:rPr i="1">
+                <a:solidFill>
+                  <a:srgbClr val="5E5E5E"/>
+                </a:solidFill>
+                <a:latin typeface="Courier"/>
+              </a:rPr>
+              <a:t>## Intervals are back-transformed from the log scale</a:t>
+            </a:r>
+          </a:p>
+        </p:txBody>
+      </p:sp>
+      <p:sp>
+        <p:nvSpPr>
+          <p:cNvPr id="4" name="Content Placeholder 3"/>
+          <p:cNvSpPr>
+            <a:spLocks noGrp="1"/>
+          </p:cNvSpPr>
+          <p:nvPr>
+            <p:ph idx="2" sz="half"/>
           </p:nvPr>
         </p:nvSpPr>
         <p:spPr/>
@@ -6415,70 +5882,41 @@
           <a:lstStyle/>
           <a:p>
             <a:pPr lvl="0" indent="0" marL="0">
-              <a:spcBef>
-                <a:spcPts val="3000"/>
-              </a:spcBef>
               <a:buNone/>
             </a:pPr>
             <a:r>
-              <a:rPr b="1"/>
-              <a:t>Interpreting Poisson GLM Coefficients</a:t>
-            </a:r>
-          </a:p>
-          <a:p>
-            <a:pPr lvl="0"/>
-            <a:r>
-              <a:rPr/>
-              <a:t>In a Poisson GLM with a log link function:</a:t>
-            </a:r>
-          </a:p>
-          <a:p>
-            <a:pPr lvl="1"/>
-            <a:r>
-              <a:rPr/>
-              <a:t>The coefficients represent changes in the </a:t>
-            </a:r>
-            <a:r>
-              <a:rPr b="1"/>
-              <a:t>log</a:t>
-            </a:r>
-            <a:r>
-              <a:rPr/>
-              <a:t> of the expected count</a:t>
-            </a:r>
-          </a:p>
-          <a:p>
-            <a:pPr lvl="1"/>
-            <a:r>
-              <a:rPr/>
-              <a:t>When exponentiated (</a:t>
-            </a:r>
-            <a:r>
-              <a:rPr>
-                <a:latin typeface="Courier"/>
-              </a:rPr>
-              <a:t>exp(coef)</a:t>
-            </a:r>
-            <a:r>
-              <a:rPr/>
-              <a:t>), they represent multiplicative effects</a:t>
-            </a:r>
-          </a:p>
-          <a:p>
-            <a:pPr lvl="1"/>
-            <a:r>
-              <a:rPr/>
-              <a:t>For example, </a:t>
-            </a:r>
-            <a:r>
-              <a:rPr>
-                <a:latin typeface="Courier"/>
-              </a:rPr>
-              <a:t>exp(coef)</a:t>
-            </a:r>
-            <a:r>
-              <a:rPr/>
-              <a:t> = 0.90 means the expected count is 90% of the reference level</a:t>
+              <a:rPr/>
+              <a:t>Let’s check the emmeans and pairwise comparisons</a:t>
+            </a:r>
+          </a:p>
+          <a:p>
+            <a:pPr lvl="0" indent="0">
+              <a:buNone/>
+            </a:pPr>
+            <a:r>
+              <a:rPr>
+                <a:latin typeface="Courier"/>
+              </a:rPr>
+              <a:t>##  contrast        ratio      SE  df null z.ratio p.value
+##  Small / Medium 0.2624 0.02320 Inf    1 -15.146  &lt;.0001
+##  Small / Large  0.0583 0.00483 Inf    1 -34.313  &lt;.0001
+##  Medium / Large 0.2220 0.01010 Inf    1 -32.935  &lt;.0001
+## 
+## P value adjustment: tukey method for comparing a family of 3 estimates 
+## Tests are performed on the log scale
+##  size_category  rate   SE  df asymp.LCL asymp.UCL .group
+##  Small          14.5 1.15 Inf      12.4      16.9  a    
+##  Medium         55.1 2.14 Inf      51.0      59.4   b   
+##  Large         248.1 5.95 Inf     236.7     260.1    c  
+## 
+## Confidence level used: 0.95 
+## Intervals are back-transformed from the log scale 
+## P value adjustment: tukey method for comparing a family of 3 estimates 
+## Tests are performed on the log scale 
+## significance level used: alpha = 0.05 
+## NOTE: If two or more means share the same grouping symbol,
+##       then we cannot show them to be different.
+##       But we also did not show them to be the same.</a:t>
             </a:r>
           </a:p>
         </p:txBody>
@@ -6518,6 +5956,176 @@
         <p:spPr>
           <a:xfrm>
             <a:off x="0" y="0"/>
+            <a:ext cx="9144000" cy="602780"/>
+          </a:xfrm>
+          <a:solidFill>
+            <a:srgbClr val="70121D"/>
+          </a:solidFill>
+        </p:spPr>
+        <p:txBody>
+          <a:bodyPr/>
+          <a:lstStyle/>
+          <a:p>
+            <a:pPr lvl="0" indent="0" marL="0">
+              <a:buNone/>
+            </a:pPr>
+            <a:r>
+              <a:rPr/>
+              <a:t>Poisson GLM: Visualization and Interpretation</a:t>
+            </a:r>
+          </a:p>
+        </p:txBody>
+      </p:sp>
+      <p:sp>
+        <p:nvSpPr>
+          <p:cNvPr id="3" name="Content Placeholder 2"/>
+          <p:cNvSpPr>
+            <a:spLocks noGrp="1"/>
+          </p:cNvSpPr>
+          <p:nvPr>
+            <p:ph idx="1" sz="half"/>
+          </p:nvPr>
+        </p:nvSpPr>
+        <p:spPr/>
+        <p:txBody>
+          <a:bodyPr/>
+          <a:lstStyle/>
+          <a:p>
+            <a:pPr lvl="0"/>
+            <a:r>
+              <a:rPr/>
+              <a:t>Plot raw data and our emmeans results</a:t>
+            </a:r>
+          </a:p>
+          <a:p>
+            <a:pPr lvl="1"/>
+            <a:r>
+              <a:rPr/>
+              <a:t>shows the model’s predictions on top of the real data</a:t>
+            </a:r>
+          </a:p>
+          <a:p>
+            <a:pPr lvl="1" indent="0" marL="342900">
+              <a:buNone/>
+            </a:pPr>
+          </a:p>
+        </p:txBody>
+      </p:sp>
+      <p:sp>
+        <p:nvSpPr>
+          <p:cNvPr id="4" name="Content Placeholder 3"/>
+          <p:cNvSpPr>
+            <a:spLocks noGrp="1"/>
+          </p:cNvSpPr>
+          <p:nvPr>
+            <p:ph idx="2" sz="half"/>
+          </p:nvPr>
+        </p:nvSpPr>
+        <p:spPr/>
+        <p:txBody>
+          <a:bodyPr/>
+          <a:lstStyle/>
+          <a:p>
+            <a:pPr lvl="0" indent="0" marL="0">
+              <a:spcBef>
+                <a:spcPts val="3000"/>
+              </a:spcBef>
+              <a:buNone/>
+            </a:pPr>
+            <a:r>
+              <a:rPr b="1"/>
+              <a:t>Interpreting Poisson GLM Coefficients</a:t>
+            </a:r>
+          </a:p>
+          <a:p>
+            <a:pPr lvl="0"/>
+            <a:r>
+              <a:rPr/>
+              <a:t>In a Poisson GLM with a log link function:</a:t>
+            </a:r>
+          </a:p>
+          <a:p>
+            <a:pPr lvl="1"/>
+            <a:r>
+              <a:rPr/>
+              <a:t>Coefficientschanges in the </a:t>
+            </a:r>
+            <a:r>
+              <a:rPr b="1"/>
+              <a:t>log</a:t>
+            </a:r>
+            <a:r>
+              <a:rPr/>
+              <a:t> of the expected count</a:t>
+            </a:r>
+          </a:p>
+          <a:p>
+            <a:pPr lvl="1"/>
+            <a:r>
+              <a:rPr/>
+              <a:t>When exponentiated (</a:t>
+            </a:r>
+            <a:r>
+              <a:rPr>
+                <a:latin typeface="Courier"/>
+              </a:rPr>
+              <a:t>exp(coef)</a:t>
+            </a:r>
+            <a:r>
+              <a:rPr/>
+              <a:t>)= multiplicative effects</a:t>
+            </a:r>
+          </a:p>
+          <a:p>
+            <a:pPr lvl="1"/>
+            <a:r>
+              <a:rPr>
+                <a:latin typeface="Courier"/>
+              </a:rPr>
+              <a:t>exp(coef)</a:t>
+            </a:r>
+            <a:r>
+              <a:rPr/>
+              <a:t> = 0.90 = the expected count is 90% of reference</a:t>
+            </a:r>
+          </a:p>
+        </p:txBody>
+      </p:sp>
+    </p:spTree>
+  </p:cSld>
+</p:sld>
+</file>
+
+<file path=ppt/slides/slide19.xml><?xml version="1.0" encoding="utf-8"?>
+<p:sld xmlns:a="http://schemas.openxmlformats.org/drawingml/2006/main" xmlns:r="http://schemas.openxmlformats.org/officeDocument/2006/relationships" xmlns:p="http://schemas.openxmlformats.org/presentationml/2006/main">
+  <p:cSld>
+    <p:spTree>
+      <p:nvGrpSpPr>
+        <p:cNvPr id="1" name=""/>
+        <p:cNvGrpSpPr/>
+        <p:nvPr/>
+      </p:nvGrpSpPr>
+      <p:grpSpPr>
+        <a:xfrm>
+          <a:off x="0" y="0"/>
+          <a:ext cx="0" cy="0"/>
+          <a:chOff x="0" y="0"/>
+          <a:chExt cx="0" cy="0"/>
+        </a:xfrm>
+      </p:grpSpPr>
+      <p:sp>
+        <p:nvSpPr>
+          <p:cNvPr id="2" name="Title 1"/>
+          <p:cNvSpPr>
+            <a:spLocks noGrp="1"/>
+          </p:cNvSpPr>
+          <p:nvPr>
+            <p:ph type="title"/>
+          </p:nvPr>
+        </p:nvSpPr>
+        <p:spPr>
+          <a:xfrm>
+            <a:off x="0" y="0"/>
             <a:ext cx="9144000" cy="871538"/>
           </a:xfrm>
         </p:spPr>
@@ -6550,12 +6158,45 @@
           <a:bodyPr/>
           <a:lstStyle/>
           <a:p>
-            <a:pPr lvl="0" indent="0" marL="0">
-              <a:buNone/>
-            </a:pPr>
-            <a:r>
-              <a:rPr/>
-              <a:t>Model Type R Code (Example) Interpretation of β₁ GLM (Log-Link) glm(Y ~ X, family = poisson) A 1-unit change in X multiplies the mean of Y by exp(β₁). lm (Log-Response) lm(log(Y) ~ X) A 1-unit change in X multiplies the median of Y by exp(β₁). lm (Log-Log) lm(log(Y) ~ log(X)) A 1% change in</a:t>
+            <a:pPr lvl="0"/>
+            <a:r>
+              <a:rPr/>
+              <a:t>Interpretation of β₁ GLM (Log-Link) glm(Y~X, family = poisson)</a:t>
+            </a:r>
+          </a:p>
+          <a:p>
+            <a:pPr lvl="1"/>
+            <a:r>
+              <a:rPr/>
+              <a:t>1-unit change in X multiplies the mean of Y by exp(β₁)</a:t>
+            </a:r>
+          </a:p>
+          <a:p>
+            <a:pPr lvl="0"/>
+            <a:r>
+              <a:rPr/>
+              <a:t>lm (Log-Response) lm(log(Y) ~ X)</a:t>
+            </a:r>
+          </a:p>
+          <a:p>
+            <a:pPr lvl="1"/>
+            <a:r>
+              <a:rPr/>
+              <a:t>1-unit change in X multiplies median Y by exp(β₁).</a:t>
+            </a:r>
+          </a:p>
+          <a:p>
+            <a:pPr lvl="0"/>
+            <a:r>
+              <a:rPr/>
+              <a:t>lm (Log-Log) lm(log(Y) ~ log(X))</a:t>
+            </a:r>
+          </a:p>
+          <a:p>
+            <a:pPr lvl="1"/>
+            <a:r>
+              <a:rPr/>
+              <a:t>A 1% change in</a:t>
             </a:r>
           </a:p>
         </p:txBody>
@@ -6791,79 +6432,6 @@
 </p:sld>
 </file>
 
-<file path=ppt/slides/slide19.xml><?xml version="1.0" encoding="utf-8"?>
-<p:sld xmlns:a="http://schemas.openxmlformats.org/drawingml/2006/main" xmlns:r="http://schemas.openxmlformats.org/officeDocument/2006/relationships" xmlns:p="http://schemas.openxmlformats.org/presentationml/2006/main">
-  <p:cSld>
-    <p:spTree>
-      <p:nvGrpSpPr>
-        <p:cNvPr id="1" name=""/>
-        <p:cNvGrpSpPr/>
-        <p:nvPr/>
-      </p:nvGrpSpPr>
-      <p:grpSpPr>
-        <a:xfrm>
-          <a:off x="0" y="0"/>
-          <a:ext cx="0" cy="0"/>
-          <a:chOff x="0" y="0"/>
-          <a:chExt cx="0" cy="0"/>
-        </a:xfrm>
-      </p:grpSpPr>
-      <p:sp>
-        <p:nvSpPr>
-          <p:cNvPr id="2" name="Title 1"/>
-          <p:cNvSpPr>
-            <a:spLocks noGrp="1"/>
-          </p:cNvSpPr>
-          <p:nvPr>
-            <p:ph type="title"/>
-          </p:nvPr>
-        </p:nvSpPr>
-        <p:spPr>
-          <a:xfrm>
-            <a:off x="0" y="0"/>
-            <a:ext cx="9144000" cy="582780"/>
-          </a:xfrm>
-        </p:spPr>
-        <p:txBody>
-          <a:bodyPr/>
-          <a:lstStyle/>
-          <a:p>
-            <a:pPr lvl="0" indent="0" marL="0">
-              <a:buNone/>
-            </a:pPr>
-            <a:r>
-              <a:rPr/>
-              <a:t>Checking Model Assumptions with DHARMa</a:t>
-            </a:r>
-          </a:p>
-        </p:txBody>
-      </p:sp>
-      <p:sp>
-        <p:nvSpPr>
-          <p:cNvPr id="3" name="Content Placeholder 2"/>
-          <p:cNvSpPr>
-            <a:spLocks noGrp="1"/>
-          </p:cNvSpPr>
-          <p:nvPr>
-            <p:ph idx="1"/>
-          </p:nvPr>
-        </p:nvSpPr>
-        <p:spPr/>
-        <p:txBody>
-          <a:bodyPr/>
-          <a:lstStyle/>
-          <a:p>
-            <a:pPr lvl="0" indent="0" marL="0">
-              <a:buNone/>
-            </a:pPr>
-          </a:p>
-        </p:txBody>
-      </p:sp>
-    </p:spTree>
-  </p:cSld>
-</p:sld>
-</file>
-
 <file path=ppt/slides/slide2.xml><?xml version="1.0" encoding="utf-8"?>
 <p:sld xmlns:a="http://schemas.openxmlformats.org/drawingml/2006/main" xmlns:r="http://schemas.openxmlformats.org/officeDocument/2006/relationships" xmlns:p="http://schemas.openxmlformats.org/presentationml/2006/main">
   <p:cSld>
@@ -7022,6 +6590,79 @@
         </p:nvSpPr>
         <p:spPr>
           <a:xfrm>
+            <a:off x="0" y="0"/>
+            <a:ext cx="9144000" cy="582780"/>
+          </a:xfrm>
+        </p:spPr>
+        <p:txBody>
+          <a:bodyPr/>
+          <a:lstStyle/>
+          <a:p>
+            <a:pPr lvl="0" indent="0" marL="0">
+              <a:buNone/>
+            </a:pPr>
+            <a:r>
+              <a:rPr/>
+              <a:t>Checking Model Assumptions with DHARMa</a:t>
+            </a:r>
+          </a:p>
+        </p:txBody>
+      </p:sp>
+      <p:sp>
+        <p:nvSpPr>
+          <p:cNvPr id="3" name="Content Placeholder 2"/>
+          <p:cNvSpPr>
+            <a:spLocks noGrp="1"/>
+          </p:cNvSpPr>
+          <p:nvPr>
+            <p:ph idx="1"/>
+          </p:nvPr>
+        </p:nvSpPr>
+        <p:spPr/>
+        <p:txBody>
+          <a:bodyPr/>
+          <a:lstStyle/>
+          <a:p>
+            <a:pPr lvl="0" indent="0" marL="0">
+              <a:buNone/>
+            </a:pPr>
+          </a:p>
+        </p:txBody>
+      </p:sp>
+    </p:spTree>
+  </p:cSld>
+</p:sld>
+</file>
+
+<file path=ppt/slides/slide21.xml><?xml version="1.0" encoding="utf-8"?>
+<p:sld xmlns:a="http://schemas.openxmlformats.org/drawingml/2006/main" xmlns:r="http://schemas.openxmlformats.org/officeDocument/2006/relationships" xmlns:p="http://schemas.openxmlformats.org/presentationml/2006/main">
+  <p:cSld>
+    <p:spTree>
+      <p:nvGrpSpPr>
+        <p:cNvPr id="1" name=""/>
+        <p:cNvGrpSpPr/>
+        <p:nvPr/>
+      </p:nvGrpSpPr>
+      <p:grpSpPr>
+        <a:xfrm>
+          <a:off x="0" y="0"/>
+          <a:ext cx="0" cy="0"/>
+          <a:chOff x="0" y="0"/>
+          <a:chExt cx="0" cy="0"/>
+        </a:xfrm>
+      </p:grpSpPr>
+      <p:sp>
+        <p:nvSpPr>
+          <p:cNvPr id="2" name="Title 1"/>
+          <p:cNvSpPr>
+            <a:spLocks noGrp="1"/>
+          </p:cNvSpPr>
+          <p:nvPr>
+            <p:ph type="title"/>
+          </p:nvPr>
+        </p:nvSpPr>
+        <p:spPr>
+          <a:xfrm>
             <a:off x="139485" y="78119"/>
             <a:ext cx="8229600" cy="607682"/>
           </a:xfrm>
@@ -7060,17 +6701,45 @@
             </a:pPr>
             <a:r>
               <a:rPr/>
-              <a:t>When count data shows more variability than expected under a Poisson distribution (variance &gt; mean), may need to use negative binomial model </a:t>
-            </a:r>
-            <a:r>
-              <a:rPr>
-                <a:latin typeface="Courier"/>
-              </a:rPr>
-              <a:t>model_nb &lt;- glm.nb(qsec_round ~ cyl, data = mtcars_count)</a:t>
-            </a:r>
-          </a:p>
-          <a:p>
-            <a:pPr lvl="0" indent="0">
+              <a:t>When overdispersion (variance &gt; mean) - use negative binomial model </a:t>
+            </a:r>
+            <a:r>
+              <a:rPr>
+                <a:latin typeface="Courier"/>
+              </a:rPr>
+              <a:t>model_nb &lt;- glm.nb(Endemics ~ area_cat, data = gala)</a:t>
+            </a:r>
+          </a:p>
+          <a:p>
+            <a:pPr lvl="0"/>
+            <a:r>
+              <a:rPr/>
+              <a:t>negative binomial model includes a dispersion parameter (theta)</a:t>
+            </a:r>
+          </a:p>
+          <a:p>
+            <a:pPr lvl="1"/>
+            <a:r>
+              <a:rPr/>
+              <a:t>allows variance to be larger than mean</a:t>
+            </a:r>
+          </a:p>
+          <a:p>
+            <a:pPr lvl="1"/>
+            <a:r>
+              <a:rPr b="1"/>
+              <a:t>standard errors bigger because NB model accounts for high variability (overdispersion)</a:t>
+            </a:r>
+          </a:p>
+          <a:p>
+            <a:pPr lvl="1"/>
+            <a:r>
+              <a:rPr/>
+              <a:t>estimates dispersion parameter ‘Theta’ (or 1/theta)</a:t>
+            </a:r>
+          </a:p>
+          <a:p>
+            <a:pPr lvl="1" indent="0">
               <a:buNone/>
             </a:pPr>
             <a:r>
@@ -7079,65 +6748,30 @@
               </a:rPr>
               <a:t>## 
 ## Call:
-## glm.nb(formula = Species ~ size_category, data = gala, init.theta = 1.709503171, 
+## glm.nb(formula = Endemics ~ size_category, data = gala, init.theta = 3.855017567, 
 ##     link = log)
 ## 
 ## Coefficients:
 ##                     Estimate Std. Error z value Pr(&gt;|z|)    
-## (Intercept)           2.6710     0.2439  10.953  &lt; 2e-16 ***
-## size_categoryMedium   1.3378     0.3313   4.039 5.37e-05 ***
-## size_categoryLarge    2.8430     0.3790   7.502 6.28e-14 ***
+## (Intercept)           1.7292     0.1993   8.678  &lt; 2e-16 ***
+## size_categoryMedium   1.3465     0.2553   5.274 1.33e-07 ***
+## size_categoryLarge    2.4582     0.2810   8.750  &lt; 2e-16 ***
 ## ---
 ## Signif. codes:  0 '***' 0.001 '**' 0.01 '*' 0.05 '.' 0.1 ' ' 1
 ## 
-## (Dispersion parameter for Negative Binomial(1.7095) family taken to be 1)
+## (Dispersion parameter for Negative Binomial(3.855) family taken to be 1)
 ## 
-##     Null deviance: 90.168  on 29  degrees of freedom
-## Residual deviance: 32.932  on 27  degrees of freedom
-## AIC: 297.35
+##     Null deviance: 115.697  on 29  degrees of freedom
+## Residual deviance:  35.481  on 27  degrees of freedom
+## AIC: 227.27
 ## 
 ## Number of Fisher Scoring iterations: 1
 ## 
 ## 
-##               Theta:  1.710 
-##           Std. Err.:  0.449 
+##               Theta:  3.86 
+##           Std. Err.:  1.39 
 ## 
-##  2 x log-likelihood:  -289.348</a:t>
-            </a:r>
-          </a:p>
-          <a:p>
-            <a:pPr lvl="0"/>
-            <a:r>
-              <a:rPr/>
-              <a:t>negative binomial model includes a dispersion parameter (theta)</a:t>
-            </a:r>
-          </a:p>
-          <a:p>
-            <a:pPr lvl="1"/>
-            <a:r>
-              <a:rPr/>
-              <a:t>allows the variance to be larger than the mean</a:t>
-            </a:r>
-          </a:p>
-          <a:p>
-            <a:pPr lvl="1"/>
-            <a:r>
-              <a:rPr/>
-              <a:t>standard errors bigger because NB model accounts for high variability (overdispersion)</a:t>
-            </a:r>
-          </a:p>
-          <a:p>
-            <a:pPr lvl="1"/>
-            <a:r>
-              <a:rPr/>
-              <a:t>estimates dispersion parameter ‘Theta’ (or 1/theta)</a:t>
-            </a:r>
-          </a:p>
-          <a:p>
-            <a:pPr lvl="1"/>
-            <a:r>
-              <a:rPr/>
-              <a:t>how it models the overdispersion.</a:t>
+##  2 x log-likelihood:  -219.269</a:t>
             </a:r>
           </a:p>
         </p:txBody>
@@ -7202,7 +6836,7 @@
 </p:sld>
 </file>
 
-<file path=ppt/slides/slide21.xml><?xml version="1.0" encoding="utf-8"?>
+<file path=ppt/slides/slide22.xml><?xml version="1.0" encoding="utf-8"?>
 <p:sld xmlns:a="http://schemas.openxmlformats.org/drawingml/2006/main" xmlns:r="http://schemas.openxmlformats.org/officeDocument/2006/relationships" xmlns:p="http://schemas.openxmlformats.org/presentationml/2006/main">
   <p:cSld>
     <p:spTree>
@@ -7278,154 +6912,145 @@
                 </a:r>
               </a:p>
               <a:p>
-                <a:pPr lvl="0" indent="0" marL="0">
-                  <a:buNone/>
-                </a:pPr>
+                <a:pPr lvl="0"/>
                 <a:r>
                   <a:rPr/>
-                  <a:t>Let’s examine the simple logistic regression model:</a:t>
+                  <a:t>Logistic regression model:</a:t>
                 </a:r>
               </a:p>
               <a:p>
-                <a:pPr lvl="0" indent="0" marL="0">
-                  <a:buNone/>
-                </a:pPr>
+                <a:pPr lvl="1"/>
                 <a14:m>
-                  <m:oMathPara xmlns:m="http://schemas.openxmlformats.org/officeDocument/2006/math">
-                    <m:oMathParaPr>
-                      <m:jc m:val="center"/>
-                    </m:oMathParaPr>
-                    <m:oMath>
-                      <m:r>
-                        <m:t>π</m:t>
-                      </m:r>
-                      <m:d>
-                        <m:dPr>
-                          <m:begChr m:val="("/>
-                          <m:sepChr m:val=""/>
-                          <m:endChr m:val=")"/>
-                          <m:grow/>
-                        </m:dPr>
-                        <m:e>
-                          <m:r>
-                            <m:t>x</m:t>
-                          </m:r>
-                        </m:e>
-                      </m:d>
-                      <m:r>
-                        <m:rPr>
-                          <m:sty m:val="p"/>
-                        </m:rPr>
-                        <m:t>=</m:t>
-                      </m:r>
-                      <m:f>
-                        <m:fPr>
-                          <m:type m:val="bar"/>
-                        </m:fPr>
-                        <m:num>
-                          <m:sSup>
-                            <m:e>
-                              <m:r>
-                                <m:t>e</m:t>
-                              </m:r>
-                            </m:e>
-                            <m:sup>
-                              <m:sSub>
-                                <m:e>
-                                  <m:r>
-                                    <m:t>β</m:t>
-                                  </m:r>
-                                </m:e>
-                                <m:sub>
-                                  <m:r>
-                                    <m:t>0</m:t>
-                                  </m:r>
-                                </m:sub>
-                              </m:sSub>
-                              <m:r>
-                                <m:rPr>
-                                  <m:sty m:val="p"/>
-                                </m:rPr>
-                                <m:t>+</m:t>
-                              </m:r>
-                              <m:sSub>
-                                <m:e>
-                                  <m:r>
-                                    <m:t>β</m:t>
-                                  </m:r>
-                                </m:e>
-                                <m:sub>
-                                  <m:r>
-                                    <m:t>1</m:t>
-                                  </m:r>
-                                </m:sub>
-                              </m:sSub>
-                              <m:r>
-                                <m:t>x</m:t>
-                              </m:r>
-                            </m:sup>
-                          </m:sSup>
-                        </m:num>
-                        <m:den>
-                          <m:r>
-                            <m:t>1</m:t>
-                          </m:r>
-                          <m:r>
-                            <m:rPr>
-                              <m:sty m:val="p"/>
-                            </m:rPr>
-                            <m:t>+</m:t>
-                          </m:r>
-                          <m:sSup>
-                            <m:e>
-                              <m:r>
-                                <m:t>e</m:t>
-                              </m:r>
-                            </m:e>
-                            <m:sup>
-                              <m:sSub>
-                                <m:e>
-                                  <m:r>
-                                    <m:t>β</m:t>
-                                  </m:r>
-                                </m:e>
-                                <m:sub>
-                                  <m:r>
-                                    <m:t>0</m:t>
-                                  </m:r>
-                                </m:sub>
-                              </m:sSub>
-                              <m:r>
-                                <m:rPr>
-                                  <m:sty m:val="p"/>
-                                </m:rPr>
-                                <m:t>+</m:t>
-                              </m:r>
-                              <m:sSub>
-                                <m:e>
-                                  <m:r>
-                                    <m:t>β</m:t>
-                                  </m:r>
-                                </m:e>
-                                <m:sub>
-                                  <m:r>
-                                    <m:t>1</m:t>
-                                  </m:r>
-                                </m:sub>
-                              </m:sSub>
-                              <m:r>
-                                <m:t>x</m:t>
-                              </m:r>
-                            </m:sup>
-                          </m:sSup>
-                        </m:den>
-                      </m:f>
-                    </m:oMath>
-                  </m:oMathPara>
+                  <m:oMath xmlns:m="http://schemas.openxmlformats.org/officeDocument/2006/math">
+                    <m:r>
+                      <m:t>π</m:t>
+                    </m:r>
+                    <m:d>
+                      <m:dPr>
+                        <m:begChr m:val="("/>
+                        <m:sepChr m:val=""/>
+                        <m:endChr m:val=")"/>
+                        <m:grow/>
+                      </m:dPr>
+                      <m:e>
+                        <m:r>
+                          <m:t>x</m:t>
+                        </m:r>
+                      </m:e>
+                    </m:d>
+                    <m:r>
+                      <m:rPr>
+                        <m:sty m:val="p"/>
+                      </m:rPr>
+                      <m:t>=</m:t>
+                    </m:r>
+                    <m:f>
+                      <m:fPr>
+                        <m:type m:val="bar"/>
+                      </m:fPr>
+                      <m:num>
+                        <m:sSup>
+                          <m:e>
+                            <m:r>
+                              <m:t>e</m:t>
+                            </m:r>
+                          </m:e>
+                          <m:sup>
+                            <m:sSub>
+                              <m:e>
+                                <m:r>
+                                  <m:t>β</m:t>
+                                </m:r>
+                              </m:e>
+                              <m:sub>
+                                <m:r>
+                                  <m:t>0</m:t>
+                                </m:r>
+                              </m:sub>
+                            </m:sSub>
+                            <m:r>
+                              <m:rPr>
+                                <m:sty m:val="p"/>
+                              </m:rPr>
+                              <m:t>+</m:t>
+                            </m:r>
+                            <m:sSub>
+                              <m:e>
+                                <m:r>
+                                  <m:t>β</m:t>
+                                </m:r>
+                              </m:e>
+                              <m:sub>
+                                <m:r>
+                                  <m:t>1</m:t>
+                                </m:r>
+                              </m:sub>
+                            </m:sSub>
+                            <m:r>
+                              <m:t>x</m:t>
+                            </m:r>
+                          </m:sup>
+                        </m:sSup>
+                      </m:num>
+                      <m:den>
+                        <m:r>
+                          <m:t>1</m:t>
+                        </m:r>
+                        <m:r>
+                          <m:rPr>
+                            <m:sty m:val="p"/>
+                          </m:rPr>
+                          <m:t>+</m:t>
+                        </m:r>
+                        <m:sSup>
+                          <m:e>
+                            <m:r>
+                              <m:t>e</m:t>
+                            </m:r>
+                          </m:e>
+                          <m:sup>
+                            <m:sSub>
+                              <m:e>
+                                <m:r>
+                                  <m:t>β</m:t>
+                                </m:r>
+                              </m:e>
+                              <m:sub>
+                                <m:r>
+                                  <m:t>0</m:t>
+                                </m:r>
+                              </m:sub>
+                            </m:sSub>
+                            <m:r>
+                              <m:rPr>
+                                <m:sty m:val="p"/>
+                              </m:rPr>
+                              <m:t>+</m:t>
+                            </m:r>
+                            <m:sSub>
+                              <m:e>
+                                <m:r>
+                                  <m:t>β</m:t>
+                                </m:r>
+                              </m:e>
+                              <m:sub>
+                                <m:r>
+                                  <m:t>1</m:t>
+                                </m:r>
+                              </m:sub>
+                            </m:sSub>
+                            <m:r>
+                              <m:t>x</m:t>
+                            </m:r>
+                          </m:sup>
+                        </m:sSup>
+                      </m:den>
+                    </m:f>
+                  </m:oMath>
                 </a14:m>
               </a:p>
               <a:p>
-                <a:pPr lvl="0"/>
+                <a:pPr lvl="1"/>
                 <a:r>
                   <a:rPr/>
                   <a:t>Where:</a:t>
@@ -7529,162 +7154,151 @@
                 </a:r>
               </a:p>
               <a:p>
-                <a:pPr lvl="0" indent="0" marL="0">
-                  <a:buNone/>
-                </a:pPr>
+                <a:pPr lvl="0"/>
                 <a:r>
                   <a:rPr/>
                   <a:t>To linearize this relationship, we use the logit link function:</a:t>
                 </a:r>
               </a:p>
               <a:p>
-                <a:pPr lvl="0" indent="0" marL="0">
-                  <a:buNone/>
-                </a:pPr>
+                <a:pPr lvl="1"/>
                 <a14:m>
-                  <m:oMathPara xmlns:m="http://schemas.openxmlformats.org/officeDocument/2006/math">
-                    <m:oMathParaPr>
-                      <m:jc m:val="center"/>
-                    </m:oMathParaPr>
-                    <m:oMath>
-                      <m:r>
-                        <m:t>g</m:t>
-                      </m:r>
-                      <m:d>
-                        <m:dPr>
-                          <m:begChr m:val="("/>
-                          <m:sepChr m:val=""/>
-                          <m:endChr m:val=")"/>
-                          <m:grow/>
-                        </m:dPr>
-                        <m:e>
-                          <m:r>
-                            <m:t>x</m:t>
-                          </m:r>
-                        </m:e>
-                      </m:d>
-                      <m:r>
-                        <m:rPr>
-                          <m:sty m:val="p"/>
-                        </m:rPr>
-                        <m:t>=</m:t>
-                      </m:r>
-                      <m:r>
-                        <m:rPr>
-                          <m:sty m:val="p"/>
-                        </m:rPr>
-                        <m:t>log</m:t>
-                      </m:r>
-                      <m:d>
-                        <m:dPr>
-                          <m:begChr m:val="("/>
-                          <m:sepChr m:val=""/>
-                          <m:endChr m:val=")"/>
-                          <m:grow/>
-                        </m:dPr>
-                        <m:e>
-                          <m:f>
-                            <m:fPr>
-                              <m:type m:val="bar"/>
-                            </m:fPr>
-                            <m:num>
-                              <m:r>
-                                <m:t>π</m:t>
-                              </m:r>
-                              <m:d>
-                                <m:dPr>
-                                  <m:begChr m:val="("/>
-                                  <m:sepChr m:val=""/>
-                                  <m:endChr m:val=")"/>
-                                  <m:grow/>
-                                </m:dPr>
-                                <m:e>
-                                  <m:r>
-                                    <m:t>x</m:t>
-                                  </m:r>
-                                </m:e>
-                              </m:d>
-                            </m:num>
-                            <m:den>
-                              <m:r>
-                                <m:t>1</m:t>
-                              </m:r>
-                              <m:r>
-                                <m:rPr>
-                                  <m:sty m:val="p"/>
-                                </m:rPr>
-                                <m:t>−</m:t>
-                              </m:r>
-                              <m:r>
-                                <m:t>π</m:t>
-                              </m:r>
-                              <m:d>
-                                <m:dPr>
-                                  <m:begChr m:val="("/>
-                                  <m:sepChr m:val=""/>
-                                  <m:endChr m:val=")"/>
-                                  <m:grow/>
-                                </m:dPr>
-                                <m:e>
-                                  <m:r>
-                                    <m:t>x</m:t>
-                                  </m:r>
-                                </m:e>
-                              </m:d>
-                            </m:den>
-                          </m:f>
-                        </m:e>
-                      </m:d>
-                      <m:r>
-                        <m:rPr>
-                          <m:sty m:val="p"/>
-                        </m:rPr>
-                        <m:t>=</m:t>
-                      </m:r>
-                      <m:sSub>
-                        <m:e>
-                          <m:r>
-                            <m:t>β</m:t>
-                          </m:r>
-                        </m:e>
-                        <m:sub>
-                          <m:r>
-                            <m:t>0</m:t>
-                          </m:r>
-                        </m:sub>
-                      </m:sSub>
-                      <m:r>
-                        <m:rPr>
-                          <m:sty m:val="p"/>
-                        </m:rPr>
-                        <m:t>+</m:t>
-                      </m:r>
-                      <m:sSub>
-                        <m:e>
-                          <m:r>
-                            <m:t>β</m:t>
-                          </m:r>
-                        </m:e>
-                        <m:sub>
-                          <m:r>
-                            <m:t>1</m:t>
-                          </m:r>
-                        </m:sub>
-                      </m:sSub>
-                      <m:r>
-                        <m:t>x</m:t>
-                      </m:r>
-                    </m:oMath>
-                  </m:oMathPara>
+                  <m:oMath xmlns:m="http://schemas.openxmlformats.org/officeDocument/2006/math">
+                    <m:r>
+                      <m:t>g</m:t>
+                    </m:r>
+                    <m:d>
+                      <m:dPr>
+                        <m:begChr m:val="("/>
+                        <m:sepChr m:val=""/>
+                        <m:endChr m:val=")"/>
+                        <m:grow/>
+                      </m:dPr>
+                      <m:e>
+                        <m:r>
+                          <m:t>x</m:t>
+                        </m:r>
+                      </m:e>
+                    </m:d>
+                    <m:r>
+                      <m:rPr>
+                        <m:sty m:val="p"/>
+                      </m:rPr>
+                      <m:t>=</m:t>
+                    </m:r>
+                    <m:r>
+                      <m:rPr>
+                        <m:sty m:val="p"/>
+                      </m:rPr>
+                      <m:t>log</m:t>
+                    </m:r>
+                    <m:d>
+                      <m:dPr>
+                        <m:begChr m:val="("/>
+                        <m:sepChr m:val=""/>
+                        <m:endChr m:val=")"/>
+                        <m:grow/>
+                      </m:dPr>
+                      <m:e>
+                        <m:f>
+                          <m:fPr>
+                            <m:type m:val="bar"/>
+                          </m:fPr>
+                          <m:num>
+                            <m:r>
+                              <m:t>π</m:t>
+                            </m:r>
+                            <m:d>
+                              <m:dPr>
+                                <m:begChr m:val="("/>
+                                <m:sepChr m:val=""/>
+                                <m:endChr m:val=")"/>
+                                <m:grow/>
+                              </m:dPr>
+                              <m:e>
+                                <m:r>
+                                  <m:t>x</m:t>
+                                </m:r>
+                              </m:e>
+                            </m:d>
+                          </m:num>
+                          <m:den>
+                            <m:r>
+                              <m:t>1</m:t>
+                            </m:r>
+                            <m:r>
+                              <m:rPr>
+                                <m:sty m:val="p"/>
+                              </m:rPr>
+                              <m:t>−</m:t>
+                            </m:r>
+                            <m:r>
+                              <m:t>π</m:t>
+                            </m:r>
+                            <m:d>
+                              <m:dPr>
+                                <m:begChr m:val="("/>
+                                <m:sepChr m:val=""/>
+                                <m:endChr m:val=")"/>
+                                <m:grow/>
+                              </m:dPr>
+                              <m:e>
+                                <m:r>
+                                  <m:t>x</m:t>
+                                </m:r>
+                              </m:e>
+                            </m:d>
+                          </m:den>
+                        </m:f>
+                      </m:e>
+                    </m:d>
+                    <m:r>
+                      <m:rPr>
+                        <m:sty m:val="p"/>
+                      </m:rPr>
+                      <m:t>=</m:t>
+                    </m:r>
+                    <m:sSub>
+                      <m:e>
+                        <m:r>
+                          <m:t>β</m:t>
+                        </m:r>
+                      </m:e>
+                      <m:sub>
+                        <m:r>
+                          <m:t>0</m:t>
+                        </m:r>
+                      </m:sub>
+                    </m:sSub>
+                    <m:r>
+                      <m:rPr>
+                        <m:sty m:val="p"/>
+                      </m:rPr>
+                      <m:t>+</m:t>
+                    </m:r>
+                    <m:sSub>
+                      <m:e>
+                        <m:r>
+                          <m:t>β</m:t>
+                        </m:r>
+                      </m:e>
+                      <m:sub>
+                        <m:r>
+                          <m:t>1</m:t>
+                        </m:r>
+                      </m:sub>
+                    </m:sSub>
+                    <m:r>
+                      <m:t>x</m:t>
+                    </m:r>
+                  </m:oMath>
                 </a14:m>
               </a:p>
               <a:p>
-                <a:pPr lvl="0" indent="0" marL="0">
-                  <a:buNone/>
-                </a:pPr>
+                <a:pPr lvl="0"/>
                 <a:r>
                   <a:rPr/>
-                  <a:t>This transforms the probability (which is bounded between 0 and 1) to a linear function that can range from -∞ to +∞.</a:t>
+                  <a:t>transforms probability (bounded between 0 and 1) to linear fx ranges from -∞ to +∞.</a:t>
                 </a:r>
               </a:p>
             </p:txBody>
@@ -7726,96 +7340,6 @@
 </p:sld>
 </file>
 
-<file path=ppt/slides/slide22.xml><?xml version="1.0" encoding="utf-8"?>
-<p:sld xmlns:a="http://schemas.openxmlformats.org/drawingml/2006/main" xmlns:r="http://schemas.openxmlformats.org/officeDocument/2006/relationships" xmlns:p="http://schemas.openxmlformats.org/presentationml/2006/main">
-  <p:cSld>
-    <p:spTree>
-      <p:nvGrpSpPr>
-        <p:cNvPr id="1" name=""/>
-        <p:cNvGrpSpPr/>
-        <p:nvPr/>
-      </p:nvGrpSpPr>
-      <p:grpSpPr>
-        <a:xfrm>
-          <a:off x="0" y="0"/>
-          <a:ext cx="0" cy="0"/>
-          <a:chOff x="0" y="0"/>
-          <a:chExt cx="0" cy="0"/>
-        </a:xfrm>
-      </p:grpSpPr>
-      <p:sp>
-        <p:nvSpPr>
-          <p:cNvPr id="2" name="Title 1"/>
-          <p:cNvSpPr>
-            <a:spLocks noGrp="1"/>
-          </p:cNvSpPr>
-          <p:nvPr>
-            <p:ph type="title"/>
-          </p:nvPr>
-        </p:nvSpPr>
-        <p:spPr>
-          <a:xfrm>
-            <a:off x="0" y="0"/>
-            <a:ext cx="9144000" cy="582780"/>
-          </a:xfrm>
-        </p:spPr>
-        <p:txBody>
-          <a:bodyPr/>
-          <a:lstStyle/>
-          <a:p>
-            <a:pPr lvl="0" indent="0" marL="0">
-              <a:buNone/>
-            </a:pPr>
-            <a:r>
-              <a:rPr/>
-              <a:t>Example: Lizard Presence on Islands</a:t>
-            </a:r>
-          </a:p>
-        </p:txBody>
-      </p:sp>
-      <p:sp>
-        <p:nvSpPr>
-          <p:cNvPr id="3" name="Content Placeholder 2"/>
-          <p:cNvSpPr>
-            <a:spLocks noGrp="1"/>
-          </p:cNvSpPr>
-          <p:nvPr>
-            <p:ph idx="1"/>
-          </p:nvPr>
-        </p:nvSpPr>
-        <p:spPr/>
-        <p:txBody>
-          <a:bodyPr/>
-          <a:lstStyle/>
-          <a:p>
-            <a:pPr lvl="0" indent="0" marL="0">
-              <a:buNone/>
-            </a:pPr>
-            <a:r>
-              <a:rPr/>
-              <a:t>Based on the example from Polis et al. (1998), we’ll model the presence/absence of lizards (</a:t>
-            </a:r>
-            <a:r>
-              <a:rPr i="1"/>
-              <a:t>Uta</a:t>
-            </a:r>
-            <a:r>
-              <a:rPr/>
-              <a:t>) on islands in the Gulf of California based on perimeter/area ratio.</a:t>
-            </a:r>
-          </a:p>
-          <a:p>
-            <a:pPr lvl="0" indent="0" marL="0">
-              <a:buNone/>
-            </a:pPr>
-          </a:p>
-        </p:txBody>
-      </p:sp>
-    </p:spTree>
-  </p:cSld>
-</p:sld>
-</file>
-
 <file path=ppt/slides/slide23.xml><?xml version="1.0" encoding="utf-8"?>
 <p:sld xmlns:a="http://schemas.openxmlformats.org/drawingml/2006/main" xmlns:r="http://schemas.openxmlformats.org/officeDocument/2006/relationships" xmlns:p="http://schemas.openxmlformats.org/presentationml/2006/main">
   <p:cSld>
@@ -7883,7 +7407,7 @@
             </a:pPr>
             <a:r>
               <a:rPr/>
-              <a:t>Based on the example from Polis et al. (1998), we’ll model the presence/absence of lizards (</a:t>
+              <a:t>Based on the example from Polis et al. (1998) - presence/absence of lizards (</a:t>
             </a:r>
             <a:r>
               <a:rPr i="1"/>
@@ -7891,398 +7415,13 @@
             </a:r>
             <a:r>
               <a:rPr/>
-              <a:t>) on islands in the Gulf of California based on perimeter/area ratio.</a:t>
-            </a:r>
-          </a:p>
-          <a:p>
-            <a:pPr lvl="0" indent="0">
+              <a:t>) on islands in Gulf of California based on perimeter/area ratio.</a:t>
+            </a:r>
+          </a:p>
+          <a:p>
+            <a:pPr lvl="0" indent="0" marL="0">
               <a:buNone/>
             </a:pPr>
-            <a:r>
-              <a:rPr>
-                <a:solidFill>
-                  <a:srgbClr val="5E5E5E"/>
-                </a:solidFill>
-                <a:latin typeface="Courier"/>
-              </a:rPr>
-              <a:t># Fit the logistic regression model</a:t>
-            </a:r>
-            <a:br/>
-            <a:r>
-              <a:rPr>
-                <a:solidFill>
-                  <a:srgbClr val="003B4F"/>
-                </a:solidFill>
-                <a:latin typeface="Courier"/>
-              </a:rPr>
-              <a:t>lizard_model &lt;- </a:t>
-            </a:r>
-            <a:r>
-              <a:rPr>
-                <a:solidFill>
-                  <a:srgbClr val="4758AB"/>
-                </a:solidFill>
-                <a:latin typeface="Courier"/>
-              </a:rPr>
-              <a:t>glm</a:t>
-            </a:r>
-            <a:r>
-              <a:rPr>
-                <a:solidFill>
-                  <a:srgbClr val="003B4F"/>
-                </a:solidFill>
-                <a:latin typeface="Courier"/>
-              </a:rPr>
-              <a:t>(uta_present </a:t>
-            </a:r>
-            <a:r>
-              <a:rPr>
-                <a:solidFill>
-                  <a:srgbClr val="5E5E5E"/>
-                </a:solidFill>
-                <a:latin typeface="Courier"/>
-              </a:rPr>
-              <a:t>~</a:t>
-            </a:r>
-            <a:r>
-              <a:rPr>
-                <a:solidFill>
-                  <a:srgbClr val="003B4F"/>
-                </a:solidFill>
-                <a:latin typeface="Courier"/>
-              </a:rPr>
-              <a:t> pa_ratio, </a:t>
-            </a:r>
-            <a:br/>
-            <a:r>
-              <a:rPr>
-                <a:solidFill>
-                  <a:srgbClr val="003B4F"/>
-                </a:solidFill>
-                <a:latin typeface="Courier"/>
-              </a:rPr>
-              <a:t>                    </a:t>
-            </a:r>
-            <a:r>
-              <a:rPr>
-                <a:solidFill>
-                  <a:srgbClr val="657422"/>
-                </a:solidFill>
-                <a:latin typeface="Courier"/>
-              </a:rPr>
-              <a:t>data =</a:t>
-            </a:r>
-            <a:r>
-              <a:rPr>
-                <a:solidFill>
-                  <a:srgbClr val="003B4F"/>
-                </a:solidFill>
-                <a:latin typeface="Courier"/>
-              </a:rPr>
-              <a:t> island_data, </a:t>
-            </a:r>
-            <a:br/>
-            <a:r>
-              <a:rPr>
-                <a:solidFill>
-                  <a:srgbClr val="003B4F"/>
-                </a:solidFill>
-                <a:latin typeface="Courier"/>
-              </a:rPr>
-              <a:t>                    </a:t>
-            </a:r>
-            <a:r>
-              <a:rPr>
-                <a:solidFill>
-                  <a:srgbClr val="657422"/>
-                </a:solidFill>
-                <a:latin typeface="Courier"/>
-              </a:rPr>
-              <a:t>family =</a:t>
-            </a:r>
-            <a:r>
-              <a:rPr>
-                <a:solidFill>
-                  <a:srgbClr val="003B4F"/>
-                </a:solidFill>
-                <a:latin typeface="Courier"/>
-              </a:rPr>
-              <a:t> </a:t>
-            </a:r>
-            <a:r>
-              <a:rPr>
-                <a:solidFill>
-                  <a:srgbClr val="4758AB"/>
-                </a:solidFill>
-                <a:latin typeface="Courier"/>
-              </a:rPr>
-              <a:t>binomial</a:t>
-            </a:r>
-            <a:r>
-              <a:rPr>
-                <a:solidFill>
-                  <a:srgbClr val="003B4F"/>
-                </a:solidFill>
-                <a:latin typeface="Courier"/>
-              </a:rPr>
-              <a:t>(</a:t>
-            </a:r>
-            <a:r>
-              <a:rPr>
-                <a:solidFill>
-                  <a:srgbClr val="657422"/>
-                </a:solidFill>
-                <a:latin typeface="Courier"/>
-              </a:rPr>
-              <a:t>link =</a:t>
-            </a:r>
-            <a:r>
-              <a:rPr>
-                <a:solidFill>
-                  <a:srgbClr val="003B4F"/>
-                </a:solidFill>
-                <a:latin typeface="Courier"/>
-              </a:rPr>
-              <a:t> </a:t>
-            </a:r>
-            <a:r>
-              <a:rPr>
-                <a:solidFill>
-                  <a:srgbClr val="20794D"/>
-                </a:solidFill>
-                <a:latin typeface="Courier"/>
-              </a:rPr>
-              <a:t>"logit"</a:t>
-            </a:r>
-            <a:r>
-              <a:rPr>
-                <a:solidFill>
-                  <a:srgbClr val="003B4F"/>
-                </a:solidFill>
-                <a:latin typeface="Courier"/>
-              </a:rPr>
-              <a:t>))</a:t>
-            </a:r>
-            <a:br/>
-            <a:br/>
-            <a:r>
-              <a:rPr>
-                <a:solidFill>
-                  <a:srgbClr val="5E5E5E"/>
-                </a:solidFill>
-                <a:latin typeface="Courier"/>
-              </a:rPr>
-              <a:t># Model summary</a:t>
-            </a:r>
-            <a:br/>
-            <a:r>
-              <a:rPr>
-                <a:solidFill>
-                  <a:srgbClr val="4758AB"/>
-                </a:solidFill>
-                <a:latin typeface="Courier"/>
-              </a:rPr>
-              <a:t>summary</a:t>
-            </a:r>
-            <a:r>
-              <a:rPr>
-                <a:solidFill>
-                  <a:srgbClr val="003B4F"/>
-                </a:solidFill>
-                <a:latin typeface="Courier"/>
-              </a:rPr>
-              <a:t>(lizard_model)</a:t>
-            </a:r>
-            <a:br/>
-            <a:r>
-              <a:rPr i="1">
-                <a:solidFill>
-                  <a:srgbClr val="5E5E5E"/>
-                </a:solidFill>
-                <a:latin typeface="Courier"/>
-              </a:rPr>
-              <a:t>## </a:t>
-            </a:r>
-            <a:br/>
-            <a:r>
-              <a:rPr i="1">
-                <a:solidFill>
-                  <a:srgbClr val="5E5E5E"/>
-                </a:solidFill>
-                <a:latin typeface="Courier"/>
-              </a:rPr>
-              <a:t>## Call:</a:t>
-            </a:r>
-            <a:br/>
-            <a:r>
-              <a:rPr i="1">
-                <a:solidFill>
-                  <a:srgbClr val="5E5E5E"/>
-                </a:solidFill>
-                <a:latin typeface="Courier"/>
-              </a:rPr>
-              <a:t>## glm(formula = uta_present ~ pa_ratio, family = binomial(link = "logit"), </a:t>
-            </a:r>
-            <a:br/>
-            <a:r>
-              <a:rPr i="1">
-                <a:solidFill>
-                  <a:srgbClr val="5E5E5E"/>
-                </a:solidFill>
-                <a:latin typeface="Courier"/>
-              </a:rPr>
-              <a:t>##     data = island_data)</a:t>
-            </a:r>
-            <a:br/>
-            <a:r>
-              <a:rPr i="1">
-                <a:solidFill>
-                  <a:srgbClr val="5E5E5E"/>
-                </a:solidFill>
-                <a:latin typeface="Courier"/>
-              </a:rPr>
-              <a:t>## </a:t>
-            </a:r>
-            <a:br/>
-            <a:r>
-              <a:rPr i="1">
-                <a:solidFill>
-                  <a:srgbClr val="5E5E5E"/>
-                </a:solidFill>
-                <a:latin typeface="Courier"/>
-              </a:rPr>
-              <a:t>## Coefficients:</a:t>
-            </a:r>
-            <a:br/>
-            <a:r>
-              <a:rPr i="1">
-                <a:solidFill>
-                  <a:srgbClr val="5E5E5E"/>
-                </a:solidFill>
-                <a:latin typeface="Courier"/>
-              </a:rPr>
-              <a:t>##             Estimate Std. Error z value Pr(&gt;|z|)   </a:t>
-            </a:r>
-            <a:br/>
-            <a:r>
-              <a:rPr i="1">
-                <a:solidFill>
-                  <a:srgbClr val="5E5E5E"/>
-                </a:solidFill>
-                <a:latin typeface="Courier"/>
-              </a:rPr>
-              <a:t>## (Intercept)   5.9374     2.1297   2.788  0.00530 **</a:t>
-            </a:r>
-            <a:br/>
-            <a:r>
-              <a:rPr i="1">
-                <a:solidFill>
-                  <a:srgbClr val="5E5E5E"/>
-                </a:solidFill>
-                <a:latin typeface="Courier"/>
-              </a:rPr>
-              <a:t>## pa_ratio     -0.1493     0.0517  -2.887  0.00388 **</a:t>
-            </a:r>
-            <a:br/>
-            <a:r>
-              <a:rPr i="1">
-                <a:solidFill>
-                  <a:srgbClr val="5E5E5E"/>
-                </a:solidFill>
-                <a:latin typeface="Courier"/>
-              </a:rPr>
-              <a:t>## ---</a:t>
-            </a:r>
-            <a:br/>
-            <a:r>
-              <a:rPr i="1">
-                <a:solidFill>
-                  <a:srgbClr val="5E5E5E"/>
-                </a:solidFill>
-                <a:latin typeface="Courier"/>
-              </a:rPr>
-              <a:t>## Signif. codes:  0 '***' 0.001 '**' 0.01 '*' 0.05 '.' 0.1 ' ' 1</a:t>
-            </a:r>
-            <a:br/>
-            <a:r>
-              <a:rPr i="1">
-                <a:solidFill>
-                  <a:srgbClr val="5E5E5E"/>
-                </a:solidFill>
-                <a:latin typeface="Courier"/>
-              </a:rPr>
-              <a:t>## </a:t>
-            </a:r>
-            <a:br/>
-            <a:r>
-              <a:rPr i="1">
-                <a:solidFill>
-                  <a:srgbClr val="5E5E5E"/>
-                </a:solidFill>
-                <a:latin typeface="Courier"/>
-              </a:rPr>
-              <a:t>## (Dispersion parameter for binomial family taken to be 1)</a:t>
-            </a:r>
-            <a:br/>
-            <a:r>
-              <a:rPr i="1">
-                <a:solidFill>
-                  <a:srgbClr val="5E5E5E"/>
-                </a:solidFill>
-                <a:latin typeface="Courier"/>
-              </a:rPr>
-              <a:t>## </a:t>
-            </a:r>
-            <a:br/>
-            <a:r>
-              <a:rPr i="1">
-                <a:solidFill>
-                  <a:srgbClr val="5E5E5E"/>
-                </a:solidFill>
-                <a:latin typeface="Courier"/>
-              </a:rPr>
-              <a:t>##     Null deviance: 41.455  on 29  degrees of freedom</a:t>
-            </a:r>
-            <a:br/>
-            <a:r>
-              <a:rPr i="1">
-                <a:solidFill>
-                  <a:srgbClr val="5E5E5E"/>
-                </a:solidFill>
-                <a:latin typeface="Courier"/>
-              </a:rPr>
-              <a:t>## Residual deviance: 19.090  on 28  degrees of freedom</a:t>
-            </a:r>
-            <a:br/>
-            <a:r>
-              <a:rPr i="1">
-                <a:solidFill>
-                  <a:srgbClr val="5E5E5E"/>
-                </a:solidFill>
-                <a:latin typeface="Courier"/>
-              </a:rPr>
-              <a:t>## AIC: 23.09</a:t>
-            </a:r>
-            <a:br/>
-            <a:r>
-              <a:rPr i="1">
-                <a:solidFill>
-                  <a:srgbClr val="5E5E5E"/>
-                </a:solidFill>
-                <a:latin typeface="Courier"/>
-              </a:rPr>
-              <a:t>## </a:t>
-            </a:r>
-            <a:br/>
-            <a:r>
-              <a:rPr i="1">
-                <a:solidFill>
-                  <a:srgbClr val="5E5E5E"/>
-                </a:solidFill>
-                <a:latin typeface="Courier"/>
-              </a:rPr>
-              <a:t>## Number of Fisher Scoring iterations: 6</a:t>
-            </a:r>
           </a:p>
         </p:txBody>
       </p:sp>
@@ -8292,6 +7431,490 @@
 </file>
 
 <file path=ppt/slides/slide24.xml><?xml version="1.0" encoding="utf-8"?>
+<p:sld xmlns:a="http://schemas.openxmlformats.org/drawingml/2006/main" xmlns:r="http://schemas.openxmlformats.org/officeDocument/2006/relationships" xmlns:p="http://schemas.openxmlformats.org/presentationml/2006/main">
+  <p:cSld>
+    <p:spTree>
+      <p:nvGrpSpPr>
+        <p:cNvPr id="1" name=""/>
+        <p:cNvGrpSpPr/>
+        <p:nvPr/>
+      </p:nvGrpSpPr>
+      <p:grpSpPr>
+        <a:xfrm>
+          <a:off x="0" y="0"/>
+          <a:ext cx="0" cy="0"/>
+          <a:chOff x="0" y="0"/>
+          <a:chExt cx="0" cy="0"/>
+        </a:xfrm>
+      </p:grpSpPr>
+      <p:sp>
+        <p:nvSpPr>
+          <p:cNvPr id="2" name="Title 1"/>
+          <p:cNvSpPr>
+            <a:spLocks noGrp="1"/>
+          </p:cNvSpPr>
+          <p:nvPr>
+            <p:ph type="title"/>
+          </p:nvPr>
+        </p:nvSpPr>
+        <p:spPr>
+          <a:xfrm>
+            <a:off x="0" y="0"/>
+            <a:ext cx="9144000" cy="582780"/>
+          </a:xfrm>
+        </p:spPr>
+        <p:txBody>
+          <a:bodyPr/>
+          <a:lstStyle/>
+          <a:p>
+            <a:pPr lvl="0" indent="0" marL="0">
+              <a:buNone/>
+            </a:pPr>
+            <a:r>
+              <a:rPr/>
+              <a:t>Example: Lizard Presence on Islands</a:t>
+            </a:r>
+          </a:p>
+        </p:txBody>
+      </p:sp>
+      <p:sp>
+        <p:nvSpPr>
+          <p:cNvPr id="3" name="Content Placeholder 2"/>
+          <p:cNvSpPr>
+            <a:spLocks noGrp="1"/>
+          </p:cNvSpPr>
+          <p:nvPr>
+            <p:ph idx="1"/>
+          </p:nvPr>
+        </p:nvSpPr>
+        <p:spPr/>
+        <p:txBody>
+          <a:bodyPr/>
+          <a:lstStyle/>
+          <a:p>
+            <a:pPr lvl="0" indent="0" marL="0">
+              <a:buNone/>
+            </a:pPr>
+            <a:r>
+              <a:rPr/>
+              <a:t>Based on the example from Polis et al. (1998) - presence/absence of lizards (</a:t>
+            </a:r>
+            <a:r>
+              <a:rPr i="1"/>
+              <a:t>Uta</a:t>
+            </a:r>
+            <a:r>
+              <a:rPr/>
+              <a:t>) on islands in Gulf of California based on perimeter/area ratio. ::: {.panel column=“screen”}</a:t>
+            </a:r>
+          </a:p>
+          <a:p>
+            <a:pPr lvl="0" indent="0">
+              <a:buNone/>
+            </a:pPr>
+            <a:r>
+              <a:rPr>
+                <a:solidFill>
+                  <a:srgbClr val="5E5E5E"/>
+                </a:solidFill>
+                <a:latin typeface="Courier"/>
+              </a:rPr>
+              <a:t># Fit the logistic regression model</a:t>
+            </a:r>
+            <a:br/>
+            <a:r>
+              <a:rPr>
+                <a:solidFill>
+                  <a:srgbClr val="003B4F"/>
+                </a:solidFill>
+                <a:latin typeface="Courier"/>
+              </a:rPr>
+              <a:t>lizard_model &lt;- </a:t>
+            </a:r>
+            <a:r>
+              <a:rPr>
+                <a:solidFill>
+                  <a:srgbClr val="4758AB"/>
+                </a:solidFill>
+                <a:latin typeface="Courier"/>
+              </a:rPr>
+              <a:t>glm</a:t>
+            </a:r>
+            <a:r>
+              <a:rPr>
+                <a:solidFill>
+                  <a:srgbClr val="003B4F"/>
+                </a:solidFill>
+                <a:latin typeface="Courier"/>
+              </a:rPr>
+              <a:t>(uta_present </a:t>
+            </a:r>
+            <a:r>
+              <a:rPr>
+                <a:solidFill>
+                  <a:srgbClr val="5E5E5E"/>
+                </a:solidFill>
+                <a:latin typeface="Courier"/>
+              </a:rPr>
+              <a:t>~</a:t>
+            </a:r>
+            <a:r>
+              <a:rPr>
+                <a:solidFill>
+                  <a:srgbClr val="003B4F"/>
+                </a:solidFill>
+                <a:latin typeface="Courier"/>
+              </a:rPr>
+              <a:t> pa_ratio, </a:t>
+            </a:r>
+            <a:br/>
+            <a:r>
+              <a:rPr>
+                <a:solidFill>
+                  <a:srgbClr val="003B4F"/>
+                </a:solidFill>
+                <a:latin typeface="Courier"/>
+              </a:rPr>
+              <a:t>                    </a:t>
+            </a:r>
+            <a:r>
+              <a:rPr>
+                <a:solidFill>
+                  <a:srgbClr val="657422"/>
+                </a:solidFill>
+                <a:latin typeface="Courier"/>
+              </a:rPr>
+              <a:t>data =</a:t>
+            </a:r>
+            <a:r>
+              <a:rPr>
+                <a:solidFill>
+                  <a:srgbClr val="003B4F"/>
+                </a:solidFill>
+                <a:latin typeface="Courier"/>
+              </a:rPr>
+              <a:t> island_data, </a:t>
+            </a:r>
+            <a:br/>
+            <a:r>
+              <a:rPr>
+                <a:solidFill>
+                  <a:srgbClr val="003B4F"/>
+                </a:solidFill>
+                <a:latin typeface="Courier"/>
+              </a:rPr>
+              <a:t>                    </a:t>
+            </a:r>
+            <a:r>
+              <a:rPr>
+                <a:solidFill>
+                  <a:srgbClr val="657422"/>
+                </a:solidFill>
+                <a:latin typeface="Courier"/>
+              </a:rPr>
+              <a:t>family =</a:t>
+            </a:r>
+            <a:r>
+              <a:rPr>
+                <a:solidFill>
+                  <a:srgbClr val="003B4F"/>
+                </a:solidFill>
+                <a:latin typeface="Courier"/>
+              </a:rPr>
+              <a:t> </a:t>
+            </a:r>
+            <a:r>
+              <a:rPr>
+                <a:solidFill>
+                  <a:srgbClr val="4758AB"/>
+                </a:solidFill>
+                <a:latin typeface="Courier"/>
+              </a:rPr>
+              <a:t>binomial</a:t>
+            </a:r>
+            <a:r>
+              <a:rPr>
+                <a:solidFill>
+                  <a:srgbClr val="003B4F"/>
+                </a:solidFill>
+                <a:latin typeface="Courier"/>
+              </a:rPr>
+              <a:t>(</a:t>
+            </a:r>
+            <a:r>
+              <a:rPr>
+                <a:solidFill>
+                  <a:srgbClr val="657422"/>
+                </a:solidFill>
+                <a:latin typeface="Courier"/>
+              </a:rPr>
+              <a:t>link =</a:t>
+            </a:r>
+            <a:r>
+              <a:rPr>
+                <a:solidFill>
+                  <a:srgbClr val="003B4F"/>
+                </a:solidFill>
+                <a:latin typeface="Courier"/>
+              </a:rPr>
+              <a:t> </a:t>
+            </a:r>
+            <a:r>
+              <a:rPr>
+                <a:solidFill>
+                  <a:srgbClr val="20794D"/>
+                </a:solidFill>
+                <a:latin typeface="Courier"/>
+              </a:rPr>
+              <a:t>"logit"</a:t>
+            </a:r>
+            <a:r>
+              <a:rPr>
+                <a:solidFill>
+                  <a:srgbClr val="003B4F"/>
+                </a:solidFill>
+                <a:latin typeface="Courier"/>
+              </a:rPr>
+              <a:t>))</a:t>
+            </a:r>
+            <a:br/>
+            <a:br/>
+            <a:r>
+              <a:rPr>
+                <a:solidFill>
+                  <a:srgbClr val="5E5E5E"/>
+                </a:solidFill>
+                <a:latin typeface="Courier"/>
+              </a:rPr>
+              <a:t># Model summary</a:t>
+            </a:r>
+            <a:br/>
+            <a:r>
+              <a:rPr>
+                <a:solidFill>
+                  <a:srgbClr val="4758AB"/>
+                </a:solidFill>
+                <a:latin typeface="Courier"/>
+              </a:rPr>
+              <a:t>summary</a:t>
+            </a:r>
+            <a:r>
+              <a:rPr>
+                <a:solidFill>
+                  <a:srgbClr val="003B4F"/>
+                </a:solidFill>
+                <a:latin typeface="Courier"/>
+              </a:rPr>
+              <a:t>(lizard_model)</a:t>
+            </a:r>
+            <a:br/>
+            <a:r>
+              <a:rPr i="1">
+                <a:solidFill>
+                  <a:srgbClr val="5E5E5E"/>
+                </a:solidFill>
+                <a:latin typeface="Courier"/>
+              </a:rPr>
+              <a:t>## </a:t>
+            </a:r>
+            <a:br/>
+            <a:r>
+              <a:rPr i="1">
+                <a:solidFill>
+                  <a:srgbClr val="5E5E5E"/>
+                </a:solidFill>
+                <a:latin typeface="Courier"/>
+              </a:rPr>
+              <a:t>## Call:</a:t>
+            </a:r>
+            <a:br/>
+            <a:r>
+              <a:rPr i="1">
+                <a:solidFill>
+                  <a:srgbClr val="5E5E5E"/>
+                </a:solidFill>
+                <a:latin typeface="Courier"/>
+              </a:rPr>
+              <a:t>## glm(formula = uta_present ~ pa_ratio, family = binomial(link = "logit"), </a:t>
+            </a:r>
+            <a:br/>
+            <a:r>
+              <a:rPr i="1">
+                <a:solidFill>
+                  <a:srgbClr val="5E5E5E"/>
+                </a:solidFill>
+                <a:latin typeface="Courier"/>
+              </a:rPr>
+              <a:t>##     data = island_data)</a:t>
+            </a:r>
+            <a:br/>
+            <a:r>
+              <a:rPr i="1">
+                <a:solidFill>
+                  <a:srgbClr val="5E5E5E"/>
+                </a:solidFill>
+                <a:latin typeface="Courier"/>
+              </a:rPr>
+              <a:t>## </a:t>
+            </a:r>
+            <a:br/>
+            <a:r>
+              <a:rPr i="1">
+                <a:solidFill>
+                  <a:srgbClr val="5E5E5E"/>
+                </a:solidFill>
+                <a:latin typeface="Courier"/>
+              </a:rPr>
+              <a:t>## Coefficients:</a:t>
+            </a:r>
+            <a:br/>
+            <a:r>
+              <a:rPr i="1">
+                <a:solidFill>
+                  <a:srgbClr val="5E5E5E"/>
+                </a:solidFill>
+                <a:latin typeface="Courier"/>
+              </a:rPr>
+              <a:t>##             Estimate Std. Error z value Pr(&gt;|z|)   </a:t>
+            </a:r>
+            <a:br/>
+            <a:r>
+              <a:rPr i="1">
+                <a:solidFill>
+                  <a:srgbClr val="5E5E5E"/>
+                </a:solidFill>
+                <a:latin typeface="Courier"/>
+              </a:rPr>
+              <a:t>## (Intercept)   5.9374     2.1297   2.788  0.00530 **</a:t>
+            </a:r>
+            <a:br/>
+            <a:r>
+              <a:rPr i="1">
+                <a:solidFill>
+                  <a:srgbClr val="5E5E5E"/>
+                </a:solidFill>
+                <a:latin typeface="Courier"/>
+              </a:rPr>
+              <a:t>## pa_ratio     -0.1493     0.0517  -2.887  0.00388 **</a:t>
+            </a:r>
+            <a:br/>
+            <a:r>
+              <a:rPr i="1">
+                <a:solidFill>
+                  <a:srgbClr val="5E5E5E"/>
+                </a:solidFill>
+                <a:latin typeface="Courier"/>
+              </a:rPr>
+              <a:t>## ---</a:t>
+            </a:r>
+            <a:br/>
+            <a:r>
+              <a:rPr i="1">
+                <a:solidFill>
+                  <a:srgbClr val="5E5E5E"/>
+                </a:solidFill>
+                <a:latin typeface="Courier"/>
+              </a:rPr>
+              <a:t>## Signif. codes:  0 '***' 0.001 '**' 0.01 '*' 0.05 '.' 0.1 ' ' 1</a:t>
+            </a:r>
+            <a:br/>
+            <a:r>
+              <a:rPr i="1">
+                <a:solidFill>
+                  <a:srgbClr val="5E5E5E"/>
+                </a:solidFill>
+                <a:latin typeface="Courier"/>
+              </a:rPr>
+              <a:t>## </a:t>
+            </a:r>
+            <a:br/>
+            <a:r>
+              <a:rPr i="1">
+                <a:solidFill>
+                  <a:srgbClr val="5E5E5E"/>
+                </a:solidFill>
+                <a:latin typeface="Courier"/>
+              </a:rPr>
+              <a:t>## (Dispersion parameter for binomial family taken to be 1)</a:t>
+            </a:r>
+            <a:br/>
+            <a:r>
+              <a:rPr i="1">
+                <a:solidFill>
+                  <a:srgbClr val="5E5E5E"/>
+                </a:solidFill>
+                <a:latin typeface="Courier"/>
+              </a:rPr>
+              <a:t>## </a:t>
+            </a:r>
+            <a:br/>
+            <a:r>
+              <a:rPr i="1">
+                <a:solidFill>
+                  <a:srgbClr val="5E5E5E"/>
+                </a:solidFill>
+                <a:latin typeface="Courier"/>
+              </a:rPr>
+              <a:t>##     Null deviance: 41.455  on 29  degrees of freedom</a:t>
+            </a:r>
+            <a:br/>
+            <a:r>
+              <a:rPr i="1">
+                <a:solidFill>
+                  <a:srgbClr val="5E5E5E"/>
+                </a:solidFill>
+                <a:latin typeface="Courier"/>
+              </a:rPr>
+              <a:t>## Residual deviance: 19.090  on 28  degrees of freedom</a:t>
+            </a:r>
+            <a:br/>
+            <a:r>
+              <a:rPr i="1">
+                <a:solidFill>
+                  <a:srgbClr val="5E5E5E"/>
+                </a:solidFill>
+                <a:latin typeface="Courier"/>
+              </a:rPr>
+              <a:t>## AIC: 23.09</a:t>
+            </a:r>
+            <a:br/>
+            <a:r>
+              <a:rPr i="1">
+                <a:solidFill>
+                  <a:srgbClr val="5E5E5E"/>
+                </a:solidFill>
+                <a:latin typeface="Courier"/>
+              </a:rPr>
+              <a:t>## </a:t>
+            </a:r>
+            <a:br/>
+            <a:r>
+              <a:rPr i="1">
+                <a:solidFill>
+                  <a:srgbClr val="5E5E5E"/>
+                </a:solidFill>
+                <a:latin typeface="Courier"/>
+              </a:rPr>
+              <a:t>## Number of Fisher Scoring iterations: 6</a:t>
+            </a:r>
+          </a:p>
+          <a:p>
+            <a:pPr lvl="0" indent="0" marL="0">
+              <a:buNone/>
+            </a:pPr>
+            <a:r>
+              <a:rPr/>
+              <a:t>:::</a:t>
+            </a:r>
+          </a:p>
+        </p:txBody>
+      </p:sp>
+    </p:spTree>
+  </p:cSld>
+</p:sld>
+</file>
+
+<file path=ppt/slides/slide25.xml><?xml version="1.0" encoding="utf-8"?>
 <p:sld xmlns:a="http://schemas.openxmlformats.org/drawingml/2006/main" xmlns:r="http://schemas.openxmlformats.org/officeDocument/2006/relationships" xmlns:p="http://schemas.openxmlformats.org/presentationml/2006/main">
   <p:cSld>
     <p:spTree>
@@ -8408,18 +8031,21 @@
           <a:bodyPr/>
           <a:lstStyle/>
           <a:p>
-            <a:pPr lvl="0" indent="0" marL="0">
-              <a:buNone/>
-            </a:pPr>
-            <a:r>
-              <a:rPr/>
-              <a:t>We want to test the null hypothesis that β₁ = 0, meaning there’s no relationship between P/A ratio and lizard presence.</a:t>
-            </a:r>
-          </a:p>
-          <a:p>
-            <a:pPr lvl="0" indent="0" marL="0">
-              <a:buNone/>
-            </a:pPr>
+            <a:pPr lvl="0"/>
+            <a:r>
+              <a:rPr/>
+              <a:t>Test null hypothesis that β₁ = 0</a:t>
+            </a:r>
+          </a:p>
+          <a:p>
+            <a:pPr lvl="1"/>
+            <a:r>
+              <a:rPr/>
+              <a:t>no relationship between P/A ratio and lizard presence</a:t>
+            </a:r>
+          </a:p>
+          <a:p>
+            <a:pPr lvl="0"/>
             <a:r>
               <a:rPr/>
               <a:t>There are two common ways to test this hypothesis:</a:t>
@@ -8781,7 +8407,7 @@
 </p:sld>
 </file>
 
-<file path=ppt/slides/slide25.xml><?xml version="1.0" encoding="utf-8"?>
+<file path=ppt/slides/slide26.xml><?xml version="1.0" encoding="utf-8"?>
 <p:sld xmlns:a="http://schemas.openxmlformats.org/drawingml/2006/main" xmlns:r="http://schemas.openxmlformats.org/officeDocument/2006/relationships" xmlns:p="http://schemas.openxmlformats.org/presentationml/2006/main">
   <p:cSld>
     <p:spTree>
@@ -8860,7 +8486,7 @@
             </a:pPr>
             <a:r>
               <a:rPr/>
-              <a:t>The odds ratio represents how the odds of the event (e.g., lizard presence) change with a unit increase in the predictor.</a:t>
+              <a:t>Odds ratio represents how odds of event (e.g., lizard presence) change with unit increase in predictor</a:t>
             </a:r>
           </a:p>
           <a:p>
@@ -8874,42 +8500,42 @@
             <a:pPr lvl="0"/>
             <a:r>
               <a:rPr/>
-              <a:t>If odds ratio &gt; 1: Increasing the predictor increases the odds of event</a:t>
+              <a:t>&gt; 1: Increasing predictor increases odds of event</a:t>
             </a:r>
           </a:p>
           <a:p>
             <a:pPr lvl="0"/>
             <a:r>
               <a:rPr/>
-              <a:t>If odds ratio &lt; 1: Increasing the predictor decreases the odds of event</a:t>
+              <a:t>&lt; 1: Increasing predictor decreases odds of event</a:t>
             </a:r>
           </a:p>
           <a:p>
             <a:pPr lvl="0"/>
             <a:r>
               <a:rPr/>
-              <a:t>If odds ratio = 1: No effect of predictor on odds of event</a:t>
+              <a:t>= 1: No effect of predictor on odds of event</a:t>
             </a:r>
           </a:p>
           <a:p>
             <a:pPr lvl="0"/>
             <a:r>
               <a:rPr/>
-              <a:t>For every one-unit increase in island’s Perimeter/Area Ratio - odds of finding a lizard present multiplied by 0.898</a:t>
+              <a:t>one-unit increase in island’s Perimeter/Area Ratio - odds of finding lizard present multiplied by 0.898</a:t>
             </a:r>
           </a:p>
           <a:p>
             <a:pPr lvl="0"/>
             <a:r>
               <a:rPr/>
-              <a:t>the odds decrease by 10.2% (which is 1 - 0.898) for every one-unit increase in the P/A ratio</a:t>
+              <a:t>odds decrease by 10.2% (1-0.898) for every one-unit increase P/A</a:t>
             </a:r>
           </a:p>
           <a:p>
             <a:pPr lvl="0"/>
             <a:r>
               <a:rPr/>
-              <a:t>entire interval is below 1.0, you can be confident the relationship is negative: more P/A ratio means lower odds of lizards</a:t>
+              <a:t>entire interval is below 1.0, relationship is negative: more P/A ratio means lower odds of lizards</a:t>
             </a:r>
           </a:p>
           <a:p>
@@ -9390,7 +9016,7 @@
 </p:sld>
 </file>
 
-<file path=ppt/slides/slide26.xml><?xml version="1.0" encoding="utf-8"?>
+<file path=ppt/slides/slide27.xml><?xml version="1.0" encoding="utf-8"?>
 <p:sld xmlns:a="http://schemas.openxmlformats.org/drawingml/2006/main" xmlns:r="http://schemas.openxmlformats.org/officeDocument/2006/relationships" xmlns:p="http://schemas.openxmlformats.org/presentationml/2006/main">
   <p:cSld>
     <p:spTree>
@@ -9500,7 +9126,7 @@
 </p:sld>
 </file>
 
-<file path=ppt/slides/slide27.xml><?xml version="1.0" encoding="utf-8"?>
+<file path=ppt/slides/slide28.xml><?xml version="1.0" encoding="utf-8"?>
 <p:sld xmlns:a="http://schemas.openxmlformats.org/drawingml/2006/main" xmlns:r="http://schemas.openxmlformats.org/officeDocument/2006/relationships" xmlns:p="http://schemas.openxmlformats.org/presentationml/2006/main">
   <p:cSld>
     <p:spTree>
@@ -9841,97 +9467,6 @@
 </p:sld>
 </file>
 
-<file path=ppt/slides/slide28.xml><?xml version="1.0" encoding="utf-8"?>
-<p:sld xmlns:a="http://schemas.openxmlformats.org/drawingml/2006/main" xmlns:r="http://schemas.openxmlformats.org/officeDocument/2006/relationships" xmlns:p="http://schemas.openxmlformats.org/presentationml/2006/main">
-  <p:cSld>
-    <p:spTree>
-      <p:nvGrpSpPr>
-        <p:cNvPr id="1" name=""/>
-        <p:cNvGrpSpPr/>
-        <p:nvPr/>
-      </p:nvGrpSpPr>
-      <p:grpSpPr>
-        <a:xfrm>
-          <a:off x="0" y="0"/>
-          <a:ext cx="0" cy="0"/>
-          <a:chOff x="0" y="0"/>
-          <a:chExt cx="0" cy="0"/>
-        </a:xfrm>
-      </p:grpSpPr>
-      <p:sp>
-        <p:nvSpPr>
-          <p:cNvPr id="2" name="Title 1"/>
-          <p:cNvSpPr>
-            <a:spLocks noGrp="1"/>
-          </p:cNvSpPr>
-          <p:nvPr>
-            <p:ph type="title"/>
-          </p:nvPr>
-        </p:nvSpPr>
-        <p:spPr>
-          <a:xfrm>
-            <a:off x="0" y="0"/>
-            <a:ext cx="9144000" cy="582780"/>
-          </a:xfrm>
-        </p:spPr>
-        <p:txBody>
-          <a:bodyPr/>
-          <a:lstStyle/>
-          <a:p>
-            <a:pPr lvl="0" indent="0" marL="0">
-              <a:buNone/>
-            </a:pPr>
-            <a:r>
-              <a:rPr/>
-              <a:t>Multiple Logistic Regression: Odds Ratios</a:t>
-            </a:r>
-          </a:p>
-        </p:txBody>
-      </p:sp>
-      <p:sp>
-        <p:nvSpPr>
-          <p:cNvPr id="3" name="Content Placeholder 2"/>
-          <p:cNvSpPr>
-            <a:spLocks noGrp="1"/>
-          </p:cNvSpPr>
-          <p:nvPr>
-            <p:ph idx="1"/>
-          </p:nvPr>
-        </p:nvSpPr>
-        <p:spPr/>
-        <p:txBody>
-          <a:bodyPr/>
-          <a:lstStyle/>
-          <a:p>
-            <a:pPr lvl="0" indent="0" marL="0">
-              <a:buNone/>
-            </a:pPr>
-            <a:r>
-              <a:rPr/>
-              <a:t>Let’s calculate odds ratios and confidence intervals for all predictors.</a:t>
-            </a:r>
-          </a:p>
-          <a:p>
-            <a:pPr lvl="0" indent="0">
-              <a:buNone/>
-            </a:pPr>
-            <a:r>
-              <a:rPr>
-                <a:latin typeface="Courier"/>
-              </a:rPr>
-              <a:t>##               Predictor OddsRatio               CI
-## distance       distance    1.0021 (0.9994, 1.0069)
-## age                 age    1.0712 (0.9721, 1.2577)
-## shrub_cover shrub_cover    1.2129 (1.0645, 1.7909)</a:t>
-            </a:r>
-          </a:p>
-        </p:txBody>
-      </p:sp>
-    </p:spTree>
-  </p:cSld>
-</p:sld>
-</file>
-
 <file path=ppt/slides/slide29.xml><?xml version="1.0" encoding="utf-8"?>
 <p:sld xmlns:a="http://schemas.openxmlformats.org/drawingml/2006/main" xmlns:r="http://schemas.openxmlformats.org/officeDocument/2006/relationships" xmlns:p="http://schemas.openxmlformats.org/presentationml/2006/main">
   <p:cSld>
@@ -9974,7 +9509,7 @@
             </a:pPr>
             <a:r>
               <a:rPr/>
-              <a:t>Visualizing Multiple Logistic Regression</a:t>
+              <a:t>Multiple Logistic Regression: Odds Ratios</a:t>
             </a:r>
           </a:p>
         </p:txBody>
@@ -9999,22 +9534,22 @@
             </a:pPr>
             <a:r>
               <a:rPr/>
-              <a:t>For multiple predictors, we can visualize the effect of each predictor while holding others constant at their mean or median values.</a:t>
-            </a:r>
-          </a:p>
-          <a:p>
-            <a:pPr lvl="0" indent="0" marL="0">
+              <a:t>Let’s calculate odds ratios and confidence intervals for all predictors.</a:t>
+            </a:r>
+          </a:p>
+          <a:p>
+            <a:pPr lvl="0" indent="0">
               <a:buNone/>
             </a:pPr>
             <a:r>
-              <a:rPr/>
-              <a:t>This visualization shows the effect of each predictor on the probability of rodent presence, while holding the other predictors constant at their mean values.</a:t>
-            </a:r>
-          </a:p>
-          <a:p>
-            <a:pPr lvl="0" indent="0" marL="0">
-              <a:buNone/>
-            </a:pPr>
+              <a:rPr>
+                <a:latin typeface="Courier"/>
+              </a:rPr>
+              <a:t>##               Predictor OddsRatio               CI
+## distance       distance    1.0021 (0.9994, 1.0069)
+## age                 age    1.0712 (0.9721, 1.2577)
+## shrub_cover shrub_cover    1.2129 (1.0645, 1.7909)</a:t>
+            </a:r>
           </a:p>
         </p:txBody>
       </p:sp>
@@ -10203,6 +9738,97 @@
         <p:spPr>
           <a:xfrm>
             <a:off x="0" y="0"/>
+            <a:ext cx="9144000" cy="582780"/>
+          </a:xfrm>
+        </p:spPr>
+        <p:txBody>
+          <a:bodyPr/>
+          <a:lstStyle/>
+          <a:p>
+            <a:pPr lvl="0" indent="0" marL="0">
+              <a:buNone/>
+            </a:pPr>
+            <a:r>
+              <a:rPr/>
+              <a:t>Visualizing Multiple Logistic Regression</a:t>
+            </a:r>
+          </a:p>
+        </p:txBody>
+      </p:sp>
+      <p:sp>
+        <p:nvSpPr>
+          <p:cNvPr id="3" name="Content Placeholder 2"/>
+          <p:cNvSpPr>
+            <a:spLocks noGrp="1"/>
+          </p:cNvSpPr>
+          <p:nvPr>
+            <p:ph idx="1"/>
+          </p:nvPr>
+        </p:nvSpPr>
+        <p:spPr/>
+        <p:txBody>
+          <a:bodyPr/>
+          <a:lstStyle/>
+          <a:p>
+            <a:pPr lvl="0" indent="0" marL="0">
+              <a:buNone/>
+            </a:pPr>
+            <a:r>
+              <a:rPr/>
+              <a:t>For multiple predictors, we can visualize the effect of each predictor while holding others constant at their mean or median values.</a:t>
+            </a:r>
+          </a:p>
+          <a:p>
+            <a:pPr lvl="0" indent="0" marL="0">
+              <a:buNone/>
+            </a:pPr>
+            <a:r>
+              <a:rPr/>
+              <a:t>This visualization shows the effect of each predictor on the probability of rodent presence, while holding the other predictors constant at their mean values.</a:t>
+            </a:r>
+          </a:p>
+          <a:p>
+            <a:pPr lvl="0" indent="0" marL="0">
+              <a:buNone/>
+            </a:pPr>
+          </a:p>
+        </p:txBody>
+      </p:sp>
+    </p:spTree>
+  </p:cSld>
+</p:sld>
+</file>
+
+<file path=ppt/slides/slide31.xml><?xml version="1.0" encoding="utf-8"?>
+<p:sld xmlns:a="http://schemas.openxmlformats.org/drawingml/2006/main" xmlns:r="http://schemas.openxmlformats.org/officeDocument/2006/relationships" xmlns:p="http://schemas.openxmlformats.org/presentationml/2006/main">
+  <p:cSld>
+    <p:spTree>
+      <p:nvGrpSpPr>
+        <p:cNvPr id="1" name=""/>
+        <p:cNvGrpSpPr/>
+        <p:nvPr/>
+      </p:nvGrpSpPr>
+      <p:grpSpPr>
+        <a:xfrm>
+          <a:off x="0" y="0"/>
+          <a:ext cx="0" cy="0"/>
+          <a:chOff x="0" y="0"/>
+          <a:chExt cx="0" cy="0"/>
+        </a:xfrm>
+      </p:grpSpPr>
+      <p:sp>
+        <p:nvSpPr>
+          <p:cNvPr id="2" name="Title 1"/>
+          <p:cNvSpPr>
+            <a:spLocks noGrp="1"/>
+          </p:cNvSpPr>
+          <p:nvPr>
+            <p:ph type="title"/>
+          </p:nvPr>
+        </p:nvSpPr>
+        <p:spPr>
+          <a:xfrm>
+            <a:off x="0" y="0"/>
             <a:ext cx="9144000" cy="602780"/>
           </a:xfrm>
           <a:solidFill>
@@ -10288,7 +9914,7 @@
             </a:pPr>
             <a:r>
               <a:rPr/>
-              <a:t>Let’s check the diagnostics for our multiple logistic regression model:</a:t>
+              <a:t>diagnostics for our multiple logistic regression model:</a:t>
             </a:r>
           </a:p>
         </p:txBody>
@@ -10328,181 +9954,6 @@
 </p:sld>
 </file>
 
-<file path=ppt/slides/slide31.xml><?xml version="1.0" encoding="utf-8"?>
-<p:sld xmlns:a="http://schemas.openxmlformats.org/drawingml/2006/main" xmlns:r="http://schemas.openxmlformats.org/officeDocument/2006/relationships" xmlns:p="http://schemas.openxmlformats.org/presentationml/2006/main">
-  <p:cSld>
-    <p:spTree>
-      <p:nvGrpSpPr>
-        <p:cNvPr id="1" name=""/>
-        <p:cNvGrpSpPr/>
-        <p:nvPr/>
-      </p:nvGrpSpPr>
-      <p:grpSpPr>
-        <a:xfrm>
-          <a:off x="0" y="0"/>
-          <a:ext cx="0" cy="0"/>
-          <a:chOff x="0" y="0"/>
-          <a:chExt cx="0" cy="0"/>
-        </a:xfrm>
-      </p:grpSpPr>
-      <p:sp>
-        <p:nvSpPr>
-          <p:cNvPr id="2" name="Title 1"/>
-          <p:cNvSpPr>
-            <a:spLocks noGrp="1"/>
-          </p:cNvSpPr>
-          <p:nvPr>
-            <p:ph type="title"/>
-          </p:nvPr>
-        </p:nvSpPr>
-        <p:spPr>
-          <a:xfrm>
-            <a:off x="0" y="0"/>
-            <a:ext cx="9144000" cy="602780"/>
-          </a:xfrm>
-          <a:solidFill>
-            <a:srgbClr val="70121D"/>
-          </a:solidFill>
-        </p:spPr>
-        <p:txBody>
-          <a:bodyPr/>
-          <a:lstStyle/>
-          <a:p>
-            <a:pPr lvl="0" indent="0" marL="0">
-              <a:buNone/>
-            </a:pPr>
-            <a:r>
-              <a:rPr/>
-              <a:t>Model Comparison and Selection</a:t>
-            </a:r>
-          </a:p>
-        </p:txBody>
-      </p:sp>
-      <p:sp>
-        <p:nvSpPr>
-          <p:cNvPr id="3" name="Content Placeholder 2"/>
-          <p:cNvSpPr>
-            <a:spLocks noGrp="1"/>
-          </p:cNvSpPr>
-          <p:nvPr>
-            <p:ph idx="1" sz="half"/>
-          </p:nvPr>
-        </p:nvSpPr>
-        <p:spPr/>
-        <p:txBody>
-          <a:bodyPr/>
-          <a:lstStyle/>
-          <a:p>
-            <a:pPr lvl="0" indent="0" marL="0">
-              <a:buNone/>
-            </a:pPr>
-            <a:r>
-              <a:rPr/>
-              <a:t>When working with multiple predictors, we often want to find the most parsimonious model. We can use:</a:t>
-            </a:r>
-          </a:p>
-          <a:p>
-            <a:pPr lvl="0" indent="-342900" marL="342900">
-              <a:buAutoNum type="arabicPeriod"/>
-            </a:pPr>
-            <a:r>
-              <a:rPr/>
-              <a:t>Likelihood ratio tests for nested models</a:t>
-            </a:r>
-          </a:p>
-          <a:p>
-            <a:pPr lvl="0" indent="-342900" marL="342900">
-              <a:buAutoNum type="arabicPeriod"/>
-            </a:pPr>
-            <a:r>
-              <a:rPr/>
-              <a:t>Information criteria (AIC, BIC) for non-nested models</a:t>
-            </a:r>
-          </a:p>
-          <a:p>
-            <a:pPr lvl="0" indent="-342900" marL="342900">
-              <a:buAutoNum type="arabicPeriod"/>
-            </a:pPr>
-            <a:r>
-              <a:rPr/>
-              <a:t>Classification metrics like accuracy, sensitivity, and specificity</a:t>
-            </a:r>
-          </a:p>
-          <a:p>
-            <a:pPr lvl="0" indent="0" marL="0">
-              <a:buNone/>
-            </a:pPr>
-            <a:r>
-              <a:rPr/>
-              <a:t>Let’s compare models and calculate AIC values:</a:t>
-            </a:r>
-          </a:p>
-          <a:p>
-            <a:pPr lvl="0" indent="0">
-              <a:buNone/>
-            </a:pPr>
-            <a:r>
-              <a:rPr>
-                <a:latin typeface="Courier"/>
-              </a:rPr>
-              <a:t>##                         Model Parameters   AIC   BIC Deviance
-## No Age                 No Age          3 17.05 20.71    11.05
-## Full                     Full          4 17.27 22.15     9.27
-## No Distance       No Distance          3 17.38 21.04    11.38
-## Intercept Only Intercept Only          1 29.55 30.77    27.55
-## No Shrub             No Shrub          3 32.73 36.39    26.73</a:t>
-            </a:r>
-          </a:p>
-        </p:txBody>
-      </p:sp>
-      <p:sp>
-        <p:nvSpPr>
-          <p:cNvPr id="4" name="Content Placeholder 3"/>
-          <p:cNvSpPr>
-            <a:spLocks noGrp="1"/>
-          </p:cNvSpPr>
-          <p:nvPr>
-            <p:ph idx="2" sz="half"/>
-          </p:nvPr>
-        </p:nvSpPr>
-        <p:spPr/>
-        <p:txBody>
-          <a:bodyPr/>
-          <a:lstStyle/>
-          <a:p>
-            <a:pPr lvl="0" indent="0" marL="0">
-              <a:buNone/>
-            </a:pPr>
-            <a:r>
-              <a:rPr/>
-              <a:t>We can also evaluate the predictive performance of our model:</a:t>
-            </a:r>
-          </a:p>
-          <a:p>
-            <a:pPr lvl="0" indent="0">
-              <a:buNone/>
-            </a:pPr>
-            <a:r>
-              <a:rPr>
-                <a:latin typeface="Courier"/>
-              </a:rPr>
-              <a:t>##          Actual
-## Predicted Absent Present
-##   Absent       5       2
-##   Present      1      17
-## 
-## Accuracy: 0.88
-## Sensitivity: 0.895
-## Specificity: 0.833</a:t>
-            </a:r>
-          </a:p>
-        </p:txBody>
-      </p:sp>
-    </p:spTree>
-  </p:cSld>
-</p:sld>
-</file>
-
 <file path=ppt/slides/slide32.xml><?xml version="1.0" encoding="utf-8"?>
 <p:sld xmlns:a="http://schemas.openxmlformats.org/drawingml/2006/main" xmlns:r="http://schemas.openxmlformats.org/officeDocument/2006/relationships" xmlns:p="http://schemas.openxmlformats.org/presentationml/2006/main">
   <p:cSld>
@@ -10533,8 +9984,11 @@
         <p:spPr>
           <a:xfrm>
             <a:off x="0" y="0"/>
-            <a:ext cx="9144000" cy="582780"/>
+            <a:ext cx="9144000" cy="602780"/>
           </a:xfrm>
+          <a:solidFill>
+            <a:srgbClr val="70121D"/>
+          </a:solidFill>
         </p:spPr>
         <p:txBody>
           <a:bodyPr/>
@@ -10545,7 +9999,7 @@
             </a:pPr>
             <a:r>
               <a:rPr/>
-              <a:t>Publication-Quality Figure</a:t>
+              <a:t>Model Comparison and Selection</a:t>
             </a:r>
           </a:p>
         </p:txBody>
@@ -10557,7 +10011,7 @@
             <a:spLocks noGrp="1"/>
           </p:cNvSpPr>
           <p:nvPr>
-            <p:ph idx="1"/>
+            <p:ph idx="1" sz="half"/>
           </p:nvPr>
         </p:nvSpPr>
         <p:spPr/>
@@ -10570,13 +10024,76 @@
             </a:pPr>
             <a:r>
               <a:rPr/>
-              <a:t>Let’s create a publication-quality figure for our multiple logistic regression model and show how we would write up the results for a scientific publication.</a:t>
+              <a:t>When working with multiple predictors, want to find most parsimonious model. use: - Likelihood ratio tests for nested models - Information criteria (AIC, BIC) for non-nested models - Classification metrics like accuracy, sensitivity, and specificity</a:t>
             </a:r>
           </a:p>
           <a:p>
             <a:pPr lvl="0" indent="0" marL="0">
               <a:buNone/>
             </a:pPr>
+            <a:r>
+              <a:rPr/>
+              <a:t>Compare models and AIC values:</a:t>
+            </a:r>
+          </a:p>
+          <a:p>
+            <a:pPr lvl="0" indent="0">
+              <a:buNone/>
+            </a:pPr>
+            <a:r>
+              <a:rPr>
+                <a:latin typeface="Courier"/>
+              </a:rPr>
+              <a:t>##                         Model Parameters   AIC   BIC Deviance
+## No Age                 No Age          3 17.05 20.71    11.05
+## Full                     Full          4 17.27 22.15     9.27
+## No Distance       No Distance          3 17.38 21.04    11.38
+## Intercept Only Intercept Only          1 29.55 30.77    27.55
+## No Shrub             No Shrub          3 32.73 36.39    26.73</a:t>
+            </a:r>
+          </a:p>
+        </p:txBody>
+      </p:sp>
+      <p:sp>
+        <p:nvSpPr>
+          <p:cNvPr id="4" name="Content Placeholder 3"/>
+          <p:cNvSpPr>
+            <a:spLocks noGrp="1"/>
+          </p:cNvSpPr>
+          <p:nvPr>
+            <p:ph idx="2" sz="half"/>
+          </p:nvPr>
+        </p:nvSpPr>
+        <p:spPr/>
+        <p:txBody>
+          <a:bodyPr/>
+          <a:lstStyle/>
+          <a:p>
+            <a:pPr lvl="0" indent="0" marL="0">
+              <a:buNone/>
+            </a:pPr>
+            <a:r>
+              <a:rPr/>
+              <a:t>Evaluate predictive performance of our model:</a:t>
+            </a:r>
+          </a:p>
+          <a:p>
+            <a:pPr lvl="0" indent="0">
+              <a:buNone/>
+            </a:pPr>
+            <a:r>
+              <a:rPr>
+                <a:latin typeface="Courier"/>
+              </a:rPr>
+              <a:t>##          Actual
+## Predicted Absent Present
+##   Absent       5       2
+##   Present      1      17
+## 
+## Accuracy: 0.88
+## Sensitivity: 0.895
+## Specificity: 0.833</a:t>
+            </a:r>
           </a:p>
         </p:txBody>
       </p:sp>
@@ -10627,7 +10144,7 @@
             </a:pPr>
             <a:r>
               <a:rPr/>
-              <a:t>Scientific Write-Up Example</a:t>
+              <a:t>Publication-Quality Figure</a:t>
             </a:r>
           </a:p>
         </p:txBody>
@@ -10647,49 +10164,18 @@
           <a:bodyPr/>
           <a:lstStyle/>
           <a:p>
-            <a:pPr lvl="0" indent="0" marL="1270000">
+            <a:pPr lvl="0" indent="0" marL="0">
               <a:buNone/>
             </a:pPr>
             <a:r>
-              <a:rPr sz="2000" b="1"/>
-              <a:t>Scientific Write-Up Example</a:t>
-            </a:r>
-          </a:p>
-          <a:p>
-            <a:pPr lvl="0" indent="0" marL="1270000">
+              <a:rPr/>
+              <a:t>Let’s create a publication-quality figure for our multiple logistic regression model and show how we would write up the results for a scientific publication.</a:t>
+            </a:r>
+          </a:p>
+          <a:p>
+            <a:pPr lvl="0" indent="0" marL="0">
               <a:buNone/>
             </a:pPr>
-            <a:r>
-              <a:rPr sz="2000" b="1"/>
-              <a:t>Results</a:t>
-            </a:r>
-          </a:p>
-          <a:p>
-            <a:pPr lvl="0" indent="0" marL="1270000">
-              <a:buNone/>
-            </a:pPr>
-            <a:r>
-              <a:rPr sz="2000"/>
-              <a:t>The presence of native rodents in canyon fragments was modeled using multiple logistic regression with three predictors: distance to nearest source canyon, years since isolation, and percentage of shrub cover. The model was statistically significant (χ² = 12.63, df = 3, p = 0.005) and explained 38.7% of the variation in rodent presence (McFadden’s R² = 0.387).</a:t>
-            </a:r>
-          </a:p>
-          <a:p>
-            <a:pPr lvl="0" indent="0" marL="1270000">
-              <a:buNone/>
-            </a:pPr>
-            <a:r>
-              <a:rPr sz="2000"/>
-              <a:t>Among the predictors, only shrub cover had a statistically significant effect on rodent presence (β = 0.091, SE = 0.041, p = 0.026). The odds ratio for shrub cover was 1.095 (95% CI: 1.011-1.186), indicating that for each percentage increase in shrub cover, the odds of rodent presence increased by approximately 9.5%. Neither distance to source canyon (β = 0.0002, p = 0.690) nor years since isolation (β = 0.022, p = 0.566) showed significant relationships with rodent presence.</a:t>
-            </a:r>
-          </a:p>
-          <a:p>
-            <a:pPr lvl="0" indent="0" marL="1270000">
-              <a:buNone/>
-            </a:pPr>
-            <a:r>
-              <a:rPr sz="2000"/>
-              <a:t>The model correctly classified 76% of the fragments, with a sensitivity of 0.77 and a specificity of 0.75. Diagnostics indicated no significant issues with model fit (Hosmer-Lemeshow χ² = 7.31, df = 8, p = 0.504).</a:t>
-            </a:r>
           </a:p>
         </p:txBody>
       </p:sp>
@@ -10774,7 +10260,7 @@
             </a:pPr>
             <a:r>
               <a:rPr sz="2000" b="1"/>
-              <a:t>Discussion</a:t>
+              <a:t>Results</a:t>
             </a:r>
           </a:p>
           <a:p>
@@ -10783,7 +10269,25 @@
             </a:pPr>
             <a:r>
               <a:rPr sz="2000"/>
-              <a:t>Our findings suggest that vegetation structure, as measured by shrub cover, plays a crucial role in determining the presence of native rodents in canyon fragments. The positive relationship between shrub cover and rodent occurrence likely reflects the importance of vegetation for providing food resources, shelter from predators, and suitable microhabitat conditions. Contrary to our expectations, isolation metrics (distance to source canyon and years since isolation) did not significantly predict rodent presence, suggesting that local habitat quality may be more important than landscape connectivity for these species.</a:t>
+              <a:t>The presence of native rodents in canyon fragments was modeled using multiple logistic regression with three predictors: distance to nearest source canyon, years since isolation, and percentage of shrub cover. The model was statistically significant (χ² = 12.63, df = 3, p = 0.005) and explained 38.7% of the variation in rodent presence (McFadden’s R² = 0.387).</a:t>
+            </a:r>
+          </a:p>
+          <a:p>
+            <a:pPr lvl="0" indent="0" marL="1270000">
+              <a:buNone/>
+            </a:pPr>
+            <a:r>
+              <a:rPr sz="2000"/>
+              <a:t>Among the predictors, only shrub cover had a statistically significant effect on rodent presence (β = 0.091, SE = 0.041, p = 0.026). The odds ratio for shrub cover was 1.095 (95% CI: 1.011-1.186), indicating that for each percentage increase in shrub cover, the odds of rodent presence increased by approximately 9.5%. Neither distance to source canyon (β = 0.0002, p = 0.690) nor years since isolation (β = 0.022, p = 0.566) showed significant relationships with rodent presence.</a:t>
+            </a:r>
+          </a:p>
+          <a:p>
+            <a:pPr lvl="0" indent="0" marL="1270000">
+              <a:buNone/>
+            </a:pPr>
+            <a:r>
+              <a:rPr sz="2000"/>
+              <a:t>The model correctly classified 76% of the fragments, with a sensitivity of 0.77 and a specificity of 0.75. Diagnostics indicated no significant issues with model fit (Hosmer-Lemeshow χ² = 7.31, df = 8, p = 0.504).</a:t>
             </a:r>
           </a:p>
         </p:txBody>
@@ -10835,7 +10339,7 @@
             </a:pPr>
             <a:r>
               <a:rPr/>
-              <a:t>Relationship Between GLMs and ANOVAs</a:t>
+              <a:t>Scientific Write-Up Example</a:t>
             </a:r>
           </a:p>
         </p:txBody>
@@ -10855,63 +10359,30 @@
           <a:bodyPr/>
           <a:lstStyle/>
           <a:p>
-            <a:pPr lvl="0" indent="0" marL="0">
-              <a:spcBef>
-                <a:spcPts val="3000"/>
-              </a:spcBef>
+            <a:pPr lvl="0" indent="0" marL="1270000">
               <a:buNone/>
             </a:pPr>
             <a:r>
-              <a:rPr b="1"/>
-              <a:t>GLMs and ANOVAs: The Connection</a:t>
-            </a:r>
-          </a:p>
-          <a:p>
-            <a:pPr lvl="0" indent="0" marL="0">
+              <a:rPr sz="2000" b="1"/>
+              <a:t>Scientific Write-Up Example</a:t>
+            </a:r>
+          </a:p>
+          <a:p>
+            <a:pPr lvl="0" indent="0" marL="1270000">
               <a:buNone/>
             </a:pPr>
             <a:r>
-              <a:rPr/>
-              <a:t>General linear models (including ANOVAs and standard regression) are special cases of Generalized Linear Models where:</a:t>
-            </a:r>
-          </a:p>
-          <a:p>
-            <a:pPr lvl="0" indent="-342900" marL="342900">
-              <a:buAutoNum type="arabicPeriod"/>
+              <a:rPr sz="2000" b="1"/>
+              <a:t>Discussion</a:t>
+            </a:r>
+          </a:p>
+          <a:p>
+            <a:pPr lvl="0" indent="0" marL="1270000">
+              <a:buNone/>
             </a:pPr>
             <a:r>
-              <a:rPr/>
-              <a:t>The response variable follows a normal distribution</a:t>
-            </a:r>
-          </a:p>
-          <a:p>
-            <a:pPr lvl="0" indent="-342900" marL="342900">
-              <a:buAutoNum type="arabicPeriod"/>
-            </a:pPr>
-            <a:r>
-              <a:rPr/>
-              <a:t>The link function is the identity function</a:t>
-            </a:r>
-          </a:p>
-          <a:p>
-            <a:pPr lvl="0"/>
-            <a:r>
-              <a:rPr/>
-              <a:t>Therefore, a one-way ANOVA is equivalent to:</a:t>
-            </a:r>
-          </a:p>
-          <a:p>
-            <a:pPr lvl="1"/>
-            <a:r>
-              <a:rPr/>
-              <a:t>A linear regression with a categorical predictor</a:t>
-            </a:r>
-          </a:p>
-          <a:p>
-            <a:pPr lvl="1"/>
-            <a:r>
-              <a:rPr/>
-              <a:t>A Gaussian GLM with an identity link and a categorical predictor</a:t>
+              <a:rPr sz="2000"/>
+              <a:t>Our findings suggest that vegetation structure, as measured by shrub cover, plays a crucial role in determining the presence of native rodents in canyon fragments. The positive relationship between shrub cover and rodent occurrence likely reflects the importance of vegetation for providing food resources, shelter from predators, and suitable microhabitat conditions. Contrary to our expectations, isolation metrics (distance to source canyon and years since isolation) did not significantly predict rodent presence, suggesting that local habitat quality may be more important than landscape connectivity for these species.</a:t>
             </a:r>
           </a:p>
         </p:txBody>
@@ -10963,7 +10434,7 @@
             </a:pPr>
             <a:r>
               <a:rPr/>
-              <a:t>Demonstrating ANOVA-GLM Equivalence</a:t>
+              <a:t>Relationship Between GLMs and ANOVAs</a:t>
             </a:r>
           </a:p>
         </p:txBody>
@@ -10984,17 +10455,63 @@
           <a:lstStyle/>
           <a:p>
             <a:pPr lvl="0" indent="0" marL="0">
+              <a:spcBef>
+                <a:spcPts val="3000"/>
+              </a:spcBef>
               <a:buNone/>
             </a:pPr>
             <a:r>
-              <a:rPr/>
-              <a:t>Let’s demonstrate this equivalence:</a:t>
+              <a:rPr b="1"/>
+              <a:t>GLMs and ANOVAs: The Connection</a:t>
             </a:r>
           </a:p>
           <a:p>
             <a:pPr lvl="0" indent="0" marL="0">
               <a:buNone/>
             </a:pPr>
+            <a:r>
+              <a:rPr/>
+              <a:t>General linear models (including ANOVAs and standard regression) are special cases of Generalized Linear Models where:</a:t>
+            </a:r>
+          </a:p>
+          <a:p>
+            <a:pPr lvl="0" indent="-342900" marL="342900">
+              <a:buAutoNum type="arabicPeriod"/>
+            </a:pPr>
+            <a:r>
+              <a:rPr/>
+              <a:t>The response variable follows a normal distribution</a:t>
+            </a:r>
+          </a:p>
+          <a:p>
+            <a:pPr lvl="0" indent="-342900" marL="342900">
+              <a:buAutoNum type="arabicPeriod"/>
+            </a:pPr>
+            <a:r>
+              <a:rPr/>
+              <a:t>The link function is the identity function</a:t>
+            </a:r>
+          </a:p>
+          <a:p>
+            <a:pPr lvl="0"/>
+            <a:r>
+              <a:rPr/>
+              <a:t>Therefore, a one-way ANOVA is equivalent to:</a:t>
+            </a:r>
+          </a:p>
+          <a:p>
+            <a:pPr lvl="1"/>
+            <a:r>
+              <a:rPr/>
+              <a:t>A linear regression with a categorical predictor</a:t>
+            </a:r>
+          </a:p>
+          <a:p>
+            <a:pPr lvl="1"/>
+            <a:r>
+              <a:rPr/>
+              <a:t>A Gaussian GLM with an identity link and a categorical predictor</a:t>
+            </a:r>
           </a:p>
         </p:txBody>
       </p:sp>
@@ -11032,6 +10549,88 @@
         </p:nvSpPr>
         <p:spPr>
           <a:xfrm>
+            <a:off x="0" y="0"/>
+            <a:ext cx="9144000" cy="582780"/>
+          </a:xfrm>
+        </p:spPr>
+        <p:txBody>
+          <a:bodyPr/>
+          <a:lstStyle/>
+          <a:p>
+            <a:pPr lvl="0" indent="0" marL="0">
+              <a:buNone/>
+            </a:pPr>
+            <a:r>
+              <a:rPr/>
+              <a:t>Demonstrating ANOVA-GLM Equivalence</a:t>
+            </a:r>
+          </a:p>
+        </p:txBody>
+      </p:sp>
+      <p:sp>
+        <p:nvSpPr>
+          <p:cNvPr id="3" name="Content Placeholder 2"/>
+          <p:cNvSpPr>
+            <a:spLocks noGrp="1"/>
+          </p:cNvSpPr>
+          <p:nvPr>
+            <p:ph idx="1"/>
+          </p:nvPr>
+        </p:nvSpPr>
+        <p:spPr/>
+        <p:txBody>
+          <a:bodyPr/>
+          <a:lstStyle/>
+          <a:p>
+            <a:pPr lvl="0" indent="0" marL="0">
+              <a:buNone/>
+            </a:pPr>
+            <a:r>
+              <a:rPr/>
+              <a:t>Let’s demonstrate this equivalence:</a:t>
+            </a:r>
+          </a:p>
+          <a:p>
+            <a:pPr lvl="0" indent="0" marL="0">
+              <a:buNone/>
+            </a:pPr>
+          </a:p>
+        </p:txBody>
+      </p:sp>
+    </p:spTree>
+  </p:cSld>
+</p:sld>
+</file>
+
+<file path=ppt/slides/slide38.xml><?xml version="1.0" encoding="utf-8"?>
+<p:sld xmlns:a="http://schemas.openxmlformats.org/drawingml/2006/main" xmlns:r="http://schemas.openxmlformats.org/officeDocument/2006/relationships" xmlns:p="http://schemas.openxmlformats.org/presentationml/2006/main">
+  <p:cSld>
+    <p:spTree>
+      <p:nvGrpSpPr>
+        <p:cNvPr id="1" name=""/>
+        <p:cNvGrpSpPr/>
+        <p:nvPr/>
+      </p:nvGrpSpPr>
+      <p:grpSpPr>
+        <a:xfrm>
+          <a:off x="0" y="0"/>
+          <a:ext cx="0" cy="0"/>
+          <a:chOff x="0" y="0"/>
+          <a:chExt cx="0" cy="0"/>
+        </a:xfrm>
+      </p:grpSpPr>
+      <p:sp>
+        <p:nvSpPr>
+          <p:cNvPr id="2" name="Title 1"/>
+          <p:cNvSpPr>
+            <a:spLocks noGrp="1"/>
+          </p:cNvSpPr>
+          <p:nvPr>
+            <p:ph type="title"/>
+          </p:nvPr>
+        </p:nvSpPr>
+        <p:spPr>
+          <a:xfrm>
             <a:off x="139485" y="78119"/>
             <a:ext cx="8229600" cy="607682"/>
           </a:xfrm>
@@ -11184,7 +10783,7 @@
             </a:pPr>
             <a:r>
               <a:rPr/>
-              <a:t>The following R code checks some common diagnostics for our logistic model:</a:t>
+              <a:t>R code checks common diagnostics for logistic model:</a:t>
             </a:r>
           </a:p>
         </p:txBody>
@@ -11224,170 +10823,6 @@
 </p:sld>
 </file>
 
-<file path=ppt/slides/slide38.xml><?xml version="1.0" encoding="utf-8"?>
-<p:sld xmlns:a="http://schemas.openxmlformats.org/drawingml/2006/main" xmlns:r="http://schemas.openxmlformats.org/officeDocument/2006/relationships" xmlns:p="http://schemas.openxmlformats.org/presentationml/2006/main">
-  <p:cSld>
-    <p:spTree>
-      <p:nvGrpSpPr>
-        <p:cNvPr id="1" name=""/>
-        <p:cNvGrpSpPr/>
-        <p:nvPr/>
-      </p:nvGrpSpPr>
-      <p:grpSpPr>
-        <a:xfrm>
-          <a:off x="0" y="0"/>
-          <a:ext cx="0" cy="0"/>
-          <a:chOff x="0" y="0"/>
-          <a:chExt cx="0" cy="0"/>
-        </a:xfrm>
-      </p:grpSpPr>
-      <p:sp>
-        <p:nvSpPr>
-          <p:cNvPr id="2" name="Title 1"/>
-          <p:cNvSpPr>
-            <a:spLocks noGrp="1"/>
-          </p:cNvSpPr>
-          <p:nvPr>
-            <p:ph type="title"/>
-          </p:nvPr>
-        </p:nvSpPr>
-        <p:spPr>
-          <a:xfrm>
-            <a:off x="0" y="0"/>
-            <a:ext cx="9144000" cy="582780"/>
-          </a:xfrm>
-        </p:spPr>
-        <p:txBody>
-          <a:bodyPr/>
-          <a:lstStyle/>
-          <a:p>
-            <a:pPr lvl="0" indent="0" marL="0">
-              <a:buNone/>
-            </a:pPr>
-            <a:r>
-              <a:rPr/>
-              <a:t>Summary and Conclusions</a:t>
-            </a:r>
-          </a:p>
-        </p:txBody>
-      </p:sp>
-      <p:sp>
-        <p:nvSpPr>
-          <p:cNvPr id="3" name="Content Placeholder 2"/>
-          <p:cNvSpPr>
-            <a:spLocks noGrp="1"/>
-          </p:cNvSpPr>
-          <p:nvPr>
-            <p:ph idx="1"/>
-          </p:nvPr>
-        </p:nvSpPr>
-        <p:spPr/>
-        <p:txBody>
-          <a:bodyPr/>
-          <a:lstStyle/>
-          <a:p>
-            <a:pPr lvl="0" indent="0" marL="0">
-              <a:buNone/>
-            </a:pPr>
-            <a:r>
-              <a:rPr/>
-              <a:t>Generalized Linear Models (GLMs) provide a powerful and flexible framework for analyzing a wide range of data types in biology:</a:t>
-            </a:r>
-          </a:p>
-          <a:p>
-            <a:pPr lvl="0" indent="-342900" marL="342900">
-              <a:buAutoNum type="arabicPeriod"/>
-            </a:pPr>
-            <a:r>
-              <a:rPr b="1"/>
-              <a:t>Gaussian GLMs</a:t>
-            </a:r>
-            <a:r>
-              <a:rPr/>
-              <a:t> with identity link function equivalent to standard linear models and ANOVAs</a:t>
-            </a:r>
-          </a:p>
-          <a:p>
-            <a:pPr lvl="0" indent="-342900" marL="342900">
-              <a:buAutoNum type="arabicPeriod"/>
-            </a:pPr>
-            <a:r>
-              <a:rPr b="1"/>
-              <a:t>Poisson GLMs</a:t>
-            </a:r>
-            <a:r>
-              <a:rPr/>
-              <a:t> with log link function are appropriate for count data, but be cautious of overdispersion.</a:t>
-            </a:r>
-          </a:p>
-          <a:p>
-            <a:pPr lvl="0" indent="-342900" marL="342900">
-              <a:buAutoNum type="arabicPeriod"/>
-            </a:pPr>
-            <a:r>
-              <a:rPr b="1"/>
-              <a:t>Negative Binomial</a:t>
-            </a:r>
-            <a:r>
-              <a:rPr/>
-              <a:t> works with overdispersed data</a:t>
-            </a:r>
-          </a:p>
-          <a:p>
-            <a:pPr lvl="0" indent="-342900" marL="342900">
-              <a:buAutoNum type="arabicPeriod"/>
-            </a:pPr>
-            <a:r>
-              <a:rPr b="1"/>
-              <a:t>Logistic GLMs</a:t>
-            </a:r>
-            <a:r>
-              <a:rPr/>
-              <a:t> with logit link function are useful for binary responses - probability of success or presence.</a:t>
-            </a:r>
-          </a:p>
-          <a:p>
-            <a:pPr lvl="0"/>
-            <a:r>
-              <a:rPr/>
-              <a:t>Key advantages of GLMs include:</a:t>
-            </a:r>
-          </a:p>
-          <a:p>
-            <a:pPr lvl="1"/>
-            <a:r>
-              <a:rPr/>
-              <a:t>Handle various response variables beyond normal distributions</a:t>
-            </a:r>
-          </a:p>
-          <a:p>
-            <a:pPr lvl="1"/>
-            <a:r>
-              <a:rPr/>
-              <a:t>Unified framework for linear modeling</a:t>
-            </a:r>
-          </a:p>
-          <a:p>
-            <a:pPr lvl="1"/>
-            <a:r>
-              <a:rPr/>
-              <a:t>Flexibility in specifying the link function to match the data structure</a:t>
-            </a:r>
-          </a:p>
-          <a:p>
-            <a:pPr lvl="1"/>
-            <a:r>
-              <a:rPr/>
-              <a:t>Interpretable parameters, though interpretation differs by model type</a:t>
-            </a:r>
-          </a:p>
-        </p:txBody>
-      </p:sp>
-    </p:spTree>
-  </p:cSld>
-</p:sld>
-</file>
-
 <file path=ppt/slides/slide39.xml><?xml version="1.0" encoding="utf-8"?>
 <p:sld xmlns:a="http://schemas.openxmlformats.org/drawingml/2006/main" xmlns:r="http://schemas.openxmlformats.org/officeDocument/2006/relationships" xmlns:p="http://schemas.openxmlformats.org/presentationml/2006/main">
   <p:cSld>
@@ -11455,7 +10890,7 @@
             </a:pPr>
             <a:r>
               <a:rPr/>
-              <a:t>When working with GLMs:</a:t>
+              <a:t>Generalized Linear Models (GLMs) provide a powerful and flexible framework for analyzing a wide range of data types in biology:</a:t>
             </a:r>
           </a:p>
           <a:p>
@@ -11463,8 +10898,12 @@
               <a:buAutoNum type="arabicPeriod"/>
             </a:pPr>
             <a:r>
-              <a:rPr/>
-              <a:t>Choose the appropriate distribution family based on your response variable</a:t>
+              <a:rPr b="1"/>
+              <a:t>Gaussian GLMs</a:t>
+            </a:r>
+            <a:r>
+              <a:rPr/>
+              <a:t> identity link function = linear model ANOVAs</a:t>
             </a:r>
           </a:p>
           <a:p>
@@ -11472,8 +10911,12 @@
               <a:buAutoNum type="arabicPeriod"/>
             </a:pPr>
             <a:r>
-              <a:rPr/>
-              <a:t>Verify model assumptions through diagnostic plots</a:t>
+              <a:rPr b="1"/>
+              <a:t>Poisson GLMs</a:t>
+            </a:r>
+            <a:r>
+              <a:rPr/>
+              <a:t> log link function appropriate for count data, cautious of overdispersion.</a:t>
             </a:r>
           </a:p>
           <a:p>
@@ -11481,8 +10924,12 @@
               <a:buAutoNum type="arabicPeriod"/>
             </a:pPr>
             <a:r>
-              <a:rPr/>
-              <a:t>Watch for overdispersion in count data</a:t>
+              <a:rPr b="1"/>
+              <a:t>Negative Binomial</a:t>
+            </a:r>
+            <a:r>
+              <a:rPr/>
+              <a:t> works with overdispersed data</a:t>
             </a:r>
           </a:p>
           <a:p>
@@ -11490,26 +10937,54 @@
               <a:buAutoNum type="arabicPeriod"/>
             </a:pPr>
             <a:r>
-              <a:rPr/>
-              <a:t>Use odds ratios to interpret logistic regression results</a:t>
-            </a:r>
-          </a:p>
-          <a:p>
-            <a:pPr lvl="0" indent="-342900" marL="342900">
-              <a:buAutoNum type="arabicPeriod"/>
-            </a:pPr>
-            <a:r>
-              <a:rPr/>
-              <a:t>Compare competing models using likelihood ratio tests and information criteria</a:t>
-            </a:r>
-          </a:p>
-          <a:p>
-            <a:pPr lvl="0" indent="0" marL="0">
-              <a:buNone/>
-            </a:pPr>
-            <a:r>
-              <a:rPr/>
-              <a:t>This framework allows biologists to appropriately model many types of data encountered in ecological, behavioral, and physiological research.</a:t>
+              <a:rPr b="1"/>
+              <a:t>Logistic GLMs</a:t>
+            </a:r>
+            <a:r>
+              <a:rPr/>
+              <a:t> with logit link function useful for binary responses</a:t>
+            </a:r>
+          </a:p>
+          <a:p>
+            <a:pPr lvl="1"/>
+            <a:r>
+              <a:rPr/>
+              <a:t>probability of success or presence.</a:t>
+            </a:r>
+          </a:p>
+          <a:p>
+            <a:pPr lvl="0"/>
+            <a:r>
+              <a:rPr/>
+              <a:t>Key advantages of GLMs include:</a:t>
+            </a:r>
+          </a:p>
+          <a:p>
+            <a:pPr lvl="1"/>
+            <a:r>
+              <a:rPr/>
+              <a:t>Handle various response variables beyond normal distributions</a:t>
+            </a:r>
+          </a:p>
+          <a:p>
+            <a:pPr lvl="1"/>
+            <a:r>
+              <a:rPr/>
+              <a:t>Unified framework for linear modeling</a:t>
+            </a:r>
+          </a:p>
+          <a:p>
+            <a:pPr lvl="1"/>
+            <a:r>
+              <a:rPr/>
+              <a:t>Flexibility in specifying the link function to match the data structure</a:t>
+            </a:r>
+          </a:p>
+          <a:p>
+            <a:pPr lvl="1"/>
+            <a:r>
+              <a:rPr/>
+              <a:t>Interpretable parameters, though interpretation differs by model type</a:t>
             </a:r>
           </a:p>
         </p:txBody>
@@ -11783,7 +11258,7 @@
             </a:pPr>
             <a:r>
               <a:rPr/>
-              <a:t>References</a:t>
+              <a:t>Summary and Conclusions</a:t>
             </a:r>
           </a:p>
         </p:txBody>
@@ -11808,7 +11283,52 @@
             </a:pPr>
             <a:r>
               <a:rPr/>
-              <a:t>Agresti, A. (1996). An Introduction to Categorical Data Analysis. Wiley, New York.</a:t>
+              <a:t>When working with GLMs:</a:t>
+            </a:r>
+          </a:p>
+          <a:p>
+            <a:pPr lvl="0" indent="-342900" marL="342900">
+              <a:buAutoNum type="arabicPeriod"/>
+            </a:pPr>
+            <a:r>
+              <a:rPr/>
+              <a:t>Choose the appropriate distribution family based on your response variable</a:t>
+            </a:r>
+          </a:p>
+          <a:p>
+            <a:pPr lvl="0" indent="-342900" marL="342900">
+              <a:buAutoNum type="arabicPeriod"/>
+            </a:pPr>
+            <a:r>
+              <a:rPr/>
+              <a:t>Verify model assumptions through diagnostic plots</a:t>
+            </a:r>
+          </a:p>
+          <a:p>
+            <a:pPr lvl="0" indent="-342900" marL="342900">
+              <a:buAutoNum type="arabicPeriod"/>
+            </a:pPr>
+            <a:r>
+              <a:rPr/>
+              <a:t>Watch for overdispersion in count data</a:t>
+            </a:r>
+          </a:p>
+          <a:p>
+            <a:pPr lvl="0" indent="-342900" marL="342900">
+              <a:buAutoNum type="arabicPeriod"/>
+            </a:pPr>
+            <a:r>
+              <a:rPr/>
+              <a:t>Use odds ratios to interpret logistic regression results</a:t>
+            </a:r>
+          </a:p>
+          <a:p>
+            <a:pPr lvl="0" indent="-342900" marL="342900">
+              <a:buAutoNum type="arabicPeriod"/>
+            </a:pPr>
+            <a:r>
+              <a:rPr/>
+              <a:t>Compare competing models using likelihood ratio tests and information criteria</a:t>
             </a:r>
           </a:p>
           <a:p>
@@ -11817,43 +11337,84 @@
             </a:pPr>
             <a:r>
               <a:rPr/>
-              <a:t>Bolger, D. T., Alberts, A. C., Sauvajot, R. M., Potenza, P., McCalvin, C., Tran, D., Mazzoni, S., &amp; Soulé, M. E. (1997). Response of rodents to habitat fragmentation in coastal southern California. Ecological Applications, 7(2), 552-563.</a:t>
-            </a:r>
-          </a:p>
+              <a:t>This framework allows biologists to appropriately model many types of data encountered in ecological, behavioral, and physiological research.</a:t>
+            </a:r>
+          </a:p>
+        </p:txBody>
+      </p:sp>
+    </p:spTree>
+  </p:cSld>
+</p:sld>
+</file>
+
+<file path=ppt/slides/slide41.xml><?xml version="1.0" encoding="utf-8"?>
+<p:sld xmlns:a="http://schemas.openxmlformats.org/drawingml/2006/main" xmlns:r="http://schemas.openxmlformats.org/officeDocument/2006/relationships" xmlns:p="http://schemas.openxmlformats.org/presentationml/2006/main">
+  <p:cSld>
+    <p:spTree>
+      <p:nvGrpSpPr>
+        <p:cNvPr id="1" name=""/>
+        <p:cNvGrpSpPr/>
+        <p:nvPr/>
+      </p:nvGrpSpPr>
+      <p:grpSpPr>
+        <a:xfrm>
+          <a:off x="0" y="0"/>
+          <a:ext cx="0" cy="0"/>
+          <a:chOff x="0" y="0"/>
+          <a:chExt cx="0" cy="0"/>
+        </a:xfrm>
+      </p:grpSpPr>
+      <p:sp>
+        <p:nvSpPr>
+          <p:cNvPr id="2" name="Title 1"/>
+          <p:cNvSpPr>
+            <a:spLocks noGrp="1"/>
+          </p:cNvSpPr>
+          <p:nvPr>
+            <p:ph type="title"/>
+          </p:nvPr>
+        </p:nvSpPr>
+        <p:spPr>
+          <a:xfrm>
+            <a:off x="0" y="0"/>
+            <a:ext cx="9144000" cy="582780"/>
+          </a:xfrm>
+        </p:spPr>
+        <p:txBody>
+          <a:bodyPr/>
+          <a:lstStyle/>
           <a:p>
             <a:pPr lvl="0" indent="0" marL="0">
               <a:buNone/>
             </a:pPr>
             <a:r>
               <a:rPr/>
-              <a:t>Christensen, R. (1997). Log-linear Models and Logistic Regression. Springer, New York.</a:t>
-            </a:r>
-          </a:p>
+              <a:t>References</a:t>
+            </a:r>
+          </a:p>
+        </p:txBody>
+      </p:sp>
+      <p:sp>
+        <p:nvSpPr>
+          <p:cNvPr id="3" name="Content Placeholder 2"/>
+          <p:cNvSpPr>
+            <a:spLocks noGrp="1"/>
+          </p:cNvSpPr>
+          <p:nvPr>
+            <p:ph idx="1"/>
+          </p:nvPr>
+        </p:nvSpPr>
+        <p:spPr/>
+        <p:txBody>
+          <a:bodyPr/>
+          <a:lstStyle/>
           <a:p>
             <a:pPr lvl="0" indent="0" marL="0">
               <a:buNone/>
             </a:pPr>
             <a:r>
               <a:rPr/>
-              <a:t>Hosmer, D. W., &amp; Lemeshow, S. (1989). Applied Logistic Regression. Wiley, New York.</a:t>
-            </a:r>
-          </a:p>
-          <a:p>
-            <a:pPr lvl="0" indent="0" marL="0">
-              <a:buNone/>
-            </a:pPr>
-            <a:r>
-              <a:rPr/>
-              <a:t>McCullagh, P., &amp; Nelder, J. A. (1989). Generalized Linear Models. Chapman and Hall, London.</a:t>
-            </a:r>
-          </a:p>
-          <a:p>
-            <a:pPr lvl="0" indent="0" marL="0">
-              <a:buNone/>
-            </a:pPr>
-            <a:r>
-              <a:rPr/>
-              <a:t>Polis, G. A., Hurd, S. D., Jackson, C. T., &amp; Piñero, F. S. (1998). Multifactor analysis of ecosystem patterns on islands in the Gulf of California. Ecological Monographs, 68, 490-502.</a:t>
+              <a:t>-Agresti, A. (1996). An Introduction to Categorical Data Analysis. Wiley, New York. Bolger, D. T., Alberts, A. C., Sauvajot, R. M., Potenza, P., McCalvin, C., Tran, D., Mazzoni, S., &amp; Soulé, M. E. (1997). Response of rodents to habitat fragmentation in coastal southern California. Ecological Applications, 7(2), 552-563. -Christensen, R. (1997). Log-linear Models and Logistic Regression. Springer, New York. -Hosmer, D. W., &amp; Lemeshow, S. (1989). Applied Logistic Regression. Wiley, New York. -McCullagh, P., &amp; Nelder, J. A. (1989). Generalized Linear Models. Chapman and Hall, London. -Polis, G. A., Hurd, S. D., Jackson, C. T., &amp; Piñero, F. S. (1998). Multifactor analysis of ecosystem patterns on islands in the Gulf of California. Ecological Monographs, 68, 490-502.</a:t>
             </a:r>
           </a:p>
         </p:txBody>
@@ -13773,7 +13334,7 @@
             </a:r>
           </a:p>
           <a:p>
-            <a:pPr lvl="0" indent="0">
+            <a:pPr lvl="1" indent="0">
               <a:buNone/>
             </a:pPr>
             <a:r>
@@ -13924,7 +13485,7 @@
             </a:pPr>
             <a:r>
               <a:rPr/>
-              <a:t>Let’s compare a standard linear model and a Gaussian GLM using the Galapagos dataset, modeling endemic species richness by island size category.</a:t>
+              <a:t>Let’s compare a standard linear model and a Gaussian GLM using the Galapagos dataset, modeling endemic Endemics richness by island size category.</a:t>
             </a:r>
           </a:p>
         </p:txBody>
@@ -14541,7 +14102,7 @@
             </a:pPr>
             <a:r>
               <a:rPr/>
-              <a:t>Let’s visualize endemic species by island size:</a:t>
+              <a:t>Let’s visualize endemic Endemics by island size:</a:t>
             </a:r>
           </a:p>
         </p:txBody>
@@ -14657,16 +14218,14 @@
                 </a:r>
               </a:p>
               <a:p>
-                <a:pPr lvl="0" indent="0" marL="0">
-                  <a:buNone/>
-                </a:pPr>
+                <a:pPr lvl="0"/>
                 <a:r>
                   <a:rPr/>
                   <a:t>Let’s compare a standard linear model and a Gaussian GLM using the Galapagos dataset, modeling endemic species richness by island size category.</a:t>
                 </a:r>
               </a:p>
               <a:p>
-                <a:pPr lvl="0"/>
+                <a:pPr lvl="1"/>
                 <a:r>
                   <a:rPr/>
                   <a:t>Fit a standard linear model - model_lm &lt;- lm(Endemics ~ size_category,</a:t>
@@ -14678,7 +14237,7 @@
                 </a:r>
               </a:p>
               <a:p>
-                <a:pPr lvl="0"/>
+                <a:pPr lvl="1"/>
                 <a:r>
                   <a:rPr/>
                   <a:t>Fit a Gaussian GLM</a:t>

--- a/docs/ecostats_lectures/lecture_14/14_01_lecture_powerpoint.pptx
+++ b/docs/ecostats_lectures/lecture_14/14_01_lecture_powerpoint.pptx
@@ -6196,7 +6196,7 @@
             <a:pPr lvl="1"/>
             <a:r>
               <a:rPr/>
-              <a:t>A 1% change in</a:t>
+              <a:t>A 1% change in x is a beta percent change in y…</a:t>
             </a:r>
           </a:p>
         </p:txBody>

--- a/docs/ecostats_lectures/lecture_14/14_01_lecture_powerpoint.pptx
+++ b/docs/ecostats_lectures/lecture_14/14_01_lecture_powerpoint.pptx
@@ -7505,7 +7505,7 @@
             </a:r>
             <a:r>
               <a:rPr/>
-              <a:t>) on islands in Gulf of California based on perimeter/area ratio. ::: {.panel column=“screen”}</a:t>
+              <a:t>) on islands in Gulf of California based on perimeter/area ratio.</a:t>
             </a:r>
           </a:p>
           <a:p>
@@ -7896,15 +7896,6 @@
                 <a:latin typeface="Courier"/>
               </a:rPr>
               <a:t>## Number of Fisher Scoring iterations: 6</a:t>
-            </a:r>
-          </a:p>
-          <a:p>
-            <a:pPr lvl="0" indent="0" marL="0">
-              <a:buNone/>
-            </a:pPr>
-            <a:r>
-              <a:rPr/>
-              <a:t>:::</a:t>
             </a:r>
           </a:p>
         </p:txBody>
